--- a/decks/05_9限_通報と現場保存.pptx
+++ b/decks/05_9限_通報と現場保存.pptx
@@ -15,9 +15,10 @@
     <p:sldId id="263" r:id="rId9"/>
     <p:sldId id="264" r:id="rId10"/>
     <p:sldId id="265" r:id="rId11"/>
+    <p:sldId id="266" r:id="rId12"/>
   </p:sldIdLst>
   <p:notesMasterIdLst>
-    <p:notesMasterId r:id="rId12"/>
+    <p:notesMasterId r:id="rId13"/>
   </p:notesMasterIdLst>
   <p:sldSz cx="12192000" cy="6858000"/>
   <p:notesSz cx="6858000" cy="12192000"/>
@@ -623,6 +624,94 @@
             <a:fld id="{F7021451-1387-4CA6-816F-3879F97B5CBC}" type="slidenum">
               <a:rPr lang="en-US"/>
               <a:t>10</a:t>
+            </a:fld>
+            <a:endParaRPr lang="en-US"/>
+          </a:p>
+        </p:txBody>
+      </p:sp>
+    </p:spTree>
+    <p:extLst>
+      <p:ext uri="{BB962C8B-B14F-4D97-AF65-F5344CB8AC3E}">
+        <p14:creationId xmlns:p14="http://schemas.microsoft.com/office/powerpoint/2010/main" val="1024086991"/>
+      </p:ext>
+    </p:extLst>
+  </p:cSld>
+  <p:clrMapOvr>
+    <a:masterClrMapping/>
+  </p:clrMapOvr>
+</p:notes>
+</file>
+
+<file path=ppt/notesSlides/notesSlide11.xml><?xml version="1.0" encoding="utf-8"?>
+<p:notes xmlns:a="http://schemas.openxmlformats.org/drawingml/2006/main" xmlns:r="http://schemas.openxmlformats.org/officeDocument/2006/relationships" xmlns:p="http://schemas.openxmlformats.org/presentationml/2006/main">
+  <p:cSld>
+    <p:spTree>
+      <p:nvGrpSpPr>
+        <p:cNvPr id="1" name=""/>
+        <p:cNvGrpSpPr/>
+        <p:nvPr/>
+      </p:nvGrpSpPr>
+      <p:grpSpPr>
+        <a:xfrm>
+          <a:off x="0" y="0"/>
+          <a:ext cx="0" cy="0"/>
+          <a:chOff x="0" y="0"/>
+          <a:chExt cx="0" cy="0"/>
+        </a:xfrm>
+      </p:grpSpPr>
+      <p:sp>
+        <p:nvSpPr>
+          <p:cNvPr id="2" name="Slide Image Placeholder 1"/>
+          <p:cNvSpPr>
+            <a:spLocks noGrp="1" noRot="1" noChangeAspect="1"/>
+          </p:cNvSpPr>
+          <p:nvPr>
+            <p:ph type="sldImg"/>
+          </p:nvPr>
+        </p:nvSpPr>
+        <p:spPr/>
+      </p:sp>
+      <p:sp>
+        <p:nvSpPr>
+          <p:cNvPr id="3" name="Notes Placeholder 2"/>
+          <p:cNvSpPr>
+            <a:spLocks noGrp="1"/>
+          </p:cNvSpPr>
+          <p:nvPr>
+            <p:ph type="body" idx="1"/>
+          </p:nvPr>
+        </p:nvSpPr>
+        <p:spPr/>
+        <p:txBody>
+          <a:bodyPr/>
+          <a:lstStyle/>
+          <a:p>
+            <a:r>
+              <a:rPr lang="en-US" dirty="0"/>
+              <a:t/>
+            </a:r>
+            <a:endParaRPr lang="en-US" dirty="0"/>
+          </a:p>
+        </p:txBody>
+      </p:sp>
+      <p:sp>
+        <p:nvSpPr>
+          <p:cNvPr id="4" name="Slide Number Placeholder 3"/>
+          <p:cNvSpPr>
+            <a:spLocks noGrp="1"/>
+          </p:cNvSpPr>
+          <p:nvPr>
+            <p:ph type="sldNum" sz="quarter" idx="10"/>
+          </p:nvPr>
+        </p:nvSpPr>
+        <p:spPr/>
+        <p:txBody>
+          <a:bodyPr/>
+          <a:lstStyle/>
+          <a:p>
+            <a:fld id="{F7021451-1387-4CA6-816F-3879F97B5CBC}" type="slidenum">
+              <a:rPr lang="en-US"/>
+              <a:t>11</a:t>
             </a:fld>
             <a:endParaRPr lang="en-US"/>
           </a:p>
@@ -1658,7 +1747,7 @@
     <p:bg>
       <p:bgPr>
         <a:solidFill>
-          <a:srgbClr val="0F2D52"/>
+          <a:srgbClr val="093259"/>
         </a:solidFill>
       </p:bgPr>
     </p:bg>
@@ -1698,9 +1787,33 @@
           <a:ln/>
         </p:spPr>
       </p:sp>
-      <p:sp>
-        <p:nvSpPr>
-          <p:cNvPr id="3" name="Text 1"/>
+      <p:pic>
+        <p:nvPicPr>
+          <p:cNvPr id="3" name="Image 0" descr="/home/user/Training-/assets/logo.png">    </p:cNvPr>
+          <p:cNvPicPr>
+            <a:picLocks noChangeAspect="1"/>
+          </p:cNvPicPr>
+          <p:nvPr/>
+        </p:nvPicPr>
+        <p:blipFill>
+          <a:blip r:embed="rId1"/>
+          <a:stretch>
+            <a:fillRect/>
+          </a:stretch>
+        </p:blipFill>
+        <p:spPr>
+          <a:xfrm>
+            <a:off x="10765231" y="332912"/>
+            <a:ext cx="786384" cy="742353"/>
+          </a:xfrm>
+          <a:prstGeom prst="rect">
+            <a:avLst/>
+          </a:prstGeom>
+        </p:spPr>
+      </p:pic>
+      <p:sp>
+        <p:nvSpPr>
+          <p:cNvPr id="4" name="Text 1"/>
           <p:cNvSpPr/>
           <p:nvPr/>
         </p:nvSpPr>
@@ -1725,7 +1838,7 @@
             <a:r>
               <a:rPr lang="en-US" sz="1300" b="1" dirty="0">
                 <a:solidFill>
-                  <a:srgbClr val="17AF98"/>
+                  <a:srgbClr val="12B198"/>
                 </a:solidFill>
                 <a:latin typeface="Yu Gothic" pitchFamily="34" charset="0"/>
                 <a:ea typeface="Yu Gothic" pitchFamily="34" charset="-122"/>
@@ -1756,7 +1869,7 @@
       </p:sp>
       <p:sp>
         <p:nvSpPr>
-          <p:cNvPr id="4" name="Text 2"/>
+          <p:cNvPr id="5" name="Text 2"/>
           <p:cNvSpPr/>
           <p:nvPr/>
         </p:nvSpPr>
@@ -1818,7 +1931,7 @@
       </p:sp>
       <p:sp>
         <p:nvSpPr>
-          <p:cNvPr id="5" name="Text 3"/>
+          <p:cNvPr id="6" name="Text 3"/>
           <p:cNvSpPr/>
           <p:nvPr/>
         </p:nvSpPr>
@@ -1857,7 +1970,7 @@
       </p:sp>
       <p:sp>
         <p:nvSpPr>
-          <p:cNvPr id="6" name="Shape 4"/>
+          <p:cNvPr id="7" name="Shape 4"/>
           <p:cNvSpPr/>
           <p:nvPr/>
         </p:nvSpPr>
@@ -1870,14 +1983,14 @@
             <a:avLst/>
           </a:prstGeom>
           <a:solidFill>
-            <a:srgbClr val="17AF98"/>
+            <a:srgbClr val="12B198"/>
           </a:solidFill>
           <a:ln/>
         </p:spPr>
       </p:sp>
       <p:sp>
         <p:nvSpPr>
-          <p:cNvPr id="7" name="Text 5"/>
+          <p:cNvPr id="8" name="Text 5"/>
           <p:cNvSpPr/>
           <p:nvPr/>
         </p:nvSpPr>
@@ -1963,9 +2076,33 @@
           <a:chExt cx="0" cy="0"/>
         </a:xfrm>
       </p:grpSpPr>
-      <p:sp>
-        <p:nvSpPr>
-          <p:cNvPr id="2" name="Text 0"/>
+      <p:pic>
+        <p:nvPicPr>
+          <p:cNvPr id="2" name="Image 0" descr="/home/user/Training-/assets/logo.png">    </p:cNvPr>
+          <p:cNvPicPr>
+            <a:picLocks noChangeAspect="1"/>
+          </p:cNvPicPr>
+          <p:nvPr/>
+        </p:nvPicPr>
+        <p:blipFill>
+          <a:blip r:embed="rId1"/>
+          <a:stretch>
+            <a:fillRect/>
+          </a:stretch>
+        </p:blipFill>
+        <p:spPr>
+          <a:xfrm>
+            <a:off x="10765231" y="332912"/>
+            <a:ext cx="786384" cy="742353"/>
+          </a:xfrm>
+          <a:prstGeom prst="rect">
+            <a:avLst/>
+          </a:prstGeom>
+        </p:spPr>
+      </p:pic>
+      <p:sp>
+        <p:nvSpPr>
+          <p:cNvPr id="3" name="Text 0"/>
           <p:cNvSpPr/>
           <p:nvPr/>
         </p:nvSpPr>
@@ -1993,13 +2130,13 @@
             <a:r>
               <a:rPr lang="en-US" sz="2700" b="1" dirty="0">
                 <a:solidFill>
-                  <a:srgbClr val="0F2D52"/>
+                  <a:srgbClr val="093259"/>
                 </a:solidFill>
                 <a:latin typeface="Yu Gothic" pitchFamily="34" charset="0"/>
                 <a:ea typeface="Yu Gothic" pitchFamily="34" charset="-122"/>
                 <a:cs typeface="Yu Gothic" pitchFamily="34" charset="-120"/>
               </a:rPr>
-              <a:t>TTX④ 執務フロアで従業員が倒れている</a:t>
+              <a:t>現場保存の5原則</a:t>
             </a:r>
             <a:endParaRPr lang="en-US" sz="2700" dirty="0"/>
           </a:p>
@@ -2013,13 +2150,13 @@
             <a:r>
               <a:rPr lang="en-US" sz="1250" i="1" dirty="0">
                 <a:solidFill>
-                  <a:srgbClr val="17AF98"/>
-                </a:solidFill>
-                <a:latin typeface="Calibri" pitchFamily="34" charset="0"/>
-                <a:ea typeface="Calibri" pitchFamily="34" charset="-122"/>
-                <a:cs typeface="Calibri" pitchFamily="34" charset="-120"/>
-              </a:rPr>
-              <a:t>TTX ④ — An Employee Is Down on the Office Floor</a:t>
+                  <a:srgbClr val="12B198"/>
+                </a:solidFill>
+                <a:latin typeface="Calibri" pitchFamily="34" charset="0"/>
+                <a:ea typeface="Calibri" pitchFamily="34" charset="-122"/>
+                <a:cs typeface="Calibri" pitchFamily="34" charset="-120"/>
+              </a:rPr>
+              <a:t>Five Principles of Scene Preservation</a:t>
             </a:r>
             <a:endParaRPr lang="en-US" sz="2700" dirty="0"/>
           </a:p>
@@ -2027,139 +2164,304 @@
       </p:sp>
       <p:sp>
         <p:nvSpPr>
-          <p:cNvPr id="3" name="Shape 1"/>
+          <p:cNvPr id="4" name="Shape 1"/>
           <p:cNvSpPr/>
           <p:nvPr/>
         </p:nvSpPr>
         <p:spPr>
           <a:xfrm>
             <a:off x="640080" y="1627632"/>
-            <a:ext cx="10911535" cy="1481328"/>
+            <a:ext cx="10911535" cy="804672"/>
           </a:xfrm>
           <a:prstGeom prst="roundRect">
             <a:avLst>
-              <a:gd name="adj" fmla="val 3086"/>
+              <a:gd name="adj" fmla="val 4545"/>
             </a:avLst>
           </a:prstGeom>
           <a:solidFill>
-            <a:srgbClr val="0F2D52"/>
+            <a:srgbClr val="EFF4F8"/>
           </a:solidFill>
           <a:ln/>
         </p:spPr>
       </p:sp>
       <p:sp>
         <p:nvSpPr>
-          <p:cNvPr id="4" name="Text 2"/>
-          <p:cNvSpPr/>
-          <p:nvPr/>
-        </p:nvSpPr>
-        <p:spPr>
-          <a:xfrm>
-            <a:off x="1024128" y="1810512"/>
-            <a:ext cx="10143439" cy="1115568"/>
-          </a:xfrm>
-          <a:prstGeom prst="rect">
-            <a:avLst/>
-          </a:prstGeom>
-          <a:noFill/>
-          <a:ln/>
-        </p:spPr>
-        <p:txBody>
-          <a:bodyPr wrap="square" lIns="0" tIns="0" rIns="0" bIns="0" rtlCol="0" anchor="t"/>
-          <a:lstStyle/>
-          <a:p>
-            <a:pPr indent="0" marL="0">
-              <a:lnSpc>
-                <a:spcPct val="96000"/>
-              </a:lnSpc>
-              <a:buNone/>
-            </a:pPr>
-            <a:r>
-              <a:rPr lang="en-US" sz="1050" b="1" dirty="0">
-                <a:solidFill>
-                  <a:srgbClr val="17AF98"/>
+          <p:cNvPr id="5" name="Shape 2"/>
+          <p:cNvSpPr/>
+          <p:nvPr/>
+        </p:nvSpPr>
+        <p:spPr>
+          <a:xfrm>
+            <a:off x="822960" y="1865376"/>
+            <a:ext cx="329184" cy="329184"/>
+          </a:xfrm>
+          <a:prstGeom prst="ellipse">
+            <a:avLst/>
+          </a:prstGeom>
+          <a:solidFill>
+            <a:srgbClr val="093259"/>
+          </a:solidFill>
+          <a:ln/>
+        </p:spPr>
+      </p:sp>
+      <p:sp>
+        <p:nvSpPr>
+          <p:cNvPr id="6" name="Text 3"/>
+          <p:cNvSpPr/>
+          <p:nvPr/>
+        </p:nvSpPr>
+        <p:spPr>
+          <a:xfrm>
+            <a:off x="822960" y="1865376"/>
+            <a:ext cx="329184" cy="329184"/>
+          </a:xfrm>
+          <a:prstGeom prst="rect">
+            <a:avLst/>
+          </a:prstGeom>
+          <a:noFill/>
+          <a:ln/>
+        </p:spPr>
+        <p:txBody>
+          <a:bodyPr wrap="square" lIns="0" tIns="0" rIns="0" bIns="0" rtlCol="0" anchor="ctr"/>
+          <a:lstStyle/>
+          <a:p>
+            <a:pPr algn="ctr" indent="0" marL="0">
+              <a:buNone/>
+            </a:pPr>
+            <a:r>
+              <a:rPr lang="en-US" sz="1100" b="1" dirty="0">
+                <a:solidFill>
+                  <a:srgbClr val="FFFFFF"/>
+                </a:solidFill>
+                <a:latin typeface="Calibri" pitchFamily="34" charset="0"/>
+                <a:ea typeface="Calibri" pitchFamily="34" charset="-122"/>
+                <a:cs typeface="Calibri" pitchFamily="34" charset="-120"/>
+              </a:rPr>
+              <a:t>1</a:t>
+            </a:r>
+            <a:endParaRPr lang="en-US" sz="1100" dirty="0"/>
+          </a:p>
+        </p:txBody>
+      </p:sp>
+      <p:sp>
+        <p:nvSpPr>
+          <p:cNvPr id="7" name="Text 4"/>
+          <p:cNvSpPr/>
+          <p:nvPr/>
+        </p:nvSpPr>
+        <p:spPr>
+          <a:xfrm>
+            <a:off x="1243584" y="1700784"/>
+            <a:ext cx="10070287" cy="658368"/>
+          </a:xfrm>
+          <a:prstGeom prst="rect">
+            <a:avLst/>
+          </a:prstGeom>
+          <a:noFill/>
+          <a:ln/>
+        </p:spPr>
+        <p:txBody>
+          <a:bodyPr wrap="square" lIns="0" tIns="0" rIns="0" bIns="0" rtlCol="0" anchor="ctr"/>
+          <a:lstStyle/>
+          <a:p>
+            <a:pPr indent="0" marL="0">
+              <a:lnSpc>
+                <a:spcPct val="90000"/>
+              </a:lnSpc>
+              <a:buNone/>
+            </a:pPr>
+            <a:r>
+              <a:rPr lang="en-US" sz="1150" b="1" dirty="0">
+                <a:solidFill>
+                  <a:srgbClr val="1B2733"/>
                 </a:solidFill>
                 <a:latin typeface="Yu Gothic" pitchFamily="34" charset="0"/>
                 <a:ea typeface="Yu Gothic" pitchFamily="34" charset="-122"/>
                 <a:cs typeface="Yu Gothic" pitchFamily="34" charset="-120"/>
               </a:rPr>
-              <a:t>状況付与  </a:t>
-            </a:r>
-            <a:pPr indent="0" marL="0">
-              <a:lnSpc>
-                <a:spcPct val="96000"/>
-              </a:lnSpc>
-              <a:buNone/>
-            </a:pPr>
-            <a:r>
-              <a:rPr lang="en-US" sz="900" dirty="0">
-                <a:solidFill>
-                  <a:srgbClr val="17AF98"/>
-                </a:solidFill>
-                <a:latin typeface="Calibri" pitchFamily="34" charset="0"/>
-                <a:ea typeface="Calibri" pitchFamily="34" charset="-122"/>
-                <a:cs typeface="Calibri" pitchFamily="34" charset="-120"/>
-              </a:rPr>
-              <a:t>SITUATION</a:t>
-            </a:r>
-            <a:endParaRPr lang="en-US" sz="1050" dirty="0"/>
-          </a:p>
-          <a:p>
-            <a:pPr indent="0" marL="0">
-              <a:lnSpc>
-                <a:spcPct val="96000"/>
-              </a:lnSpc>
-              <a:buNone/>
-            </a:pPr>
-            <a:r>
-              <a:rPr lang="en-US" sz="1350" b="1" dirty="0">
+              <a:t>人命が最優先です。救助、救護のためであれば、現場を変えてかまいません。</a:t>
+            </a:r>
+            <a:endParaRPr lang="en-US" sz="1150" dirty="0"/>
+          </a:p>
+          <a:p>
+            <a:pPr indent="0" marL="0">
+              <a:lnSpc>
+                <a:spcPct val="90000"/>
+              </a:lnSpc>
+              <a:buNone/>
+            </a:pPr>
+            <a:r>
+              <a:rPr lang="en-US" sz="900" i="1" dirty="0">
+                <a:solidFill>
+                  <a:srgbClr val="5F7183"/>
+                </a:solidFill>
+                <a:latin typeface="Calibri" pitchFamily="34" charset="0"/>
+                <a:ea typeface="Calibri" pitchFamily="34" charset="-122"/>
+                <a:cs typeface="Calibri" pitchFamily="34" charset="-120"/>
+              </a:rPr>
+              <a:t>Life comes first. You may alter the scene for rescue or first aid.</a:t>
+            </a:r>
+            <a:endParaRPr lang="en-US" sz="1150" dirty="0"/>
+          </a:p>
+        </p:txBody>
+      </p:sp>
+      <p:sp>
+        <p:nvSpPr>
+          <p:cNvPr id="8" name="Shape 5"/>
+          <p:cNvSpPr/>
+          <p:nvPr/>
+        </p:nvSpPr>
+        <p:spPr>
+          <a:xfrm>
+            <a:off x="640080" y="2578608"/>
+            <a:ext cx="10911535" cy="804672"/>
+          </a:xfrm>
+          <a:prstGeom prst="roundRect">
+            <a:avLst>
+              <a:gd name="adj" fmla="val 4545"/>
+            </a:avLst>
+          </a:prstGeom>
+          <a:solidFill>
+            <a:srgbClr val="EFF4F8"/>
+          </a:solidFill>
+          <a:ln/>
+        </p:spPr>
+      </p:sp>
+      <p:sp>
+        <p:nvSpPr>
+          <p:cNvPr id="9" name="Shape 6"/>
+          <p:cNvSpPr/>
+          <p:nvPr/>
+        </p:nvSpPr>
+        <p:spPr>
+          <a:xfrm>
+            <a:off x="822960" y="2816352"/>
+            <a:ext cx="329184" cy="329184"/>
+          </a:xfrm>
+          <a:prstGeom prst="ellipse">
+            <a:avLst/>
+          </a:prstGeom>
+          <a:solidFill>
+            <a:srgbClr val="093259"/>
+          </a:solidFill>
+          <a:ln/>
+        </p:spPr>
+      </p:sp>
+      <p:sp>
+        <p:nvSpPr>
+          <p:cNvPr id="10" name="Text 7"/>
+          <p:cNvSpPr/>
+          <p:nvPr/>
+        </p:nvSpPr>
+        <p:spPr>
+          <a:xfrm>
+            <a:off x="822960" y="2816352"/>
+            <a:ext cx="329184" cy="329184"/>
+          </a:xfrm>
+          <a:prstGeom prst="rect">
+            <a:avLst/>
+          </a:prstGeom>
+          <a:noFill/>
+          <a:ln/>
+        </p:spPr>
+        <p:txBody>
+          <a:bodyPr wrap="square" lIns="0" tIns="0" rIns="0" bIns="0" rtlCol="0" anchor="ctr"/>
+          <a:lstStyle/>
+          <a:p>
+            <a:pPr algn="ctr" indent="0" marL="0">
+              <a:buNone/>
+            </a:pPr>
+            <a:r>
+              <a:rPr lang="en-US" sz="1100" b="1" dirty="0">
                 <a:solidFill>
                   <a:srgbClr val="FFFFFF"/>
+                </a:solidFill>
+                <a:latin typeface="Calibri" pitchFamily="34" charset="0"/>
+                <a:ea typeface="Calibri" pitchFamily="34" charset="-122"/>
+                <a:cs typeface="Calibri" pitchFamily="34" charset="-120"/>
+              </a:rPr>
+              <a:t>2</a:t>
+            </a:r>
+            <a:endParaRPr lang="en-US" sz="1100" dirty="0"/>
+          </a:p>
+        </p:txBody>
+      </p:sp>
+      <p:sp>
+        <p:nvSpPr>
+          <p:cNvPr id="11" name="Text 8"/>
+          <p:cNvSpPr/>
+          <p:nvPr/>
+        </p:nvSpPr>
+        <p:spPr>
+          <a:xfrm>
+            <a:off x="1243584" y="2651760"/>
+            <a:ext cx="10070287" cy="658368"/>
+          </a:xfrm>
+          <a:prstGeom prst="rect">
+            <a:avLst/>
+          </a:prstGeom>
+          <a:noFill/>
+          <a:ln/>
+        </p:spPr>
+        <p:txBody>
+          <a:bodyPr wrap="square" lIns="0" tIns="0" rIns="0" bIns="0" rtlCol="0" anchor="ctr"/>
+          <a:lstStyle/>
+          <a:p>
+            <a:pPr indent="0" marL="0">
+              <a:lnSpc>
+                <a:spcPct val="90000"/>
+              </a:lnSpc>
+              <a:buNone/>
+            </a:pPr>
+            <a:r>
+              <a:rPr lang="en-US" sz="1150" b="1" dirty="0">
+                <a:solidFill>
+                  <a:srgbClr val="1B2733"/>
                 </a:solidFill>
                 <a:latin typeface="Yu Gothic" pitchFamily="34" charset="0"/>
                 <a:ea typeface="Yu Gothic" pitchFamily="34" charset="-122"/>
                 <a:cs typeface="Yu Gothic" pitchFamily="34" charset="-120"/>
               </a:rPr>
-              <a:t>17時40分、執務フロアで従業員1名が倒れている。近くに割れたガラスと、開いたままのキャビネット。周囲に3名の従業員がいるが、誰も通報していない。</a:t>
-            </a:r>
-            <a:endParaRPr lang="en-US" sz="1050" dirty="0"/>
-          </a:p>
-          <a:p>
-            <a:pPr indent="0" marL="0">
-              <a:lnSpc>
-                <a:spcPct val="96000"/>
-              </a:lnSpc>
-              <a:buNone/>
-            </a:pPr>
-            <a:r>
-              <a:rPr lang="en-US" sz="950" i="1" dirty="0">
-                <a:solidFill>
-                  <a:srgbClr val="9FD8CD"/>
-                </a:solidFill>
-                <a:latin typeface="Calibri" pitchFamily="34" charset="0"/>
-                <a:ea typeface="Calibri" pitchFamily="34" charset="-122"/>
-                <a:cs typeface="Calibri" pitchFamily="34" charset="-120"/>
-              </a:rPr>
-              <a:t>17:40. An employee is lying on the office floor. Nearby: broken glass and an open cabinet. Three colleagues are present; nobody has called for help.</a:t>
-            </a:r>
-            <a:endParaRPr lang="en-US" sz="1050" dirty="0"/>
-          </a:p>
-        </p:txBody>
-      </p:sp>
-      <p:sp>
-        <p:nvSpPr>
-          <p:cNvPr id="5" name="Shape 3"/>
-          <p:cNvSpPr/>
-          <p:nvPr/>
-        </p:nvSpPr>
-        <p:spPr>
-          <a:xfrm>
-            <a:off x="640080" y="3346704"/>
-            <a:ext cx="10911535" cy="429768"/>
+              <a:t>それ以外の理由では動かしません。片付けにより証拠が失われます。</a:t>
+            </a:r>
+            <a:endParaRPr lang="en-US" sz="1150" dirty="0"/>
+          </a:p>
+          <a:p>
+            <a:pPr indent="0" marL="0">
+              <a:lnSpc>
+                <a:spcPct val="90000"/>
+              </a:lnSpc>
+              <a:buNone/>
+            </a:pPr>
+            <a:r>
+              <a:rPr lang="en-US" sz="900" i="1" dirty="0">
+                <a:solidFill>
+                  <a:srgbClr val="5F7183"/>
+                </a:solidFill>
+                <a:latin typeface="Calibri" pitchFamily="34" charset="0"/>
+                <a:ea typeface="Calibri" pitchFamily="34" charset="-122"/>
+                <a:cs typeface="Calibri" pitchFamily="34" charset="-120"/>
+              </a:rPr>
+              <a:t>For any other reason, change nothing. Tidying destroys evidence.</a:t>
+            </a:r>
+            <a:endParaRPr lang="en-US" sz="1150" dirty="0"/>
+          </a:p>
+        </p:txBody>
+      </p:sp>
+      <p:sp>
+        <p:nvSpPr>
+          <p:cNvPr id="12" name="Shape 9"/>
+          <p:cNvSpPr/>
+          <p:nvPr/>
+        </p:nvSpPr>
+        <p:spPr>
+          <a:xfrm>
+            <a:off x="640080" y="3529584"/>
+            <a:ext cx="10911535" cy="804672"/>
           </a:xfrm>
           <a:prstGeom prst="roundRect">
             <a:avLst>
-              <a:gd name="adj" fmla="val 8511"/>
+              <a:gd name="adj" fmla="val 4545"/>
             </a:avLst>
           </a:prstGeom>
           <a:solidFill>
@@ -2170,33 +2472,33 @@
       </p:sp>
       <p:sp>
         <p:nvSpPr>
-          <p:cNvPr id="6" name="Shape 4"/>
-          <p:cNvSpPr/>
-          <p:nvPr/>
-        </p:nvSpPr>
-        <p:spPr>
-          <a:xfrm>
-            <a:off x="859536" y="3396996"/>
+          <p:cNvPr id="13" name="Shape 10"/>
+          <p:cNvSpPr/>
+          <p:nvPr/>
+        </p:nvSpPr>
+        <p:spPr>
+          <a:xfrm>
+            <a:off x="822960" y="3767328"/>
             <a:ext cx="329184" cy="329184"/>
           </a:xfrm>
           <a:prstGeom prst="ellipse">
             <a:avLst/>
           </a:prstGeom>
           <a:solidFill>
-            <a:srgbClr val="17AF98"/>
+            <a:srgbClr val="093259"/>
           </a:solidFill>
           <a:ln/>
         </p:spPr>
       </p:sp>
       <p:sp>
         <p:nvSpPr>
-          <p:cNvPr id="7" name="Text 5"/>
-          <p:cNvSpPr/>
-          <p:nvPr/>
-        </p:nvSpPr>
-        <p:spPr>
-          <a:xfrm>
-            <a:off x="859536" y="3396996"/>
+          <p:cNvPr id="14" name="Text 11"/>
+          <p:cNvSpPr/>
+          <p:nvPr/>
+        </p:nvSpPr>
+        <p:spPr>
+          <a:xfrm>
+            <a:off x="822960" y="3767328"/>
             <a:ext cx="329184" cy="329184"/>
           </a:xfrm>
           <a:prstGeom prst="rect">
@@ -2221,7 +2523,7 @@
                 <a:ea typeface="Calibri" pitchFamily="34" charset="-122"/>
                 <a:cs typeface="Calibri" pitchFamily="34" charset="-120"/>
               </a:rPr>
-              <a:t>1</a:t>
+              <a:t>3</a:t>
             </a:r>
             <a:endParaRPr lang="en-US" sz="1100" dirty="0"/>
           </a:p>
@@ -2229,14 +2531,14 @@
       </p:sp>
       <p:sp>
         <p:nvSpPr>
-          <p:cNvPr id="8" name="Text 6"/>
-          <p:cNvSpPr/>
-          <p:nvPr/>
-        </p:nvSpPr>
-        <p:spPr>
-          <a:xfrm>
-            <a:off x="1335024" y="3401568"/>
-            <a:ext cx="9960559" cy="320040"/>
+          <p:cNvPr id="15" name="Text 12"/>
+          <p:cNvSpPr/>
+          <p:nvPr/>
+        </p:nvSpPr>
+        <p:spPr>
+          <a:xfrm>
+            <a:off x="1243584" y="3602736"/>
+            <a:ext cx="10070287" cy="658368"/>
           </a:xfrm>
           <a:prstGeom prst="rect">
             <a:avLst/>
@@ -2255,7 +2557,7 @@
               <a:buNone/>
             </a:pPr>
             <a:r>
-              <a:rPr lang="en-US" sz="1300" b="1" dirty="0">
+              <a:rPr lang="en-US" sz="1150" b="1" dirty="0">
                 <a:solidFill>
                   <a:srgbClr val="1B2733"/>
                 </a:solidFill>
@@ -2263,9 +2565,9 @@
                 <a:ea typeface="Yu Gothic" pitchFamily="34" charset="-122"/>
                 <a:cs typeface="Yu Gothic" pitchFamily="34" charset="-120"/>
               </a:rPr>
-              <a:t>最初の30秒に、何を、どの順序で行うか。</a:t>
-            </a:r>
-            <a:endParaRPr lang="en-US" sz="1300" dirty="0"/>
+              <a:t>変えた場合は記録します。何を、どこから、どこへ、誰が、何時に。</a:t>
+            </a:r>
+            <a:endParaRPr lang="en-US" sz="1150" dirty="0"/>
           </a:p>
           <a:p>
             <a:pPr indent="0" marL="0">
@@ -2275,7 +2577,7 @@
               <a:buNone/>
             </a:pPr>
             <a:r>
-              <a:rPr lang="en-US" sz="950" i="1" dirty="0">
+              <a:rPr lang="en-US" sz="900" i="1" dirty="0">
                 <a:solidFill>
                   <a:srgbClr val="5F7183"/>
                 </a:solidFill>
@@ -2283,26 +2585,26 @@
                 <a:ea typeface="Calibri" pitchFamily="34" charset="-122"/>
                 <a:cs typeface="Calibri" pitchFamily="34" charset="-120"/>
               </a:rPr>
-              <a:t>In the first thirty seconds — what do you do, and in what order?</a:t>
-            </a:r>
-            <a:endParaRPr lang="en-US" sz="1300" dirty="0"/>
-          </a:p>
-        </p:txBody>
-      </p:sp>
-      <p:sp>
-        <p:nvSpPr>
-          <p:cNvPr id="9" name="Shape 7"/>
-          <p:cNvSpPr/>
-          <p:nvPr/>
-        </p:nvSpPr>
-        <p:spPr>
-          <a:xfrm>
-            <a:off x="640080" y="3867912"/>
-            <a:ext cx="10911535" cy="429768"/>
+              <a:t>If you did change it, record what, from where, to where, by whom, and at what time.</a:t>
+            </a:r>
+            <a:endParaRPr lang="en-US" sz="1150" dirty="0"/>
+          </a:p>
+        </p:txBody>
+      </p:sp>
+      <p:sp>
+        <p:nvSpPr>
+          <p:cNvPr id="16" name="Shape 13"/>
+          <p:cNvSpPr/>
+          <p:nvPr/>
+        </p:nvSpPr>
+        <p:spPr>
+          <a:xfrm>
+            <a:off x="640080" y="4480560"/>
+            <a:ext cx="10911535" cy="804672"/>
           </a:xfrm>
           <a:prstGeom prst="roundRect">
             <a:avLst>
-              <a:gd name="adj" fmla="val 8511"/>
+              <a:gd name="adj" fmla="val 4545"/>
             </a:avLst>
           </a:prstGeom>
           <a:solidFill>
@@ -2313,33 +2615,33 @@
       </p:sp>
       <p:sp>
         <p:nvSpPr>
-          <p:cNvPr id="10" name="Shape 8"/>
-          <p:cNvSpPr/>
-          <p:nvPr/>
-        </p:nvSpPr>
-        <p:spPr>
-          <a:xfrm>
-            <a:off x="859536" y="3918204"/>
+          <p:cNvPr id="17" name="Shape 14"/>
+          <p:cNvSpPr/>
+          <p:nvPr/>
+        </p:nvSpPr>
+        <p:spPr>
+          <a:xfrm>
+            <a:off x="822960" y="4718304"/>
             <a:ext cx="329184" cy="329184"/>
           </a:xfrm>
           <a:prstGeom prst="ellipse">
             <a:avLst/>
           </a:prstGeom>
           <a:solidFill>
-            <a:srgbClr val="17AF98"/>
+            <a:srgbClr val="093259"/>
           </a:solidFill>
           <a:ln/>
         </p:spPr>
       </p:sp>
       <p:sp>
         <p:nvSpPr>
-          <p:cNvPr id="11" name="Text 9"/>
-          <p:cNvSpPr/>
-          <p:nvPr/>
-        </p:nvSpPr>
-        <p:spPr>
-          <a:xfrm>
-            <a:off x="859536" y="3918204"/>
+          <p:cNvPr id="18" name="Text 15"/>
+          <p:cNvSpPr/>
+          <p:nvPr/>
+        </p:nvSpPr>
+        <p:spPr>
+          <a:xfrm>
+            <a:off x="822960" y="4718304"/>
             <a:ext cx="329184" cy="329184"/>
           </a:xfrm>
           <a:prstGeom prst="rect">
@@ -2364,7 +2666,7 @@
                 <a:ea typeface="Calibri" pitchFamily="34" charset="-122"/>
                 <a:cs typeface="Calibri" pitchFamily="34" charset="-120"/>
               </a:rPr>
-              <a:t>2</a:t>
+              <a:t>4</a:t>
             </a:r>
             <a:endParaRPr lang="en-US" sz="1100" dirty="0"/>
           </a:p>
@@ -2372,14 +2674,14 @@
       </p:sp>
       <p:sp>
         <p:nvSpPr>
-          <p:cNvPr id="12" name="Text 10"/>
-          <p:cNvSpPr/>
-          <p:nvPr/>
-        </p:nvSpPr>
-        <p:spPr>
-          <a:xfrm>
-            <a:off x="1335024" y="3922776"/>
-            <a:ext cx="9960559" cy="320040"/>
+          <p:cNvPr id="19" name="Text 16"/>
+          <p:cNvSpPr/>
+          <p:nvPr/>
+        </p:nvSpPr>
+        <p:spPr>
+          <a:xfrm>
+            <a:off x="1243584" y="4553712"/>
+            <a:ext cx="10070287" cy="658368"/>
           </a:xfrm>
           <a:prstGeom prst="rect">
             <a:avLst/>
@@ -2398,7 +2700,7 @@
               <a:buNone/>
             </a:pPr>
             <a:r>
-              <a:rPr lang="en-US" sz="1300" b="1" dirty="0">
+              <a:rPr lang="en-US" sz="1150" b="1" dirty="0">
                 <a:solidFill>
                   <a:srgbClr val="1B2733"/>
                 </a:solidFill>
@@ -2406,9 +2708,9 @@
                 <a:ea typeface="Yu Gothic" pitchFamily="34" charset="-122"/>
                 <a:cs typeface="Yu Gothic" pitchFamily="34" charset="-120"/>
               </a:rPr>
-              <a:t>通報は110番か119番か、それとも両方か。根拠は。</a:t>
-            </a:r>
-            <a:endParaRPr lang="en-US" sz="1300" dirty="0"/>
+              <a:t>立入制限は広めに設定します。</a:t>
+            </a:r>
+            <a:endParaRPr lang="en-US" sz="1150" dirty="0"/>
           </a:p>
           <a:p>
             <a:pPr indent="0" marL="0">
@@ -2418,7 +2720,7 @@
               <a:buNone/>
             </a:pPr>
             <a:r>
-              <a:rPr lang="en-US" sz="950" i="1" dirty="0">
+              <a:rPr lang="en-US" sz="900" i="1" dirty="0">
                 <a:solidFill>
                   <a:srgbClr val="5F7183"/>
                 </a:solidFill>
@@ -2426,26 +2728,26 @@
                 <a:ea typeface="Calibri" pitchFamily="34" charset="-122"/>
                 <a:cs typeface="Calibri" pitchFamily="34" charset="-120"/>
               </a:rPr>
-              <a:t>Police, ambulance, or both — and on what basis?</a:t>
-            </a:r>
-            <a:endParaRPr lang="en-US" sz="1300" dirty="0"/>
-          </a:p>
-        </p:txBody>
-      </p:sp>
-      <p:sp>
-        <p:nvSpPr>
-          <p:cNvPr id="13" name="Shape 11"/>
-          <p:cNvSpPr/>
-          <p:nvPr/>
-        </p:nvSpPr>
-        <p:spPr>
-          <a:xfrm>
-            <a:off x="640080" y="4389120"/>
-            <a:ext cx="10911535" cy="429768"/>
+              <a:t>Set the cordon wider than you think is needed.</a:t>
+            </a:r>
+            <a:endParaRPr lang="en-US" sz="1150" dirty="0"/>
+          </a:p>
+        </p:txBody>
+      </p:sp>
+      <p:sp>
+        <p:nvSpPr>
+          <p:cNvPr id="20" name="Shape 17"/>
+          <p:cNvSpPr/>
+          <p:nvPr/>
+        </p:nvSpPr>
+        <p:spPr>
+          <a:xfrm>
+            <a:off x="640080" y="5431536"/>
+            <a:ext cx="10911535" cy="804672"/>
           </a:xfrm>
           <a:prstGeom prst="roundRect">
             <a:avLst>
-              <a:gd name="adj" fmla="val 8511"/>
+              <a:gd name="adj" fmla="val 4545"/>
             </a:avLst>
           </a:prstGeom>
           <a:solidFill>
@@ -2456,33 +2758,33 @@
       </p:sp>
       <p:sp>
         <p:nvSpPr>
-          <p:cNvPr id="14" name="Shape 12"/>
-          <p:cNvSpPr/>
-          <p:nvPr/>
-        </p:nvSpPr>
-        <p:spPr>
-          <a:xfrm>
-            <a:off x="859536" y="4439412"/>
+          <p:cNvPr id="21" name="Shape 18"/>
+          <p:cNvSpPr/>
+          <p:nvPr/>
+        </p:nvSpPr>
+        <p:spPr>
+          <a:xfrm>
+            <a:off x="822960" y="5669280"/>
             <a:ext cx="329184" cy="329184"/>
           </a:xfrm>
           <a:prstGeom prst="ellipse">
             <a:avLst/>
           </a:prstGeom>
           <a:solidFill>
-            <a:srgbClr val="17AF98"/>
+            <a:srgbClr val="093259"/>
           </a:solidFill>
           <a:ln/>
         </p:spPr>
       </p:sp>
       <p:sp>
         <p:nvSpPr>
-          <p:cNvPr id="15" name="Text 13"/>
-          <p:cNvSpPr/>
-          <p:nvPr/>
-        </p:nvSpPr>
-        <p:spPr>
-          <a:xfrm>
-            <a:off x="859536" y="4439412"/>
+          <p:cNvPr id="22" name="Text 19"/>
+          <p:cNvSpPr/>
+          <p:nvPr/>
+        </p:nvSpPr>
+        <p:spPr>
+          <a:xfrm>
+            <a:off x="822960" y="5669280"/>
             <a:ext cx="329184" cy="329184"/>
           </a:xfrm>
           <a:prstGeom prst="rect">
@@ -2507,7 +2809,7 @@
                 <a:ea typeface="Calibri" pitchFamily="34" charset="-122"/>
                 <a:cs typeface="Calibri" pitchFamily="34" charset="-120"/>
               </a:rPr>
-              <a:t>3</a:t>
+              <a:t>5</a:t>
             </a:r>
             <a:endParaRPr lang="en-US" sz="1100" dirty="0"/>
           </a:p>
@@ -2515,14 +2817,14 @@
       </p:sp>
       <p:sp>
         <p:nvSpPr>
-          <p:cNvPr id="16" name="Text 14"/>
-          <p:cNvSpPr/>
-          <p:nvPr/>
-        </p:nvSpPr>
-        <p:spPr>
-          <a:xfrm>
-            <a:off x="1335024" y="4443984"/>
-            <a:ext cx="9960559" cy="320040"/>
+          <p:cNvPr id="23" name="Text 20"/>
+          <p:cNvSpPr/>
+          <p:nvPr/>
+        </p:nvSpPr>
+        <p:spPr>
+          <a:xfrm>
+            <a:off x="1243584" y="5504688"/>
+            <a:ext cx="10070287" cy="658368"/>
           </a:xfrm>
           <a:prstGeom prst="rect">
             <a:avLst/>
@@ -2541,7 +2843,7 @@
               <a:buNone/>
             </a:pPr>
             <a:r>
-              <a:rPr lang="en-US" sz="1300" b="1" dirty="0">
+              <a:rPr lang="en-US" sz="1150" b="1" dirty="0">
                 <a:solidFill>
                   <a:srgbClr val="1B2733"/>
                 </a:solidFill>
@@ -2549,9 +2851,9 @@
                 <a:ea typeface="Yu Gothic" pitchFamily="34" charset="-122"/>
                 <a:cs typeface="Yu Gothic" pitchFamily="34" charset="-120"/>
               </a:rPr>
-              <a:t>現場をどこまで保存するか。何に触れてはいけないか。</a:t>
-            </a:r>
-            <a:endParaRPr lang="en-US" sz="1300" dirty="0"/>
+              <a:t>記録はその場で行います。時間が経つと正確性が下がります。</a:t>
+            </a:r>
+            <a:endParaRPr lang="en-US" sz="1150" dirty="0"/>
           </a:p>
           <a:p>
             <a:pPr indent="0" marL="0">
@@ -2561,7 +2863,7 @@
               <a:buNone/>
             </a:pPr>
             <a:r>
-              <a:rPr lang="en-US" sz="950" i="1" dirty="0">
+              <a:rPr lang="en-US" sz="900" i="1" dirty="0">
                 <a:solidFill>
                   <a:srgbClr val="5F7183"/>
                 </a:solidFill>
@@ -2569,26 +2871,357 @@
                 <a:ea typeface="Calibri" pitchFamily="34" charset="-122"/>
                 <a:cs typeface="Calibri" pitchFamily="34" charset="-120"/>
               </a:rPr>
-              <a:t>How far do you preserve the scene, and what must not be touched?</a:t>
-            </a:r>
-            <a:endParaRPr lang="en-US" sz="1300" dirty="0"/>
-          </a:p>
-        </p:txBody>
-      </p:sp>
-      <p:sp>
-        <p:nvSpPr>
-          <p:cNvPr id="17" name="Shape 15"/>
-          <p:cNvSpPr/>
-          <p:nvPr/>
-        </p:nvSpPr>
-        <p:spPr>
-          <a:xfrm>
-            <a:off x="640080" y="4910328"/>
-            <a:ext cx="10911535" cy="429768"/>
+              <a:t>Record on the spot. Accuracy drops as time passes.</a:t>
+            </a:r>
+            <a:endParaRPr lang="en-US" sz="1150" dirty="0"/>
+          </a:p>
+        </p:txBody>
+      </p:sp>
+      <p:sp>
+        <p:nvSpPr>
+          <p:cNvPr id="24" name="Text 21"/>
+          <p:cNvSpPr/>
+          <p:nvPr/>
+        </p:nvSpPr>
+        <p:spPr>
+          <a:xfrm>
+            <a:off x="640080" y="6382512"/>
+            <a:ext cx="8778240" cy="292608"/>
+          </a:xfrm>
+          <a:prstGeom prst="rect">
+            <a:avLst/>
+          </a:prstGeom>
+          <a:noFill/>
+          <a:ln/>
+        </p:spPr>
+        <p:txBody>
+          <a:bodyPr wrap="square" lIns="0" tIns="0" rIns="0" bIns="0" rtlCol="0" anchor="ctr"/>
+          <a:lstStyle/>
+          <a:p>
+            <a:pPr indent="0" marL="0">
+              <a:buNone/>
+            </a:pPr>
+            <a:r>
+              <a:rPr lang="en-US" sz="900" dirty="0">
+                <a:solidFill>
+                  <a:srgbClr val="5F7183"/>
+                </a:solidFill>
+                <a:latin typeface="Yu Gothic" pitchFamily="34" charset="0"/>
+                <a:ea typeface="Yu Gothic" pitchFamily="34" charset="-122"/>
+                <a:cs typeface="Yu Gothic" pitchFamily="34" charset="-120"/>
+              </a:rPr>
+              <a:t>第9時限｜基本教育4 事故の発生時における警察機関への連絡その他応急の措置  </a:t>
+            </a:r>
+            <a:pPr indent="0" marL="0">
+              <a:buNone/>
+            </a:pPr>
+            <a:r>
+              <a:rPr lang="en-US" sz="850" i="1" dirty="0">
+                <a:solidFill>
+                  <a:srgbClr val="D6E0E9"/>
+                </a:solidFill>
+                <a:latin typeface="Calibri" pitchFamily="34" charset="0"/>
+                <a:ea typeface="Calibri" pitchFamily="34" charset="-122"/>
+                <a:cs typeface="Calibri" pitchFamily="34" charset="-120"/>
+              </a:rPr>
+              <a:t>Period 9 | Basic Training 4 — Emergency Reporting and Scene Preservation</a:t>
+            </a:r>
+            <a:endParaRPr lang="en-US" sz="900" dirty="0"/>
+          </a:p>
+        </p:txBody>
+      </p:sp>
+      <p:sp>
+        <p:nvSpPr>
+          <p:cNvPr id="25" name="Text 22"/>
+          <p:cNvSpPr/>
+          <p:nvPr/>
+        </p:nvSpPr>
+        <p:spPr>
+          <a:xfrm>
+            <a:off x="10637215" y="6382512"/>
+            <a:ext cx="914400" cy="292608"/>
+          </a:xfrm>
+          <a:prstGeom prst="rect">
+            <a:avLst/>
+          </a:prstGeom>
+          <a:noFill/>
+          <a:ln/>
+        </p:spPr>
+        <p:txBody>
+          <a:bodyPr wrap="square" lIns="0" tIns="0" rIns="0" bIns="0" rtlCol="0" anchor="ctr"/>
+          <a:lstStyle/>
+          <a:p>
+            <a:pPr algn="r" indent="0" marL="0">
+              <a:buNone/>
+            </a:pPr>
+            <a:r>
+              <a:rPr lang="en-US" sz="1000" dirty="0">
+                <a:solidFill>
+                  <a:srgbClr val="5F7183"/>
+                </a:solidFill>
+                <a:latin typeface="Calibri" pitchFamily="34" charset="0"/>
+                <a:ea typeface="Calibri" pitchFamily="34" charset="-122"/>
+                <a:cs typeface="Calibri" pitchFamily="34" charset="-120"/>
+              </a:rPr>
+              <a:t>10</a:t>
+            </a:r>
+            <a:endParaRPr lang="en-US" sz="1000" dirty="0"/>
+          </a:p>
+        </p:txBody>
+      </p:sp>
+    </p:spTree>
+  </p:cSld>
+  <p:clrMapOvr>
+    <a:masterClrMapping/>
+  </p:clrMapOvr>
+</p:sld>
+</file>
+
+<file path=ppt/slides/slide11.xml><?xml version="1.0" encoding="utf-8"?>
+<p:sld xmlns:a="http://schemas.openxmlformats.org/drawingml/2006/main" xmlns:r="http://schemas.openxmlformats.org/officeDocument/2006/relationships" xmlns:p="http://schemas.openxmlformats.org/presentationml/2006/main">
+  <p:cSld name="Slide 11">
+    <p:bg>
+      <p:bgPr>
+        <a:solidFill>
+          <a:srgbClr val="FFFFFF"/>
+        </a:solidFill>
+      </p:bgPr>
+    </p:bg>
+    <p:spTree>
+      <p:nvGrpSpPr>
+        <p:cNvPr id="1" name=""/>
+        <p:cNvGrpSpPr/>
+        <p:nvPr/>
+      </p:nvGrpSpPr>
+      <p:grpSpPr>
+        <a:xfrm>
+          <a:off x="0" y="0"/>
+          <a:ext cx="0" cy="0"/>
+          <a:chOff x="0" y="0"/>
+          <a:chExt cx="0" cy="0"/>
+        </a:xfrm>
+      </p:grpSpPr>
+      <p:pic>
+        <p:nvPicPr>
+          <p:cNvPr id="2" name="Image 0" descr="/home/user/Training-/assets/logo.png">    </p:cNvPr>
+          <p:cNvPicPr>
+            <a:picLocks noChangeAspect="1"/>
+          </p:cNvPicPr>
+          <p:nvPr/>
+        </p:nvPicPr>
+        <p:blipFill>
+          <a:blip r:embed="rId1"/>
+          <a:stretch>
+            <a:fillRect/>
+          </a:stretch>
+        </p:blipFill>
+        <p:spPr>
+          <a:xfrm>
+            <a:off x="10765231" y="332912"/>
+            <a:ext cx="786384" cy="742353"/>
+          </a:xfrm>
+          <a:prstGeom prst="rect">
+            <a:avLst/>
+          </a:prstGeom>
+        </p:spPr>
+      </p:pic>
+      <p:sp>
+        <p:nvSpPr>
+          <p:cNvPr id="3" name="Text 0"/>
+          <p:cNvSpPr/>
+          <p:nvPr/>
+        </p:nvSpPr>
+        <p:spPr>
+          <a:xfrm>
+            <a:off x="640080" y="475488"/>
+            <a:ext cx="9805111" cy="960120"/>
+          </a:xfrm>
+          <a:prstGeom prst="rect">
+            <a:avLst/>
+          </a:prstGeom>
+          <a:noFill/>
+          <a:ln/>
+        </p:spPr>
+        <p:txBody>
+          <a:bodyPr wrap="square" lIns="0" tIns="0" rIns="0" bIns="0" rtlCol="0" anchor="t"/>
+          <a:lstStyle/>
+          <a:p>
+            <a:pPr indent="0" marL="0">
+              <a:lnSpc>
+                <a:spcPct val="94000"/>
+              </a:lnSpc>
+              <a:buNone/>
+            </a:pPr>
+            <a:r>
+              <a:rPr lang="en-US" sz="2700" b="1" dirty="0">
+                <a:solidFill>
+                  <a:srgbClr val="093259"/>
+                </a:solidFill>
+                <a:latin typeface="Yu Gothic" pitchFamily="34" charset="0"/>
+                <a:ea typeface="Yu Gothic" pitchFamily="34" charset="-122"/>
+                <a:cs typeface="Yu Gothic" pitchFamily="34" charset="-120"/>
+              </a:rPr>
+              <a:t>TTX④ 執務フロアで人が倒れている</a:t>
+            </a:r>
+            <a:endParaRPr lang="en-US" sz="2700" dirty="0"/>
+          </a:p>
+          <a:p>
+            <a:pPr indent="0" marL="0">
+              <a:lnSpc>
+                <a:spcPct val="94000"/>
+              </a:lnSpc>
+              <a:buNone/>
+            </a:pPr>
+            <a:r>
+              <a:rPr lang="en-US" sz="1250" i="1" dirty="0">
+                <a:solidFill>
+                  <a:srgbClr val="12B198"/>
+                </a:solidFill>
+                <a:latin typeface="Calibri" pitchFamily="34" charset="0"/>
+                <a:ea typeface="Calibri" pitchFamily="34" charset="-122"/>
+                <a:cs typeface="Calibri" pitchFamily="34" charset="-120"/>
+              </a:rPr>
+              <a:t>TTX ④ — A Person Is Down on the Office Floor</a:t>
+            </a:r>
+            <a:endParaRPr lang="en-US" sz="2700" dirty="0"/>
+          </a:p>
+        </p:txBody>
+      </p:sp>
+      <p:sp>
+        <p:nvSpPr>
+          <p:cNvPr id="4" name="Shape 1"/>
+          <p:cNvSpPr/>
+          <p:nvPr/>
+        </p:nvSpPr>
+        <p:spPr>
+          <a:xfrm>
+            <a:off x="640080" y="1627632"/>
+            <a:ext cx="10911535" cy="1700784"/>
           </a:xfrm>
           <a:prstGeom prst="roundRect">
             <a:avLst>
-              <a:gd name="adj" fmla="val 8511"/>
+              <a:gd name="adj" fmla="val 2688"/>
+            </a:avLst>
+          </a:prstGeom>
+          <a:solidFill>
+            <a:srgbClr val="093259"/>
+          </a:solidFill>
+          <a:ln/>
+        </p:spPr>
+      </p:sp>
+      <p:sp>
+        <p:nvSpPr>
+          <p:cNvPr id="5" name="Text 2"/>
+          <p:cNvSpPr/>
+          <p:nvPr/>
+        </p:nvSpPr>
+        <p:spPr>
+          <a:xfrm>
+            <a:off x="1024128" y="1810512"/>
+            <a:ext cx="10143439" cy="1335024"/>
+          </a:xfrm>
+          <a:prstGeom prst="rect">
+            <a:avLst/>
+          </a:prstGeom>
+          <a:noFill/>
+          <a:ln/>
+        </p:spPr>
+        <p:txBody>
+          <a:bodyPr wrap="square" lIns="0" tIns="0" rIns="0" bIns="0" rtlCol="0" anchor="t"/>
+          <a:lstStyle/>
+          <a:p>
+            <a:pPr indent="0" marL="0">
+              <a:lnSpc>
+                <a:spcPct val="96000"/>
+              </a:lnSpc>
+              <a:buNone/>
+            </a:pPr>
+            <a:r>
+              <a:rPr lang="en-US" sz="1050" b="1" dirty="0">
+                <a:solidFill>
+                  <a:srgbClr val="12B198"/>
+                </a:solidFill>
+                <a:latin typeface="Yu Gothic" pitchFamily="34" charset="0"/>
+                <a:ea typeface="Yu Gothic" pitchFamily="34" charset="-122"/>
+                <a:cs typeface="Yu Gothic" pitchFamily="34" charset="-120"/>
+              </a:rPr>
+              <a:t>状況付与  </a:t>
+            </a:r>
+            <a:pPr indent="0" marL="0">
+              <a:lnSpc>
+                <a:spcPct val="96000"/>
+              </a:lnSpc>
+              <a:buNone/>
+            </a:pPr>
+            <a:r>
+              <a:rPr lang="en-US" sz="900" dirty="0">
+                <a:solidFill>
+                  <a:srgbClr val="12B198"/>
+                </a:solidFill>
+                <a:latin typeface="Calibri" pitchFamily="34" charset="0"/>
+                <a:ea typeface="Calibri" pitchFamily="34" charset="-122"/>
+                <a:cs typeface="Calibri" pitchFamily="34" charset="-120"/>
+              </a:rPr>
+              <a:t>SITUATION</a:t>
+            </a:r>
+            <a:endParaRPr lang="en-US" sz="1050" dirty="0"/>
+          </a:p>
+          <a:p>
+            <a:pPr indent="0" marL="0">
+              <a:lnSpc>
+                <a:spcPct val="96000"/>
+              </a:lnSpc>
+              <a:buNone/>
+            </a:pPr>
+            <a:r>
+              <a:rPr lang="en-US" sz="1350" b="1" dirty="0">
+                <a:solidFill>
+                  <a:srgbClr val="FFFFFF"/>
+                </a:solidFill>
+                <a:latin typeface="Yu Gothic" pitchFamily="34" charset="0"/>
+                <a:ea typeface="Yu Gothic" pitchFamily="34" charset="-122"/>
+                <a:cs typeface="Yu Gothic" pitchFamily="34" charset="-120"/>
+              </a:rPr>
+              <a:t>17時40分、執務フロアで人が1名倒れている。社員証も来訪者バッジも見当たらない。近くに割れたガラスと、開いたままのキャビネット。周囲の従業員3名は「見たことがない人だ」と言う。呼びかけても日本語が通じない。</a:t>
+            </a:r>
+            <a:endParaRPr lang="en-US" sz="1050" dirty="0"/>
+          </a:p>
+          <a:p>
+            <a:pPr indent="0" marL="0">
+              <a:lnSpc>
+                <a:spcPct val="96000"/>
+              </a:lnSpc>
+              <a:buNone/>
+            </a:pPr>
+            <a:r>
+              <a:rPr lang="en-US" sz="950" i="1" dirty="0">
+                <a:solidFill>
+                  <a:srgbClr val="9FD8CD"/>
+                </a:solidFill>
+                <a:latin typeface="Calibri" pitchFamily="34" charset="0"/>
+                <a:ea typeface="Calibri" pitchFamily="34" charset="-122"/>
+                <a:cs typeface="Calibri" pitchFamily="34" charset="-120"/>
+              </a:rPr>
+              <a:t>17:40. A person is lying on the office floor. No employee ID or visitor badge is visible. Nearby: broken glass and an open cabinet. Three employees say they have never seen the person. When you speak to them, Japanese does not work.</a:t>
+            </a:r>
+            <a:endParaRPr lang="en-US" sz="1050" dirty="0"/>
+          </a:p>
+        </p:txBody>
+      </p:sp>
+      <p:sp>
+        <p:nvSpPr>
+          <p:cNvPr id="6" name="Shape 3"/>
+          <p:cNvSpPr/>
+          <p:nvPr/>
+        </p:nvSpPr>
+        <p:spPr>
+          <a:xfrm>
+            <a:off x="640080" y="3566160"/>
+            <a:ext cx="10911535" cy="374904"/>
+          </a:xfrm>
+          <a:prstGeom prst="roundRect">
+            <a:avLst>
+              <a:gd name="adj" fmla="val 9756"/>
             </a:avLst>
           </a:prstGeom>
           <a:solidFill>
@@ -2599,33 +3232,33 @@
       </p:sp>
       <p:sp>
         <p:nvSpPr>
-          <p:cNvPr id="18" name="Shape 16"/>
-          <p:cNvSpPr/>
-          <p:nvPr/>
-        </p:nvSpPr>
-        <p:spPr>
-          <a:xfrm>
-            <a:off x="859536" y="4960620"/>
+          <p:cNvPr id="7" name="Shape 4"/>
+          <p:cNvSpPr/>
+          <p:nvPr/>
+        </p:nvSpPr>
+        <p:spPr>
+          <a:xfrm>
+            <a:off x="859536" y="3589020"/>
             <a:ext cx="329184" cy="329184"/>
           </a:xfrm>
           <a:prstGeom prst="ellipse">
             <a:avLst/>
           </a:prstGeom>
           <a:solidFill>
-            <a:srgbClr val="17AF98"/>
+            <a:srgbClr val="12B198"/>
           </a:solidFill>
           <a:ln/>
         </p:spPr>
       </p:sp>
       <p:sp>
         <p:nvSpPr>
-          <p:cNvPr id="19" name="Text 17"/>
-          <p:cNvSpPr/>
-          <p:nvPr/>
-        </p:nvSpPr>
-        <p:spPr>
-          <a:xfrm>
-            <a:off x="859536" y="4960620"/>
+          <p:cNvPr id="8" name="Text 5"/>
+          <p:cNvSpPr/>
+          <p:nvPr/>
+        </p:nvSpPr>
+        <p:spPr>
+          <a:xfrm>
+            <a:off x="859536" y="3589020"/>
             <a:ext cx="329184" cy="329184"/>
           </a:xfrm>
           <a:prstGeom prst="rect">
@@ -2650,7 +3283,7 @@
                 <a:ea typeface="Calibri" pitchFamily="34" charset="-122"/>
                 <a:cs typeface="Calibri" pitchFamily="34" charset="-120"/>
               </a:rPr>
-              <a:t>4</a:t>
+              <a:t>1</a:t>
             </a:r>
             <a:endParaRPr lang="en-US" sz="1100" dirty="0"/>
           </a:p>
@@ -2658,14 +3291,14 @@
       </p:sp>
       <p:sp>
         <p:nvSpPr>
-          <p:cNvPr id="20" name="Text 18"/>
-          <p:cNvSpPr/>
-          <p:nvPr/>
-        </p:nvSpPr>
-        <p:spPr>
-          <a:xfrm>
-            <a:off x="1335024" y="4965192"/>
-            <a:ext cx="9960559" cy="320040"/>
+          <p:cNvPr id="9" name="Text 6"/>
+          <p:cNvSpPr/>
+          <p:nvPr/>
+        </p:nvSpPr>
+        <p:spPr>
+          <a:xfrm>
+            <a:off x="1335024" y="3621024"/>
+            <a:ext cx="9960559" cy="265176"/>
           </a:xfrm>
           <a:prstGeom prst="rect">
             <a:avLst/>
@@ -2692,7 +3325,7 @@
                 <a:ea typeface="Yu Gothic" pitchFamily="34" charset="-122"/>
                 <a:cs typeface="Yu Gothic" pitchFamily="34" charset="-120"/>
               </a:rPr>
-              <a:t>社内には、誰に、何分以内に、何を上げるか。</a:t>
+              <a:t>最初の30秒に、何を、どの順序で行うか。</a:t>
             </a:r>
             <a:endParaRPr lang="en-US" sz="1300" dirty="0"/>
           </a:p>
@@ -2712,7 +3345,7 @@
                 <a:ea typeface="Calibri" pitchFamily="34" charset="-122"/>
                 <a:cs typeface="Calibri" pitchFamily="34" charset="-120"/>
               </a:rPr>
-              <a:t>Internally — who do you escalate to, within what time, and with what?</a:t>
+              <a:t>In the first thirty seconds, what do you do, and in what order?</a:t>
             </a:r>
             <a:endParaRPr lang="en-US" sz="1300" dirty="0"/>
           </a:p>
@@ -2720,7 +3353,436 @@
       </p:sp>
       <p:sp>
         <p:nvSpPr>
-          <p:cNvPr id="21" name="Shape 19"/>
+          <p:cNvPr id="10" name="Shape 7"/>
+          <p:cNvSpPr/>
+          <p:nvPr/>
+        </p:nvSpPr>
+        <p:spPr>
+          <a:xfrm>
+            <a:off x="640080" y="4032504"/>
+            <a:ext cx="10911535" cy="374904"/>
+          </a:xfrm>
+          <a:prstGeom prst="roundRect">
+            <a:avLst>
+              <a:gd name="adj" fmla="val 9756"/>
+            </a:avLst>
+          </a:prstGeom>
+          <a:solidFill>
+            <a:srgbClr val="EFF4F8"/>
+          </a:solidFill>
+          <a:ln/>
+        </p:spPr>
+      </p:sp>
+      <p:sp>
+        <p:nvSpPr>
+          <p:cNvPr id="11" name="Shape 8"/>
+          <p:cNvSpPr/>
+          <p:nvPr/>
+        </p:nvSpPr>
+        <p:spPr>
+          <a:xfrm>
+            <a:off x="859536" y="4055364"/>
+            <a:ext cx="329184" cy="329184"/>
+          </a:xfrm>
+          <a:prstGeom prst="ellipse">
+            <a:avLst/>
+          </a:prstGeom>
+          <a:solidFill>
+            <a:srgbClr val="12B198"/>
+          </a:solidFill>
+          <a:ln/>
+        </p:spPr>
+      </p:sp>
+      <p:sp>
+        <p:nvSpPr>
+          <p:cNvPr id="12" name="Text 9"/>
+          <p:cNvSpPr/>
+          <p:nvPr/>
+        </p:nvSpPr>
+        <p:spPr>
+          <a:xfrm>
+            <a:off x="859536" y="4055364"/>
+            <a:ext cx="329184" cy="329184"/>
+          </a:xfrm>
+          <a:prstGeom prst="rect">
+            <a:avLst/>
+          </a:prstGeom>
+          <a:noFill/>
+          <a:ln/>
+        </p:spPr>
+        <p:txBody>
+          <a:bodyPr wrap="square" lIns="0" tIns="0" rIns="0" bIns="0" rtlCol="0" anchor="ctr"/>
+          <a:lstStyle/>
+          <a:p>
+            <a:pPr algn="ctr" indent="0" marL="0">
+              <a:buNone/>
+            </a:pPr>
+            <a:r>
+              <a:rPr lang="en-US" sz="1100" b="1" dirty="0">
+                <a:solidFill>
+                  <a:srgbClr val="FFFFFF"/>
+                </a:solidFill>
+                <a:latin typeface="Calibri" pitchFamily="34" charset="0"/>
+                <a:ea typeface="Calibri" pitchFamily="34" charset="-122"/>
+                <a:cs typeface="Calibri" pitchFamily="34" charset="-120"/>
+              </a:rPr>
+              <a:t>2</a:t>
+            </a:r>
+            <a:endParaRPr lang="en-US" sz="1100" dirty="0"/>
+          </a:p>
+        </p:txBody>
+      </p:sp>
+      <p:sp>
+        <p:nvSpPr>
+          <p:cNvPr id="13" name="Text 10"/>
+          <p:cNvSpPr/>
+          <p:nvPr/>
+        </p:nvSpPr>
+        <p:spPr>
+          <a:xfrm>
+            <a:off x="1335024" y="4087368"/>
+            <a:ext cx="9960559" cy="265176"/>
+          </a:xfrm>
+          <a:prstGeom prst="rect">
+            <a:avLst/>
+          </a:prstGeom>
+          <a:noFill/>
+          <a:ln/>
+        </p:spPr>
+        <p:txBody>
+          <a:bodyPr wrap="square" lIns="0" tIns="0" rIns="0" bIns="0" rtlCol="0" anchor="ctr"/>
+          <a:lstStyle/>
+          <a:p>
+            <a:pPr indent="0" marL="0">
+              <a:lnSpc>
+                <a:spcPct val="90000"/>
+              </a:lnSpc>
+              <a:buNone/>
+            </a:pPr>
+            <a:r>
+              <a:rPr lang="en-US" sz="1300" b="1" dirty="0">
+                <a:solidFill>
+                  <a:srgbClr val="1B2733"/>
+                </a:solidFill>
+                <a:latin typeface="Yu Gothic" pitchFamily="34" charset="0"/>
+                <a:ea typeface="Yu Gothic" pitchFamily="34" charset="-122"/>
+                <a:cs typeface="Yu Gothic" pitchFamily="34" charset="-120"/>
+              </a:rPr>
+              <a:t>通報は110番か119番か、両方か。根拠は何か。</a:t>
+            </a:r>
+            <a:endParaRPr lang="en-US" sz="1300" dirty="0"/>
+          </a:p>
+          <a:p>
+            <a:pPr indent="0" marL="0">
+              <a:lnSpc>
+                <a:spcPct val="90000"/>
+              </a:lnSpc>
+              <a:buNone/>
+            </a:pPr>
+            <a:r>
+              <a:rPr lang="en-US" sz="950" i="1" dirty="0">
+                <a:solidFill>
+                  <a:srgbClr val="5F7183"/>
+                </a:solidFill>
+                <a:latin typeface="Calibri" pitchFamily="34" charset="0"/>
+                <a:ea typeface="Calibri" pitchFamily="34" charset="-122"/>
+                <a:cs typeface="Calibri" pitchFamily="34" charset="-120"/>
+              </a:rPr>
+              <a:t>Police, ambulance, or both? On what basis?</a:t>
+            </a:r>
+            <a:endParaRPr lang="en-US" sz="1300" dirty="0"/>
+          </a:p>
+        </p:txBody>
+      </p:sp>
+      <p:sp>
+        <p:nvSpPr>
+          <p:cNvPr id="14" name="Shape 11"/>
+          <p:cNvSpPr/>
+          <p:nvPr/>
+        </p:nvSpPr>
+        <p:spPr>
+          <a:xfrm>
+            <a:off x="640080" y="4498848"/>
+            <a:ext cx="10911535" cy="374904"/>
+          </a:xfrm>
+          <a:prstGeom prst="roundRect">
+            <a:avLst>
+              <a:gd name="adj" fmla="val 9756"/>
+            </a:avLst>
+          </a:prstGeom>
+          <a:solidFill>
+            <a:srgbClr val="EFF4F8"/>
+          </a:solidFill>
+          <a:ln/>
+        </p:spPr>
+      </p:sp>
+      <p:sp>
+        <p:nvSpPr>
+          <p:cNvPr id="15" name="Shape 12"/>
+          <p:cNvSpPr/>
+          <p:nvPr/>
+        </p:nvSpPr>
+        <p:spPr>
+          <a:xfrm>
+            <a:off x="859536" y="4521708"/>
+            <a:ext cx="329184" cy="329184"/>
+          </a:xfrm>
+          <a:prstGeom prst="ellipse">
+            <a:avLst/>
+          </a:prstGeom>
+          <a:solidFill>
+            <a:srgbClr val="12B198"/>
+          </a:solidFill>
+          <a:ln/>
+        </p:spPr>
+      </p:sp>
+      <p:sp>
+        <p:nvSpPr>
+          <p:cNvPr id="16" name="Text 13"/>
+          <p:cNvSpPr/>
+          <p:nvPr/>
+        </p:nvSpPr>
+        <p:spPr>
+          <a:xfrm>
+            <a:off x="859536" y="4521708"/>
+            <a:ext cx="329184" cy="329184"/>
+          </a:xfrm>
+          <a:prstGeom prst="rect">
+            <a:avLst/>
+          </a:prstGeom>
+          <a:noFill/>
+          <a:ln/>
+        </p:spPr>
+        <p:txBody>
+          <a:bodyPr wrap="square" lIns="0" tIns="0" rIns="0" bIns="0" rtlCol="0" anchor="ctr"/>
+          <a:lstStyle/>
+          <a:p>
+            <a:pPr algn="ctr" indent="0" marL="0">
+              <a:buNone/>
+            </a:pPr>
+            <a:r>
+              <a:rPr lang="en-US" sz="1100" b="1" dirty="0">
+                <a:solidFill>
+                  <a:srgbClr val="FFFFFF"/>
+                </a:solidFill>
+                <a:latin typeface="Calibri" pitchFamily="34" charset="0"/>
+                <a:ea typeface="Calibri" pitchFamily="34" charset="-122"/>
+                <a:cs typeface="Calibri" pitchFamily="34" charset="-120"/>
+              </a:rPr>
+              <a:t>3</a:t>
+            </a:r>
+            <a:endParaRPr lang="en-US" sz="1100" dirty="0"/>
+          </a:p>
+        </p:txBody>
+      </p:sp>
+      <p:sp>
+        <p:nvSpPr>
+          <p:cNvPr id="17" name="Text 14"/>
+          <p:cNvSpPr/>
+          <p:nvPr/>
+        </p:nvSpPr>
+        <p:spPr>
+          <a:xfrm>
+            <a:off x="1335024" y="4553712"/>
+            <a:ext cx="9960559" cy="265176"/>
+          </a:xfrm>
+          <a:prstGeom prst="rect">
+            <a:avLst/>
+          </a:prstGeom>
+          <a:noFill/>
+          <a:ln/>
+        </p:spPr>
+        <p:txBody>
+          <a:bodyPr wrap="square" lIns="0" tIns="0" rIns="0" bIns="0" rtlCol="0" anchor="ctr"/>
+          <a:lstStyle/>
+          <a:p>
+            <a:pPr indent="0" marL="0">
+              <a:lnSpc>
+                <a:spcPct val="90000"/>
+              </a:lnSpc>
+              <a:buNone/>
+            </a:pPr>
+            <a:r>
+              <a:rPr lang="en-US" sz="1300" b="1" dirty="0">
+                <a:solidFill>
+                  <a:srgbClr val="1B2733"/>
+                </a:solidFill>
+                <a:latin typeface="Yu Gothic" pitchFamily="34" charset="0"/>
+                <a:ea typeface="Yu Gothic" pitchFamily="34" charset="-122"/>
+                <a:cs typeface="Yu Gothic" pitchFamily="34" charset="-120"/>
+              </a:rPr>
+              <a:t>身元を確認するため、所持品を見てよいか。根拠は何か。</a:t>
+            </a:r>
+            <a:endParaRPr lang="en-US" sz="1300" dirty="0"/>
+          </a:p>
+          <a:p>
+            <a:pPr indent="0" marL="0">
+              <a:lnSpc>
+                <a:spcPct val="90000"/>
+              </a:lnSpc>
+              <a:buNone/>
+            </a:pPr>
+            <a:r>
+              <a:rPr lang="en-US" sz="950" i="1" dirty="0">
+                <a:solidFill>
+                  <a:srgbClr val="5F7183"/>
+                </a:solidFill>
+                <a:latin typeface="Calibri" pitchFamily="34" charset="0"/>
+                <a:ea typeface="Calibri" pitchFamily="34" charset="-122"/>
+                <a:cs typeface="Calibri" pitchFamily="34" charset="-120"/>
+              </a:rPr>
+              <a:t>May you look through their belongings to identify them? On what basis?</a:t>
+            </a:r>
+            <a:endParaRPr lang="en-US" sz="1300" dirty="0"/>
+          </a:p>
+        </p:txBody>
+      </p:sp>
+      <p:sp>
+        <p:nvSpPr>
+          <p:cNvPr id="18" name="Shape 15"/>
+          <p:cNvSpPr/>
+          <p:nvPr/>
+        </p:nvSpPr>
+        <p:spPr>
+          <a:xfrm>
+            <a:off x="640080" y="4965192"/>
+            <a:ext cx="10911535" cy="374904"/>
+          </a:xfrm>
+          <a:prstGeom prst="roundRect">
+            <a:avLst>
+              <a:gd name="adj" fmla="val 9756"/>
+            </a:avLst>
+          </a:prstGeom>
+          <a:solidFill>
+            <a:srgbClr val="EFF4F8"/>
+          </a:solidFill>
+          <a:ln/>
+        </p:spPr>
+      </p:sp>
+      <p:sp>
+        <p:nvSpPr>
+          <p:cNvPr id="19" name="Shape 16"/>
+          <p:cNvSpPr/>
+          <p:nvPr/>
+        </p:nvSpPr>
+        <p:spPr>
+          <a:xfrm>
+            <a:off x="859536" y="4988052"/>
+            <a:ext cx="329184" cy="329184"/>
+          </a:xfrm>
+          <a:prstGeom prst="ellipse">
+            <a:avLst/>
+          </a:prstGeom>
+          <a:solidFill>
+            <a:srgbClr val="12B198"/>
+          </a:solidFill>
+          <a:ln/>
+        </p:spPr>
+      </p:sp>
+      <p:sp>
+        <p:nvSpPr>
+          <p:cNvPr id="20" name="Text 17"/>
+          <p:cNvSpPr/>
+          <p:nvPr/>
+        </p:nvSpPr>
+        <p:spPr>
+          <a:xfrm>
+            <a:off x="859536" y="4988052"/>
+            <a:ext cx="329184" cy="329184"/>
+          </a:xfrm>
+          <a:prstGeom prst="rect">
+            <a:avLst/>
+          </a:prstGeom>
+          <a:noFill/>
+          <a:ln/>
+        </p:spPr>
+        <p:txBody>
+          <a:bodyPr wrap="square" lIns="0" tIns="0" rIns="0" bIns="0" rtlCol="0" anchor="ctr"/>
+          <a:lstStyle/>
+          <a:p>
+            <a:pPr algn="ctr" indent="0" marL="0">
+              <a:buNone/>
+            </a:pPr>
+            <a:r>
+              <a:rPr lang="en-US" sz="1100" b="1" dirty="0">
+                <a:solidFill>
+                  <a:srgbClr val="FFFFFF"/>
+                </a:solidFill>
+                <a:latin typeface="Calibri" pitchFamily="34" charset="0"/>
+                <a:ea typeface="Calibri" pitchFamily="34" charset="-122"/>
+                <a:cs typeface="Calibri" pitchFamily="34" charset="-120"/>
+              </a:rPr>
+              <a:t>4</a:t>
+            </a:r>
+            <a:endParaRPr lang="en-US" sz="1100" dirty="0"/>
+          </a:p>
+        </p:txBody>
+      </p:sp>
+      <p:sp>
+        <p:nvSpPr>
+          <p:cNvPr id="21" name="Text 18"/>
+          <p:cNvSpPr/>
+          <p:nvPr/>
+        </p:nvSpPr>
+        <p:spPr>
+          <a:xfrm>
+            <a:off x="1335024" y="5020056"/>
+            <a:ext cx="9960559" cy="265176"/>
+          </a:xfrm>
+          <a:prstGeom prst="rect">
+            <a:avLst/>
+          </a:prstGeom>
+          <a:noFill/>
+          <a:ln/>
+        </p:spPr>
+        <p:txBody>
+          <a:bodyPr wrap="square" lIns="0" tIns="0" rIns="0" bIns="0" rtlCol="0" anchor="ctr"/>
+          <a:lstStyle/>
+          <a:p>
+            <a:pPr indent="0" marL="0">
+              <a:lnSpc>
+                <a:spcPct val="90000"/>
+              </a:lnSpc>
+              <a:buNone/>
+            </a:pPr>
+            <a:r>
+              <a:rPr lang="en-US" sz="1300" b="1" dirty="0">
+                <a:solidFill>
+                  <a:srgbClr val="1B2733"/>
+                </a:solidFill>
+                <a:latin typeface="Yu Gothic" pitchFamily="34" charset="0"/>
+                <a:ea typeface="Yu Gothic" pitchFamily="34" charset="-122"/>
+                <a:cs typeface="Yu Gothic" pitchFamily="34" charset="-120"/>
+              </a:rPr>
+              <a:t>現場をどこまで保存するか。社内には誰に、何分以内に上げるか。</a:t>
+            </a:r>
+            <a:endParaRPr lang="en-US" sz="1300" dirty="0"/>
+          </a:p>
+          <a:p>
+            <a:pPr indent="0" marL="0">
+              <a:lnSpc>
+                <a:spcPct val="90000"/>
+              </a:lnSpc>
+              <a:buNone/>
+            </a:pPr>
+            <a:r>
+              <a:rPr lang="en-US" sz="950" i="1" dirty="0">
+                <a:solidFill>
+                  <a:srgbClr val="5F7183"/>
+                </a:solidFill>
+                <a:latin typeface="Calibri" pitchFamily="34" charset="0"/>
+                <a:ea typeface="Calibri" pitchFamily="34" charset="-122"/>
+                <a:cs typeface="Calibri" pitchFamily="34" charset="-120"/>
+              </a:rPr>
+              <a:t>How far do you preserve the scene? Who do you escalate to, and within what time?</a:t>
+            </a:r>
+            <a:endParaRPr lang="en-US" sz="1300" dirty="0"/>
+          </a:p>
+        </p:txBody>
+      </p:sp>
+      <p:sp>
+        <p:nvSpPr>
+          <p:cNvPr id="22" name="Shape 19"/>
           <p:cNvSpPr/>
           <p:nvPr/>
         </p:nvSpPr>
@@ -2742,7 +3804,7 @@
       </p:sp>
       <p:sp>
         <p:nvSpPr>
-          <p:cNvPr id="22" name="Text 20"/>
+          <p:cNvPr id="23" name="Text 20"/>
           <p:cNvSpPr/>
           <p:nvPr/>
         </p:nvSpPr>
@@ -2770,7 +3832,7 @@
             <a:r>
               <a:rPr lang="en-US" sz="1000" b="1" dirty="0">
                 <a:solidFill>
-                  <a:srgbClr val="0E8C79"/>
+                  <a:srgbClr val="0D8A76"/>
                 </a:solidFill>
                 <a:latin typeface="Yu Gothic" pitchFamily="34" charset="0"/>
                 <a:ea typeface="Yu Gothic" pitchFamily="34" charset="-122"/>
@@ -2787,7 +3849,7 @@
             <a:r>
               <a:rPr lang="en-US" sz="850" dirty="0">
                 <a:solidFill>
-                  <a:srgbClr val="0E8C79"/>
+                  <a:srgbClr val="0D8A76"/>
                 </a:solidFill>
                 <a:latin typeface="Calibri" pitchFamily="34" charset="0"/>
                 <a:ea typeface="Calibri" pitchFamily="34" charset="-122"/>
@@ -2830,7 +3892,7 @@
                 <a:ea typeface="Calibri" pitchFamily="34" charset="-122"/>
                 <a:cs typeface="Calibri" pitchFamily="34" charset="-120"/>
               </a:rPr>
-              <a:t>Another employee says "let's clear this up" and starts picking up the broken glass.</a:t>
+              <a:t>Another employee says "let us clear this up" and starts picking up the broken glass.</a:t>
             </a:r>
             <a:endParaRPr lang="en-US" sz="1000" dirty="0"/>
           </a:p>
@@ -2838,7 +3900,7 @@
       </p:sp>
       <p:sp>
         <p:nvSpPr>
-          <p:cNvPr id="23" name="Text 21"/>
+          <p:cNvPr id="24" name="Text 21"/>
           <p:cNvSpPr/>
           <p:nvPr/>
         </p:nvSpPr>
@@ -2891,7 +3953,7 @@
       </p:sp>
       <p:sp>
         <p:nvSpPr>
-          <p:cNvPr id="24" name="Text 22"/>
+          <p:cNvPr id="25" name="Text 22"/>
           <p:cNvSpPr/>
           <p:nvPr/>
         </p:nvSpPr>
@@ -2922,7 +3984,7 @@
                 <a:ea typeface="Calibri" pitchFamily="34" charset="-122"/>
                 <a:cs typeface="Calibri" pitchFamily="34" charset="-120"/>
               </a:rPr>
-              <a:t>10</a:t>
+              <a:t>11</a:t>
             </a:r>
             <a:endParaRPr lang="en-US" sz="1000" dirty="0"/>
           </a:p>
@@ -2960,9 +4022,33 @@
           <a:chExt cx="0" cy="0"/>
         </a:xfrm>
       </p:grpSpPr>
-      <p:sp>
-        <p:nvSpPr>
-          <p:cNvPr id="2" name="Text 0"/>
+      <p:pic>
+        <p:nvPicPr>
+          <p:cNvPr id="2" name="Image 0" descr="/home/user/Training-/assets/logo.png">    </p:cNvPr>
+          <p:cNvPicPr>
+            <a:picLocks noChangeAspect="1"/>
+          </p:cNvPicPr>
+          <p:nvPr/>
+        </p:nvPicPr>
+        <p:blipFill>
+          <a:blip r:embed="rId1"/>
+          <a:stretch>
+            <a:fillRect/>
+          </a:stretch>
+        </p:blipFill>
+        <p:spPr>
+          <a:xfrm>
+            <a:off x="10765231" y="332912"/>
+            <a:ext cx="786384" cy="742353"/>
+          </a:xfrm>
+          <a:prstGeom prst="rect">
+            <a:avLst/>
+          </a:prstGeom>
+        </p:spPr>
+      </p:pic>
+      <p:sp>
+        <p:nvSpPr>
+          <p:cNvPr id="3" name="Text 0"/>
           <p:cNvSpPr/>
           <p:nvPr/>
         </p:nvSpPr>
@@ -2990,7 +4076,7 @@
             <a:r>
               <a:rPr lang="en-US" sz="2700" b="1" dirty="0">
                 <a:solidFill>
-                  <a:srgbClr val="0F2D52"/>
+                  <a:srgbClr val="093259"/>
                 </a:solidFill>
                 <a:latin typeface="Yu Gothic" pitchFamily="34" charset="0"/>
                 <a:ea typeface="Yu Gothic" pitchFamily="34" charset="-122"/>
@@ -3010,7 +4096,7 @@
             <a:r>
               <a:rPr lang="en-US" sz="1250" i="1" dirty="0">
                 <a:solidFill>
-                  <a:srgbClr val="17AF98"/>
+                  <a:srgbClr val="12B198"/>
                 </a:solidFill>
                 <a:latin typeface="Calibri" pitchFamily="34" charset="0"/>
                 <a:ea typeface="Calibri" pitchFamily="34" charset="-122"/>
@@ -3024,7 +4110,7 @@
       </p:sp>
       <p:sp>
         <p:nvSpPr>
-          <p:cNvPr id="3" name="Text 1"/>
+          <p:cNvPr id="4" name="Text 1"/>
           <p:cNvSpPr/>
           <p:nvPr/>
         </p:nvSpPr>
@@ -3052,13 +4138,13 @@
             <a:r>
               <a:rPr lang="en-US" sz="1300" dirty="0">
                 <a:solidFill>
-                  <a:srgbClr val="0F2D52"/>
+                  <a:srgbClr val="093259"/>
                 </a:solidFill>
                 <a:latin typeface="Yu Gothic" pitchFamily="34" charset="0"/>
                 <a:ea typeface="Yu Gothic" pitchFamily="34" charset="-122"/>
                 <a:cs typeface="Yu Gothic" pitchFamily="34" charset="-120"/>
               </a:rPr>
-              <a:t>同じ法定科目を、実技と講義に分けています。重複させません。</a:t>
+              <a:t>同じ法定科目を、実技と講義に分けています。内容は重複させません。</a:t>
             </a:r>
             <a:endParaRPr lang="en-US" sz="1300" dirty="0"/>
           </a:p>
@@ -3078,7 +4164,7 @@
                 <a:ea typeface="Calibri" pitchFamily="34" charset="-122"/>
                 <a:cs typeface="Calibri" pitchFamily="34" charset="-120"/>
               </a:rPr>
-              <a:t>The same statutory subject, split between practical and classroom work. We will not repeat it.</a:t>
+              <a:t>The same statutory subject, split between practical and classroom sessions. We do not repeat it.</a:t>
             </a:r>
             <a:endParaRPr lang="en-US" sz="1300" dirty="0"/>
           </a:p>
@@ -3086,7 +4172,7 @@
       </p:sp>
       <p:sp>
         <p:nvSpPr>
-          <p:cNvPr id="4" name="Shape 2"/>
+          <p:cNvPr id="5" name="Shape 2"/>
           <p:cNvSpPr/>
           <p:nvPr/>
         </p:nvSpPr>
@@ -3108,7 +4194,7 @@
       </p:sp>
       <p:sp>
         <p:nvSpPr>
-          <p:cNvPr id="5" name="Text 3"/>
+          <p:cNvPr id="6" name="Text 3"/>
           <p:cNvSpPr/>
           <p:nvPr/>
         </p:nvSpPr>
@@ -3136,7 +4222,7 @@
             <a:r>
               <a:rPr lang="en-US" sz="1600" b="1" dirty="0">
                 <a:solidFill>
-                  <a:srgbClr val="0F2D52"/>
+                  <a:srgbClr val="093259"/>
                 </a:solidFill>
                 <a:latin typeface="Yu Gothic" pitchFamily="34" charset="0"/>
                 <a:ea typeface="Yu Gothic" pitchFamily="34" charset="-122"/>
@@ -3170,7 +4256,7 @@
       </p:sp>
       <p:sp>
         <p:nvSpPr>
-          <p:cNvPr id="6" name="Text 4"/>
+          <p:cNvPr id="7" name="Text 4"/>
           <p:cNvSpPr/>
           <p:nvPr/>
         </p:nvSpPr>
@@ -3330,7 +4416,7 @@
       </p:sp>
       <p:sp>
         <p:nvSpPr>
-          <p:cNvPr id="7" name="Shape 5"/>
+          <p:cNvPr id="8" name="Shape 5"/>
           <p:cNvSpPr/>
           <p:nvPr/>
         </p:nvSpPr>
@@ -3352,7 +4438,7 @@
       </p:sp>
       <p:sp>
         <p:nvSpPr>
-          <p:cNvPr id="8" name="Text 6"/>
+          <p:cNvPr id="9" name="Text 6"/>
           <p:cNvSpPr/>
           <p:nvPr/>
         </p:nvSpPr>
@@ -3380,7 +4466,7 @@
             <a:r>
               <a:rPr lang="en-US" sz="1600" b="1" dirty="0">
                 <a:solidFill>
-                  <a:srgbClr val="0E8C79"/>
+                  <a:srgbClr val="0D8A76"/>
                 </a:solidFill>
                 <a:latin typeface="Yu Gothic" pitchFamily="34" charset="0"/>
                 <a:ea typeface="Yu Gothic" pitchFamily="34" charset="-122"/>
@@ -3414,7 +4500,7 @@
       </p:sp>
       <p:sp>
         <p:nvSpPr>
-          <p:cNvPr id="9" name="Text 7"/>
+          <p:cNvPr id="10" name="Text 7"/>
           <p:cNvSpPr/>
           <p:nvPr/>
         </p:nvSpPr>
@@ -3451,7 +4537,7 @@
                 <a:ea typeface="Yu Gothic" pitchFamily="34" charset="-122"/>
                 <a:cs typeface="Yu Gothic" pitchFamily="34" charset="-120"/>
               </a:rPr>
-              <a:t>・通報 ― 110番・119番</a:t>
+              <a:t>・通報 ― 110番、119番</a:t>
             </a:r>
             <a:endParaRPr lang="en-US" sz="1250" dirty="0"/>
           </a:p>
@@ -3474,7 +4560,7 @@
                 <a:ea typeface="Calibri" pitchFamily="34" charset="-122"/>
                 <a:cs typeface="Calibri" pitchFamily="34" charset="-120"/>
               </a:rPr>
-              <a:t>　 Reporting — emergency calls</a:t>
+              <a:t>　 Emergency calls</a:t>
             </a:r>
             <a:endParaRPr lang="en-US" sz="1250" dirty="0"/>
           </a:p>
@@ -3520,7 +4606,7 @@
                 <a:ea typeface="Calibri" pitchFamily="34" charset="-122"/>
                 <a:cs typeface="Calibri" pitchFamily="34" charset="-120"/>
               </a:rPr>
-              <a:t>　 Call practice — everyone speaks</a:t>
+              <a:t>　 Call practice. Everyone speaks</a:t>
             </a:r>
             <a:endParaRPr lang="en-US" sz="1250" dirty="0"/>
           </a:p>
@@ -3620,7 +4706,7 @@
       </p:sp>
       <p:sp>
         <p:nvSpPr>
-          <p:cNvPr id="10" name="Text 8"/>
+          <p:cNvPr id="11" name="Text 8"/>
           <p:cNvSpPr/>
           <p:nvPr/>
         </p:nvSpPr>
@@ -3648,7 +4734,7 @@
             <a:r>
               <a:rPr lang="en-US" sz="1300" b="1" dirty="0">
                 <a:solidFill>
-                  <a:srgbClr val="0E8C79"/>
+                  <a:srgbClr val="0D8A76"/>
                 </a:solidFill>
                 <a:latin typeface="Yu Gothic" pitchFamily="34" charset="0"/>
                 <a:ea typeface="Yu Gothic" pitchFamily="34" charset="-122"/>
@@ -3674,7 +4760,7 @@
                 <a:ea typeface="Calibri" pitchFamily="34" charset="-122"/>
                 <a:cs typeface="Calibri" pitchFamily="34" charset="-120"/>
               </a:rPr>
-              <a:t>AED and compressions are not covered here — Period 3 is assumed.</a:t>
+              <a:t>AED and compressions are not covered here. Period 3 is assumed.</a:t>
             </a:r>
             <a:endParaRPr lang="en-US" sz="1300" dirty="0"/>
           </a:p>
@@ -3682,7 +4768,7 @@
       </p:sp>
       <p:sp>
         <p:nvSpPr>
-          <p:cNvPr id="11" name="Text 9"/>
+          <p:cNvPr id="12" name="Text 9"/>
           <p:cNvSpPr/>
           <p:nvPr/>
         </p:nvSpPr>
@@ -3735,7 +4821,7 @@
       </p:sp>
       <p:sp>
         <p:nvSpPr>
-          <p:cNvPr id="12" name="Text 10"/>
+          <p:cNvPr id="13" name="Text 10"/>
           <p:cNvSpPr/>
           <p:nvPr/>
         </p:nvSpPr>
@@ -3804,9 +4890,33 @@
           <a:chExt cx="0" cy="0"/>
         </a:xfrm>
       </p:grpSpPr>
-      <p:sp>
-        <p:nvSpPr>
-          <p:cNvPr id="2" name="Text 0"/>
+      <p:pic>
+        <p:nvPicPr>
+          <p:cNvPr id="2" name="Image 0" descr="/home/user/Training-/assets/logo.png">    </p:cNvPr>
+          <p:cNvPicPr>
+            <a:picLocks noChangeAspect="1"/>
+          </p:cNvPicPr>
+          <p:nvPr/>
+        </p:nvPicPr>
+        <p:blipFill>
+          <a:blip r:embed="rId1"/>
+          <a:stretch>
+            <a:fillRect/>
+          </a:stretch>
+        </p:blipFill>
+        <p:spPr>
+          <a:xfrm>
+            <a:off x="10765231" y="332912"/>
+            <a:ext cx="786384" cy="742353"/>
+          </a:xfrm>
+          <a:prstGeom prst="rect">
+            <a:avLst/>
+          </a:prstGeom>
+        </p:spPr>
+      </p:pic>
+      <p:sp>
+        <p:nvSpPr>
+          <p:cNvPr id="3" name="Text 0"/>
           <p:cNvSpPr/>
           <p:nvPr/>
         </p:nvSpPr>
@@ -3834,7 +4944,7 @@
             <a:r>
               <a:rPr lang="en-US" sz="2700" b="1" dirty="0">
                 <a:solidFill>
-                  <a:srgbClr val="0F2D52"/>
+                  <a:srgbClr val="093259"/>
                 </a:solidFill>
                 <a:latin typeface="Yu Gothic" pitchFamily="34" charset="0"/>
                 <a:ea typeface="Yu Gothic" pitchFamily="34" charset="-122"/>
@@ -3854,7 +4964,7 @@
             <a:r>
               <a:rPr lang="en-US" sz="1250" i="1" dirty="0">
                 <a:solidFill>
-                  <a:srgbClr val="17AF98"/>
+                  <a:srgbClr val="12B198"/>
                 </a:solidFill>
                 <a:latin typeface="Calibri" pitchFamily="34" charset="0"/>
                 <a:ea typeface="Calibri" pitchFamily="34" charset="-122"/>
@@ -3868,7 +4978,7 @@
       </p:sp>
       <p:sp>
         <p:nvSpPr>
-          <p:cNvPr id="3" name="Text 1"/>
+          <p:cNvPr id="4" name="Text 1"/>
           <p:cNvSpPr/>
           <p:nvPr/>
         </p:nvSpPr>
@@ -3896,13 +5006,13 @@
             <a:r>
               <a:rPr lang="en-US" sz="1300" dirty="0">
                 <a:solidFill>
-                  <a:srgbClr val="0F2D52"/>
+                  <a:srgbClr val="093259"/>
                 </a:solidFill>
                 <a:latin typeface="Yu Gothic" pitchFamily="34" charset="0"/>
                 <a:ea typeface="Yu Gothic" pitchFamily="34" charset="-122"/>
                 <a:cs typeface="Yu Gothic" pitchFamily="34" charset="-120"/>
               </a:rPr>
-              <a:t>事故対応の失敗は、判断ミスよりも報告の失敗で起きます。</a:t>
+              <a:t>事故対応では、判断の誤りよりも、報告の誤りによる問題が多く生じます。</a:t>
             </a:r>
             <a:endParaRPr lang="en-US" sz="1300" dirty="0"/>
           </a:p>
@@ -3922,7 +5032,7 @@
                 <a:ea typeface="Calibri" pitchFamily="34" charset="-122"/>
                 <a:cs typeface="Calibri" pitchFamily="34" charset="-120"/>
               </a:rPr>
-              <a:t>Incidents go wrong through failures of reporting far more often than failures of judgement.</a:t>
+              <a:t>In incident response, errors in reporting cause more problems than errors in judgement.</a:t>
             </a:r>
             <a:endParaRPr lang="en-US" sz="1300" dirty="0"/>
           </a:p>
@@ -3930,7 +5040,7 @@
       </p:sp>
       <p:sp>
         <p:nvSpPr>
-          <p:cNvPr id="4" name="Shape 2"/>
+          <p:cNvPr id="5" name="Shape 2"/>
           <p:cNvSpPr/>
           <p:nvPr/>
         </p:nvSpPr>
@@ -3952,7 +5062,7 @@
       </p:sp>
       <p:sp>
         <p:nvSpPr>
-          <p:cNvPr id="5" name="Shape 3"/>
+          <p:cNvPr id="6" name="Shape 3"/>
           <p:cNvSpPr/>
           <p:nvPr/>
         </p:nvSpPr>
@@ -3965,14 +5075,14 @@
             <a:avLst/>
           </a:prstGeom>
           <a:solidFill>
-            <a:srgbClr val="17AF98"/>
+            <a:srgbClr val="12B198"/>
           </a:solidFill>
           <a:ln/>
         </p:spPr>
       </p:sp>
       <p:sp>
         <p:nvSpPr>
-          <p:cNvPr id="6" name="Text 4"/>
+          <p:cNvPr id="7" name="Text 4"/>
           <p:cNvSpPr/>
           <p:nvPr/>
         </p:nvSpPr>
@@ -4011,7 +5121,7 @@
       </p:sp>
       <p:sp>
         <p:nvSpPr>
-          <p:cNvPr id="7" name="Text 5"/>
+          <p:cNvPr id="8" name="Text 5"/>
           <p:cNvSpPr/>
           <p:nvPr/>
         </p:nvSpPr>
@@ -4045,7 +5155,7 @@
                 <a:ea typeface="Yu Gothic" pitchFamily="34" charset="-122"/>
                 <a:cs typeface="Yu Gothic" pitchFamily="34" charset="-120"/>
               </a:rPr>
-              <a:t>事実（見た・聞いた）：「20時15分、B1東側非常口が15cmほど開いていた」</a:t>
+              <a:t>事実（見た、聞いた）：「20時15分、B1東側非常口が15cmほど開いていた」</a:t>
             </a:r>
             <a:endParaRPr lang="en-US" sz="1450" dirty="0"/>
           </a:p>
@@ -4065,7 +5175,7 @@
                 <a:ea typeface="Calibri" pitchFamily="34" charset="-122"/>
                 <a:cs typeface="Calibri" pitchFamily="34" charset="-120"/>
               </a:rPr>
-              <a:t>Fact — what you saw or heard: "At 20:15 the B1 east emergency door stood about 15 cm open."</a:t>
+              <a:t>Fact, what you saw or heard: "At 20:15 the B1 east emergency door was about 15 cm open."</a:t>
             </a:r>
             <a:endParaRPr lang="en-US" sz="1450" dirty="0"/>
           </a:p>
@@ -4073,7 +5183,7 @@
       </p:sp>
       <p:sp>
         <p:nvSpPr>
-          <p:cNvPr id="8" name="Shape 6"/>
+          <p:cNvPr id="9" name="Shape 6"/>
           <p:cNvSpPr/>
           <p:nvPr/>
         </p:nvSpPr>
@@ -4095,7 +5205,7 @@
       </p:sp>
       <p:sp>
         <p:nvSpPr>
-          <p:cNvPr id="9" name="Shape 7"/>
+          <p:cNvPr id="10" name="Shape 7"/>
           <p:cNvSpPr/>
           <p:nvPr/>
         </p:nvSpPr>
@@ -4108,14 +5218,14 @@
             <a:avLst/>
           </a:prstGeom>
           <a:solidFill>
-            <a:srgbClr val="17AF98"/>
+            <a:srgbClr val="12B198"/>
           </a:solidFill>
           <a:ln/>
         </p:spPr>
       </p:sp>
       <p:sp>
         <p:nvSpPr>
-          <p:cNvPr id="10" name="Text 8"/>
+          <p:cNvPr id="11" name="Text 8"/>
           <p:cNvSpPr/>
           <p:nvPr/>
         </p:nvSpPr>
@@ -4154,7 +5264,7 @@
       </p:sp>
       <p:sp>
         <p:nvSpPr>
-          <p:cNvPr id="11" name="Text 9"/>
+          <p:cNvPr id="12" name="Text 9"/>
           <p:cNvSpPr/>
           <p:nvPr/>
         </p:nvSpPr>
@@ -4188,7 +5298,7 @@
                 <a:ea typeface="Yu Gothic" pitchFamily="34" charset="-122"/>
                 <a:cs typeface="Yu Gothic" pitchFamily="34" charset="-120"/>
               </a:rPr>
-              <a:t>評価（思った・推測した）：「侵入者がいるかもしれない」</a:t>
+              <a:t>評価（思った、推測した）：「侵入者がいるかもしれない」</a:t>
             </a:r>
             <a:endParaRPr lang="en-US" sz="1450" dirty="0"/>
           </a:p>
@@ -4208,7 +5318,7 @@
                 <a:ea typeface="Calibri" pitchFamily="34" charset="-122"/>
                 <a:cs typeface="Calibri" pitchFamily="34" charset="-120"/>
               </a:rPr>
-              <a:t>Assessment — what you concluded: "There may be an intruder."</a:t>
+              <a:t>Assessment, what you concluded: "There may be an intruder."</a:t>
             </a:r>
             <a:endParaRPr lang="en-US" sz="1450" dirty="0"/>
           </a:p>
@@ -4216,7 +5326,7 @@
       </p:sp>
       <p:sp>
         <p:nvSpPr>
-          <p:cNvPr id="12" name="Shape 10"/>
+          <p:cNvPr id="13" name="Shape 10"/>
           <p:cNvSpPr/>
           <p:nvPr/>
         </p:nvSpPr>
@@ -4238,7 +5348,7 @@
       </p:sp>
       <p:sp>
         <p:nvSpPr>
-          <p:cNvPr id="13" name="Shape 11"/>
+          <p:cNvPr id="14" name="Shape 11"/>
           <p:cNvSpPr/>
           <p:nvPr/>
         </p:nvSpPr>
@@ -4251,14 +5361,14 @@
             <a:avLst/>
           </a:prstGeom>
           <a:solidFill>
-            <a:srgbClr val="17AF98"/>
+            <a:srgbClr val="12B198"/>
           </a:solidFill>
           <a:ln/>
         </p:spPr>
       </p:sp>
       <p:sp>
         <p:nvSpPr>
-          <p:cNvPr id="14" name="Text 12"/>
+          <p:cNvPr id="15" name="Text 12"/>
           <p:cNvSpPr/>
           <p:nvPr/>
         </p:nvSpPr>
@@ -4297,7 +5407,7 @@
       </p:sp>
       <p:sp>
         <p:nvSpPr>
-          <p:cNvPr id="15" name="Text 13"/>
+          <p:cNvPr id="16" name="Text 13"/>
           <p:cNvSpPr/>
           <p:nvPr/>
         </p:nvSpPr>
@@ -4331,7 +5441,7 @@
                 <a:ea typeface="Yu Gothic" pitchFamily="34" charset="-122"/>
                 <a:cs typeface="Yu Gothic" pitchFamily="34" charset="-120"/>
               </a:rPr>
-              <a:t>NG（混ざっている）：「不審者が非常口から入りました」</a:t>
+              <a:t>誤り（混ざっている）：「不審者が非常口から入りました」</a:t>
             </a:r>
             <a:endParaRPr lang="en-US" sz="1450" dirty="0"/>
           </a:p>
@@ -4351,7 +5461,7 @@
                 <a:ea typeface="Calibri" pitchFamily="34" charset="-122"/>
                 <a:cs typeface="Calibri" pitchFamily="34" charset="-120"/>
               </a:rPr>
-              <a:t>Wrong — the two fused: "An intruder came in through the emergency exit."</a:t>
+              <a:t>Wrong, the two combined: "An intruder came in through the emergency exit."</a:t>
             </a:r>
             <a:endParaRPr lang="en-US" sz="1450" dirty="0"/>
           </a:p>
@@ -4359,7 +5469,7 @@
       </p:sp>
       <p:sp>
         <p:nvSpPr>
-          <p:cNvPr id="16" name="Shape 14"/>
+          <p:cNvPr id="17" name="Shape 14"/>
           <p:cNvSpPr/>
           <p:nvPr/>
         </p:nvSpPr>
@@ -4381,7 +5491,7 @@
       </p:sp>
       <p:sp>
         <p:nvSpPr>
-          <p:cNvPr id="17" name="Shape 15"/>
+          <p:cNvPr id="18" name="Shape 15"/>
           <p:cNvSpPr/>
           <p:nvPr/>
         </p:nvSpPr>
@@ -4394,14 +5504,14 @@
             <a:avLst/>
           </a:prstGeom>
           <a:solidFill>
-            <a:srgbClr val="17AF98"/>
+            <a:srgbClr val="12B198"/>
           </a:solidFill>
           <a:ln/>
         </p:spPr>
       </p:sp>
       <p:sp>
         <p:nvSpPr>
-          <p:cNvPr id="18" name="Text 16"/>
+          <p:cNvPr id="19" name="Text 16"/>
           <p:cNvSpPr/>
           <p:nvPr/>
         </p:nvSpPr>
@@ -4440,7 +5550,7 @@
       </p:sp>
       <p:sp>
         <p:nvSpPr>
-          <p:cNvPr id="19" name="Text 17"/>
+          <p:cNvPr id="20" name="Text 17"/>
           <p:cNvSpPr/>
           <p:nvPr/>
         </p:nvSpPr>
@@ -4474,7 +5584,7 @@
                 <a:ea typeface="Yu Gothic" pitchFamily="34" charset="-122"/>
                 <a:cs typeface="Yu Gothic" pitchFamily="34" charset="-120"/>
               </a:rPr>
-              <a:t>順序は、事実が先。評価は「〜と思われます」と明示して後に。</a:t>
+              <a:t>事実を先に述べます。評価は「〜と思われます」と明示して後に述べます。</a:t>
             </a:r>
             <a:endParaRPr lang="en-US" sz="1450" dirty="0"/>
           </a:p>
@@ -4494,7 +5604,7 @@
                 <a:ea typeface="Calibri" pitchFamily="34" charset="-122"/>
                 <a:cs typeface="Calibri" pitchFamily="34" charset="-120"/>
               </a:rPr>
-              <a:t>Fact first. Flag assessment explicitly — "in my judgement…" — and put it second.</a:t>
+              <a:t>State fact first. State assessment after, and mark it clearly as your view.</a:t>
             </a:r>
             <a:endParaRPr lang="en-US" sz="1450" dirty="0"/>
           </a:p>
@@ -4502,7 +5612,7 @@
       </p:sp>
       <p:sp>
         <p:nvSpPr>
-          <p:cNvPr id="20" name="Text 18"/>
+          <p:cNvPr id="21" name="Text 18"/>
           <p:cNvSpPr/>
           <p:nvPr/>
         </p:nvSpPr>
@@ -4555,7 +5665,7 @@
       </p:sp>
       <p:sp>
         <p:nvSpPr>
-          <p:cNvPr id="21" name="Text 19"/>
+          <p:cNvPr id="22" name="Text 19"/>
           <p:cNvSpPr/>
           <p:nvPr/>
         </p:nvSpPr>
@@ -4624,9 +5734,33 @@
           <a:chExt cx="0" cy="0"/>
         </a:xfrm>
       </p:grpSpPr>
-      <p:sp>
-        <p:nvSpPr>
-          <p:cNvPr id="2" name="Text 0"/>
+      <p:pic>
+        <p:nvPicPr>
+          <p:cNvPr id="2" name="Image 0" descr="/home/user/Training-/assets/logo.png">    </p:cNvPr>
+          <p:cNvPicPr>
+            <a:picLocks noChangeAspect="1"/>
+          </p:cNvPicPr>
+          <p:nvPr/>
+        </p:nvPicPr>
+        <p:blipFill>
+          <a:blip r:embed="rId1"/>
+          <a:stretch>
+            <a:fillRect/>
+          </a:stretch>
+        </p:blipFill>
+        <p:spPr>
+          <a:xfrm>
+            <a:off x="10765231" y="332912"/>
+            <a:ext cx="786384" cy="742353"/>
+          </a:xfrm>
+          <a:prstGeom prst="rect">
+            <a:avLst/>
+          </a:prstGeom>
+        </p:spPr>
+      </p:pic>
+      <p:sp>
+        <p:nvSpPr>
+          <p:cNvPr id="3" name="Text 0"/>
           <p:cNvSpPr/>
           <p:nvPr/>
         </p:nvSpPr>
@@ -4654,7 +5788,7 @@
             <a:r>
               <a:rPr lang="en-US" sz="2700" b="1" dirty="0">
                 <a:solidFill>
-                  <a:srgbClr val="0F2D52"/>
+                  <a:srgbClr val="093259"/>
                 </a:solidFill>
                 <a:latin typeface="Yu Gothic" pitchFamily="34" charset="0"/>
                 <a:ea typeface="Yu Gothic" pitchFamily="34" charset="-122"/>
@@ -4674,7 +5808,7 @@
             <a:r>
               <a:rPr lang="en-US" sz="1250" i="1" dirty="0">
                 <a:solidFill>
-                  <a:srgbClr val="17AF98"/>
+                  <a:srgbClr val="12B198"/>
                 </a:solidFill>
                 <a:latin typeface="Calibri" pitchFamily="34" charset="0"/>
                 <a:ea typeface="Calibri" pitchFamily="34" charset="-122"/>
@@ -4688,7 +5822,7 @@
       </p:sp>
       <p:sp>
         <p:nvSpPr>
-          <p:cNvPr id="3" name="Shape 1"/>
+          <p:cNvPr id="4" name="Shape 1"/>
           <p:cNvSpPr/>
           <p:nvPr/>
         </p:nvSpPr>
@@ -4710,7 +5844,7 @@
       </p:sp>
       <p:sp>
         <p:nvSpPr>
-          <p:cNvPr id="4" name="Shape 2"/>
+          <p:cNvPr id="5" name="Shape 2"/>
           <p:cNvSpPr/>
           <p:nvPr/>
         </p:nvSpPr>
@@ -4723,14 +5857,14 @@
             <a:avLst/>
           </a:prstGeom>
           <a:solidFill>
-            <a:srgbClr val="0F2D52"/>
+            <a:srgbClr val="093259"/>
           </a:solidFill>
           <a:ln/>
         </p:spPr>
       </p:sp>
       <p:sp>
         <p:nvSpPr>
-          <p:cNvPr id="5" name="Text 3"/>
+          <p:cNvPr id="6" name="Text 3"/>
           <p:cNvSpPr/>
           <p:nvPr/>
         </p:nvSpPr>
@@ -4769,7 +5903,7 @@
       </p:sp>
       <p:sp>
         <p:nvSpPr>
-          <p:cNvPr id="6" name="Text 4"/>
+          <p:cNvPr id="7" name="Text 4"/>
           <p:cNvSpPr/>
           <p:nvPr/>
         </p:nvSpPr>
@@ -4797,7 +5931,7 @@
             <a:r>
               <a:rPr lang="en-US" sz="1600" b="1" dirty="0">
                 <a:solidFill>
-                  <a:srgbClr val="0F2D52"/>
+                  <a:srgbClr val="093259"/>
                 </a:solidFill>
                 <a:latin typeface="Yu Gothic" pitchFamily="34" charset="0"/>
                 <a:ea typeface="Yu Gothic" pitchFamily="34" charset="-122"/>
@@ -4817,7 +5951,7 @@
             <a:r>
               <a:rPr lang="en-US" sz="1000" i="1" dirty="0">
                 <a:solidFill>
-                  <a:srgbClr val="17AF98"/>
+                  <a:srgbClr val="12B198"/>
                 </a:solidFill>
                 <a:latin typeface="Calibri" pitchFamily="34" charset="0"/>
                 <a:ea typeface="Calibri" pitchFamily="34" charset="-122"/>
@@ -4831,7 +5965,7 @@
       </p:sp>
       <p:sp>
         <p:nvSpPr>
-          <p:cNvPr id="7" name="Text 5"/>
+          <p:cNvPr id="8" name="Text 5"/>
           <p:cNvSpPr/>
           <p:nvPr/>
         </p:nvSpPr>
@@ -4865,7 +5999,7 @@
                 <a:ea typeface="Yu Gothic" pitchFamily="34" charset="-122"/>
                 <a:cs typeface="Yu Gothic" pitchFamily="34" charset="-120"/>
               </a:rPr>
-              <a:t>覚知後ただちに。完全でなくてよい。速さが優先。</a:t>
+              <a:t>覚知後ただちに行います。完全でなくてかまいません。</a:t>
             </a:r>
             <a:endParaRPr lang="en-US" sz="1250" dirty="0"/>
           </a:p>
@@ -4885,7 +6019,7 @@
                 <a:ea typeface="Yu Gothic" pitchFamily="34" charset="-122"/>
                 <a:cs typeface="Yu Gothic" pitchFamily="34" charset="-120"/>
               </a:rPr>
-              <a:t>何が・どこで・いま安全か。</a:t>
+              <a:t>何が、どこで、いま安全か。</a:t>
             </a:r>
             <a:endParaRPr lang="en-US" sz="1250" dirty="0"/>
           </a:p>
@@ -4905,7 +6039,7 @@
                 <a:ea typeface="Calibri" pitchFamily="34" charset="-122"/>
                 <a:cs typeface="Calibri" pitchFamily="34" charset="-120"/>
               </a:rPr>
-              <a:t>Immediately on becoming aware. It need not be complete — speed wins. What, where, and is it safe now.</a:t>
+              <a:t>Immediately when you become aware. It does not need to be complete. What, where, and is it safe now.</a:t>
             </a:r>
             <a:endParaRPr lang="en-US" sz="1250" dirty="0"/>
           </a:p>
@@ -4913,7 +6047,7 @@
       </p:sp>
       <p:sp>
         <p:nvSpPr>
-          <p:cNvPr id="8" name="Shape 6"/>
+          <p:cNvPr id="9" name="Shape 6"/>
           <p:cNvSpPr/>
           <p:nvPr/>
         </p:nvSpPr>
@@ -4935,7 +6069,7 @@
       </p:sp>
       <p:sp>
         <p:nvSpPr>
-          <p:cNvPr id="9" name="Shape 7"/>
+          <p:cNvPr id="10" name="Shape 7"/>
           <p:cNvSpPr/>
           <p:nvPr/>
         </p:nvSpPr>
@@ -4948,14 +6082,14 @@
             <a:avLst/>
           </a:prstGeom>
           <a:solidFill>
-            <a:srgbClr val="17AF98"/>
+            <a:srgbClr val="12B198"/>
           </a:solidFill>
           <a:ln/>
         </p:spPr>
       </p:sp>
       <p:sp>
         <p:nvSpPr>
-          <p:cNvPr id="10" name="Text 8"/>
+          <p:cNvPr id="11" name="Text 8"/>
           <p:cNvSpPr/>
           <p:nvPr/>
         </p:nvSpPr>
@@ -4994,7 +6128,7 @@
       </p:sp>
       <p:sp>
         <p:nvSpPr>
-          <p:cNvPr id="11" name="Text 9"/>
+          <p:cNvPr id="12" name="Text 9"/>
           <p:cNvSpPr/>
           <p:nvPr/>
         </p:nvSpPr>
@@ -5022,7 +6156,7 @@
             <a:r>
               <a:rPr lang="en-US" sz="1600" b="1" dirty="0">
                 <a:solidFill>
-                  <a:srgbClr val="0F2D52"/>
+                  <a:srgbClr val="093259"/>
                 </a:solidFill>
                 <a:latin typeface="Yu Gothic" pitchFamily="34" charset="0"/>
                 <a:ea typeface="Yu Gothic" pitchFamily="34" charset="-122"/>
@@ -5042,7 +6176,7 @@
             <a:r>
               <a:rPr lang="en-US" sz="1000" i="1" dirty="0">
                 <a:solidFill>
-                  <a:srgbClr val="17AF98"/>
+                  <a:srgbClr val="12B198"/>
                 </a:solidFill>
                 <a:latin typeface="Calibri" pitchFamily="34" charset="0"/>
                 <a:ea typeface="Calibri" pitchFamily="34" charset="-122"/>
@@ -5056,7 +6190,7 @@
       </p:sp>
       <p:sp>
         <p:nvSpPr>
-          <p:cNvPr id="12" name="Text 10"/>
+          <p:cNvPr id="13" name="Text 10"/>
           <p:cNvSpPr/>
           <p:nvPr/>
         </p:nvSpPr>
@@ -5090,7 +6224,7 @@
                 <a:ea typeface="Yu Gothic" pitchFamily="34" charset="-122"/>
                 <a:cs typeface="Yu Gothic" pitchFamily="34" charset="-120"/>
               </a:rPr>
-              <a:t>状況が動くたびに、変化点だけ。</a:t>
+              <a:t>状況が変わるたびに、変化した点だけを報告します。</a:t>
             </a:r>
             <a:endParaRPr lang="en-US" sz="1250" dirty="0"/>
           </a:p>
@@ -5110,7 +6244,7 @@
                 <a:ea typeface="Yu Gothic" pitchFamily="34" charset="-122"/>
                 <a:cs typeface="Yu Gothic" pitchFamily="34" charset="-120"/>
               </a:rPr>
-              <a:t>「変化なし」も報告する。</a:t>
+              <a:t>「変化なし」も報告します。</a:t>
             </a:r>
             <a:endParaRPr lang="en-US" sz="1250" dirty="0"/>
           </a:p>
@@ -5130,7 +6264,7 @@
                 <a:ea typeface="Calibri" pitchFamily="34" charset="-122"/>
                 <a:cs typeface="Calibri" pitchFamily="34" charset="-120"/>
               </a:rPr>
-              <a:t>Each time the situation moves — the change only. "No change" is also an update.</a:t>
+              <a:t>Each time the situation changes, report the change only. "No change" is also reported.</a:t>
             </a:r>
             <a:endParaRPr lang="en-US" sz="1250" dirty="0"/>
           </a:p>
@@ -5138,7 +6272,7 @@
       </p:sp>
       <p:sp>
         <p:nvSpPr>
-          <p:cNvPr id="13" name="Shape 11"/>
+          <p:cNvPr id="14" name="Shape 11"/>
           <p:cNvSpPr/>
           <p:nvPr/>
         </p:nvSpPr>
@@ -5160,7 +6294,7 @@
       </p:sp>
       <p:sp>
         <p:nvSpPr>
-          <p:cNvPr id="14" name="Shape 12"/>
+          <p:cNvPr id="15" name="Shape 12"/>
           <p:cNvSpPr/>
           <p:nvPr/>
         </p:nvSpPr>
@@ -5173,14 +6307,14 @@
             <a:avLst/>
           </a:prstGeom>
           <a:solidFill>
-            <a:srgbClr val="0F2D52"/>
+            <a:srgbClr val="093259"/>
           </a:solidFill>
           <a:ln/>
         </p:spPr>
       </p:sp>
       <p:sp>
         <p:nvSpPr>
-          <p:cNvPr id="15" name="Text 13"/>
+          <p:cNvPr id="16" name="Text 13"/>
           <p:cNvSpPr/>
           <p:nvPr/>
         </p:nvSpPr>
@@ -5219,7 +6353,7 @@
       </p:sp>
       <p:sp>
         <p:nvSpPr>
-          <p:cNvPr id="16" name="Text 14"/>
+          <p:cNvPr id="17" name="Text 14"/>
           <p:cNvSpPr/>
           <p:nvPr/>
         </p:nvSpPr>
@@ -5247,7 +6381,7 @@
             <a:r>
               <a:rPr lang="en-US" sz="1600" b="1" dirty="0">
                 <a:solidFill>
-                  <a:srgbClr val="0F2D52"/>
+                  <a:srgbClr val="093259"/>
                 </a:solidFill>
                 <a:latin typeface="Yu Gothic" pitchFamily="34" charset="0"/>
                 <a:ea typeface="Yu Gothic" pitchFamily="34" charset="-122"/>
@@ -5267,7 +6401,7 @@
             <a:r>
               <a:rPr lang="en-US" sz="1000" i="1" dirty="0">
                 <a:solidFill>
-                  <a:srgbClr val="17AF98"/>
+                  <a:srgbClr val="12B198"/>
                 </a:solidFill>
                 <a:latin typeface="Calibri" pitchFamily="34" charset="0"/>
                 <a:ea typeface="Calibri" pitchFamily="34" charset="-122"/>
@@ -5281,7 +6415,7 @@
       </p:sp>
       <p:sp>
         <p:nvSpPr>
-          <p:cNvPr id="17" name="Text 15"/>
+          <p:cNvPr id="18" name="Text 15"/>
           <p:cNvSpPr/>
           <p:nvPr/>
         </p:nvSpPr>
@@ -5315,7 +6449,7 @@
                 <a:ea typeface="Yu Gothic" pitchFamily="34" charset="-122"/>
                 <a:cs typeface="Yu Gothic" pitchFamily="34" charset="-120"/>
               </a:rPr>
-              <a:t>事案終了後。経過・対応・引継事項。</a:t>
+              <a:t>事案終了後に行います。経過、対応、引継事項。</a:t>
             </a:r>
             <a:endParaRPr lang="en-US" sz="1250" dirty="0"/>
           </a:p>
@@ -5335,7 +6469,7 @@
                 <a:ea typeface="Yu Gothic" pitchFamily="34" charset="-122"/>
                 <a:cs typeface="Yu Gothic" pitchFamily="34" charset="-120"/>
               </a:rPr>
-              <a:t>記録として残る唯一のもの。</a:t>
+              <a:t>記録として残ります。</a:t>
             </a:r>
             <a:endParaRPr lang="en-US" sz="1250" dirty="0"/>
           </a:p>
@@ -5355,7 +6489,7 @@
                 <a:ea typeface="Calibri" pitchFamily="34" charset="-122"/>
                 <a:cs typeface="Calibri" pitchFamily="34" charset="-120"/>
               </a:rPr>
-              <a:t>After it ends: sequence, actions taken, handover items. This is the version that survives as record.</a:t>
+              <a:t>After the incident ends: sequence, actions taken, handover items. This becomes the record.</a:t>
             </a:r>
             <a:endParaRPr lang="en-US" sz="1250" dirty="0"/>
           </a:p>
@@ -5363,7 +6497,7 @@
       </p:sp>
       <p:sp>
         <p:nvSpPr>
-          <p:cNvPr id="18" name="Text 16"/>
+          <p:cNvPr id="19" name="Text 16"/>
           <p:cNvSpPr/>
           <p:nvPr/>
         </p:nvSpPr>
@@ -5416,7 +6550,7 @@
       </p:sp>
       <p:sp>
         <p:nvSpPr>
-          <p:cNvPr id="19" name="Text 17"/>
+          <p:cNvPr id="20" name="Text 17"/>
           <p:cNvSpPr/>
           <p:nvPr/>
         </p:nvSpPr>
@@ -5485,9 +6619,33 @@
           <a:chExt cx="0" cy="0"/>
         </a:xfrm>
       </p:grpSpPr>
-      <p:sp>
-        <p:nvSpPr>
-          <p:cNvPr id="2" name="Text 0"/>
+      <p:pic>
+        <p:nvPicPr>
+          <p:cNvPr id="2" name="Image 0" descr="/home/user/Training-/assets/logo.png">    </p:cNvPr>
+          <p:cNvPicPr>
+            <a:picLocks noChangeAspect="1"/>
+          </p:cNvPicPr>
+          <p:nvPr/>
+        </p:nvPicPr>
+        <p:blipFill>
+          <a:blip r:embed="rId1"/>
+          <a:stretch>
+            <a:fillRect/>
+          </a:stretch>
+        </p:blipFill>
+        <p:spPr>
+          <a:xfrm>
+            <a:off x="10765231" y="332912"/>
+            <a:ext cx="786384" cy="742353"/>
+          </a:xfrm>
+          <a:prstGeom prst="rect">
+            <a:avLst/>
+          </a:prstGeom>
+        </p:spPr>
+      </p:pic>
+      <p:sp>
+        <p:nvSpPr>
+          <p:cNvPr id="3" name="Text 0"/>
           <p:cNvSpPr/>
           <p:nvPr/>
         </p:nvSpPr>
@@ -5515,13 +6673,13 @@
             <a:r>
               <a:rPr lang="en-US" sz="2700" b="1" dirty="0">
                 <a:solidFill>
-                  <a:srgbClr val="0F2D52"/>
+                  <a:srgbClr val="093259"/>
                 </a:solidFill>
                 <a:latin typeface="Yu Gothic" pitchFamily="34" charset="0"/>
                 <a:ea typeface="Yu Gothic" pitchFamily="34" charset="-122"/>
                 <a:cs typeface="Yu Gothic" pitchFamily="34" charset="-120"/>
               </a:rPr>
-              <a:t>110番 ― 必ず言う事項</a:t>
+              <a:t>110番 ― 必ず伝える事項</a:t>
             </a:r>
             <a:endParaRPr lang="en-US" sz="2700" dirty="0"/>
           </a:p>
@@ -5535,13 +6693,13 @@
             <a:r>
               <a:rPr lang="en-US" sz="1250" i="1" dirty="0">
                 <a:solidFill>
-                  <a:srgbClr val="17AF98"/>
-                </a:solidFill>
-                <a:latin typeface="Calibri" pitchFamily="34" charset="0"/>
-                <a:ea typeface="Calibri" pitchFamily="34" charset="-122"/>
-                <a:cs typeface="Calibri" pitchFamily="34" charset="-120"/>
-              </a:rPr>
-              <a:t>Police Emergency Call — what must be said</a:t>
+                  <a:srgbClr val="12B198"/>
+                </a:solidFill>
+                <a:latin typeface="Calibri" pitchFamily="34" charset="0"/>
+                <a:ea typeface="Calibri" pitchFamily="34" charset="-122"/>
+                <a:cs typeface="Calibri" pitchFamily="34" charset="-120"/>
+              </a:rPr>
+              <a:t>Police Call — What You Must Say</a:t>
             </a:r>
             <a:endParaRPr lang="en-US" sz="2700" dirty="0"/>
           </a:p>
@@ -5549,7 +6707,7 @@
       </p:sp>
       <p:sp>
         <p:nvSpPr>
-          <p:cNvPr id="3" name="Shape 1"/>
+          <p:cNvPr id="4" name="Shape 1"/>
           <p:cNvSpPr/>
           <p:nvPr/>
         </p:nvSpPr>
@@ -5571,7 +6729,7 @@
       </p:sp>
       <p:sp>
         <p:nvSpPr>
-          <p:cNvPr id="4" name="Shape 2"/>
+          <p:cNvPr id="5" name="Shape 2"/>
           <p:cNvSpPr/>
           <p:nvPr/>
         </p:nvSpPr>
@@ -5584,14 +6742,14 @@
             <a:avLst/>
           </a:prstGeom>
           <a:solidFill>
-            <a:srgbClr val="17AF98"/>
+            <a:srgbClr val="12B198"/>
           </a:solidFill>
           <a:ln/>
         </p:spPr>
       </p:sp>
       <p:sp>
         <p:nvSpPr>
-          <p:cNvPr id="5" name="Text 3"/>
+          <p:cNvPr id="6" name="Text 3"/>
           <p:cNvSpPr/>
           <p:nvPr/>
         </p:nvSpPr>
@@ -5630,7 +6788,7 @@
       </p:sp>
       <p:sp>
         <p:nvSpPr>
-          <p:cNvPr id="6" name="Text 4"/>
+          <p:cNvPr id="7" name="Text 4"/>
           <p:cNvSpPr/>
           <p:nvPr/>
         </p:nvSpPr>
@@ -5664,7 +6822,7 @@
                 <a:ea typeface="Yu Gothic" pitchFamily="34" charset="-122"/>
                 <a:cs typeface="Yu Gothic" pitchFamily="34" charset="-120"/>
               </a:rPr>
-              <a:t>冒頭で「事件です」。何が起きたのかを最初に。</a:t>
+              <a:t>冒頭で「事件です」。何が起きたのかを最初に伝えます。</a:t>
             </a:r>
             <a:endParaRPr lang="en-US" sz="1450" dirty="0"/>
           </a:p>
@@ -5684,7 +6842,7 @@
                 <a:ea typeface="Calibri" pitchFamily="34" charset="-122"/>
                 <a:cs typeface="Calibri" pitchFamily="34" charset="-120"/>
               </a:rPr>
-              <a:t>Open with the nature of it: a crime is in progress or has occurred.</a:t>
+              <a:t>Open with what happened. Say it first.</a:t>
             </a:r>
             <a:endParaRPr lang="en-US" sz="1450" dirty="0"/>
           </a:p>
@@ -5692,7 +6850,7 @@
       </p:sp>
       <p:sp>
         <p:nvSpPr>
-          <p:cNvPr id="7" name="Shape 5"/>
+          <p:cNvPr id="8" name="Shape 5"/>
           <p:cNvSpPr/>
           <p:nvPr/>
         </p:nvSpPr>
@@ -5714,7 +6872,7 @@
       </p:sp>
       <p:sp>
         <p:nvSpPr>
-          <p:cNvPr id="8" name="Shape 6"/>
+          <p:cNvPr id="9" name="Shape 6"/>
           <p:cNvSpPr/>
           <p:nvPr/>
         </p:nvSpPr>
@@ -5727,14 +6885,14 @@
             <a:avLst/>
           </a:prstGeom>
           <a:solidFill>
-            <a:srgbClr val="17AF98"/>
+            <a:srgbClr val="12B198"/>
           </a:solidFill>
           <a:ln/>
         </p:spPr>
       </p:sp>
       <p:sp>
         <p:nvSpPr>
-          <p:cNvPr id="9" name="Text 7"/>
+          <p:cNvPr id="10" name="Text 7"/>
           <p:cNvSpPr/>
           <p:nvPr/>
         </p:nvSpPr>
@@ -5773,7 +6931,7 @@
       </p:sp>
       <p:sp>
         <p:nvSpPr>
-          <p:cNvPr id="10" name="Text 8"/>
+          <p:cNvPr id="11" name="Text 8"/>
           <p:cNvSpPr/>
           <p:nvPr/>
         </p:nvSpPr>
@@ -5807,7 +6965,7 @@
                 <a:ea typeface="Yu Gothic" pitchFamily="34" charset="-122"/>
                 <a:cs typeface="Yu Gothic" pitchFamily="34" charset="-120"/>
               </a:rPr>
-              <a:t>場所 ― 住所＋目標物＋建物名・階・区画まで。</a:t>
+              <a:t>場所 ― 住所、目標物、建物名、階、区画。</a:t>
             </a:r>
             <a:endParaRPr lang="en-US" sz="1450" dirty="0"/>
           </a:p>
@@ -5827,7 +6985,7 @@
                 <a:ea typeface="Calibri" pitchFamily="34" charset="-122"/>
                 <a:cs typeface="Calibri" pitchFamily="34" charset="-120"/>
               </a:rPr>
-              <a:t>Location — address, landmark, building, floor, and zone.</a:t>
+              <a:t>Location: address, landmark, building, floor, zone.</a:t>
             </a:r>
             <a:endParaRPr lang="en-US" sz="1450" dirty="0"/>
           </a:p>
@@ -5835,7 +6993,7 @@
       </p:sp>
       <p:sp>
         <p:nvSpPr>
-          <p:cNvPr id="11" name="Shape 9"/>
+          <p:cNvPr id="12" name="Shape 9"/>
           <p:cNvSpPr/>
           <p:nvPr/>
         </p:nvSpPr>
@@ -5857,7 +7015,7 @@
       </p:sp>
       <p:sp>
         <p:nvSpPr>
-          <p:cNvPr id="12" name="Shape 10"/>
+          <p:cNvPr id="13" name="Shape 10"/>
           <p:cNvSpPr/>
           <p:nvPr/>
         </p:nvSpPr>
@@ -5870,14 +7028,14 @@
             <a:avLst/>
           </a:prstGeom>
           <a:solidFill>
-            <a:srgbClr val="17AF98"/>
+            <a:srgbClr val="12B198"/>
           </a:solidFill>
           <a:ln/>
         </p:spPr>
       </p:sp>
       <p:sp>
         <p:nvSpPr>
-          <p:cNvPr id="13" name="Text 11"/>
+          <p:cNvPr id="14" name="Text 11"/>
           <p:cNvSpPr/>
           <p:nvPr/>
         </p:nvSpPr>
@@ -5916,7 +7074,7 @@
       </p:sp>
       <p:sp>
         <p:nvSpPr>
-          <p:cNvPr id="14" name="Text 12"/>
+          <p:cNvPr id="15" name="Text 12"/>
           <p:cNvSpPr/>
           <p:nvPr/>
         </p:nvSpPr>
@@ -5950,7 +7108,7 @@
                 <a:ea typeface="Yu Gothic" pitchFamily="34" charset="-122"/>
                 <a:cs typeface="Yu Gothic" pitchFamily="34" charset="-120"/>
               </a:rPr>
-              <a:t>相手 ― 人相・着衣・逃走方向・車両とナンバー。</a:t>
+              <a:t>相手 ― 人相、着衣、逃走方向、車両とナンバー。</a:t>
             </a:r>
             <a:endParaRPr lang="en-US" sz="1450" dirty="0"/>
           </a:p>
@@ -5970,7 +7128,7 @@
                 <a:ea typeface="Calibri" pitchFamily="34" charset="-122"/>
                 <a:cs typeface="Calibri" pitchFamily="34" charset="-120"/>
               </a:rPr>
-              <a:t>The person — appearance, clothing, direction of flight, vehicle and plate.</a:t>
+              <a:t>The person: appearance, clothing, direction of escape, vehicle and plate number.</a:t>
             </a:r>
             <a:endParaRPr lang="en-US" sz="1450" dirty="0"/>
           </a:p>
@@ -5978,7 +7136,7 @@
       </p:sp>
       <p:sp>
         <p:nvSpPr>
-          <p:cNvPr id="15" name="Shape 13"/>
+          <p:cNvPr id="16" name="Shape 13"/>
           <p:cNvSpPr/>
           <p:nvPr/>
         </p:nvSpPr>
@@ -6000,7 +7158,7 @@
       </p:sp>
       <p:sp>
         <p:nvSpPr>
-          <p:cNvPr id="16" name="Shape 14"/>
+          <p:cNvPr id="17" name="Shape 14"/>
           <p:cNvSpPr/>
           <p:nvPr/>
         </p:nvSpPr>
@@ -6013,14 +7171,14 @@
             <a:avLst/>
           </a:prstGeom>
           <a:solidFill>
-            <a:srgbClr val="17AF98"/>
+            <a:srgbClr val="12B198"/>
           </a:solidFill>
           <a:ln/>
         </p:spPr>
       </p:sp>
       <p:sp>
         <p:nvSpPr>
-          <p:cNvPr id="17" name="Text 15"/>
+          <p:cNvPr id="18" name="Text 15"/>
           <p:cNvSpPr/>
           <p:nvPr/>
         </p:nvSpPr>
@@ -6059,7 +7217,7 @@
       </p:sp>
       <p:sp>
         <p:nvSpPr>
-          <p:cNvPr id="18" name="Text 16"/>
+          <p:cNvPr id="19" name="Text 16"/>
           <p:cNvSpPr/>
           <p:nvPr/>
         </p:nvSpPr>
@@ -6093,7 +7251,7 @@
                 <a:ea typeface="Yu Gothic" pitchFamily="34" charset="-122"/>
                 <a:cs typeface="Yu Gothic" pitchFamily="34" charset="-120"/>
               </a:rPr>
-              <a:t>自分 ― 氏名・折り返しの電話番号・現在地。</a:t>
+              <a:t>自分 ― 氏名、折り返しの電話番号、現在地。</a:t>
             </a:r>
             <a:endParaRPr lang="en-US" sz="1450" dirty="0"/>
           </a:p>
@@ -6113,7 +7271,7 @@
                 <a:ea typeface="Calibri" pitchFamily="34" charset="-122"/>
                 <a:cs typeface="Calibri" pitchFamily="34" charset="-120"/>
               </a:rPr>
-              <a:t>Yourself — name, call-back number, and where you are.</a:t>
+              <a:t>Yourself: name, call-back number, where you are.</a:t>
             </a:r>
             <a:endParaRPr lang="en-US" sz="1450" dirty="0"/>
           </a:p>
@@ -6121,7 +7279,7 @@
       </p:sp>
       <p:sp>
         <p:nvSpPr>
-          <p:cNvPr id="19" name="Shape 17"/>
+          <p:cNvPr id="20" name="Shape 17"/>
           <p:cNvSpPr/>
           <p:nvPr/>
         </p:nvSpPr>
@@ -6143,7 +7301,7 @@
       </p:sp>
       <p:sp>
         <p:nvSpPr>
-          <p:cNvPr id="20" name="Shape 18"/>
+          <p:cNvPr id="21" name="Shape 18"/>
           <p:cNvSpPr/>
           <p:nvPr/>
         </p:nvSpPr>
@@ -6156,14 +7314,14 @@
             <a:avLst/>
           </a:prstGeom>
           <a:solidFill>
-            <a:srgbClr val="17AF98"/>
+            <a:srgbClr val="12B198"/>
           </a:solidFill>
           <a:ln/>
         </p:spPr>
       </p:sp>
       <p:sp>
         <p:nvSpPr>
-          <p:cNvPr id="21" name="Text 19"/>
+          <p:cNvPr id="22" name="Text 19"/>
           <p:cNvSpPr/>
           <p:nvPr/>
         </p:nvSpPr>
@@ -6202,7 +7360,7 @@
       </p:sp>
       <p:sp>
         <p:nvSpPr>
-          <p:cNvPr id="22" name="Text 20"/>
+          <p:cNvPr id="23" name="Text 20"/>
           <p:cNvSpPr/>
           <p:nvPr/>
         </p:nvSpPr>
@@ -6236,7 +7394,7 @@
                 <a:ea typeface="Yu Gothic" pitchFamily="34" charset="-122"/>
                 <a:cs typeface="Yu Gothic" pitchFamily="34" charset="-120"/>
               </a:rPr>
-              <a:t>切られるまで切らない。質問に答え切ってから終話する。</a:t>
+              <a:t>相手が終話するまで切りません。質問に答え切ります。</a:t>
             </a:r>
             <a:endParaRPr lang="en-US" sz="1300" dirty="0"/>
           </a:p>
@@ -6256,7 +7414,7 @@
                 <a:ea typeface="Calibri" pitchFamily="34" charset="-122"/>
                 <a:cs typeface="Calibri" pitchFamily="34" charset="-120"/>
               </a:rPr>
-              <a:t>Do not hang up first. Stay until their questions are finished.</a:t>
+              <a:t>Do not hang up first. Answer all their questions.</a:t>
             </a:r>
             <a:endParaRPr lang="en-US" sz="1300" dirty="0"/>
           </a:p>
@@ -6264,7 +7422,7 @@
       </p:sp>
       <p:sp>
         <p:nvSpPr>
-          <p:cNvPr id="23" name="Text 21"/>
+          <p:cNvPr id="24" name="Text 21"/>
           <p:cNvSpPr/>
           <p:nvPr/>
         </p:nvSpPr>
@@ -6317,7 +7475,7 @@
       </p:sp>
       <p:sp>
         <p:nvSpPr>
-          <p:cNvPr id="24" name="Text 22"/>
+          <p:cNvPr id="25" name="Text 22"/>
           <p:cNvSpPr/>
           <p:nvPr/>
         </p:nvSpPr>
@@ -6386,9 +7544,33 @@
           <a:chExt cx="0" cy="0"/>
         </a:xfrm>
       </p:grpSpPr>
-      <p:sp>
-        <p:nvSpPr>
-          <p:cNvPr id="2" name="Text 0"/>
+      <p:pic>
+        <p:nvPicPr>
+          <p:cNvPr id="2" name="Image 0" descr="/home/user/Training-/assets/logo.png">    </p:cNvPr>
+          <p:cNvPicPr>
+            <a:picLocks noChangeAspect="1"/>
+          </p:cNvPicPr>
+          <p:nvPr/>
+        </p:nvPicPr>
+        <p:blipFill>
+          <a:blip r:embed="rId1"/>
+          <a:stretch>
+            <a:fillRect/>
+          </a:stretch>
+        </p:blipFill>
+        <p:spPr>
+          <a:xfrm>
+            <a:off x="10765231" y="332912"/>
+            <a:ext cx="786384" cy="742353"/>
+          </a:xfrm>
+          <a:prstGeom prst="rect">
+            <a:avLst/>
+          </a:prstGeom>
+        </p:spPr>
+      </p:pic>
+      <p:sp>
+        <p:nvSpPr>
+          <p:cNvPr id="3" name="Text 0"/>
           <p:cNvSpPr/>
           <p:nvPr/>
         </p:nvSpPr>
@@ -6416,13 +7598,13 @@
             <a:r>
               <a:rPr lang="en-US" sz="2700" b="1" dirty="0">
                 <a:solidFill>
-                  <a:srgbClr val="0F2D52"/>
+                  <a:srgbClr val="093259"/>
                 </a:solidFill>
                 <a:latin typeface="Yu Gothic" pitchFamily="34" charset="0"/>
                 <a:ea typeface="Yu Gothic" pitchFamily="34" charset="-122"/>
                 <a:cs typeface="Yu Gothic" pitchFamily="34" charset="-120"/>
               </a:rPr>
-              <a:t>119番 ― 必ず言う事項</a:t>
+              <a:t>119番 ― 必ず伝える事項</a:t>
             </a:r>
             <a:endParaRPr lang="en-US" sz="2700" dirty="0"/>
           </a:p>
@@ -6436,13 +7618,13 @@
             <a:r>
               <a:rPr lang="en-US" sz="1250" i="1" dirty="0">
                 <a:solidFill>
-                  <a:srgbClr val="17AF98"/>
-                </a:solidFill>
-                <a:latin typeface="Calibri" pitchFamily="34" charset="0"/>
-                <a:ea typeface="Calibri" pitchFamily="34" charset="-122"/>
-                <a:cs typeface="Calibri" pitchFamily="34" charset="-120"/>
-              </a:rPr>
-              <a:t>Fire and Ambulance Call — what must be said</a:t>
+                  <a:srgbClr val="12B198"/>
+                </a:solidFill>
+                <a:latin typeface="Calibri" pitchFamily="34" charset="0"/>
+                <a:ea typeface="Calibri" pitchFamily="34" charset="-122"/>
+                <a:cs typeface="Calibri" pitchFamily="34" charset="-120"/>
+              </a:rPr>
+              <a:t>Fire and Ambulance Call — What You Must Say</a:t>
             </a:r>
             <a:endParaRPr lang="en-US" sz="2700" dirty="0"/>
           </a:p>
@@ -6450,7 +7632,7 @@
       </p:sp>
       <p:sp>
         <p:nvSpPr>
-          <p:cNvPr id="3" name="Shape 1"/>
+          <p:cNvPr id="4" name="Shape 1"/>
           <p:cNvSpPr/>
           <p:nvPr/>
         </p:nvSpPr>
@@ -6472,7 +7654,7 @@
       </p:sp>
       <p:sp>
         <p:nvSpPr>
-          <p:cNvPr id="4" name="Shape 2"/>
+          <p:cNvPr id="5" name="Shape 2"/>
           <p:cNvSpPr/>
           <p:nvPr/>
         </p:nvSpPr>
@@ -6485,14 +7667,14 @@
             <a:avLst/>
           </a:prstGeom>
           <a:solidFill>
-            <a:srgbClr val="17AF98"/>
+            <a:srgbClr val="12B198"/>
           </a:solidFill>
           <a:ln/>
         </p:spPr>
       </p:sp>
       <p:sp>
         <p:nvSpPr>
-          <p:cNvPr id="5" name="Text 3"/>
+          <p:cNvPr id="6" name="Text 3"/>
           <p:cNvSpPr/>
           <p:nvPr/>
         </p:nvSpPr>
@@ -6531,7 +7713,7 @@
       </p:sp>
       <p:sp>
         <p:nvSpPr>
-          <p:cNvPr id="6" name="Text 4"/>
+          <p:cNvPr id="7" name="Text 4"/>
           <p:cNvSpPr/>
           <p:nvPr/>
         </p:nvSpPr>
@@ -6565,7 +7747,7 @@
                 <a:ea typeface="Yu Gothic" pitchFamily="34" charset="-122"/>
                 <a:cs typeface="Yu Gothic" pitchFamily="34" charset="-120"/>
               </a:rPr>
-              <a:t>冒頭で種別。「火事です」か「救急です」を最初に言う。</a:t>
+              <a:t>冒頭で種別。「火事です」か「救急です」を最初に伝えます。</a:t>
             </a:r>
             <a:endParaRPr lang="en-US" sz="1450" dirty="0"/>
           </a:p>
@@ -6593,7 +7775,7 @@
       </p:sp>
       <p:sp>
         <p:nvSpPr>
-          <p:cNvPr id="7" name="Shape 5"/>
+          <p:cNvPr id="8" name="Shape 5"/>
           <p:cNvSpPr/>
           <p:nvPr/>
         </p:nvSpPr>
@@ -6615,7 +7797,7 @@
       </p:sp>
       <p:sp>
         <p:nvSpPr>
-          <p:cNvPr id="8" name="Shape 6"/>
+          <p:cNvPr id="9" name="Shape 6"/>
           <p:cNvSpPr/>
           <p:nvPr/>
         </p:nvSpPr>
@@ -6628,14 +7810,14 @@
             <a:avLst/>
           </a:prstGeom>
           <a:solidFill>
-            <a:srgbClr val="17AF98"/>
+            <a:srgbClr val="12B198"/>
           </a:solidFill>
           <a:ln/>
         </p:spPr>
       </p:sp>
       <p:sp>
         <p:nvSpPr>
-          <p:cNvPr id="9" name="Text 7"/>
+          <p:cNvPr id="10" name="Text 7"/>
           <p:cNvSpPr/>
           <p:nvPr/>
         </p:nvSpPr>
@@ -6674,7 +7856,7 @@
       </p:sp>
       <p:sp>
         <p:nvSpPr>
-          <p:cNvPr id="10" name="Text 8"/>
+          <p:cNvPr id="11" name="Text 8"/>
           <p:cNvSpPr/>
           <p:nvPr/>
         </p:nvSpPr>
@@ -6708,7 +7890,7 @@
                 <a:ea typeface="Yu Gothic" pitchFamily="34" charset="-122"/>
                 <a:cs typeface="Yu Gothic" pitchFamily="34" charset="-120"/>
               </a:rPr>
-              <a:t>場所 ― 住所＋目標物、そして進入口と使うエレベーター。</a:t>
+              <a:t>場所 ― 住所、目標物、進入口、使用するエレベーター。</a:t>
             </a:r>
             <a:endParaRPr lang="en-US" sz="1450" dirty="0"/>
           </a:p>
@@ -6728,7 +7910,7 @@
                 <a:ea typeface="Calibri" pitchFamily="34" charset="-122"/>
                 <a:cs typeface="Calibri" pitchFamily="34" charset="-120"/>
               </a:rPr>
-              <a:t>Location — address and landmark, plus the entrance to use and which lift.</a:t>
+              <a:t>Location: address, landmark, which entrance to use, which lift.</a:t>
             </a:r>
             <a:endParaRPr lang="en-US" sz="1450" dirty="0"/>
           </a:p>
@@ -6736,7 +7918,7 @@
       </p:sp>
       <p:sp>
         <p:nvSpPr>
-          <p:cNvPr id="11" name="Shape 9"/>
+          <p:cNvPr id="12" name="Shape 9"/>
           <p:cNvSpPr/>
           <p:nvPr/>
         </p:nvSpPr>
@@ -6758,7 +7940,7 @@
       </p:sp>
       <p:sp>
         <p:nvSpPr>
-          <p:cNvPr id="12" name="Shape 10"/>
+          <p:cNvPr id="13" name="Shape 10"/>
           <p:cNvSpPr/>
           <p:nvPr/>
         </p:nvSpPr>
@@ -6771,14 +7953,14 @@
             <a:avLst/>
           </a:prstGeom>
           <a:solidFill>
-            <a:srgbClr val="17AF98"/>
+            <a:srgbClr val="12B198"/>
           </a:solidFill>
           <a:ln/>
         </p:spPr>
       </p:sp>
       <p:sp>
         <p:nvSpPr>
-          <p:cNvPr id="13" name="Text 11"/>
+          <p:cNvPr id="14" name="Text 11"/>
           <p:cNvSpPr/>
           <p:nvPr/>
         </p:nvSpPr>
@@ -6817,7 +7999,7 @@
       </p:sp>
       <p:sp>
         <p:nvSpPr>
-          <p:cNvPr id="14" name="Text 12"/>
+          <p:cNvPr id="15" name="Text 12"/>
           <p:cNvSpPr/>
           <p:nvPr/>
         </p:nvSpPr>
@@ -6851,7 +8033,7 @@
                 <a:ea typeface="Yu Gothic" pitchFamily="34" charset="-122"/>
                 <a:cs typeface="Yu Gothic" pitchFamily="34" charset="-120"/>
               </a:rPr>
-              <a:t>状況 ― 症状・負傷者数・意識と呼吸の有無。</a:t>
+              <a:t>状況 ― 症状、負傷者数、意識と呼吸の有無。</a:t>
             </a:r>
             <a:endParaRPr lang="en-US" sz="1450" dirty="0"/>
           </a:p>
@@ -6871,7 +8053,7 @@
                 <a:ea typeface="Calibri" pitchFamily="34" charset="-122"/>
                 <a:cs typeface="Calibri" pitchFamily="34" charset="-120"/>
               </a:rPr>
-              <a:t>Condition — symptoms, number of casualties, whether conscious and breathing.</a:t>
+              <a:t>Condition: symptoms, number of casualties, whether conscious and breathing.</a:t>
             </a:r>
             <a:endParaRPr lang="en-US" sz="1450" dirty="0"/>
           </a:p>
@@ -6879,7 +8061,7 @@
       </p:sp>
       <p:sp>
         <p:nvSpPr>
-          <p:cNvPr id="15" name="Shape 13"/>
+          <p:cNvPr id="16" name="Shape 13"/>
           <p:cNvSpPr/>
           <p:nvPr/>
         </p:nvSpPr>
@@ -6901,7 +8083,7 @@
       </p:sp>
       <p:sp>
         <p:nvSpPr>
-          <p:cNvPr id="16" name="Shape 14"/>
+          <p:cNvPr id="17" name="Shape 14"/>
           <p:cNvSpPr/>
           <p:nvPr/>
         </p:nvSpPr>
@@ -6914,14 +8096,14 @@
             <a:avLst/>
           </a:prstGeom>
           <a:solidFill>
-            <a:srgbClr val="17AF98"/>
+            <a:srgbClr val="12B198"/>
           </a:solidFill>
           <a:ln/>
         </p:spPr>
       </p:sp>
       <p:sp>
         <p:nvSpPr>
-          <p:cNvPr id="17" name="Text 15"/>
+          <p:cNvPr id="18" name="Text 15"/>
           <p:cNvSpPr/>
           <p:nvPr/>
         </p:nvSpPr>
@@ -6960,7 +8142,7 @@
       </p:sp>
       <p:sp>
         <p:nvSpPr>
-          <p:cNvPr id="18" name="Text 16"/>
+          <p:cNvPr id="19" name="Text 16"/>
           <p:cNvSpPr/>
           <p:nvPr/>
         </p:nvSpPr>
@@ -6994,7 +8176,7 @@
                 <a:ea typeface="Yu Gothic" pitchFamily="34" charset="-122"/>
                 <a:cs typeface="Yu Gothic" pitchFamily="34" charset="-120"/>
               </a:rPr>
-              <a:t>自分 ― 氏名・折り返しの電話番号。</a:t>
+              <a:t>自分 ― 氏名、折り返しの電話番号。</a:t>
             </a:r>
             <a:endParaRPr lang="en-US" sz="1450" dirty="0"/>
           </a:p>
@@ -7014,7 +8196,7 @@
                 <a:ea typeface="Calibri" pitchFamily="34" charset="-122"/>
                 <a:cs typeface="Calibri" pitchFamily="34" charset="-120"/>
               </a:rPr>
-              <a:t>Yourself — name and call-back number.</a:t>
+              <a:t>Yourself: name and call-back number.</a:t>
             </a:r>
             <a:endParaRPr lang="en-US" sz="1450" dirty="0"/>
           </a:p>
@@ -7022,7 +8204,7 @@
       </p:sp>
       <p:sp>
         <p:nvSpPr>
-          <p:cNvPr id="19" name="Shape 17"/>
+          <p:cNvPr id="20" name="Shape 17"/>
           <p:cNvSpPr/>
           <p:nvPr/>
         </p:nvSpPr>
@@ -7044,7 +8226,7 @@
       </p:sp>
       <p:sp>
         <p:nvSpPr>
-          <p:cNvPr id="20" name="Shape 18"/>
+          <p:cNvPr id="21" name="Shape 18"/>
           <p:cNvSpPr/>
           <p:nvPr/>
         </p:nvSpPr>
@@ -7057,14 +8239,14 @@
             <a:avLst/>
           </a:prstGeom>
           <a:solidFill>
-            <a:srgbClr val="17AF98"/>
+            <a:srgbClr val="12B198"/>
           </a:solidFill>
           <a:ln/>
         </p:spPr>
       </p:sp>
       <p:sp>
         <p:nvSpPr>
-          <p:cNvPr id="21" name="Text 19"/>
+          <p:cNvPr id="22" name="Text 19"/>
           <p:cNvSpPr/>
           <p:nvPr/>
         </p:nvSpPr>
@@ -7103,7 +8285,7 @@
       </p:sp>
       <p:sp>
         <p:nvSpPr>
-          <p:cNvPr id="22" name="Text 20"/>
+          <p:cNvPr id="23" name="Text 20"/>
           <p:cNvSpPr/>
           <p:nvPr/>
         </p:nvSpPr>
@@ -7137,7 +8319,7 @@
                 <a:ea typeface="Yu Gothic" pitchFamily="34" charset="-122"/>
                 <a:cs typeface="Yu Gothic" pitchFamily="34" charset="-120"/>
               </a:rPr>
-              <a:t>到着時の誘導者を、通報と同時に決めておく。</a:t>
+              <a:t>到着時の誘導者を、通報と同時に決めます。</a:t>
             </a:r>
             <a:endParaRPr lang="en-US" sz="1300" dirty="0"/>
           </a:p>
@@ -7157,7 +8339,7 @@
                 <a:ea typeface="Calibri" pitchFamily="34" charset="-122"/>
                 <a:cs typeface="Calibri" pitchFamily="34" charset="-120"/>
               </a:rPr>
-              <a:t>Decide who will meet and guide them, at the same time as you call.</a:t>
+              <a:t>Decide who will meet and guide them, at the same time as the call.</a:t>
             </a:r>
             <a:endParaRPr lang="en-US" sz="1300" dirty="0"/>
           </a:p>
@@ -7165,7 +8347,7 @@
       </p:sp>
       <p:sp>
         <p:nvSpPr>
-          <p:cNvPr id="23" name="Text 21"/>
+          <p:cNvPr id="24" name="Text 21"/>
           <p:cNvSpPr/>
           <p:nvPr/>
         </p:nvSpPr>
@@ -7218,7 +8400,7 @@
       </p:sp>
       <p:sp>
         <p:nvSpPr>
-          <p:cNvPr id="24" name="Text 22"/>
+          <p:cNvPr id="25" name="Text 22"/>
           <p:cNvSpPr/>
           <p:nvPr/>
         </p:nvSpPr>
@@ -7287,9 +8469,33 @@
           <a:chExt cx="0" cy="0"/>
         </a:xfrm>
       </p:grpSpPr>
-      <p:sp>
-        <p:nvSpPr>
-          <p:cNvPr id="2" name="Text 0"/>
+      <p:pic>
+        <p:nvPicPr>
+          <p:cNvPr id="2" name="Image 0" descr="/home/user/Training-/assets/logo.png">    </p:cNvPr>
+          <p:cNvPicPr>
+            <a:picLocks noChangeAspect="1"/>
+          </p:cNvPicPr>
+          <p:nvPr/>
+        </p:nvPicPr>
+        <p:blipFill>
+          <a:blip r:embed="rId1"/>
+          <a:stretch>
+            <a:fillRect/>
+          </a:stretch>
+        </p:blipFill>
+        <p:spPr>
+          <a:xfrm>
+            <a:off x="10765231" y="332912"/>
+            <a:ext cx="786384" cy="742353"/>
+          </a:xfrm>
+          <a:prstGeom prst="rect">
+            <a:avLst/>
+          </a:prstGeom>
+        </p:spPr>
+      </p:pic>
+      <p:sp>
+        <p:nvSpPr>
+          <p:cNvPr id="3" name="Text 0"/>
           <p:cNvSpPr/>
           <p:nvPr/>
         </p:nvSpPr>
@@ -7317,13 +8523,13 @@
             <a:r>
               <a:rPr lang="en-US" sz="2700" b="1" dirty="0">
                 <a:solidFill>
-                  <a:srgbClr val="0F2D52"/>
+                  <a:srgbClr val="093259"/>
                 </a:solidFill>
                 <a:latin typeface="Yu Gothic" pitchFamily="34" charset="0"/>
                 <a:ea typeface="Yu Gothic" pitchFamily="34" charset="-122"/>
                 <a:cs typeface="Yu Gothic" pitchFamily="34" charset="-120"/>
               </a:rPr>
-              <a:t>通報練習の進め方</a:t>
+              <a:t>通報で使う日本語</a:t>
             </a:r>
             <a:endParaRPr lang="en-US" sz="2700" dirty="0"/>
           </a:p>
@@ -7337,13 +8543,13 @@
             <a:r>
               <a:rPr lang="en-US" sz="1250" i="1" dirty="0">
                 <a:solidFill>
-                  <a:srgbClr val="17AF98"/>
-                </a:solidFill>
-                <a:latin typeface="Calibri" pitchFamily="34" charset="0"/>
-                <a:ea typeface="Calibri" pitchFamily="34" charset="-122"/>
-                <a:cs typeface="Calibri" pitchFamily="34" charset="-120"/>
-              </a:rPr>
-              <a:t>Call Practice — how we will run it</a:t>
+                  <a:srgbClr val="12B198"/>
+                </a:solidFill>
+                <a:latin typeface="Calibri" pitchFamily="34" charset="0"/>
+                <a:ea typeface="Calibri" pitchFamily="34" charset="-122"/>
+                <a:cs typeface="Calibri" pitchFamily="34" charset="-120"/>
+              </a:rPr>
+              <a:t>Japanese for Emergency Calls</a:t>
             </a:r>
             <a:endParaRPr lang="en-US" sz="2700" dirty="0"/>
           </a:p>
@@ -7351,14 +8557,14 @@
       </p:sp>
       <p:sp>
         <p:nvSpPr>
-          <p:cNvPr id="3" name="Text 1"/>
-          <p:cNvSpPr/>
-          <p:nvPr/>
-        </p:nvSpPr>
-        <p:spPr>
-          <a:xfrm>
-            <a:off x="640080" y="1536192"/>
-            <a:ext cx="10911535" cy="566928"/>
+          <p:cNvPr id="4" name="Text 1"/>
+          <p:cNvSpPr/>
+          <p:nvPr/>
+        </p:nvSpPr>
+        <p:spPr>
+          <a:xfrm>
+            <a:off x="640080" y="1499616"/>
+            <a:ext cx="10911535" cy="512064"/>
           </a:xfrm>
           <a:prstGeom prst="rect">
             <a:avLst/>
@@ -7379,13 +8585,13 @@
             <a:r>
               <a:rPr lang="en-US" sz="1300" dirty="0">
                 <a:solidFill>
-                  <a:srgbClr val="0F2D52"/>
+                  <a:srgbClr val="093259"/>
                 </a:solidFill>
                 <a:latin typeface="Yu Gothic" pitchFamily="34" charset="0"/>
                 <a:ea typeface="Yu Gothic" pitchFamily="34" charset="-122"/>
                 <a:cs typeface="Yu Gothic" pitchFamily="34" charset="-120"/>
               </a:rPr>
-              <a:t>2人1組。通報者役と受令者役を必ず交代します。全員が声を出します。</a:t>
+              <a:t>この8つは全員が言えるようにしてください。</a:t>
             </a:r>
             <a:endParaRPr lang="en-US" sz="1300" dirty="0"/>
           </a:p>
@@ -7405,7 +8611,7 @@
                 <a:ea typeface="Calibri" pitchFamily="34" charset="-122"/>
                 <a:cs typeface="Calibri" pitchFamily="34" charset="-120"/>
               </a:rPr>
-              <a:t>In pairs. You will swap between caller and receiver — everyone speaks.</a:t>
+              <a:t>Everyone must be able to say these eight lines.</a:t>
             </a:r>
             <a:endParaRPr lang="en-US" sz="1300" dirty="0"/>
           </a:p>
@@ -7413,18 +8619,18 @@
       </p:sp>
       <p:sp>
         <p:nvSpPr>
-          <p:cNvPr id="4" name="Shape 2"/>
-          <p:cNvSpPr/>
-          <p:nvPr/>
-        </p:nvSpPr>
-        <p:spPr>
-          <a:xfrm>
-            <a:off x="640080" y="2286000"/>
-            <a:ext cx="10911535" cy="850392"/>
+          <p:cNvPr id="5" name="Shape 2"/>
+          <p:cNvSpPr/>
+          <p:nvPr/>
+        </p:nvSpPr>
+        <p:spPr>
+          <a:xfrm>
+            <a:off x="640080" y="2194560"/>
+            <a:ext cx="5318608" cy="691286"/>
           </a:xfrm>
           <a:prstGeom prst="roundRect">
             <a:avLst>
-              <a:gd name="adj" fmla="val 5376"/>
+              <a:gd name="adj" fmla="val 5291"/>
             </a:avLst>
           </a:prstGeom>
           <a:solidFill>
@@ -7435,34 +8641,34 @@
       </p:sp>
       <p:sp>
         <p:nvSpPr>
-          <p:cNvPr id="5" name="Shape 3"/>
-          <p:cNvSpPr/>
-          <p:nvPr/>
-        </p:nvSpPr>
-        <p:spPr>
-          <a:xfrm>
-            <a:off x="896112" y="2519172"/>
-            <a:ext cx="384048" cy="384048"/>
+          <p:cNvPr id="6" name="Shape 3"/>
+          <p:cNvSpPr/>
+          <p:nvPr/>
+        </p:nvSpPr>
+        <p:spPr>
+          <a:xfrm>
+            <a:off x="822960" y="2375611"/>
+            <a:ext cx="329184" cy="329184"/>
           </a:xfrm>
           <a:prstGeom prst="ellipse">
             <a:avLst/>
           </a:prstGeom>
           <a:solidFill>
-            <a:srgbClr val="17AF98"/>
+            <a:srgbClr val="093259"/>
           </a:solidFill>
           <a:ln/>
         </p:spPr>
       </p:sp>
       <p:sp>
         <p:nvSpPr>
-          <p:cNvPr id="6" name="Text 4"/>
-          <p:cNvSpPr/>
-          <p:nvPr/>
-        </p:nvSpPr>
-        <p:spPr>
-          <a:xfrm>
-            <a:off x="896112" y="2519172"/>
-            <a:ext cx="384048" cy="384048"/>
+          <p:cNvPr id="7" name="Text 4"/>
+          <p:cNvSpPr/>
+          <p:nvPr/>
+        </p:nvSpPr>
+        <p:spPr>
+          <a:xfrm>
+            <a:off x="822960" y="2375611"/>
+            <a:ext cx="329184" cy="329184"/>
           </a:xfrm>
           <a:prstGeom prst="rect">
             <a:avLst/>
@@ -7478,7 +8684,7 @@
               <a:buNone/>
             </a:pPr>
             <a:r>
-              <a:rPr lang="en-US" sz="1400" b="1" dirty="0">
+              <a:rPr lang="en-US" sz="1100" b="1" dirty="0">
                 <a:solidFill>
                   <a:srgbClr val="FFFFFF"/>
                 </a:solidFill>
@@ -7488,20 +8694,20 @@
               </a:rPr>
               <a:t>1</a:t>
             </a:r>
-            <a:endParaRPr lang="en-US" sz="1400" dirty="0"/>
-          </a:p>
-        </p:txBody>
-      </p:sp>
-      <p:sp>
-        <p:nvSpPr>
-          <p:cNvPr id="7" name="Text 5"/>
-          <p:cNvSpPr/>
-          <p:nvPr/>
-        </p:nvSpPr>
-        <p:spPr>
-          <a:xfrm>
-            <a:off x="1499616" y="2395728"/>
-            <a:ext cx="9777679" cy="667512"/>
+            <a:endParaRPr lang="en-US" sz="1100" dirty="0"/>
+          </a:p>
+        </p:txBody>
+      </p:sp>
+      <p:sp>
+        <p:nvSpPr>
+          <p:cNvPr id="8" name="Text 5"/>
+          <p:cNvSpPr/>
+          <p:nvPr/>
+        </p:nvSpPr>
+        <p:spPr>
+          <a:xfrm>
+            <a:off x="1243584" y="2267712"/>
+            <a:ext cx="4477360" cy="544982"/>
           </a:xfrm>
           <a:prstGeom prst="rect">
             <a:avLst/>
@@ -7515,12 +8721,12 @@
           <a:p>
             <a:pPr indent="0" marL="0">
               <a:lnSpc>
-                <a:spcPct val="92000"/>
-              </a:lnSpc>
-              <a:buNone/>
-            </a:pPr>
-            <a:r>
-              <a:rPr lang="en-US" sz="1450" b="1" dirty="0">
+                <a:spcPct val="90000"/>
+              </a:lnSpc>
+              <a:buNone/>
+            </a:pPr>
+            <a:r>
+              <a:rPr lang="en-US" sz="1150" b="1" dirty="0">
                 <a:solidFill>
                   <a:srgbClr val="1B2733"/>
                 </a:solidFill>
@@ -7528,19 +8734,19 @@
                 <a:ea typeface="Yu Gothic" pitchFamily="34" charset="-122"/>
                 <a:cs typeface="Yu Gothic" pitchFamily="34" charset="-120"/>
               </a:rPr>
-              <a:t>受令者役は、必ず3つを聞き返す：「場所は？」「けが人は？」「お名前は？」</a:t>
-            </a:r>
-            <a:endParaRPr lang="en-US" sz="1450" dirty="0"/>
-          </a:p>
-          <a:p>
-            <a:pPr indent="0" marL="0">
-              <a:lnSpc>
-                <a:spcPct val="92000"/>
-              </a:lnSpc>
-              <a:buNone/>
-            </a:pPr>
-            <a:r>
-              <a:rPr lang="en-US" sz="1050" i="1" dirty="0">
+              <a:t>火事です　　kaji desu</a:t>
+            </a:r>
+            <a:endParaRPr lang="en-US" sz="1150" dirty="0"/>
+          </a:p>
+          <a:p>
+            <a:pPr indent="0" marL="0">
+              <a:lnSpc>
+                <a:spcPct val="90000"/>
+              </a:lnSpc>
+              <a:buNone/>
+            </a:pPr>
+            <a:r>
+              <a:rPr lang="en-US" sz="900" i="1" dirty="0">
                 <a:solidFill>
                   <a:srgbClr val="5F7183"/>
                 </a:solidFill>
@@ -7548,64 +8754,64 @@
                 <a:ea typeface="Calibri" pitchFamily="34" charset="-122"/>
                 <a:cs typeface="Calibri" pitchFamily="34" charset="-120"/>
               </a:rPr>
-              <a:t>The receiver must always ask three things: location, casualties, and your name.</a:t>
-            </a:r>
-            <a:endParaRPr lang="en-US" sz="1450" dirty="0"/>
-          </a:p>
-        </p:txBody>
-      </p:sp>
-      <p:sp>
-        <p:nvSpPr>
-          <p:cNvPr id="8" name="Shape 6"/>
-          <p:cNvSpPr/>
-          <p:nvPr/>
-        </p:nvSpPr>
-        <p:spPr>
-          <a:xfrm>
-            <a:off x="640080" y="3319272"/>
-            <a:ext cx="10911535" cy="850392"/>
+              <a:t>There is a fire.</a:t>
+            </a:r>
+            <a:endParaRPr lang="en-US" sz="1150" dirty="0"/>
+          </a:p>
+        </p:txBody>
+      </p:sp>
+      <p:sp>
+        <p:nvSpPr>
+          <p:cNvPr id="9" name="Shape 6"/>
+          <p:cNvSpPr/>
+          <p:nvPr/>
+        </p:nvSpPr>
+        <p:spPr>
+          <a:xfrm>
+            <a:off x="6233008" y="2194560"/>
+            <a:ext cx="5318608" cy="691286"/>
           </a:xfrm>
           <a:prstGeom prst="roundRect">
             <a:avLst>
-              <a:gd name="adj" fmla="val 5376"/>
+              <a:gd name="adj" fmla="val 5291"/>
             </a:avLst>
           </a:prstGeom>
           <a:solidFill>
-            <a:srgbClr val="F7FAFC"/>
+            <a:srgbClr val="EFF4F8"/>
           </a:solidFill>
           <a:ln/>
         </p:spPr>
       </p:sp>
       <p:sp>
         <p:nvSpPr>
-          <p:cNvPr id="9" name="Shape 7"/>
-          <p:cNvSpPr/>
-          <p:nvPr/>
-        </p:nvSpPr>
-        <p:spPr>
-          <a:xfrm>
-            <a:off x="896112" y="3552444"/>
-            <a:ext cx="384048" cy="384048"/>
+          <p:cNvPr id="10" name="Shape 7"/>
+          <p:cNvSpPr/>
+          <p:nvPr/>
+        </p:nvSpPr>
+        <p:spPr>
+          <a:xfrm>
+            <a:off x="6415888" y="2375611"/>
+            <a:ext cx="329184" cy="329184"/>
           </a:xfrm>
           <a:prstGeom prst="ellipse">
             <a:avLst/>
           </a:prstGeom>
           <a:solidFill>
-            <a:srgbClr val="17AF98"/>
+            <a:srgbClr val="093259"/>
           </a:solidFill>
           <a:ln/>
         </p:spPr>
       </p:sp>
       <p:sp>
         <p:nvSpPr>
-          <p:cNvPr id="10" name="Text 8"/>
-          <p:cNvSpPr/>
-          <p:nvPr/>
-        </p:nvSpPr>
-        <p:spPr>
-          <a:xfrm>
-            <a:off x="896112" y="3552444"/>
-            <a:ext cx="384048" cy="384048"/>
+          <p:cNvPr id="11" name="Text 8"/>
+          <p:cNvSpPr/>
+          <p:nvPr/>
+        </p:nvSpPr>
+        <p:spPr>
+          <a:xfrm>
+            <a:off x="6415888" y="2375611"/>
+            <a:ext cx="329184" cy="329184"/>
           </a:xfrm>
           <a:prstGeom prst="rect">
             <a:avLst/>
@@ -7621,7 +8827,7 @@
               <a:buNone/>
             </a:pPr>
             <a:r>
-              <a:rPr lang="en-US" sz="1400" b="1" dirty="0">
+              <a:rPr lang="en-US" sz="1100" b="1" dirty="0">
                 <a:solidFill>
                   <a:srgbClr val="FFFFFF"/>
                 </a:solidFill>
@@ -7631,20 +8837,20 @@
               </a:rPr>
               <a:t>2</a:t>
             </a:r>
-            <a:endParaRPr lang="en-US" sz="1400" dirty="0"/>
-          </a:p>
-        </p:txBody>
-      </p:sp>
-      <p:sp>
-        <p:nvSpPr>
-          <p:cNvPr id="11" name="Text 9"/>
-          <p:cNvSpPr/>
-          <p:nvPr/>
-        </p:nvSpPr>
-        <p:spPr>
-          <a:xfrm>
-            <a:off x="1499616" y="3429000"/>
-            <a:ext cx="9777679" cy="667512"/>
+            <a:endParaRPr lang="en-US" sz="1100" dirty="0"/>
+          </a:p>
+        </p:txBody>
+      </p:sp>
+      <p:sp>
+        <p:nvSpPr>
+          <p:cNvPr id="12" name="Text 9"/>
+          <p:cNvSpPr/>
+          <p:nvPr/>
+        </p:nvSpPr>
+        <p:spPr>
+          <a:xfrm>
+            <a:off x="6836512" y="2267712"/>
+            <a:ext cx="4477360" cy="544982"/>
           </a:xfrm>
           <a:prstGeom prst="rect">
             <a:avLst/>
@@ -7658,12 +8864,12 @@
           <a:p>
             <a:pPr indent="0" marL="0">
               <a:lnSpc>
-                <a:spcPct val="92000"/>
-              </a:lnSpc>
-              <a:buNone/>
-            </a:pPr>
-            <a:r>
-              <a:rPr lang="en-US" sz="1450" b="1" dirty="0">
+                <a:spcPct val="90000"/>
+              </a:lnSpc>
+              <a:buNone/>
+            </a:pPr>
+            <a:r>
+              <a:rPr lang="en-US" sz="1150" b="1" dirty="0">
                 <a:solidFill>
                   <a:srgbClr val="1B2733"/>
                 </a:solidFill>
@@ -7671,19 +8877,19 @@
                 <a:ea typeface="Yu Gothic" pitchFamily="34" charset="-122"/>
                 <a:cs typeface="Yu Gothic" pitchFamily="34" charset="-120"/>
               </a:rPr>
-              <a:t>通報者役は、メモを見ずに言う。詰まったら言い直してよい。</a:t>
-            </a:r>
-            <a:endParaRPr lang="en-US" sz="1450" dirty="0"/>
-          </a:p>
-          <a:p>
-            <a:pPr indent="0" marL="0">
-              <a:lnSpc>
-                <a:spcPct val="92000"/>
-              </a:lnSpc>
-              <a:buNone/>
-            </a:pPr>
-            <a:r>
-              <a:rPr lang="en-US" sz="1050" i="1" dirty="0">
+              <a:t>救急です　　kyūkyū desu</a:t>
+            </a:r>
+            <a:endParaRPr lang="en-US" sz="1150" dirty="0"/>
+          </a:p>
+          <a:p>
+            <a:pPr indent="0" marL="0">
+              <a:lnSpc>
+                <a:spcPct val="90000"/>
+              </a:lnSpc>
+              <a:buNone/>
+            </a:pPr>
+            <a:r>
+              <a:rPr lang="en-US" sz="900" i="1" dirty="0">
                 <a:solidFill>
                   <a:srgbClr val="5F7183"/>
                 </a:solidFill>
@@ -7691,26 +8897,26 @@
                 <a:ea typeface="Calibri" pitchFamily="34" charset="-122"/>
                 <a:cs typeface="Calibri" pitchFamily="34" charset="-120"/>
               </a:rPr>
-              <a:t>The caller speaks without notes. If you stall, start the sentence again.</a:t>
-            </a:r>
-            <a:endParaRPr lang="en-US" sz="1450" dirty="0"/>
-          </a:p>
-        </p:txBody>
-      </p:sp>
-      <p:sp>
-        <p:nvSpPr>
-          <p:cNvPr id="12" name="Shape 10"/>
-          <p:cNvSpPr/>
-          <p:nvPr/>
-        </p:nvSpPr>
-        <p:spPr>
-          <a:xfrm>
-            <a:off x="640080" y="4352544"/>
-            <a:ext cx="10911535" cy="850392"/>
+              <a:t>We need an ambulance.</a:t>
+            </a:r>
+            <a:endParaRPr lang="en-US" sz="1150" dirty="0"/>
+          </a:p>
+        </p:txBody>
+      </p:sp>
+      <p:sp>
+        <p:nvSpPr>
+          <p:cNvPr id="13" name="Shape 10"/>
+          <p:cNvSpPr/>
+          <p:nvPr/>
+        </p:nvSpPr>
+        <p:spPr>
+          <a:xfrm>
+            <a:off x="640080" y="3032150"/>
+            <a:ext cx="5318608" cy="691286"/>
           </a:xfrm>
           <a:prstGeom prst="roundRect">
             <a:avLst>
-              <a:gd name="adj" fmla="val 5376"/>
+              <a:gd name="adj" fmla="val 5291"/>
             </a:avLst>
           </a:prstGeom>
           <a:solidFill>
@@ -7721,34 +8927,34 @@
       </p:sp>
       <p:sp>
         <p:nvSpPr>
-          <p:cNvPr id="13" name="Shape 11"/>
-          <p:cNvSpPr/>
-          <p:nvPr/>
-        </p:nvSpPr>
-        <p:spPr>
-          <a:xfrm>
-            <a:off x="896112" y="4585716"/>
-            <a:ext cx="384048" cy="384048"/>
+          <p:cNvPr id="14" name="Shape 11"/>
+          <p:cNvSpPr/>
+          <p:nvPr/>
+        </p:nvSpPr>
+        <p:spPr>
+          <a:xfrm>
+            <a:off x="822960" y="3213202"/>
+            <a:ext cx="329184" cy="329184"/>
           </a:xfrm>
           <a:prstGeom prst="ellipse">
             <a:avLst/>
           </a:prstGeom>
           <a:solidFill>
-            <a:srgbClr val="17AF98"/>
+            <a:srgbClr val="093259"/>
           </a:solidFill>
           <a:ln/>
         </p:spPr>
       </p:sp>
       <p:sp>
         <p:nvSpPr>
-          <p:cNvPr id="14" name="Text 12"/>
-          <p:cNvSpPr/>
-          <p:nvPr/>
-        </p:nvSpPr>
-        <p:spPr>
-          <a:xfrm>
-            <a:off x="896112" y="4585716"/>
-            <a:ext cx="384048" cy="384048"/>
+          <p:cNvPr id="15" name="Text 12"/>
+          <p:cNvSpPr/>
+          <p:nvPr/>
+        </p:nvSpPr>
+        <p:spPr>
+          <a:xfrm>
+            <a:off x="822960" y="3213202"/>
+            <a:ext cx="329184" cy="329184"/>
           </a:xfrm>
           <a:prstGeom prst="rect">
             <a:avLst/>
@@ -7764,7 +8970,7 @@
               <a:buNone/>
             </a:pPr>
             <a:r>
-              <a:rPr lang="en-US" sz="1400" b="1" dirty="0">
+              <a:rPr lang="en-US" sz="1100" b="1" dirty="0">
                 <a:solidFill>
                   <a:srgbClr val="FFFFFF"/>
                 </a:solidFill>
@@ -7774,20 +8980,20 @@
               </a:rPr>
               <a:t>3</a:t>
             </a:r>
-            <a:endParaRPr lang="en-US" sz="1400" dirty="0"/>
-          </a:p>
-        </p:txBody>
-      </p:sp>
-      <p:sp>
-        <p:nvSpPr>
-          <p:cNvPr id="15" name="Text 13"/>
-          <p:cNvSpPr/>
-          <p:nvPr/>
-        </p:nvSpPr>
-        <p:spPr>
-          <a:xfrm>
-            <a:off x="1499616" y="4462272"/>
-            <a:ext cx="9777679" cy="667512"/>
+            <a:endParaRPr lang="en-US" sz="1100" dirty="0"/>
+          </a:p>
+        </p:txBody>
+      </p:sp>
+      <p:sp>
+        <p:nvSpPr>
+          <p:cNvPr id="16" name="Text 13"/>
+          <p:cNvSpPr/>
+          <p:nvPr/>
+        </p:nvSpPr>
+        <p:spPr>
+          <a:xfrm>
+            <a:off x="1243584" y="3105302"/>
+            <a:ext cx="4477360" cy="544982"/>
           </a:xfrm>
           <a:prstGeom prst="rect">
             <a:avLst/>
@@ -7801,12 +9007,12 @@
           <a:p>
             <a:pPr indent="0" marL="0">
               <a:lnSpc>
-                <a:spcPct val="92000"/>
-              </a:lnSpc>
-              <a:buNone/>
-            </a:pPr>
-            <a:r>
-              <a:rPr lang="en-US" sz="1450" b="1" dirty="0">
+                <a:spcPct val="90000"/>
+              </a:lnSpc>
+              <a:buNone/>
+            </a:pPr>
+            <a:r>
+              <a:rPr lang="en-US" sz="1150" b="1" dirty="0">
                 <a:solidFill>
                   <a:srgbClr val="1B2733"/>
                 </a:solidFill>
@@ -7814,19 +9020,19 @@
                 <a:ea typeface="Yu Gothic" pitchFamily="34" charset="-122"/>
                 <a:cs typeface="Yu Gothic" pitchFamily="34" charset="-120"/>
               </a:rPr>
-              <a:t>評価するのは流暢さではなく、必要事項が漏れないこと。</a:t>
-            </a:r>
-            <a:endParaRPr lang="en-US" sz="1450" dirty="0"/>
-          </a:p>
-          <a:p>
-            <a:pPr indent="0" marL="0">
-              <a:lnSpc>
-                <a:spcPct val="92000"/>
-              </a:lnSpc>
-              <a:buNone/>
-            </a:pPr>
-            <a:r>
-              <a:rPr lang="en-US" sz="1050" i="1" dirty="0">
+              <a:t>事件です　　jiken desu</a:t>
+            </a:r>
+            <a:endParaRPr lang="en-US" sz="1150" dirty="0"/>
+          </a:p>
+          <a:p>
+            <a:pPr indent="0" marL="0">
+              <a:lnSpc>
+                <a:spcPct val="90000"/>
+              </a:lnSpc>
+              <a:buNone/>
+            </a:pPr>
+            <a:r>
+              <a:rPr lang="en-US" sz="900" i="1" dirty="0">
                 <a:solidFill>
                   <a:srgbClr val="5F7183"/>
                 </a:solidFill>
@@ -7834,64 +9040,64 @@
                 <a:ea typeface="Calibri" pitchFamily="34" charset="-122"/>
                 <a:cs typeface="Calibri" pitchFamily="34" charset="-120"/>
               </a:rPr>
-              <a:t>We are not grading fluency — only whether anything essential was missed.</a:t>
-            </a:r>
-            <a:endParaRPr lang="en-US" sz="1450" dirty="0"/>
-          </a:p>
-        </p:txBody>
-      </p:sp>
-      <p:sp>
-        <p:nvSpPr>
-          <p:cNvPr id="16" name="Shape 14"/>
-          <p:cNvSpPr/>
-          <p:nvPr/>
-        </p:nvSpPr>
-        <p:spPr>
-          <a:xfrm>
-            <a:off x="640080" y="5385816"/>
-            <a:ext cx="10911535" cy="850392"/>
+              <a:t>A crime has occurred.</a:t>
+            </a:r>
+            <a:endParaRPr lang="en-US" sz="1150" dirty="0"/>
+          </a:p>
+        </p:txBody>
+      </p:sp>
+      <p:sp>
+        <p:nvSpPr>
+          <p:cNvPr id="17" name="Shape 14"/>
+          <p:cNvSpPr/>
+          <p:nvPr/>
+        </p:nvSpPr>
+        <p:spPr>
+          <a:xfrm>
+            <a:off x="6233008" y="3032150"/>
+            <a:ext cx="5318608" cy="691286"/>
           </a:xfrm>
           <a:prstGeom prst="roundRect">
             <a:avLst>
-              <a:gd name="adj" fmla="val 5376"/>
+              <a:gd name="adj" fmla="val 5291"/>
             </a:avLst>
           </a:prstGeom>
           <a:solidFill>
-            <a:srgbClr val="F7FAFC"/>
+            <a:srgbClr val="EFF4F8"/>
           </a:solidFill>
           <a:ln/>
         </p:spPr>
       </p:sp>
       <p:sp>
         <p:nvSpPr>
-          <p:cNvPr id="17" name="Shape 15"/>
-          <p:cNvSpPr/>
-          <p:nvPr/>
-        </p:nvSpPr>
-        <p:spPr>
-          <a:xfrm>
-            <a:off x="896112" y="5618988"/>
-            <a:ext cx="384048" cy="384048"/>
+          <p:cNvPr id="18" name="Shape 15"/>
+          <p:cNvSpPr/>
+          <p:nvPr/>
+        </p:nvSpPr>
+        <p:spPr>
+          <a:xfrm>
+            <a:off x="6415888" y="3213202"/>
+            <a:ext cx="329184" cy="329184"/>
           </a:xfrm>
           <a:prstGeom prst="ellipse">
             <a:avLst/>
           </a:prstGeom>
           <a:solidFill>
-            <a:srgbClr val="17AF98"/>
+            <a:srgbClr val="093259"/>
           </a:solidFill>
           <a:ln/>
         </p:spPr>
       </p:sp>
       <p:sp>
         <p:nvSpPr>
-          <p:cNvPr id="18" name="Text 16"/>
-          <p:cNvSpPr/>
-          <p:nvPr/>
-        </p:nvSpPr>
-        <p:spPr>
-          <a:xfrm>
-            <a:off x="896112" y="5618988"/>
-            <a:ext cx="384048" cy="384048"/>
+          <p:cNvPr id="19" name="Text 16"/>
+          <p:cNvSpPr/>
+          <p:nvPr/>
+        </p:nvSpPr>
+        <p:spPr>
+          <a:xfrm>
+            <a:off x="6415888" y="3213202"/>
+            <a:ext cx="329184" cy="329184"/>
           </a:xfrm>
           <a:prstGeom prst="rect">
             <a:avLst/>
@@ -7907,7 +9113,7 @@
               <a:buNone/>
             </a:pPr>
             <a:r>
-              <a:rPr lang="en-US" sz="1400" b="1" dirty="0">
+              <a:rPr lang="en-US" sz="1100" b="1" dirty="0">
                 <a:solidFill>
                   <a:srgbClr val="FFFFFF"/>
                 </a:solidFill>
@@ -7917,20 +9123,20 @@
               </a:rPr>
               <a:t>4</a:t>
             </a:r>
-            <a:endParaRPr lang="en-US" sz="1400" dirty="0"/>
-          </a:p>
-        </p:txBody>
-      </p:sp>
-      <p:sp>
-        <p:nvSpPr>
-          <p:cNvPr id="19" name="Text 17"/>
-          <p:cNvSpPr/>
-          <p:nvPr/>
-        </p:nvSpPr>
-        <p:spPr>
-          <a:xfrm>
-            <a:off x="1499616" y="5495544"/>
-            <a:ext cx="9777679" cy="667512"/>
+            <a:endParaRPr lang="en-US" sz="1100" dirty="0"/>
+          </a:p>
+        </p:txBody>
+      </p:sp>
+      <p:sp>
+        <p:nvSpPr>
+          <p:cNvPr id="20" name="Text 17"/>
+          <p:cNvSpPr/>
+          <p:nvPr/>
+        </p:nvSpPr>
+        <p:spPr>
+          <a:xfrm>
+            <a:off x="6836512" y="3105302"/>
+            <a:ext cx="4477360" cy="544982"/>
           </a:xfrm>
           <a:prstGeom prst="rect">
             <a:avLst/>
@@ -7944,12 +9150,12 @@
           <a:p>
             <a:pPr indent="0" marL="0">
               <a:lnSpc>
-                <a:spcPct val="92000"/>
-              </a:lnSpc>
-              <a:buNone/>
-            </a:pPr>
-            <a:r>
-              <a:rPr lang="en-US" sz="1450" b="1" dirty="0">
+                <a:spcPct val="90000"/>
+              </a:lnSpc>
+              <a:buNone/>
+            </a:pPr>
+            <a:r>
+              <a:rPr lang="en-US" sz="1150" b="1" dirty="0">
                 <a:solidFill>
                   <a:srgbClr val="1B2733"/>
                 </a:solidFill>
@@ -7957,19 +9163,19 @@
                 <a:ea typeface="Yu Gothic" pitchFamily="34" charset="-122"/>
                 <a:cs typeface="Yu Gothic" pitchFamily="34" charset="-120"/>
               </a:rPr>
-              <a:t>2巡目は、相手が興奮している設定で行います。</a:t>
-            </a:r>
-            <a:endParaRPr lang="en-US" sz="1450" dirty="0"/>
-          </a:p>
-          <a:p>
-            <a:pPr indent="0" marL="0">
-              <a:lnSpc>
-                <a:spcPct val="92000"/>
-              </a:lnSpc>
-              <a:buNone/>
-            </a:pPr>
-            <a:r>
-              <a:rPr lang="en-US" sz="1050" i="1" dirty="0">
+              <a:t>場所は ◯◯ です　　basho wa ◯◯ desu</a:t>
+            </a:r>
+            <a:endParaRPr lang="en-US" sz="1150" dirty="0"/>
+          </a:p>
+          <a:p>
+            <a:pPr indent="0" marL="0">
+              <a:lnSpc>
+                <a:spcPct val="90000"/>
+              </a:lnSpc>
+              <a:buNone/>
+            </a:pPr>
+            <a:r>
+              <a:rPr lang="en-US" sz="900" i="1" dirty="0">
                 <a:solidFill>
                   <a:srgbClr val="5F7183"/>
                 </a:solidFill>
@@ -7977,22 +9183,64 @@
                 <a:ea typeface="Calibri" pitchFamily="34" charset="-122"/>
                 <a:cs typeface="Calibri" pitchFamily="34" charset="-120"/>
               </a:rPr>
-              <a:t>On the second round, the caller will be playing someone agitated.</a:t>
-            </a:r>
-            <a:endParaRPr lang="en-US" sz="1450" dirty="0"/>
-          </a:p>
-        </p:txBody>
-      </p:sp>
-      <p:sp>
-        <p:nvSpPr>
-          <p:cNvPr id="20" name="Text 18"/>
-          <p:cNvSpPr/>
-          <p:nvPr/>
-        </p:nvSpPr>
-        <p:spPr>
-          <a:xfrm>
-            <a:off x="640080" y="6382512"/>
-            <a:ext cx="8778240" cy="292608"/>
+              <a:t>The location is ◯◯.</a:t>
+            </a:r>
+            <a:endParaRPr lang="en-US" sz="1150" dirty="0"/>
+          </a:p>
+        </p:txBody>
+      </p:sp>
+      <p:sp>
+        <p:nvSpPr>
+          <p:cNvPr id="21" name="Shape 18"/>
+          <p:cNvSpPr/>
+          <p:nvPr/>
+        </p:nvSpPr>
+        <p:spPr>
+          <a:xfrm>
+            <a:off x="640080" y="3869741"/>
+            <a:ext cx="5318608" cy="691286"/>
+          </a:xfrm>
+          <a:prstGeom prst="roundRect">
+            <a:avLst>
+              <a:gd name="adj" fmla="val 5291"/>
+            </a:avLst>
+          </a:prstGeom>
+          <a:solidFill>
+            <a:srgbClr val="EFF4F8"/>
+          </a:solidFill>
+          <a:ln/>
+        </p:spPr>
+      </p:sp>
+      <p:sp>
+        <p:nvSpPr>
+          <p:cNvPr id="22" name="Shape 19"/>
+          <p:cNvSpPr/>
+          <p:nvPr/>
+        </p:nvSpPr>
+        <p:spPr>
+          <a:xfrm>
+            <a:off x="822960" y="4050792"/>
+            <a:ext cx="329184" cy="329184"/>
+          </a:xfrm>
+          <a:prstGeom prst="ellipse">
+            <a:avLst/>
+          </a:prstGeom>
+          <a:solidFill>
+            <a:srgbClr val="093259"/>
+          </a:solidFill>
+          <a:ln/>
+        </p:spPr>
+      </p:sp>
+      <p:sp>
+        <p:nvSpPr>
+          <p:cNvPr id="23" name="Text 20"/>
+          <p:cNvSpPr/>
+          <p:nvPr/>
+        </p:nvSpPr>
+        <p:spPr>
+          <a:xfrm>
+            <a:off x="822960" y="4050792"/>
+            <a:ext cx="329184" cy="329184"/>
           </a:xfrm>
           <a:prstGeom prst="rect">
             <a:avLst/>
@@ -8004,18 +9252,834 @@
           <a:bodyPr wrap="square" lIns="0" tIns="0" rIns="0" bIns="0" rtlCol="0" anchor="ctr"/>
           <a:lstStyle/>
           <a:p>
-            <a:pPr indent="0" marL="0">
-              <a:buNone/>
-            </a:pPr>
-            <a:r>
-              <a:rPr lang="en-US" sz="900" dirty="0">
-                <a:solidFill>
-                  <a:srgbClr val="5F7183"/>
+            <a:pPr algn="ctr" indent="0" marL="0">
+              <a:buNone/>
+            </a:pPr>
+            <a:r>
+              <a:rPr lang="en-US" sz="1100" b="1" dirty="0">
+                <a:solidFill>
+                  <a:srgbClr val="FFFFFF"/>
+                </a:solidFill>
+                <a:latin typeface="Calibri" pitchFamily="34" charset="0"/>
+                <a:ea typeface="Calibri" pitchFamily="34" charset="-122"/>
+                <a:cs typeface="Calibri" pitchFamily="34" charset="-120"/>
+              </a:rPr>
+              <a:t>5</a:t>
+            </a:r>
+            <a:endParaRPr lang="en-US" sz="1100" dirty="0"/>
+          </a:p>
+        </p:txBody>
+      </p:sp>
+      <p:sp>
+        <p:nvSpPr>
+          <p:cNvPr id="24" name="Text 21"/>
+          <p:cNvSpPr/>
+          <p:nvPr/>
+        </p:nvSpPr>
+        <p:spPr>
+          <a:xfrm>
+            <a:off x="1243584" y="3942893"/>
+            <a:ext cx="4477360" cy="544982"/>
+          </a:xfrm>
+          <a:prstGeom prst="rect">
+            <a:avLst/>
+          </a:prstGeom>
+          <a:noFill/>
+          <a:ln/>
+        </p:spPr>
+        <p:txBody>
+          <a:bodyPr wrap="square" lIns="0" tIns="0" rIns="0" bIns="0" rtlCol="0" anchor="ctr"/>
+          <a:lstStyle/>
+          <a:p>
+            <a:pPr indent="0" marL="0">
+              <a:lnSpc>
+                <a:spcPct val="90000"/>
+              </a:lnSpc>
+              <a:buNone/>
+            </a:pPr>
+            <a:r>
+              <a:rPr lang="en-US" sz="1150" b="1" dirty="0">
+                <a:solidFill>
+                  <a:srgbClr val="1B2733"/>
                 </a:solidFill>
                 <a:latin typeface="Yu Gothic" pitchFamily="34" charset="0"/>
                 <a:ea typeface="Yu Gothic" pitchFamily="34" charset="-122"/>
                 <a:cs typeface="Yu Gothic" pitchFamily="34" charset="-120"/>
               </a:rPr>
+              <a:t>けが人が 1名 います　　keganin ga ichi-mei imasu</a:t>
+            </a:r>
+            <a:endParaRPr lang="en-US" sz="1150" dirty="0"/>
+          </a:p>
+          <a:p>
+            <a:pPr indent="0" marL="0">
+              <a:lnSpc>
+                <a:spcPct val="90000"/>
+              </a:lnSpc>
+              <a:buNone/>
+            </a:pPr>
+            <a:r>
+              <a:rPr lang="en-US" sz="900" i="1" dirty="0">
+                <a:solidFill>
+                  <a:srgbClr val="5F7183"/>
+                </a:solidFill>
+                <a:latin typeface="Calibri" pitchFamily="34" charset="0"/>
+                <a:ea typeface="Calibri" pitchFamily="34" charset="-122"/>
+                <a:cs typeface="Calibri" pitchFamily="34" charset="-120"/>
+              </a:rPr>
+              <a:t>One person is injured.</a:t>
+            </a:r>
+            <a:endParaRPr lang="en-US" sz="1150" dirty="0"/>
+          </a:p>
+        </p:txBody>
+      </p:sp>
+      <p:sp>
+        <p:nvSpPr>
+          <p:cNvPr id="25" name="Shape 22"/>
+          <p:cNvSpPr/>
+          <p:nvPr/>
+        </p:nvSpPr>
+        <p:spPr>
+          <a:xfrm>
+            <a:off x="6233008" y="3869741"/>
+            <a:ext cx="5318608" cy="691286"/>
+          </a:xfrm>
+          <a:prstGeom prst="roundRect">
+            <a:avLst>
+              <a:gd name="adj" fmla="val 5291"/>
+            </a:avLst>
+          </a:prstGeom>
+          <a:solidFill>
+            <a:srgbClr val="EFF4F8"/>
+          </a:solidFill>
+          <a:ln/>
+        </p:spPr>
+      </p:sp>
+      <p:sp>
+        <p:nvSpPr>
+          <p:cNvPr id="26" name="Shape 23"/>
+          <p:cNvSpPr/>
+          <p:nvPr/>
+        </p:nvSpPr>
+        <p:spPr>
+          <a:xfrm>
+            <a:off x="6415888" y="4050792"/>
+            <a:ext cx="329184" cy="329184"/>
+          </a:xfrm>
+          <a:prstGeom prst="ellipse">
+            <a:avLst/>
+          </a:prstGeom>
+          <a:solidFill>
+            <a:srgbClr val="093259"/>
+          </a:solidFill>
+          <a:ln/>
+        </p:spPr>
+      </p:sp>
+      <p:sp>
+        <p:nvSpPr>
+          <p:cNvPr id="27" name="Text 24"/>
+          <p:cNvSpPr/>
+          <p:nvPr/>
+        </p:nvSpPr>
+        <p:spPr>
+          <a:xfrm>
+            <a:off x="6415888" y="4050792"/>
+            <a:ext cx="329184" cy="329184"/>
+          </a:xfrm>
+          <a:prstGeom prst="rect">
+            <a:avLst/>
+          </a:prstGeom>
+          <a:noFill/>
+          <a:ln/>
+        </p:spPr>
+        <p:txBody>
+          <a:bodyPr wrap="square" lIns="0" tIns="0" rIns="0" bIns="0" rtlCol="0" anchor="ctr"/>
+          <a:lstStyle/>
+          <a:p>
+            <a:pPr algn="ctr" indent="0" marL="0">
+              <a:buNone/>
+            </a:pPr>
+            <a:r>
+              <a:rPr lang="en-US" sz="1100" b="1" dirty="0">
+                <a:solidFill>
+                  <a:srgbClr val="FFFFFF"/>
+                </a:solidFill>
+                <a:latin typeface="Calibri" pitchFamily="34" charset="0"/>
+                <a:ea typeface="Calibri" pitchFamily="34" charset="-122"/>
+                <a:cs typeface="Calibri" pitchFamily="34" charset="-120"/>
+              </a:rPr>
+              <a:t>6</a:t>
+            </a:r>
+            <a:endParaRPr lang="en-US" sz="1100" dirty="0"/>
+          </a:p>
+        </p:txBody>
+      </p:sp>
+      <p:sp>
+        <p:nvSpPr>
+          <p:cNvPr id="28" name="Text 25"/>
+          <p:cNvSpPr/>
+          <p:nvPr/>
+        </p:nvSpPr>
+        <p:spPr>
+          <a:xfrm>
+            <a:off x="6836512" y="3942893"/>
+            <a:ext cx="4477360" cy="544982"/>
+          </a:xfrm>
+          <a:prstGeom prst="rect">
+            <a:avLst/>
+          </a:prstGeom>
+          <a:noFill/>
+          <a:ln/>
+        </p:spPr>
+        <p:txBody>
+          <a:bodyPr wrap="square" lIns="0" tIns="0" rIns="0" bIns="0" rtlCol="0" anchor="ctr"/>
+          <a:lstStyle/>
+          <a:p>
+            <a:pPr indent="0" marL="0">
+              <a:lnSpc>
+                <a:spcPct val="90000"/>
+              </a:lnSpc>
+              <a:buNone/>
+            </a:pPr>
+            <a:r>
+              <a:rPr lang="en-US" sz="1150" b="1" dirty="0">
+                <a:solidFill>
+                  <a:srgbClr val="1B2733"/>
+                </a:solidFill>
+                <a:latin typeface="Yu Gothic" pitchFamily="34" charset="0"/>
+                <a:ea typeface="Yu Gothic" pitchFamily="34" charset="-122"/>
+                <a:cs typeface="Yu Gothic" pitchFamily="34" charset="-120"/>
+              </a:rPr>
+              <a:t>意識が ありません　　ishiki ga arimasen</a:t>
+            </a:r>
+            <a:endParaRPr lang="en-US" sz="1150" dirty="0"/>
+          </a:p>
+          <a:p>
+            <a:pPr indent="0" marL="0">
+              <a:lnSpc>
+                <a:spcPct val="90000"/>
+              </a:lnSpc>
+              <a:buNone/>
+            </a:pPr>
+            <a:r>
+              <a:rPr lang="en-US" sz="900" i="1" dirty="0">
+                <a:solidFill>
+                  <a:srgbClr val="5F7183"/>
+                </a:solidFill>
+                <a:latin typeface="Calibri" pitchFamily="34" charset="0"/>
+                <a:ea typeface="Calibri" pitchFamily="34" charset="-122"/>
+                <a:cs typeface="Calibri" pitchFamily="34" charset="-120"/>
+              </a:rPr>
+              <a:t>The person is unconscious.</a:t>
+            </a:r>
+            <a:endParaRPr lang="en-US" sz="1150" dirty="0"/>
+          </a:p>
+        </p:txBody>
+      </p:sp>
+      <p:sp>
+        <p:nvSpPr>
+          <p:cNvPr id="29" name="Shape 26"/>
+          <p:cNvSpPr/>
+          <p:nvPr/>
+        </p:nvSpPr>
+        <p:spPr>
+          <a:xfrm>
+            <a:off x="640080" y="4707331"/>
+            <a:ext cx="5318608" cy="691286"/>
+          </a:xfrm>
+          <a:prstGeom prst="roundRect">
+            <a:avLst>
+              <a:gd name="adj" fmla="val 5291"/>
+            </a:avLst>
+          </a:prstGeom>
+          <a:solidFill>
+            <a:srgbClr val="EFF4F8"/>
+          </a:solidFill>
+          <a:ln/>
+        </p:spPr>
+      </p:sp>
+      <p:sp>
+        <p:nvSpPr>
+          <p:cNvPr id="30" name="Shape 27"/>
+          <p:cNvSpPr/>
+          <p:nvPr/>
+        </p:nvSpPr>
+        <p:spPr>
+          <a:xfrm>
+            <a:off x="822960" y="4888382"/>
+            <a:ext cx="329184" cy="329184"/>
+          </a:xfrm>
+          <a:prstGeom prst="ellipse">
+            <a:avLst/>
+          </a:prstGeom>
+          <a:solidFill>
+            <a:srgbClr val="093259"/>
+          </a:solidFill>
+          <a:ln/>
+        </p:spPr>
+      </p:sp>
+      <p:sp>
+        <p:nvSpPr>
+          <p:cNvPr id="31" name="Text 28"/>
+          <p:cNvSpPr/>
+          <p:nvPr/>
+        </p:nvSpPr>
+        <p:spPr>
+          <a:xfrm>
+            <a:off x="822960" y="4888382"/>
+            <a:ext cx="329184" cy="329184"/>
+          </a:xfrm>
+          <a:prstGeom prst="rect">
+            <a:avLst/>
+          </a:prstGeom>
+          <a:noFill/>
+          <a:ln/>
+        </p:spPr>
+        <p:txBody>
+          <a:bodyPr wrap="square" lIns="0" tIns="0" rIns="0" bIns="0" rtlCol="0" anchor="ctr"/>
+          <a:lstStyle/>
+          <a:p>
+            <a:pPr algn="ctr" indent="0" marL="0">
+              <a:buNone/>
+            </a:pPr>
+            <a:r>
+              <a:rPr lang="en-US" sz="1100" b="1" dirty="0">
+                <a:solidFill>
+                  <a:srgbClr val="FFFFFF"/>
+                </a:solidFill>
+                <a:latin typeface="Calibri" pitchFamily="34" charset="0"/>
+                <a:ea typeface="Calibri" pitchFamily="34" charset="-122"/>
+                <a:cs typeface="Calibri" pitchFamily="34" charset="-120"/>
+              </a:rPr>
+              <a:t>7</a:t>
+            </a:r>
+            <a:endParaRPr lang="en-US" sz="1100" dirty="0"/>
+          </a:p>
+        </p:txBody>
+      </p:sp>
+      <p:sp>
+        <p:nvSpPr>
+          <p:cNvPr id="32" name="Text 29"/>
+          <p:cNvSpPr/>
+          <p:nvPr/>
+        </p:nvSpPr>
+        <p:spPr>
+          <a:xfrm>
+            <a:off x="1243584" y="4780483"/>
+            <a:ext cx="4477360" cy="544982"/>
+          </a:xfrm>
+          <a:prstGeom prst="rect">
+            <a:avLst/>
+          </a:prstGeom>
+          <a:noFill/>
+          <a:ln/>
+        </p:spPr>
+        <p:txBody>
+          <a:bodyPr wrap="square" lIns="0" tIns="0" rIns="0" bIns="0" rtlCol="0" anchor="ctr"/>
+          <a:lstStyle/>
+          <a:p>
+            <a:pPr indent="0" marL="0">
+              <a:lnSpc>
+                <a:spcPct val="90000"/>
+              </a:lnSpc>
+              <a:buNone/>
+            </a:pPr>
+            <a:r>
+              <a:rPr lang="en-US" sz="1150" b="1" dirty="0">
+                <a:solidFill>
+                  <a:srgbClr val="1B2733"/>
+                </a:solidFill>
+                <a:latin typeface="Yu Gothic" pitchFamily="34" charset="0"/>
+                <a:ea typeface="Yu Gothic" pitchFamily="34" charset="-122"/>
+                <a:cs typeface="Yu Gothic" pitchFamily="34" charset="-120"/>
+              </a:rPr>
+              <a:t>息を していません　　iki o shite imasen</a:t>
+            </a:r>
+            <a:endParaRPr lang="en-US" sz="1150" dirty="0"/>
+          </a:p>
+          <a:p>
+            <a:pPr indent="0" marL="0">
+              <a:lnSpc>
+                <a:spcPct val="90000"/>
+              </a:lnSpc>
+              <a:buNone/>
+            </a:pPr>
+            <a:r>
+              <a:rPr lang="en-US" sz="900" i="1" dirty="0">
+                <a:solidFill>
+                  <a:srgbClr val="5F7183"/>
+                </a:solidFill>
+                <a:latin typeface="Calibri" pitchFamily="34" charset="0"/>
+                <a:ea typeface="Calibri" pitchFamily="34" charset="-122"/>
+                <a:cs typeface="Calibri" pitchFamily="34" charset="-120"/>
+              </a:rPr>
+              <a:t>The person is not breathing.</a:t>
+            </a:r>
+            <a:endParaRPr lang="en-US" sz="1150" dirty="0"/>
+          </a:p>
+        </p:txBody>
+      </p:sp>
+      <p:sp>
+        <p:nvSpPr>
+          <p:cNvPr id="33" name="Shape 30"/>
+          <p:cNvSpPr/>
+          <p:nvPr/>
+        </p:nvSpPr>
+        <p:spPr>
+          <a:xfrm>
+            <a:off x="6233008" y="4707331"/>
+            <a:ext cx="5318608" cy="691286"/>
+          </a:xfrm>
+          <a:prstGeom prst="roundRect">
+            <a:avLst>
+              <a:gd name="adj" fmla="val 5291"/>
+            </a:avLst>
+          </a:prstGeom>
+          <a:solidFill>
+            <a:srgbClr val="EFF4F8"/>
+          </a:solidFill>
+          <a:ln/>
+        </p:spPr>
+      </p:sp>
+      <p:sp>
+        <p:nvSpPr>
+          <p:cNvPr id="34" name="Shape 31"/>
+          <p:cNvSpPr/>
+          <p:nvPr/>
+        </p:nvSpPr>
+        <p:spPr>
+          <a:xfrm>
+            <a:off x="6415888" y="4888382"/>
+            <a:ext cx="329184" cy="329184"/>
+          </a:xfrm>
+          <a:prstGeom prst="ellipse">
+            <a:avLst/>
+          </a:prstGeom>
+          <a:solidFill>
+            <a:srgbClr val="093259"/>
+          </a:solidFill>
+          <a:ln/>
+        </p:spPr>
+      </p:sp>
+      <p:sp>
+        <p:nvSpPr>
+          <p:cNvPr id="35" name="Text 32"/>
+          <p:cNvSpPr/>
+          <p:nvPr/>
+        </p:nvSpPr>
+        <p:spPr>
+          <a:xfrm>
+            <a:off x="6415888" y="4888382"/>
+            <a:ext cx="329184" cy="329184"/>
+          </a:xfrm>
+          <a:prstGeom prst="rect">
+            <a:avLst/>
+          </a:prstGeom>
+          <a:noFill/>
+          <a:ln/>
+        </p:spPr>
+        <p:txBody>
+          <a:bodyPr wrap="square" lIns="0" tIns="0" rIns="0" bIns="0" rtlCol="0" anchor="ctr"/>
+          <a:lstStyle/>
+          <a:p>
+            <a:pPr algn="ctr" indent="0" marL="0">
+              <a:buNone/>
+            </a:pPr>
+            <a:r>
+              <a:rPr lang="en-US" sz="1100" b="1" dirty="0">
+                <a:solidFill>
+                  <a:srgbClr val="FFFFFF"/>
+                </a:solidFill>
+                <a:latin typeface="Calibri" pitchFamily="34" charset="0"/>
+                <a:ea typeface="Calibri" pitchFamily="34" charset="-122"/>
+                <a:cs typeface="Calibri" pitchFamily="34" charset="-120"/>
+              </a:rPr>
+              <a:t>8</a:t>
+            </a:r>
+            <a:endParaRPr lang="en-US" sz="1100" dirty="0"/>
+          </a:p>
+        </p:txBody>
+      </p:sp>
+      <p:sp>
+        <p:nvSpPr>
+          <p:cNvPr id="36" name="Text 33"/>
+          <p:cNvSpPr/>
+          <p:nvPr/>
+        </p:nvSpPr>
+        <p:spPr>
+          <a:xfrm>
+            <a:off x="6836512" y="4780483"/>
+            <a:ext cx="4477360" cy="544982"/>
+          </a:xfrm>
+          <a:prstGeom prst="rect">
+            <a:avLst/>
+          </a:prstGeom>
+          <a:noFill/>
+          <a:ln/>
+        </p:spPr>
+        <p:txBody>
+          <a:bodyPr wrap="square" lIns="0" tIns="0" rIns="0" bIns="0" rtlCol="0" anchor="ctr"/>
+          <a:lstStyle/>
+          <a:p>
+            <a:pPr indent="0" marL="0">
+              <a:lnSpc>
+                <a:spcPct val="90000"/>
+              </a:lnSpc>
+              <a:buNone/>
+            </a:pPr>
+            <a:r>
+              <a:rPr lang="en-US" sz="1150" b="1" dirty="0">
+                <a:solidFill>
+                  <a:srgbClr val="1B2733"/>
+                </a:solidFill>
+                <a:latin typeface="Yu Gothic" pitchFamily="34" charset="0"/>
+                <a:ea typeface="Yu Gothic" pitchFamily="34" charset="-122"/>
+                <a:cs typeface="Yu Gothic" pitchFamily="34" charset="-120"/>
+              </a:rPr>
+              <a:t>警備員の ◯◯ です　　keibiin no ◯◯ desu</a:t>
+            </a:r>
+            <a:endParaRPr lang="en-US" sz="1150" dirty="0"/>
+          </a:p>
+          <a:p>
+            <a:pPr indent="0" marL="0">
+              <a:lnSpc>
+                <a:spcPct val="90000"/>
+              </a:lnSpc>
+              <a:buNone/>
+            </a:pPr>
+            <a:r>
+              <a:rPr lang="en-US" sz="900" i="1" dirty="0">
+                <a:solidFill>
+                  <a:srgbClr val="5F7183"/>
+                </a:solidFill>
+                <a:latin typeface="Calibri" pitchFamily="34" charset="0"/>
+                <a:ea typeface="Calibri" pitchFamily="34" charset="-122"/>
+                <a:cs typeface="Calibri" pitchFamily="34" charset="-120"/>
+              </a:rPr>
+              <a:t>I am ◯◯, a security guard.</a:t>
+            </a:r>
+            <a:endParaRPr lang="en-US" sz="1150" dirty="0"/>
+          </a:p>
+        </p:txBody>
+      </p:sp>
+      <p:sp>
+        <p:nvSpPr>
+          <p:cNvPr id="37" name="Shape 34"/>
+          <p:cNvSpPr/>
+          <p:nvPr/>
+        </p:nvSpPr>
+        <p:spPr>
+          <a:xfrm>
+            <a:off x="640080" y="5544922"/>
+            <a:ext cx="5318608" cy="691286"/>
+          </a:xfrm>
+          <a:prstGeom prst="roundRect">
+            <a:avLst>
+              <a:gd name="adj" fmla="val 5291"/>
+            </a:avLst>
+          </a:prstGeom>
+          <a:solidFill>
+            <a:srgbClr val="EFF4F8"/>
+          </a:solidFill>
+          <a:ln/>
+        </p:spPr>
+      </p:sp>
+      <p:sp>
+        <p:nvSpPr>
+          <p:cNvPr id="38" name="Shape 35"/>
+          <p:cNvSpPr/>
+          <p:nvPr/>
+        </p:nvSpPr>
+        <p:spPr>
+          <a:xfrm>
+            <a:off x="822960" y="5725973"/>
+            <a:ext cx="329184" cy="329184"/>
+          </a:xfrm>
+          <a:prstGeom prst="ellipse">
+            <a:avLst/>
+          </a:prstGeom>
+          <a:solidFill>
+            <a:srgbClr val="093259"/>
+          </a:solidFill>
+          <a:ln/>
+        </p:spPr>
+      </p:sp>
+      <p:sp>
+        <p:nvSpPr>
+          <p:cNvPr id="39" name="Text 36"/>
+          <p:cNvSpPr/>
+          <p:nvPr/>
+        </p:nvSpPr>
+        <p:spPr>
+          <a:xfrm>
+            <a:off x="822960" y="5725973"/>
+            <a:ext cx="329184" cy="329184"/>
+          </a:xfrm>
+          <a:prstGeom prst="rect">
+            <a:avLst/>
+          </a:prstGeom>
+          <a:noFill/>
+          <a:ln/>
+        </p:spPr>
+        <p:txBody>
+          <a:bodyPr wrap="square" lIns="0" tIns="0" rIns="0" bIns="0" rtlCol="0" anchor="ctr"/>
+          <a:lstStyle/>
+          <a:p>
+            <a:pPr algn="ctr" indent="0" marL="0">
+              <a:buNone/>
+            </a:pPr>
+            <a:r>
+              <a:rPr lang="en-US" sz="1100" b="1" dirty="0">
+                <a:solidFill>
+                  <a:srgbClr val="FFFFFF"/>
+                </a:solidFill>
+                <a:latin typeface="Calibri" pitchFamily="34" charset="0"/>
+                <a:ea typeface="Calibri" pitchFamily="34" charset="-122"/>
+                <a:cs typeface="Calibri" pitchFamily="34" charset="-120"/>
+              </a:rPr>
+              <a:t>9</a:t>
+            </a:r>
+            <a:endParaRPr lang="en-US" sz="1100" dirty="0"/>
+          </a:p>
+        </p:txBody>
+      </p:sp>
+      <p:sp>
+        <p:nvSpPr>
+          <p:cNvPr id="40" name="Text 37"/>
+          <p:cNvSpPr/>
+          <p:nvPr/>
+        </p:nvSpPr>
+        <p:spPr>
+          <a:xfrm>
+            <a:off x="1243584" y="5618074"/>
+            <a:ext cx="4477360" cy="544982"/>
+          </a:xfrm>
+          <a:prstGeom prst="rect">
+            <a:avLst/>
+          </a:prstGeom>
+          <a:noFill/>
+          <a:ln/>
+        </p:spPr>
+        <p:txBody>
+          <a:bodyPr wrap="square" lIns="0" tIns="0" rIns="0" bIns="0" rtlCol="0" anchor="ctr"/>
+          <a:lstStyle/>
+          <a:p>
+            <a:pPr indent="0" marL="0">
+              <a:lnSpc>
+                <a:spcPct val="90000"/>
+              </a:lnSpc>
+              <a:buNone/>
+            </a:pPr>
+            <a:r>
+              <a:rPr lang="en-US" sz="1150" b="1" dirty="0">
+                <a:solidFill>
+                  <a:srgbClr val="1B2733"/>
+                </a:solidFill>
+                <a:latin typeface="Yu Gothic" pitchFamily="34" charset="0"/>
+                <a:ea typeface="Yu Gothic" pitchFamily="34" charset="-122"/>
+                <a:cs typeface="Yu Gothic" pitchFamily="34" charset="-120"/>
+              </a:rPr>
+              <a:t>通報が難しい場合は、できる者を指名します。</a:t>
+            </a:r>
+            <a:endParaRPr lang="en-US" sz="1150" dirty="0"/>
+          </a:p>
+          <a:p>
+            <a:pPr indent="0" marL="0">
+              <a:lnSpc>
+                <a:spcPct val="90000"/>
+              </a:lnSpc>
+              <a:buNone/>
+            </a:pPr>
+            <a:r>
+              <a:rPr lang="en-US" sz="900" i="1" dirty="0">
+                <a:solidFill>
+                  <a:srgbClr val="5F7183"/>
+                </a:solidFill>
+                <a:latin typeface="Calibri" pitchFamily="34" charset="0"/>
+                <a:ea typeface="Calibri" pitchFamily="34" charset="-122"/>
+                <a:cs typeface="Calibri" pitchFamily="34" charset="-120"/>
+              </a:rPr>
+              <a:t>If you cannot make the call, name someone who can.</a:t>
+            </a:r>
+            <a:endParaRPr lang="en-US" sz="1150" dirty="0"/>
+          </a:p>
+        </p:txBody>
+      </p:sp>
+      <p:sp>
+        <p:nvSpPr>
+          <p:cNvPr id="41" name="Shape 38"/>
+          <p:cNvSpPr/>
+          <p:nvPr/>
+        </p:nvSpPr>
+        <p:spPr>
+          <a:xfrm>
+            <a:off x="6233008" y="5544922"/>
+            <a:ext cx="5318608" cy="691286"/>
+          </a:xfrm>
+          <a:prstGeom prst="roundRect">
+            <a:avLst>
+              <a:gd name="adj" fmla="val 5291"/>
+            </a:avLst>
+          </a:prstGeom>
+          <a:solidFill>
+            <a:srgbClr val="EFF4F8"/>
+          </a:solidFill>
+          <a:ln/>
+        </p:spPr>
+      </p:sp>
+      <p:sp>
+        <p:nvSpPr>
+          <p:cNvPr id="42" name="Shape 39"/>
+          <p:cNvSpPr/>
+          <p:nvPr/>
+        </p:nvSpPr>
+        <p:spPr>
+          <a:xfrm>
+            <a:off x="6415888" y="5725973"/>
+            <a:ext cx="329184" cy="329184"/>
+          </a:xfrm>
+          <a:prstGeom prst="ellipse">
+            <a:avLst/>
+          </a:prstGeom>
+          <a:solidFill>
+            <a:srgbClr val="093259"/>
+          </a:solidFill>
+          <a:ln/>
+        </p:spPr>
+      </p:sp>
+      <p:sp>
+        <p:nvSpPr>
+          <p:cNvPr id="43" name="Text 40"/>
+          <p:cNvSpPr/>
+          <p:nvPr/>
+        </p:nvSpPr>
+        <p:spPr>
+          <a:xfrm>
+            <a:off x="6415888" y="5725973"/>
+            <a:ext cx="329184" cy="329184"/>
+          </a:xfrm>
+          <a:prstGeom prst="rect">
+            <a:avLst/>
+          </a:prstGeom>
+          <a:noFill/>
+          <a:ln/>
+        </p:spPr>
+        <p:txBody>
+          <a:bodyPr wrap="square" lIns="0" tIns="0" rIns="0" bIns="0" rtlCol="0" anchor="ctr"/>
+          <a:lstStyle/>
+          <a:p>
+            <a:pPr algn="ctr" indent="0" marL="0">
+              <a:buNone/>
+            </a:pPr>
+            <a:r>
+              <a:rPr lang="en-US" sz="1100" b="1" dirty="0">
+                <a:solidFill>
+                  <a:srgbClr val="FFFFFF"/>
+                </a:solidFill>
+                <a:latin typeface="Calibri" pitchFamily="34" charset="0"/>
+                <a:ea typeface="Calibri" pitchFamily="34" charset="-122"/>
+                <a:cs typeface="Calibri" pitchFamily="34" charset="-120"/>
+              </a:rPr>
+              <a:t>10</a:t>
+            </a:r>
+            <a:endParaRPr lang="en-US" sz="1100" dirty="0"/>
+          </a:p>
+        </p:txBody>
+      </p:sp>
+      <p:sp>
+        <p:nvSpPr>
+          <p:cNvPr id="44" name="Text 41"/>
+          <p:cNvSpPr/>
+          <p:nvPr/>
+        </p:nvSpPr>
+        <p:spPr>
+          <a:xfrm>
+            <a:off x="6836512" y="5618074"/>
+            <a:ext cx="4477360" cy="544982"/>
+          </a:xfrm>
+          <a:prstGeom prst="rect">
+            <a:avLst/>
+          </a:prstGeom>
+          <a:noFill/>
+          <a:ln/>
+        </p:spPr>
+        <p:txBody>
+          <a:bodyPr wrap="square" lIns="0" tIns="0" rIns="0" bIns="0" rtlCol="0" anchor="ctr"/>
+          <a:lstStyle/>
+          <a:p>
+            <a:pPr indent="0" marL="0">
+              <a:lnSpc>
+                <a:spcPct val="90000"/>
+              </a:lnSpc>
+              <a:buNone/>
+            </a:pPr>
+            <a:r>
+              <a:rPr lang="en-US" sz="1150" b="1" dirty="0">
+                <a:solidFill>
+                  <a:srgbClr val="1B2733"/>
+                </a:solidFill>
+                <a:latin typeface="Yu Gothic" pitchFamily="34" charset="0"/>
+                <a:ea typeface="Yu Gothic" pitchFamily="34" charset="-122"/>
+                <a:cs typeface="Yu Gothic" pitchFamily="34" charset="-120"/>
+              </a:rPr>
+              <a:t>指名した場合でも、上記8つは全員が言えることとします。</a:t>
+            </a:r>
+            <a:endParaRPr lang="en-US" sz="1150" dirty="0"/>
+          </a:p>
+          <a:p>
+            <a:pPr indent="0" marL="0">
+              <a:lnSpc>
+                <a:spcPct val="90000"/>
+              </a:lnSpc>
+              <a:buNone/>
+            </a:pPr>
+            <a:r>
+              <a:rPr lang="en-US" sz="900" i="1" dirty="0">
+                <a:solidFill>
+                  <a:srgbClr val="5F7183"/>
+                </a:solidFill>
+                <a:latin typeface="Calibri" pitchFamily="34" charset="0"/>
+                <a:ea typeface="Calibri" pitchFamily="34" charset="-122"/>
+                <a:cs typeface="Calibri" pitchFamily="34" charset="-120"/>
+              </a:rPr>
+              <a:t>Even then, everyone must know the eight lines above.</a:t>
+            </a:r>
+            <a:endParaRPr lang="en-US" sz="1150" dirty="0"/>
+          </a:p>
+        </p:txBody>
+      </p:sp>
+      <p:sp>
+        <p:nvSpPr>
+          <p:cNvPr id="45" name="Text 42"/>
+          <p:cNvSpPr/>
+          <p:nvPr/>
+        </p:nvSpPr>
+        <p:spPr>
+          <a:xfrm>
+            <a:off x="640080" y="6382512"/>
+            <a:ext cx="8778240" cy="292608"/>
+          </a:xfrm>
+          <a:prstGeom prst="rect">
+            <a:avLst/>
+          </a:prstGeom>
+          <a:noFill/>
+          <a:ln/>
+        </p:spPr>
+        <p:txBody>
+          <a:bodyPr wrap="square" lIns="0" tIns="0" rIns="0" bIns="0" rtlCol="0" anchor="ctr"/>
+          <a:lstStyle/>
+          <a:p>
+            <a:pPr indent="0" marL="0">
+              <a:buNone/>
+            </a:pPr>
+            <a:r>
+              <a:rPr lang="en-US" sz="900" dirty="0">
+                <a:solidFill>
+                  <a:srgbClr val="5F7183"/>
+                </a:solidFill>
+                <a:latin typeface="Yu Gothic" pitchFamily="34" charset="0"/>
+                <a:ea typeface="Yu Gothic" pitchFamily="34" charset="-122"/>
+                <a:cs typeface="Yu Gothic" pitchFamily="34" charset="-120"/>
+              </a:rPr>
               <a:t>第9時限｜基本教育4 事故の発生時における警察機関への連絡その他応急の措置  </a:t>
             </a:r>
             <a:pPr indent="0" marL="0">
@@ -8038,7 +10102,7 @@
       </p:sp>
       <p:sp>
         <p:nvSpPr>
-          <p:cNvPr id="21" name="Text 19"/>
+          <p:cNvPr id="46" name="Text 43"/>
           <p:cNvSpPr/>
           <p:nvPr/>
         </p:nvSpPr>
@@ -8107,9 +10171,33 @@
           <a:chExt cx="0" cy="0"/>
         </a:xfrm>
       </p:grpSpPr>
-      <p:sp>
-        <p:nvSpPr>
-          <p:cNvPr id="2" name="Text 0"/>
+      <p:pic>
+        <p:nvPicPr>
+          <p:cNvPr id="2" name="Image 0" descr="/home/user/Training-/assets/logo.png">    </p:cNvPr>
+          <p:cNvPicPr>
+            <a:picLocks noChangeAspect="1"/>
+          </p:cNvPicPr>
+          <p:nvPr/>
+        </p:nvPicPr>
+        <p:blipFill>
+          <a:blip r:embed="rId1"/>
+          <a:stretch>
+            <a:fillRect/>
+          </a:stretch>
+        </p:blipFill>
+        <p:spPr>
+          <a:xfrm>
+            <a:off x="10765231" y="332912"/>
+            <a:ext cx="786384" cy="742353"/>
+          </a:xfrm>
+          <a:prstGeom prst="rect">
+            <a:avLst/>
+          </a:prstGeom>
+        </p:spPr>
+      </p:pic>
+      <p:sp>
+        <p:nvSpPr>
+          <p:cNvPr id="3" name="Text 0"/>
           <p:cNvSpPr/>
           <p:nvPr/>
         </p:nvSpPr>
@@ -8137,13 +10225,13 @@
             <a:r>
               <a:rPr lang="en-US" sz="2700" b="1" dirty="0">
                 <a:solidFill>
-                  <a:srgbClr val="0F2D52"/>
+                  <a:srgbClr val="093259"/>
                 </a:solidFill>
                 <a:latin typeface="Yu Gothic" pitchFamily="34" charset="0"/>
                 <a:ea typeface="Yu Gothic" pitchFamily="34" charset="-122"/>
                 <a:cs typeface="Yu Gothic" pitchFamily="34" charset="-120"/>
               </a:rPr>
-              <a:t>社内エスカレーション ― 誰に、何分以内に</a:t>
+              <a:t>通報練習の進め方</a:t>
             </a:r>
             <a:endParaRPr lang="en-US" sz="2700" dirty="0"/>
           </a:p>
@@ -8157,13 +10245,13 @@
             <a:r>
               <a:rPr lang="en-US" sz="1250" i="1" dirty="0">
                 <a:solidFill>
-                  <a:srgbClr val="17AF98"/>
-                </a:solidFill>
-                <a:latin typeface="Calibri" pitchFamily="34" charset="0"/>
-                <a:ea typeface="Calibri" pitchFamily="34" charset="-122"/>
-                <a:cs typeface="Calibri" pitchFamily="34" charset="-120"/>
-              </a:rPr>
-              <a:t>Internal Escalation — to whom, and how fast</a:t>
+                  <a:srgbClr val="12B198"/>
+                </a:solidFill>
+                <a:latin typeface="Calibri" pitchFamily="34" charset="0"/>
+                <a:ea typeface="Calibri" pitchFamily="34" charset="-122"/>
+                <a:cs typeface="Calibri" pitchFamily="34" charset="-120"/>
+              </a:rPr>
+              <a:t>Call Practice — How We Run It</a:t>
             </a:r>
             <a:endParaRPr lang="en-US" sz="2700" dirty="0"/>
           </a:p>
@@ -8171,7 +10259,7 @@
       </p:sp>
       <p:sp>
         <p:nvSpPr>
-          <p:cNvPr id="3" name="Text 1"/>
+          <p:cNvPr id="4" name="Text 1"/>
           <p:cNvSpPr/>
           <p:nvPr/>
         </p:nvSpPr>
@@ -8199,13 +10287,13 @@
             <a:r>
               <a:rPr lang="en-US" sz="1300" dirty="0">
                 <a:solidFill>
-                  <a:srgbClr val="0F2D52"/>
+                  <a:srgbClr val="093259"/>
                 </a:solidFill>
                 <a:latin typeface="Yu Gothic" pitchFamily="34" charset="0"/>
                 <a:ea typeface="Yu Gothic" pitchFamily="34" charset="-122"/>
                 <a:cs typeface="Yu Gothic" pitchFamily="34" charset="-120"/>
               </a:rPr>
-              <a:t>外部通報と社内報告は別の回路です。どちらも止めないこと。</a:t>
+              <a:t>2人1組で行います。通報者役と受令者役を交代します。全員が声を出します。</a:t>
             </a:r>
             <a:endParaRPr lang="en-US" sz="1300" dirty="0"/>
           </a:p>
@@ -8225,7 +10313,7 @@
                 <a:ea typeface="Calibri" pitchFamily="34" charset="-122"/>
                 <a:cs typeface="Calibri" pitchFamily="34" charset="-120"/>
               </a:rPr>
-              <a:t>The emergency call and the internal report are separate circuits. Neither may stall.</a:t>
+              <a:t>Work in pairs. Swap between caller and receiver. Everyone speaks.</a:t>
             </a:r>
             <a:endParaRPr lang="en-US" sz="1300" dirty="0"/>
           </a:p>
@@ -8233,18 +10321,18 @@
       </p:sp>
       <p:sp>
         <p:nvSpPr>
-          <p:cNvPr id="4" name="Shape 2"/>
+          <p:cNvPr id="5" name="Shape 2"/>
           <p:cNvSpPr/>
           <p:nvPr/>
         </p:nvSpPr>
         <p:spPr>
           <a:xfrm>
             <a:off x="640080" y="2286000"/>
-            <a:ext cx="10911535" cy="702259"/>
+            <a:ext cx="10911535" cy="850392"/>
           </a:xfrm>
           <a:prstGeom prst="roundRect">
             <a:avLst>
-              <a:gd name="adj" fmla="val 6510"/>
+              <a:gd name="adj" fmla="val 5376"/>
             </a:avLst>
           </a:prstGeom>
           <a:solidFill>
@@ -8255,33 +10343,33 @@
       </p:sp>
       <p:sp>
         <p:nvSpPr>
-          <p:cNvPr id="5" name="Shape 3"/>
-          <p:cNvSpPr/>
-          <p:nvPr/>
-        </p:nvSpPr>
-        <p:spPr>
-          <a:xfrm>
-            <a:off x="896112" y="2445106"/>
+          <p:cNvPr id="6" name="Shape 3"/>
+          <p:cNvSpPr/>
+          <p:nvPr/>
+        </p:nvSpPr>
+        <p:spPr>
+          <a:xfrm>
+            <a:off x="896112" y="2519172"/>
             <a:ext cx="384048" cy="384048"/>
           </a:xfrm>
           <a:prstGeom prst="ellipse">
             <a:avLst/>
           </a:prstGeom>
           <a:solidFill>
-            <a:srgbClr val="17AF98"/>
+            <a:srgbClr val="12B198"/>
           </a:solidFill>
           <a:ln/>
         </p:spPr>
       </p:sp>
       <p:sp>
         <p:nvSpPr>
-          <p:cNvPr id="6" name="Text 4"/>
-          <p:cNvSpPr/>
-          <p:nvPr/>
-        </p:nvSpPr>
-        <p:spPr>
-          <a:xfrm>
-            <a:off x="896112" y="2445106"/>
+          <p:cNvPr id="7" name="Text 4"/>
+          <p:cNvSpPr/>
+          <p:nvPr/>
+        </p:nvSpPr>
+        <p:spPr>
+          <a:xfrm>
+            <a:off x="896112" y="2519172"/>
             <a:ext cx="384048" cy="384048"/>
           </a:xfrm>
           <a:prstGeom prst="rect">
@@ -8314,14 +10402,14 @@
       </p:sp>
       <p:sp>
         <p:nvSpPr>
-          <p:cNvPr id="7" name="Text 5"/>
+          <p:cNvPr id="8" name="Text 5"/>
           <p:cNvSpPr/>
           <p:nvPr/>
         </p:nvSpPr>
         <p:spPr>
           <a:xfrm>
             <a:off x="1499616" y="2395728"/>
-            <a:ext cx="9777679" cy="519379"/>
+            <a:ext cx="9777679" cy="667512"/>
           </a:xfrm>
           <a:prstGeom prst="rect">
             <a:avLst/>
@@ -8348,7 +10436,7 @@
                 <a:ea typeface="Yu Gothic" pitchFamily="34" charset="-122"/>
                 <a:cs typeface="Yu Gothic" pitchFamily="34" charset="-120"/>
               </a:rPr>
-              <a:t>一次 ― 警備責任者へ即時。判断を待たずに一報を入れる。</a:t>
+              <a:t>受令者役は3つを聞き返します。「場所は？」「けが人は？」「お名前は？」</a:t>
             </a:r>
             <a:endParaRPr lang="en-US" sz="1450" dirty="0"/>
           </a:p>
@@ -8368,7 +10456,7 @@
                 <a:ea typeface="Calibri" pitchFamily="34" charset="-122"/>
                 <a:cs typeface="Calibri" pitchFamily="34" charset="-120"/>
               </a:rPr>
-              <a:t>First — the security supervisor, immediately. Do not wait to have a conclusion.</a:t>
+              <a:t>The receiver asks three things: location, casualties, and your name.</a:t>
             </a:r>
             <a:endParaRPr lang="en-US" sz="1450" dirty="0"/>
           </a:p>
@@ -8376,18 +10464,18 @@
       </p:sp>
       <p:sp>
         <p:nvSpPr>
-          <p:cNvPr id="8" name="Shape 6"/>
-          <p:cNvSpPr/>
-          <p:nvPr/>
-        </p:nvSpPr>
-        <p:spPr>
-          <a:xfrm>
-            <a:off x="640080" y="3097987"/>
-            <a:ext cx="10911535" cy="702259"/>
+          <p:cNvPr id="9" name="Shape 6"/>
+          <p:cNvSpPr/>
+          <p:nvPr/>
+        </p:nvSpPr>
+        <p:spPr>
+          <a:xfrm>
+            <a:off x="640080" y="3319272"/>
+            <a:ext cx="10911535" cy="850392"/>
           </a:xfrm>
           <a:prstGeom prst="roundRect">
             <a:avLst>
-              <a:gd name="adj" fmla="val 6510"/>
+              <a:gd name="adj" fmla="val 5376"/>
             </a:avLst>
           </a:prstGeom>
           <a:solidFill>
@@ -8398,33 +10486,33 @@
       </p:sp>
       <p:sp>
         <p:nvSpPr>
-          <p:cNvPr id="9" name="Shape 7"/>
-          <p:cNvSpPr/>
-          <p:nvPr/>
-        </p:nvSpPr>
-        <p:spPr>
-          <a:xfrm>
-            <a:off x="896112" y="3257093"/>
+          <p:cNvPr id="10" name="Shape 7"/>
+          <p:cNvSpPr/>
+          <p:nvPr/>
+        </p:nvSpPr>
+        <p:spPr>
+          <a:xfrm>
+            <a:off x="896112" y="3552444"/>
             <a:ext cx="384048" cy="384048"/>
           </a:xfrm>
           <a:prstGeom prst="ellipse">
             <a:avLst/>
           </a:prstGeom>
           <a:solidFill>
-            <a:srgbClr val="17AF98"/>
+            <a:srgbClr val="12B198"/>
           </a:solidFill>
           <a:ln/>
         </p:spPr>
       </p:sp>
       <p:sp>
         <p:nvSpPr>
-          <p:cNvPr id="10" name="Text 8"/>
-          <p:cNvSpPr/>
-          <p:nvPr/>
-        </p:nvSpPr>
-        <p:spPr>
-          <a:xfrm>
-            <a:off x="896112" y="3257093"/>
+          <p:cNvPr id="11" name="Text 8"/>
+          <p:cNvSpPr/>
+          <p:nvPr/>
+        </p:nvSpPr>
+        <p:spPr>
+          <a:xfrm>
+            <a:off x="896112" y="3552444"/>
             <a:ext cx="384048" cy="384048"/>
           </a:xfrm>
           <a:prstGeom prst="rect">
@@ -8457,14 +10545,14 @@
       </p:sp>
       <p:sp>
         <p:nvSpPr>
-          <p:cNvPr id="11" name="Text 9"/>
-          <p:cNvSpPr/>
-          <p:nvPr/>
-        </p:nvSpPr>
-        <p:spPr>
-          <a:xfrm>
-            <a:off x="1499616" y="3207715"/>
-            <a:ext cx="9777679" cy="519379"/>
+          <p:cNvPr id="12" name="Text 9"/>
+          <p:cNvSpPr/>
+          <p:nvPr/>
+        </p:nvSpPr>
+        <p:spPr>
+          <a:xfrm>
+            <a:off x="1499616" y="3429000"/>
+            <a:ext cx="9777679" cy="667512"/>
           </a:xfrm>
           <a:prstGeom prst="rect">
             <a:avLst/>
@@ -8491,7 +10579,7 @@
                 <a:ea typeface="Yu Gothic" pitchFamily="34" charset="-122"/>
                 <a:cs typeface="Yu Gothic" pitchFamily="34" charset="-120"/>
               </a:rPr>
-              <a:t>二次 ― 施設管理・総務へ。事案の継続が見込まれる場合。</a:t>
+              <a:t>通報者役はメモを見ずに言います。詰まった場合は言い直します。</a:t>
             </a:r>
             <a:endParaRPr lang="en-US" sz="1450" dirty="0"/>
           </a:p>
@@ -8511,7 +10599,7 @@
                 <a:ea typeface="Calibri" pitchFamily="34" charset="-122"/>
                 <a:cs typeface="Calibri" pitchFamily="34" charset="-120"/>
               </a:rPr>
-              <a:t>Second — facilities and general affairs, where the incident will continue.</a:t>
+              <a:t>The caller speaks without notes. If you stop, say the sentence again.</a:t>
             </a:r>
             <a:endParaRPr lang="en-US" sz="1450" dirty="0"/>
           </a:p>
@@ -8519,18 +10607,18 @@
       </p:sp>
       <p:sp>
         <p:nvSpPr>
-          <p:cNvPr id="12" name="Shape 10"/>
-          <p:cNvSpPr/>
-          <p:nvPr/>
-        </p:nvSpPr>
-        <p:spPr>
-          <a:xfrm>
-            <a:off x="640080" y="3909974"/>
-            <a:ext cx="10911535" cy="702259"/>
+          <p:cNvPr id="13" name="Shape 10"/>
+          <p:cNvSpPr/>
+          <p:nvPr/>
+        </p:nvSpPr>
+        <p:spPr>
+          <a:xfrm>
+            <a:off x="640080" y="4352544"/>
+            <a:ext cx="10911535" cy="850392"/>
           </a:xfrm>
           <a:prstGeom prst="roundRect">
             <a:avLst>
-              <a:gd name="adj" fmla="val 6510"/>
+              <a:gd name="adj" fmla="val 5376"/>
             </a:avLst>
           </a:prstGeom>
           <a:solidFill>
@@ -8541,33 +10629,33 @@
       </p:sp>
       <p:sp>
         <p:nvSpPr>
-          <p:cNvPr id="13" name="Shape 11"/>
-          <p:cNvSpPr/>
-          <p:nvPr/>
-        </p:nvSpPr>
-        <p:spPr>
-          <a:xfrm>
-            <a:off x="896112" y="4069080"/>
+          <p:cNvPr id="14" name="Shape 11"/>
+          <p:cNvSpPr/>
+          <p:nvPr/>
+        </p:nvSpPr>
+        <p:spPr>
+          <a:xfrm>
+            <a:off x="896112" y="4585716"/>
             <a:ext cx="384048" cy="384048"/>
           </a:xfrm>
           <a:prstGeom prst="ellipse">
             <a:avLst/>
           </a:prstGeom>
           <a:solidFill>
-            <a:srgbClr val="17AF98"/>
+            <a:srgbClr val="12B198"/>
           </a:solidFill>
           <a:ln/>
         </p:spPr>
       </p:sp>
       <p:sp>
         <p:nvSpPr>
-          <p:cNvPr id="14" name="Text 12"/>
-          <p:cNvSpPr/>
-          <p:nvPr/>
-        </p:nvSpPr>
-        <p:spPr>
-          <a:xfrm>
-            <a:off x="896112" y="4069080"/>
+          <p:cNvPr id="15" name="Text 12"/>
+          <p:cNvSpPr/>
+          <p:nvPr/>
+        </p:nvSpPr>
+        <p:spPr>
+          <a:xfrm>
+            <a:off x="896112" y="4585716"/>
             <a:ext cx="384048" cy="384048"/>
           </a:xfrm>
           <a:prstGeom prst="rect">
@@ -8600,14 +10688,14 @@
       </p:sp>
       <p:sp>
         <p:nvSpPr>
-          <p:cNvPr id="15" name="Text 13"/>
-          <p:cNvSpPr/>
-          <p:nvPr/>
-        </p:nvSpPr>
-        <p:spPr>
-          <a:xfrm>
-            <a:off x="1499616" y="4019702"/>
-            <a:ext cx="9777679" cy="519379"/>
+          <p:cNvPr id="16" name="Text 13"/>
+          <p:cNvSpPr/>
+          <p:nvPr/>
+        </p:nvSpPr>
+        <p:spPr>
+          <a:xfrm>
+            <a:off x="1499616" y="4462272"/>
+            <a:ext cx="9777679" cy="667512"/>
           </a:xfrm>
           <a:prstGeom prst="rect">
             <a:avLst/>
@@ -8634,7 +10722,7 @@
                 <a:ea typeface="Yu Gothic" pitchFamily="34" charset="-122"/>
                 <a:cs typeface="Yu Gothic" pitchFamily="34" charset="-120"/>
               </a:rPr>
-              <a:t>三次 ― 経営層・広報・法務へ。人身、報道、情報漏えいが絡むとき。</a:t>
+              <a:t>評価するのは流暢さではありません。必要事項が漏れないことです。</a:t>
             </a:r>
             <a:endParaRPr lang="en-US" sz="1450" dirty="0"/>
           </a:p>
@@ -8654,7 +10742,7 @@
                 <a:ea typeface="Calibri" pitchFamily="34" charset="-122"/>
                 <a:cs typeface="Calibri" pitchFamily="34" charset="-120"/>
               </a:rPr>
-              <a:t>Third — executives, communications and legal, where injury, media or data loss is involved.</a:t>
+              <a:t>We are not assessing fluency. We are checking that nothing essential is missed.</a:t>
             </a:r>
             <a:endParaRPr lang="en-US" sz="1450" dirty="0"/>
           </a:p>
@@ -8662,18 +10750,18 @@
       </p:sp>
       <p:sp>
         <p:nvSpPr>
-          <p:cNvPr id="16" name="Shape 14"/>
-          <p:cNvSpPr/>
-          <p:nvPr/>
-        </p:nvSpPr>
-        <p:spPr>
-          <a:xfrm>
-            <a:off x="640080" y="4721962"/>
-            <a:ext cx="10911535" cy="702259"/>
+          <p:cNvPr id="17" name="Shape 14"/>
+          <p:cNvSpPr/>
+          <p:nvPr/>
+        </p:nvSpPr>
+        <p:spPr>
+          <a:xfrm>
+            <a:off x="640080" y="5385816"/>
+            <a:ext cx="10911535" cy="850392"/>
           </a:xfrm>
           <a:prstGeom prst="roundRect">
             <a:avLst>
-              <a:gd name="adj" fmla="val 6510"/>
+              <a:gd name="adj" fmla="val 5376"/>
             </a:avLst>
           </a:prstGeom>
           <a:solidFill>
@@ -8684,33 +10772,33 @@
       </p:sp>
       <p:sp>
         <p:nvSpPr>
-          <p:cNvPr id="17" name="Shape 15"/>
-          <p:cNvSpPr/>
-          <p:nvPr/>
-        </p:nvSpPr>
-        <p:spPr>
-          <a:xfrm>
-            <a:off x="896112" y="4881067"/>
+          <p:cNvPr id="18" name="Shape 15"/>
+          <p:cNvSpPr/>
+          <p:nvPr/>
+        </p:nvSpPr>
+        <p:spPr>
+          <a:xfrm>
+            <a:off x="896112" y="5618988"/>
             <a:ext cx="384048" cy="384048"/>
           </a:xfrm>
           <a:prstGeom prst="ellipse">
             <a:avLst/>
           </a:prstGeom>
           <a:solidFill>
-            <a:srgbClr val="17AF98"/>
+            <a:srgbClr val="12B198"/>
           </a:solidFill>
           <a:ln/>
         </p:spPr>
       </p:sp>
       <p:sp>
         <p:nvSpPr>
-          <p:cNvPr id="18" name="Text 16"/>
-          <p:cNvSpPr/>
-          <p:nvPr/>
-        </p:nvSpPr>
-        <p:spPr>
-          <a:xfrm>
-            <a:off x="896112" y="4881067"/>
+          <p:cNvPr id="19" name="Text 16"/>
+          <p:cNvSpPr/>
+          <p:nvPr/>
+        </p:nvSpPr>
+        <p:spPr>
+          <a:xfrm>
+            <a:off x="896112" y="5618988"/>
             <a:ext cx="384048" cy="384048"/>
           </a:xfrm>
           <a:prstGeom prst="rect">
@@ -8743,14 +10831,14 @@
       </p:sp>
       <p:sp>
         <p:nvSpPr>
-          <p:cNvPr id="19" name="Text 17"/>
-          <p:cNvSpPr/>
-          <p:nvPr/>
-        </p:nvSpPr>
-        <p:spPr>
-          <a:xfrm>
-            <a:off x="1499616" y="4831690"/>
-            <a:ext cx="9777679" cy="519379"/>
+          <p:cNvPr id="20" name="Text 17"/>
+          <p:cNvSpPr/>
+          <p:nvPr/>
+        </p:nvSpPr>
+        <p:spPr>
+          <a:xfrm>
+            <a:off x="1499616" y="5495544"/>
+            <a:ext cx="9777679" cy="667512"/>
           </a:xfrm>
           <a:prstGeom prst="rect">
             <a:avLst/>
@@ -8777,7 +10865,7 @@
                 <a:ea typeface="Yu Gothic" pitchFamily="34" charset="-122"/>
                 <a:cs typeface="Yu Gothic" pitchFamily="34" charset="-120"/>
               </a:rPr>
-              <a:t>迷ったら上げる。上げすぎで叱られる会社は、強い会社です。</a:t>
+              <a:t>2巡目は、相手が興奮している設定で行います。</a:t>
             </a:r>
             <a:endParaRPr lang="en-US" sz="1450" dirty="0"/>
           </a:p>
@@ -8797,7 +10885,7 @@
                 <a:ea typeface="Calibri" pitchFamily="34" charset="-122"/>
                 <a:cs typeface="Calibri" pitchFamily="34" charset="-120"/>
               </a:rPr>
-              <a:t>When in doubt, escalate. A company that tolerates over-escalation is a resilient one.</a:t>
+              <a:t>On the second round, the caller plays someone who is agitated.</a:t>
             </a:r>
             <a:endParaRPr lang="en-US" sz="1450" dirty="0"/>
           </a:p>
@@ -8805,56 +10893,14 @@
       </p:sp>
       <p:sp>
         <p:nvSpPr>
-          <p:cNvPr id="20" name="Shape 18"/>
-          <p:cNvSpPr/>
-          <p:nvPr/>
-        </p:nvSpPr>
-        <p:spPr>
-          <a:xfrm>
-            <a:off x="640080" y="5533949"/>
-            <a:ext cx="10911535" cy="702259"/>
-          </a:xfrm>
-          <a:prstGeom prst="roundRect">
-            <a:avLst>
-              <a:gd name="adj" fmla="val 6510"/>
-            </a:avLst>
-          </a:prstGeom>
-          <a:solidFill>
-            <a:srgbClr val="EFF4F8"/>
-          </a:solidFill>
-          <a:ln/>
-        </p:spPr>
-      </p:sp>
-      <p:sp>
-        <p:nvSpPr>
-          <p:cNvPr id="21" name="Shape 19"/>
-          <p:cNvSpPr/>
-          <p:nvPr/>
-        </p:nvSpPr>
-        <p:spPr>
-          <a:xfrm>
-            <a:off x="896112" y="5693054"/>
-            <a:ext cx="384048" cy="384048"/>
-          </a:xfrm>
-          <a:prstGeom prst="ellipse">
-            <a:avLst/>
-          </a:prstGeom>
-          <a:solidFill>
-            <a:srgbClr val="17AF98"/>
-          </a:solidFill>
-          <a:ln/>
-        </p:spPr>
-      </p:sp>
-      <p:sp>
-        <p:nvSpPr>
-          <p:cNvPr id="22" name="Text 20"/>
-          <p:cNvSpPr/>
-          <p:nvPr/>
-        </p:nvSpPr>
-        <p:spPr>
-          <a:xfrm>
-            <a:off x="896112" y="5693054"/>
-            <a:ext cx="384048" cy="384048"/>
+          <p:cNvPr id="21" name="Text 18"/>
+          <p:cNvSpPr/>
+          <p:nvPr/>
+        </p:nvSpPr>
+        <p:spPr>
+          <a:xfrm>
+            <a:off x="640080" y="6382512"/>
+            <a:ext cx="8778240" cy="292608"/>
           </a:xfrm>
           <a:prstGeom prst="rect">
             <a:avLst/>
@@ -8866,119 +10912,18 @@
           <a:bodyPr wrap="square" lIns="0" tIns="0" rIns="0" bIns="0" rtlCol="0" anchor="ctr"/>
           <a:lstStyle/>
           <a:p>
-            <a:pPr algn="ctr" indent="0" marL="0">
-              <a:buNone/>
-            </a:pPr>
-            <a:r>
-              <a:rPr lang="en-US" sz="1400" b="1" dirty="0">
-                <a:solidFill>
-                  <a:srgbClr val="FFFFFF"/>
-                </a:solidFill>
-                <a:latin typeface="Calibri" pitchFamily="34" charset="0"/>
-                <a:ea typeface="Calibri" pitchFamily="34" charset="-122"/>
-                <a:cs typeface="Calibri" pitchFamily="34" charset="-120"/>
-              </a:rPr>
-              <a:t>5</a:t>
-            </a:r>
-            <a:endParaRPr lang="en-US" sz="1400" dirty="0"/>
-          </a:p>
-        </p:txBody>
-      </p:sp>
-      <p:sp>
-        <p:nvSpPr>
-          <p:cNvPr id="23" name="Text 21"/>
-          <p:cNvSpPr/>
-          <p:nvPr/>
-        </p:nvSpPr>
-        <p:spPr>
-          <a:xfrm>
-            <a:off x="1499616" y="5643677"/>
-            <a:ext cx="9777679" cy="519379"/>
-          </a:xfrm>
-          <a:prstGeom prst="rect">
-            <a:avLst/>
-          </a:prstGeom>
-          <a:noFill/>
-          <a:ln/>
-        </p:spPr>
-        <p:txBody>
-          <a:bodyPr wrap="square" lIns="0" tIns="0" rIns="0" bIns="0" rtlCol="0" anchor="ctr"/>
-          <a:lstStyle/>
-          <a:p>
-            <a:pPr indent="0" marL="0">
-              <a:lnSpc>
-                <a:spcPct val="92000"/>
-              </a:lnSpc>
-              <a:buNone/>
-            </a:pPr>
-            <a:r>
-              <a:rPr lang="en-US" sz="1300" b="1" dirty="0">
-                <a:solidFill>
-                  <a:srgbClr val="1B2733"/>
+            <a:pPr indent="0" marL="0">
+              <a:buNone/>
+            </a:pPr>
+            <a:r>
+              <a:rPr lang="en-US" sz="900" dirty="0">
+                <a:solidFill>
+                  <a:srgbClr val="5F7183"/>
                 </a:solidFill>
                 <a:latin typeface="Yu Gothic" pitchFamily="34" charset="0"/>
                 <a:ea typeface="Yu Gothic" pitchFamily="34" charset="-122"/>
                 <a:cs typeface="Yu Gothic" pitchFamily="34" charset="-120"/>
               </a:rPr>
-              <a:t>※実際の連絡先・時限は、各サイトの緊急連絡体制によります。</a:t>
-            </a:r>
-            <a:endParaRPr lang="en-US" sz="1300" dirty="0"/>
-          </a:p>
-          <a:p>
-            <a:pPr indent="0" marL="0">
-              <a:lnSpc>
-                <a:spcPct val="92000"/>
-              </a:lnSpc>
-              <a:buNone/>
-            </a:pPr>
-            <a:r>
-              <a:rPr lang="en-US" sz="950" i="1" dirty="0">
-                <a:solidFill>
-                  <a:srgbClr val="5F7183"/>
-                </a:solidFill>
-                <a:latin typeface="Calibri" pitchFamily="34" charset="0"/>
-                <a:ea typeface="Calibri" pitchFamily="34" charset="-122"/>
-                <a:cs typeface="Calibri" pitchFamily="34" charset="-120"/>
-              </a:rPr>
-              <a:t>Actual contacts and time limits are defined by each site's emergency call-out structure.</a:t>
-            </a:r>
-            <a:endParaRPr lang="en-US" sz="1300" dirty="0"/>
-          </a:p>
-        </p:txBody>
-      </p:sp>
-      <p:sp>
-        <p:nvSpPr>
-          <p:cNvPr id="24" name="Text 22"/>
-          <p:cNvSpPr/>
-          <p:nvPr/>
-        </p:nvSpPr>
-        <p:spPr>
-          <a:xfrm>
-            <a:off x="640080" y="6382512"/>
-            <a:ext cx="8778240" cy="292608"/>
-          </a:xfrm>
-          <a:prstGeom prst="rect">
-            <a:avLst/>
-          </a:prstGeom>
-          <a:noFill/>
-          <a:ln/>
-        </p:spPr>
-        <p:txBody>
-          <a:bodyPr wrap="square" lIns="0" tIns="0" rIns="0" bIns="0" rtlCol="0" anchor="ctr"/>
-          <a:lstStyle/>
-          <a:p>
-            <a:pPr indent="0" marL="0">
-              <a:buNone/>
-            </a:pPr>
-            <a:r>
-              <a:rPr lang="en-US" sz="900" dirty="0">
-                <a:solidFill>
-                  <a:srgbClr val="5F7183"/>
-                </a:solidFill>
-                <a:latin typeface="Yu Gothic" pitchFamily="34" charset="0"/>
-                <a:ea typeface="Yu Gothic" pitchFamily="34" charset="-122"/>
-                <a:cs typeface="Yu Gothic" pitchFamily="34" charset="-120"/>
-              </a:rPr>
               <a:t>第9時限｜基本教育4 事故の発生時における警察機関への連絡その他応急の措置  </a:t>
             </a:r>
             <a:pPr indent="0" marL="0">
@@ -9001,7 +10946,7 @@
       </p:sp>
       <p:sp>
         <p:nvSpPr>
-          <p:cNvPr id="25" name="Text 23"/>
+          <p:cNvPr id="22" name="Text 19"/>
           <p:cNvSpPr/>
           <p:nvPr/>
         </p:nvSpPr>
@@ -9070,9 +11015,33 @@
           <a:chExt cx="0" cy="0"/>
         </a:xfrm>
       </p:grpSpPr>
-      <p:sp>
-        <p:nvSpPr>
-          <p:cNvPr id="2" name="Text 0"/>
+      <p:pic>
+        <p:nvPicPr>
+          <p:cNvPr id="2" name="Image 0" descr="/home/user/Training-/assets/logo.png">    </p:cNvPr>
+          <p:cNvPicPr>
+            <a:picLocks noChangeAspect="1"/>
+          </p:cNvPicPr>
+          <p:nvPr/>
+        </p:nvPicPr>
+        <p:blipFill>
+          <a:blip r:embed="rId1"/>
+          <a:stretch>
+            <a:fillRect/>
+          </a:stretch>
+        </p:blipFill>
+        <p:spPr>
+          <a:xfrm>
+            <a:off x="10765231" y="332912"/>
+            <a:ext cx="786384" cy="742353"/>
+          </a:xfrm>
+          <a:prstGeom prst="rect">
+            <a:avLst/>
+          </a:prstGeom>
+        </p:spPr>
+      </p:pic>
+      <p:sp>
+        <p:nvSpPr>
+          <p:cNvPr id="3" name="Text 0"/>
           <p:cNvSpPr/>
           <p:nvPr/>
         </p:nvSpPr>
@@ -9100,13 +11069,13 @@
             <a:r>
               <a:rPr lang="en-US" sz="2700" b="1" dirty="0">
                 <a:solidFill>
-                  <a:srgbClr val="0F2D52"/>
+                  <a:srgbClr val="093259"/>
                 </a:solidFill>
                 <a:latin typeface="Yu Gothic" pitchFamily="34" charset="0"/>
                 <a:ea typeface="Yu Gothic" pitchFamily="34" charset="-122"/>
                 <a:cs typeface="Yu Gothic" pitchFamily="34" charset="-120"/>
               </a:rPr>
-              <a:t>現場保存の5原則</a:t>
+              <a:t>社内エスカレーション</a:t>
             </a:r>
             <a:endParaRPr lang="en-US" sz="2700" dirty="0"/>
           </a:p>
@@ -9120,13 +11089,13 @@
             <a:r>
               <a:rPr lang="en-US" sz="1250" i="1" dirty="0">
                 <a:solidFill>
-                  <a:srgbClr val="17AF98"/>
-                </a:solidFill>
-                <a:latin typeface="Calibri" pitchFamily="34" charset="0"/>
-                <a:ea typeface="Calibri" pitchFamily="34" charset="-122"/>
-                <a:cs typeface="Calibri" pitchFamily="34" charset="-120"/>
-              </a:rPr>
-              <a:t>Five Principles of Scene Preservation</a:t>
+                  <a:srgbClr val="12B198"/>
+                </a:solidFill>
+                <a:latin typeface="Calibri" pitchFamily="34" charset="0"/>
+                <a:ea typeface="Calibri" pitchFamily="34" charset="-122"/>
+                <a:cs typeface="Calibri" pitchFamily="34" charset="-120"/>
+              </a:rPr>
+              <a:t>Internal Escalation</a:t>
             </a:r>
             <a:endParaRPr lang="en-US" sz="2700" dirty="0"/>
           </a:p>
@@ -9134,18 +11103,80 @@
       </p:sp>
       <p:sp>
         <p:nvSpPr>
-          <p:cNvPr id="3" name="Shape 1"/>
-          <p:cNvSpPr/>
-          <p:nvPr/>
-        </p:nvSpPr>
-        <p:spPr>
-          <a:xfrm>
-            <a:off x="640080" y="1627632"/>
-            <a:ext cx="10911535" cy="804672"/>
+          <p:cNvPr id="4" name="Text 1"/>
+          <p:cNvSpPr/>
+          <p:nvPr/>
+        </p:nvSpPr>
+        <p:spPr>
+          <a:xfrm>
+            <a:off x="640080" y="1536192"/>
+            <a:ext cx="10911535" cy="566928"/>
+          </a:xfrm>
+          <a:prstGeom prst="rect">
+            <a:avLst/>
+          </a:prstGeom>
+          <a:noFill/>
+          <a:ln/>
+        </p:spPr>
+        <p:txBody>
+          <a:bodyPr wrap="square" lIns="0" tIns="0" rIns="0" bIns="0" rtlCol="0" anchor="t"/>
+          <a:lstStyle/>
+          <a:p>
+            <a:pPr algn="l" indent="0" marL="0">
+              <a:lnSpc>
+                <a:spcPct val="92000"/>
+              </a:lnSpc>
+              <a:buNone/>
+            </a:pPr>
+            <a:r>
+              <a:rPr lang="en-US" sz="1300" dirty="0">
+                <a:solidFill>
+                  <a:srgbClr val="093259"/>
+                </a:solidFill>
+                <a:latin typeface="Yu Gothic" pitchFamily="34" charset="0"/>
+                <a:ea typeface="Yu Gothic" pitchFamily="34" charset="-122"/>
+                <a:cs typeface="Yu Gothic" pitchFamily="34" charset="-120"/>
+              </a:rPr>
+              <a:t>外部への通報と社内への報告は、別に行います。どちらも遅らせません。</a:t>
+            </a:r>
+            <a:endParaRPr lang="en-US" sz="1300" dirty="0"/>
+          </a:p>
+          <a:p>
+            <a:pPr algn="l" indent="0" marL="0">
+              <a:lnSpc>
+                <a:spcPct val="92000"/>
+              </a:lnSpc>
+              <a:buNone/>
+            </a:pPr>
+            <a:r>
+              <a:rPr lang="en-US" sz="1000" i="1" dirty="0">
+                <a:solidFill>
+                  <a:srgbClr val="5F7183"/>
+                </a:solidFill>
+                <a:latin typeface="Calibri" pitchFamily="34" charset="0"/>
+                <a:ea typeface="Calibri" pitchFamily="34" charset="-122"/>
+                <a:cs typeface="Calibri" pitchFamily="34" charset="-120"/>
+              </a:rPr>
+              <a:t>The emergency call and the internal report are separate. Do not delay either.</a:t>
+            </a:r>
+            <a:endParaRPr lang="en-US" sz="1300" dirty="0"/>
+          </a:p>
+        </p:txBody>
+      </p:sp>
+      <p:sp>
+        <p:nvSpPr>
+          <p:cNvPr id="5" name="Shape 2"/>
+          <p:cNvSpPr/>
+          <p:nvPr/>
+        </p:nvSpPr>
+        <p:spPr>
+          <a:xfrm>
+            <a:off x="640080" y="2286000"/>
+            <a:ext cx="10911535" cy="702259"/>
           </a:xfrm>
           <a:prstGeom prst="roundRect">
             <a:avLst>
-              <a:gd name="adj" fmla="val 4545"/>
+              <a:gd name="adj" fmla="val 6510"/>
             </a:avLst>
           </a:prstGeom>
           <a:solidFill>
@@ -9156,34 +11187,34 @@
       </p:sp>
       <p:sp>
         <p:nvSpPr>
-          <p:cNvPr id="4" name="Shape 2"/>
-          <p:cNvSpPr/>
-          <p:nvPr/>
-        </p:nvSpPr>
-        <p:spPr>
-          <a:xfrm>
-            <a:off x="822960" y="1865376"/>
-            <a:ext cx="329184" cy="329184"/>
+          <p:cNvPr id="6" name="Shape 3"/>
+          <p:cNvSpPr/>
+          <p:nvPr/>
+        </p:nvSpPr>
+        <p:spPr>
+          <a:xfrm>
+            <a:off x="896112" y="2445106"/>
+            <a:ext cx="384048" cy="384048"/>
           </a:xfrm>
           <a:prstGeom prst="ellipse">
             <a:avLst/>
           </a:prstGeom>
           <a:solidFill>
-            <a:srgbClr val="0F2D52"/>
+            <a:srgbClr val="12B198"/>
           </a:solidFill>
           <a:ln/>
         </p:spPr>
       </p:sp>
       <p:sp>
         <p:nvSpPr>
-          <p:cNvPr id="5" name="Text 3"/>
-          <p:cNvSpPr/>
-          <p:nvPr/>
-        </p:nvSpPr>
-        <p:spPr>
-          <a:xfrm>
-            <a:off x="822960" y="1865376"/>
-            <a:ext cx="329184" cy="329184"/>
+          <p:cNvPr id="7" name="Text 4"/>
+          <p:cNvSpPr/>
+          <p:nvPr/>
+        </p:nvSpPr>
+        <p:spPr>
+          <a:xfrm>
+            <a:off x="896112" y="2445106"/>
+            <a:ext cx="384048" cy="384048"/>
           </a:xfrm>
           <a:prstGeom prst="rect">
             <a:avLst/>
@@ -9199,7 +11230,7 @@
               <a:buNone/>
             </a:pPr>
             <a:r>
-              <a:rPr lang="en-US" sz="1100" b="1" dirty="0">
+              <a:rPr lang="en-US" sz="1400" b="1" dirty="0">
                 <a:solidFill>
                   <a:srgbClr val="FFFFFF"/>
                 </a:solidFill>
@@ -9209,20 +11240,20 @@
               </a:rPr>
               <a:t>1</a:t>
             </a:r>
-            <a:endParaRPr lang="en-US" sz="1100" dirty="0"/>
-          </a:p>
-        </p:txBody>
-      </p:sp>
-      <p:sp>
-        <p:nvSpPr>
-          <p:cNvPr id="6" name="Text 4"/>
-          <p:cNvSpPr/>
-          <p:nvPr/>
-        </p:nvSpPr>
-        <p:spPr>
-          <a:xfrm>
-            <a:off x="1243584" y="1700784"/>
-            <a:ext cx="10070287" cy="658368"/>
+            <a:endParaRPr lang="en-US" sz="1400" dirty="0"/>
+          </a:p>
+        </p:txBody>
+      </p:sp>
+      <p:sp>
+        <p:nvSpPr>
+          <p:cNvPr id="8" name="Text 5"/>
+          <p:cNvSpPr/>
+          <p:nvPr/>
+        </p:nvSpPr>
+        <p:spPr>
+          <a:xfrm>
+            <a:off x="1499616" y="2395728"/>
+            <a:ext cx="9777679" cy="519379"/>
           </a:xfrm>
           <a:prstGeom prst="rect">
             <a:avLst/>
@@ -9236,12 +11267,12 @@
           <a:p>
             <a:pPr indent="0" marL="0">
               <a:lnSpc>
-                <a:spcPct val="90000"/>
-              </a:lnSpc>
-              <a:buNone/>
-            </a:pPr>
-            <a:r>
-              <a:rPr lang="en-US" sz="1150" b="1" dirty="0">
+                <a:spcPct val="92000"/>
+              </a:lnSpc>
+              <a:buNone/>
+            </a:pPr>
+            <a:r>
+              <a:rPr lang="en-US" sz="1450" b="1" dirty="0">
                 <a:solidFill>
                   <a:srgbClr val="1B2733"/>
                 </a:solidFill>
@@ -9249,19 +11280,19 @@
                 <a:ea typeface="Yu Gothic" pitchFamily="34" charset="-122"/>
                 <a:cs typeface="Yu Gothic" pitchFamily="34" charset="-120"/>
               </a:rPr>
-              <a:t>人命が最優先。救助・救護のためなら、現場を変えてよい。</a:t>
-            </a:r>
-            <a:endParaRPr lang="en-US" sz="1150" dirty="0"/>
-          </a:p>
-          <a:p>
-            <a:pPr indent="0" marL="0">
-              <a:lnSpc>
-                <a:spcPct val="90000"/>
-              </a:lnSpc>
-              <a:buNone/>
-            </a:pPr>
-            <a:r>
-              <a:rPr lang="en-US" sz="900" i="1" dirty="0">
+              <a:t>一次 ― 警備責任者へ即時。判断が固まる前に一報を入れます。</a:t>
+            </a:r>
+            <a:endParaRPr lang="en-US" sz="1450" dirty="0"/>
+          </a:p>
+          <a:p>
+            <a:pPr indent="0" marL="0">
+              <a:lnSpc>
+                <a:spcPct val="92000"/>
+              </a:lnSpc>
+              <a:buNone/>
+            </a:pPr>
+            <a:r>
+              <a:rPr lang="en-US" sz="1050" i="1" dirty="0">
                 <a:solidFill>
                   <a:srgbClr val="5F7183"/>
                 </a:solidFill>
@@ -9269,26 +11300,169 @@
                 <a:ea typeface="Calibri" pitchFamily="34" charset="-122"/>
                 <a:cs typeface="Calibri" pitchFamily="34" charset="-120"/>
               </a:rPr>
-              <a:t>Life comes first. If it serves rescue or first aid, you may alter the scene.</a:t>
-            </a:r>
-            <a:endParaRPr lang="en-US" sz="1150" dirty="0"/>
-          </a:p>
-        </p:txBody>
-      </p:sp>
-      <p:sp>
-        <p:nvSpPr>
-          <p:cNvPr id="7" name="Shape 5"/>
-          <p:cNvSpPr/>
-          <p:nvPr/>
-        </p:nvSpPr>
-        <p:spPr>
-          <a:xfrm>
-            <a:off x="640080" y="2578608"/>
-            <a:ext cx="10911535" cy="804672"/>
+              <a:t>First: the security supervisor, immediately. Report before you have a conclusion.</a:t>
+            </a:r>
+            <a:endParaRPr lang="en-US" sz="1450" dirty="0"/>
+          </a:p>
+        </p:txBody>
+      </p:sp>
+      <p:sp>
+        <p:nvSpPr>
+          <p:cNvPr id="9" name="Shape 6"/>
+          <p:cNvSpPr/>
+          <p:nvPr/>
+        </p:nvSpPr>
+        <p:spPr>
+          <a:xfrm>
+            <a:off x="640080" y="3097987"/>
+            <a:ext cx="10911535" cy="702259"/>
           </a:xfrm>
           <a:prstGeom prst="roundRect">
             <a:avLst>
-              <a:gd name="adj" fmla="val 4545"/>
+              <a:gd name="adj" fmla="val 6510"/>
+            </a:avLst>
+          </a:prstGeom>
+          <a:solidFill>
+            <a:srgbClr val="F7FAFC"/>
+          </a:solidFill>
+          <a:ln/>
+        </p:spPr>
+      </p:sp>
+      <p:sp>
+        <p:nvSpPr>
+          <p:cNvPr id="10" name="Shape 7"/>
+          <p:cNvSpPr/>
+          <p:nvPr/>
+        </p:nvSpPr>
+        <p:spPr>
+          <a:xfrm>
+            <a:off x="896112" y="3257093"/>
+            <a:ext cx="384048" cy="384048"/>
+          </a:xfrm>
+          <a:prstGeom prst="ellipse">
+            <a:avLst/>
+          </a:prstGeom>
+          <a:solidFill>
+            <a:srgbClr val="12B198"/>
+          </a:solidFill>
+          <a:ln/>
+        </p:spPr>
+      </p:sp>
+      <p:sp>
+        <p:nvSpPr>
+          <p:cNvPr id="11" name="Text 8"/>
+          <p:cNvSpPr/>
+          <p:nvPr/>
+        </p:nvSpPr>
+        <p:spPr>
+          <a:xfrm>
+            <a:off x="896112" y="3257093"/>
+            <a:ext cx="384048" cy="384048"/>
+          </a:xfrm>
+          <a:prstGeom prst="rect">
+            <a:avLst/>
+          </a:prstGeom>
+          <a:noFill/>
+          <a:ln/>
+        </p:spPr>
+        <p:txBody>
+          <a:bodyPr wrap="square" lIns="0" tIns="0" rIns="0" bIns="0" rtlCol="0" anchor="ctr"/>
+          <a:lstStyle/>
+          <a:p>
+            <a:pPr algn="ctr" indent="0" marL="0">
+              <a:buNone/>
+            </a:pPr>
+            <a:r>
+              <a:rPr lang="en-US" sz="1400" b="1" dirty="0">
+                <a:solidFill>
+                  <a:srgbClr val="FFFFFF"/>
+                </a:solidFill>
+                <a:latin typeface="Calibri" pitchFamily="34" charset="0"/>
+                <a:ea typeface="Calibri" pitchFamily="34" charset="-122"/>
+                <a:cs typeface="Calibri" pitchFamily="34" charset="-120"/>
+              </a:rPr>
+              <a:t>2</a:t>
+            </a:r>
+            <a:endParaRPr lang="en-US" sz="1400" dirty="0"/>
+          </a:p>
+        </p:txBody>
+      </p:sp>
+      <p:sp>
+        <p:nvSpPr>
+          <p:cNvPr id="12" name="Text 9"/>
+          <p:cNvSpPr/>
+          <p:nvPr/>
+        </p:nvSpPr>
+        <p:spPr>
+          <a:xfrm>
+            <a:off x="1499616" y="3207715"/>
+            <a:ext cx="9777679" cy="519379"/>
+          </a:xfrm>
+          <a:prstGeom prst="rect">
+            <a:avLst/>
+          </a:prstGeom>
+          <a:noFill/>
+          <a:ln/>
+        </p:spPr>
+        <p:txBody>
+          <a:bodyPr wrap="square" lIns="0" tIns="0" rIns="0" bIns="0" rtlCol="0" anchor="ctr"/>
+          <a:lstStyle/>
+          <a:p>
+            <a:pPr indent="0" marL="0">
+              <a:lnSpc>
+                <a:spcPct val="92000"/>
+              </a:lnSpc>
+              <a:buNone/>
+            </a:pPr>
+            <a:r>
+              <a:rPr lang="en-US" sz="1450" b="1" dirty="0">
+                <a:solidFill>
+                  <a:srgbClr val="1B2733"/>
+                </a:solidFill>
+                <a:latin typeface="Yu Gothic" pitchFamily="34" charset="0"/>
+                <a:ea typeface="Yu Gothic" pitchFamily="34" charset="-122"/>
+                <a:cs typeface="Yu Gothic" pitchFamily="34" charset="-120"/>
+              </a:rPr>
+              <a:t>二次 ― 施設管理、総務へ。事案の継続が見込まれる場合。</a:t>
+            </a:r>
+            <a:endParaRPr lang="en-US" sz="1450" dirty="0"/>
+          </a:p>
+          <a:p>
+            <a:pPr indent="0" marL="0">
+              <a:lnSpc>
+                <a:spcPct val="92000"/>
+              </a:lnSpc>
+              <a:buNone/>
+            </a:pPr>
+            <a:r>
+              <a:rPr lang="en-US" sz="1050" i="1" dirty="0">
+                <a:solidFill>
+                  <a:srgbClr val="5F7183"/>
+                </a:solidFill>
+                <a:latin typeface="Calibri" pitchFamily="34" charset="0"/>
+                <a:ea typeface="Calibri" pitchFamily="34" charset="-122"/>
+                <a:cs typeface="Calibri" pitchFamily="34" charset="-120"/>
+              </a:rPr>
+              <a:t>Second: facilities and general affairs, if the incident will continue.</a:t>
+            </a:r>
+            <a:endParaRPr lang="en-US" sz="1450" dirty="0"/>
+          </a:p>
+        </p:txBody>
+      </p:sp>
+      <p:sp>
+        <p:nvSpPr>
+          <p:cNvPr id="13" name="Shape 10"/>
+          <p:cNvSpPr/>
+          <p:nvPr/>
+        </p:nvSpPr>
+        <p:spPr>
+          <a:xfrm>
+            <a:off x="640080" y="3909974"/>
+            <a:ext cx="10911535" cy="702259"/>
+          </a:xfrm>
+          <a:prstGeom prst="roundRect">
+            <a:avLst>
+              <a:gd name="adj" fmla="val 6510"/>
             </a:avLst>
           </a:prstGeom>
           <a:solidFill>
@@ -9299,34 +11473,34 @@
       </p:sp>
       <p:sp>
         <p:nvSpPr>
-          <p:cNvPr id="8" name="Shape 6"/>
-          <p:cNvSpPr/>
-          <p:nvPr/>
-        </p:nvSpPr>
-        <p:spPr>
-          <a:xfrm>
-            <a:off x="822960" y="2816352"/>
-            <a:ext cx="329184" cy="329184"/>
+          <p:cNvPr id="14" name="Shape 11"/>
+          <p:cNvSpPr/>
+          <p:nvPr/>
+        </p:nvSpPr>
+        <p:spPr>
+          <a:xfrm>
+            <a:off x="896112" y="4069080"/>
+            <a:ext cx="384048" cy="384048"/>
           </a:xfrm>
           <a:prstGeom prst="ellipse">
             <a:avLst/>
           </a:prstGeom>
           <a:solidFill>
-            <a:srgbClr val="0F2D52"/>
+            <a:srgbClr val="12B198"/>
           </a:solidFill>
           <a:ln/>
         </p:spPr>
       </p:sp>
       <p:sp>
         <p:nvSpPr>
-          <p:cNvPr id="9" name="Text 7"/>
-          <p:cNvSpPr/>
-          <p:nvPr/>
-        </p:nvSpPr>
-        <p:spPr>
-          <a:xfrm>
-            <a:off x="822960" y="2816352"/>
-            <a:ext cx="329184" cy="329184"/>
+          <p:cNvPr id="15" name="Text 12"/>
+          <p:cNvSpPr/>
+          <p:nvPr/>
+        </p:nvSpPr>
+        <p:spPr>
+          <a:xfrm>
+            <a:off x="896112" y="4069080"/>
+            <a:ext cx="384048" cy="384048"/>
           </a:xfrm>
           <a:prstGeom prst="rect">
             <a:avLst/>
@@ -9342,7 +11516,7 @@
               <a:buNone/>
             </a:pPr>
             <a:r>
-              <a:rPr lang="en-US" sz="1100" b="1" dirty="0">
+              <a:rPr lang="en-US" sz="1400" b="1" dirty="0">
                 <a:solidFill>
                   <a:srgbClr val="FFFFFF"/>
                 </a:solidFill>
@@ -9350,22 +11524,22 @@
                 <a:ea typeface="Calibri" pitchFamily="34" charset="-122"/>
                 <a:cs typeface="Calibri" pitchFamily="34" charset="-120"/>
               </a:rPr>
-              <a:t>2</a:t>
-            </a:r>
-            <a:endParaRPr lang="en-US" sz="1100" dirty="0"/>
-          </a:p>
-        </p:txBody>
-      </p:sp>
-      <p:sp>
-        <p:nvSpPr>
-          <p:cNvPr id="10" name="Text 8"/>
-          <p:cNvSpPr/>
-          <p:nvPr/>
-        </p:nvSpPr>
-        <p:spPr>
-          <a:xfrm>
-            <a:off x="1243584" y="2651760"/>
-            <a:ext cx="10070287" cy="658368"/>
+              <a:t>3</a:t>
+            </a:r>
+            <a:endParaRPr lang="en-US" sz="1400" dirty="0"/>
+          </a:p>
+        </p:txBody>
+      </p:sp>
+      <p:sp>
+        <p:nvSpPr>
+          <p:cNvPr id="16" name="Text 13"/>
+          <p:cNvSpPr/>
+          <p:nvPr/>
+        </p:nvSpPr>
+        <p:spPr>
+          <a:xfrm>
+            <a:off x="1499616" y="4019702"/>
+            <a:ext cx="9777679" cy="519379"/>
           </a:xfrm>
           <a:prstGeom prst="rect">
             <a:avLst/>
@@ -9379,12 +11553,12 @@
           <a:p>
             <a:pPr indent="0" marL="0">
               <a:lnSpc>
-                <a:spcPct val="90000"/>
-              </a:lnSpc>
-              <a:buNone/>
-            </a:pPr>
-            <a:r>
-              <a:rPr lang="en-US" sz="1150" b="1" dirty="0">
+                <a:spcPct val="92000"/>
+              </a:lnSpc>
+              <a:buNone/>
+            </a:pPr>
+            <a:r>
+              <a:rPr lang="en-US" sz="1450" b="1" dirty="0">
                 <a:solidFill>
                   <a:srgbClr val="1B2733"/>
                 </a:solidFill>
@@ -9392,19 +11566,19 @@
                 <a:ea typeface="Yu Gothic" pitchFamily="34" charset="-122"/>
                 <a:cs typeface="Yu Gothic" pitchFamily="34" charset="-120"/>
               </a:rPr>
-              <a:t>それ以外の理由では動かさない。良かれと思った片付けが証拠を消す。</a:t>
-            </a:r>
-            <a:endParaRPr lang="en-US" sz="1150" dirty="0"/>
-          </a:p>
-          <a:p>
-            <a:pPr indent="0" marL="0">
-              <a:lnSpc>
-                <a:spcPct val="90000"/>
-              </a:lnSpc>
-              <a:buNone/>
-            </a:pPr>
-            <a:r>
-              <a:rPr lang="en-US" sz="900" i="1" dirty="0">
+              <a:t>三次 ― 経営層、広報、法務へ。人身、報道、情報漏えいが関わる場合。</a:t>
+            </a:r>
+            <a:endParaRPr lang="en-US" sz="1450" dirty="0"/>
+          </a:p>
+          <a:p>
+            <a:pPr indent="0" marL="0">
+              <a:lnSpc>
+                <a:spcPct val="92000"/>
+              </a:lnSpc>
+              <a:buNone/>
+            </a:pPr>
+            <a:r>
+              <a:rPr lang="en-US" sz="1050" i="1" dirty="0">
                 <a:solidFill>
                   <a:srgbClr val="5F7183"/>
                 </a:solidFill>
@@ -9412,26 +11586,169 @@
                 <a:ea typeface="Calibri" pitchFamily="34" charset="-122"/>
                 <a:cs typeface="Calibri" pitchFamily="34" charset="-120"/>
               </a:rPr>
-              <a:t>For any other reason, change nothing. Well-meant tidying destroys evidence.</a:t>
-            </a:r>
-            <a:endParaRPr lang="en-US" sz="1150" dirty="0"/>
-          </a:p>
-        </p:txBody>
-      </p:sp>
-      <p:sp>
-        <p:nvSpPr>
-          <p:cNvPr id="11" name="Shape 9"/>
-          <p:cNvSpPr/>
-          <p:nvPr/>
-        </p:nvSpPr>
-        <p:spPr>
-          <a:xfrm>
-            <a:off x="640080" y="3529584"/>
-            <a:ext cx="10911535" cy="804672"/>
+              <a:t>Third: executives, communications and legal, where injury, media or data loss is involved.</a:t>
+            </a:r>
+            <a:endParaRPr lang="en-US" sz="1450" dirty="0"/>
+          </a:p>
+        </p:txBody>
+      </p:sp>
+      <p:sp>
+        <p:nvSpPr>
+          <p:cNvPr id="17" name="Shape 14"/>
+          <p:cNvSpPr/>
+          <p:nvPr/>
+        </p:nvSpPr>
+        <p:spPr>
+          <a:xfrm>
+            <a:off x="640080" y="4721962"/>
+            <a:ext cx="10911535" cy="702259"/>
           </a:xfrm>
           <a:prstGeom prst="roundRect">
             <a:avLst>
-              <a:gd name="adj" fmla="val 4545"/>
+              <a:gd name="adj" fmla="val 6510"/>
+            </a:avLst>
+          </a:prstGeom>
+          <a:solidFill>
+            <a:srgbClr val="F7FAFC"/>
+          </a:solidFill>
+          <a:ln/>
+        </p:spPr>
+      </p:sp>
+      <p:sp>
+        <p:nvSpPr>
+          <p:cNvPr id="18" name="Shape 15"/>
+          <p:cNvSpPr/>
+          <p:nvPr/>
+        </p:nvSpPr>
+        <p:spPr>
+          <a:xfrm>
+            <a:off x="896112" y="4881067"/>
+            <a:ext cx="384048" cy="384048"/>
+          </a:xfrm>
+          <a:prstGeom prst="ellipse">
+            <a:avLst/>
+          </a:prstGeom>
+          <a:solidFill>
+            <a:srgbClr val="12B198"/>
+          </a:solidFill>
+          <a:ln/>
+        </p:spPr>
+      </p:sp>
+      <p:sp>
+        <p:nvSpPr>
+          <p:cNvPr id="19" name="Text 16"/>
+          <p:cNvSpPr/>
+          <p:nvPr/>
+        </p:nvSpPr>
+        <p:spPr>
+          <a:xfrm>
+            <a:off x="896112" y="4881067"/>
+            <a:ext cx="384048" cy="384048"/>
+          </a:xfrm>
+          <a:prstGeom prst="rect">
+            <a:avLst/>
+          </a:prstGeom>
+          <a:noFill/>
+          <a:ln/>
+        </p:spPr>
+        <p:txBody>
+          <a:bodyPr wrap="square" lIns="0" tIns="0" rIns="0" bIns="0" rtlCol="0" anchor="ctr"/>
+          <a:lstStyle/>
+          <a:p>
+            <a:pPr algn="ctr" indent="0" marL="0">
+              <a:buNone/>
+            </a:pPr>
+            <a:r>
+              <a:rPr lang="en-US" sz="1400" b="1" dirty="0">
+                <a:solidFill>
+                  <a:srgbClr val="FFFFFF"/>
+                </a:solidFill>
+                <a:latin typeface="Calibri" pitchFamily="34" charset="0"/>
+                <a:ea typeface="Calibri" pitchFamily="34" charset="-122"/>
+                <a:cs typeface="Calibri" pitchFamily="34" charset="-120"/>
+              </a:rPr>
+              <a:t>4</a:t>
+            </a:r>
+            <a:endParaRPr lang="en-US" sz="1400" dirty="0"/>
+          </a:p>
+        </p:txBody>
+      </p:sp>
+      <p:sp>
+        <p:nvSpPr>
+          <p:cNvPr id="20" name="Text 17"/>
+          <p:cNvSpPr/>
+          <p:nvPr/>
+        </p:nvSpPr>
+        <p:spPr>
+          <a:xfrm>
+            <a:off x="1499616" y="4831690"/>
+            <a:ext cx="9777679" cy="519379"/>
+          </a:xfrm>
+          <a:prstGeom prst="rect">
+            <a:avLst/>
+          </a:prstGeom>
+          <a:noFill/>
+          <a:ln/>
+        </p:spPr>
+        <p:txBody>
+          <a:bodyPr wrap="square" lIns="0" tIns="0" rIns="0" bIns="0" rtlCol="0" anchor="ctr"/>
+          <a:lstStyle/>
+          <a:p>
+            <a:pPr indent="0" marL="0">
+              <a:lnSpc>
+                <a:spcPct val="92000"/>
+              </a:lnSpc>
+              <a:buNone/>
+            </a:pPr>
+            <a:r>
+              <a:rPr lang="en-US" sz="1450" b="1" dirty="0">
+                <a:solidFill>
+                  <a:srgbClr val="1B2733"/>
+                </a:solidFill>
+                <a:latin typeface="Yu Gothic" pitchFamily="34" charset="0"/>
+                <a:ea typeface="Yu Gothic" pitchFamily="34" charset="-122"/>
+                <a:cs typeface="Yu Gothic" pitchFamily="34" charset="-120"/>
+              </a:rPr>
+              <a:t>判断に迷う場合は、上位者へ報告します。</a:t>
+            </a:r>
+            <a:endParaRPr lang="en-US" sz="1450" dirty="0"/>
+          </a:p>
+          <a:p>
+            <a:pPr indent="0" marL="0">
+              <a:lnSpc>
+                <a:spcPct val="92000"/>
+              </a:lnSpc>
+              <a:buNone/>
+            </a:pPr>
+            <a:r>
+              <a:rPr lang="en-US" sz="1050" i="1" dirty="0">
+                <a:solidFill>
+                  <a:srgbClr val="5F7183"/>
+                </a:solidFill>
+                <a:latin typeface="Calibri" pitchFamily="34" charset="0"/>
+                <a:ea typeface="Calibri" pitchFamily="34" charset="-122"/>
+                <a:cs typeface="Calibri" pitchFamily="34" charset="-120"/>
+              </a:rPr>
+              <a:t>If you are unsure, escalate.</a:t>
+            </a:r>
+            <a:endParaRPr lang="en-US" sz="1450" dirty="0"/>
+          </a:p>
+        </p:txBody>
+      </p:sp>
+      <p:sp>
+        <p:nvSpPr>
+          <p:cNvPr id="21" name="Shape 18"/>
+          <p:cNvSpPr/>
+          <p:nvPr/>
+        </p:nvSpPr>
+        <p:spPr>
+          <a:xfrm>
+            <a:off x="640080" y="5533949"/>
+            <a:ext cx="10911535" cy="702259"/>
+          </a:xfrm>
+          <a:prstGeom prst="roundRect">
+            <a:avLst>
+              <a:gd name="adj" fmla="val 6510"/>
             </a:avLst>
           </a:prstGeom>
           <a:solidFill>
@@ -9442,34 +11759,34 @@
       </p:sp>
       <p:sp>
         <p:nvSpPr>
-          <p:cNvPr id="12" name="Shape 10"/>
-          <p:cNvSpPr/>
-          <p:nvPr/>
-        </p:nvSpPr>
-        <p:spPr>
-          <a:xfrm>
-            <a:off x="822960" y="3767328"/>
-            <a:ext cx="329184" cy="329184"/>
+          <p:cNvPr id="22" name="Shape 19"/>
+          <p:cNvSpPr/>
+          <p:nvPr/>
+        </p:nvSpPr>
+        <p:spPr>
+          <a:xfrm>
+            <a:off x="896112" y="5693054"/>
+            <a:ext cx="384048" cy="384048"/>
           </a:xfrm>
           <a:prstGeom prst="ellipse">
             <a:avLst/>
           </a:prstGeom>
           <a:solidFill>
-            <a:srgbClr val="0F2D52"/>
+            <a:srgbClr val="12B198"/>
           </a:solidFill>
           <a:ln/>
         </p:spPr>
       </p:sp>
       <p:sp>
         <p:nvSpPr>
-          <p:cNvPr id="13" name="Text 11"/>
-          <p:cNvSpPr/>
-          <p:nvPr/>
-        </p:nvSpPr>
-        <p:spPr>
-          <a:xfrm>
-            <a:off x="822960" y="3767328"/>
-            <a:ext cx="329184" cy="329184"/>
+          <p:cNvPr id="23" name="Text 20"/>
+          <p:cNvSpPr/>
+          <p:nvPr/>
+        </p:nvSpPr>
+        <p:spPr>
+          <a:xfrm>
+            <a:off x="896112" y="5693054"/>
+            <a:ext cx="384048" cy="384048"/>
           </a:xfrm>
           <a:prstGeom prst="rect">
             <a:avLst/>
@@ -9485,7 +11802,7 @@
               <a:buNone/>
             </a:pPr>
             <a:r>
-              <a:rPr lang="en-US" sz="1100" b="1" dirty="0">
+              <a:rPr lang="en-US" sz="1400" b="1" dirty="0">
                 <a:solidFill>
                   <a:srgbClr val="FFFFFF"/>
                 </a:solidFill>
@@ -9493,22 +11810,22 @@
                 <a:ea typeface="Calibri" pitchFamily="34" charset="-122"/>
                 <a:cs typeface="Calibri" pitchFamily="34" charset="-120"/>
               </a:rPr>
-              <a:t>3</a:t>
-            </a:r>
-            <a:endParaRPr lang="en-US" sz="1100" dirty="0"/>
-          </a:p>
-        </p:txBody>
-      </p:sp>
-      <p:sp>
-        <p:nvSpPr>
-          <p:cNvPr id="14" name="Text 12"/>
-          <p:cNvSpPr/>
-          <p:nvPr/>
-        </p:nvSpPr>
-        <p:spPr>
-          <a:xfrm>
-            <a:off x="1243584" y="3602736"/>
-            <a:ext cx="10070287" cy="658368"/>
+              <a:t>5</a:t>
+            </a:r>
+            <a:endParaRPr lang="en-US" sz="1400" dirty="0"/>
+          </a:p>
+        </p:txBody>
+      </p:sp>
+      <p:sp>
+        <p:nvSpPr>
+          <p:cNvPr id="24" name="Text 21"/>
+          <p:cNvSpPr/>
+          <p:nvPr/>
+        </p:nvSpPr>
+        <p:spPr>
+          <a:xfrm>
+            <a:off x="1499616" y="5643677"/>
+            <a:ext cx="9777679" cy="519379"/>
           </a:xfrm>
           <a:prstGeom prst="rect">
             <a:avLst/>
@@ -9522,12 +11839,12 @@
           <a:p>
             <a:pPr indent="0" marL="0">
               <a:lnSpc>
-                <a:spcPct val="90000"/>
-              </a:lnSpc>
-              <a:buNone/>
-            </a:pPr>
-            <a:r>
-              <a:rPr lang="en-US" sz="1150" b="1" dirty="0">
+                <a:spcPct val="92000"/>
+              </a:lnSpc>
+              <a:buNone/>
+            </a:pPr>
+            <a:r>
+              <a:rPr lang="en-US" sz="1300" b="1" dirty="0">
                 <a:solidFill>
                   <a:srgbClr val="1B2733"/>
                 </a:solidFill>
@@ -9535,19 +11852,19 @@
                 <a:ea typeface="Yu Gothic" pitchFamily="34" charset="-122"/>
                 <a:cs typeface="Yu Gothic" pitchFamily="34" charset="-120"/>
               </a:rPr>
-              <a:t>変えたら記録する ― 何を・どこから・どこへ・誰が・何時に。</a:t>
-            </a:r>
-            <a:endParaRPr lang="en-US" sz="1150" dirty="0"/>
-          </a:p>
-          <a:p>
-            <a:pPr indent="0" marL="0">
-              <a:lnSpc>
-                <a:spcPct val="90000"/>
-              </a:lnSpc>
-              <a:buNone/>
-            </a:pPr>
-            <a:r>
-              <a:rPr lang="en-US" sz="900" i="1" dirty="0">
+              <a:t>実際の連絡先と時限は、各サイトの緊急連絡体制によります。</a:t>
+            </a:r>
+            <a:endParaRPr lang="en-US" sz="1300" dirty="0"/>
+          </a:p>
+          <a:p>
+            <a:pPr indent="0" marL="0">
+              <a:lnSpc>
+                <a:spcPct val="92000"/>
+              </a:lnSpc>
+              <a:buNone/>
+            </a:pPr>
+            <a:r>
+              <a:rPr lang="en-US" sz="950" i="1" dirty="0">
                 <a:solidFill>
                   <a:srgbClr val="5F7183"/>
                 </a:solidFill>
@@ -9555,64 +11872,22 @@
                 <a:ea typeface="Calibri" pitchFamily="34" charset="-122"/>
                 <a:cs typeface="Calibri" pitchFamily="34" charset="-120"/>
               </a:rPr>
-              <a:t>If you did change it, record it: what, from where, to where, by whom, at what time.</a:t>
-            </a:r>
-            <a:endParaRPr lang="en-US" sz="1150" dirty="0"/>
-          </a:p>
-        </p:txBody>
-      </p:sp>
-      <p:sp>
-        <p:nvSpPr>
-          <p:cNvPr id="15" name="Shape 13"/>
-          <p:cNvSpPr/>
-          <p:nvPr/>
-        </p:nvSpPr>
-        <p:spPr>
-          <a:xfrm>
-            <a:off x="640080" y="4480560"/>
-            <a:ext cx="10911535" cy="804672"/>
-          </a:xfrm>
-          <a:prstGeom prst="roundRect">
-            <a:avLst>
-              <a:gd name="adj" fmla="val 4545"/>
-            </a:avLst>
-          </a:prstGeom>
-          <a:solidFill>
-            <a:srgbClr val="EFF4F8"/>
-          </a:solidFill>
-          <a:ln/>
-        </p:spPr>
-      </p:sp>
-      <p:sp>
-        <p:nvSpPr>
-          <p:cNvPr id="16" name="Shape 14"/>
-          <p:cNvSpPr/>
-          <p:nvPr/>
-        </p:nvSpPr>
-        <p:spPr>
-          <a:xfrm>
-            <a:off x="822960" y="4718304"/>
-            <a:ext cx="329184" cy="329184"/>
-          </a:xfrm>
-          <a:prstGeom prst="ellipse">
-            <a:avLst/>
-          </a:prstGeom>
-          <a:solidFill>
-            <a:srgbClr val="0F2D52"/>
-          </a:solidFill>
-          <a:ln/>
-        </p:spPr>
-      </p:sp>
-      <p:sp>
-        <p:nvSpPr>
-          <p:cNvPr id="17" name="Text 15"/>
-          <p:cNvSpPr/>
-          <p:nvPr/>
-        </p:nvSpPr>
-        <p:spPr>
-          <a:xfrm>
-            <a:off x="822960" y="4718304"/>
-            <a:ext cx="329184" cy="329184"/>
+              <a:t>Actual contacts and time limits are set by each site's emergency call-out structure.</a:t>
+            </a:r>
+            <a:endParaRPr lang="en-US" sz="1300" dirty="0"/>
+          </a:p>
+        </p:txBody>
+      </p:sp>
+      <p:sp>
+        <p:nvSpPr>
+          <p:cNvPr id="25" name="Text 22"/>
+          <p:cNvSpPr/>
+          <p:nvPr/>
+        </p:nvSpPr>
+        <p:spPr>
+          <a:xfrm>
+            <a:off x="640080" y="6382512"/>
+            <a:ext cx="8778240" cy="292608"/>
           </a:xfrm>
           <a:prstGeom prst="rect">
             <a:avLst/>
@@ -9624,262 +11899,18 @@
           <a:bodyPr wrap="square" lIns="0" tIns="0" rIns="0" bIns="0" rtlCol="0" anchor="ctr"/>
           <a:lstStyle/>
           <a:p>
-            <a:pPr algn="ctr" indent="0" marL="0">
-              <a:buNone/>
-            </a:pPr>
-            <a:r>
-              <a:rPr lang="en-US" sz="1100" b="1" dirty="0">
-                <a:solidFill>
-                  <a:srgbClr val="FFFFFF"/>
-                </a:solidFill>
-                <a:latin typeface="Calibri" pitchFamily="34" charset="0"/>
-                <a:ea typeface="Calibri" pitchFamily="34" charset="-122"/>
-                <a:cs typeface="Calibri" pitchFamily="34" charset="-120"/>
-              </a:rPr>
-              <a:t>4</a:t>
-            </a:r>
-            <a:endParaRPr lang="en-US" sz="1100" dirty="0"/>
-          </a:p>
-        </p:txBody>
-      </p:sp>
-      <p:sp>
-        <p:nvSpPr>
-          <p:cNvPr id="18" name="Text 16"/>
-          <p:cNvSpPr/>
-          <p:nvPr/>
-        </p:nvSpPr>
-        <p:spPr>
-          <a:xfrm>
-            <a:off x="1243584" y="4553712"/>
-            <a:ext cx="10070287" cy="658368"/>
-          </a:xfrm>
-          <a:prstGeom prst="rect">
-            <a:avLst/>
-          </a:prstGeom>
-          <a:noFill/>
-          <a:ln/>
-        </p:spPr>
-        <p:txBody>
-          <a:bodyPr wrap="square" lIns="0" tIns="0" rIns="0" bIns="0" rtlCol="0" anchor="ctr"/>
-          <a:lstStyle/>
-          <a:p>
-            <a:pPr indent="0" marL="0">
-              <a:lnSpc>
-                <a:spcPct val="90000"/>
-              </a:lnSpc>
-              <a:buNone/>
-            </a:pPr>
-            <a:r>
-              <a:rPr lang="en-US" sz="1150" b="1" dirty="0">
-                <a:solidFill>
-                  <a:srgbClr val="1B2733"/>
+            <a:pPr indent="0" marL="0">
+              <a:buNone/>
+            </a:pPr>
+            <a:r>
+              <a:rPr lang="en-US" sz="900" dirty="0">
+                <a:solidFill>
+                  <a:srgbClr val="5F7183"/>
                 </a:solidFill>
                 <a:latin typeface="Yu Gothic" pitchFamily="34" charset="0"/>
                 <a:ea typeface="Yu Gothic" pitchFamily="34" charset="-122"/>
                 <a:cs typeface="Yu Gothic" pitchFamily="34" charset="-120"/>
               </a:rPr>
-              <a:t>立入制限は「ここまでだろう」より一回り広く取る。</a:t>
-            </a:r>
-            <a:endParaRPr lang="en-US" sz="1150" dirty="0"/>
-          </a:p>
-          <a:p>
-            <a:pPr indent="0" marL="0">
-              <a:lnSpc>
-                <a:spcPct val="90000"/>
-              </a:lnSpc>
-              <a:buNone/>
-            </a:pPr>
-            <a:r>
-              <a:rPr lang="en-US" sz="900" i="1" dirty="0">
-                <a:solidFill>
-                  <a:srgbClr val="5F7183"/>
-                </a:solidFill>
-                <a:latin typeface="Calibri" pitchFamily="34" charset="0"/>
-                <a:ea typeface="Calibri" pitchFamily="34" charset="-122"/>
-                <a:cs typeface="Calibri" pitchFamily="34" charset="-120"/>
-              </a:rPr>
-              <a:t>Cordon wider than feels necessary — one step beyond your instinct.</a:t>
-            </a:r>
-            <a:endParaRPr lang="en-US" sz="1150" dirty="0"/>
-          </a:p>
-        </p:txBody>
-      </p:sp>
-      <p:sp>
-        <p:nvSpPr>
-          <p:cNvPr id="19" name="Shape 17"/>
-          <p:cNvSpPr/>
-          <p:nvPr/>
-        </p:nvSpPr>
-        <p:spPr>
-          <a:xfrm>
-            <a:off x="640080" y="5431536"/>
-            <a:ext cx="10911535" cy="804672"/>
-          </a:xfrm>
-          <a:prstGeom prst="roundRect">
-            <a:avLst>
-              <a:gd name="adj" fmla="val 4545"/>
-            </a:avLst>
-          </a:prstGeom>
-          <a:solidFill>
-            <a:srgbClr val="EFF4F8"/>
-          </a:solidFill>
-          <a:ln/>
-        </p:spPr>
-      </p:sp>
-      <p:sp>
-        <p:nvSpPr>
-          <p:cNvPr id="20" name="Shape 18"/>
-          <p:cNvSpPr/>
-          <p:nvPr/>
-        </p:nvSpPr>
-        <p:spPr>
-          <a:xfrm>
-            <a:off x="822960" y="5669280"/>
-            <a:ext cx="329184" cy="329184"/>
-          </a:xfrm>
-          <a:prstGeom prst="ellipse">
-            <a:avLst/>
-          </a:prstGeom>
-          <a:solidFill>
-            <a:srgbClr val="0F2D52"/>
-          </a:solidFill>
-          <a:ln/>
-        </p:spPr>
-      </p:sp>
-      <p:sp>
-        <p:nvSpPr>
-          <p:cNvPr id="21" name="Text 19"/>
-          <p:cNvSpPr/>
-          <p:nvPr/>
-        </p:nvSpPr>
-        <p:spPr>
-          <a:xfrm>
-            <a:off x="822960" y="5669280"/>
-            <a:ext cx="329184" cy="329184"/>
-          </a:xfrm>
-          <a:prstGeom prst="rect">
-            <a:avLst/>
-          </a:prstGeom>
-          <a:noFill/>
-          <a:ln/>
-        </p:spPr>
-        <p:txBody>
-          <a:bodyPr wrap="square" lIns="0" tIns="0" rIns="0" bIns="0" rtlCol="0" anchor="ctr"/>
-          <a:lstStyle/>
-          <a:p>
-            <a:pPr algn="ctr" indent="0" marL="0">
-              <a:buNone/>
-            </a:pPr>
-            <a:r>
-              <a:rPr lang="en-US" sz="1100" b="1" dirty="0">
-                <a:solidFill>
-                  <a:srgbClr val="FFFFFF"/>
-                </a:solidFill>
-                <a:latin typeface="Calibri" pitchFamily="34" charset="0"/>
-                <a:ea typeface="Calibri" pitchFamily="34" charset="-122"/>
-                <a:cs typeface="Calibri" pitchFamily="34" charset="-120"/>
-              </a:rPr>
-              <a:t>5</a:t>
-            </a:r>
-            <a:endParaRPr lang="en-US" sz="1100" dirty="0"/>
-          </a:p>
-        </p:txBody>
-      </p:sp>
-      <p:sp>
-        <p:nvSpPr>
-          <p:cNvPr id="22" name="Text 20"/>
-          <p:cNvSpPr/>
-          <p:nvPr/>
-        </p:nvSpPr>
-        <p:spPr>
-          <a:xfrm>
-            <a:off x="1243584" y="5504688"/>
-            <a:ext cx="10070287" cy="658368"/>
-          </a:xfrm>
-          <a:prstGeom prst="rect">
-            <a:avLst/>
-          </a:prstGeom>
-          <a:noFill/>
-          <a:ln/>
-        </p:spPr>
-        <p:txBody>
-          <a:bodyPr wrap="square" lIns="0" tIns="0" rIns="0" bIns="0" rtlCol="0" anchor="ctr"/>
-          <a:lstStyle/>
-          <a:p>
-            <a:pPr indent="0" marL="0">
-              <a:lnSpc>
-                <a:spcPct val="90000"/>
-              </a:lnSpc>
-              <a:buNone/>
-            </a:pPr>
-            <a:r>
-              <a:rPr lang="en-US" sz="1150" b="1" dirty="0">
-                <a:solidFill>
-                  <a:srgbClr val="1B2733"/>
-                </a:solidFill>
-                <a:latin typeface="Yu Gothic" pitchFamily="34" charset="0"/>
-                <a:ea typeface="Yu Gothic" pitchFamily="34" charset="-122"/>
-                <a:cs typeface="Yu Gothic" pitchFamily="34" charset="-120"/>
-              </a:rPr>
-              <a:t>記録は早いほど正確。引き揚げてからではなく、その場でメモと写真。</a:t>
-            </a:r>
-            <a:endParaRPr lang="en-US" sz="1150" dirty="0"/>
-          </a:p>
-          <a:p>
-            <a:pPr indent="0" marL="0">
-              <a:lnSpc>
-                <a:spcPct val="90000"/>
-              </a:lnSpc>
-              <a:buNone/>
-            </a:pPr>
-            <a:r>
-              <a:rPr lang="en-US" sz="900" i="1" dirty="0">
-                <a:solidFill>
-                  <a:srgbClr val="5F7183"/>
-                </a:solidFill>
-                <a:latin typeface="Calibri" pitchFamily="34" charset="0"/>
-                <a:ea typeface="Calibri" pitchFamily="34" charset="-122"/>
-                <a:cs typeface="Calibri" pitchFamily="34" charset="-120"/>
-              </a:rPr>
-              <a:t>Records are most accurate when immediate — note and photograph on the spot, not afterwards.</a:t>
-            </a:r>
-            <a:endParaRPr lang="en-US" sz="1150" dirty="0"/>
-          </a:p>
-        </p:txBody>
-      </p:sp>
-      <p:sp>
-        <p:nvSpPr>
-          <p:cNvPr id="23" name="Text 21"/>
-          <p:cNvSpPr/>
-          <p:nvPr/>
-        </p:nvSpPr>
-        <p:spPr>
-          <a:xfrm>
-            <a:off x="640080" y="6382512"/>
-            <a:ext cx="8778240" cy="292608"/>
-          </a:xfrm>
-          <a:prstGeom prst="rect">
-            <a:avLst/>
-          </a:prstGeom>
-          <a:noFill/>
-          <a:ln/>
-        </p:spPr>
-        <p:txBody>
-          <a:bodyPr wrap="square" lIns="0" tIns="0" rIns="0" bIns="0" rtlCol="0" anchor="ctr"/>
-          <a:lstStyle/>
-          <a:p>
-            <a:pPr indent="0" marL="0">
-              <a:buNone/>
-            </a:pPr>
-            <a:r>
-              <a:rPr lang="en-US" sz="900" dirty="0">
-                <a:solidFill>
-                  <a:srgbClr val="5F7183"/>
-                </a:solidFill>
-                <a:latin typeface="Yu Gothic" pitchFamily="34" charset="0"/>
-                <a:ea typeface="Yu Gothic" pitchFamily="34" charset="-122"/>
-                <a:cs typeface="Yu Gothic" pitchFamily="34" charset="-120"/>
-              </a:rPr>
               <a:t>第9時限｜基本教育4 事故の発生時における警察機関への連絡その他応急の措置  </a:t>
             </a:r>
             <a:pPr indent="0" marL="0">
@@ -9902,7 +11933,7 @@
       </p:sp>
       <p:sp>
         <p:nvSpPr>
-          <p:cNvPr id="24" name="Text 22"/>
+          <p:cNvPr id="26" name="Text 23"/>
           <p:cNvSpPr/>
           <p:nvPr/>
         </p:nvSpPr>

--- a/decks/05_9限_通報と現場保存.pptx
+++ b/decks/05_9限_通報と現場保存.pptx
@@ -13,9 +13,11 @@
     <p:sldId id="261" r:id="rId7"/>
     <p:sldId id="262" r:id="rId8"/>
     <p:sldId id="263" r:id="rId9"/>
+    <p:sldId id="264" r:id="rId10"/>
+    <p:sldId id="265" r:id="rId11"/>
   </p:sldIdLst>
   <p:notesMasterIdLst>
-    <p:notesMasterId r:id="rId10"/>
+    <p:notesMasterId r:id="rId12"/>
   </p:notesMasterIdLst>
   <p:sldSz cx="12192000" cy="6858000"/>
   <p:notesSz cx="6858000" cy="12192000"/>
@@ -551,6 +553,94 @@
 </p:notes>
 </file>
 
+<file path=ppt/notesSlides/notesSlide10.xml><?xml version="1.0" encoding="utf-8"?>
+<p:notes xmlns:a="http://schemas.openxmlformats.org/drawingml/2006/main" xmlns:r="http://schemas.openxmlformats.org/officeDocument/2006/relationships" xmlns:p="http://schemas.openxmlformats.org/presentationml/2006/main">
+  <p:cSld>
+    <p:spTree>
+      <p:nvGrpSpPr>
+        <p:cNvPr id="1" name=""/>
+        <p:cNvGrpSpPr/>
+        <p:nvPr/>
+      </p:nvGrpSpPr>
+      <p:grpSpPr>
+        <a:xfrm>
+          <a:off x="0" y="0"/>
+          <a:ext cx="0" cy="0"/>
+          <a:chOff x="0" y="0"/>
+          <a:chExt cx="0" cy="0"/>
+        </a:xfrm>
+      </p:grpSpPr>
+      <p:sp>
+        <p:nvSpPr>
+          <p:cNvPr id="2" name="Slide Image Placeholder 1"/>
+          <p:cNvSpPr>
+            <a:spLocks noGrp="1" noRot="1" noChangeAspect="1"/>
+          </p:cNvSpPr>
+          <p:nvPr>
+            <p:ph type="sldImg"/>
+          </p:nvPr>
+        </p:nvSpPr>
+        <p:spPr/>
+      </p:sp>
+      <p:sp>
+        <p:nvSpPr>
+          <p:cNvPr id="3" name="Notes Placeholder 2"/>
+          <p:cNvSpPr>
+            <a:spLocks noGrp="1"/>
+          </p:cNvSpPr>
+          <p:nvPr>
+            <p:ph type="body" idx="1"/>
+          </p:nvPr>
+        </p:nvSpPr>
+        <p:spPr/>
+        <p:txBody>
+          <a:bodyPr/>
+          <a:lstStyle/>
+          <a:p>
+            <a:r>
+              <a:rPr lang="en-US" dirty="0"/>
+              <a:t/>
+            </a:r>
+            <a:endParaRPr lang="en-US" dirty="0"/>
+          </a:p>
+        </p:txBody>
+      </p:sp>
+      <p:sp>
+        <p:nvSpPr>
+          <p:cNvPr id="4" name="Slide Number Placeholder 3"/>
+          <p:cNvSpPr>
+            <a:spLocks noGrp="1"/>
+          </p:cNvSpPr>
+          <p:nvPr>
+            <p:ph type="sldNum" sz="quarter" idx="10"/>
+          </p:nvPr>
+        </p:nvSpPr>
+        <p:spPr/>
+        <p:txBody>
+          <a:bodyPr/>
+          <a:lstStyle/>
+          <a:p>
+            <a:fld id="{F7021451-1387-4CA6-816F-3879F97B5CBC}" type="slidenum">
+              <a:rPr lang="en-US"/>
+              <a:t>10</a:t>
+            </a:fld>
+            <a:endParaRPr lang="en-US"/>
+          </a:p>
+        </p:txBody>
+      </p:sp>
+    </p:spTree>
+    <p:extLst>
+      <p:ext uri="{BB962C8B-B14F-4D97-AF65-F5344CB8AC3E}">
+        <p14:creationId xmlns:p14="http://schemas.microsoft.com/office/powerpoint/2010/main" val="1024086991"/>
+      </p:ext>
+    </p:extLst>
+  </p:cSld>
+  <p:clrMapOvr>
+    <a:masterClrMapping/>
+  </p:clrMapOvr>
+</p:notes>
+</file>
+
 <file path=ppt/notesSlides/notesSlide2.xml><?xml version="1.0" encoding="utf-8"?>
 <p:notes xmlns:a="http://schemas.openxmlformats.org/drawingml/2006/main" xmlns:r="http://schemas.openxmlformats.org/officeDocument/2006/relationships" xmlns:p="http://schemas.openxmlformats.org/presentationml/2006/main">
   <p:cSld>
@@ -1149,6 +1239,94 @@
             <a:fld id="{F7021451-1387-4CA6-816F-3879F97B5CBC}" type="slidenum">
               <a:rPr lang="en-US"/>
               <a:t>8</a:t>
+            </a:fld>
+            <a:endParaRPr lang="en-US"/>
+          </a:p>
+        </p:txBody>
+      </p:sp>
+    </p:spTree>
+    <p:extLst>
+      <p:ext uri="{BB962C8B-B14F-4D97-AF65-F5344CB8AC3E}">
+        <p14:creationId xmlns:p14="http://schemas.microsoft.com/office/powerpoint/2010/main" val="1024086991"/>
+      </p:ext>
+    </p:extLst>
+  </p:cSld>
+  <p:clrMapOvr>
+    <a:masterClrMapping/>
+  </p:clrMapOvr>
+</p:notes>
+</file>
+
+<file path=ppt/notesSlides/notesSlide9.xml><?xml version="1.0" encoding="utf-8"?>
+<p:notes xmlns:a="http://schemas.openxmlformats.org/drawingml/2006/main" xmlns:r="http://schemas.openxmlformats.org/officeDocument/2006/relationships" xmlns:p="http://schemas.openxmlformats.org/presentationml/2006/main">
+  <p:cSld>
+    <p:spTree>
+      <p:nvGrpSpPr>
+        <p:cNvPr id="1" name=""/>
+        <p:cNvGrpSpPr/>
+        <p:nvPr/>
+      </p:nvGrpSpPr>
+      <p:grpSpPr>
+        <a:xfrm>
+          <a:off x="0" y="0"/>
+          <a:ext cx="0" cy="0"/>
+          <a:chOff x="0" y="0"/>
+          <a:chExt cx="0" cy="0"/>
+        </a:xfrm>
+      </p:grpSpPr>
+      <p:sp>
+        <p:nvSpPr>
+          <p:cNvPr id="2" name="Slide Image Placeholder 1"/>
+          <p:cNvSpPr>
+            <a:spLocks noGrp="1" noRot="1" noChangeAspect="1"/>
+          </p:cNvSpPr>
+          <p:nvPr>
+            <p:ph type="sldImg"/>
+          </p:nvPr>
+        </p:nvSpPr>
+        <p:spPr/>
+      </p:sp>
+      <p:sp>
+        <p:nvSpPr>
+          <p:cNvPr id="3" name="Notes Placeholder 2"/>
+          <p:cNvSpPr>
+            <a:spLocks noGrp="1"/>
+          </p:cNvSpPr>
+          <p:nvPr>
+            <p:ph type="body" idx="1"/>
+          </p:nvPr>
+        </p:nvSpPr>
+        <p:spPr/>
+        <p:txBody>
+          <a:bodyPr/>
+          <a:lstStyle/>
+          <a:p>
+            <a:r>
+              <a:rPr lang="en-US" dirty="0"/>
+              <a:t/>
+            </a:r>
+            <a:endParaRPr lang="en-US" dirty="0"/>
+          </a:p>
+        </p:txBody>
+      </p:sp>
+      <p:sp>
+        <p:nvSpPr>
+          <p:cNvPr id="4" name="Slide Number Placeholder 3"/>
+          <p:cNvSpPr>
+            <a:spLocks noGrp="1"/>
+          </p:cNvSpPr>
+          <p:nvPr>
+            <p:ph type="sldNum" sz="quarter" idx="10"/>
+          </p:nvPr>
+        </p:nvSpPr>
+        <p:spPr/>
+        <p:txBody>
+          <a:bodyPr/>
+          <a:lstStyle/>
+          <a:p>
+            <a:fld id="{F7021451-1387-4CA6-816F-3879F97B5CBC}" type="slidenum">
+              <a:rPr lang="en-US"/>
+              <a:t>9</a:t>
             </a:fld>
             <a:endParaRPr lang="en-US"/>
           </a:p>
@@ -1785,6 +1963,1213 @@
 </p:sld>
 </file>
 
+<file path=ppt/slides/slide10.xml><?xml version="1.0" encoding="utf-8"?>
+<p:sld xmlns:a="http://schemas.openxmlformats.org/drawingml/2006/main" xmlns:r="http://schemas.openxmlformats.org/officeDocument/2006/relationships" xmlns:p="http://schemas.openxmlformats.org/presentationml/2006/main">
+  <p:cSld name="Slide 10">
+    <p:bg>
+      <p:bgPr>
+        <a:solidFill>
+          <a:srgbClr val="FFFFFF"/>
+        </a:solidFill>
+      </p:bgPr>
+    </p:bg>
+    <p:spTree>
+      <p:nvGrpSpPr>
+        <p:cNvPr id="1" name=""/>
+        <p:cNvGrpSpPr/>
+        <p:nvPr/>
+      </p:nvGrpSpPr>
+      <p:grpSpPr>
+        <a:xfrm>
+          <a:off x="0" y="0"/>
+          <a:ext cx="0" cy="0"/>
+          <a:chOff x="0" y="0"/>
+          <a:chExt cx="0" cy="0"/>
+        </a:xfrm>
+      </p:grpSpPr>
+      <p:pic>
+        <p:nvPicPr>
+          <p:cNvPr id="2" name="Image 0" descr="/home/user/Training-/assets/logo.png">    </p:cNvPr>
+          <p:cNvPicPr>
+            <a:picLocks noChangeAspect="1"/>
+          </p:cNvPicPr>
+          <p:nvPr/>
+        </p:nvPicPr>
+        <p:blipFill>
+          <a:blip r:embed="rId1"/>
+          <a:stretch>
+            <a:fillRect/>
+          </a:stretch>
+        </p:blipFill>
+        <p:spPr>
+          <a:xfrm>
+            <a:off x="10765231" y="332912"/>
+            <a:ext cx="786384" cy="742353"/>
+          </a:xfrm>
+          <a:prstGeom prst="rect">
+            <a:avLst/>
+          </a:prstGeom>
+        </p:spPr>
+      </p:pic>
+      <p:sp>
+        <p:nvSpPr>
+          <p:cNvPr id="3" name="Text 0"/>
+          <p:cNvSpPr/>
+          <p:nvPr/>
+        </p:nvSpPr>
+        <p:spPr>
+          <a:xfrm>
+            <a:off x="640080" y="384048"/>
+            <a:ext cx="8982151" cy="768096"/>
+          </a:xfrm>
+          <a:prstGeom prst="rect">
+            <a:avLst/>
+          </a:prstGeom>
+          <a:noFill/>
+          <a:ln/>
+        </p:spPr>
+        <p:txBody>
+          <a:bodyPr wrap="square" lIns="0" tIns="0" rIns="0" bIns="0" rtlCol="0" anchor="t"/>
+          <a:lstStyle/>
+          <a:p>
+            <a:pPr indent="0" marL="0">
+              <a:lnSpc>
+                <a:spcPct val="94000"/>
+              </a:lnSpc>
+              <a:buNone/>
+            </a:pPr>
+            <a:r>
+              <a:rPr lang="en-US" sz="2300" b="1" dirty="0">
+                <a:solidFill>
+                  <a:srgbClr val="093259"/>
+                </a:solidFill>
+                <a:latin typeface="Yu Gothic" pitchFamily="34" charset="0"/>
+                <a:ea typeface="Yu Gothic" pitchFamily="34" charset="-122"/>
+                <a:cs typeface="Yu Gothic" pitchFamily="34" charset="-120"/>
+              </a:rPr>
+              <a:t>TTX 9-B 講評 ― 模範解答</a:t>
+            </a:r>
+            <a:endParaRPr lang="en-US" sz="2300" dirty="0"/>
+          </a:p>
+          <a:p>
+            <a:pPr indent="0" marL="0">
+              <a:lnSpc>
+                <a:spcPct val="94000"/>
+              </a:lnSpc>
+              <a:buNone/>
+            </a:pPr>
+            <a:r>
+              <a:rPr lang="en-US" sz="1100" i="1" dirty="0">
+                <a:solidFill>
+                  <a:srgbClr val="12B198"/>
+                </a:solidFill>
+                <a:latin typeface="Calibri" pitchFamily="34" charset="0"/>
+                <a:ea typeface="Calibri" pitchFamily="34" charset="-122"/>
+                <a:cs typeface="Calibri" pitchFamily="34" charset="-120"/>
+              </a:rPr>
+              <a:t>TTX 9-B Debrief — Model Answer</a:t>
+            </a:r>
+            <a:endParaRPr lang="en-US" sz="2300" dirty="0"/>
+          </a:p>
+        </p:txBody>
+      </p:sp>
+      <p:sp>
+        <p:nvSpPr>
+          <p:cNvPr id="4" name="Shape 1"/>
+          <p:cNvSpPr/>
+          <p:nvPr/>
+        </p:nvSpPr>
+        <p:spPr>
+          <a:xfrm>
+            <a:off x="9686239" y="438912"/>
+            <a:ext cx="932688" cy="310896"/>
+          </a:xfrm>
+          <a:prstGeom prst="roundRect">
+            <a:avLst>
+              <a:gd name="adj" fmla="val 14706"/>
+            </a:avLst>
+          </a:prstGeom>
+          <a:solidFill>
+            <a:srgbClr val="093259"/>
+          </a:solidFill>
+          <a:ln/>
+        </p:spPr>
+      </p:sp>
+      <p:sp>
+        <p:nvSpPr>
+          <p:cNvPr id="5" name="Text 2"/>
+          <p:cNvSpPr/>
+          <p:nvPr/>
+        </p:nvSpPr>
+        <p:spPr>
+          <a:xfrm>
+            <a:off x="9686239" y="438912"/>
+            <a:ext cx="932688" cy="310896"/>
+          </a:xfrm>
+          <a:prstGeom prst="rect">
+            <a:avLst/>
+          </a:prstGeom>
+          <a:noFill/>
+          <a:ln/>
+        </p:spPr>
+        <p:txBody>
+          <a:bodyPr wrap="square" lIns="0" tIns="0" rIns="0" bIns="0" rtlCol="0" anchor="ctr"/>
+          <a:lstStyle/>
+          <a:p>
+            <a:pPr algn="ctr" indent="0" marL="0">
+              <a:buNone/>
+            </a:pPr>
+            <a:r>
+              <a:rPr lang="en-US" sz="1100" b="1" dirty="0">
+                <a:solidFill>
+                  <a:srgbClr val="FFFFFF"/>
+                </a:solidFill>
+                <a:latin typeface="Calibri" pitchFamily="34" charset="0"/>
+                <a:ea typeface="Calibri" pitchFamily="34" charset="-122"/>
+                <a:cs typeface="Calibri" pitchFamily="34" charset="-120"/>
+              </a:rPr>
+              <a:t>DEBRIEF</a:t>
+            </a:r>
+            <a:endParaRPr lang="en-US" sz="1100" dirty="0"/>
+          </a:p>
+        </p:txBody>
+      </p:sp>
+      <p:sp>
+        <p:nvSpPr>
+          <p:cNvPr id="6" name="Text 3"/>
+          <p:cNvSpPr/>
+          <p:nvPr/>
+        </p:nvSpPr>
+        <p:spPr>
+          <a:xfrm>
+            <a:off x="640080" y="1188720"/>
+            <a:ext cx="10911535" cy="530352"/>
+          </a:xfrm>
+          <a:prstGeom prst="rect">
+            <a:avLst/>
+          </a:prstGeom>
+          <a:noFill/>
+          <a:ln/>
+        </p:spPr>
+        <p:txBody>
+          <a:bodyPr wrap="square" lIns="0" tIns="0" rIns="0" bIns="0" rtlCol="0" anchor="t"/>
+          <a:lstStyle/>
+          <a:p>
+            <a:pPr indent="0" marL="0">
+              <a:lnSpc>
+                <a:spcPct val="90000"/>
+              </a:lnSpc>
+              <a:buNone/>
+            </a:pPr>
+            <a:r>
+              <a:rPr lang="en-US" sz="1000" b="1" dirty="0">
+                <a:solidFill>
+                  <a:srgbClr val="0D8A76"/>
+                </a:solidFill>
+                <a:latin typeface="Yu Gothic" pitchFamily="34" charset="0"/>
+                <a:ea typeface="Yu Gothic" pitchFamily="34" charset="-122"/>
+                <a:cs typeface="Yu Gothic" pitchFamily="34" charset="-120"/>
+              </a:rPr>
+              <a:t>狙い　</a:t>
+            </a:r>
+            <a:pPr indent="0" marL="0">
+              <a:lnSpc>
+                <a:spcPct val="90000"/>
+              </a:lnSpc>
+              <a:buNone/>
+            </a:pPr>
+            <a:r>
+              <a:rPr lang="en-US" sz="1150" b="1" dirty="0">
+                <a:solidFill>
+                  <a:srgbClr val="093259"/>
+                </a:solidFill>
+                <a:latin typeface="Yu Gothic" pitchFamily="34" charset="0"/>
+                <a:ea typeface="Yu Gothic" pitchFamily="34" charset="-122"/>
+                <a:cs typeface="Yu Gothic" pitchFamily="34" charset="-120"/>
+              </a:rPr>
+              <a:t>1名でできることには限界がある。何を諦めるかが答え。</a:t>
+            </a:r>
+            <a:endParaRPr lang="en-US" sz="1000" dirty="0"/>
+          </a:p>
+          <a:p>
+            <a:pPr indent="0" marL="0">
+              <a:lnSpc>
+                <a:spcPct val="90000"/>
+              </a:lnSpc>
+              <a:buNone/>
+            </a:pPr>
+            <a:r>
+              <a:rPr lang="en-US" sz="850" i="1" dirty="0">
+                <a:solidFill>
+                  <a:srgbClr val="5F7183"/>
+                </a:solidFill>
+                <a:latin typeface="Calibri" pitchFamily="34" charset="0"/>
+                <a:ea typeface="Calibri" pitchFamily="34" charset="-122"/>
+                <a:cs typeface="Calibri" pitchFamily="34" charset="-120"/>
+              </a:rPr>
+              <a:t>One person can only do so much. What you give up is the answer.</a:t>
+            </a:r>
+            <a:endParaRPr lang="en-US" sz="1000" dirty="0"/>
+          </a:p>
+        </p:txBody>
+      </p:sp>
+      <p:sp>
+        <p:nvSpPr>
+          <p:cNvPr id="7" name="Shape 4"/>
+          <p:cNvSpPr/>
+          <p:nvPr/>
+        </p:nvSpPr>
+        <p:spPr>
+          <a:xfrm>
+            <a:off x="640080" y="1773936"/>
+            <a:ext cx="5327752" cy="1091184"/>
+          </a:xfrm>
+          <a:prstGeom prst="roundRect">
+            <a:avLst>
+              <a:gd name="adj" fmla="val 3352"/>
+            </a:avLst>
+          </a:prstGeom>
+          <a:solidFill>
+            <a:srgbClr val="E4F4F0"/>
+          </a:solidFill>
+          <a:ln/>
+        </p:spPr>
+      </p:sp>
+      <p:sp>
+        <p:nvSpPr>
+          <p:cNvPr id="8" name="Text 5"/>
+          <p:cNvSpPr/>
+          <p:nvPr/>
+        </p:nvSpPr>
+        <p:spPr>
+          <a:xfrm>
+            <a:off x="877824" y="1865376"/>
+            <a:ext cx="4852264" cy="908304"/>
+          </a:xfrm>
+          <a:prstGeom prst="rect">
+            <a:avLst/>
+          </a:prstGeom>
+          <a:noFill/>
+          <a:ln/>
+        </p:spPr>
+        <p:txBody>
+          <a:bodyPr wrap="square" lIns="0" tIns="0" rIns="0" bIns="0" rtlCol="0" anchor="t"/>
+          <a:lstStyle/>
+          <a:p>
+            <a:pPr indent="0" marL="0">
+              <a:lnSpc>
+                <a:spcPct val="90000"/>
+              </a:lnSpc>
+              <a:buNone/>
+            </a:pPr>
+            <a:r>
+              <a:rPr lang="en-US" sz="1050" b="1" dirty="0">
+                <a:solidFill>
+                  <a:srgbClr val="0D8A76"/>
+                </a:solidFill>
+                <a:latin typeface="Yu Gothic" pitchFamily="34" charset="0"/>
+                <a:ea typeface="Yu Gothic" pitchFamily="34" charset="-122"/>
+                <a:cs typeface="Yu Gothic" pitchFamily="34" charset="-120"/>
+              </a:rPr>
+              <a:t>扉を開けるか</a:t>
+            </a:r>
+            <a:endParaRPr lang="en-US" sz="1050" dirty="0"/>
+          </a:p>
+          <a:p>
+            <a:pPr indent="0" marL="0">
+              <a:lnSpc>
+                <a:spcPct val="90000"/>
+              </a:lnSpc>
+              <a:buNone/>
+            </a:pPr>
+            <a:r>
+              <a:rPr lang="en-US" sz="1050" b="1" dirty="0">
+                <a:solidFill>
+                  <a:srgbClr val="1B2733"/>
+                </a:solidFill>
+                <a:latin typeface="Yu Gothic" pitchFamily="34" charset="0"/>
+                <a:ea typeface="Yu Gothic" pitchFamily="34" charset="-122"/>
+                <a:cs typeface="Yu Gothic" pitchFamily="34" charset="-120"/>
+              </a:rPr>
+              <a:t>開けない。まず扉に触れて熱を確認する。開けると燃焼が拡大する。</a:t>
+            </a:r>
+            <a:endParaRPr lang="en-US" sz="1050" dirty="0"/>
+          </a:p>
+          <a:p>
+            <a:pPr indent="0" marL="0">
+              <a:lnSpc>
+                <a:spcPct val="90000"/>
+              </a:lnSpc>
+              <a:buNone/>
+            </a:pPr>
+            <a:r>
+              <a:rPr lang="en-US" sz="800" i="1" dirty="0">
+                <a:solidFill>
+                  <a:srgbClr val="5F7183"/>
+                </a:solidFill>
+                <a:latin typeface="Calibri" pitchFamily="34" charset="0"/>
+                <a:ea typeface="Calibri" pitchFamily="34" charset="-122"/>
+                <a:cs typeface="Calibri" pitchFamily="34" charset="-120"/>
+              </a:rPr>
+              <a:t>Do not open it. Feel the door for heat first. Opening it feeds the fire.</a:t>
+            </a:r>
+            <a:endParaRPr lang="en-US" sz="1050" dirty="0"/>
+          </a:p>
+        </p:txBody>
+      </p:sp>
+      <p:sp>
+        <p:nvSpPr>
+          <p:cNvPr id="9" name="Shape 6"/>
+          <p:cNvSpPr/>
+          <p:nvPr/>
+        </p:nvSpPr>
+        <p:spPr>
+          <a:xfrm>
+            <a:off x="6223864" y="1773936"/>
+            <a:ext cx="5327752" cy="1091184"/>
+          </a:xfrm>
+          <a:prstGeom prst="roundRect">
+            <a:avLst>
+              <a:gd name="adj" fmla="val 3352"/>
+            </a:avLst>
+          </a:prstGeom>
+          <a:solidFill>
+            <a:srgbClr val="EFF4F8"/>
+          </a:solidFill>
+          <a:ln/>
+        </p:spPr>
+      </p:sp>
+      <p:sp>
+        <p:nvSpPr>
+          <p:cNvPr id="10" name="Text 7"/>
+          <p:cNvSpPr/>
+          <p:nvPr/>
+        </p:nvSpPr>
+        <p:spPr>
+          <a:xfrm>
+            <a:off x="6461608" y="1865376"/>
+            <a:ext cx="4852264" cy="908304"/>
+          </a:xfrm>
+          <a:prstGeom prst="rect">
+            <a:avLst/>
+          </a:prstGeom>
+          <a:noFill/>
+          <a:ln/>
+        </p:spPr>
+        <p:txBody>
+          <a:bodyPr wrap="square" lIns="0" tIns="0" rIns="0" bIns="0" rtlCol="0" anchor="t"/>
+          <a:lstStyle/>
+          <a:p>
+            <a:pPr indent="0" marL="0">
+              <a:lnSpc>
+                <a:spcPct val="90000"/>
+              </a:lnSpc>
+              <a:buNone/>
+            </a:pPr>
+            <a:r>
+              <a:rPr lang="en-US" sz="1050" b="1" dirty="0">
+                <a:solidFill>
+                  <a:srgbClr val="093259"/>
+                </a:solidFill>
+                <a:latin typeface="Yu Gothic" pitchFamily="34" charset="0"/>
+                <a:ea typeface="Yu Gothic" pitchFamily="34" charset="-122"/>
+                <a:cs typeface="Yu Gothic" pitchFamily="34" charset="-120"/>
+              </a:rPr>
+              <a:t>何で判断するか</a:t>
+            </a:r>
+            <a:endParaRPr lang="en-US" sz="1050" dirty="0"/>
+          </a:p>
+          <a:p>
+            <a:pPr indent="0" marL="0">
+              <a:lnSpc>
+                <a:spcPct val="90000"/>
+              </a:lnSpc>
+              <a:buNone/>
+            </a:pPr>
+            <a:r>
+              <a:rPr lang="en-US" sz="1050" b="1" dirty="0">
+                <a:solidFill>
+                  <a:srgbClr val="1B2733"/>
+                </a:solidFill>
+                <a:latin typeface="Yu Gothic" pitchFamily="34" charset="0"/>
+                <a:ea typeface="Yu Gothic" pitchFamily="34" charset="-122"/>
+                <a:cs typeface="Yu Gothic" pitchFamily="34" charset="-120"/>
+              </a:rPr>
+              <a:t>扉の熱、煙の色と量、臭気、音。目視できなくても材料はある。</a:t>
+            </a:r>
+            <a:endParaRPr lang="en-US" sz="1050" dirty="0"/>
+          </a:p>
+          <a:p>
+            <a:pPr indent="0" marL="0">
+              <a:lnSpc>
+                <a:spcPct val="90000"/>
+              </a:lnSpc>
+              <a:buNone/>
+            </a:pPr>
+            <a:r>
+              <a:rPr lang="en-US" sz="800" i="1" dirty="0">
+                <a:solidFill>
+                  <a:srgbClr val="5F7183"/>
+                </a:solidFill>
+                <a:latin typeface="Calibri" pitchFamily="34" charset="0"/>
+                <a:ea typeface="Calibri" pitchFamily="34" charset="-122"/>
+                <a:cs typeface="Calibri" pitchFamily="34" charset="-120"/>
+              </a:rPr>
+              <a:t>Heat, smoke colour and volume, smell, sound. You can judge without seeing inside.</a:t>
+            </a:r>
+            <a:endParaRPr lang="en-US" sz="1050" dirty="0"/>
+          </a:p>
+        </p:txBody>
+      </p:sp>
+      <p:sp>
+        <p:nvSpPr>
+          <p:cNvPr id="11" name="Shape 8"/>
+          <p:cNvSpPr/>
+          <p:nvPr/>
+        </p:nvSpPr>
+        <p:spPr>
+          <a:xfrm>
+            <a:off x="640080" y="2993136"/>
+            <a:ext cx="5327752" cy="1091184"/>
+          </a:xfrm>
+          <a:prstGeom prst="roundRect">
+            <a:avLst>
+              <a:gd name="adj" fmla="val 3352"/>
+            </a:avLst>
+          </a:prstGeom>
+          <a:solidFill>
+            <a:srgbClr val="E4F4F0"/>
+          </a:solidFill>
+          <a:ln/>
+        </p:spPr>
+      </p:sp>
+      <p:sp>
+        <p:nvSpPr>
+          <p:cNvPr id="12" name="Text 9"/>
+          <p:cNvSpPr/>
+          <p:nvPr/>
+        </p:nvSpPr>
+        <p:spPr>
+          <a:xfrm>
+            <a:off x="877824" y="3084576"/>
+            <a:ext cx="4852264" cy="908304"/>
+          </a:xfrm>
+          <a:prstGeom prst="rect">
+            <a:avLst/>
+          </a:prstGeom>
+          <a:noFill/>
+          <a:ln/>
+        </p:spPr>
+        <p:txBody>
+          <a:bodyPr wrap="square" lIns="0" tIns="0" rIns="0" bIns="0" rtlCol="0" anchor="t"/>
+          <a:lstStyle/>
+          <a:p>
+            <a:pPr indent="0" marL="0">
+              <a:lnSpc>
+                <a:spcPct val="90000"/>
+              </a:lnSpc>
+              <a:buNone/>
+            </a:pPr>
+            <a:r>
+              <a:rPr lang="en-US" sz="1050" b="1" dirty="0">
+                <a:solidFill>
+                  <a:srgbClr val="0D8A76"/>
+                </a:solidFill>
+                <a:latin typeface="Yu Gothic" pitchFamily="34" charset="0"/>
+                <a:ea typeface="Yu Gothic" pitchFamily="34" charset="-122"/>
+                <a:cs typeface="Yu Gothic" pitchFamily="34" charset="-120"/>
+              </a:rPr>
+              <a:t>初期消火か避難誘導か</a:t>
+            </a:r>
+            <a:endParaRPr lang="en-US" sz="1050" dirty="0"/>
+          </a:p>
+          <a:p>
+            <a:pPr indent="0" marL="0">
+              <a:lnSpc>
+                <a:spcPct val="90000"/>
+              </a:lnSpc>
+              <a:buNone/>
+            </a:pPr>
+            <a:r>
+              <a:rPr lang="en-US" sz="1050" b="1" dirty="0">
+                <a:solidFill>
+                  <a:srgbClr val="1B2733"/>
+                </a:solidFill>
+                <a:latin typeface="Yu Gothic" pitchFamily="34" charset="0"/>
+                <a:ea typeface="Yu Gothic" pitchFamily="34" charset="-122"/>
+                <a:cs typeface="Yu Gothic" pitchFamily="34" charset="-120"/>
+              </a:rPr>
+              <a:t>1名なら避難誘導。初期消火は複数名と退路の確保が前提。</a:t>
+            </a:r>
+            <a:endParaRPr lang="en-US" sz="1050" dirty="0"/>
+          </a:p>
+          <a:p>
+            <a:pPr indent="0" marL="0">
+              <a:lnSpc>
+                <a:spcPct val="90000"/>
+              </a:lnSpc>
+              <a:buNone/>
+            </a:pPr>
+            <a:r>
+              <a:rPr lang="en-US" sz="800" i="1" dirty="0">
+                <a:solidFill>
+                  <a:srgbClr val="5F7183"/>
+                </a:solidFill>
+                <a:latin typeface="Calibri" pitchFamily="34" charset="0"/>
+                <a:ea typeface="Calibri" pitchFamily="34" charset="-122"/>
+                <a:cs typeface="Calibri" pitchFamily="34" charset="-120"/>
+              </a:rPr>
+              <a:t>Alone, guide the evacuation. Firefighting needs numbers and a secured exit.</a:t>
+            </a:r>
+            <a:endParaRPr lang="en-US" sz="1050" dirty="0"/>
+          </a:p>
+        </p:txBody>
+      </p:sp>
+      <p:sp>
+        <p:nvSpPr>
+          <p:cNvPr id="13" name="Shape 10"/>
+          <p:cNvSpPr/>
+          <p:nvPr/>
+        </p:nvSpPr>
+        <p:spPr>
+          <a:xfrm>
+            <a:off x="6223864" y="2993136"/>
+            <a:ext cx="5327752" cy="1091184"/>
+          </a:xfrm>
+          <a:prstGeom prst="roundRect">
+            <a:avLst>
+              <a:gd name="adj" fmla="val 3352"/>
+            </a:avLst>
+          </a:prstGeom>
+          <a:solidFill>
+            <a:srgbClr val="EFF4F8"/>
+          </a:solidFill>
+          <a:ln/>
+        </p:spPr>
+      </p:sp>
+      <p:sp>
+        <p:nvSpPr>
+          <p:cNvPr id="14" name="Text 11"/>
+          <p:cNvSpPr/>
+          <p:nvPr/>
+        </p:nvSpPr>
+        <p:spPr>
+          <a:xfrm>
+            <a:off x="6461608" y="3084576"/>
+            <a:ext cx="4852264" cy="908304"/>
+          </a:xfrm>
+          <a:prstGeom prst="rect">
+            <a:avLst/>
+          </a:prstGeom>
+          <a:noFill/>
+          <a:ln/>
+        </p:spPr>
+        <p:txBody>
+          <a:bodyPr wrap="square" lIns="0" tIns="0" rIns="0" bIns="0" rtlCol="0" anchor="t"/>
+          <a:lstStyle/>
+          <a:p>
+            <a:pPr indent="0" marL="0">
+              <a:lnSpc>
+                <a:spcPct val="90000"/>
+              </a:lnSpc>
+              <a:buNone/>
+            </a:pPr>
+            <a:r>
+              <a:rPr lang="en-US" sz="1050" b="1" dirty="0">
+                <a:solidFill>
+                  <a:srgbClr val="093259"/>
+                </a:solidFill>
+                <a:latin typeface="Yu Gothic" pitchFamily="34" charset="0"/>
+                <a:ea typeface="Yu Gothic" pitchFamily="34" charset="-122"/>
+                <a:cs typeface="Yu Gothic" pitchFamily="34" charset="-120"/>
+              </a:rPr>
+              <a:t>発報前の通報</a:t>
+            </a:r>
+            <a:endParaRPr lang="en-US" sz="1050" dirty="0"/>
+          </a:p>
+          <a:p>
+            <a:pPr indent="0" marL="0">
+              <a:lnSpc>
+                <a:spcPct val="90000"/>
+              </a:lnSpc>
+              <a:buNone/>
+            </a:pPr>
+            <a:r>
+              <a:rPr lang="en-US" sz="1050" b="1" dirty="0">
+                <a:solidFill>
+                  <a:srgbClr val="1B2733"/>
+                </a:solidFill>
+                <a:latin typeface="Yu Gothic" pitchFamily="34" charset="0"/>
+                <a:ea typeface="Yu Gothic" pitchFamily="34" charset="-122"/>
+                <a:cs typeface="Yu Gothic" pitchFamily="34" charset="-120"/>
+              </a:rPr>
+              <a:t>してよい。発報を待つ理由はない。人が煙を確認している。</a:t>
+            </a:r>
+            <a:endParaRPr lang="en-US" sz="1050" dirty="0"/>
+          </a:p>
+          <a:p>
+            <a:pPr indent="0" marL="0">
+              <a:lnSpc>
+                <a:spcPct val="90000"/>
+              </a:lnSpc>
+              <a:buNone/>
+            </a:pPr>
+            <a:r>
+              <a:rPr lang="en-US" sz="800" i="1" dirty="0">
+                <a:solidFill>
+                  <a:srgbClr val="5F7183"/>
+                </a:solidFill>
+                <a:latin typeface="Calibri" pitchFamily="34" charset="0"/>
+                <a:ea typeface="Calibri" pitchFamily="34" charset="-122"/>
+                <a:cs typeface="Calibri" pitchFamily="34" charset="-120"/>
+              </a:rPr>
+              <a:t>Call now. There is no reason to wait for the alarm — a person has seen smoke.</a:t>
+            </a:r>
+            <a:endParaRPr lang="en-US" sz="1050" dirty="0"/>
+          </a:p>
+        </p:txBody>
+      </p:sp>
+      <p:sp>
+        <p:nvSpPr>
+          <p:cNvPr id="15" name="Shape 12"/>
+          <p:cNvSpPr/>
+          <p:nvPr/>
+        </p:nvSpPr>
+        <p:spPr>
+          <a:xfrm>
+            <a:off x="640080" y="4212336"/>
+            <a:ext cx="5327752" cy="1091184"/>
+          </a:xfrm>
+          <a:prstGeom prst="roundRect">
+            <a:avLst>
+              <a:gd name="adj" fmla="val 3352"/>
+            </a:avLst>
+          </a:prstGeom>
+          <a:solidFill>
+            <a:srgbClr val="EFF4F8"/>
+          </a:solidFill>
+          <a:ln/>
+        </p:spPr>
+      </p:sp>
+      <p:sp>
+        <p:nvSpPr>
+          <p:cNvPr id="16" name="Text 13"/>
+          <p:cNvSpPr/>
+          <p:nvPr/>
+        </p:nvSpPr>
+        <p:spPr>
+          <a:xfrm>
+            <a:off x="877824" y="4303776"/>
+            <a:ext cx="4852264" cy="908304"/>
+          </a:xfrm>
+          <a:prstGeom prst="rect">
+            <a:avLst/>
+          </a:prstGeom>
+          <a:noFill/>
+          <a:ln/>
+        </p:spPr>
+        <p:txBody>
+          <a:bodyPr wrap="square" lIns="0" tIns="0" rIns="0" bIns="0" rtlCol="0" anchor="t"/>
+          <a:lstStyle/>
+          <a:p>
+            <a:pPr indent="0" marL="0">
+              <a:lnSpc>
+                <a:spcPct val="90000"/>
+              </a:lnSpc>
+              <a:buNone/>
+            </a:pPr>
+            <a:r>
+              <a:rPr lang="en-US" sz="1050" b="1" dirty="0">
+                <a:solidFill>
+                  <a:srgbClr val="093259"/>
+                </a:solidFill>
+                <a:latin typeface="Yu Gothic" pitchFamily="34" charset="0"/>
+                <a:ea typeface="Yu Gothic" pitchFamily="34" charset="-122"/>
+                <a:cs typeface="Yu Gothic" pitchFamily="34" charset="-120"/>
+              </a:rPr>
+              <a:t>消火器を取りに走る社員</a:t>
+            </a:r>
+            <a:endParaRPr lang="en-US" sz="1050" dirty="0"/>
+          </a:p>
+          <a:p>
+            <a:pPr indent="0" marL="0">
+              <a:lnSpc>
+                <a:spcPct val="90000"/>
+              </a:lnSpc>
+              <a:buNone/>
+            </a:pPr>
+            <a:r>
+              <a:rPr lang="en-US" sz="1050" b="1" dirty="0">
+                <a:solidFill>
+                  <a:srgbClr val="1B2733"/>
+                </a:solidFill>
+                <a:latin typeface="Yu Gothic" pitchFamily="34" charset="0"/>
+                <a:ea typeface="Yu Gothic" pitchFamily="34" charset="-122"/>
+                <a:cs typeface="Yu Gothic" pitchFamily="34" charset="-120"/>
+              </a:rPr>
+              <a:t>追わない。避難誘導が止まる方が損失は大きい。</a:t>
+            </a:r>
+            <a:endParaRPr lang="en-US" sz="1050" dirty="0"/>
+          </a:p>
+          <a:p>
+            <a:pPr indent="0" marL="0">
+              <a:lnSpc>
+                <a:spcPct val="90000"/>
+              </a:lnSpc>
+              <a:buNone/>
+            </a:pPr>
+            <a:r>
+              <a:rPr lang="en-US" sz="800" i="1" dirty="0">
+                <a:solidFill>
+                  <a:srgbClr val="5F7183"/>
+                </a:solidFill>
+                <a:latin typeface="Calibri" pitchFamily="34" charset="0"/>
+                <a:ea typeface="Calibri" pitchFamily="34" charset="-122"/>
+                <a:cs typeface="Calibri" pitchFamily="34" charset="-120"/>
+              </a:rPr>
+              <a:t>Do not chase them. Stopping the evacuation costs more.</a:t>
+            </a:r>
+            <a:endParaRPr lang="en-US" sz="1050" dirty="0"/>
+          </a:p>
+        </p:txBody>
+      </p:sp>
+      <p:sp>
+        <p:nvSpPr>
+          <p:cNvPr id="17" name="Shape 14"/>
+          <p:cNvSpPr/>
+          <p:nvPr/>
+        </p:nvSpPr>
+        <p:spPr>
+          <a:xfrm>
+            <a:off x="6223864" y="4212336"/>
+            <a:ext cx="5327752" cy="1091184"/>
+          </a:xfrm>
+          <a:prstGeom prst="roundRect">
+            <a:avLst>
+              <a:gd name="adj" fmla="val 3352"/>
+            </a:avLst>
+          </a:prstGeom>
+          <a:solidFill>
+            <a:srgbClr val="EFF4F8"/>
+          </a:solidFill>
+          <a:ln/>
+        </p:spPr>
+      </p:sp>
+      <p:sp>
+        <p:nvSpPr>
+          <p:cNvPr id="18" name="Text 15"/>
+          <p:cNvSpPr/>
+          <p:nvPr/>
+        </p:nvSpPr>
+        <p:spPr>
+          <a:xfrm>
+            <a:off x="6461608" y="4303776"/>
+            <a:ext cx="4852264" cy="908304"/>
+          </a:xfrm>
+          <a:prstGeom prst="rect">
+            <a:avLst/>
+          </a:prstGeom>
+          <a:noFill/>
+          <a:ln/>
+        </p:spPr>
+        <p:txBody>
+          <a:bodyPr wrap="square" lIns="0" tIns="0" rIns="0" bIns="0" rtlCol="0" anchor="t"/>
+          <a:lstStyle/>
+          <a:p>
+            <a:pPr indent="0" marL="0">
+              <a:lnSpc>
+                <a:spcPct val="90000"/>
+              </a:lnSpc>
+              <a:buNone/>
+            </a:pPr>
+            <a:r>
+              <a:rPr lang="en-US" sz="1050" b="1" dirty="0">
+                <a:solidFill>
+                  <a:srgbClr val="093259"/>
+                </a:solidFill>
+                <a:latin typeface="Yu Gothic" pitchFamily="34" charset="0"/>
+                <a:ea typeface="Yu Gothic" pitchFamily="34" charset="-122"/>
+                <a:cs typeface="Yu Gothic" pitchFamily="34" charset="-120"/>
+              </a:rPr>
+              <a:t>第2区画が発報</a:t>
+            </a:r>
+            <a:endParaRPr lang="en-US" sz="1050" dirty="0"/>
+          </a:p>
+          <a:p>
+            <a:pPr indent="0" marL="0">
+              <a:lnSpc>
+                <a:spcPct val="90000"/>
+              </a:lnSpc>
+              <a:buNone/>
+            </a:pPr>
+            <a:r>
+              <a:rPr lang="en-US" sz="1050" b="1" dirty="0">
+                <a:solidFill>
+                  <a:srgbClr val="1B2733"/>
+                </a:solidFill>
+                <a:latin typeface="Yu Gothic" pitchFamily="34" charset="0"/>
+                <a:ea typeface="Yu Gothic" pitchFamily="34" charset="-122"/>
+                <a:cs typeface="Yu Gothic" pitchFamily="34" charset="-120"/>
+              </a:rPr>
+              <a:t>火災の可能性が上がる。全館避難の判断へ切り替える。</a:t>
+            </a:r>
+            <a:endParaRPr lang="en-US" sz="1050" dirty="0"/>
+          </a:p>
+          <a:p>
+            <a:pPr indent="0" marL="0">
+              <a:lnSpc>
+                <a:spcPct val="90000"/>
+              </a:lnSpc>
+              <a:buNone/>
+            </a:pPr>
+            <a:r>
+              <a:rPr lang="en-US" sz="800" i="1" dirty="0">
+                <a:solidFill>
+                  <a:srgbClr val="5F7183"/>
+                </a:solidFill>
+                <a:latin typeface="Calibri" pitchFamily="34" charset="0"/>
+                <a:ea typeface="Calibri" pitchFamily="34" charset="-122"/>
+                <a:cs typeface="Calibri" pitchFamily="34" charset="-120"/>
+              </a:rPr>
+              <a:t>A fire is now more likely. Switch to a building-wide evacuation.</a:t>
+            </a:r>
+            <a:endParaRPr lang="en-US" sz="1050" dirty="0"/>
+          </a:p>
+        </p:txBody>
+      </p:sp>
+      <p:sp>
+        <p:nvSpPr>
+          <p:cNvPr id="19" name="Shape 16"/>
+          <p:cNvSpPr/>
+          <p:nvPr/>
+        </p:nvSpPr>
+        <p:spPr>
+          <a:xfrm>
+            <a:off x="640080" y="5358384"/>
+            <a:ext cx="10911535" cy="493776"/>
+          </a:xfrm>
+          <a:prstGeom prst="roundRect">
+            <a:avLst>
+              <a:gd name="adj" fmla="val 7407"/>
+            </a:avLst>
+          </a:prstGeom>
+          <a:solidFill>
+            <a:srgbClr val="093259"/>
+          </a:solidFill>
+          <a:ln/>
+        </p:spPr>
+      </p:sp>
+      <p:sp>
+        <p:nvSpPr>
+          <p:cNvPr id="20" name="Text 17"/>
+          <p:cNvSpPr/>
+          <p:nvPr/>
+        </p:nvSpPr>
+        <p:spPr>
+          <a:xfrm>
+            <a:off x="877824" y="5404104"/>
+            <a:ext cx="10436047" cy="402336"/>
+          </a:xfrm>
+          <a:prstGeom prst="rect">
+            <a:avLst/>
+          </a:prstGeom>
+          <a:noFill/>
+          <a:ln/>
+        </p:spPr>
+        <p:txBody>
+          <a:bodyPr wrap="square" lIns="0" tIns="0" rIns="0" bIns="0" rtlCol="0" anchor="ctr"/>
+          <a:lstStyle/>
+          <a:p>
+            <a:pPr indent="0" marL="0">
+              <a:lnSpc>
+                <a:spcPct val="86000"/>
+              </a:lnSpc>
+              <a:buNone/>
+            </a:pPr>
+            <a:r>
+              <a:rPr lang="en-US" sz="950" b="1" dirty="0">
+                <a:solidFill>
+                  <a:srgbClr val="12B198"/>
+                </a:solidFill>
+                <a:latin typeface="Yu Gothic" pitchFamily="34" charset="0"/>
+                <a:ea typeface="Yu Gothic" pitchFamily="34" charset="-122"/>
+                <a:cs typeface="Yu Gothic" pitchFamily="34" charset="-120"/>
+              </a:rPr>
+              <a:t>割れる論点　</a:t>
+            </a:r>
+            <a:pPr indent="0" marL="0">
+              <a:lnSpc>
+                <a:spcPct val="86000"/>
+              </a:lnSpc>
+              <a:buNone/>
+            </a:pPr>
+            <a:r>
+              <a:rPr lang="en-US" sz="1100" b="1" dirty="0">
+                <a:solidFill>
+                  <a:srgbClr val="FFFFFF"/>
+                </a:solidFill>
+                <a:latin typeface="Yu Gothic" pitchFamily="34" charset="0"/>
+                <a:ea typeface="Yu Gothic" pitchFamily="34" charset="-122"/>
+                <a:cs typeface="Yu Gothic" pitchFamily="34" charset="-120"/>
+              </a:rPr>
+              <a:t>諦めるもの ― 初期消火、原因の特定、私物の持ち出し。諦める判断を言えるか。</a:t>
+            </a:r>
+            <a:endParaRPr lang="en-US" sz="950" dirty="0"/>
+          </a:p>
+          <a:p>
+            <a:pPr indent="0" marL="0">
+              <a:lnSpc>
+                <a:spcPct val="86000"/>
+              </a:lnSpc>
+              <a:buNone/>
+            </a:pPr>
+            <a:r>
+              <a:rPr lang="en-US" sz="800" i="1" dirty="0">
+                <a:solidFill>
+                  <a:srgbClr val="9FD8CD"/>
+                </a:solidFill>
+                <a:latin typeface="Calibri" pitchFamily="34" charset="0"/>
+                <a:ea typeface="Calibri" pitchFamily="34" charset="-122"/>
+                <a:cs typeface="Calibri" pitchFamily="34" charset="-120"/>
+              </a:rPr>
+              <a:t>What you give up: firefighting, finding the cause, retrieving belongings. Can they say it out loud?</a:t>
+            </a:r>
+            <a:endParaRPr lang="en-US" sz="950" dirty="0"/>
+          </a:p>
+        </p:txBody>
+      </p:sp>
+      <p:sp>
+        <p:nvSpPr>
+          <p:cNvPr id="21" name="Text 18"/>
+          <p:cNvSpPr/>
+          <p:nvPr/>
+        </p:nvSpPr>
+        <p:spPr>
+          <a:xfrm>
+            <a:off x="640080" y="5907024"/>
+            <a:ext cx="10911535" cy="310896"/>
+          </a:xfrm>
+          <a:prstGeom prst="rect">
+            <a:avLst/>
+          </a:prstGeom>
+          <a:noFill/>
+          <a:ln/>
+        </p:spPr>
+        <p:txBody>
+          <a:bodyPr wrap="square" lIns="0" tIns="0" rIns="0" bIns="0" rtlCol="0" anchor="t"/>
+          <a:lstStyle/>
+          <a:p>
+            <a:pPr indent="0" marL="0">
+              <a:lnSpc>
+                <a:spcPct val="88000"/>
+              </a:lnSpc>
+              <a:buNone/>
+            </a:pPr>
+            <a:r>
+              <a:rPr lang="en-US" sz="900" b="1" dirty="0">
+                <a:solidFill>
+                  <a:srgbClr val="0D8A76"/>
+                </a:solidFill>
+                <a:latin typeface="Yu Gothic" pitchFamily="34" charset="0"/>
+                <a:ea typeface="Yu Gothic" pitchFamily="34" charset="-122"/>
+                <a:cs typeface="Yu Gothic" pitchFamily="34" charset="-120"/>
+              </a:rPr>
+              <a:t>Site SOP優先　</a:t>
+            </a:r>
+            <a:pPr indent="0" marL="0">
+              <a:lnSpc>
+                <a:spcPct val="88000"/>
+              </a:lnSpc>
+              <a:buNone/>
+            </a:pPr>
+            <a:r>
+              <a:rPr lang="en-US" sz="900" dirty="0">
+                <a:solidFill>
+                  <a:srgbClr val="1B2733"/>
+                </a:solidFill>
+                <a:latin typeface="Yu Gothic" pitchFamily="34" charset="0"/>
+                <a:ea typeface="Yu Gothic" pitchFamily="34" charset="-122"/>
+                <a:cs typeface="Yu Gothic" pitchFamily="34" charset="-120"/>
+              </a:rPr>
+              <a:t>初期消火の実施可否、自衛消防組織での役割、通報の判断者は現場ごとに定められている。</a:t>
+            </a:r>
+            <a:endParaRPr lang="en-US" sz="900" dirty="0"/>
+          </a:p>
+          <a:p>
+            <a:pPr indent="0" marL="0">
+              <a:lnSpc>
+                <a:spcPct val="88000"/>
+              </a:lnSpc>
+              <a:buNone/>
+            </a:pPr>
+            <a:r>
+              <a:rPr lang="en-US" sz="750" i="1" dirty="0">
+                <a:solidFill>
+                  <a:srgbClr val="5F7183"/>
+                </a:solidFill>
+                <a:latin typeface="Calibri" pitchFamily="34" charset="0"/>
+                <a:ea typeface="Calibri" pitchFamily="34" charset="-122"/>
+                <a:cs typeface="Calibri" pitchFamily="34" charset="-120"/>
+              </a:rPr>
+              <a:t>Whether guards fight fires, their role in the fire brigade, and who calls are set per site.</a:t>
+            </a:r>
+            <a:endParaRPr lang="en-US" sz="900" dirty="0"/>
+          </a:p>
+        </p:txBody>
+      </p:sp>
+      <p:sp>
+        <p:nvSpPr>
+          <p:cNvPr id="22" name="Text 19"/>
+          <p:cNvSpPr/>
+          <p:nvPr/>
+        </p:nvSpPr>
+        <p:spPr>
+          <a:xfrm>
+            <a:off x="640080" y="6272784"/>
+            <a:ext cx="9905695" cy="237744"/>
+          </a:xfrm>
+          <a:prstGeom prst="rect">
+            <a:avLst/>
+          </a:prstGeom>
+          <a:noFill/>
+          <a:ln/>
+        </p:spPr>
+        <p:txBody>
+          <a:bodyPr wrap="square" lIns="0" tIns="0" rIns="0" bIns="0" rtlCol="0" anchor="t"/>
+          <a:lstStyle/>
+          <a:p>
+            <a:pPr indent="0" marL="0">
+              <a:buNone/>
+            </a:pPr>
+            <a:r>
+              <a:rPr lang="en-US" sz="750" b="1" dirty="0">
+                <a:solidFill>
+                  <a:srgbClr val="D6E0E9"/>
+                </a:solidFill>
+                <a:latin typeface="Yu Gothic" pitchFamily="34" charset="0"/>
+                <a:ea typeface="Yu Gothic" pitchFamily="34" charset="-122"/>
+                <a:cs typeface="Yu Gothic" pitchFamily="34" charset="-120"/>
+              </a:rPr>
+              <a:t>ソース　</a:t>
+            </a:r>
+            <a:pPr indent="0" marL="0">
+              <a:buNone/>
+            </a:pPr>
+            <a:r>
+              <a:rPr lang="en-US" sz="750" dirty="0">
+                <a:solidFill>
+                  <a:srgbClr val="5F7183"/>
+                </a:solidFill>
+                <a:latin typeface="Yu Gothic" pitchFamily="34" charset="0"/>
+                <a:ea typeface="Yu Gothic" pitchFamily="34" charset="-122"/>
+                <a:cs typeface="Yu Gothic" pitchFamily="34" charset="-120"/>
+              </a:rPr>
+              <a:t>消防法、総務省消防庁、警察庁「警備員教育」</a:t>
+            </a:r>
+            <a:endParaRPr lang="en-US" sz="750" dirty="0"/>
+          </a:p>
+        </p:txBody>
+      </p:sp>
+      <p:sp>
+        <p:nvSpPr>
+          <p:cNvPr id="23" name="Text 20"/>
+          <p:cNvSpPr/>
+          <p:nvPr/>
+        </p:nvSpPr>
+        <p:spPr>
+          <a:xfrm>
+            <a:off x="640080" y="6382512"/>
+            <a:ext cx="8778240" cy="292608"/>
+          </a:xfrm>
+          <a:prstGeom prst="rect">
+            <a:avLst/>
+          </a:prstGeom>
+          <a:noFill/>
+          <a:ln/>
+        </p:spPr>
+        <p:txBody>
+          <a:bodyPr wrap="square" lIns="0" tIns="0" rIns="0" bIns="0" rtlCol="0" anchor="ctr"/>
+          <a:lstStyle/>
+          <a:p>
+            <a:pPr indent="0" marL="0">
+              <a:buNone/>
+            </a:pPr>
+            <a:r>
+              <a:rPr lang="en-US" sz="900" dirty="0">
+                <a:solidFill>
+                  <a:srgbClr val="5F7183"/>
+                </a:solidFill>
+                <a:latin typeface="Yu Gothic" pitchFamily="34" charset="0"/>
+                <a:ea typeface="Yu Gothic" pitchFamily="34" charset="-122"/>
+                <a:cs typeface="Yu Gothic" pitchFamily="34" charset="-120"/>
+              </a:rPr>
+              <a:t>第9時限｜基本教育4 事故の発生時における警察機関への連絡その他応急の措置  </a:t>
+            </a:r>
+            <a:pPr indent="0" marL="0">
+              <a:buNone/>
+            </a:pPr>
+            <a:r>
+              <a:rPr lang="en-US" sz="850" i="1" dirty="0">
+                <a:solidFill>
+                  <a:srgbClr val="D6E0E9"/>
+                </a:solidFill>
+                <a:latin typeface="Calibri" pitchFamily="34" charset="0"/>
+                <a:ea typeface="Calibri" pitchFamily="34" charset="-122"/>
+                <a:cs typeface="Calibri" pitchFamily="34" charset="-120"/>
+              </a:rPr>
+              <a:t>Period 9 | Basic Training 4 — Emergency Reporting and Scene Preservation</a:t>
+            </a:r>
+            <a:endParaRPr lang="en-US" sz="900" dirty="0"/>
+          </a:p>
+        </p:txBody>
+      </p:sp>
+      <p:sp>
+        <p:nvSpPr>
+          <p:cNvPr id="24" name="Text 21"/>
+          <p:cNvSpPr/>
+          <p:nvPr/>
+        </p:nvSpPr>
+        <p:spPr>
+          <a:xfrm>
+            <a:off x="10637215" y="6382512"/>
+            <a:ext cx="914400" cy="292608"/>
+          </a:xfrm>
+          <a:prstGeom prst="rect">
+            <a:avLst/>
+          </a:prstGeom>
+          <a:noFill/>
+          <a:ln/>
+        </p:spPr>
+        <p:txBody>
+          <a:bodyPr wrap="square" lIns="0" tIns="0" rIns="0" bIns="0" rtlCol="0" anchor="ctr"/>
+          <a:lstStyle/>
+          <a:p>
+            <a:pPr algn="r" indent="0" marL="0">
+              <a:buNone/>
+            </a:pPr>
+            <a:r>
+              <a:rPr lang="en-US" sz="1000" dirty="0">
+                <a:solidFill>
+                  <a:srgbClr val="5F7183"/>
+                </a:solidFill>
+                <a:latin typeface="Calibri" pitchFamily="34" charset="0"/>
+                <a:ea typeface="Calibri" pitchFamily="34" charset="-122"/>
+                <a:cs typeface="Calibri" pitchFamily="34" charset="-120"/>
+              </a:rPr>
+              <a:t>10</a:t>
+            </a:r>
+            <a:endParaRPr lang="en-US" sz="1000" dirty="0"/>
+          </a:p>
+        </p:txBody>
+      </p:sp>
+    </p:spTree>
+  </p:cSld>
+  <p:clrMapOvr>
+    <a:masterClrMapping/>
+  </p:clrMapOvr>
+</p:sld>
+</file>
+
 <file path=ppt/slides/slide2.xml><?xml version="1.0" encoding="utf-8"?>
 <p:sld xmlns:a="http://schemas.openxmlformats.org/drawingml/2006/main" xmlns:r="http://schemas.openxmlformats.org/officeDocument/2006/relationships" xmlns:p="http://schemas.openxmlformats.org/presentationml/2006/main">
   <p:cSld name="Slide 2">
@@ -2103,7 +3488,7 @@
                 <a:ea typeface="Calibri" pitchFamily="34" charset="-122"/>
                 <a:cs typeface="Calibri" pitchFamily="34" charset="-120"/>
               </a:rPr>
-              <a:t>　 First aid</a:t>
+              <a:t>    First aid</a:t>
             </a:r>
             <a:endParaRPr lang="en-US" sz="1250" dirty="0"/>
           </a:p>
@@ -2149,7 +3534,7 @@
                 <a:ea typeface="Calibri" pitchFamily="34" charset="-122"/>
                 <a:cs typeface="Calibri" pitchFamily="34" charset="-120"/>
               </a:rPr>
-              <a:t>　 Chest compressions</a:t>
+              <a:t>    Chest compressions</a:t>
             </a:r>
             <a:endParaRPr lang="en-US" sz="1250" dirty="0"/>
           </a:p>
@@ -2195,7 +3580,7 @@
                 <a:ea typeface="Calibri" pitchFamily="34" charset="-122"/>
                 <a:cs typeface="Calibri" pitchFamily="34" charset="-120"/>
               </a:rPr>
-              <a:t>　 Use of an AED</a:t>
+              <a:t>    Use of an AED</a:t>
             </a:r>
             <a:endParaRPr lang="en-US" sz="1250" dirty="0"/>
           </a:p>
@@ -2347,7 +3732,7 @@
                 <a:ea typeface="Calibri" pitchFamily="34" charset="-122"/>
                 <a:cs typeface="Calibri" pitchFamily="34" charset="-120"/>
               </a:rPr>
-              <a:t>　 Emergency calls</a:t>
+              <a:t>    Emergency calls</a:t>
             </a:r>
             <a:endParaRPr lang="en-US" sz="1250" dirty="0"/>
           </a:p>
@@ -2393,7 +3778,7 @@
                 <a:ea typeface="Calibri" pitchFamily="34" charset="-122"/>
                 <a:cs typeface="Calibri" pitchFamily="34" charset="-120"/>
               </a:rPr>
-              <a:t>　 Call practice. Everyone speaks</a:t>
+              <a:t>    Call practice. Everyone speaks</a:t>
             </a:r>
             <a:endParaRPr lang="en-US" sz="1250" dirty="0"/>
           </a:p>
@@ -2439,7 +3824,7 @@
                 <a:ea typeface="Calibri" pitchFamily="34" charset="-122"/>
                 <a:cs typeface="Calibri" pitchFamily="34" charset="-120"/>
               </a:rPr>
-              <a:t>　 Scene preservation</a:t>
+              <a:t>    Scene preservation</a:t>
             </a:r>
             <a:endParaRPr lang="en-US" sz="1250" dirty="0"/>
           </a:p>
@@ -2485,7 +3870,7 @@
                 <a:ea typeface="Calibri" pitchFamily="34" charset="-122"/>
                 <a:cs typeface="Calibri" pitchFamily="34" charset="-120"/>
               </a:rPr>
-              <a:t>　 Internal escalation</a:t>
+              <a:t>    Internal escalation</a:t>
             </a:r>
             <a:endParaRPr lang="en-US" sz="1250" dirty="0"/>
           </a:p>
@@ -3147,7 +4532,7 @@
                 <a:ea typeface="Calibri" pitchFamily="34" charset="-122"/>
                 <a:cs typeface="Calibri" pitchFamily="34" charset="-120"/>
               </a:rPr>
-              <a:t>　Fact: "At 20:15 the B1 east emergency door was about 15 cm open"</a:t>
+              <a:t>  Fact: "At 20:15 the B1 east emergency door was about 15 cm open"</a:t>
             </a:r>
             <a:endParaRPr lang="en-US" sz="950" dirty="0"/>
           </a:p>
@@ -3193,7 +4578,7 @@
                 <a:ea typeface="Calibri" pitchFamily="34" charset="-122"/>
                 <a:cs typeface="Calibri" pitchFamily="34" charset="-120"/>
               </a:rPr>
-              <a:t>　Assessment: "There may be an intruder"</a:t>
+              <a:t>  Assessment: "There may be an intruder"</a:t>
             </a:r>
             <a:endParaRPr lang="en-US" sz="950" dirty="0"/>
           </a:p>
@@ -3239,7 +4624,7 @@
                 <a:ea typeface="Calibri" pitchFamily="34" charset="-122"/>
                 <a:cs typeface="Calibri" pitchFamily="34" charset="-120"/>
               </a:rPr>
-              <a:t>　Wrong: "An intruder came in through the exit." You are asserting what you did not see</a:t>
+              <a:t>  Wrong: "An intruder came in through the exit." You are asserting what you did not see</a:t>
             </a:r>
             <a:endParaRPr lang="en-US" sz="950" dirty="0"/>
           </a:p>
@@ -3285,7 +4670,7 @@
                 <a:ea typeface="Calibri" pitchFamily="34" charset="-122"/>
                 <a:cs typeface="Calibri" pitchFamily="34" charset="-120"/>
               </a:rPr>
-              <a:t>　Fact first. Mark assessment clearly, and place it second</a:t>
+              <a:t>  Fact first. Mark assessment clearly, and place it second</a:t>
             </a:r>
             <a:endParaRPr lang="en-US" sz="950" dirty="0"/>
           </a:p>
@@ -3496,7 +4881,7 @@
                 <a:ea typeface="Calibri" pitchFamily="34" charset="-122"/>
                 <a:cs typeface="Calibri" pitchFamily="34" charset="-120"/>
               </a:rPr>
-              <a:t>　Initial: immediately on becoming aware. It need not be complete</a:t>
+              <a:t>  Initial: immediately on becoming aware. It need not be complete</a:t>
             </a:r>
             <a:endParaRPr lang="en-US" sz="950" dirty="0"/>
           </a:p>
@@ -3542,7 +4927,7 @@
                 <a:ea typeface="Calibri" pitchFamily="34" charset="-122"/>
                 <a:cs typeface="Calibri" pitchFamily="34" charset="-120"/>
               </a:rPr>
-              <a:t>　Updates: each time the situation changes, the change only</a:t>
+              <a:t>  Updates: each time the situation changes, the change only</a:t>
             </a:r>
             <a:endParaRPr lang="en-US" sz="950" dirty="0"/>
           </a:p>
@@ -3588,7 +4973,7 @@
                 <a:ea typeface="Calibri" pitchFamily="34" charset="-122"/>
                 <a:cs typeface="Calibri" pitchFamily="34" charset="-120"/>
               </a:rPr>
-              <a:t>　Report "no change" too. Silence is not read as "all clear"</a:t>
+              <a:t>  Report "no change" too. Silence is not read as "all clear"</a:t>
             </a:r>
             <a:endParaRPr lang="en-US" sz="950" dirty="0"/>
           </a:p>
@@ -3634,7 +5019,7 @@
                 <a:ea typeface="Calibri" pitchFamily="34" charset="-122"/>
                 <a:cs typeface="Calibri" pitchFamily="34" charset="-120"/>
               </a:rPr>
-              <a:t>　Final: after it ends. Sequence, actions taken, handover items</a:t>
+              <a:t>  Final: after it ends. Sequence, actions taken, handover items</a:t>
             </a:r>
             <a:endParaRPr lang="en-US" sz="950" dirty="0"/>
           </a:p>
@@ -3845,7 +5230,7 @@
                 <a:ea typeface="Calibri" pitchFamily="34" charset="-122"/>
                 <a:cs typeface="Calibri" pitchFamily="34" charset="-120"/>
               </a:rPr>
-              <a:t>　What happened, when, and where</a:t>
+              <a:t>  What happened, when, and where</a:t>
             </a:r>
             <a:endParaRPr lang="en-US" sz="950" dirty="0"/>
           </a:p>
@@ -3891,7 +5276,7 @@
                 <a:ea typeface="Calibri" pitchFamily="34" charset="-122"/>
                 <a:cs typeface="Calibri" pitchFamily="34" charset="-120"/>
               </a:rPr>
-              <a:t>　Is it safe now? Are there casualties?</a:t>
+              <a:t>  Is it safe now? Are there casualties?</a:t>
             </a:r>
             <a:endParaRPr lang="en-US" sz="950" dirty="0"/>
           </a:p>
@@ -3937,7 +5322,7 @@
                 <a:ea typeface="Calibri" pitchFamily="34" charset="-122"/>
                 <a:cs typeface="Calibri" pitchFamily="34" charset="-120"/>
               </a:rPr>
-              <a:t>　Where you are, and what you are doing</a:t>
+              <a:t>  Where you are, and what you are doing</a:t>
             </a:r>
             <a:endParaRPr lang="en-US" sz="950" dirty="0"/>
           </a:p>
@@ -3983,7 +5368,7 @@
                 <a:ea typeface="Calibri" pitchFamily="34" charset="-122"/>
                 <a:cs typeface="Calibri" pitchFamily="34" charset="-120"/>
               </a:rPr>
-              <a:t>　What you are asking for: backup, or a decision</a:t>
+              <a:t>  What you are asking for: backup, or a decision</a:t>
             </a:r>
             <a:endParaRPr lang="en-US" sz="950" dirty="0"/>
           </a:p>
@@ -4194,7 +5579,7 @@
                 <a:ea typeface="Calibri" pitchFamily="34" charset="-122"/>
                 <a:cs typeface="Calibri" pitchFamily="34" charset="-120"/>
               </a:rPr>
-              <a:t>　Write on the spot. Accuracy drops as time passes</a:t>
+              <a:t>  Write on the spot. Accuracy drops as time passes</a:t>
             </a:r>
             <a:endParaRPr lang="en-US" sz="950" dirty="0"/>
           </a:p>
@@ -4240,7 +5625,7 @@
                 <a:ea typeface="Calibri" pitchFamily="34" charset="-122"/>
                 <a:cs typeface="Calibri" pitchFamily="34" charset="-120"/>
               </a:rPr>
-              <a:t>　An estimated time is acceptable if you mark it as an estimate</a:t>
+              <a:t>  An estimated time is acceptable if you mark it as an estimate</a:t>
             </a:r>
             <a:endParaRPr lang="en-US" sz="950" dirty="0"/>
           </a:p>
@@ -4286,7 +5671,7 @@
                 <a:ea typeface="Calibri" pitchFamily="34" charset="-122"/>
                 <a:cs typeface="Calibri" pitchFamily="34" charset="-120"/>
               </a:rPr>
-              <a:t>　Record words as spoken. Summarising changes the meaning</a:t>
+              <a:t>  Record words as spoken. Summarising changes the meaning</a:t>
             </a:r>
             <a:endParaRPr lang="en-US" sz="950" dirty="0"/>
           </a:p>
@@ -4332,7 +5717,7 @@
                 <a:ea typeface="Calibri" pitchFamily="34" charset="-122"/>
                 <a:cs typeface="Calibri" pitchFamily="34" charset="-120"/>
               </a:rPr>
-              <a:t>　Write "unknown" where you do not know</a:t>
+              <a:t>  Write "unknown" where you do not know</a:t>
             </a:r>
             <a:endParaRPr lang="en-US" sz="950" dirty="0"/>
           </a:p>
@@ -5064,7 +6449,7 @@
                 <a:ea typeface="Calibri" pitchFamily="34" charset="-122"/>
                 <a:cs typeface="Calibri" pitchFamily="34" charset="-120"/>
               </a:rPr>
-              <a:t>　Open with what has happened</a:t>
+              <a:t>  Open with what has happened</a:t>
             </a:r>
             <a:endParaRPr lang="en-US" sz="950" dirty="0"/>
           </a:p>
@@ -5110,7 +6495,7 @@
                 <a:ea typeface="Calibri" pitchFamily="34" charset="-122"/>
                 <a:cs typeface="Calibri" pitchFamily="34" charset="-120"/>
               </a:rPr>
-              <a:t>　Location: address, landmark, building, floor, zone</a:t>
+              <a:t>  Location: address, landmark, building, floor, zone</a:t>
             </a:r>
             <a:endParaRPr lang="en-US" sz="950" dirty="0"/>
           </a:p>
@@ -5156,7 +6541,7 @@
                 <a:ea typeface="Calibri" pitchFamily="34" charset="-122"/>
                 <a:cs typeface="Calibri" pitchFamily="34" charset="-120"/>
               </a:rPr>
-              <a:t>　The person: appearance, clothing, direction of escape, vehicle and plate</a:t>
+              <a:t>  The person: appearance, clothing, direction of escape, vehicle and plate</a:t>
             </a:r>
             <a:endParaRPr lang="en-US" sz="950" dirty="0"/>
           </a:p>
@@ -5202,7 +6587,7 @@
                 <a:ea typeface="Calibri" pitchFamily="34" charset="-122"/>
                 <a:cs typeface="Calibri" pitchFamily="34" charset="-120"/>
               </a:rPr>
-              <a:t>　Yourself: name, call-back number, where you are</a:t>
+              <a:t>  Yourself: name, call-back number, where you are</a:t>
             </a:r>
             <a:endParaRPr lang="en-US" sz="950" dirty="0"/>
           </a:p>
@@ -5413,7 +6798,7 @@
                 <a:ea typeface="Calibri" pitchFamily="34" charset="-122"/>
                 <a:cs typeface="Calibri" pitchFamily="34" charset="-120"/>
               </a:rPr>
-              <a:t>　Open with the type: fire, or ambulance</a:t>
+              <a:t>  Open with the type: fire, or ambulance</a:t>
             </a:r>
             <a:endParaRPr lang="en-US" sz="950" dirty="0"/>
           </a:p>
@@ -5459,7 +6844,7 @@
                 <a:ea typeface="Calibri" pitchFamily="34" charset="-122"/>
                 <a:cs typeface="Calibri" pitchFamily="34" charset="-120"/>
               </a:rPr>
-              <a:t>　Location: address, landmark, which entrance, which lift</a:t>
+              <a:t>  Location: address, landmark, which entrance, which lift</a:t>
             </a:r>
             <a:endParaRPr lang="en-US" sz="950" dirty="0"/>
           </a:p>
@@ -5505,7 +6890,7 @@
                 <a:ea typeface="Calibri" pitchFamily="34" charset="-122"/>
                 <a:cs typeface="Calibri" pitchFamily="34" charset="-120"/>
               </a:rPr>
-              <a:t>　Condition: symptoms, number of casualties, consciousness and breathing</a:t>
+              <a:t>  Condition: symptoms, number of casualties, consciousness and breathing</a:t>
             </a:r>
             <a:endParaRPr lang="en-US" sz="950" dirty="0"/>
           </a:p>
@@ -5551,7 +6936,7 @@
                 <a:ea typeface="Calibri" pitchFamily="34" charset="-122"/>
                 <a:cs typeface="Calibri" pitchFamily="34" charset="-120"/>
               </a:rPr>
-              <a:t>　Decide who will meet them, at the same time as the call</a:t>
+              <a:t>  Decide who will meet them, at the same time as the call</a:t>
             </a:r>
             <a:endParaRPr lang="en-US" sz="950" dirty="0"/>
           </a:p>
@@ -5762,7 +7147,7 @@
                 <a:ea typeface="Calibri" pitchFamily="34" charset="-122"/>
                 <a:cs typeface="Calibri" pitchFamily="34" charset="-120"/>
               </a:rPr>
-              <a:t>　Do not hang up first. Answer all their questions</a:t>
+              <a:t>  Do not hang up first. Answer all their questions</a:t>
             </a:r>
             <a:endParaRPr lang="en-US" sz="950" dirty="0"/>
           </a:p>
@@ -5808,7 +7193,7 @@
                 <a:ea typeface="Calibri" pitchFamily="34" charset="-122"/>
                 <a:cs typeface="Calibri" pitchFamily="34" charset="-120"/>
               </a:rPr>
-              <a:t>　Do not report a guess as fact. Say "it appears that"</a:t>
+              <a:t>  Do not report a guess as fact. Say "it appears that"</a:t>
             </a:r>
             <a:endParaRPr lang="en-US" sz="950" dirty="0"/>
           </a:p>
@@ -5854,7 +7239,7 @@
                 <a:ea typeface="Calibri" pitchFamily="34" charset="-122"/>
                 <a:cs typeface="Calibri" pitchFamily="34" charset="-120"/>
               </a:rPr>
-              <a:t>　If someone involved does not speak Japanese, say so on the call</a:t>
+              <a:t>  If someone involved does not speak Japanese, say so on the call</a:t>
             </a:r>
             <a:endParaRPr lang="en-US" sz="950" dirty="0"/>
           </a:p>
@@ -5900,7 +7285,7 @@
                 <a:ea typeface="Calibri" pitchFamily="34" charset="-122"/>
                 <a:cs typeface="Calibri" pitchFamily="34" charset="-120"/>
               </a:rPr>
-              <a:t>　Always record that you called, and when</a:t>
+              <a:t>  Always record that you called, and when</a:t>
             </a:r>
             <a:endParaRPr lang="en-US" sz="950" dirty="0"/>
           </a:p>
@@ -6111,7 +7496,7 @@
                 <a:ea typeface="Calibri" pitchFamily="34" charset="-122"/>
                 <a:cs typeface="Calibri" pitchFamily="34" charset="-120"/>
               </a:rPr>
-              <a:t>　Post someone to guide them. Keep the arrival point clear</a:t>
+              <a:t>  Post someone to guide them. Keep the arrival point clear</a:t>
             </a:r>
             <a:endParaRPr lang="en-US" sz="950" dirty="0"/>
           </a:p>
@@ -6157,7 +7542,7 @@
                 <a:ea typeface="Calibri" pitchFamily="34" charset="-122"/>
                 <a:cs typeface="Calibri" pitchFamily="34" charset="-120"/>
               </a:rPr>
-              <a:t>　Secure a lift. Check whether stair guidance is needed</a:t>
+              <a:t>  Secure a lift. Check whether stair guidance is needed</a:t>
             </a:r>
             <a:endParaRPr lang="en-US" sz="950" dirty="0"/>
           </a:p>
@@ -6203,7 +7588,7 @@
                 <a:ea typeface="Calibri" pitchFamily="34" charset="-122"/>
                 <a:cs typeface="Calibri" pitchFamily="34" charset="-120"/>
               </a:rPr>
-              <a:t>　Report internally. This is separate from the emergency call</a:t>
+              <a:t>  Report internally. This is separate from the emergency call</a:t>
             </a:r>
             <a:endParaRPr lang="en-US" sz="950" dirty="0"/>
           </a:p>
@@ -6249,7 +7634,7 @@
                 <a:ea typeface="Calibri" pitchFamily="34" charset="-122"/>
                 <a:cs typeface="Calibri" pitchFamily="34" charset="-120"/>
               </a:rPr>
-              <a:t>　Preserve the scene. Change nothing except where life is at stake</a:t>
+              <a:t>  Preserve the scene. Change nothing except where life is at stake</a:t>
             </a:r>
             <a:endParaRPr lang="en-US" sz="950" dirty="0"/>
           </a:p>
@@ -7225,7 +8610,7 @@
                 <a:ea typeface="Calibri" pitchFamily="34" charset="-122"/>
                 <a:cs typeface="Calibri" pitchFamily="34" charset="-120"/>
               </a:rPr>
-              <a:t>The location is ◯◯.</a:t>
+              <a:t>The location is [place].</a:t>
             </a:r>
             <a:endParaRPr lang="en-US" sz="1150" dirty="0"/>
           </a:p>
@@ -7797,7 +9182,7 @@
                 <a:ea typeface="Calibri" pitchFamily="34" charset="-122"/>
                 <a:cs typeface="Calibri" pitchFamily="34" charset="-120"/>
               </a:rPr>
-              <a:t>I am ◯◯, a security guard.</a:t>
+              <a:t>I am [name], a security guard.</a:t>
             </a:r>
             <a:endParaRPr lang="en-US" sz="1150" dirty="0"/>
           </a:p>
@@ -8683,7 +10068,7 @@
                 <a:ea typeface="Calibri" pitchFamily="34" charset="-122"/>
                 <a:cs typeface="Calibri" pitchFamily="34" charset="-120"/>
               </a:rPr>
-              <a:t>　Life comes first. You may alter it for rescue or first aid</a:t>
+              <a:t>  Life comes first. You may alter it for rescue or first aid</a:t>
             </a:r>
             <a:endParaRPr lang="en-US" sz="950" dirty="0"/>
           </a:p>
@@ -8729,7 +10114,7 @@
                 <a:ea typeface="Calibri" pitchFamily="34" charset="-122"/>
                 <a:cs typeface="Calibri" pitchFamily="34" charset="-120"/>
               </a:rPr>
-              <a:t>　For any other reason, change nothing. Tidying destroys evidence</a:t>
+              <a:t>  For any other reason, change nothing. Tidying destroys evidence</a:t>
             </a:r>
             <a:endParaRPr lang="en-US" sz="950" dirty="0"/>
           </a:p>
@@ -8775,7 +10160,7 @@
                 <a:ea typeface="Calibri" pitchFamily="34" charset="-122"/>
                 <a:cs typeface="Calibri" pitchFamily="34" charset="-120"/>
               </a:rPr>
-              <a:t>　If you changed it, record what, from where, to where, by whom, when</a:t>
+              <a:t>  If you changed it, record what, from where, to where, by whom, when</a:t>
             </a:r>
             <a:endParaRPr lang="en-US" sz="950" dirty="0"/>
           </a:p>
@@ -8821,7 +10206,7 @@
                 <a:ea typeface="Calibri" pitchFamily="34" charset="-122"/>
                 <a:cs typeface="Calibri" pitchFamily="34" charset="-120"/>
               </a:rPr>
-              <a:t>　Set the cordon wider than you think is needed</a:t>
+              <a:t>  Set the cordon wider than you think is needed</a:t>
             </a:r>
             <a:endParaRPr lang="en-US" sz="950" dirty="0"/>
           </a:p>
@@ -9032,7 +10417,7 @@
                 <a:ea typeface="Calibri" pitchFamily="34" charset="-122"/>
                 <a:cs typeface="Calibri" pitchFamily="34" charset="-120"/>
               </a:rPr>
-              <a:t>　Someone will always start tidying, with good intentions</a:t>
+              <a:t>  Someone will always start tidying, with good intentions</a:t>
             </a:r>
             <a:endParaRPr lang="en-US" sz="950" dirty="0"/>
           </a:p>
@@ -9078,7 +10463,7 @@
                 <a:ea typeface="Calibri" pitchFamily="34" charset="-122"/>
                 <a:cs typeface="Calibri" pitchFamily="34" charset="-120"/>
               </a:rPr>
-              <a:t>　Say "please leave it as it is", and give the reason</a:t>
+              <a:t>  Say "please leave it as it is", and give the reason</a:t>
             </a:r>
             <a:endParaRPr lang="en-US" sz="950" dirty="0"/>
           </a:p>
@@ -9124,7 +10509,7 @@
                 <a:ea typeface="Calibri" pitchFamily="34" charset="-122"/>
                 <a:cs typeface="Calibri" pitchFamily="34" charset="-120"/>
               </a:rPr>
-              <a:t>　Do not phrase it as blame. The intention was good</a:t>
+              <a:t>  Do not phrase it as blame. The intention was good</a:t>
             </a:r>
             <a:endParaRPr lang="en-US" sz="950" dirty="0"/>
           </a:p>
@@ -9170,7 +10555,7 @@
                 <a:ea typeface="Calibri" pitchFamily="34" charset="-122"/>
                 <a:cs typeface="Calibri" pitchFamily="34" charset="-120"/>
               </a:rPr>
-              <a:t>　If you could not stop it, record what was moved</a:t>
+              <a:t>  If you could not stop it, record what was moved</a:t>
             </a:r>
             <a:endParaRPr lang="en-US" sz="950" dirty="0"/>
           </a:p>
@@ -9381,7 +10766,7 @@
                 <a:ea typeface="Calibri" pitchFamily="34" charset="-122"/>
                 <a:cs typeface="Calibri" pitchFamily="34" charset="-120"/>
               </a:rPr>
-              <a:t>　First: the security supervisor, immediately. No conclusion needed</a:t>
+              <a:t>  First: the security supervisor, immediately. No conclusion needed</a:t>
             </a:r>
             <a:endParaRPr lang="en-US" sz="950" dirty="0"/>
           </a:p>
@@ -9427,7 +10812,7 @@
                 <a:ea typeface="Calibri" pitchFamily="34" charset="-122"/>
                 <a:cs typeface="Calibri" pitchFamily="34" charset="-120"/>
               </a:rPr>
-              <a:t>　Second: facilities and general affairs, if it will continue</a:t>
+              <a:t>  Second: facilities and general affairs, if it will continue</a:t>
             </a:r>
             <a:endParaRPr lang="en-US" sz="950" dirty="0"/>
           </a:p>
@@ -9473,7 +10858,7 @@
                 <a:ea typeface="Calibri" pitchFamily="34" charset="-122"/>
                 <a:cs typeface="Calibri" pitchFamily="34" charset="-120"/>
               </a:rPr>
-              <a:t>　Third: executives, communications, legal, where injury, media or data loss is involved</a:t>
+              <a:t>  Third: executives, communications, legal, where injury, media or data loss is involved</a:t>
             </a:r>
             <a:endParaRPr lang="en-US" sz="950" dirty="0"/>
           </a:p>
@@ -9519,7 +10904,7 @@
                 <a:ea typeface="Calibri" pitchFamily="34" charset="-122"/>
                 <a:cs typeface="Calibri" pitchFamily="34" charset="-120"/>
               </a:rPr>
-              <a:t>　If you are unsure, escalate</a:t>
+              <a:t>  If you are unsure, escalate</a:t>
             </a:r>
             <a:endParaRPr lang="en-US" sz="950" dirty="0"/>
           </a:p>
@@ -9730,7 +11115,7 @@
                 <a:ea typeface="Calibri" pitchFamily="34" charset="-122"/>
                 <a:cs typeface="Calibri" pitchFamily="34" charset="-120"/>
               </a:rPr>
-              <a:t>　The emergency call and the internal report are separate</a:t>
+              <a:t>  The emergency call and the internal report are separate</a:t>
             </a:r>
             <a:endParaRPr lang="en-US" sz="950" dirty="0"/>
           </a:p>
@@ -9776,7 +11161,7 @@
                 <a:ea typeface="Calibri" pitchFamily="34" charset="-122"/>
                 <a:cs typeface="Calibri" pitchFamily="34" charset="-120"/>
               </a:rPr>
-              <a:t>　Delay neither. Where life is at risk, the emergency call comes first</a:t>
+              <a:t>  Delay neither. Where life is at risk, the emergency call comes first</a:t>
             </a:r>
             <a:endParaRPr lang="en-US" sz="950" dirty="0"/>
           </a:p>
@@ -9822,7 +11207,7 @@
                 <a:ea typeface="Calibri" pitchFamily="34" charset="-122"/>
                 <a:cs typeface="Calibri" pitchFamily="34" charset="-120"/>
               </a:rPr>
-              <a:t>　Do not delay an emergency call to wait for internal approval</a:t>
+              <a:t>  Do not delay an emergency call to wait for internal approval</a:t>
             </a:r>
             <a:endParaRPr lang="en-US" sz="950" dirty="0"/>
           </a:p>
@@ -9868,7 +11253,7 @@
                 <a:ea typeface="Calibri" pitchFamily="34" charset="-122"/>
                 <a:cs typeface="Calibri" pitchFamily="34" charset="-120"/>
               </a:rPr>
-              <a:t>　Always include the fact that you called in the internal report</a:t>
+              <a:t>  Always include the fact that you called in the internal report</a:t>
             </a:r>
             <a:endParaRPr lang="en-US" sz="950" dirty="0"/>
           </a:p>
@@ -11466,7 +12851,7 @@
                 <a:ea typeface="Yu Gothic" pitchFamily="34" charset="-122"/>
                 <a:cs typeface="Yu Gothic" pitchFamily="34" charset="-120"/>
               </a:rPr>
-              <a:t>TTX 9-B　執務室から煙が出ている</a:t>
+              <a:t>TTX 9-A 講評 ― 模範解答</a:t>
             </a:r>
             <a:endParaRPr lang="en-US" sz="2300" dirty="0"/>
           </a:p>
@@ -11486,7 +12871,7 @@
                 <a:ea typeface="Calibri" pitchFamily="34" charset="-122"/>
                 <a:cs typeface="Calibri" pitchFamily="34" charset="-120"/>
               </a:rPr>
-              <a:t>TTX 9-B — Smoke Coming from an Office</a:t>
+              <a:t>TTX 9-A Debrief — Model Answer</a:t>
             </a:r>
             <a:endParaRPr lang="en-US" sz="2300" dirty="0"/>
           </a:p>
@@ -11547,6 +12932,1213 @@
                 <a:ea typeface="Calibri" pitchFamily="34" charset="-122"/>
                 <a:cs typeface="Calibri" pitchFamily="34" charset="-120"/>
               </a:rPr>
+              <a:t>DEBRIEF</a:t>
+            </a:r>
+            <a:endParaRPr lang="en-US" sz="1100" dirty="0"/>
+          </a:p>
+        </p:txBody>
+      </p:sp>
+      <p:sp>
+        <p:nvSpPr>
+          <p:cNvPr id="6" name="Text 3"/>
+          <p:cNvSpPr/>
+          <p:nvPr/>
+        </p:nvSpPr>
+        <p:spPr>
+          <a:xfrm>
+            <a:off x="640080" y="1188720"/>
+            <a:ext cx="10911535" cy="530352"/>
+          </a:xfrm>
+          <a:prstGeom prst="rect">
+            <a:avLst/>
+          </a:prstGeom>
+          <a:noFill/>
+          <a:ln/>
+        </p:spPr>
+        <p:txBody>
+          <a:bodyPr wrap="square" lIns="0" tIns="0" rIns="0" bIns="0" rtlCol="0" anchor="t"/>
+          <a:lstStyle/>
+          <a:p>
+            <a:pPr indent="0" marL="0">
+              <a:lnSpc>
+                <a:spcPct val="90000"/>
+              </a:lnSpc>
+              <a:buNone/>
+            </a:pPr>
+            <a:r>
+              <a:rPr lang="en-US" sz="1000" b="1" dirty="0">
+                <a:solidFill>
+                  <a:srgbClr val="0D8A76"/>
+                </a:solidFill>
+                <a:latin typeface="Yu Gothic" pitchFamily="34" charset="0"/>
+                <a:ea typeface="Yu Gothic" pitchFamily="34" charset="-122"/>
+                <a:cs typeface="Yu Gothic" pitchFamily="34" charset="-120"/>
+              </a:rPr>
+              <a:t>狙い　</a:t>
+            </a:r>
+            <a:pPr indent="0" marL="0">
+              <a:lnSpc>
+                <a:spcPct val="90000"/>
+              </a:lnSpc>
+              <a:buNone/>
+            </a:pPr>
+            <a:r>
+              <a:rPr lang="en-US" sz="1150" b="1" dirty="0">
+                <a:solidFill>
+                  <a:srgbClr val="093259"/>
+                </a:solidFill>
+                <a:latin typeface="Yu Gothic" pitchFamily="34" charset="0"/>
+                <a:ea typeface="Yu Gothic" pitchFamily="34" charset="-122"/>
+                <a:cs typeface="Yu Gothic" pitchFamily="34" charset="-120"/>
+              </a:rPr>
+              <a:t>救護のための身元確認と、所持品検査は目的が異なる。ここが最大の論点。</a:t>
+            </a:r>
+            <a:endParaRPr lang="en-US" sz="1000" dirty="0"/>
+          </a:p>
+          <a:p>
+            <a:pPr indent="0" marL="0">
+              <a:lnSpc>
+                <a:spcPct val="90000"/>
+              </a:lnSpc>
+              <a:buNone/>
+            </a:pPr>
+            <a:r>
+              <a:rPr lang="en-US" sz="850" i="1" dirty="0">
+                <a:solidFill>
+                  <a:srgbClr val="5F7183"/>
+                </a:solidFill>
+                <a:latin typeface="Calibri" pitchFamily="34" charset="0"/>
+                <a:ea typeface="Calibri" pitchFamily="34" charset="-122"/>
+                <a:cs typeface="Calibri" pitchFamily="34" charset="-120"/>
+              </a:rPr>
+              <a:t>Identifying someone for their care, and searching their belongings, have different purposes. This is the crux.</a:t>
+            </a:r>
+            <a:endParaRPr lang="en-US" sz="1000" dirty="0"/>
+          </a:p>
+        </p:txBody>
+      </p:sp>
+      <p:sp>
+        <p:nvSpPr>
+          <p:cNvPr id="7" name="Shape 4"/>
+          <p:cNvSpPr/>
+          <p:nvPr/>
+        </p:nvSpPr>
+        <p:spPr>
+          <a:xfrm>
+            <a:off x="640080" y="1773936"/>
+            <a:ext cx="5327752" cy="1091184"/>
+          </a:xfrm>
+          <a:prstGeom prst="roundRect">
+            <a:avLst>
+              <a:gd name="adj" fmla="val 3352"/>
+            </a:avLst>
+          </a:prstGeom>
+          <a:solidFill>
+            <a:srgbClr val="E4F4F0"/>
+          </a:solidFill>
+          <a:ln/>
+        </p:spPr>
+      </p:sp>
+      <p:sp>
+        <p:nvSpPr>
+          <p:cNvPr id="8" name="Text 5"/>
+          <p:cNvSpPr/>
+          <p:nvPr/>
+        </p:nvSpPr>
+        <p:spPr>
+          <a:xfrm>
+            <a:off x="877824" y="1865376"/>
+            <a:ext cx="4852264" cy="908304"/>
+          </a:xfrm>
+          <a:prstGeom prst="rect">
+            <a:avLst/>
+          </a:prstGeom>
+          <a:noFill/>
+          <a:ln/>
+        </p:spPr>
+        <p:txBody>
+          <a:bodyPr wrap="square" lIns="0" tIns="0" rIns="0" bIns="0" rtlCol="0" anchor="t"/>
+          <a:lstStyle/>
+          <a:p>
+            <a:pPr indent="0" marL="0">
+              <a:lnSpc>
+                <a:spcPct val="90000"/>
+              </a:lnSpc>
+              <a:buNone/>
+            </a:pPr>
+            <a:r>
+              <a:rPr lang="en-US" sz="1050" b="1" dirty="0">
+                <a:solidFill>
+                  <a:srgbClr val="0D8A76"/>
+                </a:solidFill>
+                <a:latin typeface="Yu Gothic" pitchFamily="34" charset="0"/>
+                <a:ea typeface="Yu Gothic" pitchFamily="34" charset="-122"/>
+                <a:cs typeface="Yu Gothic" pitchFamily="34" charset="-120"/>
+              </a:rPr>
+              <a:t>最初の30秒</a:t>
+            </a:r>
+            <a:endParaRPr lang="en-US" sz="1050" dirty="0"/>
+          </a:p>
+          <a:p>
+            <a:pPr indent="0" marL="0">
+              <a:lnSpc>
+                <a:spcPct val="90000"/>
+              </a:lnSpc>
+              <a:buNone/>
+            </a:pPr>
+            <a:r>
+              <a:rPr lang="en-US" sz="1050" b="1" dirty="0">
+                <a:solidFill>
+                  <a:srgbClr val="1B2733"/>
+                </a:solidFill>
+                <a:latin typeface="Yu Gothic" pitchFamily="34" charset="0"/>
+                <a:ea typeface="Yu Gothic" pitchFamily="34" charset="-122"/>
+                <a:cs typeface="Yu Gothic" pitchFamily="34" charset="-120"/>
+              </a:rPr>
+              <a:t>①周囲の安全 ②反応の確認 ③人を指名して119番と応援を依頼。</a:t>
+            </a:r>
+            <a:endParaRPr lang="en-US" sz="1050" dirty="0"/>
+          </a:p>
+          <a:p>
+            <a:pPr indent="0" marL="0">
+              <a:lnSpc>
+                <a:spcPct val="90000"/>
+              </a:lnSpc>
+              <a:buNone/>
+            </a:pPr>
+            <a:r>
+              <a:rPr lang="en-US" sz="800" i="1" dirty="0">
+                <a:solidFill>
+                  <a:srgbClr val="5F7183"/>
+                </a:solidFill>
+                <a:latin typeface="Calibri" pitchFamily="34" charset="0"/>
+                <a:ea typeface="Calibri" pitchFamily="34" charset="-122"/>
+                <a:cs typeface="Calibri" pitchFamily="34" charset="-120"/>
+              </a:rPr>
+              <a:t>1) Make the area safe 2) check responsiveness 3) name a person to call and to fetch help.</a:t>
+            </a:r>
+            <a:endParaRPr lang="en-US" sz="1050" dirty="0"/>
+          </a:p>
+        </p:txBody>
+      </p:sp>
+      <p:sp>
+        <p:nvSpPr>
+          <p:cNvPr id="9" name="Shape 6"/>
+          <p:cNvSpPr/>
+          <p:nvPr/>
+        </p:nvSpPr>
+        <p:spPr>
+          <a:xfrm>
+            <a:off x="6223864" y="1773936"/>
+            <a:ext cx="5327752" cy="1091184"/>
+          </a:xfrm>
+          <a:prstGeom prst="roundRect">
+            <a:avLst>
+              <a:gd name="adj" fmla="val 3352"/>
+            </a:avLst>
+          </a:prstGeom>
+          <a:solidFill>
+            <a:srgbClr val="EFF4F8"/>
+          </a:solidFill>
+          <a:ln/>
+        </p:spPr>
+      </p:sp>
+      <p:sp>
+        <p:nvSpPr>
+          <p:cNvPr id="10" name="Text 7"/>
+          <p:cNvSpPr/>
+          <p:nvPr/>
+        </p:nvSpPr>
+        <p:spPr>
+          <a:xfrm>
+            <a:off x="6461608" y="1865376"/>
+            <a:ext cx="4852264" cy="908304"/>
+          </a:xfrm>
+          <a:prstGeom prst="rect">
+            <a:avLst/>
+          </a:prstGeom>
+          <a:noFill/>
+          <a:ln/>
+        </p:spPr>
+        <p:txBody>
+          <a:bodyPr wrap="square" lIns="0" tIns="0" rIns="0" bIns="0" rtlCol="0" anchor="t"/>
+          <a:lstStyle/>
+          <a:p>
+            <a:pPr indent="0" marL="0">
+              <a:lnSpc>
+                <a:spcPct val="90000"/>
+              </a:lnSpc>
+              <a:buNone/>
+            </a:pPr>
+            <a:r>
+              <a:rPr lang="en-US" sz="1050" b="1" dirty="0">
+                <a:solidFill>
+                  <a:srgbClr val="093259"/>
+                </a:solidFill>
+                <a:latin typeface="Yu Gothic" pitchFamily="34" charset="0"/>
+                <a:ea typeface="Yu Gothic" pitchFamily="34" charset="-122"/>
+                <a:cs typeface="Yu Gothic" pitchFamily="34" charset="-120"/>
+              </a:rPr>
+              <a:t>「誰か」では動かない</a:t>
+            </a:r>
+            <a:endParaRPr lang="en-US" sz="1050" dirty="0"/>
+          </a:p>
+          <a:p>
+            <a:pPr indent="0" marL="0">
+              <a:lnSpc>
+                <a:spcPct val="90000"/>
+              </a:lnSpc>
+              <a:buNone/>
+            </a:pPr>
+            <a:r>
+              <a:rPr lang="en-US" sz="1050" b="1" dirty="0">
+                <a:solidFill>
+                  <a:srgbClr val="1B2733"/>
+                </a:solidFill>
+                <a:latin typeface="Yu Gothic" pitchFamily="34" charset="0"/>
+                <a:ea typeface="Yu Gothic" pitchFamily="34" charset="-122"/>
+                <a:cs typeface="Yu Gothic" pitchFamily="34" charset="-120"/>
+              </a:rPr>
+              <a:t>「そこの青い服の方、119番をお願いします」と指名する。</a:t>
+            </a:r>
+            <a:endParaRPr lang="en-US" sz="1050" dirty="0"/>
+          </a:p>
+          <a:p>
+            <a:pPr indent="0" marL="0">
+              <a:lnSpc>
+                <a:spcPct val="90000"/>
+              </a:lnSpc>
+              <a:buNone/>
+            </a:pPr>
+            <a:r>
+              <a:rPr lang="en-US" sz="800" i="1" dirty="0">
+                <a:solidFill>
+                  <a:srgbClr val="5F7183"/>
+                </a:solidFill>
+                <a:latin typeface="Calibri" pitchFamily="34" charset="0"/>
+                <a:ea typeface="Calibri" pitchFamily="34" charset="-122"/>
+                <a:cs typeface="Calibri" pitchFamily="34" charset="-120"/>
+              </a:rPr>
+              <a:t>Point and name: "You, in the blue shirt — call an ambulance."</a:t>
+            </a:r>
+            <a:endParaRPr lang="en-US" sz="1050" dirty="0"/>
+          </a:p>
+        </p:txBody>
+      </p:sp>
+      <p:sp>
+        <p:nvSpPr>
+          <p:cNvPr id="11" name="Shape 8"/>
+          <p:cNvSpPr/>
+          <p:nvPr/>
+        </p:nvSpPr>
+        <p:spPr>
+          <a:xfrm>
+            <a:off x="640080" y="2993136"/>
+            <a:ext cx="5327752" cy="1091184"/>
+          </a:xfrm>
+          <a:prstGeom prst="roundRect">
+            <a:avLst>
+              <a:gd name="adj" fmla="val 3352"/>
+            </a:avLst>
+          </a:prstGeom>
+          <a:solidFill>
+            <a:srgbClr val="EFF4F8"/>
+          </a:solidFill>
+          <a:ln/>
+        </p:spPr>
+      </p:sp>
+      <p:sp>
+        <p:nvSpPr>
+          <p:cNvPr id="12" name="Text 9"/>
+          <p:cNvSpPr/>
+          <p:nvPr/>
+        </p:nvSpPr>
+        <p:spPr>
+          <a:xfrm>
+            <a:off x="877824" y="3084576"/>
+            <a:ext cx="4852264" cy="908304"/>
+          </a:xfrm>
+          <a:prstGeom prst="rect">
+            <a:avLst/>
+          </a:prstGeom>
+          <a:noFill/>
+          <a:ln/>
+        </p:spPr>
+        <p:txBody>
+          <a:bodyPr wrap="square" lIns="0" tIns="0" rIns="0" bIns="0" rtlCol="0" anchor="t"/>
+          <a:lstStyle/>
+          <a:p>
+            <a:pPr indent="0" marL="0">
+              <a:lnSpc>
+                <a:spcPct val="90000"/>
+              </a:lnSpc>
+              <a:buNone/>
+            </a:pPr>
+            <a:r>
+              <a:rPr lang="en-US" sz="1050" b="1" dirty="0">
+                <a:solidFill>
+                  <a:srgbClr val="093259"/>
+                </a:solidFill>
+                <a:latin typeface="Yu Gothic" pitchFamily="34" charset="0"/>
+                <a:ea typeface="Yu Gothic" pitchFamily="34" charset="-122"/>
+                <a:cs typeface="Yu Gothic" pitchFamily="34" charset="-120"/>
+              </a:rPr>
+              <a:t>110か119か</a:t>
+            </a:r>
+            <a:endParaRPr lang="en-US" sz="1050" dirty="0"/>
+          </a:p>
+          <a:p>
+            <a:pPr indent="0" marL="0">
+              <a:lnSpc>
+                <a:spcPct val="90000"/>
+              </a:lnSpc>
+              <a:buNone/>
+            </a:pPr>
+            <a:r>
+              <a:rPr lang="en-US" sz="1050" b="1" dirty="0">
+                <a:solidFill>
+                  <a:srgbClr val="1B2733"/>
+                </a:solidFill>
+                <a:latin typeface="Yu Gothic" pitchFamily="34" charset="0"/>
+                <a:ea typeface="Yu Gothic" pitchFamily="34" charset="-122"/>
+                <a:cs typeface="Yu Gothic" pitchFamily="34" charset="-120"/>
+              </a:rPr>
+              <a:t>まず119。人命が先。事件性の判断は後からできる。</a:t>
+            </a:r>
+            <a:endParaRPr lang="en-US" sz="1050" dirty="0"/>
+          </a:p>
+          <a:p>
+            <a:pPr indent="0" marL="0">
+              <a:lnSpc>
+                <a:spcPct val="90000"/>
+              </a:lnSpc>
+              <a:buNone/>
+            </a:pPr>
+            <a:r>
+              <a:rPr lang="en-US" sz="800" i="1" dirty="0">
+                <a:solidFill>
+                  <a:srgbClr val="5F7183"/>
+                </a:solidFill>
+                <a:latin typeface="Calibri" pitchFamily="34" charset="0"/>
+                <a:ea typeface="Calibri" pitchFamily="34" charset="-122"/>
+                <a:cs typeface="Calibri" pitchFamily="34" charset="-120"/>
+              </a:rPr>
+              <a:t>Ambulance first. Life comes first; the criminal question can wait.</a:t>
+            </a:r>
+            <a:endParaRPr lang="en-US" sz="1050" dirty="0"/>
+          </a:p>
+        </p:txBody>
+      </p:sp>
+      <p:sp>
+        <p:nvSpPr>
+          <p:cNvPr id="13" name="Shape 10"/>
+          <p:cNvSpPr/>
+          <p:nvPr/>
+        </p:nvSpPr>
+        <p:spPr>
+          <a:xfrm>
+            <a:off x="6223864" y="2993136"/>
+            <a:ext cx="5327752" cy="1091184"/>
+          </a:xfrm>
+          <a:prstGeom prst="roundRect">
+            <a:avLst>
+              <a:gd name="adj" fmla="val 3352"/>
+            </a:avLst>
+          </a:prstGeom>
+          <a:solidFill>
+            <a:srgbClr val="E4F4F0"/>
+          </a:solidFill>
+          <a:ln/>
+        </p:spPr>
+      </p:sp>
+      <p:sp>
+        <p:nvSpPr>
+          <p:cNvPr id="14" name="Text 11"/>
+          <p:cNvSpPr/>
+          <p:nvPr/>
+        </p:nvSpPr>
+        <p:spPr>
+          <a:xfrm>
+            <a:off x="6461608" y="3084576"/>
+            <a:ext cx="4852264" cy="908304"/>
+          </a:xfrm>
+          <a:prstGeom prst="rect">
+            <a:avLst/>
+          </a:prstGeom>
+          <a:noFill/>
+          <a:ln/>
+        </p:spPr>
+        <p:txBody>
+          <a:bodyPr wrap="square" lIns="0" tIns="0" rIns="0" bIns="0" rtlCol="0" anchor="t"/>
+          <a:lstStyle/>
+          <a:p>
+            <a:pPr indent="0" marL="0">
+              <a:lnSpc>
+                <a:spcPct val="90000"/>
+              </a:lnSpc>
+              <a:buNone/>
+            </a:pPr>
+            <a:r>
+              <a:rPr lang="en-US" sz="1050" b="1" dirty="0">
+                <a:solidFill>
+                  <a:srgbClr val="0D8A76"/>
+                </a:solidFill>
+                <a:latin typeface="Yu Gothic" pitchFamily="34" charset="0"/>
+                <a:ea typeface="Yu Gothic" pitchFamily="34" charset="-122"/>
+                <a:cs typeface="Yu Gothic" pitchFamily="34" charset="-120"/>
+              </a:rPr>
+              <a:t>所持品を見てよいか</a:t>
+            </a:r>
+            <a:endParaRPr lang="en-US" sz="1050" dirty="0"/>
+          </a:p>
+          <a:p>
+            <a:pPr indent="0" marL="0">
+              <a:lnSpc>
+                <a:spcPct val="90000"/>
+              </a:lnSpc>
+              <a:buNone/>
+            </a:pPr>
+            <a:r>
+              <a:rPr lang="en-US" sz="1050" b="1" dirty="0">
+                <a:solidFill>
+                  <a:srgbClr val="1B2733"/>
+                </a:solidFill>
+                <a:latin typeface="Yu Gothic" pitchFamily="34" charset="0"/>
+                <a:ea typeface="Yu Gothic" pitchFamily="34" charset="-122"/>
+                <a:cs typeface="Yu Gothic" pitchFamily="34" charset="-120"/>
+              </a:rPr>
+              <a:t>単独で開けない。救急隊・警察の面前で行うのが安全。</a:t>
+            </a:r>
+            <a:endParaRPr lang="en-US" sz="1050" dirty="0"/>
+          </a:p>
+          <a:p>
+            <a:pPr indent="0" marL="0">
+              <a:lnSpc>
+                <a:spcPct val="90000"/>
+              </a:lnSpc>
+              <a:buNone/>
+            </a:pPr>
+            <a:r>
+              <a:rPr lang="en-US" sz="800" i="1" dirty="0">
+                <a:solidFill>
+                  <a:srgbClr val="5F7183"/>
+                </a:solidFill>
+                <a:latin typeface="Calibri" pitchFamily="34" charset="0"/>
+                <a:ea typeface="Calibri" pitchFamily="34" charset="-122"/>
+                <a:cs typeface="Calibri" pitchFamily="34" charset="-120"/>
+              </a:rPr>
+              <a:t>Not alone. Do it in the presence of the ambulance crew or police.</a:t>
+            </a:r>
+            <a:endParaRPr lang="en-US" sz="1050" dirty="0"/>
+          </a:p>
+        </p:txBody>
+      </p:sp>
+      <p:sp>
+        <p:nvSpPr>
+          <p:cNvPr id="15" name="Shape 12"/>
+          <p:cNvSpPr/>
+          <p:nvPr/>
+        </p:nvSpPr>
+        <p:spPr>
+          <a:xfrm>
+            <a:off x="640080" y="4212336"/>
+            <a:ext cx="5327752" cy="1091184"/>
+          </a:xfrm>
+          <a:prstGeom prst="roundRect">
+            <a:avLst>
+              <a:gd name="adj" fmla="val 3352"/>
+            </a:avLst>
+          </a:prstGeom>
+          <a:solidFill>
+            <a:srgbClr val="EFF4F8"/>
+          </a:solidFill>
+          <a:ln/>
+        </p:spPr>
+      </p:sp>
+      <p:sp>
+        <p:nvSpPr>
+          <p:cNvPr id="16" name="Text 13"/>
+          <p:cNvSpPr/>
+          <p:nvPr/>
+        </p:nvSpPr>
+        <p:spPr>
+          <a:xfrm>
+            <a:off x="877824" y="4303776"/>
+            <a:ext cx="4852264" cy="908304"/>
+          </a:xfrm>
+          <a:prstGeom prst="rect">
+            <a:avLst/>
+          </a:prstGeom>
+          <a:noFill/>
+          <a:ln/>
+        </p:spPr>
+        <p:txBody>
+          <a:bodyPr wrap="square" lIns="0" tIns="0" rIns="0" bIns="0" rtlCol="0" anchor="t"/>
+          <a:lstStyle/>
+          <a:p>
+            <a:pPr indent="0" marL="0">
+              <a:lnSpc>
+                <a:spcPct val="90000"/>
+              </a:lnSpc>
+              <a:buNone/>
+            </a:pPr>
+            <a:r>
+              <a:rPr lang="en-US" sz="1050" b="1" dirty="0">
+                <a:solidFill>
+                  <a:srgbClr val="093259"/>
+                </a:solidFill>
+                <a:latin typeface="Yu Gothic" pitchFamily="34" charset="0"/>
+                <a:ea typeface="Yu Gothic" pitchFamily="34" charset="-122"/>
+                <a:cs typeface="Yu Gothic" pitchFamily="34" charset="-120"/>
+              </a:rPr>
+              <a:t>実施した場合</a:t>
+            </a:r>
+            <a:endParaRPr lang="en-US" sz="1050" dirty="0"/>
+          </a:p>
+          <a:p>
+            <a:pPr indent="0" marL="0">
+              <a:lnSpc>
+                <a:spcPct val="90000"/>
+              </a:lnSpc>
+              <a:buNone/>
+            </a:pPr>
+            <a:r>
+              <a:rPr lang="en-US" sz="1050" b="1" dirty="0">
+                <a:solidFill>
+                  <a:srgbClr val="1B2733"/>
+                </a:solidFill>
+                <a:latin typeface="Yu Gothic" pitchFamily="34" charset="0"/>
+                <a:ea typeface="Yu Gothic" pitchFamily="34" charset="-122"/>
+                <a:cs typeface="Yu Gothic" pitchFamily="34" charset="-120"/>
+              </a:rPr>
+              <a:t>誰の面前で、何を、何時に確認したかを必ず記録する。</a:t>
+            </a:r>
+            <a:endParaRPr lang="en-US" sz="1050" dirty="0"/>
+          </a:p>
+          <a:p>
+            <a:pPr indent="0" marL="0">
+              <a:lnSpc>
+                <a:spcPct val="90000"/>
+              </a:lnSpc>
+              <a:buNone/>
+            </a:pPr>
+            <a:r>
+              <a:rPr lang="en-US" sz="800" i="1" dirty="0">
+                <a:solidFill>
+                  <a:srgbClr val="5F7183"/>
+                </a:solidFill>
+                <a:latin typeface="Calibri" pitchFamily="34" charset="0"/>
+                <a:ea typeface="Calibri" pitchFamily="34" charset="-122"/>
+                <a:cs typeface="Calibri" pitchFamily="34" charset="-120"/>
+              </a:rPr>
+              <a:t>Record in whose presence, what, and at what time.</a:t>
+            </a:r>
+            <a:endParaRPr lang="en-US" sz="1050" dirty="0"/>
+          </a:p>
+        </p:txBody>
+      </p:sp>
+      <p:sp>
+        <p:nvSpPr>
+          <p:cNvPr id="17" name="Shape 14"/>
+          <p:cNvSpPr/>
+          <p:nvPr/>
+        </p:nvSpPr>
+        <p:spPr>
+          <a:xfrm>
+            <a:off x="6223864" y="4212336"/>
+            <a:ext cx="5327752" cy="1091184"/>
+          </a:xfrm>
+          <a:prstGeom prst="roundRect">
+            <a:avLst>
+              <a:gd name="adj" fmla="val 3352"/>
+            </a:avLst>
+          </a:prstGeom>
+          <a:solidFill>
+            <a:srgbClr val="EFF4F8"/>
+          </a:solidFill>
+          <a:ln/>
+        </p:spPr>
+      </p:sp>
+      <p:sp>
+        <p:nvSpPr>
+          <p:cNvPr id="18" name="Text 15"/>
+          <p:cNvSpPr/>
+          <p:nvPr/>
+        </p:nvSpPr>
+        <p:spPr>
+          <a:xfrm>
+            <a:off x="6461608" y="4303776"/>
+            <a:ext cx="4852264" cy="908304"/>
+          </a:xfrm>
+          <a:prstGeom prst="rect">
+            <a:avLst/>
+          </a:prstGeom>
+          <a:noFill/>
+          <a:ln/>
+        </p:spPr>
+        <p:txBody>
+          <a:bodyPr wrap="square" lIns="0" tIns="0" rIns="0" bIns="0" rtlCol="0" anchor="t"/>
+          <a:lstStyle/>
+          <a:p>
+            <a:pPr indent="0" marL="0">
+              <a:lnSpc>
+                <a:spcPct val="90000"/>
+              </a:lnSpc>
+              <a:buNone/>
+            </a:pPr>
+            <a:r>
+              <a:rPr lang="en-US" sz="1050" b="1" dirty="0">
+                <a:solidFill>
+                  <a:srgbClr val="093259"/>
+                </a:solidFill>
+                <a:latin typeface="Yu Gothic" pitchFamily="34" charset="0"/>
+                <a:ea typeface="Yu Gothic" pitchFamily="34" charset="-122"/>
+                <a:cs typeface="Yu Gothic" pitchFamily="34" charset="-120"/>
+              </a:rPr>
+              <a:t>日本語が通じない</a:t>
+            </a:r>
+            <a:endParaRPr lang="en-US" sz="1050" dirty="0"/>
+          </a:p>
+          <a:p>
+            <a:pPr indent="0" marL="0">
+              <a:lnSpc>
+                <a:spcPct val="90000"/>
+              </a:lnSpc>
+              <a:buNone/>
+            </a:pPr>
+            <a:r>
+              <a:rPr lang="en-US" sz="1050" b="1" dirty="0">
+                <a:solidFill>
+                  <a:srgbClr val="1B2733"/>
+                </a:solidFill>
+                <a:latin typeface="Yu Gothic" pitchFamily="34" charset="0"/>
+                <a:ea typeface="Yu Gothic" pitchFamily="34" charset="-122"/>
+                <a:cs typeface="Yu Gothic" pitchFamily="34" charset="-120"/>
+              </a:rPr>
+              <a:t>119番通報時にその旨を伝える。通訳対応につながる。</a:t>
+            </a:r>
+            <a:endParaRPr lang="en-US" sz="1050" dirty="0"/>
+          </a:p>
+          <a:p>
+            <a:pPr indent="0" marL="0">
+              <a:lnSpc>
+                <a:spcPct val="90000"/>
+              </a:lnSpc>
+              <a:buNone/>
+            </a:pPr>
+            <a:r>
+              <a:rPr lang="en-US" sz="800" i="1" dirty="0">
+                <a:solidFill>
+                  <a:srgbClr val="5F7183"/>
+                </a:solidFill>
+                <a:latin typeface="Calibri" pitchFamily="34" charset="0"/>
+                <a:ea typeface="Calibri" pitchFamily="34" charset="-122"/>
+                <a:cs typeface="Calibri" pitchFamily="34" charset="-120"/>
+              </a:rPr>
+              <a:t>Say so when you call. It brings in interpretation support.</a:t>
+            </a:r>
+            <a:endParaRPr lang="en-US" sz="1050" dirty="0"/>
+          </a:p>
+        </p:txBody>
+      </p:sp>
+      <p:sp>
+        <p:nvSpPr>
+          <p:cNvPr id="19" name="Shape 16"/>
+          <p:cNvSpPr/>
+          <p:nvPr/>
+        </p:nvSpPr>
+        <p:spPr>
+          <a:xfrm>
+            <a:off x="640080" y="5358384"/>
+            <a:ext cx="10911535" cy="493776"/>
+          </a:xfrm>
+          <a:prstGeom prst="roundRect">
+            <a:avLst>
+              <a:gd name="adj" fmla="val 7407"/>
+            </a:avLst>
+          </a:prstGeom>
+          <a:solidFill>
+            <a:srgbClr val="093259"/>
+          </a:solidFill>
+          <a:ln/>
+        </p:spPr>
+      </p:sp>
+      <p:sp>
+        <p:nvSpPr>
+          <p:cNvPr id="20" name="Text 17"/>
+          <p:cNvSpPr/>
+          <p:nvPr/>
+        </p:nvSpPr>
+        <p:spPr>
+          <a:xfrm>
+            <a:off x="877824" y="5404104"/>
+            <a:ext cx="10436047" cy="402336"/>
+          </a:xfrm>
+          <a:prstGeom prst="rect">
+            <a:avLst/>
+          </a:prstGeom>
+          <a:noFill/>
+          <a:ln/>
+        </p:spPr>
+        <p:txBody>
+          <a:bodyPr wrap="square" lIns="0" tIns="0" rIns="0" bIns="0" rtlCol="0" anchor="ctr"/>
+          <a:lstStyle/>
+          <a:p>
+            <a:pPr indent="0" marL="0">
+              <a:lnSpc>
+                <a:spcPct val="86000"/>
+              </a:lnSpc>
+              <a:buNone/>
+            </a:pPr>
+            <a:r>
+              <a:rPr lang="en-US" sz="950" b="1" dirty="0">
+                <a:solidFill>
+                  <a:srgbClr val="12B198"/>
+                </a:solidFill>
+                <a:latin typeface="Yu Gothic" pitchFamily="34" charset="0"/>
+                <a:ea typeface="Yu Gothic" pitchFamily="34" charset="-122"/>
+                <a:cs typeface="Yu Gothic" pitchFamily="34" charset="-120"/>
+              </a:rPr>
+              <a:t>割れる論点　</a:t>
+            </a:r>
+            <a:pPr indent="0" marL="0">
+              <a:lnSpc>
+                <a:spcPct val="86000"/>
+              </a:lnSpc>
+              <a:buNone/>
+            </a:pPr>
+            <a:r>
+              <a:rPr lang="en-US" sz="1100" b="1" dirty="0">
+                <a:solidFill>
+                  <a:srgbClr val="FFFFFF"/>
+                </a:solidFill>
+                <a:latin typeface="Yu Gothic" pitchFamily="34" charset="0"/>
+                <a:ea typeface="Yu Gothic" pitchFamily="34" charset="-122"/>
+                <a:cs typeface="Yu Gothic" pitchFamily="34" charset="-120"/>
+              </a:rPr>
+              <a:t>所持品を見てよいか。「見てよい」派には根拠を、「見ない」派には救急隊への答え方を問う。</a:t>
+            </a:r>
+            <a:endParaRPr lang="en-US" sz="950" dirty="0"/>
+          </a:p>
+          <a:p>
+            <a:pPr indent="0" marL="0">
+              <a:lnSpc>
+                <a:spcPct val="86000"/>
+              </a:lnSpc>
+              <a:buNone/>
+            </a:pPr>
+            <a:r>
+              <a:rPr lang="en-US" sz="800" i="1" dirty="0">
+                <a:solidFill>
+                  <a:srgbClr val="9FD8CD"/>
+                </a:solidFill>
+                <a:latin typeface="Calibri" pitchFamily="34" charset="0"/>
+                <a:ea typeface="Calibri" pitchFamily="34" charset="-122"/>
+                <a:cs typeface="Calibri" pitchFamily="34" charset="-120"/>
+              </a:rPr>
+              <a:t>May you search? Ask the "yes" group for their basis, and the "no" group what they tell the ambulance crew.</a:t>
+            </a:r>
+            <a:endParaRPr lang="en-US" sz="950" dirty="0"/>
+          </a:p>
+        </p:txBody>
+      </p:sp>
+      <p:sp>
+        <p:nvSpPr>
+          <p:cNvPr id="21" name="Text 18"/>
+          <p:cNvSpPr/>
+          <p:nvPr/>
+        </p:nvSpPr>
+        <p:spPr>
+          <a:xfrm>
+            <a:off x="640080" y="5907024"/>
+            <a:ext cx="10911535" cy="310896"/>
+          </a:xfrm>
+          <a:prstGeom prst="rect">
+            <a:avLst/>
+          </a:prstGeom>
+          <a:noFill/>
+          <a:ln/>
+        </p:spPr>
+        <p:txBody>
+          <a:bodyPr wrap="square" lIns="0" tIns="0" rIns="0" bIns="0" rtlCol="0" anchor="t"/>
+          <a:lstStyle/>
+          <a:p>
+            <a:pPr indent="0" marL="0">
+              <a:lnSpc>
+                <a:spcPct val="88000"/>
+              </a:lnSpc>
+              <a:buNone/>
+            </a:pPr>
+            <a:r>
+              <a:rPr lang="en-US" sz="900" b="1" dirty="0">
+                <a:solidFill>
+                  <a:srgbClr val="0D8A76"/>
+                </a:solidFill>
+                <a:latin typeface="Yu Gothic" pitchFamily="34" charset="0"/>
+                <a:ea typeface="Yu Gothic" pitchFamily="34" charset="-122"/>
+                <a:cs typeface="Yu Gothic" pitchFamily="34" charset="-120"/>
+              </a:rPr>
+              <a:t>Site SOP優先　</a:t>
+            </a:r>
+            <a:pPr indent="0" marL="0">
+              <a:lnSpc>
+                <a:spcPct val="88000"/>
+              </a:lnSpc>
+              <a:buNone/>
+            </a:pPr>
+            <a:r>
+              <a:rPr lang="en-US" sz="900" dirty="0">
+                <a:solidFill>
+                  <a:srgbClr val="1B2733"/>
+                </a:solidFill>
+                <a:latin typeface="Yu Gothic" pitchFamily="34" charset="0"/>
+                <a:ea typeface="Yu Gothic" pitchFamily="34" charset="-122"/>
+                <a:cs typeface="Yu Gothic" pitchFamily="34" charset="-120"/>
+              </a:rPr>
+              <a:t>救急要請の判断者、身元不明者の扱い、クライアントへの通知は現場ごとに異なる。</a:t>
+            </a:r>
+            <a:endParaRPr lang="en-US" sz="900" dirty="0"/>
+          </a:p>
+          <a:p>
+            <a:pPr indent="0" marL="0">
+              <a:lnSpc>
+                <a:spcPct val="88000"/>
+              </a:lnSpc>
+              <a:buNone/>
+            </a:pPr>
+            <a:r>
+              <a:rPr lang="en-US" sz="750" i="1" dirty="0">
+                <a:solidFill>
+                  <a:srgbClr val="5F7183"/>
+                </a:solidFill>
+                <a:latin typeface="Calibri" pitchFamily="34" charset="0"/>
+                <a:ea typeface="Calibri" pitchFamily="34" charset="-122"/>
+                <a:cs typeface="Calibri" pitchFamily="34" charset="-120"/>
+              </a:rPr>
+              <a:t>Who calls the ambulance, how unidentified persons are handled, and client notification differ by site.</a:t>
+            </a:r>
+            <a:endParaRPr lang="en-US" sz="900" dirty="0"/>
+          </a:p>
+        </p:txBody>
+      </p:sp>
+      <p:sp>
+        <p:nvSpPr>
+          <p:cNvPr id="22" name="Text 19"/>
+          <p:cNvSpPr/>
+          <p:nvPr/>
+        </p:nvSpPr>
+        <p:spPr>
+          <a:xfrm>
+            <a:off x="640080" y="6272784"/>
+            <a:ext cx="9905695" cy="237744"/>
+          </a:xfrm>
+          <a:prstGeom prst="rect">
+            <a:avLst/>
+          </a:prstGeom>
+          <a:noFill/>
+          <a:ln/>
+        </p:spPr>
+        <p:txBody>
+          <a:bodyPr wrap="square" lIns="0" tIns="0" rIns="0" bIns="0" rtlCol="0" anchor="t"/>
+          <a:lstStyle/>
+          <a:p>
+            <a:pPr indent="0" marL="0">
+              <a:buNone/>
+            </a:pPr>
+            <a:r>
+              <a:rPr lang="en-US" sz="750" b="1" dirty="0">
+                <a:solidFill>
+                  <a:srgbClr val="D6E0E9"/>
+                </a:solidFill>
+                <a:latin typeface="Yu Gothic" pitchFamily="34" charset="0"/>
+                <a:ea typeface="Yu Gothic" pitchFamily="34" charset="-122"/>
+                <a:cs typeface="Yu Gothic" pitchFamily="34" charset="-120"/>
+              </a:rPr>
+              <a:t>ソース　</a:t>
+            </a:r>
+            <a:pPr indent="0" marL="0">
+              <a:buNone/>
+            </a:pPr>
+            <a:r>
+              <a:rPr lang="en-US" sz="750" dirty="0">
+                <a:solidFill>
+                  <a:srgbClr val="5F7183"/>
+                </a:solidFill>
+                <a:latin typeface="Yu Gothic" pitchFamily="34" charset="0"/>
+                <a:ea typeface="Yu Gothic" pitchFamily="34" charset="-122"/>
+                <a:cs typeface="Yu Gothic" pitchFamily="34" charset="-120"/>
+              </a:rPr>
+              <a:t>消防法、刑法、警察庁「警備員教育」</a:t>
+            </a:r>
+            <a:endParaRPr lang="en-US" sz="750" dirty="0"/>
+          </a:p>
+        </p:txBody>
+      </p:sp>
+      <p:sp>
+        <p:nvSpPr>
+          <p:cNvPr id="23" name="Text 20"/>
+          <p:cNvSpPr/>
+          <p:nvPr/>
+        </p:nvSpPr>
+        <p:spPr>
+          <a:xfrm>
+            <a:off x="640080" y="6382512"/>
+            <a:ext cx="8778240" cy="292608"/>
+          </a:xfrm>
+          <a:prstGeom prst="rect">
+            <a:avLst/>
+          </a:prstGeom>
+          <a:noFill/>
+          <a:ln/>
+        </p:spPr>
+        <p:txBody>
+          <a:bodyPr wrap="square" lIns="0" tIns="0" rIns="0" bIns="0" rtlCol="0" anchor="ctr"/>
+          <a:lstStyle/>
+          <a:p>
+            <a:pPr indent="0" marL="0">
+              <a:buNone/>
+            </a:pPr>
+            <a:r>
+              <a:rPr lang="en-US" sz="900" dirty="0">
+                <a:solidFill>
+                  <a:srgbClr val="5F7183"/>
+                </a:solidFill>
+                <a:latin typeface="Yu Gothic" pitchFamily="34" charset="0"/>
+                <a:ea typeface="Yu Gothic" pitchFamily="34" charset="-122"/>
+                <a:cs typeface="Yu Gothic" pitchFamily="34" charset="-120"/>
+              </a:rPr>
+              <a:t>第9時限｜基本教育4 事故の発生時における警察機関への連絡その他応急の措置  </a:t>
+            </a:r>
+            <a:pPr indent="0" marL="0">
+              <a:buNone/>
+            </a:pPr>
+            <a:r>
+              <a:rPr lang="en-US" sz="850" i="1" dirty="0">
+                <a:solidFill>
+                  <a:srgbClr val="D6E0E9"/>
+                </a:solidFill>
+                <a:latin typeface="Calibri" pitchFamily="34" charset="0"/>
+                <a:ea typeface="Calibri" pitchFamily="34" charset="-122"/>
+                <a:cs typeface="Calibri" pitchFamily="34" charset="-120"/>
+              </a:rPr>
+              <a:t>Period 9 | Basic Training 4 — Emergency Reporting and Scene Preservation</a:t>
+            </a:r>
+            <a:endParaRPr lang="en-US" sz="900" dirty="0"/>
+          </a:p>
+        </p:txBody>
+      </p:sp>
+      <p:sp>
+        <p:nvSpPr>
+          <p:cNvPr id="24" name="Text 21"/>
+          <p:cNvSpPr/>
+          <p:nvPr/>
+        </p:nvSpPr>
+        <p:spPr>
+          <a:xfrm>
+            <a:off x="10637215" y="6382512"/>
+            <a:ext cx="914400" cy="292608"/>
+          </a:xfrm>
+          <a:prstGeom prst="rect">
+            <a:avLst/>
+          </a:prstGeom>
+          <a:noFill/>
+          <a:ln/>
+        </p:spPr>
+        <p:txBody>
+          <a:bodyPr wrap="square" lIns="0" tIns="0" rIns="0" bIns="0" rtlCol="0" anchor="ctr"/>
+          <a:lstStyle/>
+          <a:p>
+            <a:pPr algn="r" indent="0" marL="0">
+              <a:buNone/>
+            </a:pPr>
+            <a:r>
+              <a:rPr lang="en-US" sz="1000" dirty="0">
+                <a:solidFill>
+                  <a:srgbClr val="5F7183"/>
+                </a:solidFill>
+                <a:latin typeface="Calibri" pitchFamily="34" charset="0"/>
+                <a:ea typeface="Calibri" pitchFamily="34" charset="-122"/>
+                <a:cs typeface="Calibri" pitchFamily="34" charset="-120"/>
+              </a:rPr>
+              <a:t>8</a:t>
+            </a:r>
+            <a:endParaRPr lang="en-US" sz="1000" dirty="0"/>
+          </a:p>
+        </p:txBody>
+      </p:sp>
+    </p:spTree>
+  </p:cSld>
+  <p:clrMapOvr>
+    <a:masterClrMapping/>
+  </p:clrMapOvr>
+</p:sld>
+</file>
+
+<file path=ppt/slides/slide9.xml><?xml version="1.0" encoding="utf-8"?>
+<p:sld xmlns:a="http://schemas.openxmlformats.org/drawingml/2006/main" xmlns:r="http://schemas.openxmlformats.org/officeDocument/2006/relationships" xmlns:p="http://schemas.openxmlformats.org/presentationml/2006/main">
+  <p:cSld name="Slide 9">
+    <p:bg>
+      <p:bgPr>
+        <a:solidFill>
+          <a:srgbClr val="FFFFFF"/>
+        </a:solidFill>
+      </p:bgPr>
+    </p:bg>
+    <p:spTree>
+      <p:nvGrpSpPr>
+        <p:cNvPr id="1" name=""/>
+        <p:cNvGrpSpPr/>
+        <p:nvPr/>
+      </p:nvGrpSpPr>
+      <p:grpSpPr>
+        <a:xfrm>
+          <a:off x="0" y="0"/>
+          <a:ext cx="0" cy="0"/>
+          <a:chOff x="0" y="0"/>
+          <a:chExt cx="0" cy="0"/>
+        </a:xfrm>
+      </p:grpSpPr>
+      <p:pic>
+        <p:nvPicPr>
+          <p:cNvPr id="2" name="Image 0" descr="/home/user/Training-/assets/logo.png">    </p:cNvPr>
+          <p:cNvPicPr>
+            <a:picLocks noChangeAspect="1"/>
+          </p:cNvPicPr>
+          <p:nvPr/>
+        </p:nvPicPr>
+        <p:blipFill>
+          <a:blip r:embed="rId1"/>
+          <a:stretch>
+            <a:fillRect/>
+          </a:stretch>
+        </p:blipFill>
+        <p:spPr>
+          <a:xfrm>
+            <a:off x="10765231" y="332912"/>
+            <a:ext cx="786384" cy="742353"/>
+          </a:xfrm>
+          <a:prstGeom prst="rect">
+            <a:avLst/>
+          </a:prstGeom>
+        </p:spPr>
+      </p:pic>
+      <p:sp>
+        <p:nvSpPr>
+          <p:cNvPr id="3" name="Text 0"/>
+          <p:cNvSpPr/>
+          <p:nvPr/>
+        </p:nvSpPr>
+        <p:spPr>
+          <a:xfrm>
+            <a:off x="640080" y="384048"/>
+            <a:ext cx="8982151" cy="768096"/>
+          </a:xfrm>
+          <a:prstGeom prst="rect">
+            <a:avLst/>
+          </a:prstGeom>
+          <a:noFill/>
+          <a:ln/>
+        </p:spPr>
+        <p:txBody>
+          <a:bodyPr wrap="square" lIns="0" tIns="0" rIns="0" bIns="0" rtlCol="0" anchor="t"/>
+          <a:lstStyle/>
+          <a:p>
+            <a:pPr indent="0" marL="0">
+              <a:lnSpc>
+                <a:spcPct val="94000"/>
+              </a:lnSpc>
+              <a:buNone/>
+            </a:pPr>
+            <a:r>
+              <a:rPr lang="en-US" sz="2300" b="1" dirty="0">
+                <a:solidFill>
+                  <a:srgbClr val="093259"/>
+                </a:solidFill>
+                <a:latin typeface="Yu Gothic" pitchFamily="34" charset="0"/>
+                <a:ea typeface="Yu Gothic" pitchFamily="34" charset="-122"/>
+                <a:cs typeface="Yu Gothic" pitchFamily="34" charset="-120"/>
+              </a:rPr>
+              <a:t>TTX 9-B　執務室から煙が出ている</a:t>
+            </a:r>
+            <a:endParaRPr lang="en-US" sz="2300" dirty="0"/>
+          </a:p>
+          <a:p>
+            <a:pPr indent="0" marL="0">
+              <a:lnSpc>
+                <a:spcPct val="94000"/>
+              </a:lnSpc>
+              <a:buNone/>
+            </a:pPr>
+            <a:r>
+              <a:rPr lang="en-US" sz="1100" i="1" dirty="0">
+                <a:solidFill>
+                  <a:srgbClr val="12B198"/>
+                </a:solidFill>
+                <a:latin typeface="Calibri" pitchFamily="34" charset="0"/>
+                <a:ea typeface="Calibri" pitchFamily="34" charset="-122"/>
+                <a:cs typeface="Calibri" pitchFamily="34" charset="-120"/>
+              </a:rPr>
+              <a:t>TTX 9-B — Smoke Coming from an Office</a:t>
+            </a:r>
+            <a:endParaRPr lang="en-US" sz="2300" dirty="0"/>
+          </a:p>
+        </p:txBody>
+      </p:sp>
+      <p:sp>
+        <p:nvSpPr>
+          <p:cNvPr id="4" name="Shape 1"/>
+          <p:cNvSpPr/>
+          <p:nvPr/>
+        </p:nvSpPr>
+        <p:spPr>
+          <a:xfrm>
+            <a:off x="9686239" y="438912"/>
+            <a:ext cx="932688" cy="310896"/>
+          </a:xfrm>
+          <a:prstGeom prst="roundRect">
+            <a:avLst>
+              <a:gd name="adj" fmla="val 14706"/>
+            </a:avLst>
+          </a:prstGeom>
+          <a:solidFill>
+            <a:srgbClr val="093259"/>
+          </a:solidFill>
+          <a:ln/>
+        </p:spPr>
+      </p:sp>
+      <p:sp>
+        <p:nvSpPr>
+          <p:cNvPr id="5" name="Text 2"/>
+          <p:cNvSpPr/>
+          <p:nvPr/>
+        </p:nvSpPr>
+        <p:spPr>
+          <a:xfrm>
+            <a:off x="9686239" y="438912"/>
+            <a:ext cx="932688" cy="310896"/>
+          </a:xfrm>
+          <a:prstGeom prst="rect">
+            <a:avLst/>
+          </a:prstGeom>
+          <a:noFill/>
+          <a:ln/>
+        </p:spPr>
+        <p:txBody>
+          <a:bodyPr wrap="square" lIns="0" tIns="0" rIns="0" bIns="0" rtlCol="0" anchor="ctr"/>
+          <a:lstStyle/>
+          <a:p>
+            <a:pPr algn="ctr" indent="0" marL="0">
+              <a:buNone/>
+            </a:pPr>
+            <a:r>
+              <a:rPr lang="en-US" sz="1100" b="1" dirty="0">
+                <a:solidFill>
+                  <a:srgbClr val="FFFFFF"/>
+                </a:solidFill>
+                <a:latin typeface="Calibri" pitchFamily="34" charset="0"/>
+                <a:ea typeface="Calibri" pitchFamily="34" charset="-122"/>
+                <a:cs typeface="Calibri" pitchFamily="34" charset="-120"/>
+              </a:rPr>
               <a:t>CASE 9-B</a:t>
             </a:r>
             <a:endParaRPr lang="en-US" sz="1100" dirty="0"/>
@@ -12644,7 +15236,7 @@
                 <a:ea typeface="Calibri" pitchFamily="34" charset="-122"/>
                 <a:cs typeface="Calibri" pitchFamily="34" charset="-120"/>
               </a:rPr>
-              <a:t>8</a:t>
+              <a:t>9</a:t>
             </a:r>
             <a:endParaRPr lang="en-US" sz="1000" dirty="0"/>
           </a:p>

--- a/decks/05_9限_通報と現場保存.pptx
+++ b/decks/05_9限_通報と現場保存.pptx
@@ -2047,7 +2047,7 @@
                 <a:ea typeface="Yu Gothic" pitchFamily="34" charset="-122"/>
                 <a:cs typeface="Yu Gothic" pitchFamily="34" charset="-120"/>
               </a:rPr>
-              <a:t>TTX 9-B 講評 ― 模範解答</a:t>
+              <a:t>TTX 9-B 模範解答</a:t>
             </a:r>
             <a:endParaRPr lang="en-US" sz="2300" dirty="0"/>
           </a:p>
@@ -2067,7 +2067,7 @@
                 <a:ea typeface="Calibri" pitchFamily="34" charset="-122"/>
                 <a:cs typeface="Calibri" pitchFamily="34" charset="-120"/>
               </a:rPr>
-              <a:t>TTX 9-B Debrief — Model Answer</a:t>
+              <a:t>TTX 9-B — Model Answers</a:t>
             </a:r>
             <a:endParaRPr lang="en-US" sz="2300" dirty="0"/>
           </a:p>
@@ -2136,97 +2136,18 @@
       </p:sp>
       <p:sp>
         <p:nvSpPr>
-          <p:cNvPr id="6" name="Text 3"/>
+          <p:cNvPr id="6" name="Shape 3"/>
           <p:cNvSpPr/>
           <p:nvPr/>
         </p:nvSpPr>
         <p:spPr>
           <a:xfrm>
             <a:off x="640080" y="1188720"/>
-            <a:ext cx="10911535" cy="530352"/>
-          </a:xfrm>
-          <a:prstGeom prst="rect">
-            <a:avLst/>
-          </a:prstGeom>
-          <a:noFill/>
-          <a:ln/>
-        </p:spPr>
-        <p:txBody>
-          <a:bodyPr wrap="square" lIns="0" tIns="0" rIns="0" bIns="0" rtlCol="0" anchor="t"/>
-          <a:lstStyle/>
-          <a:p>
-            <a:pPr indent="0" marL="0">
-              <a:lnSpc>
-                <a:spcPct val="90000"/>
-              </a:lnSpc>
-              <a:buNone/>
-            </a:pPr>
-            <a:r>
-              <a:rPr lang="en-US" sz="1000" b="1" dirty="0">
-                <a:solidFill>
-                  <a:srgbClr val="0D8A76"/>
-                </a:solidFill>
-                <a:latin typeface="Yu Gothic" pitchFamily="34" charset="0"/>
-                <a:ea typeface="Yu Gothic" pitchFamily="34" charset="-122"/>
-                <a:cs typeface="Yu Gothic" pitchFamily="34" charset="-120"/>
-              </a:rPr>
-              <a:t>狙い　</a:t>
-            </a:r>
-            <a:pPr indent="0" marL="0">
-              <a:lnSpc>
-                <a:spcPct val="90000"/>
-              </a:lnSpc>
-              <a:buNone/>
-            </a:pPr>
-            <a:r>
-              <a:rPr lang="en-US" sz="1150" b="1" dirty="0">
-                <a:solidFill>
-                  <a:srgbClr val="093259"/>
-                </a:solidFill>
-                <a:latin typeface="Yu Gothic" pitchFamily="34" charset="0"/>
-                <a:ea typeface="Yu Gothic" pitchFamily="34" charset="-122"/>
-                <a:cs typeface="Yu Gothic" pitchFamily="34" charset="-120"/>
-              </a:rPr>
-              <a:t>1名でできることには限界がある。何を諦めるかが答え。</a:t>
-            </a:r>
-            <a:endParaRPr lang="en-US" sz="1000" dirty="0"/>
-          </a:p>
-          <a:p>
-            <a:pPr indent="0" marL="0">
-              <a:lnSpc>
-                <a:spcPct val="90000"/>
-              </a:lnSpc>
-              <a:buNone/>
-            </a:pPr>
-            <a:r>
-              <a:rPr lang="en-US" sz="850" i="1" dirty="0">
-                <a:solidFill>
-                  <a:srgbClr val="5F7183"/>
-                </a:solidFill>
-                <a:latin typeface="Calibri" pitchFamily="34" charset="0"/>
-                <a:ea typeface="Calibri" pitchFamily="34" charset="-122"/>
-                <a:cs typeface="Calibri" pitchFamily="34" charset="-120"/>
-              </a:rPr>
-              <a:t>One person can only do so much. What you give up is the answer.</a:t>
-            </a:r>
-            <a:endParaRPr lang="en-US" sz="1000" dirty="0"/>
-          </a:p>
-        </p:txBody>
-      </p:sp>
-      <p:sp>
-        <p:nvSpPr>
-          <p:cNvPr id="7" name="Shape 4"/>
-          <p:cNvSpPr/>
-          <p:nvPr/>
-        </p:nvSpPr>
-        <p:spPr>
-          <a:xfrm>
-            <a:off x="640080" y="1773936"/>
-            <a:ext cx="5327752" cy="1091184"/>
+            <a:ext cx="10911535" cy="825246"/>
           </a:xfrm>
           <a:prstGeom prst="roundRect">
             <a:avLst>
-              <a:gd name="adj" fmla="val 3352"/>
+              <a:gd name="adj" fmla="val 4432"/>
             </a:avLst>
           </a:prstGeom>
           <a:solidFill>
@@ -2237,53 +2158,112 @@
       </p:sp>
       <p:sp>
         <p:nvSpPr>
+          <p:cNvPr id="7" name="Shape 4"/>
+          <p:cNvSpPr/>
+          <p:nvPr/>
+        </p:nvSpPr>
+        <p:spPr>
+          <a:xfrm>
+            <a:off x="841248" y="1427607"/>
+            <a:ext cx="347472" cy="347472"/>
+          </a:xfrm>
+          <a:prstGeom prst="ellipse">
+            <a:avLst/>
+          </a:prstGeom>
+          <a:solidFill>
+            <a:srgbClr val="12B198"/>
+          </a:solidFill>
+          <a:ln/>
+        </p:spPr>
+      </p:sp>
+      <p:sp>
+        <p:nvSpPr>
           <p:cNvPr id="8" name="Text 5"/>
           <p:cNvSpPr/>
           <p:nvPr/>
         </p:nvSpPr>
         <p:spPr>
           <a:xfrm>
-            <a:off x="877824" y="1865376"/>
-            <a:ext cx="4852264" cy="908304"/>
-          </a:xfrm>
-          <a:prstGeom prst="rect">
-            <a:avLst/>
-          </a:prstGeom>
-          <a:noFill/>
-          <a:ln/>
-        </p:spPr>
-        <p:txBody>
-          <a:bodyPr wrap="square" lIns="0" tIns="0" rIns="0" bIns="0" rtlCol="0" anchor="t"/>
-          <a:lstStyle/>
-          <a:p>
-            <a:pPr indent="0" marL="0">
-              <a:lnSpc>
-                <a:spcPct val="90000"/>
-              </a:lnSpc>
-              <a:buNone/>
-            </a:pPr>
-            <a:r>
-              <a:rPr lang="en-US" sz="1050" b="1" dirty="0">
-                <a:solidFill>
-                  <a:srgbClr val="0D8A76"/>
-                </a:solidFill>
-                <a:latin typeface="Yu Gothic" pitchFamily="34" charset="0"/>
-                <a:ea typeface="Yu Gothic" pitchFamily="34" charset="-122"/>
-                <a:cs typeface="Yu Gothic" pitchFamily="34" charset="-120"/>
-              </a:rPr>
-              <a:t>扉を開けるか</a:t>
-            </a:r>
-            <a:endParaRPr lang="en-US" sz="1050" dirty="0"/>
-          </a:p>
-          <a:p>
-            <a:pPr indent="0" marL="0">
-              <a:lnSpc>
-                <a:spcPct val="90000"/>
-              </a:lnSpc>
-              <a:buNone/>
-            </a:pPr>
-            <a:r>
-              <a:rPr lang="en-US" sz="1050" b="1" dirty="0">
+            <a:off x="841248" y="1427607"/>
+            <a:ext cx="347472" cy="347472"/>
+          </a:xfrm>
+          <a:prstGeom prst="rect">
+            <a:avLst/>
+          </a:prstGeom>
+          <a:noFill/>
+          <a:ln/>
+        </p:spPr>
+        <p:txBody>
+          <a:bodyPr wrap="square" lIns="0" tIns="0" rIns="0" bIns="0" rtlCol="0" anchor="ctr"/>
+          <a:lstStyle/>
+          <a:p>
+            <a:pPr algn="ctr" indent="0" marL="0">
+              <a:buNone/>
+            </a:pPr>
+            <a:r>
+              <a:rPr lang="en-US" sz="1100" b="1" dirty="0">
+                <a:solidFill>
+                  <a:srgbClr val="FFFFFF"/>
+                </a:solidFill>
+                <a:latin typeface="Calibri" pitchFamily="34" charset="0"/>
+                <a:ea typeface="Calibri" pitchFamily="34" charset="-122"/>
+                <a:cs typeface="Calibri" pitchFamily="34" charset="-120"/>
+              </a:rPr>
+              <a:t>1</a:t>
+            </a:r>
+            <a:endParaRPr lang="en-US" sz="1100" dirty="0"/>
+          </a:p>
+        </p:txBody>
+      </p:sp>
+      <p:sp>
+        <p:nvSpPr>
+          <p:cNvPr id="9" name="Text 6"/>
+          <p:cNvSpPr/>
+          <p:nvPr/>
+        </p:nvSpPr>
+        <p:spPr>
+          <a:xfrm>
+            <a:off x="1280160" y="1252728"/>
+            <a:ext cx="10033711" cy="697230"/>
+          </a:xfrm>
+          <a:prstGeom prst="rect">
+            <a:avLst/>
+          </a:prstGeom>
+          <a:noFill/>
+          <a:ln/>
+        </p:spPr>
+        <p:txBody>
+          <a:bodyPr wrap="square" lIns="0" tIns="0" rIns="0" bIns="0" rtlCol="0" anchor="ctr"/>
+          <a:lstStyle/>
+          <a:p>
+            <a:pPr indent="0" marL="0">
+              <a:lnSpc>
+                <a:spcPct val="88000"/>
+              </a:lnSpc>
+              <a:buNone/>
+            </a:pPr>
+            <a:r>
+              <a:rPr lang="en-US" sz="900" dirty="0">
+                <a:solidFill>
+                  <a:srgbClr val="5F7183"/>
+                </a:solidFill>
+                <a:latin typeface="Yu Gothic" pitchFamily="34" charset="0"/>
+                <a:ea typeface="Yu Gothic" pitchFamily="34" charset="-122"/>
+                <a:cs typeface="Yu Gothic" pitchFamily="34" charset="-120"/>
+              </a:rPr>
+              <a:t>問1　扉を開けるか。何で判断するか</a:t>
+            </a:r>
+            <a:endParaRPr lang="en-US" sz="900" dirty="0"/>
+          </a:p>
+          <a:p>
+            <a:pPr indent="0" marL="0">
+              <a:lnSpc>
+                <a:spcPct val="88000"/>
+              </a:lnSpc>
+              <a:buNone/>
+            </a:pPr>
+            <a:r>
+              <a:rPr lang="en-US" sz="1200" b="1" dirty="0">
                 <a:solidFill>
                   <a:srgbClr val="1B2733"/>
                 </a:solidFill>
@@ -2291,14 +2271,14 @@
                 <a:ea typeface="Yu Gothic" pitchFamily="34" charset="-122"/>
                 <a:cs typeface="Yu Gothic" pitchFamily="34" charset="-120"/>
               </a:rPr>
-              <a:t>開けない。まず扉に触れて熱を確認する。開けると燃焼が拡大する。</a:t>
-            </a:r>
-            <a:endParaRPr lang="en-US" sz="1050" dirty="0"/>
-          </a:p>
-          <a:p>
-            <a:pPr indent="0" marL="0">
-              <a:lnSpc>
-                <a:spcPct val="90000"/>
+              <a:t>開けない。扉に触れて熱を確認する。煙の色と量、臭気、音でも判断できる。</a:t>
+            </a:r>
+            <a:endParaRPr lang="en-US" sz="900" dirty="0"/>
+          </a:p>
+          <a:p>
+            <a:pPr indent="0" marL="0">
+              <a:lnSpc>
+                <a:spcPct val="88000"/>
               </a:lnSpc>
               <a:buNone/>
             </a:pPr>
@@ -2311,26 +2291,189 @@
                 <a:ea typeface="Calibri" pitchFamily="34" charset="-122"/>
                 <a:cs typeface="Calibri" pitchFamily="34" charset="-120"/>
               </a:rPr>
-              <a:t>Do not open it. Feel the door for heat first. Opening it feeds the fire.</a:t>
-            </a:r>
-            <a:endParaRPr lang="en-US" sz="1050" dirty="0"/>
-          </a:p>
-        </p:txBody>
-      </p:sp>
-      <p:sp>
-        <p:nvSpPr>
-          <p:cNvPr id="9" name="Shape 6"/>
-          <p:cNvSpPr/>
-          <p:nvPr/>
-        </p:nvSpPr>
-        <p:spPr>
-          <a:xfrm>
-            <a:off x="6223864" y="1773936"/>
-            <a:ext cx="5327752" cy="1091184"/>
+              <a:t>Do not open it. Feel the door for heat. Smoke colour and volume, smell and sound also tell you.</a:t>
+            </a:r>
+            <a:endParaRPr lang="en-US" sz="900" dirty="0"/>
+          </a:p>
+        </p:txBody>
+      </p:sp>
+      <p:sp>
+        <p:nvSpPr>
+          <p:cNvPr id="10" name="Shape 7"/>
+          <p:cNvSpPr/>
+          <p:nvPr/>
+        </p:nvSpPr>
+        <p:spPr>
+          <a:xfrm>
+            <a:off x="640080" y="2114550"/>
+            <a:ext cx="10911535" cy="825246"/>
           </a:xfrm>
           <a:prstGeom prst="roundRect">
             <a:avLst>
-              <a:gd name="adj" fmla="val 3352"/>
+              <a:gd name="adj" fmla="val 4432"/>
+            </a:avLst>
+          </a:prstGeom>
+          <a:solidFill>
+            <a:srgbClr val="E4F4F0"/>
+          </a:solidFill>
+          <a:ln/>
+        </p:spPr>
+      </p:sp>
+      <p:sp>
+        <p:nvSpPr>
+          <p:cNvPr id="11" name="Shape 8"/>
+          <p:cNvSpPr/>
+          <p:nvPr/>
+        </p:nvSpPr>
+        <p:spPr>
+          <a:xfrm>
+            <a:off x="841248" y="2353437"/>
+            <a:ext cx="347472" cy="347472"/>
+          </a:xfrm>
+          <a:prstGeom prst="ellipse">
+            <a:avLst/>
+          </a:prstGeom>
+          <a:solidFill>
+            <a:srgbClr val="12B198"/>
+          </a:solidFill>
+          <a:ln/>
+        </p:spPr>
+      </p:sp>
+      <p:sp>
+        <p:nvSpPr>
+          <p:cNvPr id="12" name="Text 9"/>
+          <p:cNvSpPr/>
+          <p:nvPr/>
+        </p:nvSpPr>
+        <p:spPr>
+          <a:xfrm>
+            <a:off x="841248" y="2353437"/>
+            <a:ext cx="347472" cy="347472"/>
+          </a:xfrm>
+          <a:prstGeom prst="rect">
+            <a:avLst/>
+          </a:prstGeom>
+          <a:noFill/>
+          <a:ln/>
+        </p:spPr>
+        <p:txBody>
+          <a:bodyPr wrap="square" lIns="0" tIns="0" rIns="0" bIns="0" rtlCol="0" anchor="ctr"/>
+          <a:lstStyle/>
+          <a:p>
+            <a:pPr algn="ctr" indent="0" marL="0">
+              <a:buNone/>
+            </a:pPr>
+            <a:r>
+              <a:rPr lang="en-US" sz="1100" b="1" dirty="0">
+                <a:solidFill>
+                  <a:srgbClr val="FFFFFF"/>
+                </a:solidFill>
+                <a:latin typeface="Calibri" pitchFamily="34" charset="0"/>
+                <a:ea typeface="Calibri" pitchFamily="34" charset="-122"/>
+                <a:cs typeface="Calibri" pitchFamily="34" charset="-120"/>
+              </a:rPr>
+              <a:t>2</a:t>
+            </a:r>
+            <a:endParaRPr lang="en-US" sz="1100" dirty="0"/>
+          </a:p>
+        </p:txBody>
+      </p:sp>
+      <p:sp>
+        <p:nvSpPr>
+          <p:cNvPr id="13" name="Text 10"/>
+          <p:cNvSpPr/>
+          <p:nvPr/>
+        </p:nvSpPr>
+        <p:spPr>
+          <a:xfrm>
+            <a:off x="1280160" y="2178558"/>
+            <a:ext cx="10033711" cy="697230"/>
+          </a:xfrm>
+          <a:prstGeom prst="rect">
+            <a:avLst/>
+          </a:prstGeom>
+          <a:noFill/>
+          <a:ln/>
+        </p:spPr>
+        <p:txBody>
+          <a:bodyPr wrap="square" lIns="0" tIns="0" rIns="0" bIns="0" rtlCol="0" anchor="ctr"/>
+          <a:lstStyle/>
+          <a:p>
+            <a:pPr indent="0" marL="0">
+              <a:lnSpc>
+                <a:spcPct val="88000"/>
+              </a:lnSpc>
+              <a:buNone/>
+            </a:pPr>
+            <a:r>
+              <a:rPr lang="en-US" sz="900" dirty="0">
+                <a:solidFill>
+                  <a:srgbClr val="5F7183"/>
+                </a:solidFill>
+                <a:latin typeface="Yu Gothic" pitchFamily="34" charset="0"/>
+                <a:ea typeface="Yu Gothic" pitchFamily="34" charset="-122"/>
+                <a:cs typeface="Yu Gothic" pitchFamily="34" charset="-120"/>
+              </a:rPr>
+              <a:t>問2　初期消火か避難誘導か</a:t>
+            </a:r>
+            <a:endParaRPr lang="en-US" sz="900" dirty="0"/>
+          </a:p>
+          <a:p>
+            <a:pPr indent="0" marL="0">
+              <a:lnSpc>
+                <a:spcPct val="88000"/>
+              </a:lnSpc>
+              <a:buNone/>
+            </a:pPr>
+            <a:r>
+              <a:rPr lang="en-US" sz="1200" b="1" dirty="0">
+                <a:solidFill>
+                  <a:srgbClr val="1B2733"/>
+                </a:solidFill>
+                <a:latin typeface="Yu Gothic" pitchFamily="34" charset="0"/>
+                <a:ea typeface="Yu Gothic" pitchFamily="34" charset="-122"/>
+                <a:cs typeface="Yu Gothic" pitchFamily="34" charset="-120"/>
+              </a:rPr>
+              <a:t>1名なら避難誘導。初期消火は複数名と退路の確保が前提。</a:t>
+            </a:r>
+            <a:endParaRPr lang="en-US" sz="900" dirty="0"/>
+          </a:p>
+          <a:p>
+            <a:pPr indent="0" marL="0">
+              <a:lnSpc>
+                <a:spcPct val="88000"/>
+              </a:lnSpc>
+              <a:buNone/>
+            </a:pPr>
+            <a:r>
+              <a:rPr lang="en-US" sz="800" i="1" dirty="0">
+                <a:solidFill>
+                  <a:srgbClr val="5F7183"/>
+                </a:solidFill>
+                <a:latin typeface="Calibri" pitchFamily="34" charset="0"/>
+                <a:ea typeface="Calibri" pitchFamily="34" charset="-122"/>
+                <a:cs typeface="Calibri" pitchFamily="34" charset="-120"/>
+              </a:rPr>
+              <a:t>Alone, guide the evacuation. Firefighting needs numbers and a secured way out.</a:t>
+            </a:r>
+            <a:endParaRPr lang="en-US" sz="900" dirty="0"/>
+          </a:p>
+        </p:txBody>
+      </p:sp>
+      <p:sp>
+        <p:nvSpPr>
+          <p:cNvPr id="14" name="Shape 11"/>
+          <p:cNvSpPr/>
+          <p:nvPr/>
+        </p:nvSpPr>
+        <p:spPr>
+          <a:xfrm>
+            <a:off x="640080" y="3040380"/>
+            <a:ext cx="10911535" cy="825246"/>
+          </a:xfrm>
+          <a:prstGeom prst="roundRect">
+            <a:avLst>
+              <a:gd name="adj" fmla="val 4432"/>
             </a:avLst>
           </a:prstGeom>
           <a:solidFill>
@@ -2341,53 +2484,112 @@
       </p:sp>
       <p:sp>
         <p:nvSpPr>
-          <p:cNvPr id="10" name="Text 7"/>
-          <p:cNvSpPr/>
-          <p:nvPr/>
-        </p:nvSpPr>
-        <p:spPr>
-          <a:xfrm>
-            <a:off x="6461608" y="1865376"/>
-            <a:ext cx="4852264" cy="908304"/>
-          </a:xfrm>
-          <a:prstGeom prst="rect">
-            <a:avLst/>
-          </a:prstGeom>
-          <a:noFill/>
-          <a:ln/>
-        </p:spPr>
-        <p:txBody>
-          <a:bodyPr wrap="square" lIns="0" tIns="0" rIns="0" bIns="0" rtlCol="0" anchor="t"/>
-          <a:lstStyle/>
-          <a:p>
-            <a:pPr indent="0" marL="0">
-              <a:lnSpc>
-                <a:spcPct val="90000"/>
-              </a:lnSpc>
-              <a:buNone/>
-            </a:pPr>
-            <a:r>
-              <a:rPr lang="en-US" sz="1050" b="1" dirty="0">
-                <a:solidFill>
-                  <a:srgbClr val="093259"/>
-                </a:solidFill>
-                <a:latin typeface="Yu Gothic" pitchFamily="34" charset="0"/>
-                <a:ea typeface="Yu Gothic" pitchFamily="34" charset="-122"/>
-                <a:cs typeface="Yu Gothic" pitchFamily="34" charset="-120"/>
-              </a:rPr>
-              <a:t>何で判断するか</a:t>
-            </a:r>
-            <a:endParaRPr lang="en-US" sz="1050" dirty="0"/>
-          </a:p>
-          <a:p>
-            <a:pPr indent="0" marL="0">
-              <a:lnSpc>
-                <a:spcPct val="90000"/>
-              </a:lnSpc>
-              <a:buNone/>
-            </a:pPr>
-            <a:r>
-              <a:rPr lang="en-US" sz="1050" b="1" dirty="0">
+          <p:cNvPr id="15" name="Shape 12"/>
+          <p:cNvSpPr/>
+          <p:nvPr/>
+        </p:nvSpPr>
+        <p:spPr>
+          <a:xfrm>
+            <a:off x="841248" y="3279267"/>
+            <a:ext cx="347472" cy="347472"/>
+          </a:xfrm>
+          <a:prstGeom prst="ellipse">
+            <a:avLst/>
+          </a:prstGeom>
+          <a:solidFill>
+            <a:srgbClr val="12B198"/>
+          </a:solidFill>
+          <a:ln/>
+        </p:spPr>
+      </p:sp>
+      <p:sp>
+        <p:nvSpPr>
+          <p:cNvPr id="16" name="Text 13"/>
+          <p:cNvSpPr/>
+          <p:nvPr/>
+        </p:nvSpPr>
+        <p:spPr>
+          <a:xfrm>
+            <a:off x="841248" y="3279267"/>
+            <a:ext cx="347472" cy="347472"/>
+          </a:xfrm>
+          <a:prstGeom prst="rect">
+            <a:avLst/>
+          </a:prstGeom>
+          <a:noFill/>
+          <a:ln/>
+        </p:spPr>
+        <p:txBody>
+          <a:bodyPr wrap="square" lIns="0" tIns="0" rIns="0" bIns="0" rtlCol="0" anchor="ctr"/>
+          <a:lstStyle/>
+          <a:p>
+            <a:pPr algn="ctr" indent="0" marL="0">
+              <a:buNone/>
+            </a:pPr>
+            <a:r>
+              <a:rPr lang="en-US" sz="1100" b="1" dirty="0">
+                <a:solidFill>
+                  <a:srgbClr val="FFFFFF"/>
+                </a:solidFill>
+                <a:latin typeface="Calibri" pitchFamily="34" charset="0"/>
+                <a:ea typeface="Calibri" pitchFamily="34" charset="-122"/>
+                <a:cs typeface="Calibri" pitchFamily="34" charset="-120"/>
+              </a:rPr>
+              <a:t>3</a:t>
+            </a:r>
+            <a:endParaRPr lang="en-US" sz="1100" dirty="0"/>
+          </a:p>
+        </p:txBody>
+      </p:sp>
+      <p:sp>
+        <p:nvSpPr>
+          <p:cNvPr id="17" name="Text 14"/>
+          <p:cNvSpPr/>
+          <p:nvPr/>
+        </p:nvSpPr>
+        <p:spPr>
+          <a:xfrm>
+            <a:off x="1280160" y="3104388"/>
+            <a:ext cx="10033711" cy="697230"/>
+          </a:xfrm>
+          <a:prstGeom prst="rect">
+            <a:avLst/>
+          </a:prstGeom>
+          <a:noFill/>
+          <a:ln/>
+        </p:spPr>
+        <p:txBody>
+          <a:bodyPr wrap="square" lIns="0" tIns="0" rIns="0" bIns="0" rtlCol="0" anchor="ctr"/>
+          <a:lstStyle/>
+          <a:p>
+            <a:pPr indent="0" marL="0">
+              <a:lnSpc>
+                <a:spcPct val="88000"/>
+              </a:lnSpc>
+              <a:buNone/>
+            </a:pPr>
+            <a:r>
+              <a:rPr lang="en-US" sz="900" dirty="0">
+                <a:solidFill>
+                  <a:srgbClr val="5F7183"/>
+                </a:solidFill>
+                <a:latin typeface="Yu Gothic" pitchFamily="34" charset="0"/>
+                <a:ea typeface="Yu Gothic" pitchFamily="34" charset="-122"/>
+                <a:cs typeface="Yu Gothic" pitchFamily="34" charset="-120"/>
+              </a:rPr>
+              <a:t>問3　1名の限界。何を諦めるか</a:t>
+            </a:r>
+            <a:endParaRPr lang="en-US" sz="900" dirty="0"/>
+          </a:p>
+          <a:p>
+            <a:pPr indent="0" marL="0">
+              <a:lnSpc>
+                <a:spcPct val="88000"/>
+              </a:lnSpc>
+              <a:buNone/>
+            </a:pPr>
+            <a:r>
+              <a:rPr lang="en-US" sz="1200" b="1" dirty="0">
                 <a:solidFill>
                   <a:srgbClr val="1B2733"/>
                 </a:solidFill>
@@ -2395,14 +2597,14 @@
                 <a:ea typeface="Yu Gothic" pitchFamily="34" charset="-122"/>
                 <a:cs typeface="Yu Gothic" pitchFamily="34" charset="-120"/>
               </a:rPr>
-              <a:t>扉の熱、煙の色と量、臭気、音。目視できなくても材料はある。</a:t>
-            </a:r>
-            <a:endParaRPr lang="en-US" sz="1050" dirty="0"/>
-          </a:p>
-          <a:p>
-            <a:pPr indent="0" marL="0">
-              <a:lnSpc>
-                <a:spcPct val="90000"/>
+              <a:t>初期消火、原因の特定、私物の持ち出しを諦める。20名の避難を優先する。</a:t>
+            </a:r>
+            <a:endParaRPr lang="en-US" sz="900" dirty="0"/>
+          </a:p>
+          <a:p>
+            <a:pPr indent="0" marL="0">
+              <a:lnSpc>
+                <a:spcPct val="88000"/>
               </a:lnSpc>
               <a:buNone/>
             </a:pPr>
@@ -2415,130 +2617,26 @@
                 <a:ea typeface="Calibri" pitchFamily="34" charset="-122"/>
                 <a:cs typeface="Calibri" pitchFamily="34" charset="-120"/>
               </a:rPr>
-              <a:t>Heat, smoke colour and volume, smell, sound. You can judge without seeing inside.</a:t>
-            </a:r>
-            <a:endParaRPr lang="en-US" sz="1050" dirty="0"/>
-          </a:p>
-        </p:txBody>
-      </p:sp>
-      <p:sp>
-        <p:nvSpPr>
-          <p:cNvPr id="11" name="Shape 8"/>
-          <p:cNvSpPr/>
-          <p:nvPr/>
-        </p:nvSpPr>
-        <p:spPr>
-          <a:xfrm>
-            <a:off x="640080" y="2993136"/>
-            <a:ext cx="5327752" cy="1091184"/>
+              <a:t>Give up firefighting, finding the cause, and retrieving belongings. Twenty people come first.</a:t>
+            </a:r>
+            <a:endParaRPr lang="en-US" sz="900" dirty="0"/>
+          </a:p>
+        </p:txBody>
+      </p:sp>
+      <p:sp>
+        <p:nvSpPr>
+          <p:cNvPr id="18" name="Shape 15"/>
+          <p:cNvSpPr/>
+          <p:nvPr/>
+        </p:nvSpPr>
+        <p:spPr>
+          <a:xfrm>
+            <a:off x="640080" y="3966210"/>
+            <a:ext cx="10911535" cy="825246"/>
           </a:xfrm>
           <a:prstGeom prst="roundRect">
             <a:avLst>
-              <a:gd name="adj" fmla="val 3352"/>
-            </a:avLst>
-          </a:prstGeom>
-          <a:solidFill>
-            <a:srgbClr val="E4F4F0"/>
-          </a:solidFill>
-          <a:ln/>
-        </p:spPr>
-      </p:sp>
-      <p:sp>
-        <p:nvSpPr>
-          <p:cNvPr id="12" name="Text 9"/>
-          <p:cNvSpPr/>
-          <p:nvPr/>
-        </p:nvSpPr>
-        <p:spPr>
-          <a:xfrm>
-            <a:off x="877824" y="3084576"/>
-            <a:ext cx="4852264" cy="908304"/>
-          </a:xfrm>
-          <a:prstGeom prst="rect">
-            <a:avLst/>
-          </a:prstGeom>
-          <a:noFill/>
-          <a:ln/>
-        </p:spPr>
-        <p:txBody>
-          <a:bodyPr wrap="square" lIns="0" tIns="0" rIns="0" bIns="0" rtlCol="0" anchor="t"/>
-          <a:lstStyle/>
-          <a:p>
-            <a:pPr indent="0" marL="0">
-              <a:lnSpc>
-                <a:spcPct val="90000"/>
-              </a:lnSpc>
-              <a:buNone/>
-            </a:pPr>
-            <a:r>
-              <a:rPr lang="en-US" sz="1050" b="1" dirty="0">
-                <a:solidFill>
-                  <a:srgbClr val="0D8A76"/>
-                </a:solidFill>
-                <a:latin typeface="Yu Gothic" pitchFamily="34" charset="0"/>
-                <a:ea typeface="Yu Gothic" pitchFamily="34" charset="-122"/>
-                <a:cs typeface="Yu Gothic" pitchFamily="34" charset="-120"/>
-              </a:rPr>
-              <a:t>初期消火か避難誘導か</a:t>
-            </a:r>
-            <a:endParaRPr lang="en-US" sz="1050" dirty="0"/>
-          </a:p>
-          <a:p>
-            <a:pPr indent="0" marL="0">
-              <a:lnSpc>
-                <a:spcPct val="90000"/>
-              </a:lnSpc>
-              <a:buNone/>
-            </a:pPr>
-            <a:r>
-              <a:rPr lang="en-US" sz="1050" b="1" dirty="0">
-                <a:solidFill>
-                  <a:srgbClr val="1B2733"/>
-                </a:solidFill>
-                <a:latin typeface="Yu Gothic" pitchFamily="34" charset="0"/>
-                <a:ea typeface="Yu Gothic" pitchFamily="34" charset="-122"/>
-                <a:cs typeface="Yu Gothic" pitchFamily="34" charset="-120"/>
-              </a:rPr>
-              <a:t>1名なら避難誘導。初期消火は複数名と退路の確保が前提。</a:t>
-            </a:r>
-            <a:endParaRPr lang="en-US" sz="1050" dirty="0"/>
-          </a:p>
-          <a:p>
-            <a:pPr indent="0" marL="0">
-              <a:lnSpc>
-                <a:spcPct val="90000"/>
-              </a:lnSpc>
-              <a:buNone/>
-            </a:pPr>
-            <a:r>
-              <a:rPr lang="en-US" sz="800" i="1" dirty="0">
-                <a:solidFill>
-                  <a:srgbClr val="5F7183"/>
-                </a:solidFill>
-                <a:latin typeface="Calibri" pitchFamily="34" charset="0"/>
-                <a:ea typeface="Calibri" pitchFamily="34" charset="-122"/>
-                <a:cs typeface="Calibri" pitchFamily="34" charset="-120"/>
-              </a:rPr>
-              <a:t>Alone, guide the evacuation. Firefighting needs numbers and a secured exit.</a:t>
-            </a:r>
-            <a:endParaRPr lang="en-US" sz="1050" dirty="0"/>
-          </a:p>
-        </p:txBody>
-      </p:sp>
-      <p:sp>
-        <p:nvSpPr>
-          <p:cNvPr id="13" name="Shape 10"/>
-          <p:cNvSpPr/>
-          <p:nvPr/>
-        </p:nvSpPr>
-        <p:spPr>
-          <a:xfrm>
-            <a:off x="6223864" y="2993136"/>
-            <a:ext cx="5327752" cy="1091184"/>
-          </a:xfrm>
-          <a:prstGeom prst="roundRect">
-            <a:avLst>
-              <a:gd name="adj" fmla="val 3352"/>
+              <a:gd name="adj" fmla="val 4432"/>
             </a:avLst>
           </a:prstGeom>
           <a:solidFill>
@@ -2549,53 +2647,112 @@
       </p:sp>
       <p:sp>
         <p:nvSpPr>
-          <p:cNvPr id="14" name="Text 11"/>
-          <p:cNvSpPr/>
-          <p:nvPr/>
-        </p:nvSpPr>
-        <p:spPr>
-          <a:xfrm>
-            <a:off x="6461608" y="3084576"/>
-            <a:ext cx="4852264" cy="908304"/>
-          </a:xfrm>
-          <a:prstGeom prst="rect">
-            <a:avLst/>
-          </a:prstGeom>
-          <a:noFill/>
-          <a:ln/>
-        </p:spPr>
-        <p:txBody>
-          <a:bodyPr wrap="square" lIns="0" tIns="0" rIns="0" bIns="0" rtlCol="0" anchor="t"/>
-          <a:lstStyle/>
-          <a:p>
-            <a:pPr indent="0" marL="0">
-              <a:lnSpc>
-                <a:spcPct val="90000"/>
-              </a:lnSpc>
-              <a:buNone/>
-            </a:pPr>
-            <a:r>
-              <a:rPr lang="en-US" sz="1050" b="1" dirty="0">
-                <a:solidFill>
-                  <a:srgbClr val="093259"/>
-                </a:solidFill>
-                <a:latin typeface="Yu Gothic" pitchFamily="34" charset="0"/>
-                <a:ea typeface="Yu Gothic" pitchFamily="34" charset="-122"/>
-                <a:cs typeface="Yu Gothic" pitchFamily="34" charset="-120"/>
-              </a:rPr>
-              <a:t>発報前の通報</a:t>
-            </a:r>
-            <a:endParaRPr lang="en-US" sz="1050" dirty="0"/>
-          </a:p>
-          <a:p>
-            <a:pPr indent="0" marL="0">
-              <a:lnSpc>
-                <a:spcPct val="90000"/>
-              </a:lnSpc>
-              <a:buNone/>
-            </a:pPr>
-            <a:r>
-              <a:rPr lang="en-US" sz="1050" b="1" dirty="0">
+          <p:cNvPr id="19" name="Shape 16"/>
+          <p:cNvSpPr/>
+          <p:nvPr/>
+        </p:nvSpPr>
+        <p:spPr>
+          <a:xfrm>
+            <a:off x="841248" y="4205097"/>
+            <a:ext cx="347472" cy="347472"/>
+          </a:xfrm>
+          <a:prstGeom prst="ellipse">
+            <a:avLst/>
+          </a:prstGeom>
+          <a:solidFill>
+            <a:srgbClr val="12B198"/>
+          </a:solidFill>
+          <a:ln/>
+        </p:spPr>
+      </p:sp>
+      <p:sp>
+        <p:nvSpPr>
+          <p:cNvPr id="20" name="Text 17"/>
+          <p:cNvSpPr/>
+          <p:nvPr/>
+        </p:nvSpPr>
+        <p:spPr>
+          <a:xfrm>
+            <a:off x="841248" y="4205097"/>
+            <a:ext cx="347472" cy="347472"/>
+          </a:xfrm>
+          <a:prstGeom prst="rect">
+            <a:avLst/>
+          </a:prstGeom>
+          <a:noFill/>
+          <a:ln/>
+        </p:spPr>
+        <p:txBody>
+          <a:bodyPr wrap="square" lIns="0" tIns="0" rIns="0" bIns="0" rtlCol="0" anchor="ctr"/>
+          <a:lstStyle/>
+          <a:p>
+            <a:pPr algn="ctr" indent="0" marL="0">
+              <a:buNone/>
+            </a:pPr>
+            <a:r>
+              <a:rPr lang="en-US" sz="1100" b="1" dirty="0">
+                <a:solidFill>
+                  <a:srgbClr val="FFFFFF"/>
+                </a:solidFill>
+                <a:latin typeface="Calibri" pitchFamily="34" charset="0"/>
+                <a:ea typeface="Calibri" pitchFamily="34" charset="-122"/>
+                <a:cs typeface="Calibri" pitchFamily="34" charset="-120"/>
+              </a:rPr>
+              <a:t>4</a:t>
+            </a:r>
+            <a:endParaRPr lang="en-US" sz="1100" dirty="0"/>
+          </a:p>
+        </p:txBody>
+      </p:sp>
+      <p:sp>
+        <p:nvSpPr>
+          <p:cNvPr id="21" name="Text 18"/>
+          <p:cNvSpPr/>
+          <p:nvPr/>
+        </p:nvSpPr>
+        <p:spPr>
+          <a:xfrm>
+            <a:off x="1280160" y="4030218"/>
+            <a:ext cx="10033711" cy="697230"/>
+          </a:xfrm>
+          <a:prstGeom prst="rect">
+            <a:avLst/>
+          </a:prstGeom>
+          <a:noFill/>
+          <a:ln/>
+        </p:spPr>
+        <p:txBody>
+          <a:bodyPr wrap="square" lIns="0" tIns="0" rIns="0" bIns="0" rtlCol="0" anchor="ctr"/>
+          <a:lstStyle/>
+          <a:p>
+            <a:pPr indent="0" marL="0">
+              <a:lnSpc>
+                <a:spcPct val="88000"/>
+              </a:lnSpc>
+              <a:buNone/>
+            </a:pPr>
+            <a:r>
+              <a:rPr lang="en-US" sz="900" dirty="0">
+                <a:solidFill>
+                  <a:srgbClr val="5F7183"/>
+                </a:solidFill>
+                <a:latin typeface="Yu Gothic" pitchFamily="34" charset="0"/>
+                <a:ea typeface="Yu Gothic" pitchFamily="34" charset="-122"/>
+                <a:cs typeface="Yu Gothic" pitchFamily="34" charset="-120"/>
+              </a:rPr>
+              <a:t>問4　発報前に通報してよいか</a:t>
+            </a:r>
+            <a:endParaRPr lang="en-US" sz="900" dirty="0"/>
+          </a:p>
+          <a:p>
+            <a:pPr indent="0" marL="0">
+              <a:lnSpc>
+                <a:spcPct val="88000"/>
+              </a:lnSpc>
+              <a:buNone/>
+            </a:pPr>
+            <a:r>
+              <a:rPr lang="en-US" sz="1200" b="1" dirty="0">
                 <a:solidFill>
                   <a:srgbClr val="1B2733"/>
                 </a:solidFill>
@@ -2603,14 +2760,14 @@
                 <a:ea typeface="Yu Gothic" pitchFamily="34" charset="-122"/>
                 <a:cs typeface="Yu Gothic" pitchFamily="34" charset="-120"/>
               </a:rPr>
-              <a:t>してよい。発報を待つ理由はない。人が煙を確認している。</a:t>
-            </a:r>
-            <a:endParaRPr lang="en-US" sz="1050" dirty="0"/>
-          </a:p>
-          <a:p>
-            <a:pPr indent="0" marL="0">
-              <a:lnSpc>
-                <a:spcPct val="90000"/>
+              <a:t>してよい。発報を待つ理由はない。人が煙を確認している事実で足りる。</a:t>
+            </a:r>
+            <a:endParaRPr lang="en-US" sz="900" dirty="0"/>
+          </a:p>
+          <a:p>
+            <a:pPr indent="0" marL="0">
+              <a:lnSpc>
+                <a:spcPct val="88000"/>
               </a:lnSpc>
               <a:buNone/>
             </a:pPr>
@@ -2623,83 +2780,97 @@
                 <a:ea typeface="Calibri" pitchFamily="34" charset="-122"/>
                 <a:cs typeface="Calibri" pitchFamily="34" charset="-120"/>
               </a:rPr>
-              <a:t>Call now. There is no reason to wait for the alarm — a person has seen smoke.</a:t>
-            </a:r>
-            <a:endParaRPr lang="en-US" sz="1050" dirty="0"/>
-          </a:p>
-        </p:txBody>
-      </p:sp>
-      <p:sp>
-        <p:nvSpPr>
-          <p:cNvPr id="15" name="Shape 12"/>
-          <p:cNvSpPr/>
-          <p:nvPr/>
-        </p:nvSpPr>
-        <p:spPr>
-          <a:xfrm>
-            <a:off x="640080" y="4212336"/>
-            <a:ext cx="5327752" cy="1091184"/>
+              <a:t>Yes. There is no reason to wait for the alarm — a person has seen smoke, and that is enough.</a:t>
+            </a:r>
+            <a:endParaRPr lang="en-US" sz="900" dirty="0"/>
+          </a:p>
+        </p:txBody>
+      </p:sp>
+      <p:sp>
+        <p:nvSpPr>
+          <p:cNvPr id="22" name="Shape 19"/>
+          <p:cNvSpPr/>
+          <p:nvPr/>
+        </p:nvSpPr>
+        <p:spPr>
+          <a:xfrm>
+            <a:off x="640080" y="4901184"/>
+            <a:ext cx="10911535" cy="420624"/>
           </a:xfrm>
           <a:prstGeom prst="roundRect">
             <a:avLst>
-              <a:gd name="adj" fmla="val 3352"/>
+              <a:gd name="adj" fmla="val 8696"/>
             </a:avLst>
           </a:prstGeom>
           <a:solidFill>
-            <a:srgbClr val="EFF4F8"/>
+            <a:srgbClr val="EEF6FA"/>
           </a:solidFill>
           <a:ln/>
         </p:spPr>
       </p:sp>
       <p:sp>
         <p:nvSpPr>
-          <p:cNvPr id="16" name="Text 13"/>
-          <p:cNvSpPr/>
-          <p:nvPr/>
-        </p:nvSpPr>
-        <p:spPr>
-          <a:xfrm>
-            <a:off x="877824" y="4303776"/>
-            <a:ext cx="4852264" cy="908304"/>
-          </a:xfrm>
-          <a:prstGeom prst="rect">
-            <a:avLst/>
-          </a:prstGeom>
-          <a:noFill/>
-          <a:ln/>
-        </p:spPr>
-        <p:txBody>
-          <a:bodyPr wrap="square" lIns="0" tIns="0" rIns="0" bIns="0" rtlCol="0" anchor="t"/>
-          <a:lstStyle/>
-          <a:p>
-            <a:pPr indent="0" marL="0">
-              <a:lnSpc>
-                <a:spcPct val="90000"/>
-              </a:lnSpc>
-              <a:buNone/>
-            </a:pPr>
-            <a:r>
-              <a:rPr lang="en-US" sz="1050" b="1" dirty="0">
-                <a:solidFill>
-                  <a:srgbClr val="093259"/>
-                </a:solidFill>
-                <a:latin typeface="Yu Gothic" pitchFamily="34" charset="0"/>
-                <a:ea typeface="Yu Gothic" pitchFamily="34" charset="-122"/>
-                <a:cs typeface="Yu Gothic" pitchFamily="34" charset="-120"/>
-              </a:rPr>
-              <a:t>消火器を取りに走る社員</a:t>
-            </a:r>
-            <a:endParaRPr lang="en-US" sz="1050" dirty="0"/>
-          </a:p>
-          <a:p>
-            <a:pPr indent="0" marL="0">
-              <a:lnSpc>
-                <a:spcPct val="90000"/>
-              </a:lnSpc>
-              <a:buNone/>
-            </a:pPr>
-            <a:r>
-              <a:rPr lang="en-US" sz="1050" b="1" dirty="0">
+          <p:cNvPr id="23" name="Text 20"/>
+          <p:cNvSpPr/>
+          <p:nvPr/>
+        </p:nvSpPr>
+        <p:spPr>
+          <a:xfrm>
+            <a:off x="859536" y="4928616"/>
+            <a:ext cx="10472623" cy="365760"/>
+          </a:xfrm>
+          <a:prstGeom prst="rect">
+            <a:avLst/>
+          </a:prstGeom>
+          <a:noFill/>
+          <a:ln/>
+        </p:spPr>
+        <p:txBody>
+          <a:bodyPr wrap="square" lIns="0" tIns="0" rIns="0" bIns="0" rtlCol="0" anchor="ctr"/>
+          <a:lstStyle/>
+          <a:p>
+            <a:pPr indent="0" marL="0">
+              <a:lnSpc>
+                <a:spcPct val="86000"/>
+              </a:lnSpc>
+              <a:buNone/>
+            </a:pPr>
+            <a:r>
+              <a:rPr lang="en-US" sz="850" b="1" dirty="0">
+                <a:solidFill>
+                  <a:srgbClr val="0D8A76"/>
+                </a:solidFill>
+                <a:latin typeface="Yu Gothic" pitchFamily="34" charset="0"/>
+                <a:ea typeface="Yu Gothic" pitchFamily="34" charset="-122"/>
+                <a:cs typeface="Yu Gothic" pitchFamily="34" charset="-120"/>
+              </a:rPr>
+              <a:t>追加付与①　</a:t>
+            </a:r>
+            <a:pPr indent="0" marL="0">
+              <a:lnSpc>
+                <a:spcPct val="86000"/>
+              </a:lnSpc>
+              <a:buNone/>
+            </a:pPr>
+            <a:r>
+              <a:rPr lang="en-US" sz="850" dirty="0">
+                <a:solidFill>
+                  <a:srgbClr val="5F7183"/>
+                </a:solidFill>
+                <a:latin typeface="Yu Gothic" pitchFamily="34" charset="0"/>
+                <a:ea typeface="Yu Gothic" pitchFamily="34" charset="-122"/>
+                <a:cs typeface="Yu Gothic" pitchFamily="34" charset="-120"/>
+              </a:rPr>
+              <a:t>社員が消火器を取りに走る　→　</a:t>
+            </a:r>
+            <a:pPr indent="0" marL="0">
+              <a:lnSpc>
+                <a:spcPct val="86000"/>
+              </a:lnSpc>
+              <a:buNone/>
+            </a:pPr>
+            <a:r>
+              <a:rPr lang="en-US" sz="1100" b="1" dirty="0">
                 <a:solidFill>
                   <a:srgbClr val="1B2733"/>
                 </a:solidFill>
@@ -2707,19 +2878,19 @@
                 <a:ea typeface="Yu Gothic" pitchFamily="34" charset="-122"/>
                 <a:cs typeface="Yu Gothic" pitchFamily="34" charset="-120"/>
               </a:rPr>
-              <a:t>追わない。避難誘導が止まる方が損失は大きい。</a:t>
-            </a:r>
-            <a:endParaRPr lang="en-US" sz="1050" dirty="0"/>
-          </a:p>
-          <a:p>
-            <a:pPr indent="0" marL="0">
-              <a:lnSpc>
-                <a:spcPct val="90000"/>
-              </a:lnSpc>
-              <a:buNone/>
-            </a:pPr>
-            <a:r>
-              <a:rPr lang="en-US" sz="800" i="1" dirty="0">
+              <a:t>追わない。止めに行くと避難誘導が止まる。損失が大きいのはそちら。</a:t>
+            </a:r>
+            <a:endParaRPr lang="en-US" sz="850" dirty="0"/>
+          </a:p>
+          <a:p>
+            <a:pPr indent="0" marL="0">
+              <a:lnSpc>
+                <a:spcPct val="86000"/>
+              </a:lnSpc>
+              <a:buNone/>
+            </a:pPr>
+            <a:r>
+              <a:rPr lang="en-US" sz="750" i="1" dirty="0">
                 <a:solidFill>
                   <a:srgbClr val="5F7183"/>
                 </a:solidFill>
@@ -2727,83 +2898,97 @@
                 <a:ea typeface="Calibri" pitchFamily="34" charset="-122"/>
                 <a:cs typeface="Calibri" pitchFamily="34" charset="-120"/>
               </a:rPr>
-              <a:t>Do not chase them. Stopping the evacuation costs more.</a:t>
-            </a:r>
-            <a:endParaRPr lang="en-US" sz="1050" dirty="0"/>
-          </a:p>
-        </p:txBody>
-      </p:sp>
-      <p:sp>
-        <p:nvSpPr>
-          <p:cNvPr id="17" name="Shape 14"/>
-          <p:cNvSpPr/>
-          <p:nvPr/>
-        </p:nvSpPr>
-        <p:spPr>
-          <a:xfrm>
-            <a:off x="6223864" y="4212336"/>
-            <a:ext cx="5327752" cy="1091184"/>
+              <a:t>Do not chase them. Going after them halts the evacuation, and that costs more.</a:t>
+            </a:r>
+            <a:endParaRPr lang="en-US" sz="850" dirty="0"/>
+          </a:p>
+        </p:txBody>
+      </p:sp>
+      <p:sp>
+        <p:nvSpPr>
+          <p:cNvPr id="24" name="Shape 21"/>
+          <p:cNvSpPr/>
+          <p:nvPr/>
+        </p:nvSpPr>
+        <p:spPr>
+          <a:xfrm>
+            <a:off x="640080" y="5394960"/>
+            <a:ext cx="10911535" cy="420624"/>
           </a:xfrm>
           <a:prstGeom prst="roundRect">
             <a:avLst>
-              <a:gd name="adj" fmla="val 3352"/>
+              <a:gd name="adj" fmla="val 8696"/>
             </a:avLst>
           </a:prstGeom>
           <a:solidFill>
-            <a:srgbClr val="EFF4F8"/>
+            <a:srgbClr val="EEF6FA"/>
           </a:solidFill>
           <a:ln/>
         </p:spPr>
       </p:sp>
       <p:sp>
         <p:nvSpPr>
-          <p:cNvPr id="18" name="Text 15"/>
-          <p:cNvSpPr/>
-          <p:nvPr/>
-        </p:nvSpPr>
-        <p:spPr>
-          <a:xfrm>
-            <a:off x="6461608" y="4303776"/>
-            <a:ext cx="4852264" cy="908304"/>
-          </a:xfrm>
-          <a:prstGeom prst="rect">
-            <a:avLst/>
-          </a:prstGeom>
-          <a:noFill/>
-          <a:ln/>
-        </p:spPr>
-        <p:txBody>
-          <a:bodyPr wrap="square" lIns="0" tIns="0" rIns="0" bIns="0" rtlCol="0" anchor="t"/>
-          <a:lstStyle/>
-          <a:p>
-            <a:pPr indent="0" marL="0">
-              <a:lnSpc>
-                <a:spcPct val="90000"/>
-              </a:lnSpc>
-              <a:buNone/>
-            </a:pPr>
-            <a:r>
-              <a:rPr lang="en-US" sz="1050" b="1" dirty="0">
-                <a:solidFill>
-                  <a:srgbClr val="093259"/>
-                </a:solidFill>
-                <a:latin typeface="Yu Gothic" pitchFamily="34" charset="0"/>
-                <a:ea typeface="Yu Gothic" pitchFamily="34" charset="-122"/>
-                <a:cs typeface="Yu Gothic" pitchFamily="34" charset="-120"/>
-              </a:rPr>
-              <a:t>第2区画が発報</a:t>
-            </a:r>
-            <a:endParaRPr lang="en-US" sz="1050" dirty="0"/>
-          </a:p>
-          <a:p>
-            <a:pPr indent="0" marL="0">
-              <a:lnSpc>
-                <a:spcPct val="90000"/>
-              </a:lnSpc>
-              <a:buNone/>
-            </a:pPr>
-            <a:r>
-              <a:rPr lang="en-US" sz="1050" b="1" dirty="0">
+          <p:cNvPr id="25" name="Text 22"/>
+          <p:cNvSpPr/>
+          <p:nvPr/>
+        </p:nvSpPr>
+        <p:spPr>
+          <a:xfrm>
+            <a:off x="859536" y="5422392"/>
+            <a:ext cx="10472623" cy="365760"/>
+          </a:xfrm>
+          <a:prstGeom prst="rect">
+            <a:avLst/>
+          </a:prstGeom>
+          <a:noFill/>
+          <a:ln/>
+        </p:spPr>
+        <p:txBody>
+          <a:bodyPr wrap="square" lIns="0" tIns="0" rIns="0" bIns="0" rtlCol="0" anchor="ctr"/>
+          <a:lstStyle/>
+          <a:p>
+            <a:pPr indent="0" marL="0">
+              <a:lnSpc>
+                <a:spcPct val="86000"/>
+              </a:lnSpc>
+              <a:buNone/>
+            </a:pPr>
+            <a:r>
+              <a:rPr lang="en-US" sz="850" b="1" dirty="0">
+                <a:solidFill>
+                  <a:srgbClr val="0D8A76"/>
+                </a:solidFill>
+                <a:latin typeface="Yu Gothic" pitchFamily="34" charset="0"/>
+                <a:ea typeface="Yu Gothic" pitchFamily="34" charset="-122"/>
+                <a:cs typeface="Yu Gothic" pitchFamily="34" charset="-120"/>
+              </a:rPr>
+              <a:t>追加付与②　</a:t>
+            </a:r>
+            <a:pPr indent="0" marL="0">
+              <a:lnSpc>
+                <a:spcPct val="86000"/>
+              </a:lnSpc>
+              <a:buNone/>
+            </a:pPr>
+            <a:r>
+              <a:rPr lang="en-US" sz="850" dirty="0">
+                <a:solidFill>
+                  <a:srgbClr val="5F7183"/>
+                </a:solidFill>
+                <a:latin typeface="Yu Gothic" pitchFamily="34" charset="0"/>
+                <a:ea typeface="Yu Gothic" pitchFamily="34" charset="-122"/>
+                <a:cs typeface="Yu Gothic" pitchFamily="34" charset="-120"/>
+              </a:rPr>
+              <a:t>同じ5階の別区画が発報　→　</a:t>
+            </a:r>
+            <a:pPr indent="0" marL="0">
+              <a:lnSpc>
+                <a:spcPct val="86000"/>
+              </a:lnSpc>
+              <a:buNone/>
+            </a:pPr>
+            <a:r>
+              <a:rPr lang="en-US" sz="1100" b="1" dirty="0">
                 <a:solidFill>
                   <a:srgbClr val="1B2733"/>
                 </a:solidFill>
@@ -2811,19 +2996,19 @@
                 <a:ea typeface="Yu Gothic" pitchFamily="34" charset="-122"/>
                 <a:cs typeface="Yu Gothic" pitchFamily="34" charset="-120"/>
               </a:rPr>
-              <a:t>火災の可能性が上がる。全館避難の判断へ切り替える。</a:t>
-            </a:r>
-            <a:endParaRPr lang="en-US" sz="1050" dirty="0"/>
-          </a:p>
-          <a:p>
-            <a:pPr indent="0" marL="0">
-              <a:lnSpc>
-                <a:spcPct val="90000"/>
-              </a:lnSpc>
-              <a:buNone/>
-            </a:pPr>
-            <a:r>
-              <a:rPr lang="en-US" sz="800" i="1" dirty="0">
+              <a:t>火災の可能性が上がる。全館避難の判断へ切り替える。通報済みなら続報を入れる。</a:t>
+            </a:r>
+            <a:endParaRPr lang="en-US" sz="850" dirty="0"/>
+          </a:p>
+          <a:p>
+            <a:pPr indent="0" marL="0">
+              <a:lnSpc>
+                <a:spcPct val="86000"/>
+              </a:lnSpc>
+              <a:buNone/>
+            </a:pPr>
+            <a:r>
+              <a:rPr lang="en-US" sz="750" i="1" dirty="0">
                 <a:solidFill>
                   <a:srgbClr val="5F7183"/>
                 </a:solidFill>
@@ -2831,116 +3016,15 @@
                 <a:ea typeface="Calibri" pitchFamily="34" charset="-122"/>
                 <a:cs typeface="Calibri" pitchFamily="34" charset="-120"/>
               </a:rPr>
-              <a:t>A fire is now more likely. Switch to a building-wide evacuation.</a:t>
-            </a:r>
-            <a:endParaRPr lang="en-US" sz="1050" dirty="0"/>
-          </a:p>
-        </p:txBody>
-      </p:sp>
-      <p:sp>
-        <p:nvSpPr>
-          <p:cNvPr id="19" name="Shape 16"/>
-          <p:cNvSpPr/>
-          <p:nvPr/>
-        </p:nvSpPr>
-        <p:spPr>
-          <a:xfrm>
-            <a:off x="640080" y="5358384"/>
-            <a:ext cx="10911535" cy="493776"/>
-          </a:xfrm>
-          <a:prstGeom prst="roundRect">
-            <a:avLst>
-              <a:gd name="adj" fmla="val 7407"/>
-            </a:avLst>
-          </a:prstGeom>
-          <a:solidFill>
-            <a:srgbClr val="093259"/>
-          </a:solidFill>
-          <a:ln/>
-        </p:spPr>
-      </p:sp>
-      <p:sp>
-        <p:nvSpPr>
-          <p:cNvPr id="20" name="Text 17"/>
-          <p:cNvSpPr/>
-          <p:nvPr/>
-        </p:nvSpPr>
-        <p:spPr>
-          <a:xfrm>
-            <a:off x="877824" y="5404104"/>
-            <a:ext cx="10436047" cy="402336"/>
-          </a:xfrm>
-          <a:prstGeom prst="rect">
-            <a:avLst/>
-          </a:prstGeom>
-          <a:noFill/>
-          <a:ln/>
-        </p:spPr>
-        <p:txBody>
-          <a:bodyPr wrap="square" lIns="0" tIns="0" rIns="0" bIns="0" rtlCol="0" anchor="ctr"/>
-          <a:lstStyle/>
-          <a:p>
-            <a:pPr indent="0" marL="0">
-              <a:lnSpc>
-                <a:spcPct val="86000"/>
-              </a:lnSpc>
-              <a:buNone/>
-            </a:pPr>
-            <a:r>
-              <a:rPr lang="en-US" sz="950" b="1" dirty="0">
-                <a:solidFill>
-                  <a:srgbClr val="12B198"/>
-                </a:solidFill>
-                <a:latin typeface="Yu Gothic" pitchFamily="34" charset="0"/>
-                <a:ea typeface="Yu Gothic" pitchFamily="34" charset="-122"/>
-                <a:cs typeface="Yu Gothic" pitchFamily="34" charset="-120"/>
-              </a:rPr>
-              <a:t>割れる論点　</a:t>
-            </a:r>
-            <a:pPr indent="0" marL="0">
-              <a:lnSpc>
-                <a:spcPct val="86000"/>
-              </a:lnSpc>
-              <a:buNone/>
-            </a:pPr>
-            <a:r>
-              <a:rPr lang="en-US" sz="1100" b="1" dirty="0">
-                <a:solidFill>
-                  <a:srgbClr val="FFFFFF"/>
-                </a:solidFill>
-                <a:latin typeface="Yu Gothic" pitchFamily="34" charset="0"/>
-                <a:ea typeface="Yu Gothic" pitchFamily="34" charset="-122"/>
-                <a:cs typeface="Yu Gothic" pitchFamily="34" charset="-120"/>
-              </a:rPr>
-              <a:t>諦めるもの ― 初期消火、原因の特定、私物の持ち出し。諦める判断を言えるか。</a:t>
-            </a:r>
-            <a:endParaRPr lang="en-US" sz="950" dirty="0"/>
-          </a:p>
-          <a:p>
-            <a:pPr indent="0" marL="0">
-              <a:lnSpc>
-                <a:spcPct val="86000"/>
-              </a:lnSpc>
-              <a:buNone/>
-            </a:pPr>
-            <a:r>
-              <a:rPr lang="en-US" sz="800" i="1" dirty="0">
-                <a:solidFill>
-                  <a:srgbClr val="9FD8CD"/>
-                </a:solidFill>
-                <a:latin typeface="Calibri" pitchFamily="34" charset="0"/>
-                <a:ea typeface="Calibri" pitchFamily="34" charset="-122"/>
-                <a:cs typeface="Calibri" pitchFamily="34" charset="-120"/>
-              </a:rPr>
-              <a:t>What you give up: firefighting, finding the cause, retrieving belongings. Can they say it out loud?</a:t>
-            </a:r>
-            <a:endParaRPr lang="en-US" sz="950" dirty="0"/>
-          </a:p>
-        </p:txBody>
-      </p:sp>
-      <p:sp>
-        <p:nvSpPr>
-          <p:cNvPr id="21" name="Text 18"/>
+              <a:t>A fire is now more likely. Switch to a building-wide evacuation, and update the fire service.</a:t>
+            </a:r>
+            <a:endParaRPr lang="en-US" sz="850" dirty="0"/>
+          </a:p>
+        </p:txBody>
+      </p:sp>
+      <p:sp>
+        <p:nvSpPr>
+          <p:cNvPr id="26" name="Text 23"/>
           <p:cNvSpPr/>
           <p:nvPr/>
         </p:nvSpPr>
@@ -3019,7 +3103,7 @@
       </p:sp>
       <p:sp>
         <p:nvSpPr>
-          <p:cNvPr id="22" name="Text 19"/>
+          <p:cNvPr id="27" name="Text 24"/>
           <p:cNvSpPr/>
           <p:nvPr/>
         </p:nvSpPr>
@@ -3072,7 +3156,7 @@
       </p:sp>
       <p:sp>
         <p:nvSpPr>
-          <p:cNvPr id="23" name="Text 20"/>
+          <p:cNvPr id="28" name="Text 25"/>
           <p:cNvSpPr/>
           <p:nvPr/>
         </p:nvSpPr>
@@ -3125,7 +3209,7 @@
       </p:sp>
       <p:sp>
         <p:nvSpPr>
-          <p:cNvPr id="24" name="Text 21"/>
+          <p:cNvPr id="29" name="Text 26"/>
           <p:cNvSpPr/>
           <p:nvPr/>
         </p:nvSpPr>
@@ -12851,7 +12935,7 @@
                 <a:ea typeface="Yu Gothic" pitchFamily="34" charset="-122"/>
                 <a:cs typeface="Yu Gothic" pitchFamily="34" charset="-120"/>
               </a:rPr>
-              <a:t>TTX 9-A 講評 ― 模範解答</a:t>
+              <a:t>TTX 9-A 模範解答</a:t>
             </a:r>
             <a:endParaRPr lang="en-US" sz="2300" dirty="0"/>
           </a:p>
@@ -12871,7 +12955,7 @@
                 <a:ea typeface="Calibri" pitchFamily="34" charset="-122"/>
                 <a:cs typeface="Calibri" pitchFamily="34" charset="-120"/>
               </a:rPr>
-              <a:t>TTX 9-A Debrief — Model Answer</a:t>
+              <a:t>TTX 9-A — Model Answers</a:t>
             </a:r>
             <a:endParaRPr lang="en-US" sz="2300" dirty="0"/>
           </a:p>
@@ -12940,97 +13024,18 @@
       </p:sp>
       <p:sp>
         <p:nvSpPr>
-          <p:cNvPr id="6" name="Text 3"/>
+          <p:cNvPr id="6" name="Shape 3"/>
           <p:cNvSpPr/>
           <p:nvPr/>
         </p:nvSpPr>
         <p:spPr>
           <a:xfrm>
             <a:off x="640080" y="1188720"/>
-            <a:ext cx="10911535" cy="530352"/>
-          </a:xfrm>
-          <a:prstGeom prst="rect">
-            <a:avLst/>
-          </a:prstGeom>
-          <a:noFill/>
-          <a:ln/>
-        </p:spPr>
-        <p:txBody>
-          <a:bodyPr wrap="square" lIns="0" tIns="0" rIns="0" bIns="0" rtlCol="0" anchor="t"/>
-          <a:lstStyle/>
-          <a:p>
-            <a:pPr indent="0" marL="0">
-              <a:lnSpc>
-                <a:spcPct val="90000"/>
-              </a:lnSpc>
-              <a:buNone/>
-            </a:pPr>
-            <a:r>
-              <a:rPr lang="en-US" sz="1000" b="1" dirty="0">
-                <a:solidFill>
-                  <a:srgbClr val="0D8A76"/>
-                </a:solidFill>
-                <a:latin typeface="Yu Gothic" pitchFamily="34" charset="0"/>
-                <a:ea typeface="Yu Gothic" pitchFamily="34" charset="-122"/>
-                <a:cs typeface="Yu Gothic" pitchFamily="34" charset="-120"/>
-              </a:rPr>
-              <a:t>狙い　</a:t>
-            </a:r>
-            <a:pPr indent="0" marL="0">
-              <a:lnSpc>
-                <a:spcPct val="90000"/>
-              </a:lnSpc>
-              <a:buNone/>
-            </a:pPr>
-            <a:r>
-              <a:rPr lang="en-US" sz="1150" b="1" dirty="0">
-                <a:solidFill>
-                  <a:srgbClr val="093259"/>
-                </a:solidFill>
-                <a:latin typeface="Yu Gothic" pitchFamily="34" charset="0"/>
-                <a:ea typeface="Yu Gothic" pitchFamily="34" charset="-122"/>
-                <a:cs typeface="Yu Gothic" pitchFamily="34" charset="-120"/>
-              </a:rPr>
-              <a:t>救護のための身元確認と、所持品検査は目的が異なる。ここが最大の論点。</a:t>
-            </a:r>
-            <a:endParaRPr lang="en-US" sz="1000" dirty="0"/>
-          </a:p>
-          <a:p>
-            <a:pPr indent="0" marL="0">
-              <a:lnSpc>
-                <a:spcPct val="90000"/>
-              </a:lnSpc>
-              <a:buNone/>
-            </a:pPr>
-            <a:r>
-              <a:rPr lang="en-US" sz="850" i="1" dirty="0">
-                <a:solidFill>
-                  <a:srgbClr val="5F7183"/>
-                </a:solidFill>
-                <a:latin typeface="Calibri" pitchFamily="34" charset="0"/>
-                <a:ea typeface="Calibri" pitchFamily="34" charset="-122"/>
-                <a:cs typeface="Calibri" pitchFamily="34" charset="-120"/>
-              </a:rPr>
-              <a:t>Identifying someone for their care, and searching their belongings, have different purposes. This is the crux.</a:t>
-            </a:r>
-            <a:endParaRPr lang="en-US" sz="1000" dirty="0"/>
-          </a:p>
-        </p:txBody>
-      </p:sp>
-      <p:sp>
-        <p:nvSpPr>
-          <p:cNvPr id="7" name="Shape 4"/>
-          <p:cNvSpPr/>
-          <p:nvPr/>
-        </p:nvSpPr>
-        <p:spPr>
-          <a:xfrm>
-            <a:off x="640080" y="1773936"/>
-            <a:ext cx="5327752" cy="1091184"/>
+            <a:ext cx="10911535" cy="683514"/>
           </a:xfrm>
           <a:prstGeom prst="roundRect">
             <a:avLst>
-              <a:gd name="adj" fmla="val 3352"/>
+              <a:gd name="adj" fmla="val 5351"/>
             </a:avLst>
           </a:prstGeom>
           <a:solidFill>
@@ -13041,53 +13046,112 @@
       </p:sp>
       <p:sp>
         <p:nvSpPr>
+          <p:cNvPr id="7" name="Shape 4"/>
+          <p:cNvSpPr/>
+          <p:nvPr/>
+        </p:nvSpPr>
+        <p:spPr>
+          <a:xfrm>
+            <a:off x="841248" y="1356741"/>
+            <a:ext cx="347472" cy="347472"/>
+          </a:xfrm>
+          <a:prstGeom prst="ellipse">
+            <a:avLst/>
+          </a:prstGeom>
+          <a:solidFill>
+            <a:srgbClr val="12B198"/>
+          </a:solidFill>
+          <a:ln/>
+        </p:spPr>
+      </p:sp>
+      <p:sp>
+        <p:nvSpPr>
           <p:cNvPr id="8" name="Text 5"/>
           <p:cNvSpPr/>
           <p:nvPr/>
         </p:nvSpPr>
         <p:spPr>
           <a:xfrm>
-            <a:off x="877824" y="1865376"/>
-            <a:ext cx="4852264" cy="908304"/>
-          </a:xfrm>
-          <a:prstGeom prst="rect">
-            <a:avLst/>
-          </a:prstGeom>
-          <a:noFill/>
-          <a:ln/>
-        </p:spPr>
-        <p:txBody>
-          <a:bodyPr wrap="square" lIns="0" tIns="0" rIns="0" bIns="0" rtlCol="0" anchor="t"/>
-          <a:lstStyle/>
-          <a:p>
-            <a:pPr indent="0" marL="0">
-              <a:lnSpc>
-                <a:spcPct val="90000"/>
-              </a:lnSpc>
-              <a:buNone/>
-            </a:pPr>
-            <a:r>
-              <a:rPr lang="en-US" sz="1050" b="1" dirty="0">
-                <a:solidFill>
-                  <a:srgbClr val="0D8A76"/>
-                </a:solidFill>
-                <a:latin typeface="Yu Gothic" pitchFamily="34" charset="0"/>
-                <a:ea typeface="Yu Gothic" pitchFamily="34" charset="-122"/>
-                <a:cs typeface="Yu Gothic" pitchFamily="34" charset="-120"/>
-              </a:rPr>
-              <a:t>最初の30秒</a:t>
-            </a:r>
-            <a:endParaRPr lang="en-US" sz="1050" dirty="0"/>
-          </a:p>
-          <a:p>
-            <a:pPr indent="0" marL="0">
-              <a:lnSpc>
-                <a:spcPct val="90000"/>
-              </a:lnSpc>
-              <a:buNone/>
-            </a:pPr>
-            <a:r>
-              <a:rPr lang="en-US" sz="1050" b="1" dirty="0">
+            <a:off x="841248" y="1356741"/>
+            <a:ext cx="347472" cy="347472"/>
+          </a:xfrm>
+          <a:prstGeom prst="rect">
+            <a:avLst/>
+          </a:prstGeom>
+          <a:noFill/>
+          <a:ln/>
+        </p:spPr>
+        <p:txBody>
+          <a:bodyPr wrap="square" lIns="0" tIns="0" rIns="0" bIns="0" rtlCol="0" anchor="ctr"/>
+          <a:lstStyle/>
+          <a:p>
+            <a:pPr algn="ctr" indent="0" marL="0">
+              <a:buNone/>
+            </a:pPr>
+            <a:r>
+              <a:rPr lang="en-US" sz="1100" b="1" dirty="0">
+                <a:solidFill>
+                  <a:srgbClr val="FFFFFF"/>
+                </a:solidFill>
+                <a:latin typeface="Calibri" pitchFamily="34" charset="0"/>
+                <a:ea typeface="Calibri" pitchFamily="34" charset="-122"/>
+                <a:cs typeface="Calibri" pitchFamily="34" charset="-120"/>
+              </a:rPr>
+              <a:t>1</a:t>
+            </a:r>
+            <a:endParaRPr lang="en-US" sz="1100" dirty="0"/>
+          </a:p>
+        </p:txBody>
+      </p:sp>
+      <p:sp>
+        <p:nvSpPr>
+          <p:cNvPr id="9" name="Text 6"/>
+          <p:cNvSpPr/>
+          <p:nvPr/>
+        </p:nvSpPr>
+        <p:spPr>
+          <a:xfrm>
+            <a:off x="1280160" y="1252728"/>
+            <a:ext cx="10033711" cy="555498"/>
+          </a:xfrm>
+          <a:prstGeom prst="rect">
+            <a:avLst/>
+          </a:prstGeom>
+          <a:noFill/>
+          <a:ln/>
+        </p:spPr>
+        <p:txBody>
+          <a:bodyPr wrap="square" lIns="0" tIns="0" rIns="0" bIns="0" rtlCol="0" anchor="ctr"/>
+          <a:lstStyle/>
+          <a:p>
+            <a:pPr indent="0" marL="0">
+              <a:lnSpc>
+                <a:spcPct val="88000"/>
+              </a:lnSpc>
+              <a:buNone/>
+            </a:pPr>
+            <a:r>
+              <a:rPr lang="en-US" sz="900" dirty="0">
+                <a:solidFill>
+                  <a:srgbClr val="5F7183"/>
+                </a:solidFill>
+                <a:latin typeface="Yu Gothic" pitchFamily="34" charset="0"/>
+                <a:ea typeface="Yu Gothic" pitchFamily="34" charset="-122"/>
+                <a:cs typeface="Yu Gothic" pitchFamily="34" charset="-120"/>
+              </a:rPr>
+              <a:t>問1　最初の30秒に何をするか</a:t>
+            </a:r>
+            <a:endParaRPr lang="en-US" sz="900" dirty="0"/>
+          </a:p>
+          <a:p>
+            <a:pPr indent="0" marL="0">
+              <a:lnSpc>
+                <a:spcPct val="88000"/>
+              </a:lnSpc>
+              <a:buNone/>
+            </a:pPr>
+            <a:r>
+              <a:rPr lang="en-US" sz="1200" b="1" dirty="0">
                 <a:solidFill>
                   <a:srgbClr val="1B2733"/>
                 </a:solidFill>
@@ -13095,14 +13159,14 @@
                 <a:ea typeface="Yu Gothic" pitchFamily="34" charset="-122"/>
                 <a:cs typeface="Yu Gothic" pitchFamily="34" charset="-120"/>
               </a:rPr>
-              <a:t>①周囲の安全 ②反応の確認 ③人を指名して119番と応援を依頼。</a:t>
-            </a:r>
-            <a:endParaRPr lang="en-US" sz="1050" dirty="0"/>
-          </a:p>
-          <a:p>
-            <a:pPr indent="0" marL="0">
-              <a:lnSpc>
-                <a:spcPct val="90000"/>
+              <a:t>①周囲の安全 ②反応の確認 ③人を指名して119番と応援を依頼。「誰か」では動かない。</a:t>
+            </a:r>
+            <a:endParaRPr lang="en-US" sz="900" dirty="0"/>
+          </a:p>
+          <a:p>
+            <a:pPr indent="0" marL="0">
+              <a:lnSpc>
+                <a:spcPct val="88000"/>
               </a:lnSpc>
               <a:buNone/>
             </a:pPr>
@@ -13115,26 +13179,26 @@
                 <a:ea typeface="Calibri" pitchFamily="34" charset="-122"/>
                 <a:cs typeface="Calibri" pitchFamily="34" charset="-120"/>
               </a:rPr>
-              <a:t>1) Make the area safe 2) check responsiveness 3) name a person to call and to fetch help.</a:t>
-            </a:r>
-            <a:endParaRPr lang="en-US" sz="1050" dirty="0"/>
-          </a:p>
-        </p:txBody>
-      </p:sp>
-      <p:sp>
-        <p:nvSpPr>
-          <p:cNvPr id="9" name="Shape 6"/>
-          <p:cNvSpPr/>
-          <p:nvPr/>
-        </p:nvSpPr>
-        <p:spPr>
-          <a:xfrm>
-            <a:off x="6223864" y="1773936"/>
-            <a:ext cx="5327752" cy="1091184"/>
+              <a:t>1) Make the area safe 2) check responsiveness 3) name a person to call and to fetch help. "Someone" does not move.</a:t>
+            </a:r>
+            <a:endParaRPr lang="en-US" sz="900" dirty="0"/>
+          </a:p>
+        </p:txBody>
+      </p:sp>
+      <p:sp>
+        <p:nvSpPr>
+          <p:cNvPr id="10" name="Shape 7"/>
+          <p:cNvSpPr/>
+          <p:nvPr/>
+        </p:nvSpPr>
+        <p:spPr>
+          <a:xfrm>
+            <a:off x="640080" y="1972818"/>
+            <a:ext cx="10911535" cy="683514"/>
           </a:xfrm>
           <a:prstGeom prst="roundRect">
             <a:avLst>
-              <a:gd name="adj" fmla="val 3352"/>
+              <a:gd name="adj" fmla="val 5351"/>
             </a:avLst>
           </a:prstGeom>
           <a:solidFill>
@@ -13145,53 +13209,112 @@
       </p:sp>
       <p:sp>
         <p:nvSpPr>
-          <p:cNvPr id="10" name="Text 7"/>
-          <p:cNvSpPr/>
-          <p:nvPr/>
-        </p:nvSpPr>
-        <p:spPr>
-          <a:xfrm>
-            <a:off x="6461608" y="1865376"/>
-            <a:ext cx="4852264" cy="908304"/>
-          </a:xfrm>
-          <a:prstGeom prst="rect">
-            <a:avLst/>
-          </a:prstGeom>
-          <a:noFill/>
-          <a:ln/>
-        </p:spPr>
-        <p:txBody>
-          <a:bodyPr wrap="square" lIns="0" tIns="0" rIns="0" bIns="0" rtlCol="0" anchor="t"/>
-          <a:lstStyle/>
-          <a:p>
-            <a:pPr indent="0" marL="0">
-              <a:lnSpc>
-                <a:spcPct val="90000"/>
-              </a:lnSpc>
-              <a:buNone/>
-            </a:pPr>
-            <a:r>
-              <a:rPr lang="en-US" sz="1050" b="1" dirty="0">
-                <a:solidFill>
-                  <a:srgbClr val="093259"/>
-                </a:solidFill>
-                <a:latin typeface="Yu Gothic" pitchFamily="34" charset="0"/>
-                <a:ea typeface="Yu Gothic" pitchFamily="34" charset="-122"/>
-                <a:cs typeface="Yu Gothic" pitchFamily="34" charset="-120"/>
-              </a:rPr>
-              <a:t>「誰か」では動かない</a:t>
-            </a:r>
-            <a:endParaRPr lang="en-US" sz="1050" dirty="0"/>
-          </a:p>
-          <a:p>
-            <a:pPr indent="0" marL="0">
-              <a:lnSpc>
-                <a:spcPct val="90000"/>
-              </a:lnSpc>
-              <a:buNone/>
-            </a:pPr>
-            <a:r>
-              <a:rPr lang="en-US" sz="1050" b="1" dirty="0">
+          <p:cNvPr id="11" name="Shape 8"/>
+          <p:cNvSpPr/>
+          <p:nvPr/>
+        </p:nvSpPr>
+        <p:spPr>
+          <a:xfrm>
+            <a:off x="841248" y="2140839"/>
+            <a:ext cx="347472" cy="347472"/>
+          </a:xfrm>
+          <a:prstGeom prst="ellipse">
+            <a:avLst/>
+          </a:prstGeom>
+          <a:solidFill>
+            <a:srgbClr val="12B198"/>
+          </a:solidFill>
+          <a:ln/>
+        </p:spPr>
+      </p:sp>
+      <p:sp>
+        <p:nvSpPr>
+          <p:cNvPr id="12" name="Text 9"/>
+          <p:cNvSpPr/>
+          <p:nvPr/>
+        </p:nvSpPr>
+        <p:spPr>
+          <a:xfrm>
+            <a:off x="841248" y="2140839"/>
+            <a:ext cx="347472" cy="347472"/>
+          </a:xfrm>
+          <a:prstGeom prst="rect">
+            <a:avLst/>
+          </a:prstGeom>
+          <a:noFill/>
+          <a:ln/>
+        </p:spPr>
+        <p:txBody>
+          <a:bodyPr wrap="square" lIns="0" tIns="0" rIns="0" bIns="0" rtlCol="0" anchor="ctr"/>
+          <a:lstStyle/>
+          <a:p>
+            <a:pPr algn="ctr" indent="0" marL="0">
+              <a:buNone/>
+            </a:pPr>
+            <a:r>
+              <a:rPr lang="en-US" sz="1100" b="1" dirty="0">
+                <a:solidFill>
+                  <a:srgbClr val="FFFFFF"/>
+                </a:solidFill>
+                <a:latin typeface="Calibri" pitchFamily="34" charset="0"/>
+                <a:ea typeface="Calibri" pitchFamily="34" charset="-122"/>
+                <a:cs typeface="Calibri" pitchFamily="34" charset="-120"/>
+              </a:rPr>
+              <a:t>2</a:t>
+            </a:r>
+            <a:endParaRPr lang="en-US" sz="1100" dirty="0"/>
+          </a:p>
+        </p:txBody>
+      </p:sp>
+      <p:sp>
+        <p:nvSpPr>
+          <p:cNvPr id="13" name="Text 10"/>
+          <p:cNvSpPr/>
+          <p:nvPr/>
+        </p:nvSpPr>
+        <p:spPr>
+          <a:xfrm>
+            <a:off x="1280160" y="2036826"/>
+            <a:ext cx="10033711" cy="555498"/>
+          </a:xfrm>
+          <a:prstGeom prst="rect">
+            <a:avLst/>
+          </a:prstGeom>
+          <a:noFill/>
+          <a:ln/>
+        </p:spPr>
+        <p:txBody>
+          <a:bodyPr wrap="square" lIns="0" tIns="0" rIns="0" bIns="0" rtlCol="0" anchor="ctr"/>
+          <a:lstStyle/>
+          <a:p>
+            <a:pPr indent="0" marL="0">
+              <a:lnSpc>
+                <a:spcPct val="88000"/>
+              </a:lnSpc>
+              <a:buNone/>
+            </a:pPr>
+            <a:r>
+              <a:rPr lang="en-US" sz="900" dirty="0">
+                <a:solidFill>
+                  <a:srgbClr val="5F7183"/>
+                </a:solidFill>
+                <a:latin typeface="Yu Gothic" pitchFamily="34" charset="0"/>
+                <a:ea typeface="Yu Gothic" pitchFamily="34" charset="-122"/>
+                <a:cs typeface="Yu Gothic" pitchFamily="34" charset="-120"/>
+              </a:rPr>
+              <a:t>問2　110番か119番か</a:t>
+            </a:r>
+            <a:endParaRPr lang="en-US" sz="900" dirty="0"/>
+          </a:p>
+          <a:p>
+            <a:pPr indent="0" marL="0">
+              <a:lnSpc>
+                <a:spcPct val="88000"/>
+              </a:lnSpc>
+              <a:buNone/>
+            </a:pPr>
+            <a:r>
+              <a:rPr lang="en-US" sz="1200" b="1" dirty="0">
                 <a:solidFill>
                   <a:srgbClr val="1B2733"/>
                 </a:solidFill>
@@ -13199,14 +13322,14 @@
                 <a:ea typeface="Yu Gothic" pitchFamily="34" charset="-122"/>
                 <a:cs typeface="Yu Gothic" pitchFamily="34" charset="-120"/>
               </a:rPr>
-              <a:t>「そこの青い服の方、119番をお願いします」と指名する。</a:t>
-            </a:r>
-            <a:endParaRPr lang="en-US" sz="1050" dirty="0"/>
-          </a:p>
-          <a:p>
-            <a:pPr indent="0" marL="0">
-              <a:lnSpc>
-                <a:spcPct val="90000"/>
+              <a:t>まず119番。人命が先。事件性の判断は後からできるが、命は戻らない。</a:t>
+            </a:r>
+            <a:endParaRPr lang="en-US" sz="900" dirty="0"/>
+          </a:p>
+          <a:p>
+            <a:pPr indent="0" marL="0">
+              <a:lnSpc>
+                <a:spcPct val="88000"/>
               </a:lnSpc>
               <a:buNone/>
             </a:pPr>
@@ -13219,26 +13342,189 @@
                 <a:ea typeface="Calibri" pitchFamily="34" charset="-122"/>
                 <a:cs typeface="Calibri" pitchFamily="34" charset="-120"/>
               </a:rPr>
-              <a:t>Point and name: "You, in the blue shirt — call an ambulance."</a:t>
-            </a:r>
-            <a:endParaRPr lang="en-US" sz="1050" dirty="0"/>
-          </a:p>
-        </p:txBody>
-      </p:sp>
-      <p:sp>
-        <p:nvSpPr>
-          <p:cNvPr id="11" name="Shape 8"/>
-          <p:cNvSpPr/>
-          <p:nvPr/>
-        </p:nvSpPr>
-        <p:spPr>
-          <a:xfrm>
-            <a:off x="640080" y="2993136"/>
-            <a:ext cx="5327752" cy="1091184"/>
+              <a:t>Ambulance first. Life comes first — the criminal question can wait, a life cannot.</a:t>
+            </a:r>
+            <a:endParaRPr lang="en-US" sz="900" dirty="0"/>
+          </a:p>
+        </p:txBody>
+      </p:sp>
+      <p:sp>
+        <p:nvSpPr>
+          <p:cNvPr id="14" name="Shape 11"/>
+          <p:cNvSpPr/>
+          <p:nvPr/>
+        </p:nvSpPr>
+        <p:spPr>
+          <a:xfrm>
+            <a:off x="640080" y="2756916"/>
+            <a:ext cx="10911535" cy="683514"/>
           </a:xfrm>
           <a:prstGeom prst="roundRect">
             <a:avLst>
-              <a:gd name="adj" fmla="val 3352"/>
+              <a:gd name="adj" fmla="val 5351"/>
+            </a:avLst>
+          </a:prstGeom>
+          <a:solidFill>
+            <a:srgbClr val="E4F4F0"/>
+          </a:solidFill>
+          <a:ln/>
+        </p:spPr>
+      </p:sp>
+      <p:sp>
+        <p:nvSpPr>
+          <p:cNvPr id="15" name="Shape 12"/>
+          <p:cNvSpPr/>
+          <p:nvPr/>
+        </p:nvSpPr>
+        <p:spPr>
+          <a:xfrm>
+            <a:off x="841248" y="2924937"/>
+            <a:ext cx="347472" cy="347472"/>
+          </a:xfrm>
+          <a:prstGeom prst="ellipse">
+            <a:avLst/>
+          </a:prstGeom>
+          <a:solidFill>
+            <a:srgbClr val="12B198"/>
+          </a:solidFill>
+          <a:ln/>
+        </p:spPr>
+      </p:sp>
+      <p:sp>
+        <p:nvSpPr>
+          <p:cNvPr id="16" name="Text 13"/>
+          <p:cNvSpPr/>
+          <p:nvPr/>
+        </p:nvSpPr>
+        <p:spPr>
+          <a:xfrm>
+            <a:off x="841248" y="2924937"/>
+            <a:ext cx="347472" cy="347472"/>
+          </a:xfrm>
+          <a:prstGeom prst="rect">
+            <a:avLst/>
+          </a:prstGeom>
+          <a:noFill/>
+          <a:ln/>
+        </p:spPr>
+        <p:txBody>
+          <a:bodyPr wrap="square" lIns="0" tIns="0" rIns="0" bIns="0" rtlCol="0" anchor="ctr"/>
+          <a:lstStyle/>
+          <a:p>
+            <a:pPr algn="ctr" indent="0" marL="0">
+              <a:buNone/>
+            </a:pPr>
+            <a:r>
+              <a:rPr lang="en-US" sz="1100" b="1" dirty="0">
+                <a:solidFill>
+                  <a:srgbClr val="FFFFFF"/>
+                </a:solidFill>
+                <a:latin typeface="Calibri" pitchFamily="34" charset="0"/>
+                <a:ea typeface="Calibri" pitchFamily="34" charset="-122"/>
+                <a:cs typeface="Calibri" pitchFamily="34" charset="-120"/>
+              </a:rPr>
+              <a:t>3</a:t>
+            </a:r>
+            <a:endParaRPr lang="en-US" sz="1100" dirty="0"/>
+          </a:p>
+        </p:txBody>
+      </p:sp>
+      <p:sp>
+        <p:nvSpPr>
+          <p:cNvPr id="17" name="Text 14"/>
+          <p:cNvSpPr/>
+          <p:nvPr/>
+        </p:nvSpPr>
+        <p:spPr>
+          <a:xfrm>
+            <a:off x="1280160" y="2820924"/>
+            <a:ext cx="10033711" cy="555498"/>
+          </a:xfrm>
+          <a:prstGeom prst="rect">
+            <a:avLst/>
+          </a:prstGeom>
+          <a:noFill/>
+          <a:ln/>
+        </p:spPr>
+        <p:txBody>
+          <a:bodyPr wrap="square" lIns="0" tIns="0" rIns="0" bIns="0" rtlCol="0" anchor="ctr"/>
+          <a:lstStyle/>
+          <a:p>
+            <a:pPr indent="0" marL="0">
+              <a:lnSpc>
+                <a:spcPct val="88000"/>
+              </a:lnSpc>
+              <a:buNone/>
+            </a:pPr>
+            <a:r>
+              <a:rPr lang="en-US" sz="900" dirty="0">
+                <a:solidFill>
+                  <a:srgbClr val="5F7183"/>
+                </a:solidFill>
+                <a:latin typeface="Yu Gothic" pitchFamily="34" charset="0"/>
+                <a:ea typeface="Yu Gothic" pitchFamily="34" charset="-122"/>
+                <a:cs typeface="Yu Gothic" pitchFamily="34" charset="-120"/>
+              </a:rPr>
+              <a:t>問3　所持品を見てよいか</a:t>
+            </a:r>
+            <a:endParaRPr lang="en-US" sz="900" dirty="0"/>
+          </a:p>
+          <a:p>
+            <a:pPr indent="0" marL="0">
+              <a:lnSpc>
+                <a:spcPct val="88000"/>
+              </a:lnSpc>
+              <a:buNone/>
+            </a:pPr>
+            <a:r>
+              <a:rPr lang="en-US" sz="1200" b="1" dirty="0">
+                <a:solidFill>
+                  <a:srgbClr val="1B2733"/>
+                </a:solidFill>
+                <a:latin typeface="Yu Gothic" pitchFamily="34" charset="0"/>
+                <a:ea typeface="Yu Gothic" pitchFamily="34" charset="-122"/>
+                <a:cs typeface="Yu Gothic" pitchFamily="34" charset="-120"/>
+              </a:rPr>
+              <a:t>単独では見ない。救急隊または警察の面前で行う。実施したら面前者・時刻・対象を記録。</a:t>
+            </a:r>
+            <a:endParaRPr lang="en-US" sz="900" dirty="0"/>
+          </a:p>
+          <a:p>
+            <a:pPr indent="0" marL="0">
+              <a:lnSpc>
+                <a:spcPct val="88000"/>
+              </a:lnSpc>
+              <a:buNone/>
+            </a:pPr>
+            <a:r>
+              <a:rPr lang="en-US" sz="800" i="1" dirty="0">
+                <a:solidFill>
+                  <a:srgbClr val="5F7183"/>
+                </a:solidFill>
+                <a:latin typeface="Calibri" pitchFamily="34" charset="0"/>
+                <a:ea typeface="Calibri" pitchFamily="34" charset="-122"/>
+                <a:cs typeface="Calibri" pitchFamily="34" charset="-120"/>
+              </a:rPr>
+              <a:t>Not alone. Do it in front of the ambulance crew or the police, and record who was present, when, and what.</a:t>
+            </a:r>
+            <a:endParaRPr lang="en-US" sz="900" dirty="0"/>
+          </a:p>
+        </p:txBody>
+      </p:sp>
+      <p:sp>
+        <p:nvSpPr>
+          <p:cNvPr id="18" name="Shape 15"/>
+          <p:cNvSpPr/>
+          <p:nvPr/>
+        </p:nvSpPr>
+        <p:spPr>
+          <a:xfrm>
+            <a:off x="640080" y="3541014"/>
+            <a:ext cx="10911535" cy="683514"/>
+          </a:xfrm>
+          <a:prstGeom prst="roundRect">
+            <a:avLst>
+              <a:gd name="adj" fmla="val 5351"/>
             </a:avLst>
           </a:prstGeom>
           <a:solidFill>
@@ -13249,53 +13535,112 @@
       </p:sp>
       <p:sp>
         <p:nvSpPr>
-          <p:cNvPr id="12" name="Text 9"/>
-          <p:cNvSpPr/>
-          <p:nvPr/>
-        </p:nvSpPr>
-        <p:spPr>
-          <a:xfrm>
-            <a:off x="877824" y="3084576"/>
-            <a:ext cx="4852264" cy="908304"/>
-          </a:xfrm>
-          <a:prstGeom prst="rect">
-            <a:avLst/>
-          </a:prstGeom>
-          <a:noFill/>
-          <a:ln/>
-        </p:spPr>
-        <p:txBody>
-          <a:bodyPr wrap="square" lIns="0" tIns="0" rIns="0" bIns="0" rtlCol="0" anchor="t"/>
-          <a:lstStyle/>
-          <a:p>
-            <a:pPr indent="0" marL="0">
-              <a:lnSpc>
-                <a:spcPct val="90000"/>
-              </a:lnSpc>
-              <a:buNone/>
-            </a:pPr>
-            <a:r>
-              <a:rPr lang="en-US" sz="1050" b="1" dirty="0">
-                <a:solidFill>
-                  <a:srgbClr val="093259"/>
-                </a:solidFill>
-                <a:latin typeface="Yu Gothic" pitchFamily="34" charset="0"/>
-                <a:ea typeface="Yu Gothic" pitchFamily="34" charset="-122"/>
-                <a:cs typeface="Yu Gothic" pitchFamily="34" charset="-120"/>
-              </a:rPr>
-              <a:t>110か119か</a:t>
-            </a:r>
-            <a:endParaRPr lang="en-US" sz="1050" dirty="0"/>
-          </a:p>
-          <a:p>
-            <a:pPr indent="0" marL="0">
-              <a:lnSpc>
-                <a:spcPct val="90000"/>
-              </a:lnSpc>
-              <a:buNone/>
-            </a:pPr>
-            <a:r>
-              <a:rPr lang="en-US" sz="1050" b="1" dirty="0">
+          <p:cNvPr id="19" name="Shape 16"/>
+          <p:cNvSpPr/>
+          <p:nvPr/>
+        </p:nvSpPr>
+        <p:spPr>
+          <a:xfrm>
+            <a:off x="841248" y="3709035"/>
+            <a:ext cx="347472" cy="347472"/>
+          </a:xfrm>
+          <a:prstGeom prst="ellipse">
+            <a:avLst/>
+          </a:prstGeom>
+          <a:solidFill>
+            <a:srgbClr val="12B198"/>
+          </a:solidFill>
+          <a:ln/>
+        </p:spPr>
+      </p:sp>
+      <p:sp>
+        <p:nvSpPr>
+          <p:cNvPr id="20" name="Text 17"/>
+          <p:cNvSpPr/>
+          <p:nvPr/>
+        </p:nvSpPr>
+        <p:spPr>
+          <a:xfrm>
+            <a:off x="841248" y="3709035"/>
+            <a:ext cx="347472" cy="347472"/>
+          </a:xfrm>
+          <a:prstGeom prst="rect">
+            <a:avLst/>
+          </a:prstGeom>
+          <a:noFill/>
+          <a:ln/>
+        </p:spPr>
+        <p:txBody>
+          <a:bodyPr wrap="square" lIns="0" tIns="0" rIns="0" bIns="0" rtlCol="0" anchor="ctr"/>
+          <a:lstStyle/>
+          <a:p>
+            <a:pPr algn="ctr" indent="0" marL="0">
+              <a:buNone/>
+            </a:pPr>
+            <a:r>
+              <a:rPr lang="en-US" sz="1100" b="1" dirty="0">
+                <a:solidFill>
+                  <a:srgbClr val="FFFFFF"/>
+                </a:solidFill>
+                <a:latin typeface="Calibri" pitchFamily="34" charset="0"/>
+                <a:ea typeface="Calibri" pitchFamily="34" charset="-122"/>
+                <a:cs typeface="Calibri" pitchFamily="34" charset="-120"/>
+              </a:rPr>
+              <a:t>4</a:t>
+            </a:r>
+            <a:endParaRPr lang="en-US" sz="1100" dirty="0"/>
+          </a:p>
+        </p:txBody>
+      </p:sp>
+      <p:sp>
+        <p:nvSpPr>
+          <p:cNvPr id="21" name="Text 18"/>
+          <p:cNvSpPr/>
+          <p:nvPr/>
+        </p:nvSpPr>
+        <p:spPr>
+          <a:xfrm>
+            <a:off x="1280160" y="3605022"/>
+            <a:ext cx="10033711" cy="555498"/>
+          </a:xfrm>
+          <a:prstGeom prst="rect">
+            <a:avLst/>
+          </a:prstGeom>
+          <a:noFill/>
+          <a:ln/>
+        </p:spPr>
+        <p:txBody>
+          <a:bodyPr wrap="square" lIns="0" tIns="0" rIns="0" bIns="0" rtlCol="0" anchor="ctr"/>
+          <a:lstStyle/>
+          <a:p>
+            <a:pPr indent="0" marL="0">
+              <a:lnSpc>
+                <a:spcPct val="88000"/>
+              </a:lnSpc>
+              <a:buNone/>
+            </a:pPr>
+            <a:r>
+              <a:rPr lang="en-US" sz="900" dirty="0">
+                <a:solidFill>
+                  <a:srgbClr val="5F7183"/>
+                </a:solidFill>
+                <a:latin typeface="Yu Gothic" pitchFamily="34" charset="0"/>
+                <a:ea typeface="Yu Gothic" pitchFamily="34" charset="-122"/>
+                <a:cs typeface="Yu Gothic" pitchFamily="34" charset="-120"/>
+              </a:rPr>
+              <a:t>問4　保存範囲と社内報告</a:t>
+            </a:r>
+            <a:endParaRPr lang="en-US" sz="900" dirty="0"/>
+          </a:p>
+          <a:p>
+            <a:pPr indent="0" marL="0">
+              <a:lnSpc>
+                <a:spcPct val="88000"/>
+              </a:lnSpc>
+              <a:buNone/>
+            </a:pPr>
+            <a:r>
+              <a:rPr lang="en-US" sz="1200" b="1" dirty="0">
                 <a:solidFill>
                   <a:srgbClr val="1B2733"/>
                 </a:solidFill>
@@ -13303,14 +13648,14 @@
                 <a:ea typeface="Yu Gothic" pitchFamily="34" charset="-122"/>
                 <a:cs typeface="Yu Gothic" pitchFamily="34" charset="-120"/>
               </a:rPr>
-              <a:t>まず119。人命が先。事件性の判断は後からできる。</a:t>
-            </a:r>
-            <a:endParaRPr lang="en-US" sz="1050" dirty="0"/>
-          </a:p>
-          <a:p>
-            <a:pPr indent="0" marL="0">
-              <a:lnSpc>
-                <a:spcPct val="90000"/>
+              <a:t>ガラスとキャビネットに触れない。範囲は広めに。警備責任者へ即時、人身事故のため三次まで想定。</a:t>
+            </a:r>
+            <a:endParaRPr lang="en-US" sz="900" dirty="0"/>
+          </a:p>
+          <a:p>
+            <a:pPr indent="0" marL="0">
+              <a:lnSpc>
+                <a:spcPct val="88000"/>
               </a:lnSpc>
               <a:buNone/>
             </a:pPr>
@@ -13323,63 +13668,63 @@
                 <a:ea typeface="Calibri" pitchFamily="34" charset="-122"/>
                 <a:cs typeface="Calibri" pitchFamily="34" charset="-120"/>
               </a:rPr>
-              <a:t>Ambulance first. Life comes first; the criminal question can wait.</a:t>
-            </a:r>
-            <a:endParaRPr lang="en-US" sz="1050" dirty="0"/>
-          </a:p>
-        </p:txBody>
-      </p:sp>
-      <p:sp>
-        <p:nvSpPr>
-          <p:cNvPr id="13" name="Shape 10"/>
-          <p:cNvSpPr/>
-          <p:nvPr/>
-        </p:nvSpPr>
-        <p:spPr>
-          <a:xfrm>
-            <a:off x="6223864" y="2993136"/>
-            <a:ext cx="5327752" cy="1091184"/>
+              <a:t>Do not touch the glass or cabinet. Cordon wide. Supervisor immediately; with an injury, expect it to reach executives.</a:t>
+            </a:r>
+            <a:endParaRPr lang="en-US" sz="900" dirty="0"/>
+          </a:p>
+        </p:txBody>
+      </p:sp>
+      <p:sp>
+        <p:nvSpPr>
+          <p:cNvPr id="22" name="Shape 19"/>
+          <p:cNvSpPr/>
+          <p:nvPr/>
+        </p:nvSpPr>
+        <p:spPr>
+          <a:xfrm>
+            <a:off x="640080" y="4334256"/>
+            <a:ext cx="10911535" cy="420624"/>
           </a:xfrm>
           <a:prstGeom prst="roundRect">
             <a:avLst>
-              <a:gd name="adj" fmla="val 3352"/>
+              <a:gd name="adj" fmla="val 8696"/>
             </a:avLst>
           </a:prstGeom>
           <a:solidFill>
-            <a:srgbClr val="E4F4F0"/>
+            <a:srgbClr val="EEF6FA"/>
           </a:solidFill>
           <a:ln/>
         </p:spPr>
       </p:sp>
       <p:sp>
         <p:nvSpPr>
-          <p:cNvPr id="14" name="Text 11"/>
-          <p:cNvSpPr/>
-          <p:nvPr/>
-        </p:nvSpPr>
-        <p:spPr>
-          <a:xfrm>
-            <a:off x="6461608" y="3084576"/>
-            <a:ext cx="4852264" cy="908304"/>
-          </a:xfrm>
-          <a:prstGeom prst="rect">
-            <a:avLst/>
-          </a:prstGeom>
-          <a:noFill/>
-          <a:ln/>
-        </p:spPr>
-        <p:txBody>
-          <a:bodyPr wrap="square" lIns="0" tIns="0" rIns="0" bIns="0" rtlCol="0" anchor="t"/>
-          <a:lstStyle/>
-          <a:p>
-            <a:pPr indent="0" marL="0">
-              <a:lnSpc>
-                <a:spcPct val="90000"/>
-              </a:lnSpc>
-              <a:buNone/>
-            </a:pPr>
-            <a:r>
-              <a:rPr lang="en-US" sz="1050" b="1" dirty="0">
+          <p:cNvPr id="23" name="Text 20"/>
+          <p:cNvSpPr/>
+          <p:nvPr/>
+        </p:nvSpPr>
+        <p:spPr>
+          <a:xfrm>
+            <a:off x="859536" y="4361688"/>
+            <a:ext cx="10472623" cy="365760"/>
+          </a:xfrm>
+          <a:prstGeom prst="rect">
+            <a:avLst/>
+          </a:prstGeom>
+          <a:noFill/>
+          <a:ln/>
+        </p:spPr>
+        <p:txBody>
+          <a:bodyPr wrap="square" lIns="0" tIns="0" rIns="0" bIns="0" rtlCol="0" anchor="ctr"/>
+          <a:lstStyle/>
+          <a:p>
+            <a:pPr indent="0" marL="0">
+              <a:lnSpc>
+                <a:spcPct val="86000"/>
+              </a:lnSpc>
+              <a:buNone/>
+            </a:pPr>
+            <a:r>
+              <a:rPr lang="en-US" sz="850" b="1" dirty="0">
                 <a:solidFill>
                   <a:srgbClr val="0D8A76"/>
                 </a:solidFill>
@@ -13387,19 +13732,33 @@
                 <a:ea typeface="Yu Gothic" pitchFamily="34" charset="-122"/>
                 <a:cs typeface="Yu Gothic" pitchFamily="34" charset="-120"/>
               </a:rPr>
-              <a:t>所持品を見てよいか</a:t>
-            </a:r>
-            <a:endParaRPr lang="en-US" sz="1050" dirty="0"/>
-          </a:p>
-          <a:p>
-            <a:pPr indent="0" marL="0">
-              <a:lnSpc>
-                <a:spcPct val="90000"/>
-              </a:lnSpc>
-              <a:buNone/>
-            </a:pPr>
-            <a:r>
-              <a:rPr lang="en-US" sz="1050" b="1" dirty="0">
+              <a:t>追加付与①　</a:t>
+            </a:r>
+            <a:pPr indent="0" marL="0">
+              <a:lnSpc>
+                <a:spcPct val="86000"/>
+              </a:lnSpc>
+              <a:buNone/>
+            </a:pPr>
+            <a:r>
+              <a:rPr lang="en-US" sz="850" dirty="0">
+                <a:solidFill>
+                  <a:srgbClr val="5F7183"/>
+                </a:solidFill>
+                <a:latin typeface="Yu Gothic" pitchFamily="34" charset="0"/>
+                <a:ea typeface="Yu Gothic" pitchFamily="34" charset="-122"/>
+                <a:cs typeface="Yu Gothic" pitchFamily="34" charset="-120"/>
+              </a:rPr>
+              <a:t>社員がガラスを拾い始めた　→　</a:t>
+            </a:r>
+            <a:pPr indent="0" marL="0">
+              <a:lnSpc>
+                <a:spcPct val="86000"/>
+              </a:lnSpc>
+              <a:buNone/>
+            </a:pPr>
+            <a:r>
+              <a:rPr lang="en-US" sz="1100" b="1" dirty="0">
                 <a:solidFill>
                   <a:srgbClr val="1B2733"/>
                 </a:solidFill>
@@ -13407,19 +13766,19 @@
                 <a:ea typeface="Yu Gothic" pitchFamily="34" charset="-122"/>
                 <a:cs typeface="Yu Gothic" pitchFamily="34" charset="-120"/>
               </a:rPr>
-              <a:t>単独で開けない。救急隊・警察の面前で行うのが安全。</a:t>
-            </a:r>
-            <a:endParaRPr lang="en-US" sz="1050" dirty="0"/>
-          </a:p>
-          <a:p>
-            <a:pPr indent="0" marL="0">
-              <a:lnSpc>
-                <a:spcPct val="90000"/>
-              </a:lnSpc>
-              <a:buNone/>
-            </a:pPr>
-            <a:r>
-              <a:rPr lang="en-US" sz="800" i="1" dirty="0">
+              <a:t>止める。「そのままにしてください」と理由を添える。善意なので責める言い方をしない。</a:t>
+            </a:r>
+            <a:endParaRPr lang="en-US" sz="850" dirty="0"/>
+          </a:p>
+          <a:p>
+            <a:pPr indent="0" marL="0">
+              <a:lnSpc>
+                <a:spcPct val="86000"/>
+              </a:lnSpc>
+              <a:buNone/>
+            </a:pPr>
+            <a:r>
+              <a:rPr lang="en-US" sz="750" i="1" dirty="0">
                 <a:solidFill>
                   <a:srgbClr val="5F7183"/>
                 </a:solidFill>
@@ -13427,83 +13786,97 @@
                 <a:ea typeface="Calibri" pitchFamily="34" charset="-122"/>
                 <a:cs typeface="Calibri" pitchFamily="34" charset="-120"/>
               </a:rPr>
-              <a:t>Not alone. Do it in the presence of the ambulance crew or police.</a:t>
-            </a:r>
-            <a:endParaRPr lang="en-US" sz="1050" dirty="0"/>
-          </a:p>
-        </p:txBody>
-      </p:sp>
-      <p:sp>
-        <p:nvSpPr>
-          <p:cNvPr id="15" name="Shape 12"/>
-          <p:cNvSpPr/>
-          <p:nvPr/>
-        </p:nvSpPr>
-        <p:spPr>
-          <a:xfrm>
-            <a:off x="640080" y="4212336"/>
-            <a:ext cx="5327752" cy="1091184"/>
+              <a:t>Stop them: "please leave it as it is," with the reason. It was well meant — do not phrase it as blame.</a:t>
+            </a:r>
+            <a:endParaRPr lang="en-US" sz="850" dirty="0"/>
+          </a:p>
+        </p:txBody>
+      </p:sp>
+      <p:sp>
+        <p:nvSpPr>
+          <p:cNvPr id="24" name="Shape 21"/>
+          <p:cNvSpPr/>
+          <p:nvPr/>
+        </p:nvSpPr>
+        <p:spPr>
+          <a:xfrm>
+            <a:off x="640080" y="4828032"/>
+            <a:ext cx="10911535" cy="420624"/>
           </a:xfrm>
           <a:prstGeom prst="roundRect">
             <a:avLst>
-              <a:gd name="adj" fmla="val 3352"/>
+              <a:gd name="adj" fmla="val 8696"/>
             </a:avLst>
           </a:prstGeom>
           <a:solidFill>
-            <a:srgbClr val="EFF4F8"/>
+            <a:srgbClr val="EEF6FA"/>
           </a:solidFill>
           <a:ln/>
         </p:spPr>
       </p:sp>
       <p:sp>
         <p:nvSpPr>
-          <p:cNvPr id="16" name="Text 13"/>
-          <p:cNvSpPr/>
-          <p:nvPr/>
-        </p:nvSpPr>
-        <p:spPr>
-          <a:xfrm>
-            <a:off x="877824" y="4303776"/>
-            <a:ext cx="4852264" cy="908304"/>
-          </a:xfrm>
-          <a:prstGeom prst="rect">
-            <a:avLst/>
-          </a:prstGeom>
-          <a:noFill/>
-          <a:ln/>
-        </p:spPr>
-        <p:txBody>
-          <a:bodyPr wrap="square" lIns="0" tIns="0" rIns="0" bIns="0" rtlCol="0" anchor="t"/>
-          <a:lstStyle/>
-          <a:p>
-            <a:pPr indent="0" marL="0">
-              <a:lnSpc>
-                <a:spcPct val="90000"/>
-              </a:lnSpc>
-              <a:buNone/>
-            </a:pPr>
-            <a:r>
-              <a:rPr lang="en-US" sz="1050" b="1" dirty="0">
-                <a:solidFill>
-                  <a:srgbClr val="093259"/>
-                </a:solidFill>
-                <a:latin typeface="Yu Gothic" pitchFamily="34" charset="0"/>
-                <a:ea typeface="Yu Gothic" pitchFamily="34" charset="-122"/>
-                <a:cs typeface="Yu Gothic" pitchFamily="34" charset="-120"/>
-              </a:rPr>
-              <a:t>実施した場合</a:t>
-            </a:r>
-            <a:endParaRPr lang="en-US" sz="1050" dirty="0"/>
-          </a:p>
-          <a:p>
-            <a:pPr indent="0" marL="0">
-              <a:lnSpc>
-                <a:spcPct val="90000"/>
-              </a:lnSpc>
-              <a:buNone/>
-            </a:pPr>
-            <a:r>
-              <a:rPr lang="en-US" sz="1050" b="1" dirty="0">
+          <p:cNvPr id="25" name="Text 22"/>
+          <p:cNvSpPr/>
+          <p:nvPr/>
+        </p:nvSpPr>
+        <p:spPr>
+          <a:xfrm>
+            <a:off x="859536" y="4855464"/>
+            <a:ext cx="10472623" cy="365760"/>
+          </a:xfrm>
+          <a:prstGeom prst="rect">
+            <a:avLst/>
+          </a:prstGeom>
+          <a:noFill/>
+          <a:ln/>
+        </p:spPr>
+        <p:txBody>
+          <a:bodyPr wrap="square" lIns="0" tIns="0" rIns="0" bIns="0" rtlCol="0" anchor="ctr"/>
+          <a:lstStyle/>
+          <a:p>
+            <a:pPr indent="0" marL="0">
+              <a:lnSpc>
+                <a:spcPct val="86000"/>
+              </a:lnSpc>
+              <a:buNone/>
+            </a:pPr>
+            <a:r>
+              <a:rPr lang="en-US" sz="850" b="1" dirty="0">
+                <a:solidFill>
+                  <a:srgbClr val="0D8A76"/>
+                </a:solidFill>
+                <a:latin typeface="Yu Gothic" pitchFamily="34" charset="0"/>
+                <a:ea typeface="Yu Gothic" pitchFamily="34" charset="-122"/>
+                <a:cs typeface="Yu Gothic" pitchFamily="34" charset="-120"/>
+              </a:rPr>
+              <a:t>追加付与②　</a:t>
+            </a:r>
+            <a:pPr indent="0" marL="0">
+              <a:lnSpc>
+                <a:spcPct val="86000"/>
+              </a:lnSpc>
+              <a:buNone/>
+            </a:pPr>
+            <a:r>
+              <a:rPr lang="en-US" sz="850" dirty="0">
+                <a:solidFill>
+                  <a:srgbClr val="5F7183"/>
+                </a:solidFill>
+                <a:latin typeface="Yu Gothic" pitchFamily="34" charset="0"/>
+                <a:ea typeface="Yu Gothic" pitchFamily="34" charset="-122"/>
+                <a:cs typeface="Yu Gothic" pitchFamily="34" charset="-120"/>
+              </a:rPr>
+              <a:t>救急隊「名前と生年月日は？」　→　</a:t>
+            </a:r>
+            <a:pPr indent="0" marL="0">
+              <a:lnSpc>
+                <a:spcPct val="86000"/>
+              </a:lnSpc>
+              <a:buNone/>
+            </a:pPr>
+            <a:r>
+              <a:rPr lang="en-US" sz="1100" b="1" dirty="0">
                 <a:solidFill>
                   <a:srgbClr val="1B2733"/>
                 </a:solidFill>
@@ -13511,19 +13884,19 @@
                 <a:ea typeface="Yu Gothic" pitchFamily="34" charset="-122"/>
                 <a:cs typeface="Yu Gothic" pitchFamily="34" charset="-120"/>
               </a:rPr>
-              <a:t>誰の面前で、何を、何時に確認したかを必ず記録する。</a:t>
-            </a:r>
-            <a:endParaRPr lang="en-US" sz="1050" dirty="0"/>
-          </a:p>
-          <a:p>
-            <a:pPr indent="0" marL="0">
-              <a:lnSpc>
-                <a:spcPct val="90000"/>
-              </a:lnSpc>
-              <a:buNone/>
-            </a:pPr>
-            <a:r>
-              <a:rPr lang="en-US" sz="800" i="1" dirty="0">
+              <a:t>「分かりません」と答える。推測で答えない。日本語が通じないことも併せて伝える。</a:t>
+            </a:r>
+            <a:endParaRPr lang="en-US" sz="850" dirty="0"/>
+          </a:p>
+          <a:p>
+            <a:pPr indent="0" marL="0">
+              <a:lnSpc>
+                <a:spcPct val="86000"/>
+              </a:lnSpc>
+              <a:buNone/>
+            </a:pPr>
+            <a:r>
+              <a:rPr lang="en-US" sz="750" i="1" dirty="0">
                 <a:solidFill>
                   <a:srgbClr val="5F7183"/>
                 </a:solidFill>
@@ -13531,130 +13904,26 @@
                 <a:ea typeface="Calibri" pitchFamily="34" charset="-122"/>
                 <a:cs typeface="Calibri" pitchFamily="34" charset="-120"/>
               </a:rPr>
-              <a:t>Record in whose presence, what, and at what time.</a:t>
-            </a:r>
-            <a:endParaRPr lang="en-US" sz="1050" dirty="0"/>
-          </a:p>
-        </p:txBody>
-      </p:sp>
-      <p:sp>
-        <p:nvSpPr>
-          <p:cNvPr id="17" name="Shape 14"/>
-          <p:cNvSpPr/>
-          <p:nvPr/>
-        </p:nvSpPr>
-        <p:spPr>
-          <a:xfrm>
-            <a:off x="6223864" y="4212336"/>
-            <a:ext cx="5327752" cy="1091184"/>
+              <a:t>Say you do not know. Never guess. Also tell them the person does not speak Japanese.</a:t>
+            </a:r>
+            <a:endParaRPr lang="en-US" sz="850" dirty="0"/>
+          </a:p>
+        </p:txBody>
+      </p:sp>
+      <p:sp>
+        <p:nvSpPr>
+          <p:cNvPr id="26" name="Shape 23"/>
+          <p:cNvSpPr/>
+          <p:nvPr/>
+        </p:nvSpPr>
+        <p:spPr>
+          <a:xfrm>
+            <a:off x="640080" y="5358384"/>
+            <a:ext cx="10911535" cy="457200"/>
           </a:xfrm>
           <a:prstGeom prst="roundRect">
             <a:avLst>
-              <a:gd name="adj" fmla="val 3352"/>
-            </a:avLst>
-          </a:prstGeom>
-          <a:solidFill>
-            <a:srgbClr val="EFF4F8"/>
-          </a:solidFill>
-          <a:ln/>
-        </p:spPr>
-      </p:sp>
-      <p:sp>
-        <p:nvSpPr>
-          <p:cNvPr id="18" name="Text 15"/>
-          <p:cNvSpPr/>
-          <p:nvPr/>
-        </p:nvSpPr>
-        <p:spPr>
-          <a:xfrm>
-            <a:off x="6461608" y="4303776"/>
-            <a:ext cx="4852264" cy="908304"/>
-          </a:xfrm>
-          <a:prstGeom prst="rect">
-            <a:avLst/>
-          </a:prstGeom>
-          <a:noFill/>
-          <a:ln/>
-        </p:spPr>
-        <p:txBody>
-          <a:bodyPr wrap="square" lIns="0" tIns="0" rIns="0" bIns="0" rtlCol="0" anchor="t"/>
-          <a:lstStyle/>
-          <a:p>
-            <a:pPr indent="0" marL="0">
-              <a:lnSpc>
-                <a:spcPct val="90000"/>
-              </a:lnSpc>
-              <a:buNone/>
-            </a:pPr>
-            <a:r>
-              <a:rPr lang="en-US" sz="1050" b="1" dirty="0">
-                <a:solidFill>
-                  <a:srgbClr val="093259"/>
-                </a:solidFill>
-                <a:latin typeface="Yu Gothic" pitchFamily="34" charset="0"/>
-                <a:ea typeface="Yu Gothic" pitchFamily="34" charset="-122"/>
-                <a:cs typeface="Yu Gothic" pitchFamily="34" charset="-120"/>
-              </a:rPr>
-              <a:t>日本語が通じない</a:t>
-            </a:r>
-            <a:endParaRPr lang="en-US" sz="1050" dirty="0"/>
-          </a:p>
-          <a:p>
-            <a:pPr indent="0" marL="0">
-              <a:lnSpc>
-                <a:spcPct val="90000"/>
-              </a:lnSpc>
-              <a:buNone/>
-            </a:pPr>
-            <a:r>
-              <a:rPr lang="en-US" sz="1050" b="1" dirty="0">
-                <a:solidFill>
-                  <a:srgbClr val="1B2733"/>
-                </a:solidFill>
-                <a:latin typeface="Yu Gothic" pitchFamily="34" charset="0"/>
-                <a:ea typeface="Yu Gothic" pitchFamily="34" charset="-122"/>
-                <a:cs typeface="Yu Gothic" pitchFamily="34" charset="-120"/>
-              </a:rPr>
-              <a:t>119番通報時にその旨を伝える。通訳対応につながる。</a:t>
-            </a:r>
-            <a:endParaRPr lang="en-US" sz="1050" dirty="0"/>
-          </a:p>
-          <a:p>
-            <a:pPr indent="0" marL="0">
-              <a:lnSpc>
-                <a:spcPct val="90000"/>
-              </a:lnSpc>
-              <a:buNone/>
-            </a:pPr>
-            <a:r>
-              <a:rPr lang="en-US" sz="800" i="1" dirty="0">
-                <a:solidFill>
-                  <a:srgbClr val="5F7183"/>
-                </a:solidFill>
-                <a:latin typeface="Calibri" pitchFamily="34" charset="0"/>
-                <a:ea typeface="Calibri" pitchFamily="34" charset="-122"/>
-                <a:cs typeface="Calibri" pitchFamily="34" charset="-120"/>
-              </a:rPr>
-              <a:t>Say so when you call. It brings in interpretation support.</a:t>
-            </a:r>
-            <a:endParaRPr lang="en-US" sz="1050" dirty="0"/>
-          </a:p>
-        </p:txBody>
-      </p:sp>
-      <p:sp>
-        <p:nvSpPr>
-          <p:cNvPr id="19" name="Shape 16"/>
-          <p:cNvSpPr/>
-          <p:nvPr/>
-        </p:nvSpPr>
-        <p:spPr>
-          <a:xfrm>
-            <a:off x="640080" y="5358384"/>
-            <a:ext cx="10911535" cy="493776"/>
-          </a:xfrm>
-          <a:prstGeom prst="roundRect">
-            <a:avLst>
-              <a:gd name="adj" fmla="val 7407"/>
+              <a:gd name="adj" fmla="val 8000"/>
             </a:avLst>
           </a:prstGeom>
           <a:solidFill>
@@ -13665,14 +13934,14 @@
       </p:sp>
       <p:sp>
         <p:nvSpPr>
-          <p:cNvPr id="20" name="Text 17"/>
-          <p:cNvSpPr/>
-          <p:nvPr/>
-        </p:nvSpPr>
-        <p:spPr>
-          <a:xfrm>
-            <a:off x="877824" y="5404104"/>
-            <a:ext cx="10436047" cy="402336"/>
+          <p:cNvPr id="27" name="Text 24"/>
+          <p:cNvSpPr/>
+          <p:nvPr/>
+        </p:nvSpPr>
+        <p:spPr>
+          <a:xfrm>
+            <a:off x="859536" y="5385816"/>
+            <a:ext cx="10472623" cy="402336"/>
           </a:xfrm>
           <a:prstGeom prst="rect">
             <a:avLst/>
@@ -13691,7 +13960,7 @@
               <a:buNone/>
             </a:pPr>
             <a:r>
-              <a:rPr lang="en-US" sz="950" b="1" dirty="0">
+              <a:rPr lang="en-US" sz="900" b="1" dirty="0">
                 <a:solidFill>
                   <a:srgbClr val="12B198"/>
                 </a:solidFill>
@@ -13708,7 +13977,7 @@
               <a:buNone/>
             </a:pPr>
             <a:r>
-              <a:rPr lang="en-US" sz="1100" b="1" dirty="0">
+              <a:rPr lang="en-US" sz="1050" b="1" dirty="0">
                 <a:solidFill>
                   <a:srgbClr val="FFFFFF"/>
                 </a:solidFill>
@@ -13718,7 +13987,7 @@
               </a:rPr>
               <a:t>所持品を見てよいか。「見てよい」派には根拠を、「見ない」派には救急隊への答え方を問う。</a:t>
             </a:r>
-            <a:endParaRPr lang="en-US" sz="950" dirty="0"/>
+            <a:endParaRPr lang="en-US" sz="900" dirty="0"/>
           </a:p>
           <a:p>
             <a:pPr indent="0" marL="0">
@@ -13728,7 +13997,7 @@
               <a:buNone/>
             </a:pPr>
             <a:r>
-              <a:rPr lang="en-US" sz="800" i="1" dirty="0">
+              <a:rPr lang="en-US" sz="750" i="1" dirty="0">
                 <a:solidFill>
                   <a:srgbClr val="9FD8CD"/>
                 </a:solidFill>
@@ -13736,15 +14005,15 @@
                 <a:ea typeface="Calibri" pitchFamily="34" charset="-122"/>
                 <a:cs typeface="Calibri" pitchFamily="34" charset="-120"/>
               </a:rPr>
-              <a:t>May you search? Ask the "yes" group for their basis, and the "no" group what they tell the ambulance crew.</a:t>
-            </a:r>
-            <a:endParaRPr lang="en-US" sz="950" dirty="0"/>
-          </a:p>
-        </p:txBody>
-      </p:sp>
-      <p:sp>
-        <p:nvSpPr>
-          <p:cNvPr id="21" name="Text 18"/>
+              <a:t>May you search? Ask the "yes" group for their basis, and the "no" group what they tell the crew.</a:t>
+            </a:r>
+            <a:endParaRPr lang="en-US" sz="900" dirty="0"/>
+          </a:p>
+        </p:txBody>
+      </p:sp>
+      <p:sp>
+        <p:nvSpPr>
+          <p:cNvPr id="28" name="Text 25"/>
           <p:cNvSpPr/>
           <p:nvPr/>
         </p:nvSpPr>
@@ -13823,7 +14092,7 @@
       </p:sp>
       <p:sp>
         <p:nvSpPr>
-          <p:cNvPr id="22" name="Text 19"/>
+          <p:cNvPr id="29" name="Text 26"/>
           <p:cNvSpPr/>
           <p:nvPr/>
         </p:nvSpPr>
@@ -13876,7 +14145,7 @@
       </p:sp>
       <p:sp>
         <p:nvSpPr>
-          <p:cNvPr id="23" name="Text 20"/>
+          <p:cNvPr id="30" name="Text 27"/>
           <p:cNvSpPr/>
           <p:nvPr/>
         </p:nvSpPr>
@@ -13929,7 +14198,7 @@
       </p:sp>
       <p:sp>
         <p:nvSpPr>
-          <p:cNvPr id="24" name="Text 21"/>
+          <p:cNvPr id="31" name="Text 28"/>
           <p:cNvSpPr/>
           <p:nvPr/>
         </p:nvSpPr>

--- a/decks/05_9限_通報と現場保存.pptx
+++ b/decks/05_9限_通報と現場保存.pptx
@@ -11955,11 +11955,11 @@
         <p:spPr>
           <a:xfrm>
             <a:off x="640080" y="3081528"/>
-            <a:ext cx="5327752" cy="1074420"/>
+            <a:ext cx="5327752" cy="836676"/>
           </a:xfrm>
           <a:prstGeom prst="roundRect">
             <a:avLst>
-              <a:gd name="adj" fmla="val 3404"/>
+              <a:gd name="adj" fmla="val 4372"/>
             </a:avLst>
           </a:prstGeom>
           <a:solidFill>
@@ -11976,7 +11976,7 @@
         </p:nvSpPr>
         <p:spPr>
           <a:xfrm>
-            <a:off x="804672" y="3472434"/>
+            <a:off x="804672" y="3353562"/>
             <a:ext cx="292608" cy="292608"/>
           </a:xfrm>
           <a:prstGeom prst="ellipse">
@@ -11996,7 +11996,7 @@
         </p:nvSpPr>
         <p:spPr>
           <a:xfrm>
-            <a:off x="804672" y="3472434"/>
+            <a:off x="804672" y="3353562"/>
             <a:ext cx="292608" cy="292608"/>
           </a:xfrm>
           <a:prstGeom prst="rect">
@@ -12036,7 +12036,7 @@
         <p:spPr>
           <a:xfrm>
             <a:off x="1188720" y="3136392"/>
-            <a:ext cx="4596232" cy="964692"/>
+            <a:ext cx="4596232" cy="726948"/>
           </a:xfrm>
           <a:prstGeom prst="rect">
             <a:avLst/>
@@ -12098,11 +12098,11 @@
         <p:spPr>
           <a:xfrm>
             <a:off x="6223864" y="3081528"/>
-            <a:ext cx="5327752" cy="1074420"/>
+            <a:ext cx="5327752" cy="836676"/>
           </a:xfrm>
           <a:prstGeom prst="roundRect">
             <a:avLst>
-              <a:gd name="adj" fmla="val 3404"/>
+              <a:gd name="adj" fmla="val 4372"/>
             </a:avLst>
           </a:prstGeom>
           <a:solidFill>
@@ -12119,7 +12119,7 @@
         </p:nvSpPr>
         <p:spPr>
           <a:xfrm>
-            <a:off x="6388456" y="3472434"/>
+            <a:off x="6388456" y="3353562"/>
             <a:ext cx="292608" cy="292608"/>
           </a:xfrm>
           <a:prstGeom prst="ellipse">
@@ -12139,7 +12139,7 @@
         </p:nvSpPr>
         <p:spPr>
           <a:xfrm>
-            <a:off x="6388456" y="3472434"/>
+            <a:off x="6388456" y="3353562"/>
             <a:ext cx="292608" cy="292608"/>
           </a:xfrm>
           <a:prstGeom prst="rect">
@@ -12179,7 +12179,7 @@
         <p:spPr>
           <a:xfrm>
             <a:off x="6772504" y="3136392"/>
-            <a:ext cx="4596232" cy="964692"/>
+            <a:ext cx="4596232" cy="726948"/>
           </a:xfrm>
           <a:prstGeom prst="rect">
             <a:avLst/>
@@ -12240,12 +12240,12 @@
         </p:nvSpPr>
         <p:spPr>
           <a:xfrm>
-            <a:off x="640080" y="4265676"/>
-            <a:ext cx="5327752" cy="1074420"/>
+            <a:off x="640080" y="4027932"/>
+            <a:ext cx="5327752" cy="836676"/>
           </a:xfrm>
           <a:prstGeom prst="roundRect">
             <a:avLst>
-              <a:gd name="adj" fmla="val 3404"/>
+              <a:gd name="adj" fmla="val 4372"/>
             </a:avLst>
           </a:prstGeom>
           <a:solidFill>
@@ -12262,7 +12262,7 @@
         </p:nvSpPr>
         <p:spPr>
           <a:xfrm>
-            <a:off x="804672" y="4656582"/>
+            <a:off x="804672" y="4299966"/>
             <a:ext cx="292608" cy="292608"/>
           </a:xfrm>
           <a:prstGeom prst="ellipse">
@@ -12282,7 +12282,7 @@
         </p:nvSpPr>
         <p:spPr>
           <a:xfrm>
-            <a:off x="804672" y="4656582"/>
+            <a:off x="804672" y="4299966"/>
             <a:ext cx="292608" cy="292608"/>
           </a:xfrm>
           <a:prstGeom prst="rect">
@@ -12321,8 +12321,8 @@
         </p:nvSpPr>
         <p:spPr>
           <a:xfrm>
-            <a:off x="1188720" y="4320540"/>
-            <a:ext cx="4596232" cy="964692"/>
+            <a:off x="1188720" y="4082796"/>
+            <a:ext cx="4596232" cy="726948"/>
           </a:xfrm>
           <a:prstGeom prst="rect">
             <a:avLst/>
@@ -12383,12 +12383,12 @@
         </p:nvSpPr>
         <p:spPr>
           <a:xfrm>
-            <a:off x="6223864" y="4265676"/>
-            <a:ext cx="5327752" cy="1074420"/>
+            <a:off x="6223864" y="4027932"/>
+            <a:ext cx="5327752" cy="836676"/>
           </a:xfrm>
           <a:prstGeom prst="roundRect">
             <a:avLst>
-              <a:gd name="adj" fmla="val 3404"/>
+              <a:gd name="adj" fmla="val 4372"/>
             </a:avLst>
           </a:prstGeom>
           <a:solidFill>
@@ -12405,7 +12405,7 @@
         </p:nvSpPr>
         <p:spPr>
           <a:xfrm>
-            <a:off x="6388456" y="4656582"/>
+            <a:off x="6388456" y="4299966"/>
             <a:ext cx="292608" cy="292608"/>
           </a:xfrm>
           <a:prstGeom prst="ellipse">
@@ -12425,7 +12425,7 @@
         </p:nvSpPr>
         <p:spPr>
           <a:xfrm>
-            <a:off x="6388456" y="4656582"/>
+            <a:off x="6388456" y="4299966"/>
             <a:ext cx="292608" cy="292608"/>
           </a:xfrm>
           <a:prstGeom prst="rect">
@@ -12464,8 +12464,8 @@
         </p:nvSpPr>
         <p:spPr>
           <a:xfrm>
-            <a:off x="6772504" y="4320540"/>
-            <a:ext cx="4596232" cy="964692"/>
+            <a:off x="6772504" y="4082796"/>
+            <a:ext cx="4596232" cy="726948"/>
           </a:xfrm>
           <a:prstGeom prst="rect">
             <a:avLst/>
@@ -12526,12 +12526,12 @@
         </p:nvSpPr>
         <p:spPr>
           <a:xfrm>
-            <a:off x="640080" y="5394960"/>
-            <a:ext cx="10911535" cy="457200"/>
+            <a:off x="640080" y="4919472"/>
+            <a:ext cx="10911535" cy="420624"/>
           </a:xfrm>
           <a:prstGeom prst="roundRect">
             <a:avLst>
-              <a:gd name="adj" fmla="val 8000"/>
+              <a:gd name="adj" fmla="val 8696"/>
             </a:avLst>
           </a:prstGeom>
           <a:solidFill>
@@ -12548,8 +12548,8 @@
         </p:nvSpPr>
         <p:spPr>
           <a:xfrm>
-            <a:off x="877824" y="5431536"/>
-            <a:ext cx="10436047" cy="384048"/>
+            <a:off x="877824" y="4946904"/>
+            <a:ext cx="10436047" cy="365760"/>
           </a:xfrm>
           <a:prstGeom prst="rect">
             <a:avLst/>
@@ -12576,7 +12576,7 @@
                 <a:ea typeface="Yu Gothic" pitchFamily="34" charset="-122"/>
                 <a:cs typeface="Yu Gothic" pitchFamily="34" charset="-120"/>
               </a:rPr>
-              <a:t>追加付与　</a:t>
+              <a:t>追加付与①　</a:t>
             </a:r>
             <a:pPr indent="0" marL="0">
               <a:lnSpc>
@@ -12621,7 +12621,108 @@
       </p:sp>
       <p:sp>
         <p:nvSpPr>
-          <p:cNvPr id="27" name="Text 24"/>
+          <p:cNvPr id="27" name="Shape 24"/>
+          <p:cNvSpPr/>
+          <p:nvPr/>
+        </p:nvSpPr>
+        <p:spPr>
+          <a:xfrm>
+            <a:off x="640080" y="5394960"/>
+            <a:ext cx="10911535" cy="420624"/>
+          </a:xfrm>
+          <a:prstGeom prst="roundRect">
+            <a:avLst>
+              <a:gd name="adj" fmla="val 8696"/>
+            </a:avLst>
+          </a:prstGeom>
+          <a:solidFill>
+            <a:srgbClr val="E4F4F0"/>
+          </a:solidFill>
+          <a:ln/>
+        </p:spPr>
+      </p:sp>
+      <p:sp>
+        <p:nvSpPr>
+          <p:cNvPr id="28" name="Text 25"/>
+          <p:cNvSpPr/>
+          <p:nvPr/>
+        </p:nvSpPr>
+        <p:spPr>
+          <a:xfrm>
+            <a:off x="877824" y="5422392"/>
+            <a:ext cx="10436047" cy="365760"/>
+          </a:xfrm>
+          <a:prstGeom prst="rect">
+            <a:avLst/>
+          </a:prstGeom>
+          <a:noFill/>
+          <a:ln/>
+        </p:spPr>
+        <p:txBody>
+          <a:bodyPr wrap="square" lIns="0" tIns="0" rIns="0" bIns="0" rtlCol="0" anchor="ctr"/>
+          <a:lstStyle/>
+          <a:p>
+            <a:pPr indent="0" marL="0">
+              <a:lnSpc>
+                <a:spcPct val="86000"/>
+              </a:lnSpc>
+              <a:buNone/>
+            </a:pPr>
+            <a:r>
+              <a:rPr lang="en-US" sz="850" b="1" dirty="0">
+                <a:solidFill>
+                  <a:srgbClr val="0D8A76"/>
+                </a:solidFill>
+                <a:latin typeface="Yu Gothic" pitchFamily="34" charset="0"/>
+                <a:ea typeface="Yu Gothic" pitchFamily="34" charset="-122"/>
+                <a:cs typeface="Yu Gothic" pitchFamily="34" charset="-120"/>
+              </a:rPr>
+              <a:t>追加付与②　</a:t>
+            </a:r>
+            <a:pPr indent="0" marL="0">
+              <a:lnSpc>
+                <a:spcPct val="86000"/>
+              </a:lnSpc>
+              <a:buNone/>
+            </a:pPr>
+            <a:r>
+              <a:rPr lang="en-US" sz="1050" b="1" dirty="0">
+                <a:solidFill>
+                  <a:srgbClr val="1B2733"/>
+                </a:solidFill>
+                <a:latin typeface="Yu Gothic" pitchFamily="34" charset="0"/>
+                <a:ea typeface="Yu Gothic" pitchFamily="34" charset="-122"/>
+                <a:cs typeface="Yu Gothic" pitchFamily="34" charset="-120"/>
+              </a:rPr>
+              <a:t>救急隊から「本人の名前と生年月日は分かりますか」と聞かれた。</a:t>
+            </a:r>
+            <a:endParaRPr lang="en-US" sz="850" dirty="0"/>
+          </a:p>
+          <a:p>
+            <a:pPr indent="0" marL="0">
+              <a:lnSpc>
+                <a:spcPct val="86000"/>
+              </a:lnSpc>
+              <a:buNone/>
+            </a:pPr>
+            <a:r>
+              <a:rPr lang="en-US" sz="750" i="1" dirty="0">
+                <a:solidFill>
+                  <a:srgbClr val="5F7183"/>
+                </a:solidFill>
+                <a:latin typeface="Calibri" pitchFamily="34" charset="0"/>
+                <a:ea typeface="Calibri" pitchFamily="34" charset="-122"/>
+                <a:cs typeface="Calibri" pitchFamily="34" charset="-120"/>
+              </a:rPr>
+              <a:t>The ambulance crew asks: "Do you know their name and date of birth?"</a:t>
+            </a:r>
+            <a:endParaRPr lang="en-US" sz="850" dirty="0"/>
+          </a:p>
+        </p:txBody>
+      </p:sp>
+      <p:sp>
+        <p:nvSpPr>
+          <p:cNvPr id="29" name="Text 26"/>
           <p:cNvSpPr/>
           <p:nvPr/>
         </p:nvSpPr>
@@ -12700,7 +12801,7 @@
       </p:sp>
       <p:sp>
         <p:nvSpPr>
-          <p:cNvPr id="28" name="Text 25"/>
+          <p:cNvPr id="30" name="Text 27"/>
           <p:cNvSpPr/>
           <p:nvPr/>
         </p:nvSpPr>
@@ -12753,7 +12854,7 @@
       </p:sp>
       <p:sp>
         <p:nvSpPr>
-          <p:cNvPr id="29" name="Text 26"/>
+          <p:cNvPr id="31" name="Text 28"/>
           <p:cNvSpPr/>
           <p:nvPr/>
         </p:nvSpPr>
@@ -12806,7 +12907,7 @@
       </p:sp>
       <p:sp>
         <p:nvSpPr>
-          <p:cNvPr id="30" name="Text 27"/>
+          <p:cNvPr id="32" name="Text 29"/>
           <p:cNvSpPr/>
           <p:nvPr/>
         </p:nvSpPr>
@@ -14623,11 +14724,11 @@
         <p:spPr>
           <a:xfrm>
             <a:off x="640080" y="3081528"/>
-            <a:ext cx="5327752" cy="1074420"/>
+            <a:ext cx="5327752" cy="836676"/>
           </a:xfrm>
           <a:prstGeom prst="roundRect">
             <a:avLst>
-              <a:gd name="adj" fmla="val 3404"/>
+              <a:gd name="adj" fmla="val 4372"/>
             </a:avLst>
           </a:prstGeom>
           <a:solidFill>
@@ -14644,7 +14745,7 @@
         </p:nvSpPr>
         <p:spPr>
           <a:xfrm>
-            <a:off x="804672" y="3472434"/>
+            <a:off x="804672" y="3353562"/>
             <a:ext cx="292608" cy="292608"/>
           </a:xfrm>
           <a:prstGeom prst="ellipse">
@@ -14664,7 +14765,7 @@
         </p:nvSpPr>
         <p:spPr>
           <a:xfrm>
-            <a:off x="804672" y="3472434"/>
+            <a:off x="804672" y="3353562"/>
             <a:ext cx="292608" cy="292608"/>
           </a:xfrm>
           <a:prstGeom prst="rect">
@@ -14704,7 +14805,7 @@
         <p:spPr>
           <a:xfrm>
             <a:off x="1188720" y="3136392"/>
-            <a:ext cx="4596232" cy="964692"/>
+            <a:ext cx="4596232" cy="726948"/>
           </a:xfrm>
           <a:prstGeom prst="rect">
             <a:avLst/>
@@ -14766,11 +14867,11 @@
         <p:spPr>
           <a:xfrm>
             <a:off x="6223864" y="3081528"/>
-            <a:ext cx="5327752" cy="1074420"/>
+            <a:ext cx="5327752" cy="836676"/>
           </a:xfrm>
           <a:prstGeom prst="roundRect">
             <a:avLst>
-              <a:gd name="adj" fmla="val 3404"/>
+              <a:gd name="adj" fmla="val 4372"/>
             </a:avLst>
           </a:prstGeom>
           <a:solidFill>
@@ -14787,7 +14888,7 @@
         </p:nvSpPr>
         <p:spPr>
           <a:xfrm>
-            <a:off x="6388456" y="3472434"/>
+            <a:off x="6388456" y="3353562"/>
             <a:ext cx="292608" cy="292608"/>
           </a:xfrm>
           <a:prstGeom prst="ellipse">
@@ -14807,7 +14908,7 @@
         </p:nvSpPr>
         <p:spPr>
           <a:xfrm>
-            <a:off x="6388456" y="3472434"/>
+            <a:off x="6388456" y="3353562"/>
             <a:ext cx="292608" cy="292608"/>
           </a:xfrm>
           <a:prstGeom prst="rect">
@@ -14847,7 +14948,7 @@
         <p:spPr>
           <a:xfrm>
             <a:off x="6772504" y="3136392"/>
-            <a:ext cx="4596232" cy="964692"/>
+            <a:ext cx="4596232" cy="726948"/>
           </a:xfrm>
           <a:prstGeom prst="rect">
             <a:avLst/>
@@ -14908,12 +15009,12 @@
         </p:nvSpPr>
         <p:spPr>
           <a:xfrm>
-            <a:off x="640080" y="4265676"/>
-            <a:ext cx="5327752" cy="1074420"/>
+            <a:off x="640080" y="4027932"/>
+            <a:ext cx="5327752" cy="836676"/>
           </a:xfrm>
           <a:prstGeom prst="roundRect">
             <a:avLst>
-              <a:gd name="adj" fmla="val 3404"/>
+              <a:gd name="adj" fmla="val 4372"/>
             </a:avLst>
           </a:prstGeom>
           <a:solidFill>
@@ -14930,7 +15031,7 @@
         </p:nvSpPr>
         <p:spPr>
           <a:xfrm>
-            <a:off x="804672" y="4656582"/>
+            <a:off x="804672" y="4299966"/>
             <a:ext cx="292608" cy="292608"/>
           </a:xfrm>
           <a:prstGeom prst="ellipse">
@@ -14950,7 +15051,7 @@
         </p:nvSpPr>
         <p:spPr>
           <a:xfrm>
-            <a:off x="804672" y="4656582"/>
+            <a:off x="804672" y="4299966"/>
             <a:ext cx="292608" cy="292608"/>
           </a:xfrm>
           <a:prstGeom prst="rect">
@@ -14989,8 +15090,8 @@
         </p:nvSpPr>
         <p:spPr>
           <a:xfrm>
-            <a:off x="1188720" y="4320540"/>
-            <a:ext cx="4596232" cy="964692"/>
+            <a:off x="1188720" y="4082796"/>
+            <a:ext cx="4596232" cy="726948"/>
           </a:xfrm>
           <a:prstGeom prst="rect">
             <a:avLst/>
@@ -15051,12 +15152,12 @@
         </p:nvSpPr>
         <p:spPr>
           <a:xfrm>
-            <a:off x="6223864" y="4265676"/>
-            <a:ext cx="5327752" cy="1074420"/>
+            <a:off x="6223864" y="4027932"/>
+            <a:ext cx="5327752" cy="836676"/>
           </a:xfrm>
           <a:prstGeom prst="roundRect">
             <a:avLst>
-              <a:gd name="adj" fmla="val 3404"/>
+              <a:gd name="adj" fmla="val 4372"/>
             </a:avLst>
           </a:prstGeom>
           <a:solidFill>
@@ -15073,7 +15174,7 @@
         </p:nvSpPr>
         <p:spPr>
           <a:xfrm>
-            <a:off x="6388456" y="4656582"/>
+            <a:off x="6388456" y="4299966"/>
             <a:ext cx="292608" cy="292608"/>
           </a:xfrm>
           <a:prstGeom prst="ellipse">
@@ -15093,7 +15194,7 @@
         </p:nvSpPr>
         <p:spPr>
           <a:xfrm>
-            <a:off x="6388456" y="4656582"/>
+            <a:off x="6388456" y="4299966"/>
             <a:ext cx="292608" cy="292608"/>
           </a:xfrm>
           <a:prstGeom prst="rect">
@@ -15132,8 +15233,8 @@
         </p:nvSpPr>
         <p:spPr>
           <a:xfrm>
-            <a:off x="6772504" y="4320540"/>
-            <a:ext cx="4596232" cy="964692"/>
+            <a:off x="6772504" y="4082796"/>
+            <a:ext cx="4596232" cy="726948"/>
           </a:xfrm>
           <a:prstGeom prst="rect">
             <a:avLst/>
@@ -15194,12 +15295,12 @@
         </p:nvSpPr>
         <p:spPr>
           <a:xfrm>
-            <a:off x="640080" y="5394960"/>
-            <a:ext cx="10911535" cy="457200"/>
+            <a:off x="640080" y="4919472"/>
+            <a:ext cx="10911535" cy="420624"/>
           </a:xfrm>
           <a:prstGeom prst="roundRect">
             <a:avLst>
-              <a:gd name="adj" fmla="val 8000"/>
+              <a:gd name="adj" fmla="val 8696"/>
             </a:avLst>
           </a:prstGeom>
           <a:solidFill>
@@ -15216,8 +15317,8 @@
         </p:nvSpPr>
         <p:spPr>
           <a:xfrm>
-            <a:off x="877824" y="5431536"/>
-            <a:ext cx="10436047" cy="384048"/>
+            <a:off x="877824" y="4946904"/>
+            <a:ext cx="10436047" cy="365760"/>
           </a:xfrm>
           <a:prstGeom prst="rect">
             <a:avLst/>
@@ -15244,7 +15345,7 @@
                 <a:ea typeface="Yu Gothic" pitchFamily="34" charset="-122"/>
                 <a:cs typeface="Yu Gothic" pitchFamily="34" charset="-120"/>
               </a:rPr>
-              <a:t>追加付与　</a:t>
+              <a:t>追加付与①　</a:t>
             </a:r>
             <a:pPr indent="0" marL="0">
               <a:lnSpc>
@@ -15289,7 +15390,108 @@
       </p:sp>
       <p:sp>
         <p:nvSpPr>
-          <p:cNvPr id="27" name="Text 24"/>
+          <p:cNvPr id="27" name="Shape 24"/>
+          <p:cNvSpPr/>
+          <p:nvPr/>
+        </p:nvSpPr>
+        <p:spPr>
+          <a:xfrm>
+            <a:off x="640080" y="5394960"/>
+            <a:ext cx="10911535" cy="420624"/>
+          </a:xfrm>
+          <a:prstGeom prst="roundRect">
+            <a:avLst>
+              <a:gd name="adj" fmla="val 8696"/>
+            </a:avLst>
+          </a:prstGeom>
+          <a:solidFill>
+            <a:srgbClr val="E4F4F0"/>
+          </a:solidFill>
+          <a:ln/>
+        </p:spPr>
+      </p:sp>
+      <p:sp>
+        <p:nvSpPr>
+          <p:cNvPr id="28" name="Text 25"/>
+          <p:cNvSpPr/>
+          <p:nvPr/>
+        </p:nvSpPr>
+        <p:spPr>
+          <a:xfrm>
+            <a:off x="877824" y="5422392"/>
+            <a:ext cx="10436047" cy="365760"/>
+          </a:xfrm>
+          <a:prstGeom prst="rect">
+            <a:avLst/>
+          </a:prstGeom>
+          <a:noFill/>
+          <a:ln/>
+        </p:spPr>
+        <p:txBody>
+          <a:bodyPr wrap="square" lIns="0" tIns="0" rIns="0" bIns="0" rtlCol="0" anchor="ctr"/>
+          <a:lstStyle/>
+          <a:p>
+            <a:pPr indent="0" marL="0">
+              <a:lnSpc>
+                <a:spcPct val="86000"/>
+              </a:lnSpc>
+              <a:buNone/>
+            </a:pPr>
+            <a:r>
+              <a:rPr lang="en-US" sz="850" b="1" dirty="0">
+                <a:solidFill>
+                  <a:srgbClr val="0D8A76"/>
+                </a:solidFill>
+                <a:latin typeface="Yu Gothic" pitchFamily="34" charset="0"/>
+                <a:ea typeface="Yu Gothic" pitchFamily="34" charset="-122"/>
+                <a:cs typeface="Yu Gothic" pitchFamily="34" charset="-120"/>
+              </a:rPr>
+              <a:t>追加付与②　</a:t>
+            </a:r>
+            <a:pPr indent="0" marL="0">
+              <a:lnSpc>
+                <a:spcPct val="86000"/>
+              </a:lnSpc>
+              <a:buNone/>
+            </a:pPr>
+            <a:r>
+              <a:rPr lang="en-US" sz="1050" b="1" dirty="0">
+                <a:solidFill>
+                  <a:srgbClr val="1B2733"/>
+                </a:solidFill>
+                <a:latin typeface="Yu Gothic" pitchFamily="34" charset="0"/>
+                <a:ea typeface="Yu Gothic" pitchFamily="34" charset="-122"/>
+                <a:cs typeface="Yu Gothic" pitchFamily="34" charset="-120"/>
+              </a:rPr>
+              <a:t>発報した。同じ5階の別区画。</a:t>
+            </a:r>
+            <a:endParaRPr lang="en-US" sz="850" dirty="0"/>
+          </a:p>
+          <a:p>
+            <a:pPr indent="0" marL="0">
+              <a:lnSpc>
+                <a:spcPct val="86000"/>
+              </a:lnSpc>
+              <a:buNone/>
+            </a:pPr>
+            <a:r>
+              <a:rPr lang="en-US" sz="750" i="1" dirty="0">
+                <a:solidFill>
+                  <a:srgbClr val="5F7183"/>
+                </a:solidFill>
+                <a:latin typeface="Calibri" pitchFamily="34" charset="0"/>
+                <a:ea typeface="Calibri" pitchFamily="34" charset="-122"/>
+                <a:cs typeface="Calibri" pitchFamily="34" charset="-120"/>
+              </a:rPr>
+              <a:t>The alarm activates — a different zone on the same fifth floor.</a:t>
+            </a:r>
+            <a:endParaRPr lang="en-US" sz="850" dirty="0"/>
+          </a:p>
+        </p:txBody>
+      </p:sp>
+      <p:sp>
+        <p:nvSpPr>
+          <p:cNvPr id="29" name="Text 26"/>
           <p:cNvSpPr/>
           <p:nvPr/>
         </p:nvSpPr>
@@ -15368,7 +15570,7 @@
       </p:sp>
       <p:sp>
         <p:nvSpPr>
-          <p:cNvPr id="28" name="Text 25"/>
+          <p:cNvPr id="30" name="Text 27"/>
           <p:cNvSpPr/>
           <p:nvPr/>
         </p:nvSpPr>
@@ -15421,7 +15623,7 @@
       </p:sp>
       <p:sp>
         <p:nvSpPr>
-          <p:cNvPr id="29" name="Text 26"/>
+          <p:cNvPr id="31" name="Text 28"/>
           <p:cNvSpPr/>
           <p:nvPr/>
         </p:nvSpPr>
@@ -15474,7 +15676,7 @@
       </p:sp>
       <p:sp>
         <p:nvSpPr>
-          <p:cNvPr id="30" name="Text 27"/>
+          <p:cNvPr id="32" name="Text 29"/>
           <p:cNvSpPr/>
           <p:nvPr/>
         </p:nvSpPr>

--- a/decks/05_9限_通報と現場保存.pptx
+++ b/decks/05_9限_通報と現場保存.pptx
@@ -1764,7 +1764,7 @@
               <a:buNone/>
             </a:pPr>
             <a:r>
-              <a:rPr lang="en-US" sz="1050" i="1" dirty="0">
+              <a:rPr lang="en-US" sz="1050" dirty="0">
                 <a:solidFill>
                   <a:srgbClr val="A9BCCE"/>
                 </a:solidFill>
@@ -1941,7 +1941,7 @@
               <a:buNone/>
             </a:pPr>
             <a:r>
-              <a:rPr lang="en-US" sz="1000" i="1" dirty="0">
+              <a:rPr lang="en-US" sz="1000" dirty="0">
                 <a:solidFill>
                   <a:srgbClr val="8EA3B7"/>
                 </a:solidFill>
@@ -2019,8 +2019,8 @@
         </p:nvSpPr>
         <p:spPr>
           <a:xfrm>
-            <a:off x="640080" y="384048"/>
-            <a:ext cx="8982151" cy="768096"/>
+            <a:off x="640080" y="365760"/>
+            <a:ext cx="8982151" cy="749808"/>
           </a:xfrm>
           <a:prstGeom prst="rect">
             <a:avLst/>
@@ -2059,7 +2059,7 @@
               <a:buNone/>
             </a:pPr>
             <a:r>
-              <a:rPr lang="en-US" sz="1100" i="1" dirty="0">
+              <a:rPr lang="en-US" sz="1100" dirty="0">
                 <a:solidFill>
                   <a:srgbClr val="12B198"/>
                 </a:solidFill>
@@ -2081,7 +2081,7 @@
         </p:nvSpPr>
         <p:spPr>
           <a:xfrm>
-            <a:off x="9686239" y="438912"/>
+            <a:off x="9686239" y="420624"/>
             <a:ext cx="932688" cy="310896"/>
           </a:xfrm>
           <a:prstGeom prst="roundRect">
@@ -2103,7 +2103,7 @@
         </p:nvSpPr>
         <p:spPr>
           <a:xfrm>
-            <a:off x="9686239" y="438912"/>
+            <a:off x="9686239" y="420624"/>
             <a:ext cx="932688" cy="310896"/>
           </a:xfrm>
           <a:prstGeom prst="rect">
@@ -2142,12 +2142,12 @@
         </p:nvSpPr>
         <p:spPr>
           <a:xfrm>
-            <a:off x="640080" y="1188720"/>
-            <a:ext cx="10911535" cy="825246"/>
+            <a:off x="640080" y="1115568"/>
+            <a:ext cx="10911535" cy="857250"/>
           </a:xfrm>
           <a:prstGeom prst="roundRect">
             <a:avLst>
-              <a:gd name="adj" fmla="val 4432"/>
+              <a:gd name="adj" fmla="val 4267"/>
             </a:avLst>
           </a:prstGeom>
           <a:solidFill>
@@ -2164,7 +2164,7 @@
         </p:nvSpPr>
         <p:spPr>
           <a:xfrm>
-            <a:off x="841248" y="1427607"/>
+            <a:off x="841248" y="1370457"/>
             <a:ext cx="347472" cy="347472"/>
           </a:xfrm>
           <a:prstGeom prst="ellipse">
@@ -2184,7 +2184,7 @@
         </p:nvSpPr>
         <p:spPr>
           <a:xfrm>
-            <a:off x="841248" y="1427607"/>
+            <a:off x="841248" y="1370457"/>
             <a:ext cx="347472" cy="347472"/>
           </a:xfrm>
           <a:prstGeom prst="rect">
@@ -2223,8 +2223,8 @@
         </p:nvSpPr>
         <p:spPr>
           <a:xfrm>
-            <a:off x="1280160" y="1252728"/>
-            <a:ext cx="10033711" cy="697230"/>
+            <a:off x="1280160" y="1179576"/>
+            <a:ext cx="10033711" cy="729234"/>
           </a:xfrm>
           <a:prstGeom prst="rect">
             <a:avLst/>
@@ -2243,7 +2243,7 @@
               <a:buNone/>
             </a:pPr>
             <a:r>
-              <a:rPr lang="en-US" sz="900" dirty="0">
+              <a:rPr lang="en-US" sz="950" dirty="0">
                 <a:solidFill>
                   <a:srgbClr val="5F7183"/>
                 </a:solidFill>
@@ -2253,7 +2253,7 @@
               </a:rPr>
               <a:t>問1　扉を開けるか。何で判断するか</a:t>
             </a:r>
-            <a:endParaRPr lang="en-US" sz="900" dirty="0"/>
+            <a:endParaRPr lang="en-US" sz="950" dirty="0"/>
           </a:p>
           <a:p>
             <a:pPr indent="0" marL="0">
@@ -2273,7 +2273,7 @@
               </a:rPr>
               <a:t>開けない。扉に触れて熱を確認する。煙の色と量、臭気、音でも判断できる。</a:t>
             </a:r>
-            <a:endParaRPr lang="en-US" sz="900" dirty="0"/>
+            <a:endParaRPr lang="en-US" sz="950" dirty="0"/>
           </a:p>
           <a:p>
             <a:pPr indent="0" marL="0">
@@ -2283,9 +2283,9 @@
               <a:buNone/>
             </a:pPr>
             <a:r>
-              <a:rPr lang="en-US" sz="800" i="1" dirty="0">
-                <a:solidFill>
-                  <a:srgbClr val="5F7183"/>
+              <a:rPr lang="en-US" sz="1100" dirty="0">
+                <a:solidFill>
+                  <a:srgbClr val="1B2733"/>
                 </a:solidFill>
                 <a:latin typeface="Calibri" pitchFamily="34" charset="0"/>
                 <a:ea typeface="Calibri" pitchFamily="34" charset="-122"/>
@@ -2293,7 +2293,7 @@
               </a:rPr>
               <a:t>Do not open it. Feel the door for heat. Smoke colour and volume, smell and sound also tell you.</a:t>
             </a:r>
-            <a:endParaRPr lang="en-US" sz="900" dirty="0"/>
+            <a:endParaRPr lang="en-US" sz="950" dirty="0"/>
           </a:p>
         </p:txBody>
       </p:sp>
@@ -2305,12 +2305,12 @@
         </p:nvSpPr>
         <p:spPr>
           <a:xfrm>
-            <a:off x="640080" y="2114550"/>
-            <a:ext cx="10911535" cy="825246"/>
+            <a:off x="640080" y="2073402"/>
+            <a:ext cx="10911535" cy="857250"/>
           </a:xfrm>
           <a:prstGeom prst="roundRect">
             <a:avLst>
-              <a:gd name="adj" fmla="val 4432"/>
+              <a:gd name="adj" fmla="val 4267"/>
             </a:avLst>
           </a:prstGeom>
           <a:solidFill>
@@ -2327,7 +2327,7 @@
         </p:nvSpPr>
         <p:spPr>
           <a:xfrm>
-            <a:off x="841248" y="2353437"/>
+            <a:off x="841248" y="2328291"/>
             <a:ext cx="347472" cy="347472"/>
           </a:xfrm>
           <a:prstGeom prst="ellipse">
@@ -2347,7 +2347,7 @@
         </p:nvSpPr>
         <p:spPr>
           <a:xfrm>
-            <a:off x="841248" y="2353437"/>
+            <a:off x="841248" y="2328291"/>
             <a:ext cx="347472" cy="347472"/>
           </a:xfrm>
           <a:prstGeom prst="rect">
@@ -2386,8 +2386,8 @@
         </p:nvSpPr>
         <p:spPr>
           <a:xfrm>
-            <a:off x="1280160" y="2178558"/>
-            <a:ext cx="10033711" cy="697230"/>
+            <a:off x="1280160" y="2137410"/>
+            <a:ext cx="10033711" cy="729234"/>
           </a:xfrm>
           <a:prstGeom prst="rect">
             <a:avLst/>
@@ -2406,7 +2406,7 @@
               <a:buNone/>
             </a:pPr>
             <a:r>
-              <a:rPr lang="en-US" sz="900" dirty="0">
+              <a:rPr lang="en-US" sz="950" dirty="0">
                 <a:solidFill>
                   <a:srgbClr val="5F7183"/>
                 </a:solidFill>
@@ -2416,7 +2416,7 @@
               </a:rPr>
               <a:t>問2　初期消火か避難誘導か</a:t>
             </a:r>
-            <a:endParaRPr lang="en-US" sz="900" dirty="0"/>
+            <a:endParaRPr lang="en-US" sz="950" dirty="0"/>
           </a:p>
           <a:p>
             <a:pPr indent="0" marL="0">
@@ -2436,7 +2436,7 @@
               </a:rPr>
               <a:t>1名なら避難誘導。初期消火は複数名と退路の確保が前提。</a:t>
             </a:r>
-            <a:endParaRPr lang="en-US" sz="900" dirty="0"/>
+            <a:endParaRPr lang="en-US" sz="950" dirty="0"/>
           </a:p>
           <a:p>
             <a:pPr indent="0" marL="0">
@@ -2446,9 +2446,9 @@
               <a:buNone/>
             </a:pPr>
             <a:r>
-              <a:rPr lang="en-US" sz="800" i="1" dirty="0">
-                <a:solidFill>
-                  <a:srgbClr val="5F7183"/>
+              <a:rPr lang="en-US" sz="1100" dirty="0">
+                <a:solidFill>
+                  <a:srgbClr val="1B2733"/>
                 </a:solidFill>
                 <a:latin typeface="Calibri" pitchFamily="34" charset="0"/>
                 <a:ea typeface="Calibri" pitchFamily="34" charset="-122"/>
@@ -2456,7 +2456,7 @@
               </a:rPr>
               <a:t>Alone, guide the evacuation. Firefighting needs numbers and a secured way out.</a:t>
             </a:r>
-            <a:endParaRPr lang="en-US" sz="900" dirty="0"/>
+            <a:endParaRPr lang="en-US" sz="950" dirty="0"/>
           </a:p>
         </p:txBody>
       </p:sp>
@@ -2468,12 +2468,12 @@
         </p:nvSpPr>
         <p:spPr>
           <a:xfrm>
-            <a:off x="640080" y="3040380"/>
-            <a:ext cx="10911535" cy="825246"/>
+            <a:off x="640080" y="3031236"/>
+            <a:ext cx="10911535" cy="857250"/>
           </a:xfrm>
           <a:prstGeom prst="roundRect">
             <a:avLst>
-              <a:gd name="adj" fmla="val 4432"/>
+              <a:gd name="adj" fmla="val 4267"/>
             </a:avLst>
           </a:prstGeom>
           <a:solidFill>
@@ -2490,7 +2490,7 @@
         </p:nvSpPr>
         <p:spPr>
           <a:xfrm>
-            <a:off x="841248" y="3279267"/>
+            <a:off x="841248" y="3286125"/>
             <a:ext cx="347472" cy="347472"/>
           </a:xfrm>
           <a:prstGeom prst="ellipse">
@@ -2510,7 +2510,7 @@
         </p:nvSpPr>
         <p:spPr>
           <a:xfrm>
-            <a:off x="841248" y="3279267"/>
+            <a:off x="841248" y="3286125"/>
             <a:ext cx="347472" cy="347472"/>
           </a:xfrm>
           <a:prstGeom prst="rect">
@@ -2549,8 +2549,8 @@
         </p:nvSpPr>
         <p:spPr>
           <a:xfrm>
-            <a:off x="1280160" y="3104388"/>
-            <a:ext cx="10033711" cy="697230"/>
+            <a:off x="1280160" y="3095244"/>
+            <a:ext cx="10033711" cy="729234"/>
           </a:xfrm>
           <a:prstGeom prst="rect">
             <a:avLst/>
@@ -2569,7 +2569,7 @@
               <a:buNone/>
             </a:pPr>
             <a:r>
-              <a:rPr lang="en-US" sz="900" dirty="0">
+              <a:rPr lang="en-US" sz="950" dirty="0">
                 <a:solidFill>
                   <a:srgbClr val="5F7183"/>
                 </a:solidFill>
@@ -2579,7 +2579,7 @@
               </a:rPr>
               <a:t>問3　1名の限界。何を諦めるか</a:t>
             </a:r>
-            <a:endParaRPr lang="en-US" sz="900" dirty="0"/>
+            <a:endParaRPr lang="en-US" sz="950" dirty="0"/>
           </a:p>
           <a:p>
             <a:pPr indent="0" marL="0">
@@ -2599,7 +2599,7 @@
               </a:rPr>
               <a:t>初期消火、原因の特定、私物の持ち出しを諦める。20名の避難を優先する。</a:t>
             </a:r>
-            <a:endParaRPr lang="en-US" sz="900" dirty="0"/>
+            <a:endParaRPr lang="en-US" sz="950" dirty="0"/>
           </a:p>
           <a:p>
             <a:pPr indent="0" marL="0">
@@ -2609,9 +2609,9 @@
               <a:buNone/>
             </a:pPr>
             <a:r>
-              <a:rPr lang="en-US" sz="800" i="1" dirty="0">
-                <a:solidFill>
-                  <a:srgbClr val="5F7183"/>
+              <a:rPr lang="en-US" sz="1100" dirty="0">
+                <a:solidFill>
+                  <a:srgbClr val="1B2733"/>
                 </a:solidFill>
                 <a:latin typeface="Calibri" pitchFamily="34" charset="0"/>
                 <a:ea typeface="Calibri" pitchFamily="34" charset="-122"/>
@@ -2619,7 +2619,7 @@
               </a:rPr>
               <a:t>Give up firefighting, finding the cause, and retrieving belongings. Twenty people come first.</a:t>
             </a:r>
-            <a:endParaRPr lang="en-US" sz="900" dirty="0"/>
+            <a:endParaRPr lang="en-US" sz="950" dirty="0"/>
           </a:p>
         </p:txBody>
       </p:sp>
@@ -2631,12 +2631,12 @@
         </p:nvSpPr>
         <p:spPr>
           <a:xfrm>
-            <a:off x="640080" y="3966210"/>
-            <a:ext cx="10911535" cy="825246"/>
+            <a:off x="640080" y="3989070"/>
+            <a:ext cx="10911535" cy="857250"/>
           </a:xfrm>
           <a:prstGeom prst="roundRect">
             <a:avLst>
-              <a:gd name="adj" fmla="val 4432"/>
+              <a:gd name="adj" fmla="val 4267"/>
             </a:avLst>
           </a:prstGeom>
           <a:solidFill>
@@ -2653,7 +2653,7 @@
         </p:nvSpPr>
         <p:spPr>
           <a:xfrm>
-            <a:off x="841248" y="4205097"/>
+            <a:off x="841248" y="4243959"/>
             <a:ext cx="347472" cy="347472"/>
           </a:xfrm>
           <a:prstGeom prst="ellipse">
@@ -2673,7 +2673,7 @@
         </p:nvSpPr>
         <p:spPr>
           <a:xfrm>
-            <a:off x="841248" y="4205097"/>
+            <a:off x="841248" y="4243959"/>
             <a:ext cx="347472" cy="347472"/>
           </a:xfrm>
           <a:prstGeom prst="rect">
@@ -2712,8 +2712,8 @@
         </p:nvSpPr>
         <p:spPr>
           <a:xfrm>
-            <a:off x="1280160" y="4030218"/>
-            <a:ext cx="10033711" cy="697230"/>
+            <a:off x="1280160" y="4053078"/>
+            <a:ext cx="10033711" cy="729234"/>
           </a:xfrm>
           <a:prstGeom prst="rect">
             <a:avLst/>
@@ -2732,7 +2732,7 @@
               <a:buNone/>
             </a:pPr>
             <a:r>
-              <a:rPr lang="en-US" sz="900" dirty="0">
+              <a:rPr lang="en-US" sz="950" dirty="0">
                 <a:solidFill>
                   <a:srgbClr val="5F7183"/>
                 </a:solidFill>
@@ -2742,7 +2742,7 @@
               </a:rPr>
               <a:t>問4　発報前に通報してよいか</a:t>
             </a:r>
-            <a:endParaRPr lang="en-US" sz="900" dirty="0"/>
+            <a:endParaRPr lang="en-US" sz="950" dirty="0"/>
           </a:p>
           <a:p>
             <a:pPr indent="0" marL="0">
@@ -2762,7 +2762,7 @@
               </a:rPr>
               <a:t>してよい。発報を待つ理由はない。人が煙を確認している事実で足りる。</a:t>
             </a:r>
-            <a:endParaRPr lang="en-US" sz="900" dirty="0"/>
+            <a:endParaRPr lang="en-US" sz="950" dirty="0"/>
           </a:p>
           <a:p>
             <a:pPr indent="0" marL="0">
@@ -2772,9 +2772,9 @@
               <a:buNone/>
             </a:pPr>
             <a:r>
-              <a:rPr lang="en-US" sz="800" i="1" dirty="0">
-                <a:solidFill>
-                  <a:srgbClr val="5F7183"/>
+              <a:rPr lang="en-US" sz="1100" dirty="0">
+                <a:solidFill>
+                  <a:srgbClr val="1B2733"/>
                 </a:solidFill>
                 <a:latin typeface="Calibri" pitchFamily="34" charset="0"/>
                 <a:ea typeface="Calibri" pitchFamily="34" charset="-122"/>
@@ -2782,7 +2782,7 @@
               </a:rPr>
               <a:t>Yes. There is no reason to wait for the alarm — a person has seen smoke, and that is enough.</a:t>
             </a:r>
-            <a:endParaRPr lang="en-US" sz="900" dirty="0"/>
+            <a:endParaRPr lang="en-US" sz="950" dirty="0"/>
           </a:p>
         </p:txBody>
       </p:sp>
@@ -2794,7 +2794,7 @@
         </p:nvSpPr>
         <p:spPr>
           <a:xfrm>
-            <a:off x="640080" y="4901184"/>
+            <a:off x="640080" y="4956048"/>
             <a:ext cx="10911535" cy="420624"/>
           </a:xfrm>
           <a:prstGeom prst="roundRect">
@@ -2816,7 +2816,7 @@
         </p:nvSpPr>
         <p:spPr>
           <a:xfrm>
-            <a:off x="859536" y="4928616"/>
+            <a:off x="859536" y="4983480"/>
             <a:ext cx="10472623" cy="365760"/>
           </a:xfrm>
           <a:prstGeom prst="rect">
@@ -2890,9 +2890,9 @@
               <a:buNone/>
             </a:pPr>
             <a:r>
-              <a:rPr lang="en-US" sz="750" i="1" dirty="0">
-                <a:solidFill>
-                  <a:srgbClr val="5F7183"/>
+              <a:rPr lang="en-US" sz="950" dirty="0">
+                <a:solidFill>
+                  <a:srgbClr val="1B2733"/>
                 </a:solidFill>
                 <a:latin typeface="Calibri" pitchFamily="34" charset="0"/>
                 <a:ea typeface="Calibri" pitchFamily="34" charset="-122"/>
@@ -2912,7 +2912,7 @@
         </p:nvSpPr>
         <p:spPr>
           <a:xfrm>
-            <a:off x="640080" y="5394960"/>
+            <a:off x="640080" y="5449824"/>
             <a:ext cx="10911535" cy="420624"/>
           </a:xfrm>
           <a:prstGeom prst="roundRect">
@@ -2934,7 +2934,7 @@
         </p:nvSpPr>
         <p:spPr>
           <a:xfrm>
-            <a:off x="859536" y="5422392"/>
+            <a:off x="859536" y="5477256"/>
             <a:ext cx="10472623" cy="365760"/>
           </a:xfrm>
           <a:prstGeom prst="rect">
@@ -3008,7 +3008,86 @@
               <a:buNone/>
             </a:pPr>
             <a:r>
-              <a:rPr lang="en-US" sz="750" i="1" dirty="0">
+              <a:rPr lang="en-US" sz="950" dirty="0">
+                <a:solidFill>
+                  <a:srgbClr val="1B2733"/>
+                </a:solidFill>
+                <a:latin typeface="Calibri" pitchFamily="34" charset="0"/>
+                <a:ea typeface="Calibri" pitchFamily="34" charset="-122"/>
+                <a:cs typeface="Calibri" pitchFamily="34" charset="-120"/>
+              </a:rPr>
+              <a:t>A fire is now more likely. Switch to a building-wide evacuation, and update the fire service.</a:t>
+            </a:r>
+            <a:endParaRPr lang="en-US" sz="850" dirty="0"/>
+          </a:p>
+        </p:txBody>
+      </p:sp>
+      <p:sp>
+        <p:nvSpPr>
+          <p:cNvPr id="26" name="Text 23"/>
+          <p:cNvSpPr/>
+          <p:nvPr/>
+        </p:nvSpPr>
+        <p:spPr>
+          <a:xfrm>
+            <a:off x="640080" y="5961888"/>
+            <a:ext cx="10911535" cy="292608"/>
+          </a:xfrm>
+          <a:prstGeom prst="rect">
+            <a:avLst/>
+          </a:prstGeom>
+          <a:noFill/>
+          <a:ln/>
+        </p:spPr>
+        <p:txBody>
+          <a:bodyPr wrap="square" lIns="0" tIns="0" rIns="0" bIns="0" rtlCol="0" anchor="t"/>
+          <a:lstStyle/>
+          <a:p>
+            <a:pPr indent="0" marL="0">
+              <a:lnSpc>
+                <a:spcPct val="88000"/>
+              </a:lnSpc>
+              <a:buNone/>
+            </a:pPr>
+            <a:r>
+              <a:rPr lang="en-US" sz="900" b="1" dirty="0">
+                <a:solidFill>
+                  <a:srgbClr val="0D8A76"/>
+                </a:solidFill>
+                <a:latin typeface="Yu Gothic" pitchFamily="34" charset="0"/>
+                <a:ea typeface="Yu Gothic" pitchFamily="34" charset="-122"/>
+                <a:cs typeface="Yu Gothic" pitchFamily="34" charset="-120"/>
+              </a:rPr>
+              <a:t>Site SOP優先　</a:t>
+            </a:r>
+            <a:pPr indent="0" marL="0">
+              <a:lnSpc>
+                <a:spcPct val="88000"/>
+              </a:lnSpc>
+              <a:buNone/>
+            </a:pPr>
+            <a:r>
+              <a:rPr lang="en-US" sz="900" dirty="0">
+                <a:solidFill>
+                  <a:srgbClr val="1B2733"/>
+                </a:solidFill>
+                <a:latin typeface="Yu Gothic" pitchFamily="34" charset="0"/>
+                <a:ea typeface="Yu Gothic" pitchFamily="34" charset="-122"/>
+                <a:cs typeface="Yu Gothic" pitchFamily="34" charset="-120"/>
+              </a:rPr>
+              <a:t>初期消火の実施可否、自衛消防組織での役割、通報の判断者は現場ごとに定められている。</a:t>
+            </a:r>
+            <a:endParaRPr lang="en-US" sz="900" dirty="0"/>
+          </a:p>
+          <a:p>
+            <a:pPr indent="0" marL="0">
+              <a:lnSpc>
+                <a:spcPct val="88000"/>
+              </a:lnSpc>
+              <a:buNone/>
+            </a:pPr>
+            <a:r>
+              <a:rPr lang="en-US" sz="800" i="1" dirty="0">
                 <a:solidFill>
                   <a:srgbClr val="5F7183"/>
                 </a:solidFill>
@@ -3016,22 +3095,22 @@
                 <a:ea typeface="Calibri" pitchFamily="34" charset="-122"/>
                 <a:cs typeface="Calibri" pitchFamily="34" charset="-120"/>
               </a:rPr>
-              <a:t>A fire is now more likely. Switch to a building-wide evacuation, and update the fire service.</a:t>
-            </a:r>
-            <a:endParaRPr lang="en-US" sz="850" dirty="0"/>
-          </a:p>
-        </p:txBody>
-      </p:sp>
-      <p:sp>
-        <p:nvSpPr>
-          <p:cNvPr id="26" name="Text 23"/>
-          <p:cNvSpPr/>
-          <p:nvPr/>
-        </p:nvSpPr>
-        <p:spPr>
-          <a:xfrm>
-            <a:off x="640080" y="5907024"/>
-            <a:ext cx="10911535" cy="310896"/>
+              <a:t>Whether guards fight fires, their role in the fire brigade, and who calls are set per site.</a:t>
+            </a:r>
+            <a:endParaRPr lang="en-US" sz="900" dirty="0"/>
+          </a:p>
+        </p:txBody>
+      </p:sp>
+      <p:sp>
+        <p:nvSpPr>
+          <p:cNvPr id="27" name="Text 24"/>
+          <p:cNvSpPr/>
+          <p:nvPr/>
+        </p:nvSpPr>
+        <p:spPr>
+          <a:xfrm>
+            <a:off x="640080" y="6272784"/>
+            <a:ext cx="9905695" cy="219456"/>
           </a:xfrm>
           <a:prstGeom prst="rect">
             <a:avLst/>
@@ -3044,167 +3123,88 @@
           <a:lstStyle/>
           <a:p>
             <a:pPr indent="0" marL="0">
-              <a:lnSpc>
-                <a:spcPct val="88000"/>
-              </a:lnSpc>
-              <a:buNone/>
-            </a:pPr>
-            <a:r>
-              <a:rPr lang="en-US" sz="900" b="1" dirty="0">
-                <a:solidFill>
-                  <a:srgbClr val="0D8A76"/>
-                </a:solidFill>
-                <a:latin typeface="Yu Gothic" pitchFamily="34" charset="0"/>
-                <a:ea typeface="Yu Gothic" pitchFamily="34" charset="-122"/>
-                <a:cs typeface="Yu Gothic" pitchFamily="34" charset="-120"/>
-              </a:rPr>
-              <a:t>Site SOP優先　</a:t>
-            </a:r>
-            <a:pPr indent="0" marL="0">
-              <a:lnSpc>
-                <a:spcPct val="88000"/>
-              </a:lnSpc>
+              <a:buNone/>
+            </a:pPr>
+            <a:r>
+              <a:rPr lang="en-US" sz="750" b="1" dirty="0">
+                <a:solidFill>
+                  <a:srgbClr val="D6E0E9"/>
+                </a:solidFill>
+                <a:latin typeface="Yu Gothic" pitchFamily="34" charset="0"/>
+                <a:ea typeface="Yu Gothic" pitchFamily="34" charset="-122"/>
+                <a:cs typeface="Yu Gothic" pitchFamily="34" charset="-120"/>
+              </a:rPr>
+              <a:t>ソース　</a:t>
+            </a:r>
+            <a:pPr indent="0" marL="0">
+              <a:buNone/>
+            </a:pPr>
+            <a:r>
+              <a:rPr lang="en-US" sz="750" dirty="0">
+                <a:solidFill>
+                  <a:srgbClr val="5F7183"/>
+                </a:solidFill>
+                <a:latin typeface="Yu Gothic" pitchFamily="34" charset="0"/>
+                <a:ea typeface="Yu Gothic" pitchFamily="34" charset="-122"/>
+                <a:cs typeface="Yu Gothic" pitchFamily="34" charset="-120"/>
+              </a:rPr>
+              <a:t>消防法、総務省消防庁、警察庁「警備員教育」</a:t>
+            </a:r>
+            <a:endParaRPr lang="en-US" sz="750" dirty="0"/>
+          </a:p>
+        </p:txBody>
+      </p:sp>
+      <p:sp>
+        <p:nvSpPr>
+          <p:cNvPr id="28" name="Text 25"/>
+          <p:cNvSpPr/>
+          <p:nvPr/>
+        </p:nvSpPr>
+        <p:spPr>
+          <a:xfrm>
+            <a:off x="640080" y="6492240"/>
+            <a:ext cx="8778240" cy="292608"/>
+          </a:xfrm>
+          <a:prstGeom prst="rect">
+            <a:avLst/>
+          </a:prstGeom>
+          <a:noFill/>
+          <a:ln/>
+        </p:spPr>
+        <p:txBody>
+          <a:bodyPr wrap="square" lIns="0" tIns="0" rIns="0" bIns="0" rtlCol="0" anchor="ctr"/>
+          <a:lstStyle/>
+          <a:p>
+            <a:pPr indent="0" marL="0">
               <a:buNone/>
             </a:pPr>
             <a:r>
               <a:rPr lang="en-US" sz="900" dirty="0">
                 <a:solidFill>
-                  <a:srgbClr val="1B2733"/>
-                </a:solidFill>
-                <a:latin typeface="Yu Gothic" pitchFamily="34" charset="0"/>
-                <a:ea typeface="Yu Gothic" pitchFamily="34" charset="-122"/>
-                <a:cs typeface="Yu Gothic" pitchFamily="34" charset="-120"/>
-              </a:rPr>
-              <a:t>初期消火の実施可否、自衛消防組織での役割、通報の判断者は現場ごとに定められている。</a:t>
+                  <a:srgbClr val="5F7183"/>
+                </a:solidFill>
+                <a:latin typeface="Yu Gothic" pitchFamily="34" charset="0"/>
+                <a:ea typeface="Yu Gothic" pitchFamily="34" charset="-122"/>
+                <a:cs typeface="Yu Gothic" pitchFamily="34" charset="-120"/>
+              </a:rPr>
+              <a:t>第9時限｜基本教育4 事故の発生時における警察機関への連絡その他応急の措置  </a:t>
+            </a:r>
+            <a:pPr indent="0" marL="0">
+              <a:buNone/>
+            </a:pPr>
+            <a:r>
+              <a:rPr lang="en-US" sz="850" i="1" dirty="0">
+                <a:solidFill>
+                  <a:srgbClr val="D6E0E9"/>
+                </a:solidFill>
+                <a:latin typeface="Calibri" pitchFamily="34" charset="0"/>
+                <a:ea typeface="Calibri" pitchFamily="34" charset="-122"/>
+                <a:cs typeface="Calibri" pitchFamily="34" charset="-120"/>
+              </a:rPr>
+              <a:t>Period 9 | Basic Training 4 — Emergency Reporting and Scene Preservation</a:t>
             </a:r>
             <a:endParaRPr lang="en-US" sz="900" dirty="0"/>
           </a:p>
-          <a:p>
-            <a:pPr indent="0" marL="0">
-              <a:lnSpc>
-                <a:spcPct val="88000"/>
-              </a:lnSpc>
-              <a:buNone/>
-            </a:pPr>
-            <a:r>
-              <a:rPr lang="en-US" sz="750" i="1" dirty="0">
-                <a:solidFill>
-                  <a:srgbClr val="5F7183"/>
-                </a:solidFill>
-                <a:latin typeface="Calibri" pitchFamily="34" charset="0"/>
-                <a:ea typeface="Calibri" pitchFamily="34" charset="-122"/>
-                <a:cs typeface="Calibri" pitchFamily="34" charset="-120"/>
-              </a:rPr>
-              <a:t>Whether guards fight fires, their role in the fire brigade, and who calls are set per site.</a:t>
-            </a:r>
-            <a:endParaRPr lang="en-US" sz="900" dirty="0"/>
-          </a:p>
-        </p:txBody>
-      </p:sp>
-      <p:sp>
-        <p:nvSpPr>
-          <p:cNvPr id="27" name="Text 24"/>
-          <p:cNvSpPr/>
-          <p:nvPr/>
-        </p:nvSpPr>
-        <p:spPr>
-          <a:xfrm>
-            <a:off x="640080" y="6272784"/>
-            <a:ext cx="9905695" cy="237744"/>
-          </a:xfrm>
-          <a:prstGeom prst="rect">
-            <a:avLst/>
-          </a:prstGeom>
-          <a:noFill/>
-          <a:ln/>
-        </p:spPr>
-        <p:txBody>
-          <a:bodyPr wrap="square" lIns="0" tIns="0" rIns="0" bIns="0" rtlCol="0" anchor="t"/>
-          <a:lstStyle/>
-          <a:p>
-            <a:pPr indent="0" marL="0">
-              <a:buNone/>
-            </a:pPr>
-            <a:r>
-              <a:rPr lang="en-US" sz="750" b="1" dirty="0">
-                <a:solidFill>
-                  <a:srgbClr val="D6E0E9"/>
-                </a:solidFill>
-                <a:latin typeface="Yu Gothic" pitchFamily="34" charset="0"/>
-                <a:ea typeface="Yu Gothic" pitchFamily="34" charset="-122"/>
-                <a:cs typeface="Yu Gothic" pitchFamily="34" charset="-120"/>
-              </a:rPr>
-              <a:t>ソース　</a:t>
-            </a:r>
-            <a:pPr indent="0" marL="0">
-              <a:buNone/>
-            </a:pPr>
-            <a:r>
-              <a:rPr lang="en-US" sz="750" dirty="0">
-                <a:solidFill>
-                  <a:srgbClr val="5F7183"/>
-                </a:solidFill>
-                <a:latin typeface="Yu Gothic" pitchFamily="34" charset="0"/>
-                <a:ea typeface="Yu Gothic" pitchFamily="34" charset="-122"/>
-                <a:cs typeface="Yu Gothic" pitchFamily="34" charset="-120"/>
-              </a:rPr>
-              <a:t>消防法、総務省消防庁、警察庁「警備員教育」</a:t>
-            </a:r>
-            <a:endParaRPr lang="en-US" sz="750" dirty="0"/>
-          </a:p>
-        </p:txBody>
-      </p:sp>
-      <p:sp>
-        <p:nvSpPr>
-          <p:cNvPr id="28" name="Text 25"/>
-          <p:cNvSpPr/>
-          <p:nvPr/>
-        </p:nvSpPr>
-        <p:spPr>
-          <a:xfrm>
-            <a:off x="640080" y="6382512"/>
-            <a:ext cx="8778240" cy="292608"/>
-          </a:xfrm>
-          <a:prstGeom prst="rect">
-            <a:avLst/>
-          </a:prstGeom>
-          <a:noFill/>
-          <a:ln/>
-        </p:spPr>
-        <p:txBody>
-          <a:bodyPr wrap="square" lIns="0" tIns="0" rIns="0" bIns="0" rtlCol="0" anchor="ctr"/>
-          <a:lstStyle/>
-          <a:p>
-            <a:pPr indent="0" marL="0">
-              <a:buNone/>
-            </a:pPr>
-            <a:r>
-              <a:rPr lang="en-US" sz="900" dirty="0">
-                <a:solidFill>
-                  <a:srgbClr val="5F7183"/>
-                </a:solidFill>
-                <a:latin typeface="Yu Gothic" pitchFamily="34" charset="0"/>
-                <a:ea typeface="Yu Gothic" pitchFamily="34" charset="-122"/>
-                <a:cs typeface="Yu Gothic" pitchFamily="34" charset="-120"/>
-              </a:rPr>
-              <a:t>第9時限｜基本教育4 事故の発生時における警察機関への連絡その他応急の措置  </a:t>
-            </a:r>
-            <a:pPr indent="0" marL="0">
-              <a:buNone/>
-            </a:pPr>
-            <a:r>
-              <a:rPr lang="en-US" sz="850" i="1" dirty="0">
-                <a:solidFill>
-                  <a:srgbClr val="D6E0E9"/>
-                </a:solidFill>
-                <a:latin typeface="Calibri" pitchFamily="34" charset="0"/>
-                <a:ea typeface="Calibri" pitchFamily="34" charset="-122"/>
-                <a:cs typeface="Calibri" pitchFamily="34" charset="-120"/>
-              </a:rPr>
-              <a:t>Period 9 | Basic Training 4 — Emergency Reporting and Scene Preservation</a:t>
-            </a:r>
-            <a:endParaRPr lang="en-US" sz="900" dirty="0"/>
-          </a:p>
         </p:txBody>
       </p:sp>
       <p:sp>
@@ -3215,7 +3215,7 @@
         </p:nvSpPr>
         <p:spPr>
           <a:xfrm>
-            <a:off x="10637215" y="6382512"/>
+            <a:off x="10637215" y="6492240"/>
             <a:ext cx="914400" cy="292608"/>
           </a:xfrm>
           <a:prstGeom prst="rect">
@@ -3350,7 +3350,7 @@
               <a:buNone/>
             </a:pPr>
             <a:r>
-              <a:rPr lang="en-US" sz="1250" i="1" dirty="0">
+              <a:rPr lang="en-US" sz="1350" dirty="0">
                 <a:solidFill>
                   <a:srgbClr val="12B198"/>
                 </a:solidFill>
@@ -3412,9 +3412,9 @@
               <a:buNone/>
             </a:pPr>
             <a:r>
-              <a:rPr lang="en-US" sz="1000" i="1" dirty="0">
-                <a:solidFill>
-                  <a:srgbClr val="5F7183"/>
+              <a:rPr lang="en-US" sz="1000" dirty="0">
+                <a:solidFill>
+                  <a:srgbClr val="1B2733"/>
                 </a:solidFill>
                 <a:latin typeface="Calibri" pitchFamily="34" charset="0"/>
                 <a:ea typeface="Calibri" pitchFamily="34" charset="-122"/>
@@ -3496,9 +3496,9 @@
               <a:buNone/>
             </a:pPr>
             <a:r>
-              <a:rPr lang="en-US" sz="1000" i="1" dirty="0">
-                <a:solidFill>
-                  <a:srgbClr val="5F7183"/>
+              <a:rPr lang="en-US" sz="1100" dirty="0">
+                <a:solidFill>
+                  <a:srgbClr val="1B2733"/>
                 </a:solidFill>
                 <a:latin typeface="Calibri" pitchFamily="34" charset="0"/>
                 <a:ea typeface="Calibri" pitchFamily="34" charset="-122"/>
@@ -3564,9 +3564,9 @@
               <a:buNone/>
             </a:pPr>
             <a:r>
-              <a:rPr lang="en-US" sz="950" i="1" dirty="0">
-                <a:solidFill>
-                  <a:srgbClr val="5F7183"/>
+              <a:rPr lang="en-US" sz="1150" dirty="0">
+                <a:solidFill>
+                  <a:srgbClr val="1B2733"/>
                 </a:solidFill>
                 <a:latin typeface="Calibri" pitchFamily="34" charset="0"/>
                 <a:ea typeface="Calibri" pitchFamily="34" charset="-122"/>
@@ -3610,9 +3610,9 @@
               <a:buNone/>
             </a:pPr>
             <a:r>
-              <a:rPr lang="en-US" sz="950" i="1" dirty="0">
-                <a:solidFill>
-                  <a:srgbClr val="5F7183"/>
+              <a:rPr lang="en-US" sz="1150" dirty="0">
+                <a:solidFill>
+                  <a:srgbClr val="1B2733"/>
                 </a:solidFill>
                 <a:latin typeface="Calibri" pitchFamily="34" charset="0"/>
                 <a:ea typeface="Calibri" pitchFamily="34" charset="-122"/>
@@ -3656,9 +3656,9 @@
               <a:buNone/>
             </a:pPr>
             <a:r>
-              <a:rPr lang="en-US" sz="950" i="1" dirty="0">
-                <a:solidFill>
-                  <a:srgbClr val="5F7183"/>
+              <a:rPr lang="en-US" sz="1150" dirty="0">
+                <a:solidFill>
+                  <a:srgbClr val="1B2733"/>
                 </a:solidFill>
                 <a:latin typeface="Calibri" pitchFamily="34" charset="0"/>
                 <a:ea typeface="Calibri" pitchFamily="34" charset="-122"/>
@@ -3740,9 +3740,9 @@
               <a:buNone/>
             </a:pPr>
             <a:r>
-              <a:rPr lang="en-US" sz="1000" i="1" dirty="0">
-                <a:solidFill>
-                  <a:srgbClr val="5F7183"/>
+              <a:rPr lang="en-US" sz="1100" dirty="0">
+                <a:solidFill>
+                  <a:srgbClr val="1B2733"/>
                 </a:solidFill>
                 <a:latin typeface="Calibri" pitchFamily="34" charset="0"/>
                 <a:ea typeface="Calibri" pitchFamily="34" charset="-122"/>
@@ -3808,9 +3808,9 @@
               <a:buNone/>
             </a:pPr>
             <a:r>
-              <a:rPr lang="en-US" sz="950" i="1" dirty="0">
-                <a:solidFill>
-                  <a:srgbClr val="5F7183"/>
+              <a:rPr lang="en-US" sz="1150" dirty="0">
+                <a:solidFill>
+                  <a:srgbClr val="1B2733"/>
                 </a:solidFill>
                 <a:latin typeface="Calibri" pitchFamily="34" charset="0"/>
                 <a:ea typeface="Calibri" pitchFamily="34" charset="-122"/>
@@ -3854,9 +3854,9 @@
               <a:buNone/>
             </a:pPr>
             <a:r>
-              <a:rPr lang="en-US" sz="950" i="1" dirty="0">
-                <a:solidFill>
-                  <a:srgbClr val="5F7183"/>
+              <a:rPr lang="en-US" sz="1150" dirty="0">
+                <a:solidFill>
+                  <a:srgbClr val="1B2733"/>
                 </a:solidFill>
                 <a:latin typeface="Calibri" pitchFamily="34" charset="0"/>
                 <a:ea typeface="Calibri" pitchFamily="34" charset="-122"/>
@@ -3900,9 +3900,9 @@
               <a:buNone/>
             </a:pPr>
             <a:r>
-              <a:rPr lang="en-US" sz="950" i="1" dirty="0">
-                <a:solidFill>
-                  <a:srgbClr val="5F7183"/>
+              <a:rPr lang="en-US" sz="1150" dirty="0">
+                <a:solidFill>
+                  <a:srgbClr val="1B2733"/>
                 </a:solidFill>
                 <a:latin typeface="Calibri" pitchFamily="34" charset="0"/>
                 <a:ea typeface="Calibri" pitchFamily="34" charset="-122"/>
@@ -3946,9 +3946,9 @@
               <a:buNone/>
             </a:pPr>
             <a:r>
-              <a:rPr lang="en-US" sz="950" i="1" dirty="0">
-                <a:solidFill>
-                  <a:srgbClr val="5F7183"/>
+              <a:rPr lang="en-US" sz="1150" dirty="0">
+                <a:solidFill>
+                  <a:srgbClr val="1B2733"/>
                 </a:solidFill>
                 <a:latin typeface="Calibri" pitchFamily="34" charset="0"/>
                 <a:ea typeface="Calibri" pitchFamily="34" charset="-122"/>
@@ -4008,49 +4008,49 @@
               <a:buNone/>
             </a:pPr>
             <a:r>
-              <a:rPr lang="en-US" sz="1000" i="1" dirty="0">
+              <a:rPr lang="en-US" sz="1000" dirty="0">
+                <a:solidFill>
+                  <a:srgbClr val="1B2733"/>
+                </a:solidFill>
+                <a:latin typeface="Calibri" pitchFamily="34" charset="0"/>
+                <a:ea typeface="Calibri" pitchFamily="34" charset="-122"/>
+                <a:cs typeface="Calibri" pitchFamily="34" charset="-120"/>
+              </a:rPr>
+              <a:t>AED and compressions are not covered here. Period 3 is assumed.</a:t>
+            </a:r>
+            <a:endParaRPr lang="en-US" sz="1300" dirty="0"/>
+          </a:p>
+        </p:txBody>
+      </p:sp>
+      <p:sp>
+        <p:nvSpPr>
+          <p:cNvPr id="12" name="Text 9"/>
+          <p:cNvSpPr/>
+          <p:nvPr/>
+        </p:nvSpPr>
+        <p:spPr>
+          <a:xfrm>
+            <a:off x="640080" y="6492240"/>
+            <a:ext cx="8778240" cy="292608"/>
+          </a:xfrm>
+          <a:prstGeom prst="rect">
+            <a:avLst/>
+          </a:prstGeom>
+          <a:noFill/>
+          <a:ln/>
+        </p:spPr>
+        <p:txBody>
+          <a:bodyPr wrap="square" lIns="0" tIns="0" rIns="0" bIns="0" rtlCol="0" anchor="ctr"/>
+          <a:lstStyle/>
+          <a:p>
+            <a:pPr indent="0" marL="0">
+              <a:buNone/>
+            </a:pPr>
+            <a:r>
+              <a:rPr lang="en-US" sz="900" dirty="0">
                 <a:solidFill>
                   <a:srgbClr val="5F7183"/>
                 </a:solidFill>
-                <a:latin typeface="Calibri" pitchFamily="34" charset="0"/>
-                <a:ea typeface="Calibri" pitchFamily="34" charset="-122"/>
-                <a:cs typeface="Calibri" pitchFamily="34" charset="-120"/>
-              </a:rPr>
-              <a:t>AED and compressions are not covered here. Period 3 is assumed.</a:t>
-            </a:r>
-            <a:endParaRPr lang="en-US" sz="1300" dirty="0"/>
-          </a:p>
-        </p:txBody>
-      </p:sp>
-      <p:sp>
-        <p:nvSpPr>
-          <p:cNvPr id="12" name="Text 9"/>
-          <p:cNvSpPr/>
-          <p:nvPr/>
-        </p:nvSpPr>
-        <p:spPr>
-          <a:xfrm>
-            <a:off x="640080" y="6382512"/>
-            <a:ext cx="8778240" cy="292608"/>
-          </a:xfrm>
-          <a:prstGeom prst="rect">
-            <a:avLst/>
-          </a:prstGeom>
-          <a:noFill/>
-          <a:ln/>
-        </p:spPr>
-        <p:txBody>
-          <a:bodyPr wrap="square" lIns="0" tIns="0" rIns="0" bIns="0" rtlCol="0" anchor="ctr"/>
-          <a:lstStyle/>
-          <a:p>
-            <a:pPr indent="0" marL="0">
-              <a:buNone/>
-            </a:pPr>
-            <a:r>
-              <a:rPr lang="en-US" sz="900" dirty="0">
-                <a:solidFill>
-                  <a:srgbClr val="5F7183"/>
-                </a:solidFill>
                 <a:latin typeface="Yu Gothic" pitchFamily="34" charset="0"/>
                 <a:ea typeface="Yu Gothic" pitchFamily="34" charset="-122"/>
                 <a:cs typeface="Yu Gothic" pitchFamily="34" charset="-120"/>
@@ -4083,7 +4083,7 @@
         </p:nvSpPr>
         <p:spPr>
           <a:xfrm>
-            <a:off x="10637215" y="6382512"/>
+            <a:off x="10637215" y="6492240"/>
             <a:ext cx="914400" cy="292608"/>
           </a:xfrm>
           <a:prstGeom prst="rect">
@@ -4178,8 +4178,8 @@
         </p:nvSpPr>
         <p:spPr>
           <a:xfrm>
-            <a:off x="640080" y="384048"/>
-            <a:ext cx="8982151" cy="768096"/>
+            <a:off x="640080" y="365760"/>
+            <a:ext cx="8982151" cy="749808"/>
           </a:xfrm>
           <a:prstGeom prst="rect">
             <a:avLst/>
@@ -4218,7 +4218,7 @@
               <a:buNone/>
             </a:pPr>
             <a:r>
-              <a:rPr lang="en-US" sz="1100" i="1" dirty="0">
+              <a:rPr lang="en-US" sz="1100" dirty="0">
                 <a:solidFill>
                   <a:srgbClr val="12B198"/>
                 </a:solidFill>
@@ -4240,7 +4240,7 @@
         </p:nvSpPr>
         <p:spPr>
           <a:xfrm>
-            <a:off x="9686239" y="438912"/>
+            <a:off x="9686239" y="420624"/>
             <a:ext cx="932688" cy="310896"/>
           </a:xfrm>
           <a:prstGeom prst="roundRect">
@@ -4262,7 +4262,7 @@
         </p:nvSpPr>
         <p:spPr>
           <a:xfrm>
-            <a:off x="9686239" y="438912"/>
+            <a:off x="9686239" y="420624"/>
             <a:ext cx="932688" cy="310896"/>
           </a:xfrm>
           <a:prstGeom prst="rect">
@@ -4301,12 +4301,12 @@
         </p:nvSpPr>
         <p:spPr>
           <a:xfrm>
-            <a:off x="640080" y="1188720"/>
-            <a:ext cx="10911535" cy="530352"/>
+            <a:off x="640080" y="1115568"/>
+            <a:ext cx="10911535" cy="585216"/>
           </a:xfrm>
           <a:prstGeom prst="roundRect">
             <a:avLst>
-              <a:gd name="adj" fmla="val 6897"/>
+              <a:gd name="adj" fmla="val 6250"/>
             </a:avLst>
           </a:prstGeom>
           <a:solidFill>
@@ -4323,8 +4323,8 @@
         </p:nvSpPr>
         <p:spPr>
           <a:xfrm>
-            <a:off x="877824" y="1234440"/>
-            <a:ext cx="10436047" cy="438912"/>
+            <a:off x="877824" y="1161288"/>
+            <a:ext cx="10436047" cy="493776"/>
           </a:xfrm>
           <a:prstGeom prst="rect">
             <a:avLst/>
@@ -4360,7 +4360,7 @@
               <a:buNone/>
             </a:pPr>
             <a:r>
-              <a:rPr lang="en-US" sz="800" dirty="0">
+              <a:rPr lang="en-US" sz="900" dirty="0">
                 <a:solidFill>
                   <a:srgbClr val="0D8A76"/>
                 </a:solidFill>
@@ -4397,9 +4397,9 @@
               <a:buNone/>
             </a:pPr>
             <a:r>
-              <a:rPr lang="en-US" sz="850" i="1" dirty="0">
-                <a:solidFill>
-                  <a:srgbClr val="5F7183"/>
+              <a:rPr lang="en-US" sz="1050" dirty="0">
+                <a:solidFill>
+                  <a:srgbClr val="1B2733"/>
                 </a:solidFill>
                 <a:latin typeface="Calibri" pitchFamily="34" charset="0"/>
                 <a:ea typeface="Calibri" pitchFamily="34" charset="-122"/>
@@ -4419,12 +4419,12 @@
         </p:nvSpPr>
         <p:spPr>
           <a:xfrm>
-            <a:off x="640080" y="1810512"/>
-            <a:ext cx="5327752" cy="1920240"/>
+            <a:off x="640080" y="1773936"/>
+            <a:ext cx="5327752" cy="1965960"/>
           </a:xfrm>
           <a:prstGeom prst="roundRect">
             <a:avLst>
-              <a:gd name="adj" fmla="val 1905"/>
+              <a:gd name="adj" fmla="val 1860"/>
             </a:avLst>
           </a:prstGeom>
           <a:solidFill>
@@ -4441,7 +4441,7 @@
         </p:nvSpPr>
         <p:spPr>
           <a:xfrm>
-            <a:off x="822960" y="1975104"/>
+            <a:off x="822960" y="1938528"/>
             <a:ext cx="310896" cy="310896"/>
           </a:xfrm>
           <a:prstGeom prst="ellipse">
@@ -4461,7 +4461,7 @@
         </p:nvSpPr>
         <p:spPr>
           <a:xfrm>
-            <a:off x="822960" y="1975104"/>
+            <a:off x="822960" y="1938528"/>
             <a:ext cx="310896" cy="310896"/>
           </a:xfrm>
           <a:prstGeom prst="rect">
@@ -4500,7 +4500,7 @@
         </p:nvSpPr>
         <p:spPr>
           <a:xfrm>
-            <a:off x="1207008" y="1938528"/>
+            <a:off x="1207008" y="1901952"/>
             <a:ext cx="4559656" cy="512064"/>
           </a:xfrm>
           <a:prstGeom prst="rect">
@@ -4540,7 +4540,7 @@
               <a:buNone/>
             </a:pPr>
             <a:r>
-              <a:rPr lang="en-US" sz="800" i="1" dirty="0">
+              <a:rPr lang="en-US" sz="1050" dirty="0">
                 <a:solidFill>
                   <a:srgbClr val="12B198"/>
                 </a:solidFill>
@@ -4562,8 +4562,8 @@
         </p:nvSpPr>
         <p:spPr>
           <a:xfrm>
-            <a:off x="859536" y="2487168"/>
-            <a:ext cx="4888840" cy="1097280"/>
+            <a:off x="859536" y="2450592"/>
+            <a:ext cx="4888840" cy="1143000"/>
           </a:xfrm>
           <a:prstGeom prst="rect">
             <a:avLst/>
@@ -4608,9 +4608,9 @@
               <a:buNone/>
             </a:pPr>
             <a:r>
-              <a:rPr lang="en-US" sz="750" i="1" dirty="0">
-                <a:solidFill>
-                  <a:srgbClr val="5F7183"/>
+              <a:rPr lang="en-US" sz="950" dirty="0">
+                <a:solidFill>
+                  <a:srgbClr val="1B2733"/>
                 </a:solidFill>
                 <a:latin typeface="Calibri" pitchFamily="34" charset="0"/>
                 <a:ea typeface="Calibri" pitchFamily="34" charset="-122"/>
@@ -4654,9 +4654,9 @@
               <a:buNone/>
             </a:pPr>
             <a:r>
-              <a:rPr lang="en-US" sz="750" i="1" dirty="0">
-                <a:solidFill>
-                  <a:srgbClr val="5F7183"/>
+              <a:rPr lang="en-US" sz="950" dirty="0">
+                <a:solidFill>
+                  <a:srgbClr val="1B2733"/>
                 </a:solidFill>
                 <a:latin typeface="Calibri" pitchFamily="34" charset="0"/>
                 <a:ea typeface="Calibri" pitchFamily="34" charset="-122"/>
@@ -4700,9 +4700,9 @@
               <a:buNone/>
             </a:pPr>
             <a:r>
-              <a:rPr lang="en-US" sz="750" i="1" dirty="0">
-                <a:solidFill>
-                  <a:srgbClr val="5F7183"/>
+              <a:rPr lang="en-US" sz="950" dirty="0">
+                <a:solidFill>
+                  <a:srgbClr val="1B2733"/>
                 </a:solidFill>
                 <a:latin typeface="Calibri" pitchFamily="34" charset="0"/>
                 <a:ea typeface="Calibri" pitchFamily="34" charset="-122"/>
@@ -4746,9 +4746,9 @@
               <a:buNone/>
             </a:pPr>
             <a:r>
-              <a:rPr lang="en-US" sz="750" i="1" dirty="0">
-                <a:solidFill>
-                  <a:srgbClr val="5F7183"/>
+              <a:rPr lang="en-US" sz="950" dirty="0">
+                <a:solidFill>
+                  <a:srgbClr val="1B2733"/>
                 </a:solidFill>
                 <a:latin typeface="Calibri" pitchFamily="34" charset="0"/>
                 <a:ea typeface="Calibri" pitchFamily="34" charset="-122"/>
@@ -4768,12 +4768,12 @@
         </p:nvSpPr>
         <p:spPr>
           <a:xfrm>
-            <a:off x="6223864" y="1810512"/>
-            <a:ext cx="5327752" cy="1920240"/>
+            <a:off x="6223864" y="1773936"/>
+            <a:ext cx="5327752" cy="1965960"/>
           </a:xfrm>
           <a:prstGeom prst="roundRect">
             <a:avLst>
-              <a:gd name="adj" fmla="val 1905"/>
+              <a:gd name="adj" fmla="val 1860"/>
             </a:avLst>
           </a:prstGeom>
           <a:solidFill>
@@ -4790,7 +4790,7 @@
         </p:nvSpPr>
         <p:spPr>
           <a:xfrm>
-            <a:off x="6406744" y="1975104"/>
+            <a:off x="6406744" y="1938528"/>
             <a:ext cx="310896" cy="310896"/>
           </a:xfrm>
           <a:prstGeom prst="ellipse">
@@ -4810,7 +4810,7 @@
         </p:nvSpPr>
         <p:spPr>
           <a:xfrm>
-            <a:off x="6406744" y="1975104"/>
+            <a:off x="6406744" y="1938528"/>
             <a:ext cx="310896" cy="310896"/>
           </a:xfrm>
           <a:prstGeom prst="rect">
@@ -4849,7 +4849,7 @@
         </p:nvSpPr>
         <p:spPr>
           <a:xfrm>
-            <a:off x="6790792" y="1938528"/>
+            <a:off x="6790792" y="1901952"/>
             <a:ext cx="4559656" cy="512064"/>
           </a:xfrm>
           <a:prstGeom prst="rect">
@@ -4889,7 +4889,7 @@
               <a:buNone/>
             </a:pPr>
             <a:r>
-              <a:rPr lang="en-US" sz="800" i="1" dirty="0">
+              <a:rPr lang="en-US" sz="1050" dirty="0">
                 <a:solidFill>
                   <a:srgbClr val="12B198"/>
                 </a:solidFill>
@@ -4911,8 +4911,8 @@
         </p:nvSpPr>
         <p:spPr>
           <a:xfrm>
-            <a:off x="6443320" y="2487168"/>
-            <a:ext cx="4888840" cy="1097280"/>
+            <a:off x="6443320" y="2450592"/>
+            <a:ext cx="4888840" cy="1143000"/>
           </a:xfrm>
           <a:prstGeom prst="rect">
             <a:avLst/>
@@ -4957,9 +4957,9 @@
               <a:buNone/>
             </a:pPr>
             <a:r>
-              <a:rPr lang="en-US" sz="750" i="1" dirty="0">
-                <a:solidFill>
-                  <a:srgbClr val="5F7183"/>
+              <a:rPr lang="en-US" sz="950" dirty="0">
+                <a:solidFill>
+                  <a:srgbClr val="1B2733"/>
                 </a:solidFill>
                 <a:latin typeface="Calibri" pitchFamily="34" charset="0"/>
                 <a:ea typeface="Calibri" pitchFamily="34" charset="-122"/>
@@ -5003,9 +5003,9 @@
               <a:buNone/>
             </a:pPr>
             <a:r>
-              <a:rPr lang="en-US" sz="750" i="1" dirty="0">
-                <a:solidFill>
-                  <a:srgbClr val="5F7183"/>
+              <a:rPr lang="en-US" sz="950" dirty="0">
+                <a:solidFill>
+                  <a:srgbClr val="1B2733"/>
                 </a:solidFill>
                 <a:latin typeface="Calibri" pitchFamily="34" charset="0"/>
                 <a:ea typeface="Calibri" pitchFamily="34" charset="-122"/>
@@ -5049,9 +5049,9 @@
               <a:buNone/>
             </a:pPr>
             <a:r>
-              <a:rPr lang="en-US" sz="750" i="1" dirty="0">
-                <a:solidFill>
-                  <a:srgbClr val="5F7183"/>
+              <a:rPr lang="en-US" sz="950" dirty="0">
+                <a:solidFill>
+                  <a:srgbClr val="1B2733"/>
                 </a:solidFill>
                 <a:latin typeface="Calibri" pitchFamily="34" charset="0"/>
                 <a:ea typeface="Calibri" pitchFamily="34" charset="-122"/>
@@ -5095,9 +5095,9 @@
               <a:buNone/>
             </a:pPr>
             <a:r>
-              <a:rPr lang="en-US" sz="750" i="1" dirty="0">
-                <a:solidFill>
-                  <a:srgbClr val="5F7183"/>
+              <a:rPr lang="en-US" sz="950" dirty="0">
+                <a:solidFill>
+                  <a:srgbClr val="1B2733"/>
                 </a:solidFill>
                 <a:latin typeface="Calibri" pitchFamily="34" charset="0"/>
                 <a:ea typeface="Calibri" pitchFamily="34" charset="-122"/>
@@ -5117,12 +5117,12 @@
         </p:nvSpPr>
         <p:spPr>
           <a:xfrm>
-            <a:off x="640080" y="3931920"/>
-            <a:ext cx="5327752" cy="1920240"/>
+            <a:off x="640080" y="3941064"/>
+            <a:ext cx="5327752" cy="1965960"/>
           </a:xfrm>
           <a:prstGeom prst="roundRect">
             <a:avLst>
-              <a:gd name="adj" fmla="val 1905"/>
+              <a:gd name="adj" fmla="val 1860"/>
             </a:avLst>
           </a:prstGeom>
           <a:solidFill>
@@ -5139,7 +5139,7 @@
         </p:nvSpPr>
         <p:spPr>
           <a:xfrm>
-            <a:off x="822960" y="4096512"/>
+            <a:off x="822960" y="4105656"/>
             <a:ext cx="310896" cy="310896"/>
           </a:xfrm>
           <a:prstGeom prst="ellipse">
@@ -5159,7 +5159,7 @@
         </p:nvSpPr>
         <p:spPr>
           <a:xfrm>
-            <a:off x="822960" y="4096512"/>
+            <a:off x="822960" y="4105656"/>
             <a:ext cx="310896" cy="310896"/>
           </a:xfrm>
           <a:prstGeom prst="rect">
@@ -5198,7 +5198,7 @@
         </p:nvSpPr>
         <p:spPr>
           <a:xfrm>
-            <a:off x="1207008" y="4059936"/>
+            <a:off x="1207008" y="4069080"/>
             <a:ext cx="4559656" cy="512064"/>
           </a:xfrm>
           <a:prstGeom prst="rect">
@@ -5238,7 +5238,7 @@
               <a:buNone/>
             </a:pPr>
             <a:r>
-              <a:rPr lang="en-US" sz="800" i="1" dirty="0">
+              <a:rPr lang="en-US" sz="1050" dirty="0">
                 <a:solidFill>
                   <a:srgbClr val="12B198"/>
                 </a:solidFill>
@@ -5260,8 +5260,8 @@
         </p:nvSpPr>
         <p:spPr>
           <a:xfrm>
-            <a:off x="859536" y="4608576"/>
-            <a:ext cx="4888840" cy="1097280"/>
+            <a:off x="859536" y="4617720"/>
+            <a:ext cx="4888840" cy="1143000"/>
           </a:xfrm>
           <a:prstGeom prst="rect">
             <a:avLst/>
@@ -5306,9 +5306,9 @@
               <a:buNone/>
             </a:pPr>
             <a:r>
-              <a:rPr lang="en-US" sz="750" i="1" dirty="0">
-                <a:solidFill>
-                  <a:srgbClr val="5F7183"/>
+              <a:rPr lang="en-US" sz="950" dirty="0">
+                <a:solidFill>
+                  <a:srgbClr val="1B2733"/>
                 </a:solidFill>
                 <a:latin typeface="Calibri" pitchFamily="34" charset="0"/>
                 <a:ea typeface="Calibri" pitchFamily="34" charset="-122"/>
@@ -5352,9 +5352,9 @@
               <a:buNone/>
             </a:pPr>
             <a:r>
-              <a:rPr lang="en-US" sz="750" i="1" dirty="0">
-                <a:solidFill>
-                  <a:srgbClr val="5F7183"/>
+              <a:rPr lang="en-US" sz="950" dirty="0">
+                <a:solidFill>
+                  <a:srgbClr val="1B2733"/>
                 </a:solidFill>
                 <a:latin typeface="Calibri" pitchFamily="34" charset="0"/>
                 <a:ea typeface="Calibri" pitchFamily="34" charset="-122"/>
@@ -5398,9 +5398,9 @@
               <a:buNone/>
             </a:pPr>
             <a:r>
-              <a:rPr lang="en-US" sz="750" i="1" dirty="0">
-                <a:solidFill>
-                  <a:srgbClr val="5F7183"/>
+              <a:rPr lang="en-US" sz="950" dirty="0">
+                <a:solidFill>
+                  <a:srgbClr val="1B2733"/>
                 </a:solidFill>
                 <a:latin typeface="Calibri" pitchFamily="34" charset="0"/>
                 <a:ea typeface="Calibri" pitchFamily="34" charset="-122"/>
@@ -5444,9 +5444,9 @@
               <a:buNone/>
             </a:pPr>
             <a:r>
-              <a:rPr lang="en-US" sz="750" i="1" dirty="0">
-                <a:solidFill>
-                  <a:srgbClr val="5F7183"/>
+              <a:rPr lang="en-US" sz="950" dirty="0">
+                <a:solidFill>
+                  <a:srgbClr val="1B2733"/>
                 </a:solidFill>
                 <a:latin typeface="Calibri" pitchFamily="34" charset="0"/>
                 <a:ea typeface="Calibri" pitchFamily="34" charset="-122"/>
@@ -5466,12 +5466,12 @@
         </p:nvSpPr>
         <p:spPr>
           <a:xfrm>
-            <a:off x="6223864" y="3931920"/>
-            <a:ext cx="5327752" cy="1920240"/>
+            <a:off x="6223864" y="3941064"/>
+            <a:ext cx="5327752" cy="1965960"/>
           </a:xfrm>
           <a:prstGeom prst="roundRect">
             <a:avLst>
-              <a:gd name="adj" fmla="val 1905"/>
+              <a:gd name="adj" fmla="val 1860"/>
             </a:avLst>
           </a:prstGeom>
           <a:solidFill>
@@ -5488,7 +5488,7 @@
         </p:nvSpPr>
         <p:spPr>
           <a:xfrm>
-            <a:off x="6406744" y="4096512"/>
+            <a:off x="6406744" y="4105656"/>
             <a:ext cx="310896" cy="310896"/>
           </a:xfrm>
           <a:prstGeom prst="ellipse">
@@ -5508,7 +5508,7 @@
         </p:nvSpPr>
         <p:spPr>
           <a:xfrm>
-            <a:off x="6406744" y="4096512"/>
+            <a:off x="6406744" y="4105656"/>
             <a:ext cx="310896" cy="310896"/>
           </a:xfrm>
           <a:prstGeom prst="rect">
@@ -5547,7 +5547,7 @@
         </p:nvSpPr>
         <p:spPr>
           <a:xfrm>
-            <a:off x="6790792" y="4059936"/>
+            <a:off x="6790792" y="4069080"/>
             <a:ext cx="4559656" cy="512064"/>
           </a:xfrm>
           <a:prstGeom prst="rect">
@@ -5587,7 +5587,7 @@
               <a:buNone/>
             </a:pPr>
             <a:r>
-              <a:rPr lang="en-US" sz="800" i="1" dirty="0">
+              <a:rPr lang="en-US" sz="1050" dirty="0">
                 <a:solidFill>
                   <a:srgbClr val="12B198"/>
                 </a:solidFill>
@@ -5609,8 +5609,8 @@
         </p:nvSpPr>
         <p:spPr>
           <a:xfrm>
-            <a:off x="6443320" y="4608576"/>
-            <a:ext cx="4888840" cy="1097280"/>
+            <a:off x="6443320" y="4617720"/>
+            <a:ext cx="4888840" cy="1143000"/>
           </a:xfrm>
           <a:prstGeom prst="rect">
             <a:avLst/>
@@ -5655,9 +5655,9 @@
               <a:buNone/>
             </a:pPr>
             <a:r>
-              <a:rPr lang="en-US" sz="750" i="1" dirty="0">
-                <a:solidFill>
-                  <a:srgbClr val="5F7183"/>
+              <a:rPr lang="en-US" sz="950" dirty="0">
+                <a:solidFill>
+                  <a:srgbClr val="1B2733"/>
                 </a:solidFill>
                 <a:latin typeface="Calibri" pitchFamily="34" charset="0"/>
                 <a:ea typeface="Calibri" pitchFamily="34" charset="-122"/>
@@ -5701,9 +5701,9 @@
               <a:buNone/>
             </a:pPr>
             <a:r>
-              <a:rPr lang="en-US" sz="750" i="1" dirty="0">
-                <a:solidFill>
-                  <a:srgbClr val="5F7183"/>
+              <a:rPr lang="en-US" sz="950" dirty="0">
+                <a:solidFill>
+                  <a:srgbClr val="1B2733"/>
                 </a:solidFill>
                 <a:latin typeface="Calibri" pitchFamily="34" charset="0"/>
                 <a:ea typeface="Calibri" pitchFamily="34" charset="-122"/>
@@ -5747,9 +5747,9 @@
               <a:buNone/>
             </a:pPr>
             <a:r>
-              <a:rPr lang="en-US" sz="750" i="1" dirty="0">
-                <a:solidFill>
-                  <a:srgbClr val="5F7183"/>
+              <a:rPr lang="en-US" sz="950" dirty="0">
+                <a:solidFill>
+                  <a:srgbClr val="1B2733"/>
                 </a:solidFill>
                 <a:latin typeface="Calibri" pitchFamily="34" charset="0"/>
                 <a:ea typeface="Calibri" pitchFamily="34" charset="-122"/>
@@ -5793,7 +5793,86 @@
               <a:buNone/>
             </a:pPr>
             <a:r>
-              <a:rPr lang="en-US" sz="750" i="1" dirty="0">
+              <a:rPr lang="en-US" sz="950" dirty="0">
+                <a:solidFill>
+                  <a:srgbClr val="1B2733"/>
+                </a:solidFill>
+                <a:latin typeface="Calibri" pitchFamily="34" charset="0"/>
+                <a:ea typeface="Calibri" pitchFamily="34" charset="-122"/>
+                <a:cs typeface="Calibri" pitchFamily="34" charset="-120"/>
+              </a:rPr>
+              <a:t>  Write "unknown" where you do not know</a:t>
+            </a:r>
+            <a:endParaRPr lang="en-US" sz="950" dirty="0"/>
+          </a:p>
+        </p:txBody>
+      </p:sp>
+      <p:sp>
+        <p:nvSpPr>
+          <p:cNvPr id="28" name="Text 25"/>
+          <p:cNvSpPr/>
+          <p:nvPr/>
+        </p:nvSpPr>
+        <p:spPr>
+          <a:xfrm>
+            <a:off x="640080" y="5961888"/>
+            <a:ext cx="10911535" cy="292608"/>
+          </a:xfrm>
+          <a:prstGeom prst="rect">
+            <a:avLst/>
+          </a:prstGeom>
+          <a:noFill/>
+          <a:ln/>
+        </p:spPr>
+        <p:txBody>
+          <a:bodyPr wrap="square" lIns="0" tIns="0" rIns="0" bIns="0" rtlCol="0" anchor="t"/>
+          <a:lstStyle/>
+          <a:p>
+            <a:pPr indent="0" marL="0">
+              <a:lnSpc>
+                <a:spcPct val="88000"/>
+              </a:lnSpc>
+              <a:buNone/>
+            </a:pPr>
+            <a:r>
+              <a:rPr lang="en-US" sz="900" b="1" dirty="0">
+                <a:solidFill>
+                  <a:srgbClr val="0D8A76"/>
+                </a:solidFill>
+                <a:latin typeface="Yu Gothic" pitchFamily="34" charset="0"/>
+                <a:ea typeface="Yu Gothic" pitchFamily="34" charset="-122"/>
+                <a:cs typeface="Yu Gothic" pitchFamily="34" charset="-120"/>
+              </a:rPr>
+              <a:t>Site SOP優先　</a:t>
+            </a:r>
+            <a:pPr indent="0" marL="0">
+              <a:lnSpc>
+                <a:spcPct val="88000"/>
+              </a:lnSpc>
+              <a:buNone/>
+            </a:pPr>
+            <a:r>
+              <a:rPr lang="en-US" sz="900" dirty="0">
+                <a:solidFill>
+                  <a:srgbClr val="1B2733"/>
+                </a:solidFill>
+                <a:latin typeface="Yu Gothic" pitchFamily="34" charset="0"/>
+                <a:ea typeface="Yu Gothic" pitchFamily="34" charset="-122"/>
+                <a:cs typeface="Yu Gothic" pitchFamily="34" charset="-120"/>
+              </a:rPr>
+              <a:t>一次報告の宛先、様式、時限は現場ごとに異なる。Site SOPと緊急連絡体制による。</a:t>
+            </a:r>
+            <a:endParaRPr lang="en-US" sz="900" dirty="0"/>
+          </a:p>
+          <a:p>
+            <a:pPr indent="0" marL="0">
+              <a:lnSpc>
+                <a:spcPct val="88000"/>
+              </a:lnSpc>
+              <a:buNone/>
+            </a:pPr>
+            <a:r>
+              <a:rPr lang="en-US" sz="800" i="1" dirty="0">
                 <a:solidFill>
                   <a:srgbClr val="5F7183"/>
                 </a:solidFill>
@@ -5801,22 +5880,22 @@
                 <a:ea typeface="Calibri" pitchFamily="34" charset="-122"/>
                 <a:cs typeface="Calibri" pitchFamily="34" charset="-120"/>
               </a:rPr>
-              <a:t>  Write "unknown" where you do not know</a:t>
-            </a:r>
-            <a:endParaRPr lang="en-US" sz="950" dirty="0"/>
-          </a:p>
-        </p:txBody>
-      </p:sp>
-      <p:sp>
-        <p:nvSpPr>
-          <p:cNvPr id="28" name="Text 25"/>
-          <p:cNvSpPr/>
-          <p:nvPr/>
-        </p:nvSpPr>
-        <p:spPr>
-          <a:xfrm>
-            <a:off x="640080" y="5907024"/>
-            <a:ext cx="10911535" cy="310896"/>
+              <a:t>Who receives the initial report, in what form and by when, differ by site.</a:t>
+            </a:r>
+            <a:endParaRPr lang="en-US" sz="900" dirty="0"/>
+          </a:p>
+        </p:txBody>
+      </p:sp>
+      <p:sp>
+        <p:nvSpPr>
+          <p:cNvPr id="29" name="Text 26"/>
+          <p:cNvSpPr/>
+          <p:nvPr/>
+        </p:nvSpPr>
+        <p:spPr>
+          <a:xfrm>
+            <a:off x="640080" y="6272784"/>
+            <a:ext cx="9905695" cy="219456"/>
           </a:xfrm>
           <a:prstGeom prst="rect">
             <a:avLst/>
@@ -5829,167 +5908,88 @@
           <a:lstStyle/>
           <a:p>
             <a:pPr indent="0" marL="0">
-              <a:lnSpc>
-                <a:spcPct val="88000"/>
-              </a:lnSpc>
-              <a:buNone/>
-            </a:pPr>
-            <a:r>
-              <a:rPr lang="en-US" sz="900" b="1" dirty="0">
-                <a:solidFill>
-                  <a:srgbClr val="0D8A76"/>
-                </a:solidFill>
-                <a:latin typeface="Yu Gothic" pitchFamily="34" charset="0"/>
-                <a:ea typeface="Yu Gothic" pitchFamily="34" charset="-122"/>
-                <a:cs typeface="Yu Gothic" pitchFamily="34" charset="-120"/>
-              </a:rPr>
-              <a:t>Site SOP優先　</a:t>
-            </a:r>
-            <a:pPr indent="0" marL="0">
-              <a:lnSpc>
-                <a:spcPct val="88000"/>
-              </a:lnSpc>
+              <a:buNone/>
+            </a:pPr>
+            <a:r>
+              <a:rPr lang="en-US" sz="750" b="1" dirty="0">
+                <a:solidFill>
+                  <a:srgbClr val="D6E0E9"/>
+                </a:solidFill>
+                <a:latin typeface="Yu Gothic" pitchFamily="34" charset="0"/>
+                <a:ea typeface="Yu Gothic" pitchFamily="34" charset="-122"/>
+                <a:cs typeface="Yu Gothic" pitchFamily="34" charset="-120"/>
+              </a:rPr>
+              <a:t>ソース　</a:t>
+            </a:r>
+            <a:pPr indent="0" marL="0">
+              <a:buNone/>
+            </a:pPr>
+            <a:r>
+              <a:rPr lang="en-US" sz="750" dirty="0">
+                <a:solidFill>
+                  <a:srgbClr val="5F7183"/>
+                </a:solidFill>
+                <a:latin typeface="Yu Gothic" pitchFamily="34" charset="0"/>
+                <a:ea typeface="Yu Gothic" pitchFamily="34" charset="-122"/>
+                <a:cs typeface="Yu Gothic" pitchFamily="34" charset="-120"/>
+              </a:rPr>
+              <a:t>消防法、警察庁「警備員教育」、総務省消防庁「救急車の適正利用」</a:t>
+            </a:r>
+            <a:endParaRPr lang="en-US" sz="750" dirty="0"/>
+          </a:p>
+        </p:txBody>
+      </p:sp>
+      <p:sp>
+        <p:nvSpPr>
+          <p:cNvPr id="30" name="Text 27"/>
+          <p:cNvSpPr/>
+          <p:nvPr/>
+        </p:nvSpPr>
+        <p:spPr>
+          <a:xfrm>
+            <a:off x="640080" y="6492240"/>
+            <a:ext cx="8778240" cy="292608"/>
+          </a:xfrm>
+          <a:prstGeom prst="rect">
+            <a:avLst/>
+          </a:prstGeom>
+          <a:noFill/>
+          <a:ln/>
+        </p:spPr>
+        <p:txBody>
+          <a:bodyPr wrap="square" lIns="0" tIns="0" rIns="0" bIns="0" rtlCol="0" anchor="ctr"/>
+          <a:lstStyle/>
+          <a:p>
+            <a:pPr indent="0" marL="0">
               <a:buNone/>
             </a:pPr>
             <a:r>
               <a:rPr lang="en-US" sz="900" dirty="0">
                 <a:solidFill>
-                  <a:srgbClr val="1B2733"/>
-                </a:solidFill>
-                <a:latin typeface="Yu Gothic" pitchFamily="34" charset="0"/>
-                <a:ea typeface="Yu Gothic" pitchFamily="34" charset="-122"/>
-                <a:cs typeface="Yu Gothic" pitchFamily="34" charset="-120"/>
-              </a:rPr>
-              <a:t>一次報告の宛先、様式、時限は現場ごとに異なる。Site SOPと緊急連絡体制による。</a:t>
+                  <a:srgbClr val="5F7183"/>
+                </a:solidFill>
+                <a:latin typeface="Yu Gothic" pitchFamily="34" charset="0"/>
+                <a:ea typeface="Yu Gothic" pitchFamily="34" charset="-122"/>
+                <a:cs typeface="Yu Gothic" pitchFamily="34" charset="-120"/>
+              </a:rPr>
+              <a:t>第9時限｜基本教育4 事故の発生時における警察機関への連絡その他応急の措置  </a:t>
+            </a:r>
+            <a:pPr indent="0" marL="0">
+              <a:buNone/>
+            </a:pPr>
+            <a:r>
+              <a:rPr lang="en-US" sz="850" i="1" dirty="0">
+                <a:solidFill>
+                  <a:srgbClr val="D6E0E9"/>
+                </a:solidFill>
+                <a:latin typeface="Calibri" pitchFamily="34" charset="0"/>
+                <a:ea typeface="Calibri" pitchFamily="34" charset="-122"/>
+                <a:cs typeface="Calibri" pitchFamily="34" charset="-120"/>
+              </a:rPr>
+              <a:t>Period 9 | Basic Training 4 — Emergency Reporting and Scene Preservation</a:t>
             </a:r>
             <a:endParaRPr lang="en-US" sz="900" dirty="0"/>
           </a:p>
-          <a:p>
-            <a:pPr indent="0" marL="0">
-              <a:lnSpc>
-                <a:spcPct val="88000"/>
-              </a:lnSpc>
-              <a:buNone/>
-            </a:pPr>
-            <a:r>
-              <a:rPr lang="en-US" sz="750" i="1" dirty="0">
-                <a:solidFill>
-                  <a:srgbClr val="5F7183"/>
-                </a:solidFill>
-                <a:latin typeface="Calibri" pitchFamily="34" charset="0"/>
-                <a:ea typeface="Calibri" pitchFamily="34" charset="-122"/>
-                <a:cs typeface="Calibri" pitchFamily="34" charset="-120"/>
-              </a:rPr>
-              <a:t>Who receives the initial report, in what form and by when, differ by site.</a:t>
-            </a:r>
-            <a:endParaRPr lang="en-US" sz="900" dirty="0"/>
-          </a:p>
-        </p:txBody>
-      </p:sp>
-      <p:sp>
-        <p:nvSpPr>
-          <p:cNvPr id="29" name="Text 26"/>
-          <p:cNvSpPr/>
-          <p:nvPr/>
-        </p:nvSpPr>
-        <p:spPr>
-          <a:xfrm>
-            <a:off x="640080" y="6272784"/>
-            <a:ext cx="9905695" cy="237744"/>
-          </a:xfrm>
-          <a:prstGeom prst="rect">
-            <a:avLst/>
-          </a:prstGeom>
-          <a:noFill/>
-          <a:ln/>
-        </p:spPr>
-        <p:txBody>
-          <a:bodyPr wrap="square" lIns="0" tIns="0" rIns="0" bIns="0" rtlCol="0" anchor="t"/>
-          <a:lstStyle/>
-          <a:p>
-            <a:pPr indent="0" marL="0">
-              <a:buNone/>
-            </a:pPr>
-            <a:r>
-              <a:rPr lang="en-US" sz="750" b="1" dirty="0">
-                <a:solidFill>
-                  <a:srgbClr val="D6E0E9"/>
-                </a:solidFill>
-                <a:latin typeface="Yu Gothic" pitchFamily="34" charset="0"/>
-                <a:ea typeface="Yu Gothic" pitchFamily="34" charset="-122"/>
-                <a:cs typeface="Yu Gothic" pitchFamily="34" charset="-120"/>
-              </a:rPr>
-              <a:t>ソース　</a:t>
-            </a:r>
-            <a:pPr indent="0" marL="0">
-              <a:buNone/>
-            </a:pPr>
-            <a:r>
-              <a:rPr lang="en-US" sz="750" dirty="0">
-                <a:solidFill>
-                  <a:srgbClr val="5F7183"/>
-                </a:solidFill>
-                <a:latin typeface="Yu Gothic" pitchFamily="34" charset="0"/>
-                <a:ea typeface="Yu Gothic" pitchFamily="34" charset="-122"/>
-                <a:cs typeface="Yu Gothic" pitchFamily="34" charset="-120"/>
-              </a:rPr>
-              <a:t>消防法、警察庁「警備員教育」、総務省消防庁「救急車の適正利用」</a:t>
-            </a:r>
-            <a:endParaRPr lang="en-US" sz="750" dirty="0"/>
-          </a:p>
-        </p:txBody>
-      </p:sp>
-      <p:sp>
-        <p:nvSpPr>
-          <p:cNvPr id="30" name="Text 27"/>
-          <p:cNvSpPr/>
-          <p:nvPr/>
-        </p:nvSpPr>
-        <p:spPr>
-          <a:xfrm>
-            <a:off x="640080" y="6382512"/>
-            <a:ext cx="8778240" cy="292608"/>
-          </a:xfrm>
-          <a:prstGeom prst="rect">
-            <a:avLst/>
-          </a:prstGeom>
-          <a:noFill/>
-          <a:ln/>
-        </p:spPr>
-        <p:txBody>
-          <a:bodyPr wrap="square" lIns="0" tIns="0" rIns="0" bIns="0" rtlCol="0" anchor="ctr"/>
-          <a:lstStyle/>
-          <a:p>
-            <a:pPr indent="0" marL="0">
-              <a:buNone/>
-            </a:pPr>
-            <a:r>
-              <a:rPr lang="en-US" sz="900" dirty="0">
-                <a:solidFill>
-                  <a:srgbClr val="5F7183"/>
-                </a:solidFill>
-                <a:latin typeface="Yu Gothic" pitchFamily="34" charset="0"/>
-                <a:ea typeface="Yu Gothic" pitchFamily="34" charset="-122"/>
-                <a:cs typeface="Yu Gothic" pitchFamily="34" charset="-120"/>
-              </a:rPr>
-              <a:t>第9時限｜基本教育4 事故の発生時における警察機関への連絡その他応急の措置  </a:t>
-            </a:r>
-            <a:pPr indent="0" marL="0">
-              <a:buNone/>
-            </a:pPr>
-            <a:r>
-              <a:rPr lang="en-US" sz="850" i="1" dirty="0">
-                <a:solidFill>
-                  <a:srgbClr val="D6E0E9"/>
-                </a:solidFill>
-                <a:latin typeface="Calibri" pitchFamily="34" charset="0"/>
-                <a:ea typeface="Calibri" pitchFamily="34" charset="-122"/>
-                <a:cs typeface="Calibri" pitchFamily="34" charset="-120"/>
-              </a:rPr>
-              <a:t>Period 9 | Basic Training 4 — Emergency Reporting and Scene Preservation</a:t>
-            </a:r>
-            <a:endParaRPr lang="en-US" sz="900" dirty="0"/>
-          </a:p>
         </p:txBody>
       </p:sp>
       <p:sp>
@@ -6000,7 +6000,7 @@
         </p:nvSpPr>
         <p:spPr>
           <a:xfrm>
-            <a:off x="10637215" y="6382512"/>
+            <a:off x="10637215" y="6492240"/>
             <a:ext cx="914400" cy="292608"/>
           </a:xfrm>
           <a:prstGeom prst="rect">
@@ -6095,8 +6095,8 @@
         </p:nvSpPr>
         <p:spPr>
           <a:xfrm>
-            <a:off x="640080" y="384048"/>
-            <a:ext cx="8982151" cy="768096"/>
+            <a:off x="640080" y="365760"/>
+            <a:ext cx="8982151" cy="749808"/>
           </a:xfrm>
           <a:prstGeom prst="rect">
             <a:avLst/>
@@ -6135,7 +6135,7 @@
               <a:buNone/>
             </a:pPr>
             <a:r>
-              <a:rPr lang="en-US" sz="1100" i="1" dirty="0">
+              <a:rPr lang="en-US" sz="1100" dirty="0">
                 <a:solidFill>
                   <a:srgbClr val="12B198"/>
                 </a:solidFill>
@@ -6157,7 +6157,7 @@
         </p:nvSpPr>
         <p:spPr>
           <a:xfrm>
-            <a:off x="9686239" y="438912"/>
+            <a:off x="9686239" y="420624"/>
             <a:ext cx="932688" cy="310896"/>
           </a:xfrm>
           <a:prstGeom prst="roundRect">
@@ -6179,7 +6179,7 @@
         </p:nvSpPr>
         <p:spPr>
           <a:xfrm>
-            <a:off x="9686239" y="438912"/>
+            <a:off x="9686239" y="420624"/>
             <a:ext cx="932688" cy="310896"/>
           </a:xfrm>
           <a:prstGeom prst="rect">
@@ -6218,12 +6218,12 @@
         </p:nvSpPr>
         <p:spPr>
           <a:xfrm>
-            <a:off x="640080" y="1188720"/>
-            <a:ext cx="10911535" cy="530352"/>
+            <a:off x="640080" y="1115568"/>
+            <a:ext cx="10911535" cy="585216"/>
           </a:xfrm>
           <a:prstGeom prst="roundRect">
             <a:avLst>
-              <a:gd name="adj" fmla="val 6897"/>
+              <a:gd name="adj" fmla="val 6250"/>
             </a:avLst>
           </a:prstGeom>
           <a:solidFill>
@@ -6240,8 +6240,8 @@
         </p:nvSpPr>
         <p:spPr>
           <a:xfrm>
-            <a:off x="877824" y="1234440"/>
-            <a:ext cx="10436047" cy="438912"/>
+            <a:off x="877824" y="1161288"/>
+            <a:ext cx="10436047" cy="493776"/>
           </a:xfrm>
           <a:prstGeom prst="rect">
             <a:avLst/>
@@ -6277,7 +6277,7 @@
               <a:buNone/>
             </a:pPr>
             <a:r>
-              <a:rPr lang="en-US" sz="800" dirty="0">
+              <a:rPr lang="en-US" sz="900" dirty="0">
                 <a:solidFill>
                   <a:srgbClr val="0D8A76"/>
                 </a:solidFill>
@@ -6314,9 +6314,9 @@
               <a:buNone/>
             </a:pPr>
             <a:r>
-              <a:rPr lang="en-US" sz="850" i="1" dirty="0">
-                <a:solidFill>
-                  <a:srgbClr val="5F7183"/>
+              <a:rPr lang="en-US" sz="1050" dirty="0">
+                <a:solidFill>
+                  <a:srgbClr val="1B2733"/>
                 </a:solidFill>
                 <a:latin typeface="Calibri" pitchFamily="34" charset="0"/>
                 <a:ea typeface="Calibri" pitchFamily="34" charset="-122"/>
@@ -6336,12 +6336,12 @@
         </p:nvSpPr>
         <p:spPr>
           <a:xfrm>
-            <a:off x="640080" y="1810512"/>
-            <a:ext cx="5327752" cy="1920240"/>
+            <a:off x="640080" y="1773936"/>
+            <a:ext cx="5327752" cy="1965960"/>
           </a:xfrm>
           <a:prstGeom prst="roundRect">
             <a:avLst>
-              <a:gd name="adj" fmla="val 1905"/>
+              <a:gd name="adj" fmla="val 1860"/>
             </a:avLst>
           </a:prstGeom>
           <a:solidFill>
@@ -6358,7 +6358,7 @@
         </p:nvSpPr>
         <p:spPr>
           <a:xfrm>
-            <a:off x="822960" y="1975104"/>
+            <a:off x="822960" y="1938528"/>
             <a:ext cx="310896" cy="310896"/>
           </a:xfrm>
           <a:prstGeom prst="ellipse">
@@ -6378,7 +6378,7 @@
         </p:nvSpPr>
         <p:spPr>
           <a:xfrm>
-            <a:off x="822960" y="1975104"/>
+            <a:off x="822960" y="1938528"/>
             <a:ext cx="310896" cy="310896"/>
           </a:xfrm>
           <a:prstGeom prst="rect">
@@ -6417,7 +6417,7 @@
         </p:nvSpPr>
         <p:spPr>
           <a:xfrm>
-            <a:off x="1207008" y="1938528"/>
+            <a:off x="1207008" y="1901952"/>
             <a:ext cx="4559656" cy="512064"/>
           </a:xfrm>
           <a:prstGeom prst="rect">
@@ -6457,7 +6457,7 @@
               <a:buNone/>
             </a:pPr>
             <a:r>
-              <a:rPr lang="en-US" sz="800" i="1" dirty="0">
+              <a:rPr lang="en-US" sz="1050" dirty="0">
                 <a:solidFill>
                   <a:srgbClr val="12B198"/>
                 </a:solidFill>
@@ -6479,8 +6479,8 @@
         </p:nvSpPr>
         <p:spPr>
           <a:xfrm>
-            <a:off x="859536" y="2487168"/>
-            <a:ext cx="4888840" cy="1097280"/>
+            <a:off x="859536" y="2450592"/>
+            <a:ext cx="4888840" cy="1143000"/>
           </a:xfrm>
           <a:prstGeom prst="rect">
             <a:avLst/>
@@ -6525,9 +6525,9 @@
               <a:buNone/>
             </a:pPr>
             <a:r>
-              <a:rPr lang="en-US" sz="750" i="1" dirty="0">
-                <a:solidFill>
-                  <a:srgbClr val="5F7183"/>
+              <a:rPr lang="en-US" sz="950" dirty="0">
+                <a:solidFill>
+                  <a:srgbClr val="1B2733"/>
                 </a:solidFill>
                 <a:latin typeface="Calibri" pitchFamily="34" charset="0"/>
                 <a:ea typeface="Calibri" pitchFamily="34" charset="-122"/>
@@ -6571,9 +6571,9 @@
               <a:buNone/>
             </a:pPr>
             <a:r>
-              <a:rPr lang="en-US" sz="750" i="1" dirty="0">
-                <a:solidFill>
-                  <a:srgbClr val="5F7183"/>
+              <a:rPr lang="en-US" sz="950" dirty="0">
+                <a:solidFill>
+                  <a:srgbClr val="1B2733"/>
                 </a:solidFill>
                 <a:latin typeface="Calibri" pitchFamily="34" charset="0"/>
                 <a:ea typeface="Calibri" pitchFamily="34" charset="-122"/>
@@ -6617,9 +6617,9 @@
               <a:buNone/>
             </a:pPr>
             <a:r>
-              <a:rPr lang="en-US" sz="750" i="1" dirty="0">
-                <a:solidFill>
-                  <a:srgbClr val="5F7183"/>
+              <a:rPr lang="en-US" sz="950" dirty="0">
+                <a:solidFill>
+                  <a:srgbClr val="1B2733"/>
                 </a:solidFill>
                 <a:latin typeface="Calibri" pitchFamily="34" charset="0"/>
                 <a:ea typeface="Calibri" pitchFamily="34" charset="-122"/>
@@ -6663,9 +6663,9 @@
               <a:buNone/>
             </a:pPr>
             <a:r>
-              <a:rPr lang="en-US" sz="750" i="1" dirty="0">
-                <a:solidFill>
-                  <a:srgbClr val="5F7183"/>
+              <a:rPr lang="en-US" sz="950" dirty="0">
+                <a:solidFill>
+                  <a:srgbClr val="1B2733"/>
                 </a:solidFill>
                 <a:latin typeface="Calibri" pitchFamily="34" charset="0"/>
                 <a:ea typeface="Calibri" pitchFamily="34" charset="-122"/>
@@ -6685,12 +6685,12 @@
         </p:nvSpPr>
         <p:spPr>
           <a:xfrm>
-            <a:off x="6223864" y="1810512"/>
-            <a:ext cx="5327752" cy="1920240"/>
+            <a:off x="6223864" y="1773936"/>
+            <a:ext cx="5327752" cy="1965960"/>
           </a:xfrm>
           <a:prstGeom prst="roundRect">
             <a:avLst>
-              <a:gd name="adj" fmla="val 1905"/>
+              <a:gd name="adj" fmla="val 1860"/>
             </a:avLst>
           </a:prstGeom>
           <a:solidFill>
@@ -6707,7 +6707,7 @@
         </p:nvSpPr>
         <p:spPr>
           <a:xfrm>
-            <a:off x="6406744" y="1975104"/>
+            <a:off x="6406744" y="1938528"/>
             <a:ext cx="310896" cy="310896"/>
           </a:xfrm>
           <a:prstGeom prst="ellipse">
@@ -6727,7 +6727,7 @@
         </p:nvSpPr>
         <p:spPr>
           <a:xfrm>
-            <a:off x="6406744" y="1975104"/>
+            <a:off x="6406744" y="1938528"/>
             <a:ext cx="310896" cy="310896"/>
           </a:xfrm>
           <a:prstGeom prst="rect">
@@ -6766,7 +6766,7 @@
         </p:nvSpPr>
         <p:spPr>
           <a:xfrm>
-            <a:off x="6790792" y="1938528"/>
+            <a:off x="6790792" y="1901952"/>
             <a:ext cx="4559656" cy="512064"/>
           </a:xfrm>
           <a:prstGeom prst="rect">
@@ -6806,7 +6806,7 @@
               <a:buNone/>
             </a:pPr>
             <a:r>
-              <a:rPr lang="en-US" sz="800" i="1" dirty="0">
+              <a:rPr lang="en-US" sz="1050" dirty="0">
                 <a:solidFill>
                   <a:srgbClr val="12B198"/>
                 </a:solidFill>
@@ -6828,8 +6828,8 @@
         </p:nvSpPr>
         <p:spPr>
           <a:xfrm>
-            <a:off x="6443320" y="2487168"/>
-            <a:ext cx="4888840" cy="1097280"/>
+            <a:off x="6443320" y="2450592"/>
+            <a:ext cx="4888840" cy="1143000"/>
           </a:xfrm>
           <a:prstGeom prst="rect">
             <a:avLst/>
@@ -6874,9 +6874,9 @@
               <a:buNone/>
             </a:pPr>
             <a:r>
-              <a:rPr lang="en-US" sz="750" i="1" dirty="0">
-                <a:solidFill>
-                  <a:srgbClr val="5F7183"/>
+              <a:rPr lang="en-US" sz="950" dirty="0">
+                <a:solidFill>
+                  <a:srgbClr val="1B2733"/>
                 </a:solidFill>
                 <a:latin typeface="Calibri" pitchFamily="34" charset="0"/>
                 <a:ea typeface="Calibri" pitchFamily="34" charset="-122"/>
@@ -6920,9 +6920,9 @@
               <a:buNone/>
             </a:pPr>
             <a:r>
-              <a:rPr lang="en-US" sz="750" i="1" dirty="0">
-                <a:solidFill>
-                  <a:srgbClr val="5F7183"/>
+              <a:rPr lang="en-US" sz="950" dirty="0">
+                <a:solidFill>
+                  <a:srgbClr val="1B2733"/>
                 </a:solidFill>
                 <a:latin typeface="Calibri" pitchFamily="34" charset="0"/>
                 <a:ea typeface="Calibri" pitchFamily="34" charset="-122"/>
@@ -6966,9 +6966,9 @@
               <a:buNone/>
             </a:pPr>
             <a:r>
-              <a:rPr lang="en-US" sz="750" i="1" dirty="0">
-                <a:solidFill>
-                  <a:srgbClr val="5F7183"/>
+              <a:rPr lang="en-US" sz="950" dirty="0">
+                <a:solidFill>
+                  <a:srgbClr val="1B2733"/>
                 </a:solidFill>
                 <a:latin typeface="Calibri" pitchFamily="34" charset="0"/>
                 <a:ea typeface="Calibri" pitchFamily="34" charset="-122"/>
@@ -7012,9 +7012,9 @@
               <a:buNone/>
             </a:pPr>
             <a:r>
-              <a:rPr lang="en-US" sz="750" i="1" dirty="0">
-                <a:solidFill>
-                  <a:srgbClr val="5F7183"/>
+              <a:rPr lang="en-US" sz="950" dirty="0">
+                <a:solidFill>
+                  <a:srgbClr val="1B2733"/>
                 </a:solidFill>
                 <a:latin typeface="Calibri" pitchFamily="34" charset="0"/>
                 <a:ea typeface="Calibri" pitchFamily="34" charset="-122"/>
@@ -7034,12 +7034,12 @@
         </p:nvSpPr>
         <p:spPr>
           <a:xfrm>
-            <a:off x="640080" y="3931920"/>
-            <a:ext cx="5327752" cy="1920240"/>
+            <a:off x="640080" y="3941064"/>
+            <a:ext cx="5327752" cy="1965960"/>
           </a:xfrm>
           <a:prstGeom prst="roundRect">
             <a:avLst>
-              <a:gd name="adj" fmla="val 1905"/>
+              <a:gd name="adj" fmla="val 1860"/>
             </a:avLst>
           </a:prstGeom>
           <a:solidFill>
@@ -7056,7 +7056,7 @@
         </p:nvSpPr>
         <p:spPr>
           <a:xfrm>
-            <a:off x="822960" y="4096512"/>
+            <a:off x="822960" y="4105656"/>
             <a:ext cx="310896" cy="310896"/>
           </a:xfrm>
           <a:prstGeom prst="ellipse">
@@ -7076,7 +7076,7 @@
         </p:nvSpPr>
         <p:spPr>
           <a:xfrm>
-            <a:off x="822960" y="4096512"/>
+            <a:off x="822960" y="4105656"/>
             <a:ext cx="310896" cy="310896"/>
           </a:xfrm>
           <a:prstGeom prst="rect">
@@ -7115,7 +7115,7 @@
         </p:nvSpPr>
         <p:spPr>
           <a:xfrm>
-            <a:off x="1207008" y="4059936"/>
+            <a:off x="1207008" y="4069080"/>
             <a:ext cx="4559656" cy="512064"/>
           </a:xfrm>
           <a:prstGeom prst="rect">
@@ -7155,7 +7155,7 @@
               <a:buNone/>
             </a:pPr>
             <a:r>
-              <a:rPr lang="en-US" sz="800" i="1" dirty="0">
+              <a:rPr lang="en-US" sz="1050" dirty="0">
                 <a:solidFill>
                   <a:srgbClr val="12B198"/>
                 </a:solidFill>
@@ -7177,8 +7177,8 @@
         </p:nvSpPr>
         <p:spPr>
           <a:xfrm>
-            <a:off x="859536" y="4608576"/>
-            <a:ext cx="4888840" cy="1097280"/>
+            <a:off x="859536" y="4617720"/>
+            <a:ext cx="4888840" cy="1143000"/>
           </a:xfrm>
           <a:prstGeom prst="rect">
             <a:avLst/>
@@ -7223,9 +7223,9 @@
               <a:buNone/>
             </a:pPr>
             <a:r>
-              <a:rPr lang="en-US" sz="750" i="1" dirty="0">
-                <a:solidFill>
-                  <a:srgbClr val="5F7183"/>
+              <a:rPr lang="en-US" sz="950" dirty="0">
+                <a:solidFill>
+                  <a:srgbClr val="1B2733"/>
                 </a:solidFill>
                 <a:latin typeface="Calibri" pitchFamily="34" charset="0"/>
                 <a:ea typeface="Calibri" pitchFamily="34" charset="-122"/>
@@ -7269,9 +7269,9 @@
               <a:buNone/>
             </a:pPr>
             <a:r>
-              <a:rPr lang="en-US" sz="750" i="1" dirty="0">
-                <a:solidFill>
-                  <a:srgbClr val="5F7183"/>
+              <a:rPr lang="en-US" sz="950" dirty="0">
+                <a:solidFill>
+                  <a:srgbClr val="1B2733"/>
                 </a:solidFill>
                 <a:latin typeface="Calibri" pitchFamily="34" charset="0"/>
                 <a:ea typeface="Calibri" pitchFamily="34" charset="-122"/>
@@ -7315,9 +7315,9 @@
               <a:buNone/>
             </a:pPr>
             <a:r>
-              <a:rPr lang="en-US" sz="750" i="1" dirty="0">
-                <a:solidFill>
-                  <a:srgbClr val="5F7183"/>
+              <a:rPr lang="en-US" sz="950" dirty="0">
+                <a:solidFill>
+                  <a:srgbClr val="1B2733"/>
                 </a:solidFill>
                 <a:latin typeface="Calibri" pitchFamily="34" charset="0"/>
                 <a:ea typeface="Calibri" pitchFamily="34" charset="-122"/>
@@ -7361,9 +7361,9 @@
               <a:buNone/>
             </a:pPr>
             <a:r>
-              <a:rPr lang="en-US" sz="750" i="1" dirty="0">
-                <a:solidFill>
-                  <a:srgbClr val="5F7183"/>
+              <a:rPr lang="en-US" sz="950" dirty="0">
+                <a:solidFill>
+                  <a:srgbClr val="1B2733"/>
                 </a:solidFill>
                 <a:latin typeface="Calibri" pitchFamily="34" charset="0"/>
                 <a:ea typeface="Calibri" pitchFamily="34" charset="-122"/>
@@ -7383,12 +7383,12 @@
         </p:nvSpPr>
         <p:spPr>
           <a:xfrm>
-            <a:off x="6223864" y="3931920"/>
-            <a:ext cx="5327752" cy="1920240"/>
+            <a:off x="6223864" y="3941064"/>
+            <a:ext cx="5327752" cy="1965960"/>
           </a:xfrm>
           <a:prstGeom prst="roundRect">
             <a:avLst>
-              <a:gd name="adj" fmla="val 1905"/>
+              <a:gd name="adj" fmla="val 1860"/>
             </a:avLst>
           </a:prstGeom>
           <a:solidFill>
@@ -7405,7 +7405,7 @@
         </p:nvSpPr>
         <p:spPr>
           <a:xfrm>
-            <a:off x="6406744" y="4096512"/>
+            <a:off x="6406744" y="4105656"/>
             <a:ext cx="310896" cy="310896"/>
           </a:xfrm>
           <a:prstGeom prst="ellipse">
@@ -7425,7 +7425,7 @@
         </p:nvSpPr>
         <p:spPr>
           <a:xfrm>
-            <a:off x="6406744" y="4096512"/>
+            <a:off x="6406744" y="4105656"/>
             <a:ext cx="310896" cy="310896"/>
           </a:xfrm>
           <a:prstGeom prst="rect">
@@ -7464,7 +7464,7 @@
         </p:nvSpPr>
         <p:spPr>
           <a:xfrm>
-            <a:off x="6790792" y="4059936"/>
+            <a:off x="6790792" y="4069080"/>
             <a:ext cx="4559656" cy="512064"/>
           </a:xfrm>
           <a:prstGeom prst="rect">
@@ -7504,7 +7504,7 @@
               <a:buNone/>
             </a:pPr>
             <a:r>
-              <a:rPr lang="en-US" sz="800" i="1" dirty="0">
+              <a:rPr lang="en-US" sz="1050" dirty="0">
                 <a:solidFill>
                   <a:srgbClr val="12B198"/>
                 </a:solidFill>
@@ -7526,8 +7526,8 @@
         </p:nvSpPr>
         <p:spPr>
           <a:xfrm>
-            <a:off x="6443320" y="4608576"/>
-            <a:ext cx="4888840" cy="1097280"/>
+            <a:off x="6443320" y="4617720"/>
+            <a:ext cx="4888840" cy="1143000"/>
           </a:xfrm>
           <a:prstGeom prst="rect">
             <a:avLst/>
@@ -7572,9 +7572,9 @@
               <a:buNone/>
             </a:pPr>
             <a:r>
-              <a:rPr lang="en-US" sz="750" i="1" dirty="0">
-                <a:solidFill>
-                  <a:srgbClr val="5F7183"/>
+              <a:rPr lang="en-US" sz="950" dirty="0">
+                <a:solidFill>
+                  <a:srgbClr val="1B2733"/>
                 </a:solidFill>
                 <a:latin typeface="Calibri" pitchFamily="34" charset="0"/>
                 <a:ea typeface="Calibri" pitchFamily="34" charset="-122"/>
@@ -7618,9 +7618,9 @@
               <a:buNone/>
             </a:pPr>
             <a:r>
-              <a:rPr lang="en-US" sz="750" i="1" dirty="0">
-                <a:solidFill>
-                  <a:srgbClr val="5F7183"/>
+              <a:rPr lang="en-US" sz="950" dirty="0">
+                <a:solidFill>
+                  <a:srgbClr val="1B2733"/>
                 </a:solidFill>
                 <a:latin typeface="Calibri" pitchFamily="34" charset="0"/>
                 <a:ea typeface="Calibri" pitchFamily="34" charset="-122"/>
@@ -7664,9 +7664,9 @@
               <a:buNone/>
             </a:pPr>
             <a:r>
-              <a:rPr lang="en-US" sz="750" i="1" dirty="0">
-                <a:solidFill>
-                  <a:srgbClr val="5F7183"/>
+              <a:rPr lang="en-US" sz="950" dirty="0">
+                <a:solidFill>
+                  <a:srgbClr val="1B2733"/>
                 </a:solidFill>
                 <a:latin typeface="Calibri" pitchFamily="34" charset="0"/>
                 <a:ea typeface="Calibri" pitchFamily="34" charset="-122"/>
@@ -7710,7 +7710,86 @@
               <a:buNone/>
             </a:pPr>
             <a:r>
-              <a:rPr lang="en-US" sz="750" i="1" dirty="0">
+              <a:rPr lang="en-US" sz="950" dirty="0">
+                <a:solidFill>
+                  <a:srgbClr val="1B2733"/>
+                </a:solidFill>
+                <a:latin typeface="Calibri" pitchFamily="34" charset="0"/>
+                <a:ea typeface="Calibri" pitchFamily="34" charset="-122"/>
+                <a:cs typeface="Calibri" pitchFamily="34" charset="-120"/>
+              </a:rPr>
+              <a:t>  Preserve the scene. Change nothing except where life is at stake</a:t>
+            </a:r>
+            <a:endParaRPr lang="en-US" sz="950" dirty="0"/>
+          </a:p>
+        </p:txBody>
+      </p:sp>
+      <p:sp>
+        <p:nvSpPr>
+          <p:cNvPr id="28" name="Text 25"/>
+          <p:cNvSpPr/>
+          <p:nvPr/>
+        </p:nvSpPr>
+        <p:spPr>
+          <a:xfrm>
+            <a:off x="640080" y="5961888"/>
+            <a:ext cx="10911535" cy="292608"/>
+          </a:xfrm>
+          <a:prstGeom prst="rect">
+            <a:avLst/>
+          </a:prstGeom>
+          <a:noFill/>
+          <a:ln/>
+        </p:spPr>
+        <p:txBody>
+          <a:bodyPr wrap="square" lIns="0" tIns="0" rIns="0" bIns="0" rtlCol="0" anchor="t"/>
+          <a:lstStyle/>
+          <a:p>
+            <a:pPr indent="0" marL="0">
+              <a:lnSpc>
+                <a:spcPct val="88000"/>
+              </a:lnSpc>
+              <a:buNone/>
+            </a:pPr>
+            <a:r>
+              <a:rPr lang="en-US" sz="900" b="1" dirty="0">
+                <a:solidFill>
+                  <a:srgbClr val="0D8A76"/>
+                </a:solidFill>
+                <a:latin typeface="Yu Gothic" pitchFamily="34" charset="0"/>
+                <a:ea typeface="Yu Gothic" pitchFamily="34" charset="-122"/>
+                <a:cs typeface="Yu Gothic" pitchFamily="34" charset="-120"/>
+              </a:rPr>
+              <a:t>Site SOP優先　</a:t>
+            </a:r>
+            <a:pPr indent="0" marL="0">
+              <a:lnSpc>
+                <a:spcPct val="88000"/>
+              </a:lnSpc>
+              <a:buNone/>
+            </a:pPr>
+            <a:r>
+              <a:rPr lang="en-US" sz="900" dirty="0">
+                <a:solidFill>
+                  <a:srgbClr val="1B2733"/>
+                </a:solidFill>
+                <a:latin typeface="Yu Gothic" pitchFamily="34" charset="0"/>
+                <a:ea typeface="Yu Gothic" pitchFamily="34" charset="-122"/>
+                <a:cs typeface="Yu Gothic" pitchFamily="34" charset="-120"/>
+              </a:rPr>
+              <a:t>通報の前に社内へ一報を入れるか否かは現場ごとに異なる。人命に関わる場合は通報を優先する。</a:t>
+            </a:r>
+            <a:endParaRPr lang="en-US" sz="900" dirty="0"/>
+          </a:p>
+          <a:p>
+            <a:pPr indent="0" marL="0">
+              <a:lnSpc>
+                <a:spcPct val="88000"/>
+              </a:lnSpc>
+              <a:buNone/>
+            </a:pPr>
+            <a:r>
+              <a:rPr lang="en-US" sz="800" i="1" dirty="0">
                 <a:solidFill>
                   <a:srgbClr val="5F7183"/>
                 </a:solidFill>
@@ -7718,22 +7797,22 @@
                 <a:ea typeface="Calibri" pitchFamily="34" charset="-122"/>
                 <a:cs typeface="Calibri" pitchFamily="34" charset="-120"/>
               </a:rPr>
-              <a:t>  Preserve the scene. Change nothing except where life is at stake</a:t>
-            </a:r>
-            <a:endParaRPr lang="en-US" sz="950" dirty="0"/>
-          </a:p>
-        </p:txBody>
-      </p:sp>
-      <p:sp>
-        <p:nvSpPr>
-          <p:cNvPr id="28" name="Text 25"/>
-          <p:cNvSpPr/>
-          <p:nvPr/>
-        </p:nvSpPr>
-        <p:spPr>
-          <a:xfrm>
-            <a:off x="640080" y="5907024"/>
-            <a:ext cx="10911535" cy="310896"/>
+              <a:t>Whether to notify internally before calling differs by site. Where life is at risk, call first.</a:t>
+            </a:r>
+            <a:endParaRPr lang="en-US" sz="900" dirty="0"/>
+          </a:p>
+        </p:txBody>
+      </p:sp>
+      <p:sp>
+        <p:nvSpPr>
+          <p:cNvPr id="29" name="Text 26"/>
+          <p:cNvSpPr/>
+          <p:nvPr/>
+        </p:nvSpPr>
+        <p:spPr>
+          <a:xfrm>
+            <a:off x="640080" y="6272784"/>
+            <a:ext cx="9905695" cy="219456"/>
           </a:xfrm>
           <a:prstGeom prst="rect">
             <a:avLst/>
@@ -7746,167 +7825,88 @@
           <a:lstStyle/>
           <a:p>
             <a:pPr indent="0" marL="0">
-              <a:lnSpc>
-                <a:spcPct val="88000"/>
-              </a:lnSpc>
-              <a:buNone/>
-            </a:pPr>
-            <a:r>
-              <a:rPr lang="en-US" sz="900" b="1" dirty="0">
-                <a:solidFill>
-                  <a:srgbClr val="0D8A76"/>
-                </a:solidFill>
-                <a:latin typeface="Yu Gothic" pitchFamily="34" charset="0"/>
-                <a:ea typeface="Yu Gothic" pitchFamily="34" charset="-122"/>
-                <a:cs typeface="Yu Gothic" pitchFamily="34" charset="-120"/>
-              </a:rPr>
-              <a:t>Site SOP優先　</a:t>
-            </a:r>
-            <a:pPr indent="0" marL="0">
-              <a:lnSpc>
-                <a:spcPct val="88000"/>
-              </a:lnSpc>
+              <a:buNone/>
+            </a:pPr>
+            <a:r>
+              <a:rPr lang="en-US" sz="750" b="1" dirty="0">
+                <a:solidFill>
+                  <a:srgbClr val="D6E0E9"/>
+                </a:solidFill>
+                <a:latin typeface="Yu Gothic" pitchFamily="34" charset="0"/>
+                <a:ea typeface="Yu Gothic" pitchFamily="34" charset="-122"/>
+                <a:cs typeface="Yu Gothic" pitchFamily="34" charset="-120"/>
+              </a:rPr>
+              <a:t>ソース　</a:t>
+            </a:r>
+            <a:pPr indent="0" marL="0">
+              <a:buNone/>
+            </a:pPr>
+            <a:r>
+              <a:rPr lang="en-US" sz="750" dirty="0">
+                <a:solidFill>
+                  <a:srgbClr val="5F7183"/>
+                </a:solidFill>
+                <a:latin typeface="Yu Gothic" pitchFamily="34" charset="0"/>
+                <a:ea typeface="Yu Gothic" pitchFamily="34" charset="-122"/>
+                <a:cs typeface="Yu Gothic" pitchFamily="34" charset="-120"/>
+              </a:rPr>
+              <a:t>消防法、警察庁「警備員教育」、総務省消防庁「救急車の適正利用」</a:t>
+            </a:r>
+            <a:endParaRPr lang="en-US" sz="750" dirty="0"/>
+          </a:p>
+        </p:txBody>
+      </p:sp>
+      <p:sp>
+        <p:nvSpPr>
+          <p:cNvPr id="30" name="Text 27"/>
+          <p:cNvSpPr/>
+          <p:nvPr/>
+        </p:nvSpPr>
+        <p:spPr>
+          <a:xfrm>
+            <a:off x="640080" y="6492240"/>
+            <a:ext cx="8778240" cy="292608"/>
+          </a:xfrm>
+          <a:prstGeom prst="rect">
+            <a:avLst/>
+          </a:prstGeom>
+          <a:noFill/>
+          <a:ln/>
+        </p:spPr>
+        <p:txBody>
+          <a:bodyPr wrap="square" lIns="0" tIns="0" rIns="0" bIns="0" rtlCol="0" anchor="ctr"/>
+          <a:lstStyle/>
+          <a:p>
+            <a:pPr indent="0" marL="0">
               <a:buNone/>
             </a:pPr>
             <a:r>
               <a:rPr lang="en-US" sz="900" dirty="0">
                 <a:solidFill>
-                  <a:srgbClr val="1B2733"/>
-                </a:solidFill>
-                <a:latin typeface="Yu Gothic" pitchFamily="34" charset="0"/>
-                <a:ea typeface="Yu Gothic" pitchFamily="34" charset="-122"/>
-                <a:cs typeface="Yu Gothic" pitchFamily="34" charset="-120"/>
-              </a:rPr>
-              <a:t>通報の前に社内へ一報を入れるか否かは現場ごとに異なる。人命に関わる場合は通報を優先する。</a:t>
+                  <a:srgbClr val="5F7183"/>
+                </a:solidFill>
+                <a:latin typeface="Yu Gothic" pitchFamily="34" charset="0"/>
+                <a:ea typeface="Yu Gothic" pitchFamily="34" charset="-122"/>
+                <a:cs typeface="Yu Gothic" pitchFamily="34" charset="-120"/>
+              </a:rPr>
+              <a:t>第9時限｜基本教育4 事故の発生時における警察機関への連絡その他応急の措置  </a:t>
+            </a:r>
+            <a:pPr indent="0" marL="0">
+              <a:buNone/>
+            </a:pPr>
+            <a:r>
+              <a:rPr lang="en-US" sz="850" i="1" dirty="0">
+                <a:solidFill>
+                  <a:srgbClr val="D6E0E9"/>
+                </a:solidFill>
+                <a:latin typeface="Calibri" pitchFamily="34" charset="0"/>
+                <a:ea typeface="Calibri" pitchFamily="34" charset="-122"/>
+                <a:cs typeface="Calibri" pitchFamily="34" charset="-120"/>
+              </a:rPr>
+              <a:t>Period 9 | Basic Training 4 — Emergency Reporting and Scene Preservation</a:t>
             </a:r>
             <a:endParaRPr lang="en-US" sz="900" dirty="0"/>
           </a:p>
-          <a:p>
-            <a:pPr indent="0" marL="0">
-              <a:lnSpc>
-                <a:spcPct val="88000"/>
-              </a:lnSpc>
-              <a:buNone/>
-            </a:pPr>
-            <a:r>
-              <a:rPr lang="en-US" sz="750" i="1" dirty="0">
-                <a:solidFill>
-                  <a:srgbClr val="5F7183"/>
-                </a:solidFill>
-                <a:latin typeface="Calibri" pitchFamily="34" charset="0"/>
-                <a:ea typeface="Calibri" pitchFamily="34" charset="-122"/>
-                <a:cs typeface="Calibri" pitchFamily="34" charset="-120"/>
-              </a:rPr>
-              <a:t>Whether to notify internally before calling differs by site. Where life is at risk, call first.</a:t>
-            </a:r>
-            <a:endParaRPr lang="en-US" sz="900" dirty="0"/>
-          </a:p>
-        </p:txBody>
-      </p:sp>
-      <p:sp>
-        <p:nvSpPr>
-          <p:cNvPr id="29" name="Text 26"/>
-          <p:cNvSpPr/>
-          <p:nvPr/>
-        </p:nvSpPr>
-        <p:spPr>
-          <a:xfrm>
-            <a:off x="640080" y="6272784"/>
-            <a:ext cx="9905695" cy="237744"/>
-          </a:xfrm>
-          <a:prstGeom prst="rect">
-            <a:avLst/>
-          </a:prstGeom>
-          <a:noFill/>
-          <a:ln/>
-        </p:spPr>
-        <p:txBody>
-          <a:bodyPr wrap="square" lIns="0" tIns="0" rIns="0" bIns="0" rtlCol="0" anchor="t"/>
-          <a:lstStyle/>
-          <a:p>
-            <a:pPr indent="0" marL="0">
-              <a:buNone/>
-            </a:pPr>
-            <a:r>
-              <a:rPr lang="en-US" sz="750" b="1" dirty="0">
-                <a:solidFill>
-                  <a:srgbClr val="D6E0E9"/>
-                </a:solidFill>
-                <a:latin typeface="Yu Gothic" pitchFamily="34" charset="0"/>
-                <a:ea typeface="Yu Gothic" pitchFamily="34" charset="-122"/>
-                <a:cs typeface="Yu Gothic" pitchFamily="34" charset="-120"/>
-              </a:rPr>
-              <a:t>ソース　</a:t>
-            </a:r>
-            <a:pPr indent="0" marL="0">
-              <a:buNone/>
-            </a:pPr>
-            <a:r>
-              <a:rPr lang="en-US" sz="750" dirty="0">
-                <a:solidFill>
-                  <a:srgbClr val="5F7183"/>
-                </a:solidFill>
-                <a:latin typeface="Yu Gothic" pitchFamily="34" charset="0"/>
-                <a:ea typeface="Yu Gothic" pitchFamily="34" charset="-122"/>
-                <a:cs typeface="Yu Gothic" pitchFamily="34" charset="-120"/>
-              </a:rPr>
-              <a:t>消防法、警察庁「警備員教育」、総務省消防庁「救急車の適正利用」</a:t>
-            </a:r>
-            <a:endParaRPr lang="en-US" sz="750" dirty="0"/>
-          </a:p>
-        </p:txBody>
-      </p:sp>
-      <p:sp>
-        <p:nvSpPr>
-          <p:cNvPr id="30" name="Text 27"/>
-          <p:cNvSpPr/>
-          <p:nvPr/>
-        </p:nvSpPr>
-        <p:spPr>
-          <a:xfrm>
-            <a:off x="640080" y="6382512"/>
-            <a:ext cx="8778240" cy="292608"/>
-          </a:xfrm>
-          <a:prstGeom prst="rect">
-            <a:avLst/>
-          </a:prstGeom>
-          <a:noFill/>
-          <a:ln/>
-        </p:spPr>
-        <p:txBody>
-          <a:bodyPr wrap="square" lIns="0" tIns="0" rIns="0" bIns="0" rtlCol="0" anchor="ctr"/>
-          <a:lstStyle/>
-          <a:p>
-            <a:pPr indent="0" marL="0">
-              <a:buNone/>
-            </a:pPr>
-            <a:r>
-              <a:rPr lang="en-US" sz="900" dirty="0">
-                <a:solidFill>
-                  <a:srgbClr val="5F7183"/>
-                </a:solidFill>
-                <a:latin typeface="Yu Gothic" pitchFamily="34" charset="0"/>
-                <a:ea typeface="Yu Gothic" pitchFamily="34" charset="-122"/>
-                <a:cs typeface="Yu Gothic" pitchFamily="34" charset="-120"/>
-              </a:rPr>
-              <a:t>第9時限｜基本教育4 事故の発生時における警察機関への連絡その他応急の措置  </a:t>
-            </a:r>
-            <a:pPr indent="0" marL="0">
-              <a:buNone/>
-            </a:pPr>
-            <a:r>
-              <a:rPr lang="en-US" sz="850" i="1" dirty="0">
-                <a:solidFill>
-                  <a:srgbClr val="D6E0E9"/>
-                </a:solidFill>
-                <a:latin typeface="Calibri" pitchFamily="34" charset="0"/>
-                <a:ea typeface="Calibri" pitchFamily="34" charset="-122"/>
-                <a:cs typeface="Calibri" pitchFamily="34" charset="-120"/>
-              </a:rPr>
-              <a:t>Period 9 | Basic Training 4 — Emergency Reporting and Scene Preservation</a:t>
-            </a:r>
-            <a:endParaRPr lang="en-US" sz="900" dirty="0"/>
-          </a:p>
         </p:txBody>
       </p:sp>
       <p:sp>
@@ -7917,7 +7917,7 @@
         </p:nvSpPr>
         <p:spPr>
           <a:xfrm>
-            <a:off x="10637215" y="6382512"/>
+            <a:off x="10637215" y="6492240"/>
             <a:ext cx="914400" cy="292608"/>
           </a:xfrm>
           <a:prstGeom prst="rect">
@@ -8052,7 +8052,7 @@
               <a:buNone/>
             </a:pPr>
             <a:r>
-              <a:rPr lang="en-US" sz="1250" i="1" dirty="0">
+              <a:rPr lang="en-US" sz="1350" dirty="0">
                 <a:solidFill>
                   <a:srgbClr val="12B198"/>
                 </a:solidFill>
@@ -8114,9 +8114,9 @@
               <a:buNone/>
             </a:pPr>
             <a:r>
-              <a:rPr lang="en-US" sz="1000" i="1" dirty="0">
-                <a:solidFill>
-                  <a:srgbClr val="5F7183"/>
+              <a:rPr lang="en-US" sz="1000" dirty="0">
+                <a:solidFill>
+                  <a:srgbClr val="1B2733"/>
                 </a:solidFill>
                 <a:latin typeface="Calibri" pitchFamily="34" charset="0"/>
                 <a:ea typeface="Calibri" pitchFamily="34" charset="-122"/>
@@ -8257,9 +8257,9 @@
               <a:buNone/>
             </a:pPr>
             <a:r>
-              <a:rPr lang="en-US" sz="900" i="1" dirty="0">
-                <a:solidFill>
-                  <a:srgbClr val="5F7183"/>
+              <a:rPr lang="en-US" sz="1050" dirty="0">
+                <a:solidFill>
+                  <a:srgbClr val="1B2733"/>
                 </a:solidFill>
                 <a:latin typeface="Calibri" pitchFamily="34" charset="0"/>
                 <a:ea typeface="Calibri" pitchFamily="34" charset="-122"/>
@@ -8400,9 +8400,9 @@
               <a:buNone/>
             </a:pPr>
             <a:r>
-              <a:rPr lang="en-US" sz="900" i="1" dirty="0">
-                <a:solidFill>
-                  <a:srgbClr val="5F7183"/>
+              <a:rPr lang="en-US" sz="1050" dirty="0">
+                <a:solidFill>
+                  <a:srgbClr val="1B2733"/>
                 </a:solidFill>
                 <a:latin typeface="Calibri" pitchFamily="34" charset="0"/>
                 <a:ea typeface="Calibri" pitchFamily="34" charset="-122"/>
@@ -8543,9 +8543,9 @@
               <a:buNone/>
             </a:pPr>
             <a:r>
-              <a:rPr lang="en-US" sz="900" i="1" dirty="0">
-                <a:solidFill>
-                  <a:srgbClr val="5F7183"/>
+              <a:rPr lang="en-US" sz="1050" dirty="0">
+                <a:solidFill>
+                  <a:srgbClr val="1B2733"/>
                 </a:solidFill>
                 <a:latin typeface="Calibri" pitchFamily="34" charset="0"/>
                 <a:ea typeface="Calibri" pitchFamily="34" charset="-122"/>
@@ -8686,9 +8686,9 @@
               <a:buNone/>
             </a:pPr>
             <a:r>
-              <a:rPr lang="en-US" sz="900" i="1" dirty="0">
-                <a:solidFill>
-                  <a:srgbClr val="5F7183"/>
+              <a:rPr lang="en-US" sz="1050" dirty="0">
+                <a:solidFill>
+                  <a:srgbClr val="1B2733"/>
                 </a:solidFill>
                 <a:latin typeface="Calibri" pitchFamily="34" charset="0"/>
                 <a:ea typeface="Calibri" pitchFamily="34" charset="-122"/>
@@ -8829,9 +8829,9 @@
               <a:buNone/>
             </a:pPr>
             <a:r>
-              <a:rPr lang="en-US" sz="900" i="1" dirty="0">
-                <a:solidFill>
-                  <a:srgbClr val="5F7183"/>
+              <a:rPr lang="en-US" sz="1050" dirty="0">
+                <a:solidFill>
+                  <a:srgbClr val="1B2733"/>
                 </a:solidFill>
                 <a:latin typeface="Calibri" pitchFamily="34" charset="0"/>
                 <a:ea typeface="Calibri" pitchFamily="34" charset="-122"/>
@@ -8972,9 +8972,9 @@
               <a:buNone/>
             </a:pPr>
             <a:r>
-              <a:rPr lang="en-US" sz="900" i="1" dirty="0">
-                <a:solidFill>
-                  <a:srgbClr val="5F7183"/>
+              <a:rPr lang="en-US" sz="1050" dirty="0">
+                <a:solidFill>
+                  <a:srgbClr val="1B2733"/>
                 </a:solidFill>
                 <a:latin typeface="Calibri" pitchFamily="34" charset="0"/>
                 <a:ea typeface="Calibri" pitchFamily="34" charset="-122"/>
@@ -9115,9 +9115,9 @@
               <a:buNone/>
             </a:pPr>
             <a:r>
-              <a:rPr lang="en-US" sz="900" i="1" dirty="0">
-                <a:solidFill>
-                  <a:srgbClr val="5F7183"/>
+              <a:rPr lang="en-US" sz="1050" dirty="0">
+                <a:solidFill>
+                  <a:srgbClr val="1B2733"/>
                 </a:solidFill>
                 <a:latin typeface="Calibri" pitchFamily="34" charset="0"/>
                 <a:ea typeface="Calibri" pitchFamily="34" charset="-122"/>
@@ -9258,9 +9258,9 @@
               <a:buNone/>
             </a:pPr>
             <a:r>
-              <a:rPr lang="en-US" sz="900" i="1" dirty="0">
-                <a:solidFill>
-                  <a:srgbClr val="5F7183"/>
+              <a:rPr lang="en-US" sz="1050" dirty="0">
+                <a:solidFill>
+                  <a:srgbClr val="1B2733"/>
                 </a:solidFill>
                 <a:latin typeface="Calibri" pitchFamily="34" charset="0"/>
                 <a:ea typeface="Calibri" pitchFamily="34" charset="-122"/>
@@ -9401,9 +9401,9 @@
               <a:buNone/>
             </a:pPr>
             <a:r>
-              <a:rPr lang="en-US" sz="900" i="1" dirty="0">
-                <a:solidFill>
-                  <a:srgbClr val="5F7183"/>
+              <a:rPr lang="en-US" sz="1050" dirty="0">
+                <a:solidFill>
+                  <a:srgbClr val="1B2733"/>
                 </a:solidFill>
                 <a:latin typeface="Calibri" pitchFamily="34" charset="0"/>
                 <a:ea typeface="Calibri" pitchFamily="34" charset="-122"/>
@@ -9544,49 +9544,49 @@
               <a:buNone/>
             </a:pPr>
             <a:r>
-              <a:rPr lang="en-US" sz="900" i="1" dirty="0">
+              <a:rPr lang="en-US" sz="1050" dirty="0">
+                <a:solidFill>
+                  <a:srgbClr val="1B2733"/>
+                </a:solidFill>
+                <a:latin typeface="Calibri" pitchFamily="34" charset="0"/>
+                <a:ea typeface="Calibri" pitchFamily="34" charset="-122"/>
+                <a:cs typeface="Calibri" pitchFamily="34" charset="-120"/>
+              </a:rPr>
+              <a:t>Even then, everyone must know the eight lines above.</a:t>
+            </a:r>
+            <a:endParaRPr lang="en-US" sz="1150" dirty="0"/>
+          </a:p>
+        </p:txBody>
+      </p:sp>
+      <p:sp>
+        <p:nvSpPr>
+          <p:cNvPr id="45" name="Text 42"/>
+          <p:cNvSpPr/>
+          <p:nvPr/>
+        </p:nvSpPr>
+        <p:spPr>
+          <a:xfrm>
+            <a:off x="640080" y="6492240"/>
+            <a:ext cx="8778240" cy="292608"/>
+          </a:xfrm>
+          <a:prstGeom prst="rect">
+            <a:avLst/>
+          </a:prstGeom>
+          <a:noFill/>
+          <a:ln/>
+        </p:spPr>
+        <p:txBody>
+          <a:bodyPr wrap="square" lIns="0" tIns="0" rIns="0" bIns="0" rtlCol="0" anchor="ctr"/>
+          <a:lstStyle/>
+          <a:p>
+            <a:pPr indent="0" marL="0">
+              <a:buNone/>
+            </a:pPr>
+            <a:r>
+              <a:rPr lang="en-US" sz="900" dirty="0">
                 <a:solidFill>
                   <a:srgbClr val="5F7183"/>
                 </a:solidFill>
-                <a:latin typeface="Calibri" pitchFamily="34" charset="0"/>
-                <a:ea typeface="Calibri" pitchFamily="34" charset="-122"/>
-                <a:cs typeface="Calibri" pitchFamily="34" charset="-120"/>
-              </a:rPr>
-              <a:t>Even then, everyone must know the eight lines above.</a:t>
-            </a:r>
-            <a:endParaRPr lang="en-US" sz="1150" dirty="0"/>
-          </a:p>
-        </p:txBody>
-      </p:sp>
-      <p:sp>
-        <p:nvSpPr>
-          <p:cNvPr id="45" name="Text 42"/>
-          <p:cNvSpPr/>
-          <p:nvPr/>
-        </p:nvSpPr>
-        <p:spPr>
-          <a:xfrm>
-            <a:off x="640080" y="6382512"/>
-            <a:ext cx="8778240" cy="292608"/>
-          </a:xfrm>
-          <a:prstGeom prst="rect">
-            <a:avLst/>
-          </a:prstGeom>
-          <a:noFill/>
-          <a:ln/>
-        </p:spPr>
-        <p:txBody>
-          <a:bodyPr wrap="square" lIns="0" tIns="0" rIns="0" bIns="0" rtlCol="0" anchor="ctr"/>
-          <a:lstStyle/>
-          <a:p>
-            <a:pPr indent="0" marL="0">
-              <a:buNone/>
-            </a:pPr>
-            <a:r>
-              <a:rPr lang="en-US" sz="900" dirty="0">
-                <a:solidFill>
-                  <a:srgbClr val="5F7183"/>
-                </a:solidFill>
                 <a:latin typeface="Yu Gothic" pitchFamily="34" charset="0"/>
                 <a:ea typeface="Yu Gothic" pitchFamily="34" charset="-122"/>
                 <a:cs typeface="Yu Gothic" pitchFamily="34" charset="-120"/>
@@ -9619,7 +9619,7 @@
         </p:nvSpPr>
         <p:spPr>
           <a:xfrm>
-            <a:off x="10637215" y="6382512"/>
+            <a:off x="10637215" y="6492240"/>
             <a:ext cx="914400" cy="292608"/>
           </a:xfrm>
           <a:prstGeom prst="rect">
@@ -9714,8 +9714,8 @@
         </p:nvSpPr>
         <p:spPr>
           <a:xfrm>
-            <a:off x="640080" y="384048"/>
-            <a:ext cx="8982151" cy="768096"/>
+            <a:off x="640080" y="365760"/>
+            <a:ext cx="8982151" cy="749808"/>
           </a:xfrm>
           <a:prstGeom prst="rect">
             <a:avLst/>
@@ -9754,7 +9754,7 @@
               <a:buNone/>
             </a:pPr>
             <a:r>
-              <a:rPr lang="en-US" sz="1100" i="1" dirty="0">
+              <a:rPr lang="en-US" sz="1100" dirty="0">
                 <a:solidFill>
                   <a:srgbClr val="12B198"/>
                 </a:solidFill>
@@ -9776,7 +9776,7 @@
         </p:nvSpPr>
         <p:spPr>
           <a:xfrm>
-            <a:off x="9686239" y="438912"/>
+            <a:off x="9686239" y="420624"/>
             <a:ext cx="932688" cy="310896"/>
           </a:xfrm>
           <a:prstGeom prst="roundRect">
@@ -9798,7 +9798,7 @@
         </p:nvSpPr>
         <p:spPr>
           <a:xfrm>
-            <a:off x="9686239" y="438912"/>
+            <a:off x="9686239" y="420624"/>
             <a:ext cx="932688" cy="310896"/>
           </a:xfrm>
           <a:prstGeom prst="rect">
@@ -9837,12 +9837,12 @@
         </p:nvSpPr>
         <p:spPr>
           <a:xfrm>
-            <a:off x="640080" y="1188720"/>
-            <a:ext cx="10911535" cy="530352"/>
+            <a:off x="640080" y="1115568"/>
+            <a:ext cx="10911535" cy="585216"/>
           </a:xfrm>
           <a:prstGeom prst="roundRect">
             <a:avLst>
-              <a:gd name="adj" fmla="val 6897"/>
+              <a:gd name="adj" fmla="val 6250"/>
             </a:avLst>
           </a:prstGeom>
           <a:solidFill>
@@ -9859,8 +9859,8 @@
         </p:nvSpPr>
         <p:spPr>
           <a:xfrm>
-            <a:off x="877824" y="1234440"/>
-            <a:ext cx="10436047" cy="438912"/>
+            <a:off x="877824" y="1161288"/>
+            <a:ext cx="10436047" cy="493776"/>
           </a:xfrm>
           <a:prstGeom prst="rect">
             <a:avLst/>
@@ -9896,7 +9896,7 @@
               <a:buNone/>
             </a:pPr>
             <a:r>
-              <a:rPr lang="en-US" sz="800" dirty="0">
+              <a:rPr lang="en-US" sz="900" dirty="0">
                 <a:solidFill>
                   <a:srgbClr val="0D8A76"/>
                 </a:solidFill>
@@ -9933,9 +9933,9 @@
               <a:buNone/>
             </a:pPr>
             <a:r>
-              <a:rPr lang="en-US" sz="850" i="1" dirty="0">
-                <a:solidFill>
-                  <a:srgbClr val="5F7183"/>
+              <a:rPr lang="en-US" sz="1050" dirty="0">
+                <a:solidFill>
+                  <a:srgbClr val="1B2733"/>
                 </a:solidFill>
                 <a:latin typeface="Calibri" pitchFamily="34" charset="0"/>
                 <a:ea typeface="Calibri" pitchFamily="34" charset="-122"/>
@@ -9955,12 +9955,12 @@
         </p:nvSpPr>
         <p:spPr>
           <a:xfrm>
-            <a:off x="640080" y="1810512"/>
-            <a:ext cx="5327752" cy="1920240"/>
+            <a:off x="640080" y="1773936"/>
+            <a:ext cx="5327752" cy="1965960"/>
           </a:xfrm>
           <a:prstGeom prst="roundRect">
             <a:avLst>
-              <a:gd name="adj" fmla="val 1905"/>
+              <a:gd name="adj" fmla="val 1860"/>
             </a:avLst>
           </a:prstGeom>
           <a:solidFill>
@@ -9977,7 +9977,7 @@
         </p:nvSpPr>
         <p:spPr>
           <a:xfrm>
-            <a:off x="822960" y="1975104"/>
+            <a:off x="822960" y="1938528"/>
             <a:ext cx="310896" cy="310896"/>
           </a:xfrm>
           <a:prstGeom prst="ellipse">
@@ -9997,7 +9997,7 @@
         </p:nvSpPr>
         <p:spPr>
           <a:xfrm>
-            <a:off x="822960" y="1975104"/>
+            <a:off x="822960" y="1938528"/>
             <a:ext cx="310896" cy="310896"/>
           </a:xfrm>
           <a:prstGeom prst="rect">
@@ -10036,7 +10036,7 @@
         </p:nvSpPr>
         <p:spPr>
           <a:xfrm>
-            <a:off x="1207008" y="1938528"/>
+            <a:off x="1207008" y="1901952"/>
             <a:ext cx="4559656" cy="512064"/>
           </a:xfrm>
           <a:prstGeom prst="rect">
@@ -10076,7 +10076,7 @@
               <a:buNone/>
             </a:pPr>
             <a:r>
-              <a:rPr lang="en-US" sz="800" i="1" dirty="0">
+              <a:rPr lang="en-US" sz="1050" dirty="0">
                 <a:solidFill>
                   <a:srgbClr val="12B198"/>
                 </a:solidFill>
@@ -10098,8 +10098,8 @@
         </p:nvSpPr>
         <p:spPr>
           <a:xfrm>
-            <a:off x="859536" y="2487168"/>
-            <a:ext cx="4888840" cy="1097280"/>
+            <a:off x="859536" y="2450592"/>
+            <a:ext cx="4888840" cy="1143000"/>
           </a:xfrm>
           <a:prstGeom prst="rect">
             <a:avLst/>
@@ -10144,9 +10144,9 @@
               <a:buNone/>
             </a:pPr>
             <a:r>
-              <a:rPr lang="en-US" sz="750" i="1" dirty="0">
-                <a:solidFill>
-                  <a:srgbClr val="5F7183"/>
+              <a:rPr lang="en-US" sz="950" dirty="0">
+                <a:solidFill>
+                  <a:srgbClr val="1B2733"/>
                 </a:solidFill>
                 <a:latin typeface="Calibri" pitchFamily="34" charset="0"/>
                 <a:ea typeface="Calibri" pitchFamily="34" charset="-122"/>
@@ -10190,9 +10190,9 @@
               <a:buNone/>
             </a:pPr>
             <a:r>
-              <a:rPr lang="en-US" sz="750" i="1" dirty="0">
-                <a:solidFill>
-                  <a:srgbClr val="5F7183"/>
+              <a:rPr lang="en-US" sz="950" dirty="0">
+                <a:solidFill>
+                  <a:srgbClr val="1B2733"/>
                 </a:solidFill>
                 <a:latin typeface="Calibri" pitchFamily="34" charset="0"/>
                 <a:ea typeface="Calibri" pitchFamily="34" charset="-122"/>
@@ -10236,9 +10236,9 @@
               <a:buNone/>
             </a:pPr>
             <a:r>
-              <a:rPr lang="en-US" sz="750" i="1" dirty="0">
-                <a:solidFill>
-                  <a:srgbClr val="5F7183"/>
+              <a:rPr lang="en-US" sz="950" dirty="0">
+                <a:solidFill>
+                  <a:srgbClr val="1B2733"/>
                 </a:solidFill>
                 <a:latin typeface="Calibri" pitchFamily="34" charset="0"/>
                 <a:ea typeface="Calibri" pitchFamily="34" charset="-122"/>
@@ -10282,9 +10282,9 @@
               <a:buNone/>
             </a:pPr>
             <a:r>
-              <a:rPr lang="en-US" sz="750" i="1" dirty="0">
-                <a:solidFill>
-                  <a:srgbClr val="5F7183"/>
+              <a:rPr lang="en-US" sz="950" dirty="0">
+                <a:solidFill>
+                  <a:srgbClr val="1B2733"/>
                 </a:solidFill>
                 <a:latin typeface="Calibri" pitchFamily="34" charset="0"/>
                 <a:ea typeface="Calibri" pitchFamily="34" charset="-122"/>
@@ -10304,12 +10304,12 @@
         </p:nvSpPr>
         <p:spPr>
           <a:xfrm>
-            <a:off x="6223864" y="1810512"/>
-            <a:ext cx="5327752" cy="1920240"/>
+            <a:off x="6223864" y="1773936"/>
+            <a:ext cx="5327752" cy="1965960"/>
           </a:xfrm>
           <a:prstGeom prst="roundRect">
             <a:avLst>
-              <a:gd name="adj" fmla="val 1905"/>
+              <a:gd name="adj" fmla="val 1860"/>
             </a:avLst>
           </a:prstGeom>
           <a:solidFill>
@@ -10326,7 +10326,7 @@
         </p:nvSpPr>
         <p:spPr>
           <a:xfrm>
-            <a:off x="6406744" y="1975104"/>
+            <a:off x="6406744" y="1938528"/>
             <a:ext cx="310896" cy="310896"/>
           </a:xfrm>
           <a:prstGeom prst="ellipse">
@@ -10346,7 +10346,7 @@
         </p:nvSpPr>
         <p:spPr>
           <a:xfrm>
-            <a:off x="6406744" y="1975104"/>
+            <a:off x="6406744" y="1938528"/>
             <a:ext cx="310896" cy="310896"/>
           </a:xfrm>
           <a:prstGeom prst="rect">
@@ -10385,7 +10385,7 @@
         </p:nvSpPr>
         <p:spPr>
           <a:xfrm>
-            <a:off x="6790792" y="1938528"/>
+            <a:off x="6790792" y="1901952"/>
             <a:ext cx="4559656" cy="512064"/>
           </a:xfrm>
           <a:prstGeom prst="rect">
@@ -10425,7 +10425,7 @@
               <a:buNone/>
             </a:pPr>
             <a:r>
-              <a:rPr lang="en-US" sz="800" i="1" dirty="0">
+              <a:rPr lang="en-US" sz="1050" dirty="0">
                 <a:solidFill>
                   <a:srgbClr val="12B198"/>
                 </a:solidFill>
@@ -10447,8 +10447,8 @@
         </p:nvSpPr>
         <p:spPr>
           <a:xfrm>
-            <a:off x="6443320" y="2487168"/>
-            <a:ext cx="4888840" cy="1097280"/>
+            <a:off x="6443320" y="2450592"/>
+            <a:ext cx="4888840" cy="1143000"/>
           </a:xfrm>
           <a:prstGeom prst="rect">
             <a:avLst/>
@@ -10493,9 +10493,9 @@
               <a:buNone/>
             </a:pPr>
             <a:r>
-              <a:rPr lang="en-US" sz="750" i="1" dirty="0">
-                <a:solidFill>
-                  <a:srgbClr val="5F7183"/>
+              <a:rPr lang="en-US" sz="950" dirty="0">
+                <a:solidFill>
+                  <a:srgbClr val="1B2733"/>
                 </a:solidFill>
                 <a:latin typeface="Calibri" pitchFamily="34" charset="0"/>
                 <a:ea typeface="Calibri" pitchFamily="34" charset="-122"/>
@@ -10539,9 +10539,9 @@
               <a:buNone/>
             </a:pPr>
             <a:r>
-              <a:rPr lang="en-US" sz="750" i="1" dirty="0">
-                <a:solidFill>
-                  <a:srgbClr val="5F7183"/>
+              <a:rPr lang="en-US" sz="950" dirty="0">
+                <a:solidFill>
+                  <a:srgbClr val="1B2733"/>
                 </a:solidFill>
                 <a:latin typeface="Calibri" pitchFamily="34" charset="0"/>
                 <a:ea typeface="Calibri" pitchFamily="34" charset="-122"/>
@@ -10585,9 +10585,9 @@
               <a:buNone/>
             </a:pPr>
             <a:r>
-              <a:rPr lang="en-US" sz="750" i="1" dirty="0">
-                <a:solidFill>
-                  <a:srgbClr val="5F7183"/>
+              <a:rPr lang="en-US" sz="950" dirty="0">
+                <a:solidFill>
+                  <a:srgbClr val="1B2733"/>
                 </a:solidFill>
                 <a:latin typeface="Calibri" pitchFamily="34" charset="0"/>
                 <a:ea typeface="Calibri" pitchFamily="34" charset="-122"/>
@@ -10631,9 +10631,9 @@
               <a:buNone/>
             </a:pPr>
             <a:r>
-              <a:rPr lang="en-US" sz="750" i="1" dirty="0">
-                <a:solidFill>
-                  <a:srgbClr val="5F7183"/>
+              <a:rPr lang="en-US" sz="950" dirty="0">
+                <a:solidFill>
+                  <a:srgbClr val="1B2733"/>
                 </a:solidFill>
                 <a:latin typeface="Calibri" pitchFamily="34" charset="0"/>
                 <a:ea typeface="Calibri" pitchFamily="34" charset="-122"/>
@@ -10653,12 +10653,12 @@
         </p:nvSpPr>
         <p:spPr>
           <a:xfrm>
-            <a:off x="640080" y="3931920"/>
-            <a:ext cx="5327752" cy="1920240"/>
+            <a:off x="640080" y="3941064"/>
+            <a:ext cx="5327752" cy="1965960"/>
           </a:xfrm>
           <a:prstGeom prst="roundRect">
             <a:avLst>
-              <a:gd name="adj" fmla="val 1905"/>
+              <a:gd name="adj" fmla="val 1860"/>
             </a:avLst>
           </a:prstGeom>
           <a:solidFill>
@@ -10675,7 +10675,7 @@
         </p:nvSpPr>
         <p:spPr>
           <a:xfrm>
-            <a:off x="822960" y="4096512"/>
+            <a:off x="822960" y="4105656"/>
             <a:ext cx="310896" cy="310896"/>
           </a:xfrm>
           <a:prstGeom prst="ellipse">
@@ -10695,7 +10695,7 @@
         </p:nvSpPr>
         <p:spPr>
           <a:xfrm>
-            <a:off x="822960" y="4096512"/>
+            <a:off x="822960" y="4105656"/>
             <a:ext cx="310896" cy="310896"/>
           </a:xfrm>
           <a:prstGeom prst="rect">
@@ -10734,7 +10734,7 @@
         </p:nvSpPr>
         <p:spPr>
           <a:xfrm>
-            <a:off x="1207008" y="4059936"/>
+            <a:off x="1207008" y="4069080"/>
             <a:ext cx="4559656" cy="512064"/>
           </a:xfrm>
           <a:prstGeom prst="rect">
@@ -10774,7 +10774,7 @@
               <a:buNone/>
             </a:pPr>
             <a:r>
-              <a:rPr lang="en-US" sz="800" i="1" dirty="0">
+              <a:rPr lang="en-US" sz="1050" dirty="0">
                 <a:solidFill>
                   <a:srgbClr val="12B198"/>
                 </a:solidFill>
@@ -10796,8 +10796,8 @@
         </p:nvSpPr>
         <p:spPr>
           <a:xfrm>
-            <a:off x="859536" y="4608576"/>
-            <a:ext cx="4888840" cy="1097280"/>
+            <a:off x="859536" y="4617720"/>
+            <a:ext cx="4888840" cy="1143000"/>
           </a:xfrm>
           <a:prstGeom prst="rect">
             <a:avLst/>
@@ -10842,9 +10842,9 @@
               <a:buNone/>
             </a:pPr>
             <a:r>
-              <a:rPr lang="en-US" sz="750" i="1" dirty="0">
-                <a:solidFill>
-                  <a:srgbClr val="5F7183"/>
+              <a:rPr lang="en-US" sz="950" dirty="0">
+                <a:solidFill>
+                  <a:srgbClr val="1B2733"/>
                 </a:solidFill>
                 <a:latin typeface="Calibri" pitchFamily="34" charset="0"/>
                 <a:ea typeface="Calibri" pitchFamily="34" charset="-122"/>
@@ -10888,9 +10888,9 @@
               <a:buNone/>
             </a:pPr>
             <a:r>
-              <a:rPr lang="en-US" sz="750" i="1" dirty="0">
-                <a:solidFill>
-                  <a:srgbClr val="5F7183"/>
+              <a:rPr lang="en-US" sz="950" dirty="0">
+                <a:solidFill>
+                  <a:srgbClr val="1B2733"/>
                 </a:solidFill>
                 <a:latin typeface="Calibri" pitchFamily="34" charset="0"/>
                 <a:ea typeface="Calibri" pitchFamily="34" charset="-122"/>
@@ -10934,9 +10934,9 @@
               <a:buNone/>
             </a:pPr>
             <a:r>
-              <a:rPr lang="en-US" sz="750" i="1" dirty="0">
-                <a:solidFill>
-                  <a:srgbClr val="5F7183"/>
+              <a:rPr lang="en-US" sz="950" dirty="0">
+                <a:solidFill>
+                  <a:srgbClr val="1B2733"/>
                 </a:solidFill>
                 <a:latin typeface="Calibri" pitchFamily="34" charset="0"/>
                 <a:ea typeface="Calibri" pitchFamily="34" charset="-122"/>
@@ -10980,9 +10980,9 @@
               <a:buNone/>
             </a:pPr>
             <a:r>
-              <a:rPr lang="en-US" sz="750" i="1" dirty="0">
-                <a:solidFill>
-                  <a:srgbClr val="5F7183"/>
+              <a:rPr lang="en-US" sz="950" dirty="0">
+                <a:solidFill>
+                  <a:srgbClr val="1B2733"/>
                 </a:solidFill>
                 <a:latin typeface="Calibri" pitchFamily="34" charset="0"/>
                 <a:ea typeface="Calibri" pitchFamily="34" charset="-122"/>
@@ -11002,12 +11002,12 @@
         </p:nvSpPr>
         <p:spPr>
           <a:xfrm>
-            <a:off x="6223864" y="3931920"/>
-            <a:ext cx="5327752" cy="1920240"/>
+            <a:off x="6223864" y="3941064"/>
+            <a:ext cx="5327752" cy="1965960"/>
           </a:xfrm>
           <a:prstGeom prst="roundRect">
             <a:avLst>
-              <a:gd name="adj" fmla="val 1905"/>
+              <a:gd name="adj" fmla="val 1860"/>
             </a:avLst>
           </a:prstGeom>
           <a:solidFill>
@@ -11024,7 +11024,7 @@
         </p:nvSpPr>
         <p:spPr>
           <a:xfrm>
-            <a:off x="6406744" y="4096512"/>
+            <a:off x="6406744" y="4105656"/>
             <a:ext cx="310896" cy="310896"/>
           </a:xfrm>
           <a:prstGeom prst="ellipse">
@@ -11044,7 +11044,7 @@
         </p:nvSpPr>
         <p:spPr>
           <a:xfrm>
-            <a:off x="6406744" y="4096512"/>
+            <a:off x="6406744" y="4105656"/>
             <a:ext cx="310896" cy="310896"/>
           </a:xfrm>
           <a:prstGeom prst="rect">
@@ -11083,7 +11083,7 @@
         </p:nvSpPr>
         <p:spPr>
           <a:xfrm>
-            <a:off x="6790792" y="4059936"/>
+            <a:off x="6790792" y="4069080"/>
             <a:ext cx="4559656" cy="512064"/>
           </a:xfrm>
           <a:prstGeom prst="rect">
@@ -11123,7 +11123,7 @@
               <a:buNone/>
             </a:pPr>
             <a:r>
-              <a:rPr lang="en-US" sz="800" i="1" dirty="0">
+              <a:rPr lang="en-US" sz="1050" dirty="0">
                 <a:solidFill>
                   <a:srgbClr val="12B198"/>
                 </a:solidFill>
@@ -11145,8 +11145,8 @@
         </p:nvSpPr>
         <p:spPr>
           <a:xfrm>
-            <a:off x="6443320" y="4608576"/>
-            <a:ext cx="4888840" cy="1097280"/>
+            <a:off x="6443320" y="4617720"/>
+            <a:ext cx="4888840" cy="1143000"/>
           </a:xfrm>
           <a:prstGeom prst="rect">
             <a:avLst/>
@@ -11191,9 +11191,9 @@
               <a:buNone/>
             </a:pPr>
             <a:r>
-              <a:rPr lang="en-US" sz="750" i="1" dirty="0">
-                <a:solidFill>
-                  <a:srgbClr val="5F7183"/>
+              <a:rPr lang="en-US" sz="950" dirty="0">
+                <a:solidFill>
+                  <a:srgbClr val="1B2733"/>
                 </a:solidFill>
                 <a:latin typeface="Calibri" pitchFamily="34" charset="0"/>
                 <a:ea typeface="Calibri" pitchFamily="34" charset="-122"/>
@@ -11237,9 +11237,9 @@
               <a:buNone/>
             </a:pPr>
             <a:r>
-              <a:rPr lang="en-US" sz="750" i="1" dirty="0">
-                <a:solidFill>
-                  <a:srgbClr val="5F7183"/>
+              <a:rPr lang="en-US" sz="950" dirty="0">
+                <a:solidFill>
+                  <a:srgbClr val="1B2733"/>
                 </a:solidFill>
                 <a:latin typeface="Calibri" pitchFamily="34" charset="0"/>
                 <a:ea typeface="Calibri" pitchFamily="34" charset="-122"/>
@@ -11283,9 +11283,9 @@
               <a:buNone/>
             </a:pPr>
             <a:r>
-              <a:rPr lang="en-US" sz="750" i="1" dirty="0">
-                <a:solidFill>
-                  <a:srgbClr val="5F7183"/>
+              <a:rPr lang="en-US" sz="950" dirty="0">
+                <a:solidFill>
+                  <a:srgbClr val="1B2733"/>
                 </a:solidFill>
                 <a:latin typeface="Calibri" pitchFamily="34" charset="0"/>
                 <a:ea typeface="Calibri" pitchFamily="34" charset="-122"/>
@@ -11329,7 +11329,86 @@
               <a:buNone/>
             </a:pPr>
             <a:r>
-              <a:rPr lang="en-US" sz="750" i="1" dirty="0">
+              <a:rPr lang="en-US" sz="950" dirty="0">
+                <a:solidFill>
+                  <a:srgbClr val="1B2733"/>
+                </a:solidFill>
+                <a:latin typeface="Calibri" pitchFamily="34" charset="0"/>
+                <a:ea typeface="Calibri" pitchFamily="34" charset="-122"/>
+                <a:cs typeface="Calibri" pitchFamily="34" charset="-120"/>
+              </a:rPr>
+              <a:t>  Always include the fact that you called in the internal report</a:t>
+            </a:r>
+            <a:endParaRPr lang="en-US" sz="950" dirty="0"/>
+          </a:p>
+        </p:txBody>
+      </p:sp>
+      <p:sp>
+        <p:nvSpPr>
+          <p:cNvPr id="28" name="Text 25"/>
+          <p:cNvSpPr/>
+          <p:nvPr/>
+        </p:nvSpPr>
+        <p:spPr>
+          <a:xfrm>
+            <a:off x="640080" y="5961888"/>
+            <a:ext cx="10911535" cy="292608"/>
+          </a:xfrm>
+          <a:prstGeom prst="rect">
+            <a:avLst/>
+          </a:prstGeom>
+          <a:noFill/>
+          <a:ln/>
+        </p:spPr>
+        <p:txBody>
+          <a:bodyPr wrap="square" lIns="0" tIns="0" rIns="0" bIns="0" rtlCol="0" anchor="t"/>
+          <a:lstStyle/>
+          <a:p>
+            <a:pPr indent="0" marL="0">
+              <a:lnSpc>
+                <a:spcPct val="88000"/>
+              </a:lnSpc>
+              <a:buNone/>
+            </a:pPr>
+            <a:r>
+              <a:rPr lang="en-US" sz="900" b="1" dirty="0">
+                <a:solidFill>
+                  <a:srgbClr val="0D8A76"/>
+                </a:solidFill>
+                <a:latin typeface="Yu Gothic" pitchFamily="34" charset="0"/>
+                <a:ea typeface="Yu Gothic" pitchFamily="34" charset="-122"/>
+                <a:cs typeface="Yu Gothic" pitchFamily="34" charset="-120"/>
+              </a:rPr>
+              <a:t>Site SOP優先　</a:t>
+            </a:r>
+            <a:pPr indent="0" marL="0">
+              <a:lnSpc>
+                <a:spcPct val="88000"/>
+              </a:lnSpc>
+              <a:buNone/>
+            </a:pPr>
+            <a:r>
+              <a:rPr lang="en-US" sz="900" dirty="0">
+                <a:solidFill>
+                  <a:srgbClr val="1B2733"/>
+                </a:solidFill>
+                <a:latin typeface="Yu Gothic" pitchFamily="34" charset="0"/>
+                <a:ea typeface="Yu Gothic" pitchFamily="34" charset="-122"/>
+                <a:cs typeface="Yu Gothic" pitchFamily="34" charset="-120"/>
+              </a:rPr>
+              <a:t>連絡先、時限、クライアントへの通知の要否は現場ごとに異なる。緊急連絡体制表による。</a:t>
+            </a:r>
+            <a:endParaRPr lang="en-US" sz="900" dirty="0"/>
+          </a:p>
+          <a:p>
+            <a:pPr indent="0" marL="0">
+              <a:lnSpc>
+                <a:spcPct val="88000"/>
+              </a:lnSpc>
+              <a:buNone/>
+            </a:pPr>
+            <a:r>
+              <a:rPr lang="en-US" sz="800" i="1" dirty="0">
                 <a:solidFill>
                   <a:srgbClr val="5F7183"/>
                 </a:solidFill>
@@ -11337,22 +11416,22 @@
                 <a:ea typeface="Calibri" pitchFamily="34" charset="-122"/>
                 <a:cs typeface="Calibri" pitchFamily="34" charset="-120"/>
               </a:rPr>
-              <a:t>  Always include the fact that you called in the internal report</a:t>
-            </a:r>
-            <a:endParaRPr lang="en-US" sz="950" dirty="0"/>
-          </a:p>
-        </p:txBody>
-      </p:sp>
-      <p:sp>
-        <p:nvSpPr>
-          <p:cNvPr id="28" name="Text 25"/>
-          <p:cNvSpPr/>
-          <p:nvPr/>
-        </p:nvSpPr>
-        <p:spPr>
-          <a:xfrm>
-            <a:off x="640080" y="5907024"/>
-            <a:ext cx="10911535" cy="310896"/>
+              <a:t>Contacts, time limits and whether the client is notified differ by site.</a:t>
+            </a:r>
+            <a:endParaRPr lang="en-US" sz="900" dirty="0"/>
+          </a:p>
+        </p:txBody>
+      </p:sp>
+      <p:sp>
+        <p:nvSpPr>
+          <p:cNvPr id="29" name="Text 26"/>
+          <p:cNvSpPr/>
+          <p:nvPr/>
+        </p:nvSpPr>
+        <p:spPr>
+          <a:xfrm>
+            <a:off x="640080" y="6272784"/>
+            <a:ext cx="9905695" cy="219456"/>
           </a:xfrm>
           <a:prstGeom prst="rect">
             <a:avLst/>
@@ -11365,167 +11444,88 @@
           <a:lstStyle/>
           <a:p>
             <a:pPr indent="0" marL="0">
-              <a:lnSpc>
-                <a:spcPct val="88000"/>
-              </a:lnSpc>
-              <a:buNone/>
-            </a:pPr>
-            <a:r>
-              <a:rPr lang="en-US" sz="900" b="1" dirty="0">
-                <a:solidFill>
-                  <a:srgbClr val="0D8A76"/>
-                </a:solidFill>
-                <a:latin typeface="Yu Gothic" pitchFamily="34" charset="0"/>
-                <a:ea typeface="Yu Gothic" pitchFamily="34" charset="-122"/>
-                <a:cs typeface="Yu Gothic" pitchFamily="34" charset="-120"/>
-              </a:rPr>
-              <a:t>Site SOP優先　</a:t>
-            </a:r>
-            <a:pPr indent="0" marL="0">
-              <a:lnSpc>
-                <a:spcPct val="88000"/>
-              </a:lnSpc>
+              <a:buNone/>
+            </a:pPr>
+            <a:r>
+              <a:rPr lang="en-US" sz="750" b="1" dirty="0">
+                <a:solidFill>
+                  <a:srgbClr val="D6E0E9"/>
+                </a:solidFill>
+                <a:latin typeface="Yu Gothic" pitchFamily="34" charset="0"/>
+                <a:ea typeface="Yu Gothic" pitchFamily="34" charset="-122"/>
+                <a:cs typeface="Yu Gothic" pitchFamily="34" charset="-120"/>
+              </a:rPr>
+              <a:t>ソース　</a:t>
+            </a:r>
+            <a:pPr indent="0" marL="0">
+              <a:buNone/>
+            </a:pPr>
+            <a:r>
+              <a:rPr lang="en-US" sz="750" dirty="0">
+                <a:solidFill>
+                  <a:srgbClr val="5F7183"/>
+                </a:solidFill>
+                <a:latin typeface="Yu Gothic" pitchFamily="34" charset="0"/>
+                <a:ea typeface="Yu Gothic" pitchFamily="34" charset="-122"/>
+                <a:cs typeface="Yu Gothic" pitchFamily="34" charset="-120"/>
+              </a:rPr>
+              <a:t>消防法、警察庁「警備員教育」、総務省消防庁「救急車の適正利用」</a:t>
+            </a:r>
+            <a:endParaRPr lang="en-US" sz="750" dirty="0"/>
+          </a:p>
+        </p:txBody>
+      </p:sp>
+      <p:sp>
+        <p:nvSpPr>
+          <p:cNvPr id="30" name="Text 27"/>
+          <p:cNvSpPr/>
+          <p:nvPr/>
+        </p:nvSpPr>
+        <p:spPr>
+          <a:xfrm>
+            <a:off x="640080" y="6492240"/>
+            <a:ext cx="8778240" cy="292608"/>
+          </a:xfrm>
+          <a:prstGeom prst="rect">
+            <a:avLst/>
+          </a:prstGeom>
+          <a:noFill/>
+          <a:ln/>
+        </p:spPr>
+        <p:txBody>
+          <a:bodyPr wrap="square" lIns="0" tIns="0" rIns="0" bIns="0" rtlCol="0" anchor="ctr"/>
+          <a:lstStyle/>
+          <a:p>
+            <a:pPr indent="0" marL="0">
               <a:buNone/>
             </a:pPr>
             <a:r>
               <a:rPr lang="en-US" sz="900" dirty="0">
                 <a:solidFill>
-                  <a:srgbClr val="1B2733"/>
-                </a:solidFill>
-                <a:latin typeface="Yu Gothic" pitchFamily="34" charset="0"/>
-                <a:ea typeface="Yu Gothic" pitchFamily="34" charset="-122"/>
-                <a:cs typeface="Yu Gothic" pitchFamily="34" charset="-120"/>
-              </a:rPr>
-              <a:t>連絡先、時限、クライアントへの通知の要否は現場ごとに異なる。緊急連絡体制表による。</a:t>
+                  <a:srgbClr val="5F7183"/>
+                </a:solidFill>
+                <a:latin typeface="Yu Gothic" pitchFamily="34" charset="0"/>
+                <a:ea typeface="Yu Gothic" pitchFamily="34" charset="-122"/>
+                <a:cs typeface="Yu Gothic" pitchFamily="34" charset="-120"/>
+              </a:rPr>
+              <a:t>第9時限｜基本教育4 事故の発生時における警察機関への連絡その他応急の措置  </a:t>
+            </a:r>
+            <a:pPr indent="0" marL="0">
+              <a:buNone/>
+            </a:pPr>
+            <a:r>
+              <a:rPr lang="en-US" sz="850" i="1" dirty="0">
+                <a:solidFill>
+                  <a:srgbClr val="D6E0E9"/>
+                </a:solidFill>
+                <a:latin typeface="Calibri" pitchFamily="34" charset="0"/>
+                <a:ea typeface="Calibri" pitchFamily="34" charset="-122"/>
+                <a:cs typeface="Calibri" pitchFamily="34" charset="-120"/>
+              </a:rPr>
+              <a:t>Period 9 | Basic Training 4 — Emergency Reporting and Scene Preservation</a:t>
             </a:r>
             <a:endParaRPr lang="en-US" sz="900" dirty="0"/>
           </a:p>
-          <a:p>
-            <a:pPr indent="0" marL="0">
-              <a:lnSpc>
-                <a:spcPct val="88000"/>
-              </a:lnSpc>
-              <a:buNone/>
-            </a:pPr>
-            <a:r>
-              <a:rPr lang="en-US" sz="750" i="1" dirty="0">
-                <a:solidFill>
-                  <a:srgbClr val="5F7183"/>
-                </a:solidFill>
-                <a:latin typeface="Calibri" pitchFamily="34" charset="0"/>
-                <a:ea typeface="Calibri" pitchFamily="34" charset="-122"/>
-                <a:cs typeface="Calibri" pitchFamily="34" charset="-120"/>
-              </a:rPr>
-              <a:t>Contacts, time limits and whether the client is notified differ by site.</a:t>
-            </a:r>
-            <a:endParaRPr lang="en-US" sz="900" dirty="0"/>
-          </a:p>
-        </p:txBody>
-      </p:sp>
-      <p:sp>
-        <p:nvSpPr>
-          <p:cNvPr id="29" name="Text 26"/>
-          <p:cNvSpPr/>
-          <p:nvPr/>
-        </p:nvSpPr>
-        <p:spPr>
-          <a:xfrm>
-            <a:off x="640080" y="6272784"/>
-            <a:ext cx="9905695" cy="237744"/>
-          </a:xfrm>
-          <a:prstGeom prst="rect">
-            <a:avLst/>
-          </a:prstGeom>
-          <a:noFill/>
-          <a:ln/>
-        </p:spPr>
-        <p:txBody>
-          <a:bodyPr wrap="square" lIns="0" tIns="0" rIns="0" bIns="0" rtlCol="0" anchor="t"/>
-          <a:lstStyle/>
-          <a:p>
-            <a:pPr indent="0" marL="0">
-              <a:buNone/>
-            </a:pPr>
-            <a:r>
-              <a:rPr lang="en-US" sz="750" b="1" dirty="0">
-                <a:solidFill>
-                  <a:srgbClr val="D6E0E9"/>
-                </a:solidFill>
-                <a:latin typeface="Yu Gothic" pitchFamily="34" charset="0"/>
-                <a:ea typeface="Yu Gothic" pitchFamily="34" charset="-122"/>
-                <a:cs typeface="Yu Gothic" pitchFamily="34" charset="-120"/>
-              </a:rPr>
-              <a:t>ソース　</a:t>
-            </a:r>
-            <a:pPr indent="0" marL="0">
-              <a:buNone/>
-            </a:pPr>
-            <a:r>
-              <a:rPr lang="en-US" sz="750" dirty="0">
-                <a:solidFill>
-                  <a:srgbClr val="5F7183"/>
-                </a:solidFill>
-                <a:latin typeface="Yu Gothic" pitchFamily="34" charset="0"/>
-                <a:ea typeface="Yu Gothic" pitchFamily="34" charset="-122"/>
-                <a:cs typeface="Yu Gothic" pitchFamily="34" charset="-120"/>
-              </a:rPr>
-              <a:t>消防法、警察庁「警備員教育」、総務省消防庁「救急車の適正利用」</a:t>
-            </a:r>
-            <a:endParaRPr lang="en-US" sz="750" dirty="0"/>
-          </a:p>
-        </p:txBody>
-      </p:sp>
-      <p:sp>
-        <p:nvSpPr>
-          <p:cNvPr id="30" name="Text 27"/>
-          <p:cNvSpPr/>
-          <p:nvPr/>
-        </p:nvSpPr>
-        <p:spPr>
-          <a:xfrm>
-            <a:off x="640080" y="6382512"/>
-            <a:ext cx="8778240" cy="292608"/>
-          </a:xfrm>
-          <a:prstGeom prst="rect">
-            <a:avLst/>
-          </a:prstGeom>
-          <a:noFill/>
-          <a:ln/>
-        </p:spPr>
-        <p:txBody>
-          <a:bodyPr wrap="square" lIns="0" tIns="0" rIns="0" bIns="0" rtlCol="0" anchor="ctr"/>
-          <a:lstStyle/>
-          <a:p>
-            <a:pPr indent="0" marL="0">
-              <a:buNone/>
-            </a:pPr>
-            <a:r>
-              <a:rPr lang="en-US" sz="900" dirty="0">
-                <a:solidFill>
-                  <a:srgbClr val="5F7183"/>
-                </a:solidFill>
-                <a:latin typeface="Yu Gothic" pitchFamily="34" charset="0"/>
-                <a:ea typeface="Yu Gothic" pitchFamily="34" charset="-122"/>
-                <a:cs typeface="Yu Gothic" pitchFamily="34" charset="-120"/>
-              </a:rPr>
-              <a:t>第9時限｜基本教育4 事故の発生時における警察機関への連絡その他応急の措置  </a:t>
-            </a:r>
-            <a:pPr indent="0" marL="0">
-              <a:buNone/>
-            </a:pPr>
-            <a:r>
-              <a:rPr lang="en-US" sz="850" i="1" dirty="0">
-                <a:solidFill>
-                  <a:srgbClr val="D6E0E9"/>
-                </a:solidFill>
-                <a:latin typeface="Calibri" pitchFamily="34" charset="0"/>
-                <a:ea typeface="Calibri" pitchFamily="34" charset="-122"/>
-                <a:cs typeface="Calibri" pitchFamily="34" charset="-120"/>
-              </a:rPr>
-              <a:t>Period 9 | Basic Training 4 — Emergency Reporting and Scene Preservation</a:t>
-            </a:r>
-            <a:endParaRPr lang="en-US" sz="900" dirty="0"/>
-          </a:p>
         </p:txBody>
       </p:sp>
       <p:sp>
@@ -11536,7 +11536,7 @@
         </p:nvSpPr>
         <p:spPr>
           <a:xfrm>
-            <a:off x="10637215" y="6382512"/>
+            <a:off x="10637215" y="6492240"/>
             <a:ext cx="914400" cy="292608"/>
           </a:xfrm>
           <a:prstGeom prst="rect">
@@ -11631,8 +11631,8 @@
         </p:nvSpPr>
         <p:spPr>
           <a:xfrm>
-            <a:off x="640080" y="384048"/>
-            <a:ext cx="8982151" cy="768096"/>
+            <a:off x="640080" y="365760"/>
+            <a:ext cx="8982151" cy="749808"/>
           </a:xfrm>
           <a:prstGeom prst="rect">
             <a:avLst/>
@@ -11671,7 +11671,7 @@
               <a:buNone/>
             </a:pPr>
             <a:r>
-              <a:rPr lang="en-US" sz="1100" i="1" dirty="0">
+              <a:rPr lang="en-US" sz="1100" dirty="0">
                 <a:solidFill>
                   <a:srgbClr val="12B198"/>
                 </a:solidFill>
@@ -11693,7 +11693,7 @@
         </p:nvSpPr>
         <p:spPr>
           <a:xfrm>
-            <a:off x="9686239" y="438912"/>
+            <a:off x="9686239" y="420624"/>
             <a:ext cx="932688" cy="310896"/>
           </a:xfrm>
           <a:prstGeom prst="roundRect">
@@ -11715,7 +11715,7 @@
         </p:nvSpPr>
         <p:spPr>
           <a:xfrm>
-            <a:off x="9686239" y="438912"/>
+            <a:off x="9686239" y="420624"/>
             <a:ext cx="932688" cy="310896"/>
           </a:xfrm>
           <a:prstGeom prst="rect">
@@ -11754,7 +11754,7 @@
         </p:nvSpPr>
         <p:spPr>
           <a:xfrm>
-            <a:off x="640080" y="1188720"/>
+            <a:off x="640080" y="1115568"/>
             <a:ext cx="10911535" cy="1124712"/>
           </a:xfrm>
           <a:prstGeom prst="roundRect">
@@ -11776,7 +11776,7 @@
         </p:nvSpPr>
         <p:spPr>
           <a:xfrm>
-            <a:off x="950976" y="1316736"/>
+            <a:off x="950976" y="1243584"/>
             <a:ext cx="10289743" cy="868680"/>
           </a:xfrm>
           <a:prstGeom prst="rect">
@@ -11853,9 +11853,9 @@
               <a:buNone/>
             </a:pPr>
             <a:r>
-              <a:rPr lang="en-US" sz="800" i="1" dirty="0">
-                <a:solidFill>
-                  <a:srgbClr val="9FD8CD"/>
+              <a:rPr lang="en-US" sz="1000" dirty="0">
+                <a:solidFill>
+                  <a:srgbClr val="DCEFEB"/>
                 </a:solidFill>
                 <a:latin typeface="Calibri" pitchFamily="34" charset="0"/>
                 <a:ea typeface="Calibri" pitchFamily="34" charset="-122"/>
@@ -11875,7 +11875,7 @@
         </p:nvSpPr>
         <p:spPr>
           <a:xfrm>
-            <a:off x="640080" y="2459736"/>
+            <a:off x="640080" y="2386584"/>
             <a:ext cx="10911535" cy="566928"/>
           </a:xfrm>
           <a:prstGeom prst="rect">
@@ -11932,9 +11932,9 @@
               <a:buNone/>
             </a:pPr>
             <a:r>
-              <a:rPr lang="en-US" sz="850" i="1" dirty="0">
-                <a:solidFill>
-                  <a:srgbClr val="5F7183"/>
+              <a:rPr lang="en-US" sz="1050" dirty="0">
+                <a:solidFill>
+                  <a:srgbClr val="1B2733"/>
                 </a:solidFill>
                 <a:latin typeface="Calibri" pitchFamily="34" charset="0"/>
                 <a:ea typeface="Calibri" pitchFamily="34" charset="-122"/>
@@ -11954,12 +11954,12 @@
         </p:nvSpPr>
         <p:spPr>
           <a:xfrm>
-            <a:off x="640080" y="3081528"/>
-            <a:ext cx="5327752" cy="836676"/>
+            <a:off x="640080" y="3008376"/>
+            <a:ext cx="5327752" cy="900684"/>
           </a:xfrm>
           <a:prstGeom prst="roundRect">
             <a:avLst>
-              <a:gd name="adj" fmla="val 4372"/>
+              <a:gd name="adj" fmla="val 4061"/>
             </a:avLst>
           </a:prstGeom>
           <a:solidFill>
@@ -11976,7 +11976,7 @@
         </p:nvSpPr>
         <p:spPr>
           <a:xfrm>
-            <a:off x="804672" y="3353562"/>
+            <a:off x="804672" y="3312414"/>
             <a:ext cx="292608" cy="292608"/>
           </a:xfrm>
           <a:prstGeom prst="ellipse">
@@ -11996,7 +11996,7 @@
         </p:nvSpPr>
         <p:spPr>
           <a:xfrm>
-            <a:off x="804672" y="3353562"/>
+            <a:off x="804672" y="3312414"/>
             <a:ext cx="292608" cy="292608"/>
           </a:xfrm>
           <a:prstGeom prst="rect">
@@ -12035,8 +12035,8 @@
         </p:nvSpPr>
         <p:spPr>
           <a:xfrm>
-            <a:off x="1188720" y="3136392"/>
-            <a:ext cx="4596232" cy="726948"/>
+            <a:off x="1188720" y="3063240"/>
+            <a:ext cx="4596232" cy="790956"/>
           </a:xfrm>
           <a:prstGeom prst="rect">
             <a:avLst/>
@@ -12075,9 +12075,9 @@
               <a:buNone/>
             </a:pPr>
             <a:r>
-              <a:rPr lang="en-US" sz="800" i="1" dirty="0">
-                <a:solidFill>
-                  <a:srgbClr val="5F7183"/>
+              <a:rPr lang="en-US" sz="1050" dirty="0">
+                <a:solidFill>
+                  <a:srgbClr val="1B2733"/>
                 </a:solidFill>
                 <a:latin typeface="Calibri" pitchFamily="34" charset="0"/>
                 <a:ea typeface="Calibri" pitchFamily="34" charset="-122"/>
@@ -12097,12 +12097,12 @@
         </p:nvSpPr>
         <p:spPr>
           <a:xfrm>
-            <a:off x="6223864" y="3081528"/>
-            <a:ext cx="5327752" cy="836676"/>
+            <a:off x="6223864" y="3008376"/>
+            <a:ext cx="5327752" cy="900684"/>
           </a:xfrm>
           <a:prstGeom prst="roundRect">
             <a:avLst>
-              <a:gd name="adj" fmla="val 4372"/>
+              <a:gd name="adj" fmla="val 4061"/>
             </a:avLst>
           </a:prstGeom>
           <a:solidFill>
@@ -12119,7 +12119,7 @@
         </p:nvSpPr>
         <p:spPr>
           <a:xfrm>
-            <a:off x="6388456" y="3353562"/>
+            <a:off x="6388456" y="3312414"/>
             <a:ext cx="292608" cy="292608"/>
           </a:xfrm>
           <a:prstGeom prst="ellipse">
@@ -12139,7 +12139,7 @@
         </p:nvSpPr>
         <p:spPr>
           <a:xfrm>
-            <a:off x="6388456" y="3353562"/>
+            <a:off x="6388456" y="3312414"/>
             <a:ext cx="292608" cy="292608"/>
           </a:xfrm>
           <a:prstGeom prst="rect">
@@ -12178,8 +12178,8 @@
         </p:nvSpPr>
         <p:spPr>
           <a:xfrm>
-            <a:off x="6772504" y="3136392"/>
-            <a:ext cx="4596232" cy="726948"/>
+            <a:off x="6772504" y="3063240"/>
+            <a:ext cx="4596232" cy="790956"/>
           </a:xfrm>
           <a:prstGeom prst="rect">
             <a:avLst/>
@@ -12218,9 +12218,9 @@
               <a:buNone/>
             </a:pPr>
             <a:r>
-              <a:rPr lang="en-US" sz="800" i="1" dirty="0">
-                <a:solidFill>
-                  <a:srgbClr val="5F7183"/>
+              <a:rPr lang="en-US" sz="1050" dirty="0">
+                <a:solidFill>
+                  <a:srgbClr val="1B2733"/>
                 </a:solidFill>
                 <a:latin typeface="Calibri" pitchFamily="34" charset="0"/>
                 <a:ea typeface="Calibri" pitchFamily="34" charset="-122"/>
@@ -12240,12 +12240,12 @@
         </p:nvSpPr>
         <p:spPr>
           <a:xfrm>
-            <a:off x="640080" y="4027932"/>
-            <a:ext cx="5327752" cy="836676"/>
+            <a:off x="640080" y="4018788"/>
+            <a:ext cx="5327752" cy="900684"/>
           </a:xfrm>
           <a:prstGeom prst="roundRect">
             <a:avLst>
-              <a:gd name="adj" fmla="val 4372"/>
+              <a:gd name="adj" fmla="val 4061"/>
             </a:avLst>
           </a:prstGeom>
           <a:solidFill>
@@ -12262,7 +12262,7 @@
         </p:nvSpPr>
         <p:spPr>
           <a:xfrm>
-            <a:off x="804672" y="4299966"/>
+            <a:off x="804672" y="4322826"/>
             <a:ext cx="292608" cy="292608"/>
           </a:xfrm>
           <a:prstGeom prst="ellipse">
@@ -12282,7 +12282,7 @@
         </p:nvSpPr>
         <p:spPr>
           <a:xfrm>
-            <a:off x="804672" y="4299966"/>
+            <a:off x="804672" y="4322826"/>
             <a:ext cx="292608" cy="292608"/>
           </a:xfrm>
           <a:prstGeom prst="rect">
@@ -12321,8 +12321,8 @@
         </p:nvSpPr>
         <p:spPr>
           <a:xfrm>
-            <a:off x="1188720" y="4082796"/>
-            <a:ext cx="4596232" cy="726948"/>
+            <a:off x="1188720" y="4073652"/>
+            <a:ext cx="4596232" cy="790956"/>
           </a:xfrm>
           <a:prstGeom prst="rect">
             <a:avLst/>
@@ -12361,9 +12361,9 @@
               <a:buNone/>
             </a:pPr>
             <a:r>
-              <a:rPr lang="en-US" sz="800" i="1" dirty="0">
-                <a:solidFill>
-                  <a:srgbClr val="5F7183"/>
+              <a:rPr lang="en-US" sz="1050" dirty="0">
+                <a:solidFill>
+                  <a:srgbClr val="1B2733"/>
                 </a:solidFill>
                 <a:latin typeface="Calibri" pitchFamily="34" charset="0"/>
                 <a:ea typeface="Calibri" pitchFamily="34" charset="-122"/>
@@ -12383,12 +12383,12 @@
         </p:nvSpPr>
         <p:spPr>
           <a:xfrm>
-            <a:off x="6223864" y="4027932"/>
-            <a:ext cx="5327752" cy="836676"/>
+            <a:off x="6223864" y="4018788"/>
+            <a:ext cx="5327752" cy="900684"/>
           </a:xfrm>
           <a:prstGeom prst="roundRect">
             <a:avLst>
-              <a:gd name="adj" fmla="val 4372"/>
+              <a:gd name="adj" fmla="val 4061"/>
             </a:avLst>
           </a:prstGeom>
           <a:solidFill>
@@ -12405,7 +12405,7 @@
         </p:nvSpPr>
         <p:spPr>
           <a:xfrm>
-            <a:off x="6388456" y="4299966"/>
+            <a:off x="6388456" y="4322826"/>
             <a:ext cx="292608" cy="292608"/>
           </a:xfrm>
           <a:prstGeom prst="ellipse">
@@ -12425,7 +12425,7 @@
         </p:nvSpPr>
         <p:spPr>
           <a:xfrm>
-            <a:off x="6388456" y="4299966"/>
+            <a:off x="6388456" y="4322826"/>
             <a:ext cx="292608" cy="292608"/>
           </a:xfrm>
           <a:prstGeom prst="rect">
@@ -12464,8 +12464,8 @@
         </p:nvSpPr>
         <p:spPr>
           <a:xfrm>
-            <a:off x="6772504" y="4082796"/>
-            <a:ext cx="4596232" cy="726948"/>
+            <a:off x="6772504" y="4073652"/>
+            <a:ext cx="4596232" cy="790956"/>
           </a:xfrm>
           <a:prstGeom prst="rect">
             <a:avLst/>
@@ -12504,9 +12504,9 @@
               <a:buNone/>
             </a:pPr>
             <a:r>
-              <a:rPr lang="en-US" sz="800" i="1" dirty="0">
-                <a:solidFill>
-                  <a:srgbClr val="5F7183"/>
+              <a:rPr lang="en-US" sz="1050" dirty="0">
+                <a:solidFill>
+                  <a:srgbClr val="1B2733"/>
                 </a:solidFill>
                 <a:latin typeface="Calibri" pitchFamily="34" charset="0"/>
                 <a:ea typeface="Calibri" pitchFamily="34" charset="-122"/>
@@ -12526,7 +12526,7 @@
         </p:nvSpPr>
         <p:spPr>
           <a:xfrm>
-            <a:off x="640080" y="4919472"/>
+            <a:off x="640080" y="4974336"/>
             <a:ext cx="10911535" cy="420624"/>
           </a:xfrm>
           <a:prstGeom prst="roundRect">
@@ -12548,7 +12548,7 @@
         </p:nvSpPr>
         <p:spPr>
           <a:xfrm>
-            <a:off x="877824" y="4946904"/>
+            <a:off x="877824" y="5001768"/>
             <a:ext cx="10436047" cy="365760"/>
           </a:xfrm>
           <a:prstGeom prst="rect">
@@ -12605,9 +12605,9 @@
               <a:buNone/>
             </a:pPr>
             <a:r>
-              <a:rPr lang="en-US" sz="750" i="1" dirty="0">
-                <a:solidFill>
-                  <a:srgbClr val="5F7183"/>
+              <a:rPr lang="en-US" sz="950" dirty="0">
+                <a:solidFill>
+                  <a:srgbClr val="1B2733"/>
                 </a:solidFill>
                 <a:latin typeface="Calibri" pitchFamily="34" charset="0"/>
                 <a:ea typeface="Calibri" pitchFamily="34" charset="-122"/>
@@ -12627,7 +12627,7 @@
         </p:nvSpPr>
         <p:spPr>
           <a:xfrm>
-            <a:off x="640080" y="5394960"/>
+            <a:off x="640080" y="5449824"/>
             <a:ext cx="10911535" cy="420624"/>
           </a:xfrm>
           <a:prstGeom prst="roundRect">
@@ -12649,7 +12649,7 @@
         </p:nvSpPr>
         <p:spPr>
           <a:xfrm>
-            <a:off x="877824" y="5422392"/>
+            <a:off x="877824" y="5477256"/>
             <a:ext cx="10436047" cy="365760"/>
           </a:xfrm>
           <a:prstGeom prst="rect">
@@ -12706,7 +12706,86 @@
               <a:buNone/>
             </a:pPr>
             <a:r>
-              <a:rPr lang="en-US" sz="750" i="1" dirty="0">
+              <a:rPr lang="en-US" sz="950" dirty="0">
+                <a:solidFill>
+                  <a:srgbClr val="1B2733"/>
+                </a:solidFill>
+                <a:latin typeface="Calibri" pitchFamily="34" charset="0"/>
+                <a:ea typeface="Calibri" pitchFamily="34" charset="-122"/>
+                <a:cs typeface="Calibri" pitchFamily="34" charset="-120"/>
+              </a:rPr>
+              <a:t>The ambulance crew asks: "Do you know their name and date of birth?"</a:t>
+            </a:r>
+            <a:endParaRPr lang="en-US" sz="850" dirty="0"/>
+          </a:p>
+        </p:txBody>
+      </p:sp>
+      <p:sp>
+        <p:nvSpPr>
+          <p:cNvPr id="29" name="Text 26"/>
+          <p:cNvSpPr/>
+          <p:nvPr/>
+        </p:nvSpPr>
+        <p:spPr>
+          <a:xfrm>
+            <a:off x="640080" y="5961888"/>
+            <a:ext cx="10911535" cy="292608"/>
+          </a:xfrm>
+          <a:prstGeom prst="rect">
+            <a:avLst/>
+          </a:prstGeom>
+          <a:noFill/>
+          <a:ln/>
+        </p:spPr>
+        <p:txBody>
+          <a:bodyPr wrap="square" lIns="0" tIns="0" rIns="0" bIns="0" rtlCol="0" anchor="t"/>
+          <a:lstStyle/>
+          <a:p>
+            <a:pPr indent="0" marL="0">
+              <a:lnSpc>
+                <a:spcPct val="88000"/>
+              </a:lnSpc>
+              <a:buNone/>
+            </a:pPr>
+            <a:r>
+              <a:rPr lang="en-US" sz="900" b="1" dirty="0">
+                <a:solidFill>
+                  <a:srgbClr val="0D8A76"/>
+                </a:solidFill>
+                <a:latin typeface="Yu Gothic" pitchFamily="34" charset="0"/>
+                <a:ea typeface="Yu Gothic" pitchFamily="34" charset="-122"/>
+                <a:cs typeface="Yu Gothic" pitchFamily="34" charset="-120"/>
+              </a:rPr>
+              <a:t>Site SOP優先　</a:t>
+            </a:r>
+            <a:pPr indent="0" marL="0">
+              <a:lnSpc>
+                <a:spcPct val="88000"/>
+              </a:lnSpc>
+              <a:buNone/>
+            </a:pPr>
+            <a:r>
+              <a:rPr lang="en-US" sz="900" dirty="0">
+                <a:solidFill>
+                  <a:srgbClr val="1B2733"/>
+                </a:solidFill>
+                <a:latin typeface="Yu Gothic" pitchFamily="34" charset="0"/>
+                <a:ea typeface="Yu Gothic" pitchFamily="34" charset="-122"/>
+                <a:cs typeface="Yu Gothic" pitchFamily="34" charset="-120"/>
+              </a:rPr>
+              <a:t>救急要請の判断者、クライアントへの通知、身元不明者の扱いは現場ごとに異なる。Site SOPによる。</a:t>
+            </a:r>
+            <a:endParaRPr lang="en-US" sz="900" dirty="0"/>
+          </a:p>
+          <a:p>
+            <a:pPr indent="0" marL="0">
+              <a:lnSpc>
+                <a:spcPct val="88000"/>
+              </a:lnSpc>
+              <a:buNone/>
+            </a:pPr>
+            <a:r>
+              <a:rPr lang="en-US" sz="800" i="1" dirty="0">
                 <a:solidFill>
                   <a:srgbClr val="5F7183"/>
                 </a:solidFill>
@@ -12714,22 +12793,22 @@
                 <a:ea typeface="Calibri" pitchFamily="34" charset="-122"/>
                 <a:cs typeface="Calibri" pitchFamily="34" charset="-120"/>
               </a:rPr>
-              <a:t>The ambulance crew asks: "Do you know their name and date of birth?"</a:t>
-            </a:r>
-            <a:endParaRPr lang="en-US" sz="850" dirty="0"/>
-          </a:p>
-        </p:txBody>
-      </p:sp>
-      <p:sp>
-        <p:nvSpPr>
-          <p:cNvPr id="29" name="Text 26"/>
-          <p:cNvSpPr/>
-          <p:nvPr/>
-        </p:nvSpPr>
-        <p:spPr>
-          <a:xfrm>
-            <a:off x="640080" y="5907024"/>
-            <a:ext cx="10911535" cy="310896"/>
+              <a:t>Who decides on an ambulance, client notification, and handling of unidentified persons differ by site.</a:t>
+            </a:r>
+            <a:endParaRPr lang="en-US" sz="900" dirty="0"/>
+          </a:p>
+        </p:txBody>
+      </p:sp>
+      <p:sp>
+        <p:nvSpPr>
+          <p:cNvPr id="30" name="Text 27"/>
+          <p:cNvSpPr/>
+          <p:nvPr/>
+        </p:nvSpPr>
+        <p:spPr>
+          <a:xfrm>
+            <a:off x="640080" y="6272784"/>
+            <a:ext cx="9905695" cy="219456"/>
           </a:xfrm>
           <a:prstGeom prst="rect">
             <a:avLst/>
@@ -12742,167 +12821,88 @@
           <a:lstStyle/>
           <a:p>
             <a:pPr indent="0" marL="0">
-              <a:lnSpc>
-                <a:spcPct val="88000"/>
-              </a:lnSpc>
-              <a:buNone/>
-            </a:pPr>
-            <a:r>
-              <a:rPr lang="en-US" sz="900" b="1" dirty="0">
-                <a:solidFill>
-                  <a:srgbClr val="0D8A76"/>
-                </a:solidFill>
-                <a:latin typeface="Yu Gothic" pitchFamily="34" charset="0"/>
-                <a:ea typeface="Yu Gothic" pitchFamily="34" charset="-122"/>
-                <a:cs typeface="Yu Gothic" pitchFamily="34" charset="-120"/>
-              </a:rPr>
-              <a:t>Site SOP優先　</a:t>
-            </a:r>
-            <a:pPr indent="0" marL="0">
-              <a:lnSpc>
-                <a:spcPct val="88000"/>
-              </a:lnSpc>
+              <a:buNone/>
+            </a:pPr>
+            <a:r>
+              <a:rPr lang="en-US" sz="750" b="1" dirty="0">
+                <a:solidFill>
+                  <a:srgbClr val="D6E0E9"/>
+                </a:solidFill>
+                <a:latin typeface="Yu Gothic" pitchFamily="34" charset="0"/>
+                <a:ea typeface="Yu Gothic" pitchFamily="34" charset="-122"/>
+                <a:cs typeface="Yu Gothic" pitchFamily="34" charset="-120"/>
+              </a:rPr>
+              <a:t>ソース　</a:t>
+            </a:r>
+            <a:pPr indent="0" marL="0">
+              <a:buNone/>
+            </a:pPr>
+            <a:r>
+              <a:rPr lang="en-US" sz="750" dirty="0">
+                <a:solidFill>
+                  <a:srgbClr val="5F7183"/>
+                </a:solidFill>
+                <a:latin typeface="Yu Gothic" pitchFamily="34" charset="0"/>
+                <a:ea typeface="Yu Gothic" pitchFamily="34" charset="-122"/>
+                <a:cs typeface="Yu Gothic" pitchFamily="34" charset="-120"/>
+              </a:rPr>
+              <a:t>消防法、警察庁「警備員教育」、総務省消防庁「救急車の適正利用」</a:t>
+            </a:r>
+            <a:endParaRPr lang="en-US" sz="750" dirty="0"/>
+          </a:p>
+        </p:txBody>
+      </p:sp>
+      <p:sp>
+        <p:nvSpPr>
+          <p:cNvPr id="31" name="Text 28"/>
+          <p:cNvSpPr/>
+          <p:nvPr/>
+        </p:nvSpPr>
+        <p:spPr>
+          <a:xfrm>
+            <a:off x="640080" y="6492240"/>
+            <a:ext cx="8778240" cy="292608"/>
+          </a:xfrm>
+          <a:prstGeom prst="rect">
+            <a:avLst/>
+          </a:prstGeom>
+          <a:noFill/>
+          <a:ln/>
+        </p:spPr>
+        <p:txBody>
+          <a:bodyPr wrap="square" lIns="0" tIns="0" rIns="0" bIns="0" rtlCol="0" anchor="ctr"/>
+          <a:lstStyle/>
+          <a:p>
+            <a:pPr indent="0" marL="0">
               <a:buNone/>
             </a:pPr>
             <a:r>
               <a:rPr lang="en-US" sz="900" dirty="0">
                 <a:solidFill>
-                  <a:srgbClr val="1B2733"/>
-                </a:solidFill>
-                <a:latin typeface="Yu Gothic" pitchFamily="34" charset="0"/>
-                <a:ea typeface="Yu Gothic" pitchFamily="34" charset="-122"/>
-                <a:cs typeface="Yu Gothic" pitchFamily="34" charset="-120"/>
-              </a:rPr>
-              <a:t>救急要請の判断者、クライアントへの通知、身元不明者の扱いは現場ごとに異なる。Site SOPによる。</a:t>
+                  <a:srgbClr val="5F7183"/>
+                </a:solidFill>
+                <a:latin typeface="Yu Gothic" pitchFamily="34" charset="0"/>
+                <a:ea typeface="Yu Gothic" pitchFamily="34" charset="-122"/>
+                <a:cs typeface="Yu Gothic" pitchFamily="34" charset="-120"/>
+              </a:rPr>
+              <a:t>第9時限｜基本教育4 事故の発生時における警察機関への連絡その他応急の措置  </a:t>
+            </a:r>
+            <a:pPr indent="0" marL="0">
+              <a:buNone/>
+            </a:pPr>
+            <a:r>
+              <a:rPr lang="en-US" sz="850" i="1" dirty="0">
+                <a:solidFill>
+                  <a:srgbClr val="D6E0E9"/>
+                </a:solidFill>
+                <a:latin typeface="Calibri" pitchFamily="34" charset="0"/>
+                <a:ea typeface="Calibri" pitchFamily="34" charset="-122"/>
+                <a:cs typeface="Calibri" pitchFamily="34" charset="-120"/>
+              </a:rPr>
+              <a:t>Period 9 | Basic Training 4 — Emergency Reporting and Scene Preservation</a:t>
             </a:r>
             <a:endParaRPr lang="en-US" sz="900" dirty="0"/>
           </a:p>
-          <a:p>
-            <a:pPr indent="0" marL="0">
-              <a:lnSpc>
-                <a:spcPct val="88000"/>
-              </a:lnSpc>
-              <a:buNone/>
-            </a:pPr>
-            <a:r>
-              <a:rPr lang="en-US" sz="750" i="1" dirty="0">
-                <a:solidFill>
-                  <a:srgbClr val="5F7183"/>
-                </a:solidFill>
-                <a:latin typeface="Calibri" pitchFamily="34" charset="0"/>
-                <a:ea typeface="Calibri" pitchFamily="34" charset="-122"/>
-                <a:cs typeface="Calibri" pitchFamily="34" charset="-120"/>
-              </a:rPr>
-              <a:t>Who decides on an ambulance, client notification, and handling of unidentified persons differ by site.</a:t>
-            </a:r>
-            <a:endParaRPr lang="en-US" sz="900" dirty="0"/>
-          </a:p>
-        </p:txBody>
-      </p:sp>
-      <p:sp>
-        <p:nvSpPr>
-          <p:cNvPr id="30" name="Text 27"/>
-          <p:cNvSpPr/>
-          <p:nvPr/>
-        </p:nvSpPr>
-        <p:spPr>
-          <a:xfrm>
-            <a:off x="640080" y="6272784"/>
-            <a:ext cx="9905695" cy="237744"/>
-          </a:xfrm>
-          <a:prstGeom prst="rect">
-            <a:avLst/>
-          </a:prstGeom>
-          <a:noFill/>
-          <a:ln/>
-        </p:spPr>
-        <p:txBody>
-          <a:bodyPr wrap="square" lIns="0" tIns="0" rIns="0" bIns="0" rtlCol="0" anchor="t"/>
-          <a:lstStyle/>
-          <a:p>
-            <a:pPr indent="0" marL="0">
-              <a:buNone/>
-            </a:pPr>
-            <a:r>
-              <a:rPr lang="en-US" sz="750" b="1" dirty="0">
-                <a:solidFill>
-                  <a:srgbClr val="D6E0E9"/>
-                </a:solidFill>
-                <a:latin typeface="Yu Gothic" pitchFamily="34" charset="0"/>
-                <a:ea typeface="Yu Gothic" pitchFamily="34" charset="-122"/>
-                <a:cs typeface="Yu Gothic" pitchFamily="34" charset="-120"/>
-              </a:rPr>
-              <a:t>ソース　</a:t>
-            </a:r>
-            <a:pPr indent="0" marL="0">
-              <a:buNone/>
-            </a:pPr>
-            <a:r>
-              <a:rPr lang="en-US" sz="750" dirty="0">
-                <a:solidFill>
-                  <a:srgbClr val="5F7183"/>
-                </a:solidFill>
-                <a:latin typeface="Yu Gothic" pitchFamily="34" charset="0"/>
-                <a:ea typeface="Yu Gothic" pitchFamily="34" charset="-122"/>
-                <a:cs typeface="Yu Gothic" pitchFamily="34" charset="-120"/>
-              </a:rPr>
-              <a:t>消防法、警察庁「警備員教育」、総務省消防庁「救急車の適正利用」</a:t>
-            </a:r>
-            <a:endParaRPr lang="en-US" sz="750" dirty="0"/>
-          </a:p>
-        </p:txBody>
-      </p:sp>
-      <p:sp>
-        <p:nvSpPr>
-          <p:cNvPr id="31" name="Text 28"/>
-          <p:cNvSpPr/>
-          <p:nvPr/>
-        </p:nvSpPr>
-        <p:spPr>
-          <a:xfrm>
-            <a:off x="640080" y="6382512"/>
-            <a:ext cx="8778240" cy="292608"/>
-          </a:xfrm>
-          <a:prstGeom prst="rect">
-            <a:avLst/>
-          </a:prstGeom>
-          <a:noFill/>
-          <a:ln/>
-        </p:spPr>
-        <p:txBody>
-          <a:bodyPr wrap="square" lIns="0" tIns="0" rIns="0" bIns="0" rtlCol="0" anchor="ctr"/>
-          <a:lstStyle/>
-          <a:p>
-            <a:pPr indent="0" marL="0">
-              <a:buNone/>
-            </a:pPr>
-            <a:r>
-              <a:rPr lang="en-US" sz="900" dirty="0">
-                <a:solidFill>
-                  <a:srgbClr val="5F7183"/>
-                </a:solidFill>
-                <a:latin typeface="Yu Gothic" pitchFamily="34" charset="0"/>
-                <a:ea typeface="Yu Gothic" pitchFamily="34" charset="-122"/>
-                <a:cs typeface="Yu Gothic" pitchFamily="34" charset="-120"/>
-              </a:rPr>
-              <a:t>第9時限｜基本教育4 事故の発生時における警察機関への連絡その他応急の措置  </a:t>
-            </a:r>
-            <a:pPr indent="0" marL="0">
-              <a:buNone/>
-            </a:pPr>
-            <a:r>
-              <a:rPr lang="en-US" sz="850" i="1" dirty="0">
-                <a:solidFill>
-                  <a:srgbClr val="D6E0E9"/>
-                </a:solidFill>
-                <a:latin typeface="Calibri" pitchFamily="34" charset="0"/>
-                <a:ea typeface="Calibri" pitchFamily="34" charset="-122"/>
-                <a:cs typeface="Calibri" pitchFamily="34" charset="-120"/>
-              </a:rPr>
-              <a:t>Period 9 | Basic Training 4 — Emergency Reporting and Scene Preservation</a:t>
-            </a:r>
-            <a:endParaRPr lang="en-US" sz="900" dirty="0"/>
-          </a:p>
         </p:txBody>
       </p:sp>
       <p:sp>
@@ -12913,7 +12913,7 @@
         </p:nvSpPr>
         <p:spPr>
           <a:xfrm>
-            <a:off x="10637215" y="6382512"/>
+            <a:off x="10637215" y="6492240"/>
             <a:ext cx="914400" cy="292608"/>
           </a:xfrm>
           <a:prstGeom prst="rect">
@@ -13008,8 +13008,8 @@
         </p:nvSpPr>
         <p:spPr>
           <a:xfrm>
-            <a:off x="640080" y="384048"/>
-            <a:ext cx="8982151" cy="768096"/>
+            <a:off x="640080" y="365760"/>
+            <a:ext cx="8982151" cy="749808"/>
           </a:xfrm>
           <a:prstGeom prst="rect">
             <a:avLst/>
@@ -13048,7 +13048,7 @@
               <a:buNone/>
             </a:pPr>
             <a:r>
-              <a:rPr lang="en-US" sz="1100" i="1" dirty="0">
+              <a:rPr lang="en-US" sz="1100" dirty="0">
                 <a:solidFill>
                   <a:srgbClr val="12B198"/>
                 </a:solidFill>
@@ -13070,7 +13070,7 @@
         </p:nvSpPr>
         <p:spPr>
           <a:xfrm>
-            <a:off x="9686239" y="438912"/>
+            <a:off x="9686239" y="420624"/>
             <a:ext cx="932688" cy="310896"/>
           </a:xfrm>
           <a:prstGeom prst="roundRect">
@@ -13092,7 +13092,7 @@
         </p:nvSpPr>
         <p:spPr>
           <a:xfrm>
-            <a:off x="9686239" y="438912"/>
+            <a:off x="9686239" y="420624"/>
             <a:ext cx="932688" cy="310896"/>
           </a:xfrm>
           <a:prstGeom prst="rect">
@@ -13131,12 +13131,12 @@
         </p:nvSpPr>
         <p:spPr>
           <a:xfrm>
-            <a:off x="640080" y="1188720"/>
-            <a:ext cx="10911535" cy="683514"/>
+            <a:off x="640080" y="1115568"/>
+            <a:ext cx="10911535" cy="715518"/>
           </a:xfrm>
           <a:prstGeom prst="roundRect">
             <a:avLst>
-              <a:gd name="adj" fmla="val 5351"/>
+              <a:gd name="adj" fmla="val 5112"/>
             </a:avLst>
           </a:prstGeom>
           <a:solidFill>
@@ -13153,7 +13153,7 @@
         </p:nvSpPr>
         <p:spPr>
           <a:xfrm>
-            <a:off x="841248" y="1356741"/>
+            <a:off x="841248" y="1299591"/>
             <a:ext cx="347472" cy="347472"/>
           </a:xfrm>
           <a:prstGeom prst="ellipse">
@@ -13173,7 +13173,7 @@
         </p:nvSpPr>
         <p:spPr>
           <a:xfrm>
-            <a:off x="841248" y="1356741"/>
+            <a:off x="841248" y="1299591"/>
             <a:ext cx="347472" cy="347472"/>
           </a:xfrm>
           <a:prstGeom prst="rect">
@@ -13212,8 +13212,8 @@
         </p:nvSpPr>
         <p:spPr>
           <a:xfrm>
-            <a:off x="1280160" y="1252728"/>
-            <a:ext cx="10033711" cy="555498"/>
+            <a:off x="1280160" y="1179576"/>
+            <a:ext cx="10033711" cy="587502"/>
           </a:xfrm>
           <a:prstGeom prst="rect">
             <a:avLst/>
@@ -13232,7 +13232,7 @@
               <a:buNone/>
             </a:pPr>
             <a:r>
-              <a:rPr lang="en-US" sz="900" dirty="0">
+              <a:rPr lang="en-US" sz="950" dirty="0">
                 <a:solidFill>
                   <a:srgbClr val="5F7183"/>
                 </a:solidFill>
@@ -13242,7 +13242,7 @@
               </a:rPr>
               <a:t>問1　最初の30秒に何をするか</a:t>
             </a:r>
-            <a:endParaRPr lang="en-US" sz="900" dirty="0"/>
+            <a:endParaRPr lang="en-US" sz="950" dirty="0"/>
           </a:p>
           <a:p>
             <a:pPr indent="0" marL="0">
@@ -13262,7 +13262,7 @@
               </a:rPr>
               <a:t>①周囲の安全 ②反応の確認 ③人を指名して119番と応援を依頼。「誰か」では動かない。</a:t>
             </a:r>
-            <a:endParaRPr lang="en-US" sz="900" dirty="0"/>
+            <a:endParaRPr lang="en-US" sz="950" dirty="0"/>
           </a:p>
           <a:p>
             <a:pPr indent="0" marL="0">
@@ -13272,9 +13272,9 @@
               <a:buNone/>
             </a:pPr>
             <a:r>
-              <a:rPr lang="en-US" sz="800" i="1" dirty="0">
-                <a:solidFill>
-                  <a:srgbClr val="5F7183"/>
+              <a:rPr lang="en-US" sz="1100" dirty="0">
+                <a:solidFill>
+                  <a:srgbClr val="1B2733"/>
                 </a:solidFill>
                 <a:latin typeface="Calibri" pitchFamily="34" charset="0"/>
                 <a:ea typeface="Calibri" pitchFamily="34" charset="-122"/>
@@ -13282,7 +13282,7 @@
               </a:rPr>
               <a:t>1) Make the area safe 2) check responsiveness 3) name a person to call and to fetch help. "Someone" does not move.</a:t>
             </a:r>
-            <a:endParaRPr lang="en-US" sz="900" dirty="0"/>
+            <a:endParaRPr lang="en-US" sz="950" dirty="0"/>
           </a:p>
         </p:txBody>
       </p:sp>
@@ -13294,12 +13294,12 @@
         </p:nvSpPr>
         <p:spPr>
           <a:xfrm>
-            <a:off x="640080" y="1972818"/>
-            <a:ext cx="10911535" cy="683514"/>
+            <a:off x="640080" y="1931670"/>
+            <a:ext cx="10911535" cy="715518"/>
           </a:xfrm>
           <a:prstGeom prst="roundRect">
             <a:avLst>
-              <a:gd name="adj" fmla="val 5351"/>
+              <a:gd name="adj" fmla="val 5112"/>
             </a:avLst>
           </a:prstGeom>
           <a:solidFill>
@@ -13316,7 +13316,7 @@
         </p:nvSpPr>
         <p:spPr>
           <a:xfrm>
-            <a:off x="841248" y="2140839"/>
+            <a:off x="841248" y="2115693"/>
             <a:ext cx="347472" cy="347472"/>
           </a:xfrm>
           <a:prstGeom prst="ellipse">
@@ -13336,7 +13336,7 @@
         </p:nvSpPr>
         <p:spPr>
           <a:xfrm>
-            <a:off x="841248" y="2140839"/>
+            <a:off x="841248" y="2115693"/>
             <a:ext cx="347472" cy="347472"/>
           </a:xfrm>
           <a:prstGeom prst="rect">
@@ -13375,8 +13375,8 @@
         </p:nvSpPr>
         <p:spPr>
           <a:xfrm>
-            <a:off x="1280160" y="2036826"/>
-            <a:ext cx="10033711" cy="555498"/>
+            <a:off x="1280160" y="1995678"/>
+            <a:ext cx="10033711" cy="587502"/>
           </a:xfrm>
           <a:prstGeom prst="rect">
             <a:avLst/>
@@ -13395,7 +13395,7 @@
               <a:buNone/>
             </a:pPr>
             <a:r>
-              <a:rPr lang="en-US" sz="900" dirty="0">
+              <a:rPr lang="en-US" sz="950" dirty="0">
                 <a:solidFill>
                   <a:srgbClr val="5F7183"/>
                 </a:solidFill>
@@ -13405,7 +13405,7 @@
               </a:rPr>
               <a:t>問2　110番か119番か</a:t>
             </a:r>
-            <a:endParaRPr lang="en-US" sz="900" dirty="0"/>
+            <a:endParaRPr lang="en-US" sz="950" dirty="0"/>
           </a:p>
           <a:p>
             <a:pPr indent="0" marL="0">
@@ -13425,7 +13425,7 @@
               </a:rPr>
               <a:t>まず119番。人命が先。事件性の判断は後からできるが、命は戻らない。</a:t>
             </a:r>
-            <a:endParaRPr lang="en-US" sz="900" dirty="0"/>
+            <a:endParaRPr lang="en-US" sz="950" dirty="0"/>
           </a:p>
           <a:p>
             <a:pPr indent="0" marL="0">
@@ -13435,9 +13435,9 @@
               <a:buNone/>
             </a:pPr>
             <a:r>
-              <a:rPr lang="en-US" sz="800" i="1" dirty="0">
-                <a:solidFill>
-                  <a:srgbClr val="5F7183"/>
+              <a:rPr lang="en-US" sz="1100" dirty="0">
+                <a:solidFill>
+                  <a:srgbClr val="1B2733"/>
                 </a:solidFill>
                 <a:latin typeface="Calibri" pitchFamily="34" charset="0"/>
                 <a:ea typeface="Calibri" pitchFamily="34" charset="-122"/>
@@ -13445,7 +13445,7 @@
               </a:rPr>
               <a:t>Ambulance first. Life comes first — the criminal question can wait, a life cannot.</a:t>
             </a:r>
-            <a:endParaRPr lang="en-US" sz="900" dirty="0"/>
+            <a:endParaRPr lang="en-US" sz="950" dirty="0"/>
           </a:p>
         </p:txBody>
       </p:sp>
@@ -13457,12 +13457,12 @@
         </p:nvSpPr>
         <p:spPr>
           <a:xfrm>
-            <a:off x="640080" y="2756916"/>
-            <a:ext cx="10911535" cy="683514"/>
+            <a:off x="640080" y="2747772"/>
+            <a:ext cx="10911535" cy="715518"/>
           </a:xfrm>
           <a:prstGeom prst="roundRect">
             <a:avLst>
-              <a:gd name="adj" fmla="val 5351"/>
+              <a:gd name="adj" fmla="val 5112"/>
             </a:avLst>
           </a:prstGeom>
           <a:solidFill>
@@ -13479,7 +13479,7 @@
         </p:nvSpPr>
         <p:spPr>
           <a:xfrm>
-            <a:off x="841248" y="2924937"/>
+            <a:off x="841248" y="2931795"/>
             <a:ext cx="347472" cy="347472"/>
           </a:xfrm>
           <a:prstGeom prst="ellipse">
@@ -13499,7 +13499,7 @@
         </p:nvSpPr>
         <p:spPr>
           <a:xfrm>
-            <a:off x="841248" y="2924937"/>
+            <a:off x="841248" y="2931795"/>
             <a:ext cx="347472" cy="347472"/>
           </a:xfrm>
           <a:prstGeom prst="rect">
@@ -13538,8 +13538,8 @@
         </p:nvSpPr>
         <p:spPr>
           <a:xfrm>
-            <a:off x="1280160" y="2820924"/>
-            <a:ext cx="10033711" cy="555498"/>
+            <a:off x="1280160" y="2811780"/>
+            <a:ext cx="10033711" cy="587502"/>
           </a:xfrm>
           <a:prstGeom prst="rect">
             <a:avLst/>
@@ -13558,7 +13558,7 @@
               <a:buNone/>
             </a:pPr>
             <a:r>
-              <a:rPr lang="en-US" sz="900" dirty="0">
+              <a:rPr lang="en-US" sz="950" dirty="0">
                 <a:solidFill>
                   <a:srgbClr val="5F7183"/>
                 </a:solidFill>
@@ -13568,7 +13568,7 @@
               </a:rPr>
               <a:t>問3　所持品を見てよいか</a:t>
             </a:r>
-            <a:endParaRPr lang="en-US" sz="900" dirty="0"/>
+            <a:endParaRPr lang="en-US" sz="950" dirty="0"/>
           </a:p>
           <a:p>
             <a:pPr indent="0" marL="0">
@@ -13588,7 +13588,7 @@
               </a:rPr>
               <a:t>単独では見ない。救急隊または警察の面前で行う。実施したら面前者・時刻・対象を記録。</a:t>
             </a:r>
-            <a:endParaRPr lang="en-US" sz="900" dirty="0"/>
+            <a:endParaRPr lang="en-US" sz="950" dirty="0"/>
           </a:p>
           <a:p>
             <a:pPr indent="0" marL="0">
@@ -13598,9 +13598,9 @@
               <a:buNone/>
             </a:pPr>
             <a:r>
-              <a:rPr lang="en-US" sz="800" i="1" dirty="0">
-                <a:solidFill>
-                  <a:srgbClr val="5F7183"/>
+              <a:rPr lang="en-US" sz="1100" dirty="0">
+                <a:solidFill>
+                  <a:srgbClr val="1B2733"/>
                 </a:solidFill>
                 <a:latin typeface="Calibri" pitchFamily="34" charset="0"/>
                 <a:ea typeface="Calibri" pitchFamily="34" charset="-122"/>
@@ -13608,7 +13608,7 @@
               </a:rPr>
               <a:t>Not alone. Do it in front of the ambulance crew or the police, and record who was present, when, and what.</a:t>
             </a:r>
-            <a:endParaRPr lang="en-US" sz="900" dirty="0"/>
+            <a:endParaRPr lang="en-US" sz="950" dirty="0"/>
           </a:p>
         </p:txBody>
       </p:sp>
@@ -13620,12 +13620,12 @@
         </p:nvSpPr>
         <p:spPr>
           <a:xfrm>
-            <a:off x="640080" y="3541014"/>
-            <a:ext cx="10911535" cy="683514"/>
+            <a:off x="640080" y="3563874"/>
+            <a:ext cx="10911535" cy="715518"/>
           </a:xfrm>
           <a:prstGeom prst="roundRect">
             <a:avLst>
-              <a:gd name="adj" fmla="val 5351"/>
+              <a:gd name="adj" fmla="val 5112"/>
             </a:avLst>
           </a:prstGeom>
           <a:solidFill>
@@ -13642,7 +13642,7 @@
         </p:nvSpPr>
         <p:spPr>
           <a:xfrm>
-            <a:off x="841248" y="3709035"/>
+            <a:off x="841248" y="3747897"/>
             <a:ext cx="347472" cy="347472"/>
           </a:xfrm>
           <a:prstGeom prst="ellipse">
@@ -13662,7 +13662,7 @@
         </p:nvSpPr>
         <p:spPr>
           <a:xfrm>
-            <a:off x="841248" y="3709035"/>
+            <a:off x="841248" y="3747897"/>
             <a:ext cx="347472" cy="347472"/>
           </a:xfrm>
           <a:prstGeom prst="rect">
@@ -13701,8 +13701,8 @@
         </p:nvSpPr>
         <p:spPr>
           <a:xfrm>
-            <a:off x="1280160" y="3605022"/>
-            <a:ext cx="10033711" cy="555498"/>
+            <a:off x="1280160" y="3627882"/>
+            <a:ext cx="10033711" cy="587502"/>
           </a:xfrm>
           <a:prstGeom prst="rect">
             <a:avLst/>
@@ -13721,7 +13721,7 @@
               <a:buNone/>
             </a:pPr>
             <a:r>
-              <a:rPr lang="en-US" sz="900" dirty="0">
+              <a:rPr lang="en-US" sz="950" dirty="0">
                 <a:solidFill>
                   <a:srgbClr val="5F7183"/>
                 </a:solidFill>
@@ -13731,7 +13731,7 @@
               </a:rPr>
               <a:t>問4　保存範囲と社内報告</a:t>
             </a:r>
-            <a:endParaRPr lang="en-US" sz="900" dirty="0"/>
+            <a:endParaRPr lang="en-US" sz="950" dirty="0"/>
           </a:p>
           <a:p>
             <a:pPr indent="0" marL="0">
@@ -13751,7 +13751,7 @@
               </a:rPr>
               <a:t>ガラスとキャビネットに触れない。範囲は広めに。警備責任者へ即時、人身事故のため三次まで想定。</a:t>
             </a:r>
-            <a:endParaRPr lang="en-US" sz="900" dirty="0"/>
+            <a:endParaRPr lang="en-US" sz="950" dirty="0"/>
           </a:p>
           <a:p>
             <a:pPr indent="0" marL="0">
@@ -13761,9 +13761,9 @@
               <a:buNone/>
             </a:pPr>
             <a:r>
-              <a:rPr lang="en-US" sz="800" i="1" dirty="0">
-                <a:solidFill>
-                  <a:srgbClr val="5F7183"/>
+              <a:rPr lang="en-US" sz="1100" dirty="0">
+                <a:solidFill>
+                  <a:srgbClr val="1B2733"/>
                 </a:solidFill>
                 <a:latin typeface="Calibri" pitchFamily="34" charset="0"/>
                 <a:ea typeface="Calibri" pitchFamily="34" charset="-122"/>
@@ -13771,7 +13771,7 @@
               </a:rPr>
               <a:t>Do not touch the glass or cabinet. Cordon wide. Supervisor immediately; with an injury, expect it to reach executives.</a:t>
             </a:r>
-            <a:endParaRPr lang="en-US" sz="900" dirty="0"/>
+            <a:endParaRPr lang="en-US" sz="950" dirty="0"/>
           </a:p>
         </p:txBody>
       </p:sp>
@@ -13783,7 +13783,7 @@
         </p:nvSpPr>
         <p:spPr>
           <a:xfrm>
-            <a:off x="640080" y="4334256"/>
+            <a:off x="640080" y="4389120"/>
             <a:ext cx="10911535" cy="420624"/>
           </a:xfrm>
           <a:prstGeom prst="roundRect">
@@ -13805,7 +13805,7 @@
         </p:nvSpPr>
         <p:spPr>
           <a:xfrm>
-            <a:off x="859536" y="4361688"/>
+            <a:off x="859536" y="4416552"/>
             <a:ext cx="10472623" cy="365760"/>
           </a:xfrm>
           <a:prstGeom prst="rect">
@@ -13879,9 +13879,9 @@
               <a:buNone/>
             </a:pPr>
             <a:r>
-              <a:rPr lang="en-US" sz="750" i="1" dirty="0">
-                <a:solidFill>
-                  <a:srgbClr val="5F7183"/>
+              <a:rPr lang="en-US" sz="950" dirty="0">
+                <a:solidFill>
+                  <a:srgbClr val="1B2733"/>
                 </a:solidFill>
                 <a:latin typeface="Calibri" pitchFamily="34" charset="0"/>
                 <a:ea typeface="Calibri" pitchFamily="34" charset="-122"/>
@@ -13901,7 +13901,7 @@
         </p:nvSpPr>
         <p:spPr>
           <a:xfrm>
-            <a:off x="640080" y="4828032"/>
+            <a:off x="640080" y="4882896"/>
             <a:ext cx="10911535" cy="420624"/>
           </a:xfrm>
           <a:prstGeom prst="roundRect">
@@ -13923,7 +13923,7 @@
         </p:nvSpPr>
         <p:spPr>
           <a:xfrm>
-            <a:off x="859536" y="4855464"/>
+            <a:off x="859536" y="4910328"/>
             <a:ext cx="10472623" cy="365760"/>
           </a:xfrm>
           <a:prstGeom prst="rect">
@@ -13997,9 +13997,9 @@
               <a:buNone/>
             </a:pPr>
             <a:r>
-              <a:rPr lang="en-US" sz="750" i="1" dirty="0">
-                <a:solidFill>
-                  <a:srgbClr val="5F7183"/>
+              <a:rPr lang="en-US" sz="950" dirty="0">
+                <a:solidFill>
+                  <a:srgbClr val="1B2733"/>
                 </a:solidFill>
                 <a:latin typeface="Calibri" pitchFamily="34" charset="0"/>
                 <a:ea typeface="Calibri" pitchFamily="34" charset="-122"/>
@@ -14019,7 +14019,7 @@
         </p:nvSpPr>
         <p:spPr>
           <a:xfrm>
-            <a:off x="640080" y="5358384"/>
+            <a:off x="640080" y="5413248"/>
             <a:ext cx="10911535" cy="457200"/>
           </a:xfrm>
           <a:prstGeom prst="roundRect">
@@ -14041,7 +14041,7 @@
         </p:nvSpPr>
         <p:spPr>
           <a:xfrm>
-            <a:off x="859536" y="5385816"/>
+            <a:off x="859536" y="5440680"/>
             <a:ext cx="10472623" cy="402336"/>
           </a:xfrm>
           <a:prstGeom prst="rect">
@@ -14098,9 +14098,9 @@
               <a:buNone/>
             </a:pPr>
             <a:r>
-              <a:rPr lang="en-US" sz="750" i="1" dirty="0">
-                <a:solidFill>
-                  <a:srgbClr val="9FD8CD"/>
+              <a:rPr lang="en-US" sz="950" dirty="0">
+                <a:solidFill>
+                  <a:srgbClr val="DCEFEB"/>
                 </a:solidFill>
                 <a:latin typeface="Calibri" pitchFamily="34" charset="0"/>
                 <a:ea typeface="Calibri" pitchFamily="34" charset="-122"/>
@@ -14120,8 +14120,8 @@
         </p:nvSpPr>
         <p:spPr>
           <a:xfrm>
-            <a:off x="640080" y="5907024"/>
-            <a:ext cx="10911535" cy="310896"/>
+            <a:off x="640080" y="5961888"/>
+            <a:ext cx="10911535" cy="292608"/>
           </a:xfrm>
           <a:prstGeom prst="rect">
             <a:avLst/>
@@ -14177,7 +14177,7 @@
               <a:buNone/>
             </a:pPr>
             <a:r>
-              <a:rPr lang="en-US" sz="750" i="1" dirty="0">
+              <a:rPr lang="en-US" sz="800" i="1" dirty="0">
                 <a:solidFill>
                   <a:srgbClr val="5F7183"/>
                 </a:solidFill>
@@ -14200,7 +14200,7 @@
         <p:spPr>
           <a:xfrm>
             <a:off x="640080" y="6272784"/>
-            <a:ext cx="9905695" cy="237744"/>
+            <a:ext cx="9905695" cy="219456"/>
           </a:xfrm>
           <a:prstGeom prst="rect">
             <a:avLst/>
@@ -14252,7 +14252,7 @@
         </p:nvSpPr>
         <p:spPr>
           <a:xfrm>
-            <a:off x="640080" y="6382512"/>
+            <a:off x="640080" y="6492240"/>
             <a:ext cx="8778240" cy="292608"/>
           </a:xfrm>
           <a:prstGeom prst="rect">
@@ -14305,7 +14305,7 @@
         </p:nvSpPr>
         <p:spPr>
           <a:xfrm>
-            <a:off x="10637215" y="6382512"/>
+            <a:off x="10637215" y="6492240"/>
             <a:ext cx="914400" cy="292608"/>
           </a:xfrm>
           <a:prstGeom prst="rect">
@@ -14400,8 +14400,8 @@
         </p:nvSpPr>
         <p:spPr>
           <a:xfrm>
-            <a:off x="640080" y="384048"/>
-            <a:ext cx="8982151" cy="768096"/>
+            <a:off x="640080" y="365760"/>
+            <a:ext cx="8982151" cy="749808"/>
           </a:xfrm>
           <a:prstGeom prst="rect">
             <a:avLst/>
@@ -14440,7 +14440,7 @@
               <a:buNone/>
             </a:pPr>
             <a:r>
-              <a:rPr lang="en-US" sz="1100" i="1" dirty="0">
+              <a:rPr lang="en-US" sz="1100" dirty="0">
                 <a:solidFill>
                   <a:srgbClr val="12B198"/>
                 </a:solidFill>
@@ -14462,7 +14462,7 @@
         </p:nvSpPr>
         <p:spPr>
           <a:xfrm>
-            <a:off x="9686239" y="438912"/>
+            <a:off x="9686239" y="420624"/>
             <a:ext cx="932688" cy="310896"/>
           </a:xfrm>
           <a:prstGeom prst="roundRect">
@@ -14484,7 +14484,7 @@
         </p:nvSpPr>
         <p:spPr>
           <a:xfrm>
-            <a:off x="9686239" y="438912"/>
+            <a:off x="9686239" y="420624"/>
             <a:ext cx="932688" cy="310896"/>
           </a:xfrm>
           <a:prstGeom prst="rect">
@@ -14523,7 +14523,7 @@
         </p:nvSpPr>
         <p:spPr>
           <a:xfrm>
-            <a:off x="640080" y="1188720"/>
+            <a:off x="640080" y="1115568"/>
             <a:ext cx="10911535" cy="1124712"/>
           </a:xfrm>
           <a:prstGeom prst="roundRect">
@@ -14545,7 +14545,7 @@
         </p:nvSpPr>
         <p:spPr>
           <a:xfrm>
-            <a:off x="950976" y="1316736"/>
+            <a:off x="950976" y="1243584"/>
             <a:ext cx="10289743" cy="868680"/>
           </a:xfrm>
           <a:prstGeom prst="rect">
@@ -14622,9 +14622,9 @@
               <a:buNone/>
             </a:pPr>
             <a:r>
-              <a:rPr lang="en-US" sz="800" i="1" dirty="0">
-                <a:solidFill>
-                  <a:srgbClr val="9FD8CD"/>
+              <a:rPr lang="en-US" sz="1000" dirty="0">
+                <a:solidFill>
+                  <a:srgbClr val="DCEFEB"/>
                 </a:solidFill>
                 <a:latin typeface="Calibri" pitchFamily="34" charset="0"/>
                 <a:ea typeface="Calibri" pitchFamily="34" charset="-122"/>
@@ -14644,7 +14644,7 @@
         </p:nvSpPr>
         <p:spPr>
           <a:xfrm>
-            <a:off x="640080" y="2459736"/>
+            <a:off x="640080" y="2386584"/>
             <a:ext cx="10911535" cy="566928"/>
           </a:xfrm>
           <a:prstGeom prst="rect">
@@ -14701,9 +14701,9 @@
               <a:buNone/>
             </a:pPr>
             <a:r>
-              <a:rPr lang="en-US" sz="850" i="1" dirty="0">
-                <a:solidFill>
-                  <a:srgbClr val="5F7183"/>
+              <a:rPr lang="en-US" sz="1050" dirty="0">
+                <a:solidFill>
+                  <a:srgbClr val="1B2733"/>
                 </a:solidFill>
                 <a:latin typeface="Calibri" pitchFamily="34" charset="0"/>
                 <a:ea typeface="Calibri" pitchFamily="34" charset="-122"/>
@@ -14723,12 +14723,12 @@
         </p:nvSpPr>
         <p:spPr>
           <a:xfrm>
-            <a:off x="640080" y="3081528"/>
-            <a:ext cx="5327752" cy="836676"/>
+            <a:off x="640080" y="3008376"/>
+            <a:ext cx="5327752" cy="900684"/>
           </a:xfrm>
           <a:prstGeom prst="roundRect">
             <a:avLst>
-              <a:gd name="adj" fmla="val 4372"/>
+              <a:gd name="adj" fmla="val 4061"/>
             </a:avLst>
           </a:prstGeom>
           <a:solidFill>
@@ -14745,7 +14745,7 @@
         </p:nvSpPr>
         <p:spPr>
           <a:xfrm>
-            <a:off x="804672" y="3353562"/>
+            <a:off x="804672" y="3312414"/>
             <a:ext cx="292608" cy="292608"/>
           </a:xfrm>
           <a:prstGeom prst="ellipse">
@@ -14765,7 +14765,7 @@
         </p:nvSpPr>
         <p:spPr>
           <a:xfrm>
-            <a:off x="804672" y="3353562"/>
+            <a:off x="804672" y="3312414"/>
             <a:ext cx="292608" cy="292608"/>
           </a:xfrm>
           <a:prstGeom prst="rect">
@@ -14804,8 +14804,8 @@
         </p:nvSpPr>
         <p:spPr>
           <a:xfrm>
-            <a:off x="1188720" y="3136392"/>
-            <a:ext cx="4596232" cy="726948"/>
+            <a:off x="1188720" y="3063240"/>
+            <a:ext cx="4596232" cy="790956"/>
           </a:xfrm>
           <a:prstGeom prst="rect">
             <a:avLst/>
@@ -14844,9 +14844,9 @@
               <a:buNone/>
             </a:pPr>
             <a:r>
-              <a:rPr lang="en-US" sz="800" i="1" dirty="0">
-                <a:solidFill>
-                  <a:srgbClr val="5F7183"/>
+              <a:rPr lang="en-US" sz="1050" dirty="0">
+                <a:solidFill>
+                  <a:srgbClr val="1B2733"/>
                 </a:solidFill>
                 <a:latin typeface="Calibri" pitchFamily="34" charset="0"/>
                 <a:ea typeface="Calibri" pitchFamily="34" charset="-122"/>
@@ -14866,12 +14866,12 @@
         </p:nvSpPr>
         <p:spPr>
           <a:xfrm>
-            <a:off x="6223864" y="3081528"/>
-            <a:ext cx="5327752" cy="836676"/>
+            <a:off x="6223864" y="3008376"/>
+            <a:ext cx="5327752" cy="900684"/>
           </a:xfrm>
           <a:prstGeom prst="roundRect">
             <a:avLst>
-              <a:gd name="adj" fmla="val 4372"/>
+              <a:gd name="adj" fmla="val 4061"/>
             </a:avLst>
           </a:prstGeom>
           <a:solidFill>
@@ -14888,7 +14888,7 @@
         </p:nvSpPr>
         <p:spPr>
           <a:xfrm>
-            <a:off x="6388456" y="3353562"/>
+            <a:off x="6388456" y="3312414"/>
             <a:ext cx="292608" cy="292608"/>
           </a:xfrm>
           <a:prstGeom prst="ellipse">
@@ -14908,7 +14908,7 @@
         </p:nvSpPr>
         <p:spPr>
           <a:xfrm>
-            <a:off x="6388456" y="3353562"/>
+            <a:off x="6388456" y="3312414"/>
             <a:ext cx="292608" cy="292608"/>
           </a:xfrm>
           <a:prstGeom prst="rect">
@@ -14947,8 +14947,8 @@
         </p:nvSpPr>
         <p:spPr>
           <a:xfrm>
-            <a:off x="6772504" y="3136392"/>
-            <a:ext cx="4596232" cy="726948"/>
+            <a:off x="6772504" y="3063240"/>
+            <a:ext cx="4596232" cy="790956"/>
           </a:xfrm>
           <a:prstGeom prst="rect">
             <a:avLst/>
@@ -14987,9 +14987,9 @@
               <a:buNone/>
             </a:pPr>
             <a:r>
-              <a:rPr lang="en-US" sz="800" i="1" dirty="0">
-                <a:solidFill>
-                  <a:srgbClr val="5F7183"/>
+              <a:rPr lang="en-US" sz="1050" dirty="0">
+                <a:solidFill>
+                  <a:srgbClr val="1B2733"/>
                 </a:solidFill>
                 <a:latin typeface="Calibri" pitchFamily="34" charset="0"/>
                 <a:ea typeface="Calibri" pitchFamily="34" charset="-122"/>
@@ -15009,12 +15009,12 @@
         </p:nvSpPr>
         <p:spPr>
           <a:xfrm>
-            <a:off x="640080" y="4027932"/>
-            <a:ext cx="5327752" cy="836676"/>
+            <a:off x="640080" y="4018788"/>
+            <a:ext cx="5327752" cy="900684"/>
           </a:xfrm>
           <a:prstGeom prst="roundRect">
             <a:avLst>
-              <a:gd name="adj" fmla="val 4372"/>
+              <a:gd name="adj" fmla="val 4061"/>
             </a:avLst>
           </a:prstGeom>
           <a:solidFill>
@@ -15031,7 +15031,7 @@
         </p:nvSpPr>
         <p:spPr>
           <a:xfrm>
-            <a:off x="804672" y="4299966"/>
+            <a:off x="804672" y="4322826"/>
             <a:ext cx="292608" cy="292608"/>
           </a:xfrm>
           <a:prstGeom prst="ellipse">
@@ -15051,7 +15051,7 @@
         </p:nvSpPr>
         <p:spPr>
           <a:xfrm>
-            <a:off x="804672" y="4299966"/>
+            <a:off x="804672" y="4322826"/>
             <a:ext cx="292608" cy="292608"/>
           </a:xfrm>
           <a:prstGeom prst="rect">
@@ -15090,8 +15090,8 @@
         </p:nvSpPr>
         <p:spPr>
           <a:xfrm>
-            <a:off x="1188720" y="4082796"/>
-            <a:ext cx="4596232" cy="726948"/>
+            <a:off x="1188720" y="4073652"/>
+            <a:ext cx="4596232" cy="790956"/>
           </a:xfrm>
           <a:prstGeom prst="rect">
             <a:avLst/>
@@ -15130,9 +15130,9 @@
               <a:buNone/>
             </a:pPr>
             <a:r>
-              <a:rPr lang="en-US" sz="800" i="1" dirty="0">
-                <a:solidFill>
-                  <a:srgbClr val="5F7183"/>
+              <a:rPr lang="en-US" sz="1050" dirty="0">
+                <a:solidFill>
+                  <a:srgbClr val="1B2733"/>
                 </a:solidFill>
                 <a:latin typeface="Calibri" pitchFamily="34" charset="0"/>
                 <a:ea typeface="Calibri" pitchFamily="34" charset="-122"/>
@@ -15152,12 +15152,12 @@
         </p:nvSpPr>
         <p:spPr>
           <a:xfrm>
-            <a:off x="6223864" y="4027932"/>
-            <a:ext cx="5327752" cy="836676"/>
+            <a:off x="6223864" y="4018788"/>
+            <a:ext cx="5327752" cy="900684"/>
           </a:xfrm>
           <a:prstGeom prst="roundRect">
             <a:avLst>
-              <a:gd name="adj" fmla="val 4372"/>
+              <a:gd name="adj" fmla="val 4061"/>
             </a:avLst>
           </a:prstGeom>
           <a:solidFill>
@@ -15174,7 +15174,7 @@
         </p:nvSpPr>
         <p:spPr>
           <a:xfrm>
-            <a:off x="6388456" y="4299966"/>
+            <a:off x="6388456" y="4322826"/>
             <a:ext cx="292608" cy="292608"/>
           </a:xfrm>
           <a:prstGeom prst="ellipse">
@@ -15194,7 +15194,7 @@
         </p:nvSpPr>
         <p:spPr>
           <a:xfrm>
-            <a:off x="6388456" y="4299966"/>
+            <a:off x="6388456" y="4322826"/>
             <a:ext cx="292608" cy="292608"/>
           </a:xfrm>
           <a:prstGeom prst="rect">
@@ -15233,8 +15233,8 @@
         </p:nvSpPr>
         <p:spPr>
           <a:xfrm>
-            <a:off x="6772504" y="4082796"/>
-            <a:ext cx="4596232" cy="726948"/>
+            <a:off x="6772504" y="4073652"/>
+            <a:ext cx="4596232" cy="790956"/>
           </a:xfrm>
           <a:prstGeom prst="rect">
             <a:avLst/>
@@ -15273,9 +15273,9 @@
               <a:buNone/>
             </a:pPr>
             <a:r>
-              <a:rPr lang="en-US" sz="800" i="1" dirty="0">
-                <a:solidFill>
-                  <a:srgbClr val="5F7183"/>
+              <a:rPr lang="en-US" sz="1050" dirty="0">
+                <a:solidFill>
+                  <a:srgbClr val="1B2733"/>
                 </a:solidFill>
                 <a:latin typeface="Calibri" pitchFamily="34" charset="0"/>
                 <a:ea typeface="Calibri" pitchFamily="34" charset="-122"/>
@@ -15295,7 +15295,7 @@
         </p:nvSpPr>
         <p:spPr>
           <a:xfrm>
-            <a:off x="640080" y="4919472"/>
+            <a:off x="640080" y="4974336"/>
             <a:ext cx="10911535" cy="420624"/>
           </a:xfrm>
           <a:prstGeom prst="roundRect">
@@ -15317,7 +15317,7 @@
         </p:nvSpPr>
         <p:spPr>
           <a:xfrm>
-            <a:off x="877824" y="4946904"/>
+            <a:off x="877824" y="5001768"/>
             <a:ext cx="10436047" cy="365760"/>
           </a:xfrm>
           <a:prstGeom prst="rect">
@@ -15374,9 +15374,9 @@
               <a:buNone/>
             </a:pPr>
             <a:r>
-              <a:rPr lang="en-US" sz="750" i="1" dirty="0">
-                <a:solidFill>
-                  <a:srgbClr val="5F7183"/>
+              <a:rPr lang="en-US" sz="950" dirty="0">
+                <a:solidFill>
+                  <a:srgbClr val="1B2733"/>
                 </a:solidFill>
                 <a:latin typeface="Calibri" pitchFamily="34" charset="0"/>
                 <a:ea typeface="Calibri" pitchFamily="34" charset="-122"/>
@@ -15396,7 +15396,7 @@
         </p:nvSpPr>
         <p:spPr>
           <a:xfrm>
-            <a:off x="640080" y="5394960"/>
+            <a:off x="640080" y="5449824"/>
             <a:ext cx="10911535" cy="420624"/>
           </a:xfrm>
           <a:prstGeom prst="roundRect">
@@ -15418,7 +15418,7 @@
         </p:nvSpPr>
         <p:spPr>
           <a:xfrm>
-            <a:off x="877824" y="5422392"/>
+            <a:off x="877824" y="5477256"/>
             <a:ext cx="10436047" cy="365760"/>
           </a:xfrm>
           <a:prstGeom prst="rect">
@@ -15475,7 +15475,86 @@
               <a:buNone/>
             </a:pPr>
             <a:r>
-              <a:rPr lang="en-US" sz="750" i="1" dirty="0">
+              <a:rPr lang="en-US" sz="950" dirty="0">
+                <a:solidFill>
+                  <a:srgbClr val="1B2733"/>
+                </a:solidFill>
+                <a:latin typeface="Calibri" pitchFamily="34" charset="0"/>
+                <a:ea typeface="Calibri" pitchFamily="34" charset="-122"/>
+                <a:cs typeface="Calibri" pitchFamily="34" charset="-120"/>
+              </a:rPr>
+              <a:t>The alarm activates — a different zone on the same fifth floor.</a:t>
+            </a:r>
+            <a:endParaRPr lang="en-US" sz="850" dirty="0"/>
+          </a:p>
+        </p:txBody>
+      </p:sp>
+      <p:sp>
+        <p:nvSpPr>
+          <p:cNvPr id="29" name="Text 26"/>
+          <p:cNvSpPr/>
+          <p:nvPr/>
+        </p:nvSpPr>
+        <p:spPr>
+          <a:xfrm>
+            <a:off x="640080" y="5961888"/>
+            <a:ext cx="10911535" cy="292608"/>
+          </a:xfrm>
+          <a:prstGeom prst="rect">
+            <a:avLst/>
+          </a:prstGeom>
+          <a:noFill/>
+          <a:ln/>
+        </p:spPr>
+        <p:txBody>
+          <a:bodyPr wrap="square" lIns="0" tIns="0" rIns="0" bIns="0" rtlCol="0" anchor="t"/>
+          <a:lstStyle/>
+          <a:p>
+            <a:pPr indent="0" marL="0">
+              <a:lnSpc>
+                <a:spcPct val="88000"/>
+              </a:lnSpc>
+              <a:buNone/>
+            </a:pPr>
+            <a:r>
+              <a:rPr lang="en-US" sz="900" b="1" dirty="0">
+                <a:solidFill>
+                  <a:srgbClr val="0D8A76"/>
+                </a:solidFill>
+                <a:latin typeface="Yu Gothic" pitchFamily="34" charset="0"/>
+                <a:ea typeface="Yu Gothic" pitchFamily="34" charset="-122"/>
+                <a:cs typeface="Yu Gothic" pitchFamily="34" charset="-120"/>
+              </a:rPr>
+              <a:t>Site SOP優先　</a:t>
+            </a:r>
+            <a:pPr indent="0" marL="0">
+              <a:lnSpc>
+                <a:spcPct val="88000"/>
+              </a:lnSpc>
+              <a:buNone/>
+            </a:pPr>
+            <a:r>
+              <a:rPr lang="en-US" sz="900" dirty="0">
+                <a:solidFill>
+                  <a:srgbClr val="1B2733"/>
+                </a:solidFill>
+                <a:latin typeface="Yu Gothic" pitchFamily="34" charset="0"/>
+                <a:ea typeface="Yu Gothic" pitchFamily="34" charset="-122"/>
+                <a:cs typeface="Yu Gothic" pitchFamily="34" charset="-120"/>
+              </a:rPr>
+              <a:t>初期消火の実施可否、自衛消防組織での役割、通報の判断者は現場ごとに定められている。Site SOPによる。</a:t>
+            </a:r>
+            <a:endParaRPr lang="en-US" sz="900" dirty="0"/>
+          </a:p>
+          <a:p>
+            <a:pPr indent="0" marL="0">
+              <a:lnSpc>
+                <a:spcPct val="88000"/>
+              </a:lnSpc>
+              <a:buNone/>
+            </a:pPr>
+            <a:r>
+              <a:rPr lang="en-US" sz="800" i="1" dirty="0">
                 <a:solidFill>
                   <a:srgbClr val="5F7183"/>
                 </a:solidFill>
@@ -15483,22 +15562,22 @@
                 <a:ea typeface="Calibri" pitchFamily="34" charset="-122"/>
                 <a:cs typeface="Calibri" pitchFamily="34" charset="-120"/>
               </a:rPr>
-              <a:t>The alarm activates — a different zone on the same fifth floor.</a:t>
-            </a:r>
-            <a:endParaRPr lang="en-US" sz="850" dirty="0"/>
-          </a:p>
-        </p:txBody>
-      </p:sp>
-      <p:sp>
-        <p:nvSpPr>
-          <p:cNvPr id="29" name="Text 26"/>
-          <p:cNvSpPr/>
-          <p:nvPr/>
-        </p:nvSpPr>
-        <p:spPr>
-          <a:xfrm>
-            <a:off x="640080" y="5907024"/>
-            <a:ext cx="10911535" cy="310896"/>
+              <a:t>Whether guards perform initial firefighting, their role in the fire brigade, and who decides on the call are set per site.</a:t>
+            </a:r>
+            <a:endParaRPr lang="en-US" sz="900" dirty="0"/>
+          </a:p>
+        </p:txBody>
+      </p:sp>
+      <p:sp>
+        <p:nvSpPr>
+          <p:cNvPr id="30" name="Text 27"/>
+          <p:cNvSpPr/>
+          <p:nvPr/>
+        </p:nvSpPr>
+        <p:spPr>
+          <a:xfrm>
+            <a:off x="640080" y="6272784"/>
+            <a:ext cx="9905695" cy="219456"/>
           </a:xfrm>
           <a:prstGeom prst="rect">
             <a:avLst/>
@@ -15511,167 +15590,88 @@
           <a:lstStyle/>
           <a:p>
             <a:pPr indent="0" marL="0">
-              <a:lnSpc>
-                <a:spcPct val="88000"/>
-              </a:lnSpc>
-              <a:buNone/>
-            </a:pPr>
-            <a:r>
-              <a:rPr lang="en-US" sz="900" b="1" dirty="0">
-                <a:solidFill>
-                  <a:srgbClr val="0D8A76"/>
-                </a:solidFill>
-                <a:latin typeface="Yu Gothic" pitchFamily="34" charset="0"/>
-                <a:ea typeface="Yu Gothic" pitchFamily="34" charset="-122"/>
-                <a:cs typeface="Yu Gothic" pitchFamily="34" charset="-120"/>
-              </a:rPr>
-              <a:t>Site SOP優先　</a:t>
-            </a:r>
-            <a:pPr indent="0" marL="0">
-              <a:lnSpc>
-                <a:spcPct val="88000"/>
-              </a:lnSpc>
+              <a:buNone/>
+            </a:pPr>
+            <a:r>
+              <a:rPr lang="en-US" sz="750" b="1" dirty="0">
+                <a:solidFill>
+                  <a:srgbClr val="D6E0E9"/>
+                </a:solidFill>
+                <a:latin typeface="Yu Gothic" pitchFamily="34" charset="0"/>
+                <a:ea typeface="Yu Gothic" pitchFamily="34" charset="-122"/>
+                <a:cs typeface="Yu Gothic" pitchFamily="34" charset="-120"/>
+              </a:rPr>
+              <a:t>ソース　</a:t>
+            </a:r>
+            <a:pPr indent="0" marL="0">
+              <a:buNone/>
+            </a:pPr>
+            <a:r>
+              <a:rPr lang="en-US" sz="750" dirty="0">
+                <a:solidFill>
+                  <a:srgbClr val="5F7183"/>
+                </a:solidFill>
+                <a:latin typeface="Yu Gothic" pitchFamily="34" charset="0"/>
+                <a:ea typeface="Yu Gothic" pitchFamily="34" charset="-122"/>
+                <a:cs typeface="Yu Gothic" pitchFamily="34" charset="-120"/>
+              </a:rPr>
+              <a:t>消防法、警察庁「警備員教育」、総務省消防庁「救急車の適正利用」</a:t>
+            </a:r>
+            <a:endParaRPr lang="en-US" sz="750" dirty="0"/>
+          </a:p>
+        </p:txBody>
+      </p:sp>
+      <p:sp>
+        <p:nvSpPr>
+          <p:cNvPr id="31" name="Text 28"/>
+          <p:cNvSpPr/>
+          <p:nvPr/>
+        </p:nvSpPr>
+        <p:spPr>
+          <a:xfrm>
+            <a:off x="640080" y="6492240"/>
+            <a:ext cx="8778240" cy="292608"/>
+          </a:xfrm>
+          <a:prstGeom prst="rect">
+            <a:avLst/>
+          </a:prstGeom>
+          <a:noFill/>
+          <a:ln/>
+        </p:spPr>
+        <p:txBody>
+          <a:bodyPr wrap="square" lIns="0" tIns="0" rIns="0" bIns="0" rtlCol="0" anchor="ctr"/>
+          <a:lstStyle/>
+          <a:p>
+            <a:pPr indent="0" marL="0">
               <a:buNone/>
             </a:pPr>
             <a:r>
               <a:rPr lang="en-US" sz="900" dirty="0">
                 <a:solidFill>
-                  <a:srgbClr val="1B2733"/>
-                </a:solidFill>
-                <a:latin typeface="Yu Gothic" pitchFamily="34" charset="0"/>
-                <a:ea typeface="Yu Gothic" pitchFamily="34" charset="-122"/>
-                <a:cs typeface="Yu Gothic" pitchFamily="34" charset="-120"/>
-              </a:rPr>
-              <a:t>初期消火の実施可否、自衛消防組織での役割、通報の判断者は現場ごとに定められている。Site SOPによる。</a:t>
+                  <a:srgbClr val="5F7183"/>
+                </a:solidFill>
+                <a:latin typeface="Yu Gothic" pitchFamily="34" charset="0"/>
+                <a:ea typeface="Yu Gothic" pitchFamily="34" charset="-122"/>
+                <a:cs typeface="Yu Gothic" pitchFamily="34" charset="-120"/>
+              </a:rPr>
+              <a:t>第9時限｜基本教育4 事故の発生時における警察機関への連絡その他応急の措置  </a:t>
+            </a:r>
+            <a:pPr indent="0" marL="0">
+              <a:buNone/>
+            </a:pPr>
+            <a:r>
+              <a:rPr lang="en-US" sz="850" i="1" dirty="0">
+                <a:solidFill>
+                  <a:srgbClr val="D6E0E9"/>
+                </a:solidFill>
+                <a:latin typeface="Calibri" pitchFamily="34" charset="0"/>
+                <a:ea typeface="Calibri" pitchFamily="34" charset="-122"/>
+                <a:cs typeface="Calibri" pitchFamily="34" charset="-120"/>
+              </a:rPr>
+              <a:t>Period 9 | Basic Training 4 — Emergency Reporting and Scene Preservation</a:t>
             </a:r>
             <a:endParaRPr lang="en-US" sz="900" dirty="0"/>
           </a:p>
-          <a:p>
-            <a:pPr indent="0" marL="0">
-              <a:lnSpc>
-                <a:spcPct val="88000"/>
-              </a:lnSpc>
-              <a:buNone/>
-            </a:pPr>
-            <a:r>
-              <a:rPr lang="en-US" sz="750" i="1" dirty="0">
-                <a:solidFill>
-                  <a:srgbClr val="5F7183"/>
-                </a:solidFill>
-                <a:latin typeface="Calibri" pitchFamily="34" charset="0"/>
-                <a:ea typeface="Calibri" pitchFamily="34" charset="-122"/>
-                <a:cs typeface="Calibri" pitchFamily="34" charset="-120"/>
-              </a:rPr>
-              <a:t>Whether guards perform initial firefighting, their role in the fire brigade, and who decides on the call are set per site.</a:t>
-            </a:r>
-            <a:endParaRPr lang="en-US" sz="900" dirty="0"/>
-          </a:p>
-        </p:txBody>
-      </p:sp>
-      <p:sp>
-        <p:nvSpPr>
-          <p:cNvPr id="30" name="Text 27"/>
-          <p:cNvSpPr/>
-          <p:nvPr/>
-        </p:nvSpPr>
-        <p:spPr>
-          <a:xfrm>
-            <a:off x="640080" y="6272784"/>
-            <a:ext cx="9905695" cy="237744"/>
-          </a:xfrm>
-          <a:prstGeom prst="rect">
-            <a:avLst/>
-          </a:prstGeom>
-          <a:noFill/>
-          <a:ln/>
-        </p:spPr>
-        <p:txBody>
-          <a:bodyPr wrap="square" lIns="0" tIns="0" rIns="0" bIns="0" rtlCol="0" anchor="t"/>
-          <a:lstStyle/>
-          <a:p>
-            <a:pPr indent="0" marL="0">
-              <a:buNone/>
-            </a:pPr>
-            <a:r>
-              <a:rPr lang="en-US" sz="750" b="1" dirty="0">
-                <a:solidFill>
-                  <a:srgbClr val="D6E0E9"/>
-                </a:solidFill>
-                <a:latin typeface="Yu Gothic" pitchFamily="34" charset="0"/>
-                <a:ea typeface="Yu Gothic" pitchFamily="34" charset="-122"/>
-                <a:cs typeface="Yu Gothic" pitchFamily="34" charset="-120"/>
-              </a:rPr>
-              <a:t>ソース　</a:t>
-            </a:r>
-            <a:pPr indent="0" marL="0">
-              <a:buNone/>
-            </a:pPr>
-            <a:r>
-              <a:rPr lang="en-US" sz="750" dirty="0">
-                <a:solidFill>
-                  <a:srgbClr val="5F7183"/>
-                </a:solidFill>
-                <a:latin typeface="Yu Gothic" pitchFamily="34" charset="0"/>
-                <a:ea typeface="Yu Gothic" pitchFamily="34" charset="-122"/>
-                <a:cs typeface="Yu Gothic" pitchFamily="34" charset="-120"/>
-              </a:rPr>
-              <a:t>消防法、警察庁「警備員教育」、総務省消防庁「救急車の適正利用」</a:t>
-            </a:r>
-            <a:endParaRPr lang="en-US" sz="750" dirty="0"/>
-          </a:p>
-        </p:txBody>
-      </p:sp>
-      <p:sp>
-        <p:nvSpPr>
-          <p:cNvPr id="31" name="Text 28"/>
-          <p:cNvSpPr/>
-          <p:nvPr/>
-        </p:nvSpPr>
-        <p:spPr>
-          <a:xfrm>
-            <a:off x="640080" y="6382512"/>
-            <a:ext cx="8778240" cy="292608"/>
-          </a:xfrm>
-          <a:prstGeom prst="rect">
-            <a:avLst/>
-          </a:prstGeom>
-          <a:noFill/>
-          <a:ln/>
-        </p:spPr>
-        <p:txBody>
-          <a:bodyPr wrap="square" lIns="0" tIns="0" rIns="0" bIns="0" rtlCol="0" anchor="ctr"/>
-          <a:lstStyle/>
-          <a:p>
-            <a:pPr indent="0" marL="0">
-              <a:buNone/>
-            </a:pPr>
-            <a:r>
-              <a:rPr lang="en-US" sz="900" dirty="0">
-                <a:solidFill>
-                  <a:srgbClr val="5F7183"/>
-                </a:solidFill>
-                <a:latin typeface="Yu Gothic" pitchFamily="34" charset="0"/>
-                <a:ea typeface="Yu Gothic" pitchFamily="34" charset="-122"/>
-                <a:cs typeface="Yu Gothic" pitchFamily="34" charset="-120"/>
-              </a:rPr>
-              <a:t>第9時限｜基本教育4 事故の発生時における警察機関への連絡その他応急の措置  </a:t>
-            </a:r>
-            <a:pPr indent="0" marL="0">
-              <a:buNone/>
-            </a:pPr>
-            <a:r>
-              <a:rPr lang="en-US" sz="850" i="1" dirty="0">
-                <a:solidFill>
-                  <a:srgbClr val="D6E0E9"/>
-                </a:solidFill>
-                <a:latin typeface="Calibri" pitchFamily="34" charset="0"/>
-                <a:ea typeface="Calibri" pitchFamily="34" charset="-122"/>
-                <a:cs typeface="Calibri" pitchFamily="34" charset="-120"/>
-              </a:rPr>
-              <a:t>Period 9 | Basic Training 4 — Emergency Reporting and Scene Preservation</a:t>
-            </a:r>
-            <a:endParaRPr lang="en-US" sz="900" dirty="0"/>
-          </a:p>
         </p:txBody>
       </p:sp>
       <p:sp>
@@ -15682,7 +15682,7 @@
         </p:nvSpPr>
         <p:spPr>
           <a:xfrm>
-            <a:off x="10637215" y="6382512"/>
+            <a:off x="10637215" y="6492240"/>
             <a:ext cx="914400" cy="292608"/>
           </a:xfrm>
           <a:prstGeom prst="rect">
